--- a/Docs/QA/물고기게임_QA리포트.pptx
+++ b/Docs/QA/물고기게임_QA리포트.pptx
@@ -26,9 +26,13 @@
     <p:sldId id="274" r:id="rId20"/>
     <p:sldId id="275" r:id="rId21"/>
     <p:sldId id="276" r:id="rId22"/>
+    <p:sldId id="277" r:id="rId23"/>
+    <p:sldId id="278" r:id="rId24"/>
+    <p:sldId id="279" r:id="rId25"/>
+    <p:sldId id="280" r:id="rId26"/>
   </p:sldIdLst>
   <p:notesMasterIdLst>
-    <p:notesMasterId r:id="rId23"/>
+    <p:notesMasterId r:id="rId27"/>
   </p:notesMasterIdLst>
   <p:sldSz cx="12191695" cy="6858000"/>
   <p:notesSz cx="6858000" cy="12191695"/>
@@ -187,9 +191,9 @@
           </c:dLbls>
           <c:cat>
             <c:multiLvlStrRef>
-              <c:f>Sheet1!$A$2:$A$7</c:f>
+              <c:f>Sheet1!$A$2:$A$9</c:f>
               <c:multiLvlStrCache>
-                <c:ptCount val="6"/>
+                <c:ptCount val="8"/>
                 <c:lvl>
                   <c:pt idx="0">
                     <c:v>R1</c:v>
@@ -209,16 +213,22 @@
                   <c:pt idx="5">
                     <c:v>R6</c:v>
                   </c:pt>
+                  <c:pt idx="6">
+                    <c:v>R7</c:v>
+                  </c:pt>
+                  <c:pt idx="7">
+                    <c:v>R8</c:v>
+                  </c:pt>
                 </c:lvl>
               </c:multiLvlStrCache>
             </c:multiLvlStrRef>
           </c:cat>
           <c:val>
             <c:numRef>
-              <c:f>Sheet1!$B$2:$B$7</c:f>
+              <c:f>Sheet1!$B$2:$B$9</c:f>
               <c:numCache>
                 <c:formatCode>General</c:formatCode>
-                <c:ptCount val="6"/>
+                <c:ptCount val="8"/>
                 <c:pt idx="0">
                   <c:v>2</c:v>
                 </c:pt>
@@ -236,6 +246,12 @@
                 </c:pt>
                 <c:pt idx="5">
                   <c:v>1</c:v>
+                </c:pt>
+                <c:pt idx="6">
+                  <c:v>1</c:v>
+                </c:pt>
+                <c:pt idx="7">
+                  <c:v>0</c:v>
                 </c:pt>
               </c:numCache>
             </c:numRef>
@@ -289,9 +305,9 @@
           </c:dLbls>
           <c:cat>
             <c:multiLvlStrRef>
-              <c:f>Sheet1!$A$2:$A$7</c:f>
+              <c:f>Sheet1!$A$2:$A$9</c:f>
               <c:multiLvlStrCache>
-                <c:ptCount val="6"/>
+                <c:ptCount val="8"/>
                 <c:lvl>
                   <c:pt idx="0">
                     <c:v>R1</c:v>
@@ -311,16 +327,22 @@
                   <c:pt idx="5">
                     <c:v>R6</c:v>
                   </c:pt>
+                  <c:pt idx="6">
+                    <c:v>R7</c:v>
+                  </c:pt>
+                  <c:pt idx="7">
+                    <c:v>R8</c:v>
+                  </c:pt>
                 </c:lvl>
               </c:multiLvlStrCache>
             </c:multiLvlStrRef>
           </c:cat>
           <c:val>
             <c:numRef>
-              <c:f>Sheet1!$C$2:$C$7</c:f>
+              <c:f>Sheet1!$C$2:$C$9</c:f>
               <c:numCache>
                 <c:formatCode>General</c:formatCode>
-                <c:ptCount val="6"/>
+                <c:ptCount val="8"/>
                 <c:pt idx="0">
                   <c:v>4</c:v>
                 </c:pt>
@@ -337,6 +359,12 @@
                   <c:v>3</c:v>
                 </c:pt>
                 <c:pt idx="5">
+                  <c:v>3</c:v>
+                </c:pt>
+                <c:pt idx="6">
+                  <c:v>1</c:v>
+                </c:pt>
+                <c:pt idx="7">
                   <c:v>3</c:v>
                 </c:pt>
               </c:numCache>
@@ -391,9 +419,9 @@
           </c:dLbls>
           <c:cat>
             <c:multiLvlStrRef>
-              <c:f>Sheet1!$A$2:$A$7</c:f>
+              <c:f>Sheet1!$A$2:$A$9</c:f>
               <c:multiLvlStrCache>
-                <c:ptCount val="6"/>
+                <c:ptCount val="8"/>
                 <c:lvl>
                   <c:pt idx="0">
                     <c:v>R1</c:v>
@@ -413,16 +441,22 @@
                   <c:pt idx="5">
                     <c:v>R6</c:v>
                   </c:pt>
+                  <c:pt idx="6">
+                    <c:v>R7</c:v>
+                  </c:pt>
+                  <c:pt idx="7">
+                    <c:v>R8</c:v>
+                  </c:pt>
                 </c:lvl>
               </c:multiLvlStrCache>
             </c:multiLvlStrRef>
           </c:cat>
           <c:val>
             <c:numRef>
-              <c:f>Sheet1!$D$2:$D$7</c:f>
+              <c:f>Sheet1!$D$2:$D$9</c:f>
               <c:numCache>
                 <c:formatCode>General</c:formatCode>
-                <c:ptCount val="6"/>
+                <c:ptCount val="8"/>
                 <c:pt idx="0">
                   <c:v>0</c:v>
                 </c:pt>
@@ -440,6 +474,12 @@
                 </c:pt>
                 <c:pt idx="5">
                   <c:v>3</c:v>
+                </c:pt>
+                <c:pt idx="6">
+                  <c:v>1</c:v>
+                </c:pt>
+                <c:pt idx="7">
+                  <c:v>4</c:v>
                 </c:pt>
               </c:numCache>
             </c:numRef>
@@ -2592,6 +2632,358 @@
             <a:fld id="{F7021451-1387-4CA6-816F-3879F97B5CBC}" type="slidenum">
               <a:rPr lang="en-US"/>
               <a:t>21</a:t>
+            </a:fld>
+            <a:endParaRPr lang="en-US"/>
+          </a:p>
+        </p:txBody>
+      </p:sp>
+    </p:spTree>
+    <p:extLst>
+      <p:ext uri="{BB962C8B-B14F-4D97-AF65-F5344CB8AC3E}">
+        <p14:creationId xmlns:p14="http://schemas.microsoft.com/office/powerpoint/2010/main" val="1024086991"/>
+      </p:ext>
+    </p:extLst>
+  </p:cSld>
+  <p:clrMapOvr>
+    <a:masterClrMapping/>
+  </p:clrMapOvr>
+</p:notes>
+</file>
+
+<file path=ppt/notesSlides/notesSlide22.xml><?xml version="1.0" encoding="utf-8"?>
+<p:notes xmlns:a="http://schemas.openxmlformats.org/drawingml/2006/main" xmlns:r="http://schemas.openxmlformats.org/officeDocument/2006/relationships" xmlns:p="http://schemas.openxmlformats.org/presentationml/2006/main">
+  <p:cSld>
+    <p:spTree>
+      <p:nvGrpSpPr>
+        <p:cNvPr id="1" name=""/>
+        <p:cNvGrpSpPr/>
+        <p:nvPr/>
+      </p:nvGrpSpPr>
+      <p:grpSpPr>
+        <a:xfrm>
+          <a:off x="0" y="0"/>
+          <a:ext cx="0" cy="0"/>
+          <a:chOff x="0" y="0"/>
+          <a:chExt cx="0" cy="0"/>
+        </a:xfrm>
+      </p:grpSpPr>
+      <p:sp>
+        <p:nvSpPr>
+          <p:cNvPr id="2" name="Slide Image Placeholder 1"/>
+          <p:cNvSpPr>
+            <a:spLocks noGrp="1" noRot="1" noChangeAspect="1"/>
+          </p:cNvSpPr>
+          <p:nvPr>
+            <p:ph type="sldImg"/>
+          </p:nvPr>
+        </p:nvSpPr>
+        <p:spPr/>
+      </p:sp>
+      <p:sp>
+        <p:nvSpPr>
+          <p:cNvPr id="3" name="Notes Placeholder 2"/>
+          <p:cNvSpPr>
+            <a:spLocks noGrp="1"/>
+          </p:cNvSpPr>
+          <p:nvPr>
+            <p:ph type="body" idx="1"/>
+          </p:nvPr>
+        </p:nvSpPr>
+        <p:spPr/>
+        <p:txBody>
+          <a:bodyPr/>
+          <a:lstStyle/>
+          <a:p>
+            <a:r>
+              <a:rPr lang="en-US" dirty="0"/>
+              <a:t/>
+            </a:r>
+            <a:endParaRPr lang="en-US" dirty="0"/>
+          </a:p>
+        </p:txBody>
+      </p:sp>
+      <p:sp>
+        <p:nvSpPr>
+          <p:cNvPr id="4" name="Slide Number Placeholder 3"/>
+          <p:cNvSpPr>
+            <a:spLocks noGrp="1"/>
+          </p:cNvSpPr>
+          <p:nvPr>
+            <p:ph type="sldNum" sz="quarter" idx="10"/>
+          </p:nvPr>
+        </p:nvSpPr>
+        <p:spPr/>
+        <p:txBody>
+          <a:bodyPr/>
+          <a:lstStyle/>
+          <a:p>
+            <a:fld id="{F7021451-1387-4CA6-816F-3879F97B5CBC}" type="slidenum">
+              <a:rPr lang="en-US"/>
+              <a:t>22</a:t>
+            </a:fld>
+            <a:endParaRPr lang="en-US"/>
+          </a:p>
+        </p:txBody>
+      </p:sp>
+    </p:spTree>
+    <p:extLst>
+      <p:ext uri="{BB962C8B-B14F-4D97-AF65-F5344CB8AC3E}">
+        <p14:creationId xmlns:p14="http://schemas.microsoft.com/office/powerpoint/2010/main" val="1024086991"/>
+      </p:ext>
+    </p:extLst>
+  </p:cSld>
+  <p:clrMapOvr>
+    <a:masterClrMapping/>
+  </p:clrMapOvr>
+</p:notes>
+</file>
+
+<file path=ppt/notesSlides/notesSlide23.xml><?xml version="1.0" encoding="utf-8"?>
+<p:notes xmlns:a="http://schemas.openxmlformats.org/drawingml/2006/main" xmlns:r="http://schemas.openxmlformats.org/officeDocument/2006/relationships" xmlns:p="http://schemas.openxmlformats.org/presentationml/2006/main">
+  <p:cSld>
+    <p:spTree>
+      <p:nvGrpSpPr>
+        <p:cNvPr id="1" name=""/>
+        <p:cNvGrpSpPr/>
+        <p:nvPr/>
+      </p:nvGrpSpPr>
+      <p:grpSpPr>
+        <a:xfrm>
+          <a:off x="0" y="0"/>
+          <a:ext cx="0" cy="0"/>
+          <a:chOff x="0" y="0"/>
+          <a:chExt cx="0" cy="0"/>
+        </a:xfrm>
+      </p:grpSpPr>
+      <p:sp>
+        <p:nvSpPr>
+          <p:cNvPr id="2" name="Slide Image Placeholder 1"/>
+          <p:cNvSpPr>
+            <a:spLocks noGrp="1" noRot="1" noChangeAspect="1"/>
+          </p:cNvSpPr>
+          <p:nvPr>
+            <p:ph type="sldImg"/>
+          </p:nvPr>
+        </p:nvSpPr>
+        <p:spPr/>
+      </p:sp>
+      <p:sp>
+        <p:nvSpPr>
+          <p:cNvPr id="3" name="Notes Placeholder 2"/>
+          <p:cNvSpPr>
+            <a:spLocks noGrp="1"/>
+          </p:cNvSpPr>
+          <p:nvPr>
+            <p:ph type="body" idx="1"/>
+          </p:nvPr>
+        </p:nvSpPr>
+        <p:spPr/>
+        <p:txBody>
+          <a:bodyPr/>
+          <a:lstStyle/>
+          <a:p>
+            <a:r>
+              <a:rPr lang="en-US" dirty="0"/>
+              <a:t/>
+            </a:r>
+            <a:endParaRPr lang="en-US" dirty="0"/>
+          </a:p>
+        </p:txBody>
+      </p:sp>
+      <p:sp>
+        <p:nvSpPr>
+          <p:cNvPr id="4" name="Slide Number Placeholder 3"/>
+          <p:cNvSpPr>
+            <a:spLocks noGrp="1"/>
+          </p:cNvSpPr>
+          <p:nvPr>
+            <p:ph type="sldNum" sz="quarter" idx="10"/>
+          </p:nvPr>
+        </p:nvSpPr>
+        <p:spPr/>
+        <p:txBody>
+          <a:bodyPr/>
+          <a:lstStyle/>
+          <a:p>
+            <a:fld id="{F7021451-1387-4CA6-816F-3879F97B5CBC}" type="slidenum">
+              <a:rPr lang="en-US"/>
+              <a:t>23</a:t>
+            </a:fld>
+            <a:endParaRPr lang="en-US"/>
+          </a:p>
+        </p:txBody>
+      </p:sp>
+    </p:spTree>
+    <p:extLst>
+      <p:ext uri="{BB962C8B-B14F-4D97-AF65-F5344CB8AC3E}">
+        <p14:creationId xmlns:p14="http://schemas.microsoft.com/office/powerpoint/2010/main" val="1024086991"/>
+      </p:ext>
+    </p:extLst>
+  </p:cSld>
+  <p:clrMapOvr>
+    <a:masterClrMapping/>
+  </p:clrMapOvr>
+</p:notes>
+</file>
+
+<file path=ppt/notesSlides/notesSlide24.xml><?xml version="1.0" encoding="utf-8"?>
+<p:notes xmlns:a="http://schemas.openxmlformats.org/drawingml/2006/main" xmlns:r="http://schemas.openxmlformats.org/officeDocument/2006/relationships" xmlns:p="http://schemas.openxmlformats.org/presentationml/2006/main">
+  <p:cSld>
+    <p:spTree>
+      <p:nvGrpSpPr>
+        <p:cNvPr id="1" name=""/>
+        <p:cNvGrpSpPr/>
+        <p:nvPr/>
+      </p:nvGrpSpPr>
+      <p:grpSpPr>
+        <a:xfrm>
+          <a:off x="0" y="0"/>
+          <a:ext cx="0" cy="0"/>
+          <a:chOff x="0" y="0"/>
+          <a:chExt cx="0" cy="0"/>
+        </a:xfrm>
+      </p:grpSpPr>
+      <p:sp>
+        <p:nvSpPr>
+          <p:cNvPr id="2" name="Slide Image Placeholder 1"/>
+          <p:cNvSpPr>
+            <a:spLocks noGrp="1" noRot="1" noChangeAspect="1"/>
+          </p:cNvSpPr>
+          <p:nvPr>
+            <p:ph type="sldImg"/>
+          </p:nvPr>
+        </p:nvSpPr>
+        <p:spPr/>
+      </p:sp>
+      <p:sp>
+        <p:nvSpPr>
+          <p:cNvPr id="3" name="Notes Placeholder 2"/>
+          <p:cNvSpPr>
+            <a:spLocks noGrp="1"/>
+          </p:cNvSpPr>
+          <p:nvPr>
+            <p:ph type="body" idx="1"/>
+          </p:nvPr>
+        </p:nvSpPr>
+        <p:spPr/>
+        <p:txBody>
+          <a:bodyPr/>
+          <a:lstStyle/>
+          <a:p>
+            <a:r>
+              <a:rPr lang="en-US" dirty="0"/>
+              <a:t/>
+            </a:r>
+            <a:endParaRPr lang="en-US" dirty="0"/>
+          </a:p>
+        </p:txBody>
+      </p:sp>
+      <p:sp>
+        <p:nvSpPr>
+          <p:cNvPr id="4" name="Slide Number Placeholder 3"/>
+          <p:cNvSpPr>
+            <a:spLocks noGrp="1"/>
+          </p:cNvSpPr>
+          <p:nvPr>
+            <p:ph type="sldNum" sz="quarter" idx="10"/>
+          </p:nvPr>
+        </p:nvSpPr>
+        <p:spPr/>
+        <p:txBody>
+          <a:bodyPr/>
+          <a:lstStyle/>
+          <a:p>
+            <a:fld id="{F7021451-1387-4CA6-816F-3879F97B5CBC}" type="slidenum">
+              <a:rPr lang="en-US"/>
+              <a:t>24</a:t>
+            </a:fld>
+            <a:endParaRPr lang="en-US"/>
+          </a:p>
+        </p:txBody>
+      </p:sp>
+    </p:spTree>
+    <p:extLst>
+      <p:ext uri="{BB962C8B-B14F-4D97-AF65-F5344CB8AC3E}">
+        <p14:creationId xmlns:p14="http://schemas.microsoft.com/office/powerpoint/2010/main" val="1024086991"/>
+      </p:ext>
+    </p:extLst>
+  </p:cSld>
+  <p:clrMapOvr>
+    <a:masterClrMapping/>
+  </p:clrMapOvr>
+</p:notes>
+</file>
+
+<file path=ppt/notesSlides/notesSlide25.xml><?xml version="1.0" encoding="utf-8"?>
+<p:notes xmlns:a="http://schemas.openxmlformats.org/drawingml/2006/main" xmlns:r="http://schemas.openxmlformats.org/officeDocument/2006/relationships" xmlns:p="http://schemas.openxmlformats.org/presentationml/2006/main">
+  <p:cSld>
+    <p:spTree>
+      <p:nvGrpSpPr>
+        <p:cNvPr id="1" name=""/>
+        <p:cNvGrpSpPr/>
+        <p:nvPr/>
+      </p:nvGrpSpPr>
+      <p:grpSpPr>
+        <a:xfrm>
+          <a:off x="0" y="0"/>
+          <a:ext cx="0" cy="0"/>
+          <a:chOff x="0" y="0"/>
+          <a:chExt cx="0" cy="0"/>
+        </a:xfrm>
+      </p:grpSpPr>
+      <p:sp>
+        <p:nvSpPr>
+          <p:cNvPr id="2" name="Slide Image Placeholder 1"/>
+          <p:cNvSpPr>
+            <a:spLocks noGrp="1" noRot="1" noChangeAspect="1"/>
+          </p:cNvSpPr>
+          <p:nvPr>
+            <p:ph type="sldImg"/>
+          </p:nvPr>
+        </p:nvSpPr>
+        <p:spPr/>
+      </p:sp>
+      <p:sp>
+        <p:nvSpPr>
+          <p:cNvPr id="3" name="Notes Placeholder 2"/>
+          <p:cNvSpPr>
+            <a:spLocks noGrp="1"/>
+          </p:cNvSpPr>
+          <p:nvPr>
+            <p:ph type="body" idx="1"/>
+          </p:nvPr>
+        </p:nvSpPr>
+        <p:spPr/>
+        <p:txBody>
+          <a:bodyPr/>
+          <a:lstStyle/>
+          <a:p>
+            <a:r>
+              <a:rPr lang="en-US" dirty="0"/>
+              <a:t/>
+            </a:r>
+            <a:endParaRPr lang="en-US" dirty="0"/>
+          </a:p>
+        </p:txBody>
+      </p:sp>
+      <p:sp>
+        <p:nvSpPr>
+          <p:cNvPr id="4" name="Slide Number Placeholder 3"/>
+          <p:cNvSpPr>
+            <a:spLocks noGrp="1"/>
+          </p:cNvSpPr>
+          <p:nvPr>
+            <p:ph type="sldNum" sz="quarter" idx="10"/>
+          </p:nvPr>
+        </p:nvSpPr>
+        <p:spPr/>
+        <p:txBody>
+          <a:bodyPr/>
+          <a:lstStyle/>
+          <a:p>
+            <a:fld id="{F7021451-1387-4CA6-816F-3879F97B5CBC}" type="slidenum">
+              <a:rPr lang="en-US"/>
+              <a:t>25</a:t>
             </a:fld>
             <a:endParaRPr lang="en-US"/>
           </a:p>
@@ -3730,7 +4122,7 @@
                 <a:ea typeface="Pretendard" pitchFamily="34" charset="-122"/>
                 <a:cs typeface="Pretendard" pitchFamily="34" charset="-120"/>
               </a:rPr>
-              <a:t>업데이트 2026-09-24   ·   QA 6회   ·   이슈 51건</a:t>
+              <a:t>업데이트 2026-09-25   ·   QA 8회   ·   이슈 61건</a:t>
             </a:r>
             <a:endParaRPr lang="en-US" sz="1300" dirty="0"/>
           </a:p>
@@ -5990,7 +6382,7 @@
                 <a:ea typeface="Pretendard" pitchFamily="34" charset="-122"/>
                 <a:cs typeface="Pretendard" pitchFamily="34" charset="-120"/>
               </a:rPr>
-              <a:t>10 / 21</a:t>
+              <a:t>10 / 25</a:t>
             </a:r>
             <a:endParaRPr lang="en-US" sz="1000" dirty="0"/>
           </a:p>
@@ -6741,7 +7133,7 @@
                 <a:ea typeface="Pretendard" pitchFamily="34" charset="-122"/>
                 <a:cs typeface="Pretendard" pitchFamily="34" charset="-120"/>
               </a:rPr>
-              <a:t>11 / 21</a:t>
+              <a:t>11 / 25</a:t>
             </a:r>
             <a:endParaRPr lang="en-US" sz="1000" dirty="0"/>
           </a:p>
@@ -8497,7 +8889,7 @@
                 <a:ea typeface="Pretendard" pitchFamily="34" charset="-122"/>
                 <a:cs typeface="Pretendard" pitchFamily="34" charset="-120"/>
               </a:rPr>
-              <a:t>12 / 21</a:t>
+              <a:t>12 / 25</a:t>
             </a:r>
             <a:endParaRPr lang="en-US" sz="1000" dirty="0"/>
           </a:p>
@@ -10505,7 +10897,7 @@
                 <a:ea typeface="Pretendard" pitchFamily="34" charset="-122"/>
                 <a:cs typeface="Pretendard" pitchFamily="34" charset="-120"/>
               </a:rPr>
-              <a:t>13 / 21</a:t>
+              <a:t>13 / 25</a:t>
             </a:r>
             <a:endParaRPr lang="en-US" sz="1000" dirty="0"/>
           </a:p>
@@ -10920,7 +11312,7 @@
                 <a:ea typeface="Pretendard" pitchFamily="34" charset="-122"/>
                 <a:cs typeface="Pretendard" pitchFamily="34" charset="-120"/>
               </a:rPr>
-              <a:t>14 / 21</a:t>
+              <a:t>14 / 25</a:t>
             </a:r>
             <a:endParaRPr lang="en-US" sz="1000" dirty="0"/>
           </a:p>
@@ -11827,7 +12219,7 @@
                 <a:ea typeface="Pretendard" pitchFamily="34" charset="-122"/>
                 <a:cs typeface="Pretendard" pitchFamily="34" charset="-120"/>
               </a:rPr>
-              <a:t>15 / 21</a:t>
+              <a:t>15 / 25</a:t>
             </a:r>
             <a:endParaRPr lang="en-US" sz="1000" dirty="0"/>
           </a:p>
@@ -13835,7 +14227,7 @@
                 <a:ea typeface="Pretendard" pitchFamily="34" charset="-122"/>
                 <a:cs typeface="Pretendard" pitchFamily="34" charset="-120"/>
               </a:rPr>
-              <a:t>16 / 21</a:t>
+              <a:t>16 / 25</a:t>
             </a:r>
             <a:endParaRPr lang="en-US" sz="1000" dirty="0"/>
           </a:p>
@@ -14742,7 +15134,7 @@
                 <a:ea typeface="Pretendard" pitchFamily="34" charset="-122"/>
                 <a:cs typeface="Pretendard" pitchFamily="34" charset="-120"/>
               </a:rPr>
-              <a:t>17 / 21</a:t>
+              <a:t>17 / 25</a:t>
             </a:r>
             <a:endParaRPr lang="en-US" sz="1000" dirty="0"/>
           </a:p>
@@ -15994,7 +16386,7 @@
                 <a:ea typeface="Pretendard" pitchFamily="34" charset="-122"/>
                 <a:cs typeface="Pretendard" pitchFamily="34" charset="-120"/>
               </a:rPr>
-              <a:t>18 / 21</a:t>
+              <a:t>18 / 25</a:t>
             </a:r>
             <a:endParaRPr lang="en-US" sz="1000" dirty="0"/>
           </a:p>
@@ -17879,7 +18271,7 @@
                 <a:ea typeface="Pretendard" pitchFamily="34" charset="-122"/>
                 <a:cs typeface="Pretendard" pitchFamily="34" charset="-120"/>
               </a:rPr>
-              <a:t>19 / 21</a:t>
+              <a:t>19 / 25</a:t>
             </a:r>
             <a:endParaRPr lang="en-US" sz="1000" dirty="0"/>
           </a:p>
@@ -18631,7 +19023,7 @@
                 <a:ea typeface="Pretendard SemiBold" pitchFamily="34" charset="-122"/>
                 <a:cs typeface="Pretendard SemiBold" pitchFamily="34" charset="-120"/>
               </a:rPr>
-              <a:t>6회</a:t>
+              <a:t>8회</a:t>
             </a:r>
             <a:endParaRPr lang="en-US" sz="2800" dirty="0"/>
           </a:p>
@@ -18732,7 +19124,7 @@
                 <a:ea typeface="Pretendard SemiBold" pitchFamily="34" charset="-122"/>
                 <a:cs typeface="Pretendard SemiBold" pitchFamily="34" charset="-120"/>
               </a:rPr>
-              <a:t>51건</a:t>
+              <a:t>61건</a:t>
             </a:r>
             <a:endParaRPr lang="en-US" sz="2800" dirty="0"/>
           </a:p>
@@ -18833,7 +19225,7 @@
                 <a:ea typeface="Pretendard SemiBold" pitchFamily="34" charset="-122"/>
                 <a:cs typeface="Pretendard SemiBold" pitchFamily="34" charset="-120"/>
               </a:rPr>
-              <a:t>51건</a:t>
+              <a:t>61건</a:t>
             </a:r>
             <a:endParaRPr lang="en-US" sz="2800" dirty="0"/>
           </a:p>
@@ -18934,7 +19326,7 @@
                 <a:ea typeface="Pretendard SemiBold" pitchFamily="34" charset="-122"/>
                 <a:cs typeface="Pretendard SemiBold" pitchFamily="34" charset="-120"/>
               </a:rPr>
-              <a:t>9건</a:t>
+              <a:t>8건</a:t>
             </a:r>
             <a:endParaRPr lang="en-US" sz="2800" dirty="0"/>
           </a:p>
@@ -19051,7 +19443,7 @@
                 <a:ea typeface="Pretendard" pitchFamily="34" charset="-122"/>
                 <a:cs typeface="Pretendard" pitchFamily="34" charset="-120"/>
               </a:rPr>
-              <a:t>02 / 21</a:t>
+              <a:t>02 / 25</a:t>
             </a:r>
             <a:endParaRPr lang="en-US" sz="1000" dirty="0"/>
           </a:p>
@@ -19068,6 +19460,5713 @@
 <file path=ppt/slides/slide20.xml><?xml version="1.0" encoding="utf-8"?>
 <p:sld xmlns:a="http://schemas.openxmlformats.org/drawingml/2006/main" xmlns:r="http://schemas.openxmlformats.org/officeDocument/2006/relationships" xmlns:p="http://schemas.openxmlformats.org/presentationml/2006/main">
   <p:cSld name="Slide 20">
+    <p:bg>
+      <p:bgPr>
+        <a:solidFill>
+          <a:srgbClr val="272729"/>
+        </a:solidFill>
+      </p:bgPr>
+    </p:bg>
+    <p:spTree>
+      <p:nvGrpSpPr>
+        <p:cNvPr id="1" name=""/>
+        <p:cNvGrpSpPr/>
+        <p:nvPr/>
+      </p:nvGrpSpPr>
+      <p:grpSpPr>
+        <a:xfrm>
+          <a:off x="0" y="0"/>
+          <a:ext cx="0" cy="0"/>
+          <a:chOff x="0" y="0"/>
+          <a:chExt cx="0" cy="0"/>
+        </a:xfrm>
+      </p:grpSpPr>
+      <p:sp>
+        <p:nvSpPr>
+          <p:cNvPr id="2" name="Text 0"/>
+          <p:cNvSpPr txBox="1"/>
+          <p:nvPr/>
+        </p:nvSpPr>
+        <p:spPr>
+          <a:xfrm>
+            <a:off x="609905" y="320040"/>
+            <a:ext cx="10972800" cy="228600"/>
+          </a:xfrm>
+          <a:prstGeom prst="rect">
+            <a:avLst/>
+          </a:prstGeom>
+          <a:noFill/>
+          <a:ln/>
+        </p:spPr>
+        <p:txBody>
+          <a:bodyPr wrap="square" lIns="0" tIns="0" rIns="0" bIns="0" rtlCol="0" anchor="t"/>
+          <a:lstStyle/>
+          <a:p>
+            <a:pPr indent="0" marL="0">
+              <a:buNone/>
+            </a:pPr>
+            <a:r>
+              <a:rPr lang="en-US" sz="1100" b="1" spc="200" kern="0" dirty="0">
+                <a:solidFill>
+                  <a:srgbClr val="2997FF"/>
+                </a:solidFill>
+                <a:latin typeface="Pretendard SemiBold" pitchFamily="34" charset="0"/>
+                <a:ea typeface="Pretendard SemiBold" pitchFamily="34" charset="-122"/>
+                <a:cs typeface="Pretendard SemiBold" pitchFamily="34" charset="-120"/>
+              </a:rPr>
+              <a:t>R7  ·  2026-09-25</a:t>
+            </a:r>
+            <a:endParaRPr lang="en-US" sz="1100" dirty="0"/>
+          </a:p>
+        </p:txBody>
+      </p:sp>
+      <p:sp>
+        <p:nvSpPr>
+          <p:cNvPr id="3" name="Text 1"/>
+          <p:cNvSpPr txBox="1"/>
+          <p:nvPr/>
+        </p:nvSpPr>
+        <p:spPr>
+          <a:xfrm>
+            <a:off x="609905" y="594360"/>
+            <a:ext cx="10972800" cy="777240"/>
+          </a:xfrm>
+          <a:prstGeom prst="rect">
+            <a:avLst/>
+          </a:prstGeom>
+          <a:noFill/>
+          <a:ln/>
+        </p:spPr>
+        <p:txBody>
+          <a:bodyPr wrap="square" lIns="0" tIns="0" rIns="0" bIns="0" rtlCol="0" anchor="t"/>
+          <a:lstStyle/>
+          <a:p>
+            <a:pPr indent="0" marL="0">
+              <a:buNone/>
+            </a:pPr>
+            <a:r>
+              <a:rPr lang="en-US" sz="4000" dirty="0">
+                <a:solidFill>
+                  <a:srgbClr val="FFFFFF"/>
+                </a:solidFill>
+                <a:latin typeface="Pretendard SemiBold" pitchFamily="34" charset="0"/>
+                <a:ea typeface="Pretendard SemiBold" pitchFamily="34" charset="-122"/>
+                <a:cs typeface="Pretendard SemiBold" pitchFamily="34" charset="-120"/>
+              </a:rPr>
+              <a:t>장애물 통과 · 인게임 배경</a:t>
+            </a:r>
+            <a:endParaRPr lang="en-US" sz="4000" dirty="0"/>
+          </a:p>
+        </p:txBody>
+      </p:sp>
+      <p:sp>
+        <p:nvSpPr>
+          <p:cNvPr id="4" name="Shape 2"/>
+          <p:cNvSpPr/>
+          <p:nvPr/>
+        </p:nvSpPr>
+        <p:spPr>
+          <a:xfrm>
+            <a:off x="609905" y="1417320"/>
+            <a:ext cx="10972800" cy="0"/>
+          </a:xfrm>
+          <a:prstGeom prst="line">
+            <a:avLst/>
+          </a:prstGeom>
+          <a:noFill/>
+          <a:ln w="9525">
+            <a:solidFill>
+              <a:srgbClr val="3A3A3C"/>
+            </a:solidFill>
+            <a:prstDash val="solid"/>
+          </a:ln>
+        </p:spPr>
+      </p:sp>
+      <p:sp>
+        <p:nvSpPr>
+          <p:cNvPr id="5" name="Text 3"/>
+          <p:cNvSpPr txBox="1"/>
+          <p:nvPr/>
+        </p:nvSpPr>
+        <p:spPr>
+          <a:xfrm>
+            <a:off x="609905" y="1691640"/>
+            <a:ext cx="1097280" cy="320040"/>
+          </a:xfrm>
+          <a:prstGeom prst="rect">
+            <a:avLst/>
+          </a:prstGeom>
+          <a:noFill/>
+          <a:ln/>
+        </p:spPr>
+        <p:txBody>
+          <a:bodyPr wrap="square" lIns="0" tIns="0" rIns="0" bIns="0" rtlCol="0" anchor="ctr"/>
+          <a:lstStyle/>
+          <a:p>
+            <a:pPr indent="0" marL="0">
+              <a:buNone/>
+            </a:pPr>
+            <a:r>
+              <a:rPr lang="en-US" sz="1300" dirty="0">
+                <a:solidFill>
+                  <a:srgbClr val="8E8E93"/>
+                </a:solidFill>
+                <a:latin typeface="Pretendard SemiBold" pitchFamily="34" charset="0"/>
+                <a:ea typeface="Pretendard SemiBold" pitchFamily="34" charset="-122"/>
+                <a:cs typeface="Pretendard SemiBold" pitchFamily="34" charset="-120"/>
+              </a:rPr>
+              <a:t>계기</a:t>
+            </a:r>
+            <a:endParaRPr lang="en-US" sz="1300" dirty="0"/>
+          </a:p>
+        </p:txBody>
+      </p:sp>
+      <p:sp>
+        <p:nvSpPr>
+          <p:cNvPr id="6" name="Text 4"/>
+          <p:cNvSpPr txBox="1"/>
+          <p:nvPr/>
+        </p:nvSpPr>
+        <p:spPr>
+          <a:xfrm>
+            <a:off x="1707185" y="1691640"/>
+            <a:ext cx="9875520" cy="320040"/>
+          </a:xfrm>
+          <a:prstGeom prst="rect">
+            <a:avLst/>
+          </a:prstGeom>
+          <a:noFill/>
+          <a:ln/>
+        </p:spPr>
+        <p:txBody>
+          <a:bodyPr wrap="square" lIns="0" tIns="0" rIns="0" bIns="0" rtlCol="0" anchor="ctr"/>
+          <a:lstStyle/>
+          <a:p>
+            <a:pPr indent="0" marL="0">
+              <a:buNone/>
+            </a:pPr>
+            <a:r>
+              <a:rPr lang="en-US" sz="1800" dirty="0">
+                <a:solidFill>
+                  <a:srgbClr val="FFFFFF"/>
+                </a:solidFill>
+                <a:latin typeface="Pretendard" pitchFamily="34" charset="0"/>
+                <a:ea typeface="Pretendard" pitchFamily="34" charset="-122"/>
+                <a:cs typeface="Pretendard" pitchFamily="34" charset="-120"/>
+              </a:rPr>
+              <a:t>'오브젝트 통과현상' 확인 요청 + 인게임 배경을 메인 화면 톤으로</a:t>
+            </a:r>
+            <a:endParaRPr lang="en-US" sz="1800" dirty="0"/>
+          </a:p>
+        </p:txBody>
+      </p:sp>
+      <p:sp>
+        <p:nvSpPr>
+          <p:cNvPr id="7" name="Text 5"/>
+          <p:cNvSpPr txBox="1"/>
+          <p:nvPr/>
+        </p:nvSpPr>
+        <p:spPr>
+          <a:xfrm>
+            <a:off x="609905" y="2148840"/>
+            <a:ext cx="1097280" cy="548640"/>
+          </a:xfrm>
+          <a:prstGeom prst="rect">
+            <a:avLst/>
+          </a:prstGeom>
+          <a:noFill/>
+          <a:ln/>
+        </p:spPr>
+        <p:txBody>
+          <a:bodyPr wrap="square" lIns="0" tIns="0" rIns="0" bIns="0" rtlCol="0" anchor="t"/>
+          <a:lstStyle/>
+          <a:p>
+            <a:pPr indent="0" marL="0">
+              <a:buNone/>
+            </a:pPr>
+            <a:r>
+              <a:rPr lang="en-US" sz="1300" dirty="0">
+                <a:solidFill>
+                  <a:srgbClr val="8E8E93"/>
+                </a:solidFill>
+                <a:latin typeface="Pretendard SemiBold" pitchFamily="34" charset="0"/>
+                <a:ea typeface="Pretendard SemiBold" pitchFamily="34" charset="-122"/>
+                <a:cs typeface="Pretendard SemiBold" pitchFamily="34" charset="-120"/>
+              </a:rPr>
+              <a:t>방법</a:t>
+            </a:r>
+            <a:endParaRPr lang="en-US" sz="1300" dirty="0"/>
+          </a:p>
+        </p:txBody>
+      </p:sp>
+      <p:sp>
+        <p:nvSpPr>
+          <p:cNvPr id="8" name="Text 6"/>
+          <p:cNvSpPr txBox="1"/>
+          <p:nvPr/>
+        </p:nvSpPr>
+        <p:spPr>
+          <a:xfrm>
+            <a:off x="1707185" y="2103120"/>
+            <a:ext cx="9875520" cy="731520"/>
+          </a:xfrm>
+          <a:prstGeom prst="rect">
+            <a:avLst/>
+          </a:prstGeom>
+          <a:noFill/>
+          <a:ln/>
+        </p:spPr>
+        <p:txBody>
+          <a:bodyPr wrap="square" lIns="0" tIns="0" rIns="0" bIns="0" rtlCol="0" anchor="t"/>
+          <a:lstStyle/>
+          <a:p>
+            <a:pPr indent="0" marL="0">
+              <a:lnSpc>
+                <a:spcPct val="130000"/>
+              </a:lnSpc>
+              <a:buNone/>
+            </a:pPr>
+            <a:r>
+              <a:rPr lang="en-US" sz="1800" dirty="0">
+                <a:solidFill>
+                  <a:srgbClr val="CCCCCC"/>
+                </a:solidFill>
+                <a:latin typeface="Pretendard" pitchFamily="34" charset="0"/>
+                <a:ea typeface="Pretendard" pitchFamily="34" charset="-122"/>
+                <a:cs typeface="Pretendard" pitchFamily="34" charset="-120"/>
+              </a:rPr>
+              <a:t>장애물 · 물고기 충돌 코드 대조 (스프라이트 크기 vs 콜라이더, 레이어 충돌표, AI 이동)</a:t>
+            </a:r>
+            <a:endParaRPr lang="en-US" sz="1800" dirty="0"/>
+          </a:p>
+        </p:txBody>
+      </p:sp>
+      <p:sp>
+        <p:nvSpPr>
+          <p:cNvPr id="9" name="Text 7"/>
+          <p:cNvSpPr txBox="1"/>
+          <p:nvPr/>
+        </p:nvSpPr>
+        <p:spPr>
+          <a:xfrm>
+            <a:off x="609905" y="4846320"/>
+            <a:ext cx="2651760" cy="502920"/>
+          </a:xfrm>
+          <a:prstGeom prst="rect">
+            <a:avLst/>
+          </a:prstGeom>
+          <a:noFill/>
+          <a:ln/>
+        </p:spPr>
+        <p:txBody>
+          <a:bodyPr wrap="square" lIns="0" tIns="0" rIns="0" bIns="0" rtlCol="0" anchor="ctr"/>
+          <a:lstStyle/>
+          <a:p>
+            <a:pPr indent="0" marL="0">
+              <a:buNone/>
+            </a:pPr>
+            <a:r>
+              <a:rPr lang="en-US" sz="2800" dirty="0">
+                <a:solidFill>
+                  <a:srgbClr val="FFFFFF"/>
+                </a:solidFill>
+                <a:latin typeface="Pretendard SemiBold" pitchFamily="34" charset="0"/>
+                <a:ea typeface="Pretendard SemiBold" pitchFamily="34" charset="-122"/>
+                <a:cs typeface="Pretendard SemiBold" pitchFamily="34" charset="-120"/>
+              </a:rPr>
+              <a:t>3건</a:t>
+            </a:r>
+            <a:endParaRPr lang="en-US" sz="2800" dirty="0"/>
+          </a:p>
+        </p:txBody>
+      </p:sp>
+      <p:sp>
+        <p:nvSpPr>
+          <p:cNvPr id="10" name="Text 8"/>
+          <p:cNvSpPr txBox="1"/>
+          <p:nvPr/>
+        </p:nvSpPr>
+        <p:spPr>
+          <a:xfrm>
+            <a:off x="609905" y="5376672"/>
+            <a:ext cx="2651760" cy="228600"/>
+          </a:xfrm>
+          <a:prstGeom prst="rect">
+            <a:avLst/>
+          </a:prstGeom>
+          <a:noFill/>
+          <a:ln/>
+        </p:spPr>
+        <p:txBody>
+          <a:bodyPr wrap="square" lIns="0" tIns="0" rIns="0" bIns="0" rtlCol="0" anchor="t"/>
+          <a:lstStyle/>
+          <a:p>
+            <a:pPr indent="0" marL="0">
+              <a:buNone/>
+            </a:pPr>
+            <a:r>
+              <a:rPr lang="en-US" sz="1200" dirty="0">
+                <a:solidFill>
+                  <a:srgbClr val="CCCCCC"/>
+                </a:solidFill>
+                <a:latin typeface="Pretendard" pitchFamily="34" charset="0"/>
+                <a:ea typeface="Pretendard" pitchFamily="34" charset="-122"/>
+                <a:cs typeface="Pretendard" pitchFamily="34" charset="-120"/>
+              </a:rPr>
+              <a:t>발견한 이슈</a:t>
+            </a:r>
+            <a:endParaRPr lang="en-US" sz="1200" dirty="0"/>
+          </a:p>
+        </p:txBody>
+      </p:sp>
+      <p:sp>
+        <p:nvSpPr>
+          <p:cNvPr id="11" name="Text 9"/>
+          <p:cNvSpPr txBox="1"/>
+          <p:nvPr/>
+        </p:nvSpPr>
+        <p:spPr>
+          <a:xfrm>
+            <a:off x="609905" y="5596128"/>
+            <a:ext cx="2651760" cy="201168"/>
+          </a:xfrm>
+          <a:prstGeom prst="rect">
+            <a:avLst/>
+          </a:prstGeom>
+          <a:noFill/>
+          <a:ln/>
+        </p:spPr>
+        <p:txBody>
+          <a:bodyPr wrap="square" lIns="0" tIns="0" rIns="0" bIns="0" rtlCol="0" anchor="t"/>
+          <a:lstStyle/>
+          <a:p>
+            <a:pPr indent="0" marL="0">
+              <a:buNone/>
+            </a:pPr>
+            <a:r>
+              <a:rPr lang="en-US" sz="1050" dirty="0">
+                <a:solidFill>
+                  <a:srgbClr val="8E8E93"/>
+                </a:solidFill>
+                <a:latin typeface="Pretendard" pitchFamily="34" charset="0"/>
+                <a:ea typeface="Pretendard" pitchFamily="34" charset="-122"/>
+                <a:cs typeface="Pretendard" pitchFamily="34" charset="-120"/>
+              </a:rPr>
+              <a:t>높음 1 · 중간 1 · 낮음 1</a:t>
+            </a:r>
+            <a:endParaRPr lang="en-US" sz="1050" dirty="0"/>
+          </a:p>
+        </p:txBody>
+      </p:sp>
+      <p:sp>
+        <p:nvSpPr>
+          <p:cNvPr id="12" name="Shape 10"/>
+          <p:cNvSpPr/>
+          <p:nvPr/>
+        </p:nvSpPr>
+        <p:spPr>
+          <a:xfrm>
+            <a:off x="3353105" y="4892040"/>
+            <a:ext cx="0" cy="868680"/>
+          </a:xfrm>
+          <a:prstGeom prst="line">
+            <a:avLst/>
+          </a:prstGeom>
+          <a:noFill/>
+          <a:ln w="9525">
+            <a:solidFill>
+              <a:srgbClr val="3A3A3C"/>
+            </a:solidFill>
+            <a:prstDash val="solid"/>
+          </a:ln>
+        </p:spPr>
+      </p:sp>
+      <p:sp>
+        <p:nvSpPr>
+          <p:cNvPr id="13" name="Text 11"/>
+          <p:cNvSpPr txBox="1"/>
+          <p:nvPr/>
+        </p:nvSpPr>
+        <p:spPr>
+          <a:xfrm>
+            <a:off x="3627425" y="4846320"/>
+            <a:ext cx="2377440" cy="502920"/>
+          </a:xfrm>
+          <a:prstGeom prst="rect">
+            <a:avLst/>
+          </a:prstGeom>
+          <a:noFill/>
+          <a:ln/>
+        </p:spPr>
+        <p:txBody>
+          <a:bodyPr wrap="square" lIns="0" tIns="0" rIns="0" bIns="0" rtlCol="0" anchor="ctr"/>
+          <a:lstStyle/>
+          <a:p>
+            <a:pPr indent="0" marL="0">
+              <a:buNone/>
+            </a:pPr>
+            <a:r>
+              <a:rPr lang="en-US" sz="2800" dirty="0">
+                <a:solidFill>
+                  <a:srgbClr val="FFFFFF"/>
+                </a:solidFill>
+                <a:latin typeface="Pretendard SemiBold" pitchFamily="34" charset="0"/>
+                <a:ea typeface="Pretendard SemiBold" pitchFamily="34" charset="-122"/>
+                <a:cs typeface="Pretendard SemiBold" pitchFamily="34" charset="-120"/>
+              </a:rPr>
+              <a:t>2</a:t>
+            </a:r>
+            <a:endParaRPr lang="en-US" sz="2800" dirty="0"/>
+          </a:p>
+        </p:txBody>
+      </p:sp>
+      <p:sp>
+        <p:nvSpPr>
+          <p:cNvPr id="14" name="Text 12"/>
+          <p:cNvSpPr txBox="1"/>
+          <p:nvPr/>
+        </p:nvSpPr>
+        <p:spPr>
+          <a:xfrm>
+            <a:off x="3627425" y="5376672"/>
+            <a:ext cx="2377440" cy="228600"/>
+          </a:xfrm>
+          <a:prstGeom prst="rect">
+            <a:avLst/>
+          </a:prstGeom>
+          <a:noFill/>
+          <a:ln/>
+        </p:spPr>
+        <p:txBody>
+          <a:bodyPr wrap="square" lIns="0" tIns="0" rIns="0" bIns="0" rtlCol="0" anchor="t"/>
+          <a:lstStyle/>
+          <a:p>
+            <a:pPr indent="0" marL="0">
+              <a:buNone/>
+            </a:pPr>
+            <a:r>
+              <a:rPr lang="en-US" sz="1200" dirty="0">
+                <a:solidFill>
+                  <a:srgbClr val="CCCCCC"/>
+                </a:solidFill>
+                <a:latin typeface="Pretendard" pitchFamily="34" charset="0"/>
+                <a:ea typeface="Pretendard" pitchFamily="34" charset="-122"/>
+                <a:cs typeface="Pretendard" pitchFamily="34" charset="-120"/>
+              </a:rPr>
+              <a:t>원인</a:t>
+            </a:r>
+            <a:endParaRPr lang="en-US" sz="1200" dirty="0"/>
+          </a:p>
+        </p:txBody>
+      </p:sp>
+      <p:sp>
+        <p:nvSpPr>
+          <p:cNvPr id="15" name="Text 13"/>
+          <p:cNvSpPr txBox="1"/>
+          <p:nvPr/>
+        </p:nvSpPr>
+        <p:spPr>
+          <a:xfrm>
+            <a:off x="3627425" y="5596128"/>
+            <a:ext cx="2377440" cy="201168"/>
+          </a:xfrm>
+          <a:prstGeom prst="rect">
+            <a:avLst/>
+          </a:prstGeom>
+          <a:noFill/>
+          <a:ln/>
+        </p:spPr>
+        <p:txBody>
+          <a:bodyPr wrap="square" lIns="0" tIns="0" rIns="0" bIns="0" rtlCol="0" anchor="t"/>
+          <a:lstStyle/>
+          <a:p>
+            <a:pPr indent="0" marL="0">
+              <a:buNone/>
+            </a:pPr>
+            <a:r>
+              <a:rPr lang="en-US" sz="1050" dirty="0">
+                <a:solidFill>
+                  <a:srgbClr val="8E8E93"/>
+                </a:solidFill>
+                <a:latin typeface="Pretendard" pitchFamily="34" charset="0"/>
+                <a:ea typeface="Pretendard" pitchFamily="34" charset="-122"/>
+                <a:cs typeface="Pretendard" pitchFamily="34" charset="-120"/>
+              </a:rPr>
+              <a:t>그림 크기 · AI 트리거</a:t>
+            </a:r>
+            <a:endParaRPr lang="en-US" sz="1050" dirty="0"/>
+          </a:p>
+        </p:txBody>
+      </p:sp>
+      <p:sp>
+        <p:nvSpPr>
+          <p:cNvPr id="16" name="Shape 14"/>
+          <p:cNvSpPr/>
+          <p:nvPr/>
+        </p:nvSpPr>
+        <p:spPr>
+          <a:xfrm>
+            <a:off x="6096305" y="4892040"/>
+            <a:ext cx="0" cy="868680"/>
+          </a:xfrm>
+          <a:prstGeom prst="line">
+            <a:avLst/>
+          </a:prstGeom>
+          <a:noFill/>
+          <a:ln w="9525">
+            <a:solidFill>
+              <a:srgbClr val="3A3A3C"/>
+            </a:solidFill>
+            <a:prstDash val="solid"/>
+          </a:ln>
+        </p:spPr>
+      </p:sp>
+      <p:sp>
+        <p:nvSpPr>
+          <p:cNvPr id="17" name="Text 15"/>
+          <p:cNvSpPr txBox="1"/>
+          <p:nvPr/>
+        </p:nvSpPr>
+        <p:spPr>
+          <a:xfrm>
+            <a:off x="6370625" y="4846320"/>
+            <a:ext cx="2377440" cy="502920"/>
+          </a:xfrm>
+          <a:prstGeom prst="rect">
+            <a:avLst/>
+          </a:prstGeom>
+          <a:noFill/>
+          <a:ln/>
+        </p:spPr>
+        <p:txBody>
+          <a:bodyPr wrap="square" lIns="0" tIns="0" rIns="0" bIns="0" rtlCol="0" anchor="ctr"/>
+          <a:lstStyle/>
+          <a:p>
+            <a:pPr indent="0" marL="0">
+              <a:buNone/>
+            </a:pPr>
+            <a:r>
+              <a:rPr lang="en-US" sz="2800" dirty="0">
+                <a:solidFill>
+                  <a:srgbClr val="FFFFFF"/>
+                </a:solidFill>
+                <a:latin typeface="Pretendard SemiBold" pitchFamily="34" charset="0"/>
+                <a:ea typeface="Pretendard SemiBold" pitchFamily="34" charset="-122"/>
+                <a:cs typeface="Pretendard SemiBold" pitchFamily="34" charset="-120"/>
+              </a:rPr>
+              <a:t>4</a:t>
+            </a:r>
+            <a:endParaRPr lang="en-US" sz="2800" dirty="0"/>
+          </a:p>
+        </p:txBody>
+      </p:sp>
+      <p:sp>
+        <p:nvSpPr>
+          <p:cNvPr id="18" name="Text 16"/>
+          <p:cNvSpPr txBox="1"/>
+          <p:nvPr/>
+        </p:nvSpPr>
+        <p:spPr>
+          <a:xfrm>
+            <a:off x="6370625" y="5376672"/>
+            <a:ext cx="2377440" cy="228600"/>
+          </a:xfrm>
+          <a:prstGeom prst="rect">
+            <a:avLst/>
+          </a:prstGeom>
+          <a:noFill/>
+          <a:ln/>
+        </p:spPr>
+        <p:txBody>
+          <a:bodyPr wrap="square" lIns="0" tIns="0" rIns="0" bIns="0" rtlCol="0" anchor="t"/>
+          <a:lstStyle/>
+          <a:p>
+            <a:pPr indent="0" marL="0">
+              <a:buNone/>
+            </a:pPr>
+            <a:r>
+              <a:rPr lang="en-US" sz="1200" dirty="0">
+                <a:solidFill>
+                  <a:srgbClr val="CCCCCC"/>
+                </a:solidFill>
+                <a:latin typeface="Pretendard" pitchFamily="34" charset="0"/>
+                <a:ea typeface="Pretendard" pitchFamily="34" charset="-122"/>
+                <a:cs typeface="Pretendard" pitchFamily="34" charset="-120"/>
+              </a:rPr>
+              <a:t>새 배경 요소</a:t>
+            </a:r>
+            <a:endParaRPr lang="en-US" sz="1200" dirty="0"/>
+          </a:p>
+        </p:txBody>
+      </p:sp>
+      <p:sp>
+        <p:nvSpPr>
+          <p:cNvPr id="19" name="Text 17"/>
+          <p:cNvSpPr txBox="1"/>
+          <p:nvPr/>
+        </p:nvSpPr>
+        <p:spPr>
+          <a:xfrm>
+            <a:off x="6370625" y="5596128"/>
+            <a:ext cx="2377440" cy="201168"/>
+          </a:xfrm>
+          <a:prstGeom prst="rect">
+            <a:avLst/>
+          </a:prstGeom>
+          <a:noFill/>
+          <a:ln/>
+        </p:spPr>
+        <p:txBody>
+          <a:bodyPr wrap="square" lIns="0" tIns="0" rIns="0" bIns="0" rtlCol="0" anchor="t"/>
+          <a:lstStyle/>
+          <a:p>
+            <a:pPr indent="0" marL="0">
+              <a:buNone/>
+            </a:pPr>
+            <a:r>
+              <a:rPr lang="en-US" sz="1050" dirty="0">
+                <a:solidFill>
+                  <a:srgbClr val="8E8E93"/>
+                </a:solidFill>
+                <a:latin typeface="Pretendard" pitchFamily="34" charset="0"/>
+                <a:ea typeface="Pretendard" pitchFamily="34" charset="-122"/>
+                <a:cs typeface="Pretendard" pitchFamily="34" charset="-120"/>
+              </a:rPr>
+              <a:t>물 톤 · 격자 · 빛줄기 · 물방울</a:t>
+            </a:r>
+            <a:endParaRPr lang="en-US" sz="1050" dirty="0"/>
+          </a:p>
+        </p:txBody>
+      </p:sp>
+      <p:sp>
+        <p:nvSpPr>
+          <p:cNvPr id="20" name="Shape 18"/>
+          <p:cNvSpPr/>
+          <p:nvPr/>
+        </p:nvSpPr>
+        <p:spPr>
+          <a:xfrm>
+            <a:off x="8839505" y="4892040"/>
+            <a:ext cx="0" cy="868680"/>
+          </a:xfrm>
+          <a:prstGeom prst="line">
+            <a:avLst/>
+          </a:prstGeom>
+          <a:noFill/>
+          <a:ln w="9525">
+            <a:solidFill>
+              <a:srgbClr val="3A3A3C"/>
+            </a:solidFill>
+            <a:prstDash val="solid"/>
+          </a:ln>
+        </p:spPr>
+      </p:sp>
+      <p:sp>
+        <p:nvSpPr>
+          <p:cNvPr id="21" name="Text 19"/>
+          <p:cNvSpPr txBox="1"/>
+          <p:nvPr/>
+        </p:nvSpPr>
+        <p:spPr>
+          <a:xfrm>
+            <a:off x="9113825" y="4846320"/>
+            <a:ext cx="2377440" cy="502920"/>
+          </a:xfrm>
+          <a:prstGeom prst="rect">
+            <a:avLst/>
+          </a:prstGeom>
+          <a:noFill/>
+          <a:ln/>
+        </p:spPr>
+        <p:txBody>
+          <a:bodyPr wrap="square" lIns="0" tIns="0" rIns="0" bIns="0" rtlCol="0" anchor="ctr"/>
+          <a:lstStyle/>
+          <a:p>
+            <a:pPr indent="0" marL="0">
+              <a:buNone/>
+            </a:pPr>
+            <a:r>
+              <a:rPr lang="en-US" sz="2800" dirty="0">
+                <a:solidFill>
+                  <a:srgbClr val="FFFFFF"/>
+                </a:solidFill>
+                <a:latin typeface="Pretendard SemiBold" pitchFamily="34" charset="0"/>
+                <a:ea typeface="Pretendard SemiBold" pitchFamily="34" charset="-122"/>
+                <a:cs typeface="Pretendard SemiBold" pitchFamily="34" charset="-120"/>
+              </a:rPr>
+              <a:t>대기</a:t>
+            </a:r>
+            <a:endParaRPr lang="en-US" sz="2800" dirty="0"/>
+          </a:p>
+        </p:txBody>
+      </p:sp>
+      <p:sp>
+        <p:nvSpPr>
+          <p:cNvPr id="22" name="Text 20"/>
+          <p:cNvSpPr txBox="1"/>
+          <p:nvPr/>
+        </p:nvSpPr>
+        <p:spPr>
+          <a:xfrm>
+            <a:off x="9113825" y="5376672"/>
+            <a:ext cx="2377440" cy="228600"/>
+          </a:xfrm>
+          <a:prstGeom prst="rect">
+            <a:avLst/>
+          </a:prstGeom>
+          <a:noFill/>
+          <a:ln/>
+        </p:spPr>
+        <p:txBody>
+          <a:bodyPr wrap="square" lIns="0" tIns="0" rIns="0" bIns="0" rtlCol="0" anchor="t"/>
+          <a:lstStyle/>
+          <a:p>
+            <a:pPr indent="0" marL="0">
+              <a:buNone/>
+            </a:pPr>
+            <a:r>
+              <a:rPr lang="en-US" sz="1200" dirty="0">
+                <a:solidFill>
+                  <a:srgbClr val="CCCCCC"/>
+                </a:solidFill>
+                <a:latin typeface="Pretendard" pitchFamily="34" charset="0"/>
+                <a:ea typeface="Pretendard" pitchFamily="34" charset="-122"/>
+                <a:cs typeface="Pretendard" pitchFamily="34" charset="-120"/>
+              </a:rPr>
+              <a:t>실행 확인</a:t>
+            </a:r>
+            <a:endParaRPr lang="en-US" sz="1200" dirty="0"/>
+          </a:p>
+        </p:txBody>
+      </p:sp>
+      <p:sp>
+        <p:nvSpPr>
+          <p:cNvPr id="23" name="Text 21"/>
+          <p:cNvSpPr txBox="1"/>
+          <p:nvPr/>
+        </p:nvSpPr>
+        <p:spPr>
+          <a:xfrm>
+            <a:off x="9113825" y="5596128"/>
+            <a:ext cx="2377440" cy="201168"/>
+          </a:xfrm>
+          <a:prstGeom prst="rect">
+            <a:avLst/>
+          </a:prstGeom>
+          <a:noFill/>
+          <a:ln/>
+        </p:spPr>
+        <p:txBody>
+          <a:bodyPr wrap="square" lIns="0" tIns="0" rIns="0" bIns="0" rtlCol="0" anchor="t"/>
+          <a:lstStyle/>
+          <a:p>
+            <a:pPr indent="0" marL="0">
+              <a:buNone/>
+            </a:pPr>
+            <a:r>
+              <a:rPr lang="en-US" sz="1050" dirty="0">
+                <a:solidFill>
+                  <a:srgbClr val="8E8E93"/>
+                </a:solidFill>
+                <a:latin typeface="Pretendard" pitchFamily="34" charset="0"/>
+                <a:ea typeface="Pretendard" pitchFamily="34" charset="-122"/>
+                <a:cs typeface="Pretendard" pitchFamily="34" charset="-120"/>
+              </a:rPr>
+              <a:t>Unity가 닫혀 있음</a:t>
+            </a:r>
+            <a:endParaRPr lang="en-US" sz="1050" dirty="0"/>
+          </a:p>
+        </p:txBody>
+      </p:sp>
+      <p:sp>
+        <p:nvSpPr>
+          <p:cNvPr id="24" name="Text 22"/>
+          <p:cNvSpPr txBox="1"/>
+          <p:nvPr/>
+        </p:nvSpPr>
+        <p:spPr>
+          <a:xfrm>
+            <a:off x="609905" y="6446520"/>
+            <a:ext cx="5486400" cy="274320"/>
+          </a:xfrm>
+          <a:prstGeom prst="rect">
+            <a:avLst/>
+          </a:prstGeom>
+          <a:noFill/>
+          <a:ln/>
+        </p:spPr>
+        <p:txBody>
+          <a:bodyPr wrap="square" lIns="0" tIns="0" rIns="0" bIns="0" rtlCol="0" anchor="ctr"/>
+          <a:lstStyle/>
+          <a:p>
+            <a:pPr indent="0" marL="0">
+              <a:buNone/>
+            </a:pPr>
+            <a:r>
+              <a:rPr lang="en-US" sz="1000" spc="200" kern="0" dirty="0">
+                <a:solidFill>
+                  <a:srgbClr val="8E8E93"/>
+                </a:solidFill>
+                <a:latin typeface="Pretendard" pitchFamily="34" charset="0"/>
+                <a:ea typeface="Pretendard" pitchFamily="34" charset="-122"/>
+                <a:cs typeface="Pretendard" pitchFamily="34" charset="-120"/>
+              </a:rPr>
+              <a:t>QA REPORT  ·  FISH GAME</a:t>
+            </a:r>
+            <a:endParaRPr lang="en-US" sz="1000" dirty="0"/>
+          </a:p>
+        </p:txBody>
+      </p:sp>
+      <p:sp>
+        <p:nvSpPr>
+          <p:cNvPr id="25" name="Text 23"/>
+          <p:cNvSpPr txBox="1"/>
+          <p:nvPr/>
+        </p:nvSpPr>
+        <p:spPr>
+          <a:xfrm>
+            <a:off x="10515600" y="6446520"/>
+            <a:ext cx="1066190" cy="274320"/>
+          </a:xfrm>
+          <a:prstGeom prst="rect">
+            <a:avLst/>
+          </a:prstGeom>
+          <a:noFill/>
+          <a:ln/>
+        </p:spPr>
+        <p:txBody>
+          <a:bodyPr wrap="square" lIns="0" tIns="0" rIns="0" bIns="0" rtlCol="0" anchor="ctr"/>
+          <a:lstStyle/>
+          <a:p>
+            <a:pPr algn="r" indent="0" marL="0">
+              <a:buNone/>
+            </a:pPr>
+            <a:r>
+              <a:rPr lang="en-US" sz="1000" dirty="0">
+                <a:solidFill>
+                  <a:srgbClr val="8E8E93"/>
+                </a:solidFill>
+                <a:latin typeface="Pretendard" pitchFamily="34" charset="0"/>
+                <a:ea typeface="Pretendard" pitchFamily="34" charset="-122"/>
+                <a:cs typeface="Pretendard" pitchFamily="34" charset="-120"/>
+              </a:rPr>
+              <a:t>20 / 25</a:t>
+            </a:r>
+            <a:endParaRPr lang="en-US" sz="1000" dirty="0"/>
+          </a:p>
+        </p:txBody>
+      </p:sp>
+    </p:spTree>
+  </p:cSld>
+  <p:clrMapOvr>
+    <a:masterClrMapping/>
+  </p:clrMapOvr>
+</p:sld>
+</file>
+
+<file path=ppt/slides/slide21.xml><?xml version="1.0" encoding="utf-8"?>
+<p:sld xmlns:a="http://schemas.openxmlformats.org/drawingml/2006/main" xmlns:r="http://schemas.openxmlformats.org/officeDocument/2006/relationships" xmlns:p="http://schemas.openxmlformats.org/presentationml/2006/main">
+  <p:cSld name="Slide 21">
+    <p:bg>
+      <p:bgPr>
+        <a:solidFill>
+          <a:srgbClr val="FFFFFF"/>
+        </a:solidFill>
+      </p:bgPr>
+    </p:bg>
+    <p:spTree>
+      <p:nvGrpSpPr>
+        <p:cNvPr id="1" name=""/>
+        <p:cNvGrpSpPr/>
+        <p:nvPr/>
+      </p:nvGrpSpPr>
+      <p:grpSpPr>
+        <a:xfrm>
+          <a:off x="0" y="0"/>
+          <a:ext cx="0" cy="0"/>
+          <a:chOff x="0" y="0"/>
+          <a:chExt cx="0" cy="0"/>
+        </a:xfrm>
+      </p:grpSpPr>
+      <p:sp>
+        <p:nvSpPr>
+          <p:cNvPr id="2" name="Text 0"/>
+          <p:cNvSpPr txBox="1"/>
+          <p:nvPr/>
+        </p:nvSpPr>
+        <p:spPr>
+          <a:xfrm>
+            <a:off x="609905" y="320040"/>
+            <a:ext cx="10972800" cy="228600"/>
+          </a:xfrm>
+          <a:prstGeom prst="rect">
+            <a:avLst/>
+          </a:prstGeom>
+          <a:noFill/>
+          <a:ln/>
+        </p:spPr>
+        <p:txBody>
+          <a:bodyPr wrap="square" lIns="0" tIns="0" rIns="0" bIns="0" rtlCol="0" anchor="t"/>
+          <a:lstStyle/>
+          <a:p>
+            <a:pPr indent="0" marL="0">
+              <a:buNone/>
+            </a:pPr>
+            <a:r>
+              <a:rPr lang="en-US" sz="1100" b="1" dirty="0">
+                <a:solidFill>
+                  <a:srgbClr val="0066CC"/>
+                </a:solidFill>
+                <a:latin typeface="Pretendard SemiBold" pitchFamily="34" charset="0"/>
+                <a:ea typeface="Pretendard SemiBold" pitchFamily="34" charset="-122"/>
+                <a:cs typeface="Pretendard SemiBold" pitchFamily="34" charset="-120"/>
+              </a:rPr>
+              <a:t>R7  ·  장애물 통과 · 인게임 배경</a:t>
+            </a:r>
+            <a:endParaRPr lang="en-US" sz="1100" dirty="0"/>
+          </a:p>
+        </p:txBody>
+      </p:sp>
+      <p:sp>
+        <p:nvSpPr>
+          <p:cNvPr id="3" name="Text 1"/>
+          <p:cNvSpPr txBox="1"/>
+          <p:nvPr/>
+        </p:nvSpPr>
+        <p:spPr>
+          <a:xfrm>
+            <a:off x="609905" y="594360"/>
+            <a:ext cx="10972800" cy="777240"/>
+          </a:xfrm>
+          <a:prstGeom prst="rect">
+            <a:avLst/>
+          </a:prstGeom>
+          <a:noFill/>
+          <a:ln/>
+        </p:spPr>
+        <p:txBody>
+          <a:bodyPr wrap="square" lIns="0" tIns="0" rIns="0" bIns="0" rtlCol="0" anchor="t"/>
+          <a:lstStyle/>
+          <a:p>
+            <a:pPr indent="0" marL="0">
+              <a:buNone/>
+            </a:pPr>
+            <a:r>
+              <a:rPr lang="en-US" sz="4000" dirty="0">
+                <a:solidFill>
+                  <a:srgbClr val="1D1D1F"/>
+                </a:solidFill>
+                <a:latin typeface="Pretendard SemiBold" pitchFamily="34" charset="0"/>
+                <a:ea typeface="Pretendard SemiBold" pitchFamily="34" charset="-122"/>
+                <a:cs typeface="Pretendard SemiBold" pitchFamily="34" charset="-120"/>
+              </a:rPr>
+              <a:t>발견한 문제와 조치</a:t>
+            </a:r>
+            <a:endParaRPr lang="en-US" sz="4000" dirty="0"/>
+          </a:p>
+        </p:txBody>
+      </p:sp>
+      <p:sp>
+        <p:nvSpPr>
+          <p:cNvPr id="4" name="Shape 2"/>
+          <p:cNvSpPr/>
+          <p:nvPr/>
+        </p:nvSpPr>
+        <p:spPr>
+          <a:xfrm>
+            <a:off x="609905" y="1417320"/>
+            <a:ext cx="10972800" cy="0"/>
+          </a:xfrm>
+          <a:prstGeom prst="line">
+            <a:avLst/>
+          </a:prstGeom>
+          <a:noFill/>
+          <a:ln w="9525">
+            <a:solidFill>
+              <a:srgbClr val="E0E0E0"/>
+            </a:solidFill>
+            <a:prstDash val="solid"/>
+          </a:ln>
+        </p:spPr>
+      </p:sp>
+      <p:graphicFrame>
+        <p:nvGraphicFramePr>
+          <p:cNvPr id="22" name="Table 0"/>
+          <p:cNvGraphicFramePr>
+            <a:graphicFrameLocks noGrp="1"/>
+          </p:cNvGraphicFramePr>
+          <p:nvPr>
+            <p:extLst>
+              <p:ext uri="{D42A27DB-BD31-4B8C-83A1-F6EECF244321}">
+                <p14:modId xmlns:p14="http://schemas.microsoft.com/office/powerpoint/2010/main" val="1579011935"/>
+              </p:ext>
+            </p:extLst>
+          </p:nvPr>
+        </p:nvGraphicFramePr>
+        <p:xfrm>
+          <a:off x="609905" y="1600200"/>
+          <a:ext cx="10972800" cy="914400"/>
+        </p:xfrm>
+        <a:graphic>
+          <a:graphicData uri="http://schemas.openxmlformats.org/drawingml/2006/table">
+            <a:tbl>
+              <a:tblPr/>
+              <a:tblGrid>
+                <a:gridCol w="731520"/>
+                <a:gridCol w="1188720"/>
+                <a:gridCol w="4206240"/>
+                <a:gridCol w="3931920"/>
+                <a:gridCol w="914400"/>
+              </a:tblGrid>
+              <a:tr h="329184">
+                <a:tc>
+                  <a:txBody>
+                    <a:bodyPr/>
+                    <a:lstStyle/>
+                    <a:p>
+                      <a:pPr indent="0" marL="0">
+                        <a:buNone/>
+                      </a:pPr>
+                      <a:r>
+                        <a:rPr lang="en-US" sz="1200" b="1" dirty="0">
+                          <a:solidFill>
+                            <a:srgbClr val="7A7A7A"/>
+                          </a:solidFill>
+                          <a:latin typeface="Pretendard SemiBold" pitchFamily="34" charset="0"/>
+                          <a:ea typeface="Pretendard SemiBold" pitchFamily="34" charset="-122"/>
+                          <a:cs typeface="Pretendard SemiBold" pitchFamily="34" charset="-120"/>
+                        </a:rPr>
+                        <a:t>심각도</a:t>
+                      </a:r>
+                      <a:endParaRPr lang="en-US" sz="1200" dirty="0">
+                        <a:latin typeface="Pretendard SemiBold" charset="0"/>
+                        <a:ea typeface="Pretendard SemiBold" charset="0"/>
+                        <a:cs typeface="Pretendard SemiBold" charset="0"/>
+                      </a:endParaRPr>
+                    </a:p>
+                  </a:txBody>
+                  <a:tcPr marL="76200" marR="76200" marT="50800" marB="50800" anchor="ctr">
+                    <a:lnL w="0" cap="flat" cmpd="sng" algn="ctr">
+                      <a:noFill/>
+                    </a:lnL>
+                    <a:lnR w="0" cap="flat" cmpd="sng" algn="ctr">
+                      <a:noFill/>
+                    </a:lnR>
+                    <a:lnT w="0" cap="flat" cmpd="sng" algn="ctr">
+                      <a:noFill/>
+                    </a:lnT>
+                    <a:lnB w="9525" cap="flat" cmpd="sng" algn="ctr">
+                      <a:solidFill>
+                        <a:srgbClr val="E0E0E0"/>
+                      </a:solidFill>
+                      <a:prstDash val="solid"/>
+                      <a:round/>
+                      <a:headEnd type="none" w="med" len="med"/>
+                      <a:tailEnd type="none" w="med" len="med"/>
+                    </a:lnB>
+                    <a:solidFill>
+                      <a:srgbClr val="F5F5F7"/>
+                    </a:solidFill>
+                  </a:tcPr>
+                </a:tc>
+                <a:tc>
+                  <a:txBody>
+                    <a:bodyPr/>
+                    <a:lstStyle/>
+                    <a:p>
+                      <a:pPr indent="0" marL="0">
+                        <a:buNone/>
+                      </a:pPr>
+                      <a:r>
+                        <a:rPr lang="en-US" sz="1200" b="1" dirty="0">
+                          <a:solidFill>
+                            <a:srgbClr val="7A7A7A"/>
+                          </a:solidFill>
+                          <a:latin typeface="Pretendard SemiBold" pitchFamily="34" charset="0"/>
+                          <a:ea typeface="Pretendard SemiBold" pitchFamily="34" charset="-122"/>
+                          <a:cs typeface="Pretendard SemiBold" pitchFamily="34" charset="-120"/>
+                        </a:rPr>
+                        <a:t>영역</a:t>
+                      </a:r>
+                      <a:endParaRPr lang="en-US" sz="1200" dirty="0">
+                        <a:latin typeface="Pretendard SemiBold" charset="0"/>
+                        <a:ea typeface="Pretendard SemiBold" charset="0"/>
+                        <a:cs typeface="Pretendard SemiBold" charset="0"/>
+                      </a:endParaRPr>
+                    </a:p>
+                  </a:txBody>
+                  <a:tcPr marL="76200" marR="76200" marT="50800" marB="50800" anchor="ctr">
+                    <a:lnL w="0" cap="flat" cmpd="sng" algn="ctr">
+                      <a:noFill/>
+                    </a:lnL>
+                    <a:lnR w="0" cap="flat" cmpd="sng" algn="ctr">
+                      <a:noFill/>
+                    </a:lnR>
+                    <a:lnT w="0" cap="flat" cmpd="sng" algn="ctr">
+                      <a:noFill/>
+                    </a:lnT>
+                    <a:lnB w="9525" cap="flat" cmpd="sng" algn="ctr">
+                      <a:solidFill>
+                        <a:srgbClr val="E0E0E0"/>
+                      </a:solidFill>
+                      <a:prstDash val="solid"/>
+                      <a:round/>
+                      <a:headEnd type="none" w="med" len="med"/>
+                      <a:tailEnd type="none" w="med" len="med"/>
+                    </a:lnB>
+                    <a:solidFill>
+                      <a:srgbClr val="F5F5F7"/>
+                    </a:solidFill>
+                  </a:tcPr>
+                </a:tc>
+                <a:tc>
+                  <a:txBody>
+                    <a:bodyPr/>
+                    <a:lstStyle/>
+                    <a:p>
+                      <a:pPr indent="0" marL="0">
+                        <a:buNone/>
+                      </a:pPr>
+                      <a:r>
+                        <a:rPr lang="en-US" sz="1200" b="1" dirty="0">
+                          <a:solidFill>
+                            <a:srgbClr val="7A7A7A"/>
+                          </a:solidFill>
+                          <a:latin typeface="Pretendard SemiBold" pitchFamily="34" charset="0"/>
+                          <a:ea typeface="Pretendard SemiBold" pitchFamily="34" charset="-122"/>
+                          <a:cs typeface="Pretendard SemiBold" pitchFamily="34" charset="-120"/>
+                        </a:rPr>
+                        <a:t>문제</a:t>
+                      </a:r>
+                      <a:endParaRPr lang="en-US" sz="1200" dirty="0">
+                        <a:latin typeface="Pretendard SemiBold" charset="0"/>
+                        <a:ea typeface="Pretendard SemiBold" charset="0"/>
+                        <a:cs typeface="Pretendard SemiBold" charset="0"/>
+                      </a:endParaRPr>
+                    </a:p>
+                  </a:txBody>
+                  <a:tcPr marL="76200" marR="76200" marT="50800" marB="50800" anchor="ctr">
+                    <a:lnL w="0" cap="flat" cmpd="sng" algn="ctr">
+                      <a:noFill/>
+                    </a:lnL>
+                    <a:lnR w="0" cap="flat" cmpd="sng" algn="ctr">
+                      <a:noFill/>
+                    </a:lnR>
+                    <a:lnT w="0" cap="flat" cmpd="sng" algn="ctr">
+                      <a:noFill/>
+                    </a:lnT>
+                    <a:lnB w="9525" cap="flat" cmpd="sng" algn="ctr">
+                      <a:solidFill>
+                        <a:srgbClr val="E0E0E0"/>
+                      </a:solidFill>
+                      <a:prstDash val="solid"/>
+                      <a:round/>
+                      <a:headEnd type="none" w="med" len="med"/>
+                      <a:tailEnd type="none" w="med" len="med"/>
+                    </a:lnB>
+                    <a:solidFill>
+                      <a:srgbClr val="F5F5F7"/>
+                    </a:solidFill>
+                  </a:tcPr>
+                </a:tc>
+                <a:tc>
+                  <a:txBody>
+                    <a:bodyPr/>
+                    <a:lstStyle/>
+                    <a:p>
+                      <a:pPr indent="0" marL="0">
+                        <a:buNone/>
+                      </a:pPr>
+                      <a:r>
+                        <a:rPr lang="en-US" sz="1200" b="1" dirty="0">
+                          <a:solidFill>
+                            <a:srgbClr val="7A7A7A"/>
+                          </a:solidFill>
+                          <a:latin typeface="Pretendard SemiBold" pitchFamily="34" charset="0"/>
+                          <a:ea typeface="Pretendard SemiBold" pitchFamily="34" charset="-122"/>
+                          <a:cs typeface="Pretendard SemiBold" pitchFamily="34" charset="-120"/>
+                        </a:rPr>
+                        <a:t>조치</a:t>
+                      </a:r>
+                      <a:endParaRPr lang="en-US" sz="1200" dirty="0">
+                        <a:latin typeface="Pretendard SemiBold" charset="0"/>
+                        <a:ea typeface="Pretendard SemiBold" charset="0"/>
+                        <a:cs typeface="Pretendard SemiBold" charset="0"/>
+                      </a:endParaRPr>
+                    </a:p>
+                  </a:txBody>
+                  <a:tcPr marL="76200" marR="76200" marT="50800" marB="50800" anchor="ctr">
+                    <a:lnL w="0" cap="flat" cmpd="sng" algn="ctr">
+                      <a:noFill/>
+                    </a:lnL>
+                    <a:lnR w="0" cap="flat" cmpd="sng" algn="ctr">
+                      <a:noFill/>
+                    </a:lnR>
+                    <a:lnT w="0" cap="flat" cmpd="sng" algn="ctr">
+                      <a:noFill/>
+                    </a:lnT>
+                    <a:lnB w="9525" cap="flat" cmpd="sng" algn="ctr">
+                      <a:solidFill>
+                        <a:srgbClr val="E0E0E0"/>
+                      </a:solidFill>
+                      <a:prstDash val="solid"/>
+                      <a:round/>
+                      <a:headEnd type="none" w="med" len="med"/>
+                      <a:tailEnd type="none" w="med" len="med"/>
+                    </a:lnB>
+                    <a:solidFill>
+                      <a:srgbClr val="F5F5F7"/>
+                    </a:solidFill>
+                  </a:tcPr>
+                </a:tc>
+                <a:tc>
+                  <a:txBody>
+                    <a:bodyPr/>
+                    <a:lstStyle/>
+                    <a:p>
+                      <a:pPr indent="0" marL="0">
+                        <a:buNone/>
+                      </a:pPr>
+                      <a:r>
+                        <a:rPr lang="en-US" sz="1200" b="1" dirty="0">
+                          <a:solidFill>
+                            <a:srgbClr val="7A7A7A"/>
+                          </a:solidFill>
+                          <a:latin typeface="Pretendard SemiBold" pitchFamily="34" charset="0"/>
+                          <a:ea typeface="Pretendard SemiBold" pitchFamily="34" charset="-122"/>
+                          <a:cs typeface="Pretendard SemiBold" pitchFamily="34" charset="-120"/>
+                        </a:rPr>
+                        <a:t>상태</a:t>
+                      </a:r>
+                      <a:endParaRPr lang="en-US" sz="1200" dirty="0">
+                        <a:latin typeface="Pretendard SemiBold" charset="0"/>
+                        <a:ea typeface="Pretendard SemiBold" charset="0"/>
+                        <a:cs typeface="Pretendard SemiBold" charset="0"/>
+                      </a:endParaRPr>
+                    </a:p>
+                  </a:txBody>
+                  <a:tcPr marL="76200" marR="76200" marT="50800" marB="50800" anchor="ctr">
+                    <a:lnL w="0" cap="flat" cmpd="sng" algn="ctr">
+                      <a:noFill/>
+                    </a:lnL>
+                    <a:lnR w="0" cap="flat" cmpd="sng" algn="ctr">
+                      <a:noFill/>
+                    </a:lnR>
+                    <a:lnT w="0" cap="flat" cmpd="sng" algn="ctr">
+                      <a:noFill/>
+                    </a:lnT>
+                    <a:lnB w="9525" cap="flat" cmpd="sng" algn="ctr">
+                      <a:solidFill>
+                        <a:srgbClr val="E0E0E0"/>
+                      </a:solidFill>
+                      <a:prstDash val="solid"/>
+                      <a:round/>
+                      <a:headEnd type="none" w="med" len="med"/>
+                      <a:tailEnd type="none" w="med" len="med"/>
+                    </a:lnB>
+                    <a:solidFill>
+                      <a:srgbClr val="F5F5F7"/>
+                    </a:solidFill>
+                  </a:tcPr>
+                </a:tc>
+              </a:tr>
+              <a:tr h="866394">
+                <a:tc>
+                  <a:txBody>
+                    <a:bodyPr/>
+                    <a:lstStyle/>
+                    <a:p>
+                      <a:pPr indent="0" marL="0">
+                        <a:buNone/>
+                      </a:pPr>
+                      <a:r>
+                        <a:rPr lang="en-US" sz="1300" b="1" dirty="0">
+                          <a:solidFill>
+                            <a:srgbClr val="0066CC"/>
+                          </a:solidFill>
+                          <a:latin typeface="Pretendard SemiBold" pitchFamily="34" charset="0"/>
+                          <a:ea typeface="Pretendard SemiBold" pitchFamily="34" charset="-122"/>
+                          <a:cs typeface="Pretendard SemiBold" pitchFamily="34" charset="-120"/>
+                        </a:rPr>
+                        <a:t>높음</a:t>
+                      </a:r>
+                      <a:endParaRPr lang="en-US" sz="1300" dirty="0">
+                        <a:latin typeface="Pretendard SemiBold" charset="0"/>
+                        <a:ea typeface="Pretendard SemiBold" charset="0"/>
+                        <a:cs typeface="Pretendard SemiBold" charset="0"/>
+                      </a:endParaRPr>
+                    </a:p>
+                  </a:txBody>
+                  <a:tcPr marL="76200" marR="76200" marT="50800" marB="50800" anchor="ctr">
+                    <a:lnL w="0" cap="flat" cmpd="sng" algn="ctr">
+                      <a:noFill/>
+                    </a:lnL>
+                    <a:lnR w="0" cap="flat" cmpd="sng" algn="ctr">
+                      <a:noFill/>
+                    </a:lnR>
+                    <a:lnT w="0" cap="flat" cmpd="sng" algn="ctr">
+                      <a:noFill/>
+                    </a:lnT>
+                    <a:lnB w="9525" cap="flat" cmpd="sng" algn="ctr">
+                      <a:solidFill>
+                        <a:srgbClr val="E0E0E0"/>
+                      </a:solidFill>
+                      <a:prstDash val="solid"/>
+                      <a:round/>
+                      <a:headEnd type="none" w="med" len="med"/>
+                      <a:tailEnd type="none" w="med" len="med"/>
+                    </a:lnB>
+                    <a:solidFill>
+                      <a:srgbClr val="FFFFFF"/>
+                    </a:solidFill>
+                  </a:tcPr>
+                </a:tc>
+                <a:tc>
+                  <a:txBody>
+                    <a:bodyPr/>
+                    <a:lstStyle/>
+                    <a:p>
+                      <a:pPr indent="0" marL="0">
+                        <a:buNone/>
+                      </a:pPr>
+                      <a:r>
+                        <a:rPr lang="en-US" sz="1300" dirty="0">
+                          <a:solidFill>
+                            <a:srgbClr val="1D1D1F"/>
+                          </a:solidFill>
+                          <a:latin typeface="Pretendard SemiBold" pitchFamily="34" charset="0"/>
+                          <a:ea typeface="Pretendard SemiBold" pitchFamily="34" charset="-122"/>
+                          <a:cs typeface="Pretendard SemiBold" pitchFamily="34" charset="-120"/>
+                        </a:rPr>
+                        <a:t>장애물</a:t>
+                      </a:r>
+                      <a:endParaRPr lang="en-US" sz="1300" dirty="0">
+                        <a:latin typeface="Pretendard SemiBold" charset="0"/>
+                        <a:ea typeface="Pretendard SemiBold" charset="0"/>
+                        <a:cs typeface="Pretendard SemiBold" charset="0"/>
+                      </a:endParaRPr>
+                    </a:p>
+                  </a:txBody>
+                  <a:tcPr marL="76200" marR="76200" marT="50800" marB="50800" anchor="ctr">
+                    <a:lnL w="0" cap="flat" cmpd="sng" algn="ctr">
+                      <a:noFill/>
+                    </a:lnL>
+                    <a:lnR w="0" cap="flat" cmpd="sng" algn="ctr">
+                      <a:noFill/>
+                    </a:lnR>
+                    <a:lnT w="0" cap="flat" cmpd="sng" algn="ctr">
+                      <a:noFill/>
+                    </a:lnT>
+                    <a:lnB w="9525" cap="flat" cmpd="sng" algn="ctr">
+                      <a:solidFill>
+                        <a:srgbClr val="E0E0E0"/>
+                      </a:solidFill>
+                      <a:prstDash val="solid"/>
+                      <a:round/>
+                      <a:headEnd type="none" w="med" len="med"/>
+                      <a:tailEnd type="none" w="med" len="med"/>
+                    </a:lnB>
+                    <a:solidFill>
+                      <a:srgbClr val="FFFFFF"/>
+                    </a:solidFill>
+                  </a:tcPr>
+                </a:tc>
+                <a:tc>
+                  <a:txBody>
+                    <a:bodyPr/>
+                    <a:lstStyle/>
+                    <a:p>
+                      <a:pPr indent="0" marL="0">
+                        <a:buNone/>
+                      </a:pPr>
+                      <a:r>
+                        <a:rPr lang="en-US" sz="1300" dirty="0">
+                          <a:solidFill>
+                            <a:srgbClr val="333333"/>
+                          </a:solidFill>
+                          <a:latin typeface="Pretendard" pitchFamily="34" charset="0"/>
+                          <a:ea typeface="Pretendard" pitchFamily="34" charset="-122"/>
+                          <a:cs typeface="Pretendard" pitchFamily="34" charset="-120"/>
+                        </a:rPr>
+                        <a:t>원 · 삼각 장애물 그림이 콜라이더의 2배(64px/32ppu 스프라이트에 크기를 그대로 곱함) — 하수구 · 강 · 바다에서 물고기가 장애물 바깥 절반을 뚫고 지나가 보임</a:t>
+                      </a:r>
+                      <a:endParaRPr lang="en-US" sz="1300" dirty="0">
+                        <a:latin typeface="Pretendard" charset="0"/>
+                        <a:ea typeface="Pretendard" charset="0"/>
+                        <a:cs typeface="Pretendard" charset="0"/>
+                      </a:endParaRPr>
+                    </a:p>
+                  </a:txBody>
+                  <a:tcPr marL="76200" marR="76200" marT="50800" marB="50800" anchor="ctr">
+                    <a:lnL w="0" cap="flat" cmpd="sng" algn="ctr">
+                      <a:noFill/>
+                    </a:lnL>
+                    <a:lnR w="0" cap="flat" cmpd="sng" algn="ctr">
+                      <a:noFill/>
+                    </a:lnR>
+                    <a:lnT w="0" cap="flat" cmpd="sng" algn="ctr">
+                      <a:noFill/>
+                    </a:lnT>
+                    <a:lnB w="9525" cap="flat" cmpd="sng" algn="ctr">
+                      <a:solidFill>
+                        <a:srgbClr val="E0E0E0"/>
+                      </a:solidFill>
+                      <a:prstDash val="solid"/>
+                      <a:round/>
+                      <a:headEnd type="none" w="med" len="med"/>
+                      <a:tailEnd type="none" w="med" len="med"/>
+                    </a:lnB>
+                    <a:solidFill>
+                      <a:srgbClr val="FFFFFF"/>
+                    </a:solidFill>
+                  </a:tcPr>
+                </a:tc>
+                <a:tc>
+                  <a:txBody>
+                    <a:bodyPr/>
+                    <a:lstStyle/>
+                    <a:p>
+                      <a:pPr indent="0" marL="0">
+                        <a:buNone/>
+                      </a:pPr>
+                      <a:r>
+                        <a:rPr lang="en-US" sz="1300" dirty="0">
+                          <a:solidFill>
+                            <a:srgbClr val="333333"/>
+                          </a:solidFill>
+                          <a:latin typeface="Pretendard" pitchFamily="34" charset="0"/>
+                          <a:ea typeface="Pretendard" pitchFamily="34" charset="-122"/>
+                          <a:cs typeface="Pretendard" pitchFamily="34" charset="-120"/>
+                        </a:rPr>
+                        <a:t>스프라이트 실제 크기로 나눠 그림 = 콜라이더</a:t>
+                      </a:r>
+                      <a:endParaRPr lang="en-US" sz="1300" dirty="0">
+                        <a:latin typeface="Pretendard" charset="0"/>
+                        <a:ea typeface="Pretendard" charset="0"/>
+                        <a:cs typeface="Pretendard" charset="0"/>
+                      </a:endParaRPr>
+                    </a:p>
+                  </a:txBody>
+                  <a:tcPr marL="76200" marR="76200" marT="50800" marB="50800" anchor="ctr">
+                    <a:lnL w="0" cap="flat" cmpd="sng" algn="ctr">
+                      <a:noFill/>
+                    </a:lnL>
+                    <a:lnR w="0" cap="flat" cmpd="sng" algn="ctr">
+                      <a:noFill/>
+                    </a:lnR>
+                    <a:lnT w="0" cap="flat" cmpd="sng" algn="ctr">
+                      <a:noFill/>
+                    </a:lnT>
+                    <a:lnB w="9525" cap="flat" cmpd="sng" algn="ctr">
+                      <a:solidFill>
+                        <a:srgbClr val="E0E0E0"/>
+                      </a:solidFill>
+                      <a:prstDash val="solid"/>
+                      <a:round/>
+                      <a:headEnd type="none" w="med" len="med"/>
+                      <a:tailEnd type="none" w="med" len="med"/>
+                    </a:lnB>
+                    <a:solidFill>
+                      <a:srgbClr val="FFFFFF"/>
+                    </a:solidFill>
+                  </a:tcPr>
+                </a:tc>
+                <a:tc>
+                  <a:txBody>
+                    <a:bodyPr/>
+                    <a:lstStyle/>
+                    <a:p>
+                      <a:pPr algn="ctr" indent="0" marL="0">
+                        <a:buNone/>
+                      </a:pPr>
+                      <a:r>
+                        <a:rPr lang="en-US" sz="1300" dirty="0">
+                          <a:solidFill>
+                            <a:srgbClr val="0066CC"/>
+                          </a:solidFill>
+                          <a:latin typeface="Pretendard Medium" pitchFamily="34" charset="0"/>
+                          <a:ea typeface="Pretendard Medium" pitchFamily="34" charset="-122"/>
+                          <a:cs typeface="Pretendard Medium" pitchFamily="34" charset="-120"/>
+                        </a:rPr>
+                        <a:t>✓ 수정</a:t>
+                      </a:r>
+                      <a:endParaRPr lang="en-US" sz="1300" dirty="0">
+                        <a:latin typeface="Pretendard Medium" charset="0"/>
+                        <a:ea typeface="Pretendard Medium" charset="0"/>
+                        <a:cs typeface="Pretendard Medium" charset="0"/>
+                      </a:endParaRPr>
+                    </a:p>
+                  </a:txBody>
+                  <a:tcPr marL="76200" marR="76200" marT="50800" marB="50800" anchor="ctr">
+                    <a:lnL w="0" cap="flat" cmpd="sng" algn="ctr">
+                      <a:noFill/>
+                    </a:lnL>
+                    <a:lnR w="0" cap="flat" cmpd="sng" algn="ctr">
+                      <a:noFill/>
+                    </a:lnR>
+                    <a:lnT w="0" cap="flat" cmpd="sng" algn="ctr">
+                      <a:noFill/>
+                    </a:lnT>
+                    <a:lnB w="9525" cap="flat" cmpd="sng" algn="ctr">
+                      <a:solidFill>
+                        <a:srgbClr val="E0E0E0"/>
+                      </a:solidFill>
+                      <a:prstDash val="solid"/>
+                      <a:round/>
+                      <a:headEnd type="none" w="med" len="med"/>
+                      <a:tailEnd type="none" w="med" len="med"/>
+                    </a:lnB>
+                    <a:solidFill>
+                      <a:srgbClr val="FFFFFF"/>
+                    </a:solidFill>
+                  </a:tcPr>
+                </a:tc>
+              </a:tr>
+              <a:tr h="638556">
+                <a:tc>
+                  <a:txBody>
+                    <a:bodyPr/>
+                    <a:lstStyle/>
+                    <a:p>
+                      <a:pPr indent="0" marL="0">
+                        <a:buNone/>
+                      </a:pPr>
+                      <a:r>
+                        <a:rPr lang="en-US" sz="1300" dirty="0">
+                          <a:solidFill>
+                            <a:srgbClr val="1D1D1F"/>
+                          </a:solidFill>
+                          <a:latin typeface="Pretendard Medium" pitchFamily="34" charset="0"/>
+                          <a:ea typeface="Pretendard Medium" pitchFamily="34" charset="-122"/>
+                          <a:cs typeface="Pretendard Medium" pitchFamily="34" charset="-120"/>
+                        </a:rPr>
+                        <a:t>중간</a:t>
+                      </a:r>
+                      <a:endParaRPr lang="en-US" sz="1300" dirty="0">
+                        <a:latin typeface="Pretendard Medium" charset="0"/>
+                        <a:ea typeface="Pretendard Medium" charset="0"/>
+                        <a:cs typeface="Pretendard Medium" charset="0"/>
+                      </a:endParaRPr>
+                    </a:p>
+                  </a:txBody>
+                  <a:tcPr marL="76200" marR="76200" marT="50800" marB="50800" anchor="ctr">
+                    <a:lnL w="0" cap="flat" cmpd="sng" algn="ctr">
+                      <a:noFill/>
+                    </a:lnL>
+                    <a:lnR w="0" cap="flat" cmpd="sng" algn="ctr">
+                      <a:noFill/>
+                    </a:lnR>
+                    <a:lnT w="0" cap="flat" cmpd="sng" algn="ctr">
+                      <a:noFill/>
+                    </a:lnT>
+                    <a:lnB w="9525" cap="flat" cmpd="sng" algn="ctr">
+                      <a:solidFill>
+                        <a:srgbClr val="E0E0E0"/>
+                      </a:solidFill>
+                      <a:prstDash val="solid"/>
+                      <a:round/>
+                      <a:headEnd type="none" w="med" len="med"/>
+                      <a:tailEnd type="none" w="med" len="med"/>
+                    </a:lnB>
+                    <a:solidFill>
+                      <a:srgbClr val="FFFFFF"/>
+                    </a:solidFill>
+                  </a:tcPr>
+                </a:tc>
+                <a:tc>
+                  <a:txBody>
+                    <a:bodyPr/>
+                    <a:lstStyle/>
+                    <a:p>
+                      <a:pPr indent="0" marL="0">
+                        <a:buNone/>
+                      </a:pPr>
+                      <a:r>
+                        <a:rPr lang="en-US" sz="1300" dirty="0">
+                          <a:solidFill>
+                            <a:srgbClr val="1D1D1F"/>
+                          </a:solidFill>
+                          <a:latin typeface="Pretendard SemiBold" pitchFamily="34" charset="0"/>
+                          <a:ea typeface="Pretendard SemiBold" pitchFamily="34" charset="-122"/>
+                          <a:cs typeface="Pretendard SemiBold" pitchFamily="34" charset="-120"/>
+                        </a:rPr>
+                        <a:t>AI 물고기</a:t>
+                      </a:r>
+                      <a:endParaRPr lang="en-US" sz="1300" dirty="0">
+                        <a:latin typeface="Pretendard SemiBold" charset="0"/>
+                        <a:ea typeface="Pretendard SemiBold" charset="0"/>
+                        <a:cs typeface="Pretendard SemiBold" charset="0"/>
+                      </a:endParaRPr>
+                    </a:p>
+                  </a:txBody>
+                  <a:tcPr marL="76200" marR="76200" marT="50800" marB="50800" anchor="ctr">
+                    <a:lnL w="0" cap="flat" cmpd="sng" algn="ctr">
+                      <a:noFill/>
+                    </a:lnL>
+                    <a:lnR w="0" cap="flat" cmpd="sng" algn="ctr">
+                      <a:noFill/>
+                    </a:lnR>
+                    <a:lnT w="0" cap="flat" cmpd="sng" algn="ctr">
+                      <a:noFill/>
+                    </a:lnT>
+                    <a:lnB w="9525" cap="flat" cmpd="sng" algn="ctr">
+                      <a:solidFill>
+                        <a:srgbClr val="E0E0E0"/>
+                      </a:solidFill>
+                      <a:prstDash val="solid"/>
+                      <a:round/>
+                      <a:headEnd type="none" w="med" len="med"/>
+                      <a:tailEnd type="none" w="med" len="med"/>
+                    </a:lnB>
+                    <a:solidFill>
+                      <a:srgbClr val="FFFFFF"/>
+                    </a:solidFill>
+                  </a:tcPr>
+                </a:tc>
+                <a:tc>
+                  <a:txBody>
+                    <a:bodyPr/>
+                    <a:lstStyle/>
+                    <a:p>
+                      <a:pPr indent="0" marL="0">
+                        <a:buNone/>
+                      </a:pPr>
+                      <a:r>
+                        <a:rPr lang="en-US" sz="1300" dirty="0">
+                          <a:solidFill>
+                            <a:srgbClr val="333333"/>
+                          </a:solidFill>
+                          <a:latin typeface="Pretendard" pitchFamily="34" charset="0"/>
+                          <a:ea typeface="Pretendard" pitchFamily="34" charset="-122"/>
+                          <a:cs typeface="Pretendard" pitchFamily="34" charset="-120"/>
+                        </a:rPr>
+                        <a:t>AI는 트리거 콜라이더 + 충돌표에서 벽 제외 — 쫓거나 돌진할 때 회피 힘을 이겨 장애물을 관통</a:t>
+                      </a:r>
+                      <a:endParaRPr lang="en-US" sz="1300" dirty="0">
+                        <a:latin typeface="Pretendard" charset="0"/>
+                        <a:ea typeface="Pretendard" charset="0"/>
+                        <a:cs typeface="Pretendard" charset="0"/>
+                      </a:endParaRPr>
+                    </a:p>
+                  </a:txBody>
+                  <a:tcPr marL="76200" marR="76200" marT="50800" marB="50800" anchor="ctr">
+                    <a:lnL w="0" cap="flat" cmpd="sng" algn="ctr">
+                      <a:noFill/>
+                    </a:lnL>
+                    <a:lnR w="0" cap="flat" cmpd="sng" algn="ctr">
+                      <a:noFill/>
+                    </a:lnR>
+                    <a:lnT w="0" cap="flat" cmpd="sng" algn="ctr">
+                      <a:noFill/>
+                    </a:lnT>
+                    <a:lnB w="9525" cap="flat" cmpd="sng" algn="ctr">
+                      <a:solidFill>
+                        <a:srgbClr val="E0E0E0"/>
+                      </a:solidFill>
+                      <a:prstDash val="solid"/>
+                      <a:round/>
+                      <a:headEnd type="none" w="med" len="med"/>
+                      <a:tailEnd type="none" w="med" len="med"/>
+                    </a:lnB>
+                    <a:solidFill>
+                      <a:srgbClr val="FFFFFF"/>
+                    </a:solidFill>
+                  </a:tcPr>
+                </a:tc>
+                <a:tc>
+                  <a:txBody>
+                    <a:bodyPr/>
+                    <a:lstStyle/>
+                    <a:p>
+                      <a:pPr indent="0" marL="0">
+                        <a:buNone/>
+                      </a:pPr>
+                      <a:r>
+                        <a:rPr lang="en-US" sz="1300" dirty="0">
+                          <a:solidFill>
+                            <a:srgbClr val="333333"/>
+                          </a:solidFill>
+                          <a:latin typeface="Pretendard" pitchFamily="34" charset="0"/>
+                          <a:ea typeface="Pretendard" pitchFamily="34" charset="-122"/>
+                          <a:cs typeface="Pretendard" pitchFamily="34" charset="-120"/>
+                        </a:rPr>
+                        <a:t>매 물리 프레임 실제 모양(네모 · 원 · 삼각)으로 겹침을 풀고 장애물 쪽 속도 제거</a:t>
+                      </a:r>
+                      <a:endParaRPr lang="en-US" sz="1300" dirty="0">
+                        <a:latin typeface="Pretendard" charset="0"/>
+                        <a:ea typeface="Pretendard" charset="0"/>
+                        <a:cs typeface="Pretendard" charset="0"/>
+                      </a:endParaRPr>
+                    </a:p>
+                  </a:txBody>
+                  <a:tcPr marL="76200" marR="76200" marT="50800" marB="50800" anchor="ctr">
+                    <a:lnL w="0" cap="flat" cmpd="sng" algn="ctr">
+                      <a:noFill/>
+                    </a:lnL>
+                    <a:lnR w="0" cap="flat" cmpd="sng" algn="ctr">
+                      <a:noFill/>
+                    </a:lnR>
+                    <a:lnT w="0" cap="flat" cmpd="sng" algn="ctr">
+                      <a:noFill/>
+                    </a:lnT>
+                    <a:lnB w="9525" cap="flat" cmpd="sng" algn="ctr">
+                      <a:solidFill>
+                        <a:srgbClr val="E0E0E0"/>
+                      </a:solidFill>
+                      <a:prstDash val="solid"/>
+                      <a:round/>
+                      <a:headEnd type="none" w="med" len="med"/>
+                      <a:tailEnd type="none" w="med" len="med"/>
+                    </a:lnB>
+                    <a:solidFill>
+                      <a:srgbClr val="FFFFFF"/>
+                    </a:solidFill>
+                  </a:tcPr>
+                </a:tc>
+                <a:tc>
+                  <a:txBody>
+                    <a:bodyPr/>
+                    <a:lstStyle/>
+                    <a:p>
+                      <a:pPr algn="ctr" indent="0" marL="0">
+                        <a:buNone/>
+                      </a:pPr>
+                      <a:r>
+                        <a:rPr lang="en-US" sz="1300" dirty="0">
+                          <a:solidFill>
+                            <a:srgbClr val="0066CC"/>
+                          </a:solidFill>
+                          <a:latin typeface="Pretendard Medium" pitchFamily="34" charset="0"/>
+                          <a:ea typeface="Pretendard Medium" pitchFamily="34" charset="-122"/>
+                          <a:cs typeface="Pretendard Medium" pitchFamily="34" charset="-120"/>
+                        </a:rPr>
+                        <a:t>✓ 수정</a:t>
+                      </a:r>
+                      <a:endParaRPr lang="en-US" sz="1300" dirty="0">
+                        <a:latin typeface="Pretendard Medium" charset="0"/>
+                        <a:ea typeface="Pretendard Medium" charset="0"/>
+                        <a:cs typeface="Pretendard Medium" charset="0"/>
+                      </a:endParaRPr>
+                    </a:p>
+                  </a:txBody>
+                  <a:tcPr marL="76200" marR="76200" marT="50800" marB="50800" anchor="ctr">
+                    <a:lnL w="0" cap="flat" cmpd="sng" algn="ctr">
+                      <a:noFill/>
+                    </a:lnL>
+                    <a:lnR w="0" cap="flat" cmpd="sng" algn="ctr">
+                      <a:noFill/>
+                    </a:lnR>
+                    <a:lnT w="0" cap="flat" cmpd="sng" algn="ctr">
+                      <a:noFill/>
+                    </a:lnT>
+                    <a:lnB w="9525" cap="flat" cmpd="sng" algn="ctr">
+                      <a:solidFill>
+                        <a:srgbClr val="E0E0E0"/>
+                      </a:solidFill>
+                      <a:prstDash val="solid"/>
+                      <a:round/>
+                      <a:headEnd type="none" w="med" len="med"/>
+                      <a:tailEnd type="none" w="med" len="med"/>
+                    </a:lnB>
+                    <a:solidFill>
+                      <a:srgbClr val="FFFFFF"/>
+                    </a:solidFill>
+                  </a:tcPr>
+                </a:tc>
+              </a:tr>
+              <a:tr h="638556">
+                <a:tc>
+                  <a:txBody>
+                    <a:bodyPr/>
+                    <a:lstStyle/>
+                    <a:p>
+                      <a:pPr indent="0" marL="0">
+                        <a:buNone/>
+                      </a:pPr>
+                      <a:r>
+                        <a:rPr lang="en-US" sz="1300" dirty="0">
+                          <a:solidFill>
+                            <a:srgbClr val="7A7A7A"/>
+                          </a:solidFill>
+                          <a:latin typeface="Pretendard" pitchFamily="34" charset="0"/>
+                          <a:ea typeface="Pretendard" pitchFamily="34" charset="-122"/>
+                          <a:cs typeface="Pretendard" pitchFamily="34" charset="-120"/>
+                        </a:rPr>
+                        <a:t>낮음</a:t>
+                      </a:r>
+                      <a:endParaRPr lang="en-US" sz="1300" dirty="0">
+                        <a:latin typeface="Pretendard" charset="0"/>
+                        <a:ea typeface="Pretendard" charset="0"/>
+                        <a:cs typeface="Pretendard" charset="0"/>
+                      </a:endParaRPr>
+                    </a:p>
+                  </a:txBody>
+                  <a:tcPr marL="76200" marR="76200" marT="50800" marB="50800" anchor="ctr">
+                    <a:lnL w="0" cap="flat" cmpd="sng" algn="ctr">
+                      <a:noFill/>
+                    </a:lnL>
+                    <a:lnR w="0" cap="flat" cmpd="sng" algn="ctr">
+                      <a:noFill/>
+                    </a:lnR>
+                    <a:lnT w="0" cap="flat" cmpd="sng" algn="ctr">
+                      <a:noFill/>
+                    </a:lnT>
+                    <a:lnB w="9525" cap="flat" cmpd="sng" algn="ctr">
+                      <a:solidFill>
+                        <a:srgbClr val="E0E0E0"/>
+                      </a:solidFill>
+                      <a:prstDash val="solid"/>
+                      <a:round/>
+                      <a:headEnd type="none" w="med" len="med"/>
+                      <a:tailEnd type="none" w="med" len="med"/>
+                    </a:lnB>
+                    <a:solidFill>
+                      <a:srgbClr val="FFFFFF"/>
+                    </a:solidFill>
+                  </a:tcPr>
+                </a:tc>
+                <a:tc>
+                  <a:txBody>
+                    <a:bodyPr/>
+                    <a:lstStyle/>
+                    <a:p>
+                      <a:pPr indent="0" marL="0">
+                        <a:buNone/>
+                      </a:pPr>
+                      <a:r>
+                        <a:rPr lang="en-US" sz="1300" dirty="0">
+                          <a:solidFill>
+                            <a:srgbClr val="1D1D1F"/>
+                          </a:solidFill>
+                          <a:latin typeface="Pretendard SemiBold" pitchFamily="34" charset="0"/>
+                          <a:ea typeface="Pretendard SemiBold" pitchFamily="34" charset="-122"/>
+                          <a:cs typeface="Pretendard SemiBold" pitchFamily="34" charset="-120"/>
+                        </a:rPr>
+                        <a:t>플레이어</a:t>
+                      </a:r>
+                      <a:endParaRPr lang="en-US" sz="1300" dirty="0">
+                        <a:latin typeface="Pretendard SemiBold" charset="0"/>
+                        <a:ea typeface="Pretendard SemiBold" charset="0"/>
+                        <a:cs typeface="Pretendard SemiBold" charset="0"/>
+                      </a:endParaRPr>
+                    </a:p>
+                  </a:txBody>
+                  <a:tcPr marL="76200" marR="76200" marT="50800" marB="50800" anchor="ctr">
+                    <a:lnL w="0" cap="flat" cmpd="sng" algn="ctr">
+                      <a:noFill/>
+                    </a:lnL>
+                    <a:lnR w="0" cap="flat" cmpd="sng" algn="ctr">
+                      <a:noFill/>
+                    </a:lnR>
+                    <a:lnT w="0" cap="flat" cmpd="sng" algn="ctr">
+                      <a:noFill/>
+                    </a:lnT>
+                    <a:lnB w="9525" cap="flat" cmpd="sng" algn="ctr">
+                      <a:solidFill>
+                        <a:srgbClr val="E0E0E0"/>
+                      </a:solidFill>
+                      <a:prstDash val="solid"/>
+                      <a:round/>
+                      <a:headEnd type="none" w="med" len="med"/>
+                      <a:tailEnd type="none" w="med" len="med"/>
+                    </a:lnB>
+                    <a:solidFill>
+                      <a:srgbClr val="FFFFFF"/>
+                    </a:solidFill>
+                  </a:tcPr>
+                </a:tc>
+                <a:tc>
+                  <a:txBody>
+                    <a:bodyPr/>
+                    <a:lstStyle/>
+                    <a:p>
+                      <a:pPr indent="0" marL="0">
+                        <a:buNone/>
+                      </a:pPr>
+                      <a:r>
+                        <a:rPr lang="en-US" sz="1300" dirty="0">
+                          <a:solidFill>
+                            <a:srgbClr val="333333"/>
+                          </a:solidFill>
+                          <a:latin typeface="Pretendard" pitchFamily="34" charset="0"/>
+                          <a:ea typeface="Pretendard" pitchFamily="34" charset="-122"/>
+                          <a:cs typeface="Pretendard" pitchFamily="34" charset="-120"/>
+                        </a:rPr>
+                        <a:t>부스터처럼 빠를 때 한 프레임에 콜라이더를 건너뛸 수 있음</a:t>
+                      </a:r>
+                      <a:endParaRPr lang="en-US" sz="1300" dirty="0">
+                        <a:latin typeface="Pretendard" charset="0"/>
+                        <a:ea typeface="Pretendard" charset="0"/>
+                        <a:cs typeface="Pretendard" charset="0"/>
+                      </a:endParaRPr>
+                    </a:p>
+                  </a:txBody>
+                  <a:tcPr marL="76200" marR="76200" marT="50800" marB="50800" anchor="ctr">
+                    <a:lnL w="0" cap="flat" cmpd="sng" algn="ctr">
+                      <a:noFill/>
+                    </a:lnL>
+                    <a:lnR w="0" cap="flat" cmpd="sng" algn="ctr">
+                      <a:noFill/>
+                    </a:lnR>
+                    <a:lnT w="0" cap="flat" cmpd="sng" algn="ctr">
+                      <a:noFill/>
+                    </a:lnT>
+                    <a:lnB w="9525" cap="flat" cmpd="sng" algn="ctr">
+                      <a:solidFill>
+                        <a:srgbClr val="E0E0E0"/>
+                      </a:solidFill>
+                      <a:prstDash val="solid"/>
+                      <a:round/>
+                      <a:headEnd type="none" w="med" len="med"/>
+                      <a:tailEnd type="none" w="med" len="med"/>
+                    </a:lnB>
+                    <a:solidFill>
+                      <a:srgbClr val="FFFFFF"/>
+                    </a:solidFill>
+                  </a:tcPr>
+                </a:tc>
+                <a:tc>
+                  <a:txBody>
+                    <a:bodyPr/>
+                    <a:lstStyle/>
+                    <a:p>
+                      <a:pPr indent="0" marL="0">
+                        <a:buNone/>
+                      </a:pPr>
+                      <a:r>
+                        <a:rPr lang="en-US" sz="1300" dirty="0">
+                          <a:solidFill>
+                            <a:srgbClr val="333333"/>
+                          </a:solidFill>
+                          <a:latin typeface="Pretendard" pitchFamily="34" charset="0"/>
+                          <a:ea typeface="Pretendard" pitchFamily="34" charset="-122"/>
+                          <a:cs typeface="Pretendard" pitchFamily="34" charset="-120"/>
+                        </a:rPr>
+                        <a:t>벽 안전망과 같은 자리에서 장애물 밀어내기</a:t>
+                      </a:r>
+                      <a:endParaRPr lang="en-US" sz="1300" dirty="0">
+                        <a:latin typeface="Pretendard" charset="0"/>
+                        <a:ea typeface="Pretendard" charset="0"/>
+                        <a:cs typeface="Pretendard" charset="0"/>
+                      </a:endParaRPr>
+                    </a:p>
+                  </a:txBody>
+                  <a:tcPr marL="76200" marR="76200" marT="50800" marB="50800" anchor="ctr">
+                    <a:lnL w="0" cap="flat" cmpd="sng" algn="ctr">
+                      <a:noFill/>
+                    </a:lnL>
+                    <a:lnR w="0" cap="flat" cmpd="sng" algn="ctr">
+                      <a:noFill/>
+                    </a:lnR>
+                    <a:lnT w="0" cap="flat" cmpd="sng" algn="ctr">
+                      <a:noFill/>
+                    </a:lnT>
+                    <a:lnB w="9525" cap="flat" cmpd="sng" algn="ctr">
+                      <a:solidFill>
+                        <a:srgbClr val="E0E0E0"/>
+                      </a:solidFill>
+                      <a:prstDash val="solid"/>
+                      <a:round/>
+                      <a:headEnd type="none" w="med" len="med"/>
+                      <a:tailEnd type="none" w="med" len="med"/>
+                    </a:lnB>
+                    <a:solidFill>
+                      <a:srgbClr val="FFFFFF"/>
+                    </a:solidFill>
+                  </a:tcPr>
+                </a:tc>
+                <a:tc>
+                  <a:txBody>
+                    <a:bodyPr/>
+                    <a:lstStyle/>
+                    <a:p>
+                      <a:pPr algn="ctr" indent="0" marL="0">
+                        <a:buNone/>
+                      </a:pPr>
+                      <a:r>
+                        <a:rPr lang="en-US" sz="1300" dirty="0">
+                          <a:solidFill>
+                            <a:srgbClr val="0066CC"/>
+                          </a:solidFill>
+                          <a:latin typeface="Pretendard Medium" pitchFamily="34" charset="0"/>
+                          <a:ea typeface="Pretendard Medium" pitchFamily="34" charset="-122"/>
+                          <a:cs typeface="Pretendard Medium" pitchFamily="34" charset="-120"/>
+                        </a:rPr>
+                        <a:t>✓ 수정</a:t>
+                      </a:r>
+                      <a:endParaRPr lang="en-US" sz="1300" dirty="0">
+                        <a:latin typeface="Pretendard Medium" charset="0"/>
+                        <a:ea typeface="Pretendard Medium" charset="0"/>
+                        <a:cs typeface="Pretendard Medium" charset="0"/>
+                      </a:endParaRPr>
+                    </a:p>
+                  </a:txBody>
+                  <a:tcPr marL="76200" marR="76200" marT="50800" marB="50800" anchor="ctr">
+                    <a:lnL w="0" cap="flat" cmpd="sng" algn="ctr">
+                      <a:noFill/>
+                    </a:lnL>
+                    <a:lnR w="0" cap="flat" cmpd="sng" algn="ctr">
+                      <a:noFill/>
+                    </a:lnR>
+                    <a:lnT w="0" cap="flat" cmpd="sng" algn="ctr">
+                      <a:noFill/>
+                    </a:lnT>
+                    <a:lnB w="9525" cap="flat" cmpd="sng" algn="ctr">
+                      <a:solidFill>
+                        <a:srgbClr val="E0E0E0"/>
+                      </a:solidFill>
+                      <a:prstDash val="solid"/>
+                      <a:round/>
+                      <a:headEnd type="none" w="med" len="med"/>
+                      <a:tailEnd type="none" w="med" len="med"/>
+                    </a:lnB>
+                    <a:solidFill>
+                      <a:srgbClr val="FFFFFF"/>
+                    </a:solidFill>
+                  </a:tcPr>
+                </a:tc>
+              </a:tr>
+            </a:tbl>
+          </a:graphicData>
+        </a:graphic>
+      </p:graphicFrame>
+      <p:sp>
+        <p:nvSpPr>
+          <p:cNvPr id="6" name="Text 3"/>
+          <p:cNvSpPr txBox="1"/>
+          <p:nvPr/>
+        </p:nvSpPr>
+        <p:spPr>
+          <a:xfrm>
+            <a:off x="609905" y="5257800"/>
+            <a:ext cx="2651760" cy="502920"/>
+          </a:xfrm>
+          <a:prstGeom prst="rect">
+            <a:avLst/>
+          </a:prstGeom>
+          <a:noFill/>
+          <a:ln/>
+        </p:spPr>
+        <p:txBody>
+          <a:bodyPr wrap="square" lIns="0" tIns="0" rIns="0" bIns="0" rtlCol="0" anchor="ctr"/>
+          <a:lstStyle/>
+          <a:p>
+            <a:pPr indent="0" marL="0">
+              <a:buNone/>
+            </a:pPr>
+            <a:r>
+              <a:rPr lang="en-US" sz="2800" dirty="0">
+                <a:solidFill>
+                  <a:srgbClr val="1D1D1F"/>
+                </a:solidFill>
+                <a:latin typeface="Pretendard SemiBold" pitchFamily="34" charset="0"/>
+                <a:ea typeface="Pretendard SemiBold" pitchFamily="34" charset="-122"/>
+                <a:cs typeface="Pretendard SemiBold" pitchFamily="34" charset="-120"/>
+              </a:rPr>
+              <a:t>3건</a:t>
+            </a:r>
+            <a:endParaRPr lang="en-US" sz="2800" dirty="0"/>
+          </a:p>
+        </p:txBody>
+      </p:sp>
+      <p:sp>
+        <p:nvSpPr>
+          <p:cNvPr id="7" name="Text 4"/>
+          <p:cNvSpPr txBox="1"/>
+          <p:nvPr/>
+        </p:nvSpPr>
+        <p:spPr>
+          <a:xfrm>
+            <a:off x="609905" y="5788152"/>
+            <a:ext cx="2651760" cy="228600"/>
+          </a:xfrm>
+          <a:prstGeom prst="rect">
+            <a:avLst/>
+          </a:prstGeom>
+          <a:noFill/>
+          <a:ln/>
+        </p:spPr>
+        <p:txBody>
+          <a:bodyPr wrap="square" lIns="0" tIns="0" rIns="0" bIns="0" rtlCol="0" anchor="t"/>
+          <a:lstStyle/>
+          <a:p>
+            <a:pPr indent="0" marL="0">
+              <a:buNone/>
+            </a:pPr>
+            <a:r>
+              <a:rPr lang="en-US" sz="1200" dirty="0">
+                <a:solidFill>
+                  <a:srgbClr val="7A7A7A"/>
+                </a:solidFill>
+                <a:latin typeface="Pretendard" pitchFamily="34" charset="0"/>
+                <a:ea typeface="Pretendard" pitchFamily="34" charset="-122"/>
+                <a:cs typeface="Pretendard" pitchFamily="34" charset="-120"/>
+              </a:rPr>
+              <a:t>이 회차에서 발견</a:t>
+            </a:r>
+            <a:endParaRPr lang="en-US" sz="1200" dirty="0"/>
+          </a:p>
+        </p:txBody>
+      </p:sp>
+      <p:sp>
+        <p:nvSpPr>
+          <p:cNvPr id="8" name="Shape 5"/>
+          <p:cNvSpPr/>
+          <p:nvPr/>
+        </p:nvSpPr>
+        <p:spPr>
+          <a:xfrm>
+            <a:off x="3353105" y="5303520"/>
+            <a:ext cx="0" cy="868680"/>
+          </a:xfrm>
+          <a:prstGeom prst="line">
+            <a:avLst/>
+          </a:prstGeom>
+          <a:noFill/>
+          <a:ln w="9525">
+            <a:solidFill>
+              <a:srgbClr val="E0E0E0"/>
+            </a:solidFill>
+            <a:prstDash val="solid"/>
+          </a:ln>
+        </p:spPr>
+      </p:sp>
+      <p:sp>
+        <p:nvSpPr>
+          <p:cNvPr id="9" name="Text 6"/>
+          <p:cNvSpPr txBox="1"/>
+          <p:nvPr/>
+        </p:nvSpPr>
+        <p:spPr>
+          <a:xfrm>
+            <a:off x="3627425" y="5257800"/>
+            <a:ext cx="2377440" cy="502920"/>
+          </a:xfrm>
+          <a:prstGeom prst="rect">
+            <a:avLst/>
+          </a:prstGeom>
+          <a:noFill/>
+          <a:ln/>
+        </p:spPr>
+        <p:txBody>
+          <a:bodyPr wrap="square" lIns="0" tIns="0" rIns="0" bIns="0" rtlCol="0" anchor="ctr"/>
+          <a:lstStyle/>
+          <a:p>
+            <a:pPr indent="0" marL="0">
+              <a:buNone/>
+            </a:pPr>
+            <a:r>
+              <a:rPr lang="en-US" sz="2800" dirty="0">
+                <a:solidFill>
+                  <a:srgbClr val="1D1D1F"/>
+                </a:solidFill>
+                <a:latin typeface="Pretendard SemiBold" pitchFamily="34" charset="0"/>
+                <a:ea typeface="Pretendard SemiBold" pitchFamily="34" charset="-122"/>
+                <a:cs typeface="Pretendard SemiBold" pitchFamily="34" charset="-120"/>
+              </a:rPr>
+              <a:t>1건</a:t>
+            </a:r>
+            <a:endParaRPr lang="en-US" sz="2800" dirty="0"/>
+          </a:p>
+        </p:txBody>
+      </p:sp>
+      <p:sp>
+        <p:nvSpPr>
+          <p:cNvPr id="10" name="Text 7"/>
+          <p:cNvSpPr txBox="1"/>
+          <p:nvPr/>
+        </p:nvSpPr>
+        <p:spPr>
+          <a:xfrm>
+            <a:off x="3627425" y="5788152"/>
+            <a:ext cx="2377440" cy="228600"/>
+          </a:xfrm>
+          <a:prstGeom prst="rect">
+            <a:avLst/>
+          </a:prstGeom>
+          <a:noFill/>
+          <a:ln/>
+        </p:spPr>
+        <p:txBody>
+          <a:bodyPr wrap="square" lIns="0" tIns="0" rIns="0" bIns="0" rtlCol="0" anchor="t"/>
+          <a:lstStyle/>
+          <a:p>
+            <a:pPr indent="0" marL="0">
+              <a:buNone/>
+            </a:pPr>
+            <a:r>
+              <a:rPr lang="en-US" sz="1200" dirty="0">
+                <a:solidFill>
+                  <a:srgbClr val="7A7A7A"/>
+                </a:solidFill>
+                <a:latin typeface="Pretendard" pitchFamily="34" charset="0"/>
+                <a:ea typeface="Pretendard" pitchFamily="34" charset="-122"/>
+                <a:cs typeface="Pretendard" pitchFamily="34" charset="-120"/>
+              </a:rPr>
+              <a:t>높음</a:t>
+            </a:r>
+            <a:endParaRPr lang="en-US" sz="1200" dirty="0"/>
+          </a:p>
+        </p:txBody>
+      </p:sp>
+      <p:sp>
+        <p:nvSpPr>
+          <p:cNvPr id="11" name="Shape 8"/>
+          <p:cNvSpPr/>
+          <p:nvPr/>
+        </p:nvSpPr>
+        <p:spPr>
+          <a:xfrm>
+            <a:off x="6096305" y="5303520"/>
+            <a:ext cx="0" cy="868680"/>
+          </a:xfrm>
+          <a:prstGeom prst="line">
+            <a:avLst/>
+          </a:prstGeom>
+          <a:noFill/>
+          <a:ln w="9525">
+            <a:solidFill>
+              <a:srgbClr val="E0E0E0"/>
+            </a:solidFill>
+            <a:prstDash val="solid"/>
+          </a:ln>
+        </p:spPr>
+      </p:sp>
+      <p:sp>
+        <p:nvSpPr>
+          <p:cNvPr id="12" name="Text 9"/>
+          <p:cNvSpPr txBox="1"/>
+          <p:nvPr/>
+        </p:nvSpPr>
+        <p:spPr>
+          <a:xfrm>
+            <a:off x="6370625" y="5257800"/>
+            <a:ext cx="2377440" cy="502920"/>
+          </a:xfrm>
+          <a:prstGeom prst="rect">
+            <a:avLst/>
+          </a:prstGeom>
+          <a:noFill/>
+          <a:ln/>
+        </p:spPr>
+        <p:txBody>
+          <a:bodyPr wrap="square" lIns="0" tIns="0" rIns="0" bIns="0" rtlCol="0" anchor="ctr"/>
+          <a:lstStyle/>
+          <a:p>
+            <a:pPr indent="0" marL="0">
+              <a:buNone/>
+            </a:pPr>
+            <a:r>
+              <a:rPr lang="en-US" sz="2800" dirty="0">
+                <a:solidFill>
+                  <a:srgbClr val="1D1D1F"/>
+                </a:solidFill>
+                <a:latin typeface="Pretendard SemiBold" pitchFamily="34" charset="0"/>
+                <a:ea typeface="Pretendard SemiBold" pitchFamily="34" charset="-122"/>
+                <a:cs typeface="Pretendard SemiBold" pitchFamily="34" charset="-120"/>
+              </a:rPr>
+              <a:t>2건</a:t>
+            </a:r>
+            <a:endParaRPr lang="en-US" sz="2800" dirty="0"/>
+          </a:p>
+        </p:txBody>
+      </p:sp>
+      <p:sp>
+        <p:nvSpPr>
+          <p:cNvPr id="13" name="Text 10"/>
+          <p:cNvSpPr txBox="1"/>
+          <p:nvPr/>
+        </p:nvSpPr>
+        <p:spPr>
+          <a:xfrm>
+            <a:off x="6370625" y="5788152"/>
+            <a:ext cx="2377440" cy="228600"/>
+          </a:xfrm>
+          <a:prstGeom prst="rect">
+            <a:avLst/>
+          </a:prstGeom>
+          <a:noFill/>
+          <a:ln/>
+        </p:spPr>
+        <p:txBody>
+          <a:bodyPr wrap="square" lIns="0" tIns="0" rIns="0" bIns="0" rtlCol="0" anchor="t"/>
+          <a:lstStyle/>
+          <a:p>
+            <a:pPr indent="0" marL="0">
+              <a:buNone/>
+            </a:pPr>
+            <a:r>
+              <a:rPr lang="en-US" sz="1200" dirty="0">
+                <a:solidFill>
+                  <a:srgbClr val="7A7A7A"/>
+                </a:solidFill>
+                <a:latin typeface="Pretendard" pitchFamily="34" charset="0"/>
+                <a:ea typeface="Pretendard" pitchFamily="34" charset="-122"/>
+                <a:cs typeface="Pretendard" pitchFamily="34" charset="-120"/>
+              </a:rPr>
+              <a:t>중간 · 낮음</a:t>
+            </a:r>
+            <a:endParaRPr lang="en-US" sz="1200" dirty="0"/>
+          </a:p>
+        </p:txBody>
+      </p:sp>
+      <p:sp>
+        <p:nvSpPr>
+          <p:cNvPr id="14" name="Shape 11"/>
+          <p:cNvSpPr/>
+          <p:nvPr/>
+        </p:nvSpPr>
+        <p:spPr>
+          <a:xfrm>
+            <a:off x="8839505" y="5303520"/>
+            <a:ext cx="0" cy="868680"/>
+          </a:xfrm>
+          <a:prstGeom prst="line">
+            <a:avLst/>
+          </a:prstGeom>
+          <a:noFill/>
+          <a:ln w="9525">
+            <a:solidFill>
+              <a:srgbClr val="E0E0E0"/>
+            </a:solidFill>
+            <a:prstDash val="solid"/>
+          </a:ln>
+        </p:spPr>
+      </p:sp>
+      <p:sp>
+        <p:nvSpPr>
+          <p:cNvPr id="15" name="Text 12"/>
+          <p:cNvSpPr txBox="1"/>
+          <p:nvPr/>
+        </p:nvSpPr>
+        <p:spPr>
+          <a:xfrm>
+            <a:off x="9113825" y="5257800"/>
+            <a:ext cx="2377440" cy="502920"/>
+          </a:xfrm>
+          <a:prstGeom prst="rect">
+            <a:avLst/>
+          </a:prstGeom>
+          <a:noFill/>
+          <a:ln/>
+        </p:spPr>
+        <p:txBody>
+          <a:bodyPr wrap="square" lIns="0" tIns="0" rIns="0" bIns="0" rtlCol="0" anchor="ctr"/>
+          <a:lstStyle/>
+          <a:p>
+            <a:pPr indent="0" marL="0">
+              <a:buNone/>
+            </a:pPr>
+            <a:r>
+              <a:rPr lang="en-US" sz="2800" dirty="0">
+                <a:solidFill>
+                  <a:srgbClr val="1D1D1F"/>
+                </a:solidFill>
+                <a:latin typeface="Pretendard SemiBold" pitchFamily="34" charset="0"/>
+                <a:ea typeface="Pretendard SemiBold" pitchFamily="34" charset="-122"/>
+                <a:cs typeface="Pretendard SemiBold" pitchFamily="34" charset="-120"/>
+              </a:rPr>
+              <a:t>3/3</a:t>
+            </a:r>
+            <a:endParaRPr lang="en-US" sz="2800" dirty="0"/>
+          </a:p>
+        </p:txBody>
+      </p:sp>
+      <p:sp>
+        <p:nvSpPr>
+          <p:cNvPr id="16" name="Text 13"/>
+          <p:cNvSpPr txBox="1"/>
+          <p:nvPr/>
+        </p:nvSpPr>
+        <p:spPr>
+          <a:xfrm>
+            <a:off x="9113825" y="5788152"/>
+            <a:ext cx="2377440" cy="228600"/>
+          </a:xfrm>
+          <a:prstGeom prst="rect">
+            <a:avLst/>
+          </a:prstGeom>
+          <a:noFill/>
+          <a:ln/>
+        </p:spPr>
+        <p:txBody>
+          <a:bodyPr wrap="square" lIns="0" tIns="0" rIns="0" bIns="0" rtlCol="0" anchor="t"/>
+          <a:lstStyle/>
+          <a:p>
+            <a:pPr indent="0" marL="0">
+              <a:buNone/>
+            </a:pPr>
+            <a:r>
+              <a:rPr lang="en-US" sz="1200" dirty="0">
+                <a:solidFill>
+                  <a:srgbClr val="7A7A7A"/>
+                </a:solidFill>
+                <a:latin typeface="Pretendard" pitchFamily="34" charset="0"/>
+                <a:ea typeface="Pretendard" pitchFamily="34" charset="-122"/>
+                <a:cs typeface="Pretendard" pitchFamily="34" charset="-120"/>
+              </a:rPr>
+              <a:t>수정 완료</a:t>
+            </a:r>
+            <a:endParaRPr lang="en-US" sz="1200" dirty="0"/>
+          </a:p>
+        </p:txBody>
+      </p:sp>
+      <p:sp>
+        <p:nvSpPr>
+          <p:cNvPr id="17" name="Text 14"/>
+          <p:cNvSpPr txBox="1"/>
+          <p:nvPr/>
+        </p:nvSpPr>
+        <p:spPr>
+          <a:xfrm>
+            <a:off x="609905" y="6446520"/>
+            <a:ext cx="5486400" cy="274320"/>
+          </a:xfrm>
+          <a:prstGeom prst="rect">
+            <a:avLst/>
+          </a:prstGeom>
+          <a:noFill/>
+          <a:ln/>
+        </p:spPr>
+        <p:txBody>
+          <a:bodyPr wrap="square" lIns="0" tIns="0" rIns="0" bIns="0" rtlCol="0" anchor="ctr"/>
+          <a:lstStyle/>
+          <a:p>
+            <a:pPr indent="0" marL="0">
+              <a:buNone/>
+            </a:pPr>
+            <a:r>
+              <a:rPr lang="en-US" sz="1000" spc="200" kern="0" dirty="0">
+                <a:solidFill>
+                  <a:srgbClr val="7A7A7A"/>
+                </a:solidFill>
+                <a:latin typeface="Pretendard" pitchFamily="34" charset="0"/>
+                <a:ea typeface="Pretendard" pitchFamily="34" charset="-122"/>
+                <a:cs typeface="Pretendard" pitchFamily="34" charset="-120"/>
+              </a:rPr>
+              <a:t>QA REPORT  ·  FISH GAME</a:t>
+            </a:r>
+            <a:endParaRPr lang="en-US" sz="1000" dirty="0"/>
+          </a:p>
+        </p:txBody>
+      </p:sp>
+      <p:sp>
+        <p:nvSpPr>
+          <p:cNvPr id="18" name="Text 15"/>
+          <p:cNvSpPr txBox="1"/>
+          <p:nvPr/>
+        </p:nvSpPr>
+        <p:spPr>
+          <a:xfrm>
+            <a:off x="10515600" y="6446520"/>
+            <a:ext cx="1066190" cy="274320"/>
+          </a:xfrm>
+          <a:prstGeom prst="rect">
+            <a:avLst/>
+          </a:prstGeom>
+          <a:noFill/>
+          <a:ln/>
+        </p:spPr>
+        <p:txBody>
+          <a:bodyPr wrap="square" lIns="0" tIns="0" rIns="0" bIns="0" rtlCol="0" anchor="ctr"/>
+          <a:lstStyle/>
+          <a:p>
+            <a:pPr algn="r" indent="0" marL="0">
+              <a:buNone/>
+            </a:pPr>
+            <a:r>
+              <a:rPr lang="en-US" sz="1000" dirty="0">
+                <a:solidFill>
+                  <a:srgbClr val="7A7A7A"/>
+                </a:solidFill>
+                <a:latin typeface="Pretendard" pitchFamily="34" charset="0"/>
+                <a:ea typeface="Pretendard" pitchFamily="34" charset="-122"/>
+                <a:cs typeface="Pretendard" pitchFamily="34" charset="-120"/>
+              </a:rPr>
+              <a:t>21 / 25</a:t>
+            </a:r>
+            <a:endParaRPr lang="en-US" sz="1000" dirty="0"/>
+          </a:p>
+        </p:txBody>
+      </p:sp>
+    </p:spTree>
+  </p:cSld>
+  <p:clrMapOvr>
+    <a:masterClrMapping/>
+  </p:clrMapOvr>
+</p:sld>
+</file>
+
+<file path=ppt/slides/slide22.xml><?xml version="1.0" encoding="utf-8"?>
+<p:sld xmlns:a="http://schemas.openxmlformats.org/drawingml/2006/main" xmlns:r="http://schemas.openxmlformats.org/officeDocument/2006/relationships" xmlns:p="http://schemas.openxmlformats.org/presentationml/2006/main">
+  <p:cSld name="Slide 22">
+    <p:bg>
+      <p:bgPr>
+        <a:solidFill>
+          <a:srgbClr val="272729"/>
+        </a:solidFill>
+      </p:bgPr>
+    </p:bg>
+    <p:spTree>
+      <p:nvGrpSpPr>
+        <p:cNvPr id="1" name=""/>
+        <p:cNvGrpSpPr/>
+        <p:nvPr/>
+      </p:nvGrpSpPr>
+      <p:grpSpPr>
+        <a:xfrm>
+          <a:off x="0" y="0"/>
+          <a:ext cx="0" cy="0"/>
+          <a:chOff x="0" y="0"/>
+          <a:chExt cx="0" cy="0"/>
+        </a:xfrm>
+      </p:grpSpPr>
+      <p:sp>
+        <p:nvSpPr>
+          <p:cNvPr id="2" name="Text 0"/>
+          <p:cNvSpPr txBox="1"/>
+          <p:nvPr/>
+        </p:nvSpPr>
+        <p:spPr>
+          <a:xfrm>
+            <a:off x="609905" y="320040"/>
+            <a:ext cx="10972800" cy="228600"/>
+          </a:xfrm>
+          <a:prstGeom prst="rect">
+            <a:avLst/>
+          </a:prstGeom>
+          <a:noFill/>
+          <a:ln/>
+        </p:spPr>
+        <p:txBody>
+          <a:bodyPr wrap="square" lIns="0" tIns="0" rIns="0" bIns="0" rtlCol="0" anchor="t"/>
+          <a:lstStyle/>
+          <a:p>
+            <a:pPr indent="0" marL="0">
+              <a:buNone/>
+            </a:pPr>
+            <a:r>
+              <a:rPr lang="en-US" sz="1100" b="1" spc="200" kern="0" dirty="0">
+                <a:solidFill>
+                  <a:srgbClr val="2997FF"/>
+                </a:solidFill>
+                <a:latin typeface="Pretendard SemiBold" pitchFamily="34" charset="0"/>
+                <a:ea typeface="Pretendard SemiBold" pitchFamily="34" charset="-122"/>
+                <a:cs typeface="Pretendard SemiBold" pitchFamily="34" charset="-120"/>
+              </a:rPr>
+              <a:t>R8  ·  2026-09-25</a:t>
+            </a:r>
+            <a:endParaRPr lang="en-US" sz="1100" dirty="0"/>
+          </a:p>
+        </p:txBody>
+      </p:sp>
+      <p:sp>
+        <p:nvSpPr>
+          <p:cNvPr id="3" name="Text 1"/>
+          <p:cNvSpPr txBox="1"/>
+          <p:nvPr/>
+        </p:nvSpPr>
+        <p:spPr>
+          <a:xfrm>
+            <a:off x="609905" y="594360"/>
+            <a:ext cx="10972800" cy="777240"/>
+          </a:xfrm>
+          <a:prstGeom prst="rect">
+            <a:avLst/>
+          </a:prstGeom>
+          <a:noFill/>
+          <a:ln/>
+        </p:spPr>
+        <p:txBody>
+          <a:bodyPr wrap="square" lIns="0" tIns="0" rIns="0" bIns="0" rtlCol="0" anchor="t"/>
+          <a:lstStyle/>
+          <a:p>
+            <a:pPr indent="0" marL="0">
+              <a:buNone/>
+            </a:pPr>
+            <a:r>
+              <a:rPr lang="en-US" sz="4000" dirty="0">
+                <a:solidFill>
+                  <a:srgbClr val="FFFFFF"/>
+                </a:solidFill>
+                <a:latin typeface="Pretendard SemiBold" pitchFamily="34" charset="0"/>
+                <a:ea typeface="Pretendard SemiBold" pitchFamily="34" charset="-122"/>
+                <a:cs typeface="Pretendard SemiBold" pitchFamily="34" charset="-120"/>
+              </a:rPr>
+              <a:t>3차 버그 점검</a:t>
+            </a:r>
+            <a:endParaRPr lang="en-US" sz="4000" dirty="0"/>
+          </a:p>
+        </p:txBody>
+      </p:sp>
+      <p:sp>
+        <p:nvSpPr>
+          <p:cNvPr id="4" name="Shape 2"/>
+          <p:cNvSpPr/>
+          <p:nvPr/>
+        </p:nvSpPr>
+        <p:spPr>
+          <a:xfrm>
+            <a:off x="609905" y="1417320"/>
+            <a:ext cx="10972800" cy="0"/>
+          </a:xfrm>
+          <a:prstGeom prst="line">
+            <a:avLst/>
+          </a:prstGeom>
+          <a:noFill/>
+          <a:ln w="9525">
+            <a:solidFill>
+              <a:srgbClr val="3A3A3C"/>
+            </a:solidFill>
+            <a:prstDash val="solid"/>
+          </a:ln>
+        </p:spPr>
+      </p:sp>
+      <p:sp>
+        <p:nvSpPr>
+          <p:cNvPr id="5" name="Text 3"/>
+          <p:cNvSpPr txBox="1"/>
+          <p:nvPr/>
+        </p:nvSpPr>
+        <p:spPr>
+          <a:xfrm>
+            <a:off x="609905" y="1691640"/>
+            <a:ext cx="1097280" cy="320040"/>
+          </a:xfrm>
+          <a:prstGeom prst="rect">
+            <a:avLst/>
+          </a:prstGeom>
+          <a:noFill/>
+          <a:ln/>
+        </p:spPr>
+        <p:txBody>
+          <a:bodyPr wrap="square" lIns="0" tIns="0" rIns="0" bIns="0" rtlCol="0" anchor="ctr"/>
+          <a:lstStyle/>
+          <a:p>
+            <a:pPr indent="0" marL="0">
+              <a:buNone/>
+            </a:pPr>
+            <a:r>
+              <a:rPr lang="en-US" sz="1300" dirty="0">
+                <a:solidFill>
+                  <a:srgbClr val="8E8E93"/>
+                </a:solidFill>
+                <a:latin typeface="Pretendard SemiBold" pitchFamily="34" charset="0"/>
+                <a:ea typeface="Pretendard SemiBold" pitchFamily="34" charset="-122"/>
+                <a:cs typeface="Pretendard SemiBold" pitchFamily="34" charset="-120"/>
+              </a:rPr>
+              <a:t>계기</a:t>
+            </a:r>
+            <a:endParaRPr lang="en-US" sz="1300" dirty="0"/>
+          </a:p>
+        </p:txBody>
+      </p:sp>
+      <p:sp>
+        <p:nvSpPr>
+          <p:cNvPr id="6" name="Text 4"/>
+          <p:cNvSpPr txBox="1"/>
+          <p:nvPr/>
+        </p:nvSpPr>
+        <p:spPr>
+          <a:xfrm>
+            <a:off x="1707185" y="1691640"/>
+            <a:ext cx="9875520" cy="320040"/>
+          </a:xfrm>
+          <a:prstGeom prst="rect">
+            <a:avLst/>
+          </a:prstGeom>
+          <a:noFill/>
+          <a:ln/>
+        </p:spPr>
+        <p:txBody>
+          <a:bodyPr wrap="square" lIns="0" tIns="0" rIns="0" bIns="0" rtlCol="0" anchor="ctr"/>
+          <a:lstStyle/>
+          <a:p>
+            <a:pPr indent="0" marL="0">
+              <a:buNone/>
+            </a:pPr>
+            <a:r>
+              <a:rPr lang="en-US" sz="1800" dirty="0">
+                <a:solidFill>
+                  <a:srgbClr val="FFFFFF"/>
+                </a:solidFill>
+                <a:latin typeface="Pretendard" pitchFamily="34" charset="0"/>
+                <a:ea typeface="Pretendard" pitchFamily="34" charset="-122"/>
+                <a:cs typeface="Pretendard" pitchFamily="34" charset="-120"/>
+              </a:rPr>
+              <a:t>'또 다른 버그 있으면 확인하고 수정' 요청</a:t>
+            </a:r>
+            <a:endParaRPr lang="en-US" sz="1800" dirty="0"/>
+          </a:p>
+        </p:txBody>
+      </p:sp>
+      <p:sp>
+        <p:nvSpPr>
+          <p:cNvPr id="7" name="Text 5"/>
+          <p:cNvSpPr txBox="1"/>
+          <p:nvPr/>
+        </p:nvSpPr>
+        <p:spPr>
+          <a:xfrm>
+            <a:off x="609905" y="2148840"/>
+            <a:ext cx="1097280" cy="548640"/>
+          </a:xfrm>
+          <a:prstGeom prst="rect">
+            <a:avLst/>
+          </a:prstGeom>
+          <a:noFill/>
+          <a:ln/>
+        </p:spPr>
+        <p:txBody>
+          <a:bodyPr wrap="square" lIns="0" tIns="0" rIns="0" bIns="0" rtlCol="0" anchor="t"/>
+          <a:lstStyle/>
+          <a:p>
+            <a:pPr indent="0" marL="0">
+              <a:buNone/>
+            </a:pPr>
+            <a:r>
+              <a:rPr lang="en-US" sz="1300" dirty="0">
+                <a:solidFill>
+                  <a:srgbClr val="8E8E93"/>
+                </a:solidFill>
+                <a:latin typeface="Pretendard SemiBold" pitchFamily="34" charset="0"/>
+                <a:ea typeface="Pretendard SemiBold" pitchFamily="34" charset="-122"/>
+                <a:cs typeface="Pretendard SemiBold" pitchFamily="34" charset="-120"/>
+              </a:rPr>
+              <a:t>방법</a:t>
+            </a:r>
+            <a:endParaRPr lang="en-US" sz="1300" dirty="0"/>
+          </a:p>
+        </p:txBody>
+      </p:sp>
+      <p:sp>
+        <p:nvSpPr>
+          <p:cNvPr id="8" name="Text 6"/>
+          <p:cNvSpPr txBox="1"/>
+          <p:nvPr/>
+        </p:nvSpPr>
+        <p:spPr>
+          <a:xfrm>
+            <a:off x="1707185" y="2103120"/>
+            <a:ext cx="9875520" cy="731520"/>
+          </a:xfrm>
+          <a:prstGeom prst="rect">
+            <a:avLst/>
+          </a:prstGeom>
+          <a:noFill/>
+          <a:ln/>
+        </p:spPr>
+        <p:txBody>
+          <a:bodyPr wrap="square" lIns="0" tIns="0" rIns="0" bIns="0" rtlCol="0" anchor="t"/>
+          <a:lstStyle/>
+          <a:p>
+            <a:pPr indent="0" marL="0">
+              <a:lnSpc>
+                <a:spcPct val="130000"/>
+              </a:lnSpc>
+              <a:buNone/>
+            </a:pPr>
+            <a:r>
+              <a:rPr lang="en-US" sz="1800" dirty="0">
+                <a:solidFill>
+                  <a:srgbClr val="CCCCCC"/>
+                </a:solidFill>
+                <a:latin typeface="Pretendard" pitchFamily="34" charset="0"/>
+                <a:ea typeface="Pretendard" pitchFamily="34" charset="-122"/>
+                <a:cs typeface="Pretendard" pitchFamily="34" charset="-120"/>
+              </a:rPr>
+              <a:t>코드 전수 리뷰(서브 에이전트) + 에디터 실행 (어항 · 하수구, 개발자 모드로 구역 이동)</a:t>
+            </a:r>
+            <a:endParaRPr lang="en-US" sz="1800" dirty="0"/>
+          </a:p>
+        </p:txBody>
+      </p:sp>
+      <p:sp>
+        <p:nvSpPr>
+          <p:cNvPr id="9" name="Text 7"/>
+          <p:cNvSpPr txBox="1"/>
+          <p:nvPr/>
+        </p:nvSpPr>
+        <p:spPr>
+          <a:xfrm>
+            <a:off x="609905" y="4846320"/>
+            <a:ext cx="2651760" cy="502920"/>
+          </a:xfrm>
+          <a:prstGeom prst="rect">
+            <a:avLst/>
+          </a:prstGeom>
+          <a:noFill/>
+          <a:ln/>
+        </p:spPr>
+        <p:txBody>
+          <a:bodyPr wrap="square" lIns="0" tIns="0" rIns="0" bIns="0" rtlCol="0" anchor="ctr"/>
+          <a:lstStyle/>
+          <a:p>
+            <a:pPr indent="0" marL="0">
+              <a:buNone/>
+            </a:pPr>
+            <a:r>
+              <a:rPr lang="en-US" sz="2800" dirty="0">
+                <a:solidFill>
+                  <a:srgbClr val="FFFFFF"/>
+                </a:solidFill>
+                <a:latin typeface="Pretendard SemiBold" pitchFamily="34" charset="0"/>
+                <a:ea typeface="Pretendard SemiBold" pitchFamily="34" charset="-122"/>
+                <a:cs typeface="Pretendard SemiBold" pitchFamily="34" charset="-120"/>
+              </a:rPr>
+              <a:t>7건</a:t>
+            </a:r>
+            <a:endParaRPr lang="en-US" sz="2800" dirty="0"/>
+          </a:p>
+        </p:txBody>
+      </p:sp>
+      <p:sp>
+        <p:nvSpPr>
+          <p:cNvPr id="10" name="Text 8"/>
+          <p:cNvSpPr txBox="1"/>
+          <p:nvPr/>
+        </p:nvSpPr>
+        <p:spPr>
+          <a:xfrm>
+            <a:off x="609905" y="5376672"/>
+            <a:ext cx="2651760" cy="228600"/>
+          </a:xfrm>
+          <a:prstGeom prst="rect">
+            <a:avLst/>
+          </a:prstGeom>
+          <a:noFill/>
+          <a:ln/>
+        </p:spPr>
+        <p:txBody>
+          <a:bodyPr wrap="square" lIns="0" tIns="0" rIns="0" bIns="0" rtlCol="0" anchor="t"/>
+          <a:lstStyle/>
+          <a:p>
+            <a:pPr indent="0" marL="0">
+              <a:buNone/>
+            </a:pPr>
+            <a:r>
+              <a:rPr lang="en-US" sz="1200" dirty="0">
+                <a:solidFill>
+                  <a:srgbClr val="CCCCCC"/>
+                </a:solidFill>
+                <a:latin typeface="Pretendard" pitchFamily="34" charset="0"/>
+                <a:ea typeface="Pretendard" pitchFamily="34" charset="-122"/>
+                <a:cs typeface="Pretendard" pitchFamily="34" charset="-120"/>
+              </a:rPr>
+              <a:t>발견한 이슈</a:t>
+            </a:r>
+            <a:endParaRPr lang="en-US" sz="1200" dirty="0"/>
+          </a:p>
+        </p:txBody>
+      </p:sp>
+      <p:sp>
+        <p:nvSpPr>
+          <p:cNvPr id="11" name="Text 9"/>
+          <p:cNvSpPr txBox="1"/>
+          <p:nvPr/>
+        </p:nvSpPr>
+        <p:spPr>
+          <a:xfrm>
+            <a:off x="609905" y="5596128"/>
+            <a:ext cx="2651760" cy="201168"/>
+          </a:xfrm>
+          <a:prstGeom prst="rect">
+            <a:avLst/>
+          </a:prstGeom>
+          <a:noFill/>
+          <a:ln/>
+        </p:spPr>
+        <p:txBody>
+          <a:bodyPr wrap="square" lIns="0" tIns="0" rIns="0" bIns="0" rtlCol="0" anchor="t"/>
+          <a:lstStyle/>
+          <a:p>
+            <a:pPr indent="0" marL="0">
+              <a:buNone/>
+            </a:pPr>
+            <a:r>
+              <a:rPr lang="en-US" sz="1050" dirty="0">
+                <a:solidFill>
+                  <a:srgbClr val="8E8E93"/>
+                </a:solidFill>
+                <a:latin typeface="Pretendard" pitchFamily="34" charset="0"/>
+                <a:ea typeface="Pretendard" pitchFamily="34" charset="-122"/>
+                <a:cs typeface="Pretendard" pitchFamily="34" charset="-120"/>
+              </a:rPr>
+              <a:t>높음 0 · 중간 3 · 낮음 4</a:t>
+            </a:r>
+            <a:endParaRPr lang="en-US" sz="1050" dirty="0"/>
+          </a:p>
+        </p:txBody>
+      </p:sp>
+      <p:sp>
+        <p:nvSpPr>
+          <p:cNvPr id="12" name="Shape 10"/>
+          <p:cNvSpPr/>
+          <p:nvPr/>
+        </p:nvSpPr>
+        <p:spPr>
+          <a:xfrm>
+            <a:off x="3353105" y="4892040"/>
+            <a:ext cx="0" cy="868680"/>
+          </a:xfrm>
+          <a:prstGeom prst="line">
+            <a:avLst/>
+          </a:prstGeom>
+          <a:noFill/>
+          <a:ln w="9525">
+            <a:solidFill>
+              <a:srgbClr val="3A3A3C"/>
+            </a:solidFill>
+            <a:prstDash val="solid"/>
+          </a:ln>
+        </p:spPr>
+      </p:sp>
+      <p:sp>
+        <p:nvSpPr>
+          <p:cNvPr id="13" name="Text 11"/>
+          <p:cNvSpPr txBox="1"/>
+          <p:nvPr/>
+        </p:nvSpPr>
+        <p:spPr>
+          <a:xfrm>
+            <a:off x="3627425" y="4846320"/>
+            <a:ext cx="2377440" cy="502920"/>
+          </a:xfrm>
+          <a:prstGeom prst="rect">
+            <a:avLst/>
+          </a:prstGeom>
+          <a:noFill/>
+          <a:ln/>
+        </p:spPr>
+        <p:txBody>
+          <a:bodyPr wrap="square" lIns="0" tIns="0" rIns="0" bIns="0" rtlCol="0" anchor="ctr"/>
+          <a:lstStyle/>
+          <a:p>
+            <a:pPr indent="0" marL="0">
+              <a:buNone/>
+            </a:pPr>
+            <a:r>
+              <a:rPr lang="en-US" sz="2800" dirty="0">
+                <a:solidFill>
+                  <a:srgbClr val="FFFFFF"/>
+                </a:solidFill>
+                <a:latin typeface="Pretendard SemiBold" pitchFamily="34" charset="0"/>
+                <a:ea typeface="Pretendard SemiBold" pitchFamily="34" charset="-122"/>
+                <a:cs typeface="Pretendard SemiBold" pitchFamily="34" charset="-120"/>
+              </a:rPr>
+              <a:t>0</a:t>
+            </a:r>
+            <a:endParaRPr lang="en-US" sz="2800" dirty="0"/>
+          </a:p>
+        </p:txBody>
+      </p:sp>
+      <p:sp>
+        <p:nvSpPr>
+          <p:cNvPr id="14" name="Text 12"/>
+          <p:cNvSpPr txBox="1"/>
+          <p:nvPr/>
+        </p:nvSpPr>
+        <p:spPr>
+          <a:xfrm>
+            <a:off x="3627425" y="5376672"/>
+            <a:ext cx="2377440" cy="228600"/>
+          </a:xfrm>
+          <a:prstGeom prst="rect">
+            <a:avLst/>
+          </a:prstGeom>
+          <a:noFill/>
+          <a:ln/>
+        </p:spPr>
+        <p:txBody>
+          <a:bodyPr wrap="square" lIns="0" tIns="0" rIns="0" bIns="0" rtlCol="0" anchor="t"/>
+          <a:lstStyle/>
+          <a:p>
+            <a:pPr indent="0" marL="0">
+              <a:buNone/>
+            </a:pPr>
+            <a:r>
+              <a:rPr lang="en-US" sz="1200" dirty="0">
+                <a:solidFill>
+                  <a:srgbClr val="CCCCCC"/>
+                </a:solidFill>
+                <a:latin typeface="Pretendard" pitchFamily="34" charset="0"/>
+                <a:ea typeface="Pretendard" pitchFamily="34" charset="-122"/>
+                <a:cs typeface="Pretendard" pitchFamily="34" charset="-120"/>
+              </a:rPr>
+              <a:t>콘솔 오류</a:t>
+            </a:r>
+            <a:endParaRPr lang="en-US" sz="1200" dirty="0"/>
+          </a:p>
+        </p:txBody>
+      </p:sp>
+      <p:sp>
+        <p:nvSpPr>
+          <p:cNvPr id="15" name="Text 13"/>
+          <p:cNvSpPr txBox="1"/>
+          <p:nvPr/>
+        </p:nvSpPr>
+        <p:spPr>
+          <a:xfrm>
+            <a:off x="3627425" y="5596128"/>
+            <a:ext cx="2377440" cy="201168"/>
+          </a:xfrm>
+          <a:prstGeom prst="rect">
+            <a:avLst/>
+          </a:prstGeom>
+          <a:noFill/>
+          <a:ln/>
+        </p:spPr>
+        <p:txBody>
+          <a:bodyPr wrap="square" lIns="0" tIns="0" rIns="0" bIns="0" rtlCol="0" anchor="t"/>
+          <a:lstStyle/>
+          <a:p>
+            <a:pPr indent="0" marL="0">
+              <a:buNone/>
+            </a:pPr>
+            <a:r>
+              <a:rPr lang="en-US" sz="1050" dirty="0">
+                <a:solidFill>
+                  <a:srgbClr val="8E8E93"/>
+                </a:solidFill>
+                <a:latin typeface="Pretendard" pitchFamily="34" charset="0"/>
+                <a:ea typeface="Pretendard" pitchFamily="34" charset="-122"/>
+                <a:cs typeface="Pretendard" pitchFamily="34" charset="-120"/>
+              </a:rPr>
+              <a:t>컴파일 · 실행</a:t>
+            </a:r>
+            <a:endParaRPr lang="en-US" sz="1050" dirty="0"/>
+          </a:p>
+        </p:txBody>
+      </p:sp>
+      <p:sp>
+        <p:nvSpPr>
+          <p:cNvPr id="16" name="Shape 14"/>
+          <p:cNvSpPr/>
+          <p:nvPr/>
+        </p:nvSpPr>
+        <p:spPr>
+          <a:xfrm>
+            <a:off x="6096305" y="4892040"/>
+            <a:ext cx="0" cy="868680"/>
+          </a:xfrm>
+          <a:prstGeom prst="line">
+            <a:avLst/>
+          </a:prstGeom>
+          <a:noFill/>
+          <a:ln w="9525">
+            <a:solidFill>
+              <a:srgbClr val="3A3A3C"/>
+            </a:solidFill>
+            <a:prstDash val="solid"/>
+          </a:ln>
+        </p:spPr>
+      </p:sp>
+      <p:sp>
+        <p:nvSpPr>
+          <p:cNvPr id="17" name="Text 15"/>
+          <p:cNvSpPr txBox="1"/>
+          <p:nvPr/>
+        </p:nvSpPr>
+        <p:spPr>
+          <a:xfrm>
+            <a:off x="6370625" y="4846320"/>
+            <a:ext cx="2377440" cy="502920"/>
+          </a:xfrm>
+          <a:prstGeom prst="rect">
+            <a:avLst/>
+          </a:prstGeom>
+          <a:noFill/>
+          <a:ln/>
+        </p:spPr>
+        <p:txBody>
+          <a:bodyPr wrap="square" lIns="0" tIns="0" rIns="0" bIns="0" rtlCol="0" anchor="ctr"/>
+          <a:lstStyle/>
+          <a:p>
+            <a:pPr indent="0" marL="0">
+              <a:buNone/>
+            </a:pPr>
+            <a:r>
+              <a:rPr lang="en-US" sz="2800" dirty="0">
+                <a:solidFill>
+                  <a:srgbClr val="FFFFFF"/>
+                </a:solidFill>
+                <a:latin typeface="Pretendard SemiBold" pitchFamily="34" charset="0"/>
+                <a:ea typeface="Pretendard SemiBold" pitchFamily="34" charset="-122"/>
+                <a:cs typeface="Pretendard SemiBold" pitchFamily="34" charset="-120"/>
+              </a:rPr>
+              <a:t>2</a:t>
+            </a:r>
+            <a:endParaRPr lang="en-US" sz="2800" dirty="0"/>
+          </a:p>
+        </p:txBody>
+      </p:sp>
+      <p:sp>
+        <p:nvSpPr>
+          <p:cNvPr id="18" name="Text 16"/>
+          <p:cNvSpPr txBox="1"/>
+          <p:nvPr/>
+        </p:nvSpPr>
+        <p:spPr>
+          <a:xfrm>
+            <a:off x="6370625" y="5376672"/>
+            <a:ext cx="2377440" cy="228600"/>
+          </a:xfrm>
+          <a:prstGeom prst="rect">
+            <a:avLst/>
+          </a:prstGeom>
+          <a:noFill/>
+          <a:ln/>
+        </p:spPr>
+        <p:txBody>
+          <a:bodyPr wrap="square" lIns="0" tIns="0" rIns="0" bIns="0" rtlCol="0" anchor="t"/>
+          <a:lstStyle/>
+          <a:p>
+            <a:pPr indent="0" marL="0">
+              <a:buNone/>
+            </a:pPr>
+            <a:r>
+              <a:rPr lang="en-US" sz="1200" dirty="0">
+                <a:solidFill>
+                  <a:srgbClr val="CCCCCC"/>
+                </a:solidFill>
+                <a:latin typeface="Pretendard" pitchFamily="34" charset="0"/>
+                <a:ea typeface="Pretendard" pitchFamily="34" charset="-122"/>
+                <a:cs typeface="Pretendard" pitchFamily="34" charset="-120"/>
+              </a:rPr>
+              <a:t>확인한 구역</a:t>
+            </a:r>
+            <a:endParaRPr lang="en-US" sz="1200" dirty="0"/>
+          </a:p>
+        </p:txBody>
+      </p:sp>
+      <p:sp>
+        <p:nvSpPr>
+          <p:cNvPr id="19" name="Text 17"/>
+          <p:cNvSpPr txBox="1"/>
+          <p:nvPr/>
+        </p:nvSpPr>
+        <p:spPr>
+          <a:xfrm>
+            <a:off x="6370625" y="5596128"/>
+            <a:ext cx="2377440" cy="201168"/>
+          </a:xfrm>
+          <a:prstGeom prst="rect">
+            <a:avLst/>
+          </a:prstGeom>
+          <a:noFill/>
+          <a:ln/>
+        </p:spPr>
+        <p:txBody>
+          <a:bodyPr wrap="square" lIns="0" tIns="0" rIns="0" bIns="0" rtlCol="0" anchor="t"/>
+          <a:lstStyle/>
+          <a:p>
+            <a:pPr indent="0" marL="0">
+              <a:buNone/>
+            </a:pPr>
+            <a:r>
+              <a:rPr lang="en-US" sz="1050" dirty="0">
+                <a:solidFill>
+                  <a:srgbClr val="8E8E93"/>
+                </a:solidFill>
+                <a:latin typeface="Pretendard" pitchFamily="34" charset="0"/>
+                <a:ea typeface="Pretendard" pitchFamily="34" charset="-122"/>
+                <a:cs typeface="Pretendard" pitchFamily="34" charset="-120"/>
+              </a:rPr>
+              <a:t>어항 · 하수구</a:t>
+            </a:r>
+            <a:endParaRPr lang="en-US" sz="1050" dirty="0"/>
+          </a:p>
+        </p:txBody>
+      </p:sp>
+      <p:sp>
+        <p:nvSpPr>
+          <p:cNvPr id="20" name="Shape 18"/>
+          <p:cNvSpPr/>
+          <p:nvPr/>
+        </p:nvSpPr>
+        <p:spPr>
+          <a:xfrm>
+            <a:off x="8839505" y="4892040"/>
+            <a:ext cx="0" cy="868680"/>
+          </a:xfrm>
+          <a:prstGeom prst="line">
+            <a:avLst/>
+          </a:prstGeom>
+          <a:noFill/>
+          <a:ln w="9525">
+            <a:solidFill>
+              <a:srgbClr val="3A3A3C"/>
+            </a:solidFill>
+            <a:prstDash val="solid"/>
+          </a:ln>
+        </p:spPr>
+      </p:sp>
+      <p:sp>
+        <p:nvSpPr>
+          <p:cNvPr id="21" name="Text 19"/>
+          <p:cNvSpPr txBox="1"/>
+          <p:nvPr/>
+        </p:nvSpPr>
+        <p:spPr>
+          <a:xfrm>
+            <a:off x="9113825" y="4846320"/>
+            <a:ext cx="2377440" cy="502920"/>
+          </a:xfrm>
+          <a:prstGeom prst="rect">
+            <a:avLst/>
+          </a:prstGeom>
+          <a:noFill/>
+          <a:ln/>
+        </p:spPr>
+        <p:txBody>
+          <a:bodyPr wrap="square" lIns="0" tIns="0" rIns="0" bIns="0" rtlCol="0" anchor="ctr"/>
+          <a:lstStyle/>
+          <a:p>
+            <a:pPr indent="0" marL="0">
+              <a:buNone/>
+            </a:pPr>
+            <a:r>
+              <a:rPr lang="en-US" sz="2800" dirty="0">
+                <a:solidFill>
+                  <a:srgbClr val="FFFFFF"/>
+                </a:solidFill>
+                <a:latin typeface="Pretendard SemiBold" pitchFamily="34" charset="0"/>
+                <a:ea typeface="Pretendard SemiBold" pitchFamily="34" charset="-122"/>
+                <a:cs typeface="Pretendard SemiBold" pitchFamily="34" charset="-120"/>
+              </a:rPr>
+              <a:t>전체</a:t>
+            </a:r>
+            <a:endParaRPr lang="en-US" sz="2800" dirty="0"/>
+          </a:p>
+        </p:txBody>
+      </p:sp>
+      <p:sp>
+        <p:nvSpPr>
+          <p:cNvPr id="22" name="Text 20"/>
+          <p:cNvSpPr txBox="1"/>
+          <p:nvPr/>
+        </p:nvSpPr>
+        <p:spPr>
+          <a:xfrm>
+            <a:off x="9113825" y="5376672"/>
+            <a:ext cx="2377440" cy="228600"/>
+          </a:xfrm>
+          <a:prstGeom prst="rect">
+            <a:avLst/>
+          </a:prstGeom>
+          <a:noFill/>
+          <a:ln/>
+        </p:spPr>
+        <p:txBody>
+          <a:bodyPr wrap="square" lIns="0" tIns="0" rIns="0" bIns="0" rtlCol="0" anchor="t"/>
+          <a:lstStyle/>
+          <a:p>
+            <a:pPr indent="0" marL="0">
+              <a:buNone/>
+            </a:pPr>
+            <a:r>
+              <a:rPr lang="en-US" sz="1200" dirty="0">
+                <a:solidFill>
+                  <a:srgbClr val="CCCCCC"/>
+                </a:solidFill>
+                <a:latin typeface="Pretendard" pitchFamily="34" charset="0"/>
+                <a:ea typeface="Pretendard" pitchFamily="34" charset="-122"/>
+                <a:cs typeface="Pretendard" pitchFamily="34" charset="-120"/>
+              </a:rPr>
+              <a:t>리뷰 범위</a:t>
+            </a:r>
+            <a:endParaRPr lang="en-US" sz="1200" dirty="0"/>
+          </a:p>
+        </p:txBody>
+      </p:sp>
+      <p:sp>
+        <p:nvSpPr>
+          <p:cNvPr id="23" name="Text 21"/>
+          <p:cNvSpPr txBox="1"/>
+          <p:nvPr/>
+        </p:nvSpPr>
+        <p:spPr>
+          <a:xfrm>
+            <a:off x="9113825" y="5596128"/>
+            <a:ext cx="2377440" cy="201168"/>
+          </a:xfrm>
+          <a:prstGeom prst="rect">
+            <a:avLst/>
+          </a:prstGeom>
+          <a:noFill/>
+          <a:ln/>
+        </p:spPr>
+        <p:txBody>
+          <a:bodyPr wrap="square" lIns="0" tIns="0" rIns="0" bIns="0" rtlCol="0" anchor="t"/>
+          <a:lstStyle/>
+          <a:p>
+            <a:pPr indent="0" marL="0">
+              <a:buNone/>
+            </a:pPr>
+            <a:r>
+              <a:rPr lang="en-US" sz="1050" dirty="0">
+                <a:solidFill>
+                  <a:srgbClr val="8E8E93"/>
+                </a:solidFill>
+                <a:latin typeface="Pretendard" pitchFamily="34" charset="0"/>
+                <a:ea typeface="Pretendard" pitchFamily="34" charset="-122"/>
+                <a:cs typeface="Pretendard" pitchFamily="34" charset="-120"/>
+              </a:rPr>
+              <a:t>Scripts · Editor</a:t>
+            </a:r>
+            <a:endParaRPr lang="en-US" sz="1050" dirty="0"/>
+          </a:p>
+        </p:txBody>
+      </p:sp>
+      <p:sp>
+        <p:nvSpPr>
+          <p:cNvPr id="24" name="Text 22"/>
+          <p:cNvSpPr txBox="1"/>
+          <p:nvPr/>
+        </p:nvSpPr>
+        <p:spPr>
+          <a:xfrm>
+            <a:off x="609905" y="6446520"/>
+            <a:ext cx="5486400" cy="274320"/>
+          </a:xfrm>
+          <a:prstGeom prst="rect">
+            <a:avLst/>
+          </a:prstGeom>
+          <a:noFill/>
+          <a:ln/>
+        </p:spPr>
+        <p:txBody>
+          <a:bodyPr wrap="square" lIns="0" tIns="0" rIns="0" bIns="0" rtlCol="0" anchor="ctr"/>
+          <a:lstStyle/>
+          <a:p>
+            <a:pPr indent="0" marL="0">
+              <a:buNone/>
+            </a:pPr>
+            <a:r>
+              <a:rPr lang="en-US" sz="1000" spc="200" kern="0" dirty="0">
+                <a:solidFill>
+                  <a:srgbClr val="8E8E93"/>
+                </a:solidFill>
+                <a:latin typeface="Pretendard" pitchFamily="34" charset="0"/>
+                <a:ea typeface="Pretendard" pitchFamily="34" charset="-122"/>
+                <a:cs typeface="Pretendard" pitchFamily="34" charset="-120"/>
+              </a:rPr>
+              <a:t>QA REPORT  ·  FISH GAME</a:t>
+            </a:r>
+            <a:endParaRPr lang="en-US" sz="1000" dirty="0"/>
+          </a:p>
+        </p:txBody>
+      </p:sp>
+      <p:sp>
+        <p:nvSpPr>
+          <p:cNvPr id="25" name="Text 23"/>
+          <p:cNvSpPr txBox="1"/>
+          <p:nvPr/>
+        </p:nvSpPr>
+        <p:spPr>
+          <a:xfrm>
+            <a:off x="10515600" y="6446520"/>
+            <a:ext cx="1066190" cy="274320"/>
+          </a:xfrm>
+          <a:prstGeom prst="rect">
+            <a:avLst/>
+          </a:prstGeom>
+          <a:noFill/>
+          <a:ln/>
+        </p:spPr>
+        <p:txBody>
+          <a:bodyPr wrap="square" lIns="0" tIns="0" rIns="0" bIns="0" rtlCol="0" anchor="ctr"/>
+          <a:lstStyle/>
+          <a:p>
+            <a:pPr algn="r" indent="0" marL="0">
+              <a:buNone/>
+            </a:pPr>
+            <a:r>
+              <a:rPr lang="en-US" sz="1000" dirty="0">
+                <a:solidFill>
+                  <a:srgbClr val="8E8E93"/>
+                </a:solidFill>
+                <a:latin typeface="Pretendard" pitchFamily="34" charset="0"/>
+                <a:ea typeface="Pretendard" pitchFamily="34" charset="-122"/>
+                <a:cs typeface="Pretendard" pitchFamily="34" charset="-120"/>
+              </a:rPr>
+              <a:t>22 / 25</a:t>
+            </a:r>
+            <a:endParaRPr lang="en-US" sz="1000" dirty="0"/>
+          </a:p>
+        </p:txBody>
+      </p:sp>
+    </p:spTree>
+  </p:cSld>
+  <p:clrMapOvr>
+    <a:masterClrMapping/>
+  </p:clrMapOvr>
+</p:sld>
+</file>
+
+<file path=ppt/slides/slide23.xml><?xml version="1.0" encoding="utf-8"?>
+<p:sld xmlns:a="http://schemas.openxmlformats.org/drawingml/2006/main" xmlns:r="http://schemas.openxmlformats.org/officeDocument/2006/relationships" xmlns:p="http://schemas.openxmlformats.org/presentationml/2006/main">
+  <p:cSld name="Slide 23">
+    <p:bg>
+      <p:bgPr>
+        <a:solidFill>
+          <a:srgbClr val="FFFFFF"/>
+        </a:solidFill>
+      </p:bgPr>
+    </p:bg>
+    <p:spTree>
+      <p:nvGrpSpPr>
+        <p:cNvPr id="1" name=""/>
+        <p:cNvGrpSpPr/>
+        <p:nvPr/>
+      </p:nvGrpSpPr>
+      <p:grpSpPr>
+        <a:xfrm>
+          <a:off x="0" y="0"/>
+          <a:ext cx="0" cy="0"/>
+          <a:chOff x="0" y="0"/>
+          <a:chExt cx="0" cy="0"/>
+        </a:xfrm>
+      </p:grpSpPr>
+      <p:sp>
+        <p:nvSpPr>
+          <p:cNvPr id="2" name="Text 0"/>
+          <p:cNvSpPr txBox="1"/>
+          <p:nvPr/>
+        </p:nvSpPr>
+        <p:spPr>
+          <a:xfrm>
+            <a:off x="609905" y="320040"/>
+            <a:ext cx="10972800" cy="228600"/>
+          </a:xfrm>
+          <a:prstGeom prst="rect">
+            <a:avLst/>
+          </a:prstGeom>
+          <a:noFill/>
+          <a:ln/>
+        </p:spPr>
+        <p:txBody>
+          <a:bodyPr wrap="square" lIns="0" tIns="0" rIns="0" bIns="0" rtlCol="0" anchor="t"/>
+          <a:lstStyle/>
+          <a:p>
+            <a:pPr indent="0" marL="0">
+              <a:buNone/>
+            </a:pPr>
+            <a:r>
+              <a:rPr lang="en-US" sz="1100" b="1" dirty="0">
+                <a:solidFill>
+                  <a:srgbClr val="0066CC"/>
+                </a:solidFill>
+                <a:latin typeface="Pretendard SemiBold" pitchFamily="34" charset="0"/>
+                <a:ea typeface="Pretendard SemiBold" pitchFamily="34" charset="-122"/>
+                <a:cs typeface="Pretendard SemiBold" pitchFamily="34" charset="-120"/>
+              </a:rPr>
+              <a:t>R8  ·  3차 버그 점검</a:t>
+            </a:r>
+            <a:endParaRPr lang="en-US" sz="1100" dirty="0"/>
+          </a:p>
+        </p:txBody>
+      </p:sp>
+      <p:sp>
+        <p:nvSpPr>
+          <p:cNvPr id="3" name="Text 1"/>
+          <p:cNvSpPr txBox="1"/>
+          <p:nvPr/>
+        </p:nvSpPr>
+        <p:spPr>
+          <a:xfrm>
+            <a:off x="609905" y="594360"/>
+            <a:ext cx="10972800" cy="777240"/>
+          </a:xfrm>
+          <a:prstGeom prst="rect">
+            <a:avLst/>
+          </a:prstGeom>
+          <a:noFill/>
+          <a:ln/>
+        </p:spPr>
+        <p:txBody>
+          <a:bodyPr wrap="square" lIns="0" tIns="0" rIns="0" bIns="0" rtlCol="0" anchor="t"/>
+          <a:lstStyle/>
+          <a:p>
+            <a:pPr indent="0" marL="0">
+              <a:buNone/>
+            </a:pPr>
+            <a:r>
+              <a:rPr lang="en-US" sz="4000" dirty="0">
+                <a:solidFill>
+                  <a:srgbClr val="1D1D1F"/>
+                </a:solidFill>
+                <a:latin typeface="Pretendard SemiBold" pitchFamily="34" charset="0"/>
+                <a:ea typeface="Pretendard SemiBold" pitchFamily="34" charset="-122"/>
+                <a:cs typeface="Pretendard SemiBold" pitchFamily="34" charset="-120"/>
+              </a:rPr>
+              <a:t>발견한 문제와 조치</a:t>
+            </a:r>
+            <a:endParaRPr lang="en-US" sz="4000" dirty="0"/>
+          </a:p>
+        </p:txBody>
+      </p:sp>
+      <p:sp>
+        <p:nvSpPr>
+          <p:cNvPr id="4" name="Shape 2"/>
+          <p:cNvSpPr/>
+          <p:nvPr/>
+        </p:nvSpPr>
+        <p:spPr>
+          <a:xfrm>
+            <a:off x="609905" y="1417320"/>
+            <a:ext cx="10972800" cy="0"/>
+          </a:xfrm>
+          <a:prstGeom prst="line">
+            <a:avLst/>
+          </a:prstGeom>
+          <a:noFill/>
+          <a:ln w="9525">
+            <a:solidFill>
+              <a:srgbClr val="E0E0E0"/>
+            </a:solidFill>
+            <a:prstDash val="solid"/>
+          </a:ln>
+        </p:spPr>
+      </p:sp>
+      <p:graphicFrame>
+        <p:nvGraphicFramePr>
+          <p:cNvPr id="24" name="Table 0"/>
+          <p:cNvGraphicFramePr>
+            <a:graphicFrameLocks noGrp="1"/>
+          </p:cNvGraphicFramePr>
+          <p:nvPr>
+            <p:extLst>
+              <p:ext uri="{D42A27DB-BD31-4B8C-83A1-F6EECF244321}">
+                <p14:modId xmlns:p14="http://schemas.microsoft.com/office/powerpoint/2010/main" val="1579011935"/>
+              </p:ext>
+            </p:extLst>
+          </p:nvPr>
+        </p:nvGraphicFramePr>
+        <p:xfrm>
+          <a:off x="609905" y="1600200"/>
+          <a:ext cx="10972800" cy="914400"/>
+        </p:xfrm>
+        <a:graphic>
+          <a:graphicData uri="http://schemas.openxmlformats.org/drawingml/2006/table">
+            <a:tbl>
+              <a:tblPr/>
+              <a:tblGrid>
+                <a:gridCol w="731520"/>
+                <a:gridCol w="1188720"/>
+                <a:gridCol w="4206240"/>
+                <a:gridCol w="3931920"/>
+                <a:gridCol w="914400"/>
+              </a:tblGrid>
+              <a:tr h="329184">
+                <a:tc>
+                  <a:txBody>
+                    <a:bodyPr/>
+                    <a:lstStyle/>
+                    <a:p>
+                      <a:pPr indent="0" marL="0">
+                        <a:buNone/>
+                      </a:pPr>
+                      <a:r>
+                        <a:rPr lang="en-US" sz="1200" b="1" dirty="0">
+                          <a:solidFill>
+                            <a:srgbClr val="7A7A7A"/>
+                          </a:solidFill>
+                          <a:latin typeface="Pretendard SemiBold" pitchFamily="34" charset="0"/>
+                          <a:ea typeface="Pretendard SemiBold" pitchFamily="34" charset="-122"/>
+                          <a:cs typeface="Pretendard SemiBold" pitchFamily="34" charset="-120"/>
+                        </a:rPr>
+                        <a:t>심각도</a:t>
+                      </a:r>
+                      <a:endParaRPr lang="en-US" sz="1200" dirty="0">
+                        <a:latin typeface="Pretendard SemiBold" charset="0"/>
+                        <a:ea typeface="Pretendard SemiBold" charset="0"/>
+                        <a:cs typeface="Pretendard SemiBold" charset="0"/>
+                      </a:endParaRPr>
+                    </a:p>
+                  </a:txBody>
+                  <a:tcPr marL="76200" marR="76200" marT="50800" marB="50800" anchor="ctr">
+                    <a:lnL w="0" cap="flat" cmpd="sng" algn="ctr">
+                      <a:noFill/>
+                    </a:lnL>
+                    <a:lnR w="0" cap="flat" cmpd="sng" algn="ctr">
+                      <a:noFill/>
+                    </a:lnR>
+                    <a:lnT w="0" cap="flat" cmpd="sng" algn="ctr">
+                      <a:noFill/>
+                    </a:lnT>
+                    <a:lnB w="9525" cap="flat" cmpd="sng" algn="ctr">
+                      <a:solidFill>
+                        <a:srgbClr val="E0E0E0"/>
+                      </a:solidFill>
+                      <a:prstDash val="solid"/>
+                      <a:round/>
+                      <a:headEnd type="none" w="med" len="med"/>
+                      <a:tailEnd type="none" w="med" len="med"/>
+                    </a:lnB>
+                    <a:solidFill>
+                      <a:srgbClr val="F5F5F7"/>
+                    </a:solidFill>
+                  </a:tcPr>
+                </a:tc>
+                <a:tc>
+                  <a:txBody>
+                    <a:bodyPr/>
+                    <a:lstStyle/>
+                    <a:p>
+                      <a:pPr indent="0" marL="0">
+                        <a:buNone/>
+                      </a:pPr>
+                      <a:r>
+                        <a:rPr lang="en-US" sz="1200" b="1" dirty="0">
+                          <a:solidFill>
+                            <a:srgbClr val="7A7A7A"/>
+                          </a:solidFill>
+                          <a:latin typeface="Pretendard SemiBold" pitchFamily="34" charset="0"/>
+                          <a:ea typeface="Pretendard SemiBold" pitchFamily="34" charset="-122"/>
+                          <a:cs typeface="Pretendard SemiBold" pitchFamily="34" charset="-120"/>
+                        </a:rPr>
+                        <a:t>영역</a:t>
+                      </a:r>
+                      <a:endParaRPr lang="en-US" sz="1200" dirty="0">
+                        <a:latin typeface="Pretendard SemiBold" charset="0"/>
+                        <a:ea typeface="Pretendard SemiBold" charset="0"/>
+                        <a:cs typeface="Pretendard SemiBold" charset="0"/>
+                      </a:endParaRPr>
+                    </a:p>
+                  </a:txBody>
+                  <a:tcPr marL="76200" marR="76200" marT="50800" marB="50800" anchor="ctr">
+                    <a:lnL w="0" cap="flat" cmpd="sng" algn="ctr">
+                      <a:noFill/>
+                    </a:lnL>
+                    <a:lnR w="0" cap="flat" cmpd="sng" algn="ctr">
+                      <a:noFill/>
+                    </a:lnR>
+                    <a:lnT w="0" cap="flat" cmpd="sng" algn="ctr">
+                      <a:noFill/>
+                    </a:lnT>
+                    <a:lnB w="9525" cap="flat" cmpd="sng" algn="ctr">
+                      <a:solidFill>
+                        <a:srgbClr val="E0E0E0"/>
+                      </a:solidFill>
+                      <a:prstDash val="solid"/>
+                      <a:round/>
+                      <a:headEnd type="none" w="med" len="med"/>
+                      <a:tailEnd type="none" w="med" len="med"/>
+                    </a:lnB>
+                    <a:solidFill>
+                      <a:srgbClr val="F5F5F7"/>
+                    </a:solidFill>
+                  </a:tcPr>
+                </a:tc>
+                <a:tc>
+                  <a:txBody>
+                    <a:bodyPr/>
+                    <a:lstStyle/>
+                    <a:p>
+                      <a:pPr indent="0" marL="0">
+                        <a:buNone/>
+                      </a:pPr>
+                      <a:r>
+                        <a:rPr lang="en-US" sz="1200" b="1" dirty="0">
+                          <a:solidFill>
+                            <a:srgbClr val="7A7A7A"/>
+                          </a:solidFill>
+                          <a:latin typeface="Pretendard SemiBold" pitchFamily="34" charset="0"/>
+                          <a:ea typeface="Pretendard SemiBold" pitchFamily="34" charset="-122"/>
+                          <a:cs typeface="Pretendard SemiBold" pitchFamily="34" charset="-120"/>
+                        </a:rPr>
+                        <a:t>문제</a:t>
+                      </a:r>
+                      <a:endParaRPr lang="en-US" sz="1200" dirty="0">
+                        <a:latin typeface="Pretendard SemiBold" charset="0"/>
+                        <a:ea typeface="Pretendard SemiBold" charset="0"/>
+                        <a:cs typeface="Pretendard SemiBold" charset="0"/>
+                      </a:endParaRPr>
+                    </a:p>
+                  </a:txBody>
+                  <a:tcPr marL="76200" marR="76200" marT="50800" marB="50800" anchor="ctr">
+                    <a:lnL w="0" cap="flat" cmpd="sng" algn="ctr">
+                      <a:noFill/>
+                    </a:lnL>
+                    <a:lnR w="0" cap="flat" cmpd="sng" algn="ctr">
+                      <a:noFill/>
+                    </a:lnR>
+                    <a:lnT w="0" cap="flat" cmpd="sng" algn="ctr">
+                      <a:noFill/>
+                    </a:lnT>
+                    <a:lnB w="9525" cap="flat" cmpd="sng" algn="ctr">
+                      <a:solidFill>
+                        <a:srgbClr val="E0E0E0"/>
+                      </a:solidFill>
+                      <a:prstDash val="solid"/>
+                      <a:round/>
+                      <a:headEnd type="none" w="med" len="med"/>
+                      <a:tailEnd type="none" w="med" len="med"/>
+                    </a:lnB>
+                    <a:solidFill>
+                      <a:srgbClr val="F5F5F7"/>
+                    </a:solidFill>
+                  </a:tcPr>
+                </a:tc>
+                <a:tc>
+                  <a:txBody>
+                    <a:bodyPr/>
+                    <a:lstStyle/>
+                    <a:p>
+                      <a:pPr indent="0" marL="0">
+                        <a:buNone/>
+                      </a:pPr>
+                      <a:r>
+                        <a:rPr lang="en-US" sz="1200" b="1" dirty="0">
+                          <a:solidFill>
+                            <a:srgbClr val="7A7A7A"/>
+                          </a:solidFill>
+                          <a:latin typeface="Pretendard SemiBold" pitchFamily="34" charset="0"/>
+                          <a:ea typeface="Pretendard SemiBold" pitchFamily="34" charset="-122"/>
+                          <a:cs typeface="Pretendard SemiBold" pitchFamily="34" charset="-120"/>
+                        </a:rPr>
+                        <a:t>조치</a:t>
+                      </a:r>
+                      <a:endParaRPr lang="en-US" sz="1200" dirty="0">
+                        <a:latin typeface="Pretendard SemiBold" charset="0"/>
+                        <a:ea typeface="Pretendard SemiBold" charset="0"/>
+                        <a:cs typeface="Pretendard SemiBold" charset="0"/>
+                      </a:endParaRPr>
+                    </a:p>
+                  </a:txBody>
+                  <a:tcPr marL="76200" marR="76200" marT="50800" marB="50800" anchor="ctr">
+                    <a:lnL w="0" cap="flat" cmpd="sng" algn="ctr">
+                      <a:noFill/>
+                    </a:lnL>
+                    <a:lnR w="0" cap="flat" cmpd="sng" algn="ctr">
+                      <a:noFill/>
+                    </a:lnR>
+                    <a:lnT w="0" cap="flat" cmpd="sng" algn="ctr">
+                      <a:noFill/>
+                    </a:lnT>
+                    <a:lnB w="9525" cap="flat" cmpd="sng" algn="ctr">
+                      <a:solidFill>
+                        <a:srgbClr val="E0E0E0"/>
+                      </a:solidFill>
+                      <a:prstDash val="solid"/>
+                      <a:round/>
+                      <a:headEnd type="none" w="med" len="med"/>
+                      <a:tailEnd type="none" w="med" len="med"/>
+                    </a:lnB>
+                    <a:solidFill>
+                      <a:srgbClr val="F5F5F7"/>
+                    </a:solidFill>
+                  </a:tcPr>
+                </a:tc>
+                <a:tc>
+                  <a:txBody>
+                    <a:bodyPr/>
+                    <a:lstStyle/>
+                    <a:p>
+                      <a:pPr indent="0" marL="0">
+                        <a:buNone/>
+                      </a:pPr>
+                      <a:r>
+                        <a:rPr lang="en-US" sz="1200" b="1" dirty="0">
+                          <a:solidFill>
+                            <a:srgbClr val="7A7A7A"/>
+                          </a:solidFill>
+                          <a:latin typeface="Pretendard SemiBold" pitchFamily="34" charset="0"/>
+                          <a:ea typeface="Pretendard SemiBold" pitchFamily="34" charset="-122"/>
+                          <a:cs typeface="Pretendard SemiBold" pitchFamily="34" charset="-120"/>
+                        </a:rPr>
+                        <a:t>상태</a:t>
+                      </a:r>
+                      <a:endParaRPr lang="en-US" sz="1200" dirty="0">
+                        <a:latin typeface="Pretendard SemiBold" charset="0"/>
+                        <a:ea typeface="Pretendard SemiBold" charset="0"/>
+                        <a:cs typeface="Pretendard SemiBold" charset="0"/>
+                      </a:endParaRPr>
+                    </a:p>
+                  </a:txBody>
+                  <a:tcPr marL="76200" marR="76200" marT="50800" marB="50800" anchor="ctr">
+                    <a:lnL w="0" cap="flat" cmpd="sng" algn="ctr">
+                      <a:noFill/>
+                    </a:lnL>
+                    <a:lnR w="0" cap="flat" cmpd="sng" algn="ctr">
+                      <a:noFill/>
+                    </a:lnR>
+                    <a:lnT w="0" cap="flat" cmpd="sng" algn="ctr">
+                      <a:noFill/>
+                    </a:lnT>
+                    <a:lnB w="9525" cap="flat" cmpd="sng" algn="ctr">
+                      <a:solidFill>
+                        <a:srgbClr val="E0E0E0"/>
+                      </a:solidFill>
+                      <a:prstDash val="solid"/>
+                      <a:round/>
+                      <a:headEnd type="none" w="med" len="med"/>
+                      <a:tailEnd type="none" w="med" len="med"/>
+                    </a:lnB>
+                    <a:solidFill>
+                      <a:srgbClr val="F5F5F7"/>
+                    </a:solidFill>
+                  </a:tcPr>
+                </a:tc>
+              </a:tr>
+              <a:tr h="638556">
+                <a:tc>
+                  <a:txBody>
+                    <a:bodyPr/>
+                    <a:lstStyle/>
+                    <a:p>
+                      <a:pPr indent="0" marL="0">
+                        <a:buNone/>
+                      </a:pPr>
+                      <a:r>
+                        <a:rPr lang="en-US" sz="1300" dirty="0">
+                          <a:solidFill>
+                            <a:srgbClr val="1D1D1F"/>
+                          </a:solidFill>
+                          <a:latin typeface="Pretendard Medium" pitchFamily="34" charset="0"/>
+                          <a:ea typeface="Pretendard Medium" pitchFamily="34" charset="-122"/>
+                          <a:cs typeface="Pretendard Medium" pitchFamily="34" charset="-120"/>
+                        </a:rPr>
+                        <a:t>중간</a:t>
+                      </a:r>
+                      <a:endParaRPr lang="en-US" sz="1300" dirty="0">
+                        <a:latin typeface="Pretendard Medium" charset="0"/>
+                        <a:ea typeface="Pretendard Medium" charset="0"/>
+                        <a:cs typeface="Pretendard Medium" charset="0"/>
+                      </a:endParaRPr>
+                    </a:p>
+                  </a:txBody>
+                  <a:tcPr marL="76200" marR="76200" marT="50800" marB="50800" anchor="ctr">
+                    <a:lnL w="0" cap="flat" cmpd="sng" algn="ctr">
+                      <a:noFill/>
+                    </a:lnL>
+                    <a:lnR w="0" cap="flat" cmpd="sng" algn="ctr">
+                      <a:noFill/>
+                    </a:lnR>
+                    <a:lnT w="0" cap="flat" cmpd="sng" algn="ctr">
+                      <a:noFill/>
+                    </a:lnT>
+                    <a:lnB w="9525" cap="flat" cmpd="sng" algn="ctr">
+                      <a:solidFill>
+                        <a:srgbClr val="E0E0E0"/>
+                      </a:solidFill>
+                      <a:prstDash val="solid"/>
+                      <a:round/>
+                      <a:headEnd type="none" w="med" len="med"/>
+                      <a:tailEnd type="none" w="med" len="med"/>
+                    </a:lnB>
+                    <a:solidFill>
+                      <a:srgbClr val="FFFFFF"/>
+                    </a:solidFill>
+                  </a:tcPr>
+                </a:tc>
+                <a:tc>
+                  <a:txBody>
+                    <a:bodyPr/>
+                    <a:lstStyle/>
+                    <a:p>
+                      <a:pPr indent="0" marL="0">
+                        <a:buNone/>
+                      </a:pPr>
+                      <a:r>
+                        <a:rPr lang="en-US" sz="1300" dirty="0">
+                          <a:solidFill>
+                            <a:srgbClr val="1D1D1F"/>
+                          </a:solidFill>
+                          <a:latin typeface="Pretendard SemiBold" pitchFamily="34" charset="0"/>
+                          <a:ea typeface="Pretendard SemiBold" pitchFamily="34" charset="-122"/>
+                          <a:cs typeface="Pretendard SemiBold" pitchFamily="34" charset="-120"/>
+                        </a:rPr>
+                        <a:t>인게임 배경</a:t>
+                      </a:r>
+                      <a:endParaRPr lang="en-US" sz="1300" dirty="0">
+                        <a:latin typeface="Pretendard SemiBold" charset="0"/>
+                        <a:ea typeface="Pretendard SemiBold" charset="0"/>
+                        <a:cs typeface="Pretendard SemiBold" charset="0"/>
+                      </a:endParaRPr>
+                    </a:p>
+                  </a:txBody>
+                  <a:tcPr marL="76200" marR="76200" marT="50800" marB="50800" anchor="ctr">
+                    <a:lnL w="0" cap="flat" cmpd="sng" algn="ctr">
+                      <a:noFill/>
+                    </a:lnL>
+                    <a:lnR w="0" cap="flat" cmpd="sng" algn="ctr">
+                      <a:noFill/>
+                    </a:lnR>
+                    <a:lnT w="0" cap="flat" cmpd="sng" algn="ctr">
+                      <a:noFill/>
+                    </a:lnT>
+                    <a:lnB w="9525" cap="flat" cmpd="sng" algn="ctr">
+                      <a:solidFill>
+                        <a:srgbClr val="E0E0E0"/>
+                      </a:solidFill>
+                      <a:prstDash val="solid"/>
+                      <a:round/>
+                      <a:headEnd type="none" w="med" len="med"/>
+                      <a:tailEnd type="none" w="med" len="med"/>
+                    </a:lnB>
+                    <a:solidFill>
+                      <a:srgbClr val="FFFFFF"/>
+                    </a:solidFill>
+                  </a:tcPr>
+                </a:tc>
+                <a:tc>
+                  <a:txBody>
+                    <a:bodyPr/>
+                    <a:lstStyle/>
+                    <a:p>
+                      <a:pPr indent="0" marL="0">
+                        <a:buNone/>
+                      </a:pPr>
+                      <a:r>
+                        <a:rPr lang="en-US" sz="1300" dirty="0">
+                          <a:solidFill>
+                            <a:srgbClr val="333333"/>
+                          </a:solidFill>
+                          <a:latin typeface="Pretendard" pitchFamily="34" charset="0"/>
+                          <a:ea typeface="Pretendard" pitchFamily="34" charset="-122"/>
+                          <a:cs typeface="Pretendard" pitchFamily="34" charset="-120"/>
+                        </a:rPr>
+                        <a:t>선형 색공간에서 물 메시 정점 색이 변환되지 않아 물이 뿌옇고 밝게 뜸 (의도한 어두운 청록이 안 나옴)</a:t>
+                      </a:r>
+                      <a:endParaRPr lang="en-US" sz="1300" dirty="0">
+                        <a:latin typeface="Pretendard" charset="0"/>
+                        <a:ea typeface="Pretendard" charset="0"/>
+                        <a:cs typeface="Pretendard" charset="0"/>
+                      </a:endParaRPr>
+                    </a:p>
+                  </a:txBody>
+                  <a:tcPr marL="76200" marR="76200" marT="50800" marB="50800" anchor="ctr">
+                    <a:lnL w="0" cap="flat" cmpd="sng" algn="ctr">
+                      <a:noFill/>
+                    </a:lnL>
+                    <a:lnR w="0" cap="flat" cmpd="sng" algn="ctr">
+                      <a:noFill/>
+                    </a:lnR>
+                    <a:lnT w="0" cap="flat" cmpd="sng" algn="ctr">
+                      <a:noFill/>
+                    </a:lnT>
+                    <a:lnB w="9525" cap="flat" cmpd="sng" algn="ctr">
+                      <a:solidFill>
+                        <a:srgbClr val="E0E0E0"/>
+                      </a:solidFill>
+                      <a:prstDash val="solid"/>
+                      <a:round/>
+                      <a:headEnd type="none" w="med" len="med"/>
+                      <a:tailEnd type="none" w="med" len="med"/>
+                    </a:lnB>
+                    <a:solidFill>
+                      <a:srgbClr val="FFFFFF"/>
+                    </a:solidFill>
+                  </a:tcPr>
+                </a:tc>
+                <a:tc>
+                  <a:txBody>
+                    <a:bodyPr/>
+                    <a:lstStyle/>
+                    <a:p>
+                      <a:pPr indent="0" marL="0">
+                        <a:buNone/>
+                      </a:pPr>
+                      <a:r>
+                        <a:rPr lang="en-US" sz="1300" dirty="0">
+                          <a:solidFill>
+                            <a:srgbClr val="333333"/>
+                          </a:solidFill>
+                          <a:latin typeface="Pretendard" pitchFamily="34" charset="0"/>
+                          <a:ea typeface="Pretendard" pitchFamily="34" charset="-122"/>
+                          <a:cs typeface="Pretendard" pitchFamily="34" charset="-120"/>
+                        </a:rPr>
+                        <a:t>정점 색을 .linear로 변환</a:t>
+                      </a:r>
+                      <a:endParaRPr lang="en-US" sz="1300" dirty="0">
+                        <a:latin typeface="Pretendard" charset="0"/>
+                        <a:ea typeface="Pretendard" charset="0"/>
+                        <a:cs typeface="Pretendard" charset="0"/>
+                      </a:endParaRPr>
+                    </a:p>
+                  </a:txBody>
+                  <a:tcPr marL="76200" marR="76200" marT="50800" marB="50800" anchor="ctr">
+                    <a:lnL w="0" cap="flat" cmpd="sng" algn="ctr">
+                      <a:noFill/>
+                    </a:lnL>
+                    <a:lnR w="0" cap="flat" cmpd="sng" algn="ctr">
+                      <a:noFill/>
+                    </a:lnR>
+                    <a:lnT w="0" cap="flat" cmpd="sng" algn="ctr">
+                      <a:noFill/>
+                    </a:lnT>
+                    <a:lnB w="9525" cap="flat" cmpd="sng" algn="ctr">
+                      <a:solidFill>
+                        <a:srgbClr val="E0E0E0"/>
+                      </a:solidFill>
+                      <a:prstDash val="solid"/>
+                      <a:round/>
+                      <a:headEnd type="none" w="med" len="med"/>
+                      <a:tailEnd type="none" w="med" len="med"/>
+                    </a:lnB>
+                    <a:solidFill>
+                      <a:srgbClr val="FFFFFF"/>
+                    </a:solidFill>
+                  </a:tcPr>
+                </a:tc>
+                <a:tc>
+                  <a:txBody>
+                    <a:bodyPr/>
+                    <a:lstStyle/>
+                    <a:p>
+                      <a:pPr algn="ctr" indent="0" marL="0">
+                        <a:buNone/>
+                      </a:pPr>
+                      <a:r>
+                        <a:rPr lang="en-US" sz="1300" dirty="0">
+                          <a:solidFill>
+                            <a:srgbClr val="0066CC"/>
+                          </a:solidFill>
+                          <a:latin typeface="Pretendard Medium" pitchFamily="34" charset="0"/>
+                          <a:ea typeface="Pretendard Medium" pitchFamily="34" charset="-122"/>
+                          <a:cs typeface="Pretendard Medium" pitchFamily="34" charset="-120"/>
+                        </a:rPr>
+                        <a:t>✓ 수정</a:t>
+                      </a:r>
+                      <a:endParaRPr lang="en-US" sz="1300" dirty="0">
+                        <a:latin typeface="Pretendard Medium" charset="0"/>
+                        <a:ea typeface="Pretendard Medium" charset="0"/>
+                        <a:cs typeface="Pretendard Medium" charset="0"/>
+                      </a:endParaRPr>
+                    </a:p>
+                  </a:txBody>
+                  <a:tcPr marL="76200" marR="76200" marT="50800" marB="50800" anchor="ctr">
+                    <a:lnL w="0" cap="flat" cmpd="sng" algn="ctr">
+                      <a:noFill/>
+                    </a:lnL>
+                    <a:lnR w="0" cap="flat" cmpd="sng" algn="ctr">
+                      <a:noFill/>
+                    </a:lnR>
+                    <a:lnT w="0" cap="flat" cmpd="sng" algn="ctr">
+                      <a:noFill/>
+                    </a:lnT>
+                    <a:lnB w="9525" cap="flat" cmpd="sng" algn="ctr">
+                      <a:solidFill>
+                        <a:srgbClr val="E0E0E0"/>
+                      </a:solidFill>
+                      <a:prstDash val="solid"/>
+                      <a:round/>
+                      <a:headEnd type="none" w="med" len="med"/>
+                      <a:tailEnd type="none" w="med" len="med"/>
+                    </a:lnB>
+                    <a:solidFill>
+                      <a:srgbClr val="FFFFFF"/>
+                    </a:solidFill>
+                  </a:tcPr>
+                </a:tc>
+              </a:tr>
+              <a:tr h="638556">
+                <a:tc>
+                  <a:txBody>
+                    <a:bodyPr/>
+                    <a:lstStyle/>
+                    <a:p>
+                      <a:pPr indent="0" marL="0">
+                        <a:buNone/>
+                      </a:pPr>
+                      <a:r>
+                        <a:rPr lang="en-US" sz="1300" dirty="0">
+                          <a:solidFill>
+                            <a:srgbClr val="1D1D1F"/>
+                          </a:solidFill>
+                          <a:latin typeface="Pretendard Medium" pitchFamily="34" charset="0"/>
+                          <a:ea typeface="Pretendard Medium" pitchFamily="34" charset="-122"/>
+                          <a:cs typeface="Pretendard Medium" pitchFamily="34" charset="-120"/>
+                        </a:rPr>
+                        <a:t>중간</a:t>
+                      </a:r>
+                      <a:endParaRPr lang="en-US" sz="1300" dirty="0">
+                        <a:latin typeface="Pretendard Medium" charset="0"/>
+                        <a:ea typeface="Pretendard Medium" charset="0"/>
+                        <a:cs typeface="Pretendard Medium" charset="0"/>
+                      </a:endParaRPr>
+                    </a:p>
+                  </a:txBody>
+                  <a:tcPr marL="76200" marR="76200" marT="50800" marB="50800" anchor="ctr">
+                    <a:lnL w="0" cap="flat" cmpd="sng" algn="ctr">
+                      <a:noFill/>
+                    </a:lnL>
+                    <a:lnR w="0" cap="flat" cmpd="sng" algn="ctr">
+                      <a:noFill/>
+                    </a:lnR>
+                    <a:lnT w="0" cap="flat" cmpd="sng" algn="ctr">
+                      <a:noFill/>
+                    </a:lnT>
+                    <a:lnB w="9525" cap="flat" cmpd="sng" algn="ctr">
+                      <a:solidFill>
+                        <a:srgbClr val="E0E0E0"/>
+                      </a:solidFill>
+                      <a:prstDash val="solid"/>
+                      <a:round/>
+                      <a:headEnd type="none" w="med" len="med"/>
+                      <a:tailEnd type="none" w="med" len="med"/>
+                    </a:lnB>
+                    <a:solidFill>
+                      <a:srgbClr val="FFFFFF"/>
+                    </a:solidFill>
+                  </a:tcPr>
+                </a:tc>
+                <a:tc>
+                  <a:txBody>
+                    <a:bodyPr/>
+                    <a:lstStyle/>
+                    <a:p>
+                      <a:pPr indent="0" marL="0">
+                        <a:buNone/>
+                      </a:pPr>
+                      <a:r>
+                        <a:rPr lang="en-US" sz="1300" dirty="0">
+                          <a:solidFill>
+                            <a:srgbClr val="1D1D1F"/>
+                          </a:solidFill>
+                          <a:latin typeface="Pretendard SemiBold" pitchFamily="34" charset="0"/>
+                          <a:ea typeface="Pretendard SemiBold" pitchFamily="34" charset="-122"/>
+                          <a:cs typeface="Pretendard SemiBold" pitchFamily="34" charset="-120"/>
+                        </a:rPr>
+                        <a:t>결과 화면</a:t>
+                      </a:r>
+                      <a:endParaRPr lang="en-US" sz="1300" dirty="0">
+                        <a:latin typeface="Pretendard SemiBold" charset="0"/>
+                        <a:ea typeface="Pretendard SemiBold" charset="0"/>
+                        <a:cs typeface="Pretendard SemiBold" charset="0"/>
+                      </a:endParaRPr>
+                    </a:p>
+                  </a:txBody>
+                  <a:tcPr marL="76200" marR="76200" marT="50800" marB="50800" anchor="ctr">
+                    <a:lnL w="0" cap="flat" cmpd="sng" algn="ctr">
+                      <a:noFill/>
+                    </a:lnL>
+                    <a:lnR w="0" cap="flat" cmpd="sng" algn="ctr">
+                      <a:noFill/>
+                    </a:lnR>
+                    <a:lnT w="0" cap="flat" cmpd="sng" algn="ctr">
+                      <a:noFill/>
+                    </a:lnT>
+                    <a:lnB w="9525" cap="flat" cmpd="sng" algn="ctr">
+                      <a:solidFill>
+                        <a:srgbClr val="E0E0E0"/>
+                      </a:solidFill>
+                      <a:prstDash val="solid"/>
+                      <a:round/>
+                      <a:headEnd type="none" w="med" len="med"/>
+                      <a:tailEnd type="none" w="med" len="med"/>
+                    </a:lnB>
+                    <a:solidFill>
+                      <a:srgbClr val="FFFFFF"/>
+                    </a:solidFill>
+                  </a:tcPr>
+                </a:tc>
+                <a:tc>
+                  <a:txBody>
+                    <a:bodyPr/>
+                    <a:lstStyle/>
+                    <a:p>
+                      <a:pPr indent="0" marL="0">
+                        <a:buNone/>
+                      </a:pPr>
+                      <a:r>
+                        <a:rPr lang="en-US" sz="1300" dirty="0">
+                          <a:solidFill>
+                            <a:srgbClr val="333333"/>
+                          </a:solidFill>
+                          <a:latin typeface="Pretendard" pitchFamily="34" charset="0"/>
+                          <a:ea typeface="Pretendard" pitchFamily="34" charset="-122"/>
+                          <a:cs typeface="Pretendard" pitchFamily="34" charset="-120"/>
+                        </a:rPr>
+                        <a:t>새 구역에 처음 닿으면 '시작 구역'이 다음 판 값으로 바뀐 뒤 기록돼 경로가 '하수구'처럼 한 구역만 표시</a:t>
+                      </a:r>
+                      <a:endParaRPr lang="en-US" sz="1300" dirty="0">
+                        <a:latin typeface="Pretendard" charset="0"/>
+                        <a:ea typeface="Pretendard" charset="0"/>
+                        <a:cs typeface="Pretendard" charset="0"/>
+                      </a:endParaRPr>
+                    </a:p>
+                  </a:txBody>
+                  <a:tcPr marL="76200" marR="76200" marT="50800" marB="50800" anchor="ctr">
+                    <a:lnL w="0" cap="flat" cmpd="sng" algn="ctr">
+                      <a:noFill/>
+                    </a:lnL>
+                    <a:lnR w="0" cap="flat" cmpd="sng" algn="ctr">
+                      <a:noFill/>
+                    </a:lnR>
+                    <a:lnT w="0" cap="flat" cmpd="sng" algn="ctr">
+                      <a:noFill/>
+                    </a:lnT>
+                    <a:lnB w="9525" cap="flat" cmpd="sng" algn="ctr">
+                      <a:solidFill>
+                        <a:srgbClr val="E0E0E0"/>
+                      </a:solidFill>
+                      <a:prstDash val="solid"/>
+                      <a:round/>
+                      <a:headEnd type="none" w="med" len="med"/>
+                      <a:tailEnd type="none" w="med" len="med"/>
+                    </a:lnB>
+                    <a:solidFill>
+                      <a:srgbClr val="FFFFFF"/>
+                    </a:solidFill>
+                  </a:tcPr>
+                </a:tc>
+                <a:tc>
+                  <a:txBody>
+                    <a:bodyPr/>
+                    <a:lstStyle/>
+                    <a:p>
+                      <a:pPr indent="0" marL="0">
+                        <a:buNone/>
+                      </a:pPr>
+                      <a:r>
+                        <a:rPr lang="en-US" sz="1300" dirty="0">
+                          <a:solidFill>
+                            <a:srgbClr val="333333"/>
+                          </a:solidFill>
+                          <a:latin typeface="Pretendard" pitchFamily="34" charset="0"/>
+                          <a:ea typeface="Pretendard" pitchFamily="34" charset="-122"/>
+                          <a:cs typeface="Pretendard" pitchFamily="34" charset="-120"/>
+                        </a:rPr>
+                        <a:t>정산 전에 이번 판 시작 구역을 따로 잡아 둠</a:t>
+                      </a:r>
+                      <a:endParaRPr lang="en-US" sz="1300" dirty="0">
+                        <a:latin typeface="Pretendard" charset="0"/>
+                        <a:ea typeface="Pretendard" charset="0"/>
+                        <a:cs typeface="Pretendard" charset="0"/>
+                      </a:endParaRPr>
+                    </a:p>
+                  </a:txBody>
+                  <a:tcPr marL="76200" marR="76200" marT="50800" marB="50800" anchor="ctr">
+                    <a:lnL w="0" cap="flat" cmpd="sng" algn="ctr">
+                      <a:noFill/>
+                    </a:lnL>
+                    <a:lnR w="0" cap="flat" cmpd="sng" algn="ctr">
+                      <a:noFill/>
+                    </a:lnR>
+                    <a:lnT w="0" cap="flat" cmpd="sng" algn="ctr">
+                      <a:noFill/>
+                    </a:lnT>
+                    <a:lnB w="9525" cap="flat" cmpd="sng" algn="ctr">
+                      <a:solidFill>
+                        <a:srgbClr val="E0E0E0"/>
+                      </a:solidFill>
+                      <a:prstDash val="solid"/>
+                      <a:round/>
+                      <a:headEnd type="none" w="med" len="med"/>
+                      <a:tailEnd type="none" w="med" len="med"/>
+                    </a:lnB>
+                    <a:solidFill>
+                      <a:srgbClr val="FFFFFF"/>
+                    </a:solidFill>
+                  </a:tcPr>
+                </a:tc>
+                <a:tc>
+                  <a:txBody>
+                    <a:bodyPr/>
+                    <a:lstStyle/>
+                    <a:p>
+                      <a:pPr algn="ctr" indent="0" marL="0">
+                        <a:buNone/>
+                      </a:pPr>
+                      <a:r>
+                        <a:rPr lang="en-US" sz="1300" dirty="0">
+                          <a:solidFill>
+                            <a:srgbClr val="0066CC"/>
+                          </a:solidFill>
+                          <a:latin typeface="Pretendard Medium" pitchFamily="34" charset="0"/>
+                          <a:ea typeface="Pretendard Medium" pitchFamily="34" charset="-122"/>
+                          <a:cs typeface="Pretendard Medium" pitchFamily="34" charset="-120"/>
+                        </a:rPr>
+                        <a:t>✓ 수정</a:t>
+                      </a:r>
+                      <a:endParaRPr lang="en-US" sz="1300" dirty="0">
+                        <a:latin typeface="Pretendard Medium" charset="0"/>
+                        <a:ea typeface="Pretendard Medium" charset="0"/>
+                        <a:cs typeface="Pretendard Medium" charset="0"/>
+                      </a:endParaRPr>
+                    </a:p>
+                  </a:txBody>
+                  <a:tcPr marL="76200" marR="76200" marT="50800" marB="50800" anchor="ctr">
+                    <a:lnL w="0" cap="flat" cmpd="sng" algn="ctr">
+                      <a:noFill/>
+                    </a:lnL>
+                    <a:lnR w="0" cap="flat" cmpd="sng" algn="ctr">
+                      <a:noFill/>
+                    </a:lnR>
+                    <a:lnT w="0" cap="flat" cmpd="sng" algn="ctr">
+                      <a:noFill/>
+                    </a:lnT>
+                    <a:lnB w="9525" cap="flat" cmpd="sng" algn="ctr">
+                      <a:solidFill>
+                        <a:srgbClr val="E0E0E0"/>
+                      </a:solidFill>
+                      <a:prstDash val="solid"/>
+                      <a:round/>
+                      <a:headEnd type="none" w="med" len="med"/>
+                      <a:tailEnd type="none" w="med" len="med"/>
+                    </a:lnB>
+                    <a:solidFill>
+                      <a:srgbClr val="FFFFFF"/>
+                    </a:solidFill>
+                  </a:tcPr>
+                </a:tc>
+              </a:tr>
+              <a:tr h="638556">
+                <a:tc>
+                  <a:txBody>
+                    <a:bodyPr/>
+                    <a:lstStyle/>
+                    <a:p>
+                      <a:pPr indent="0" marL="0">
+                        <a:buNone/>
+                      </a:pPr>
+                      <a:r>
+                        <a:rPr lang="en-US" sz="1300" dirty="0">
+                          <a:solidFill>
+                            <a:srgbClr val="7A7A7A"/>
+                          </a:solidFill>
+                          <a:latin typeface="Pretendard" pitchFamily="34" charset="0"/>
+                          <a:ea typeface="Pretendard" pitchFamily="34" charset="-122"/>
+                          <a:cs typeface="Pretendard" pitchFamily="34" charset="-120"/>
+                        </a:rPr>
+                        <a:t>낮음</a:t>
+                      </a:r>
+                      <a:endParaRPr lang="en-US" sz="1300" dirty="0">
+                        <a:latin typeface="Pretendard" charset="0"/>
+                        <a:ea typeface="Pretendard" charset="0"/>
+                        <a:cs typeface="Pretendard" charset="0"/>
+                      </a:endParaRPr>
+                    </a:p>
+                  </a:txBody>
+                  <a:tcPr marL="76200" marR="76200" marT="50800" marB="50800" anchor="ctr">
+                    <a:lnL w="0" cap="flat" cmpd="sng" algn="ctr">
+                      <a:noFill/>
+                    </a:lnL>
+                    <a:lnR w="0" cap="flat" cmpd="sng" algn="ctr">
+                      <a:noFill/>
+                    </a:lnR>
+                    <a:lnT w="0" cap="flat" cmpd="sng" algn="ctr">
+                      <a:noFill/>
+                    </a:lnT>
+                    <a:lnB w="9525" cap="flat" cmpd="sng" algn="ctr">
+                      <a:solidFill>
+                        <a:srgbClr val="E0E0E0"/>
+                      </a:solidFill>
+                      <a:prstDash val="solid"/>
+                      <a:round/>
+                      <a:headEnd type="none" w="med" len="med"/>
+                      <a:tailEnd type="none" w="med" len="med"/>
+                    </a:lnB>
+                    <a:solidFill>
+                      <a:srgbClr val="FFFFFF"/>
+                    </a:solidFill>
+                  </a:tcPr>
+                </a:tc>
+                <a:tc>
+                  <a:txBody>
+                    <a:bodyPr/>
+                    <a:lstStyle/>
+                    <a:p>
+                      <a:pPr indent="0" marL="0">
+                        <a:buNone/>
+                      </a:pPr>
+                      <a:r>
+                        <a:rPr lang="en-US" sz="1300" dirty="0">
+                          <a:solidFill>
+                            <a:srgbClr val="1D1D1F"/>
+                          </a:solidFill>
+                          <a:latin typeface="Pretendard SemiBold" pitchFamily="34" charset="0"/>
+                          <a:ea typeface="Pretendard SemiBold" pitchFamily="34" charset="-122"/>
+                          <a:cs typeface="Pretendard SemiBold" pitchFamily="34" charset="-120"/>
+                        </a:rPr>
+                        <a:t>시작 구역</a:t>
+                      </a:r>
+                      <a:endParaRPr lang="en-US" sz="1300" dirty="0">
+                        <a:latin typeface="Pretendard SemiBold" charset="0"/>
+                        <a:ea typeface="Pretendard SemiBold" charset="0"/>
+                        <a:cs typeface="Pretendard SemiBold" charset="0"/>
+                      </a:endParaRPr>
+                    </a:p>
+                  </a:txBody>
+                  <a:tcPr marL="76200" marR="76200" marT="50800" marB="50800" anchor="ctr">
+                    <a:lnL w="0" cap="flat" cmpd="sng" algn="ctr">
+                      <a:noFill/>
+                    </a:lnL>
+                    <a:lnR w="0" cap="flat" cmpd="sng" algn="ctr">
+                      <a:noFill/>
+                    </a:lnR>
+                    <a:lnT w="0" cap="flat" cmpd="sng" algn="ctr">
+                      <a:noFill/>
+                    </a:lnT>
+                    <a:lnB w="9525" cap="flat" cmpd="sng" algn="ctr">
+                      <a:solidFill>
+                        <a:srgbClr val="E0E0E0"/>
+                      </a:solidFill>
+                      <a:prstDash val="solid"/>
+                      <a:round/>
+                      <a:headEnd type="none" w="med" len="med"/>
+                      <a:tailEnd type="none" w="med" len="med"/>
+                    </a:lnB>
+                    <a:solidFill>
+                      <a:srgbClr val="FFFFFF"/>
+                    </a:solidFill>
+                  </a:tcPr>
+                </a:tc>
+                <a:tc>
+                  <a:txBody>
+                    <a:bodyPr/>
+                    <a:lstStyle/>
+                    <a:p>
+                      <a:pPr indent="0" marL="0">
+                        <a:buNone/>
+                      </a:pPr>
+                      <a:r>
+                        <a:rPr lang="en-US" sz="1300" dirty="0">
+                          <a:solidFill>
+                            <a:srgbClr val="333333"/>
+                          </a:solidFill>
+                          <a:latin typeface="Pretendard" pitchFamily="34" charset="0"/>
+                          <a:ea typeface="Pretendard" pitchFamily="34" charset="-122"/>
+                          <a:cs typeface="Pretendard" pitchFamily="34" charset="-120"/>
+                        </a:rPr>
+                        <a:t>몸이 커서 더 깊은 구역으로 옮길 때 그 구역을 열지 않아 세이브 · 메뉴 선택 표시가 어긋남</a:t>
+                      </a:r>
+                      <a:endParaRPr lang="en-US" sz="1300" dirty="0">
+                        <a:latin typeface="Pretendard" charset="0"/>
+                        <a:ea typeface="Pretendard" charset="0"/>
+                        <a:cs typeface="Pretendard" charset="0"/>
+                      </a:endParaRPr>
+                    </a:p>
+                  </a:txBody>
+                  <a:tcPr marL="76200" marR="76200" marT="50800" marB="50800" anchor="ctr">
+                    <a:lnL w="0" cap="flat" cmpd="sng" algn="ctr">
+                      <a:noFill/>
+                    </a:lnL>
+                    <a:lnR w="0" cap="flat" cmpd="sng" algn="ctr">
+                      <a:noFill/>
+                    </a:lnR>
+                    <a:lnT w="0" cap="flat" cmpd="sng" algn="ctr">
+                      <a:noFill/>
+                    </a:lnT>
+                    <a:lnB w="9525" cap="flat" cmpd="sng" algn="ctr">
+                      <a:solidFill>
+                        <a:srgbClr val="E0E0E0"/>
+                      </a:solidFill>
+                      <a:prstDash val="solid"/>
+                      <a:round/>
+                      <a:headEnd type="none" w="med" len="med"/>
+                      <a:tailEnd type="none" w="med" len="med"/>
+                    </a:lnB>
+                    <a:solidFill>
+                      <a:srgbClr val="FFFFFF"/>
+                    </a:solidFill>
+                  </a:tcPr>
+                </a:tc>
+                <a:tc>
+                  <a:txBody>
+                    <a:bodyPr/>
+                    <a:lstStyle/>
+                    <a:p>
+                      <a:pPr indent="0" marL="0">
+                        <a:buNone/>
+                      </a:pPr>
+                      <a:r>
+                        <a:rPr lang="en-US" sz="1300" dirty="0">
+                          <a:solidFill>
+                            <a:srgbClr val="333333"/>
+                          </a:solidFill>
+                          <a:latin typeface="Pretendard" pitchFamily="34" charset="0"/>
+                          <a:ea typeface="Pretendard" pitchFamily="34" charset="-122"/>
+                          <a:cs typeface="Pretendard" pitchFamily="34" charset="-120"/>
+                        </a:rPr>
+                        <a:t>EnsureStartZoneFits와 같이 구역을 열고 저장</a:t>
+                      </a:r>
+                      <a:endParaRPr lang="en-US" sz="1300" dirty="0">
+                        <a:latin typeface="Pretendard" charset="0"/>
+                        <a:ea typeface="Pretendard" charset="0"/>
+                        <a:cs typeface="Pretendard" charset="0"/>
+                      </a:endParaRPr>
+                    </a:p>
+                  </a:txBody>
+                  <a:tcPr marL="76200" marR="76200" marT="50800" marB="50800" anchor="ctr">
+                    <a:lnL w="0" cap="flat" cmpd="sng" algn="ctr">
+                      <a:noFill/>
+                    </a:lnL>
+                    <a:lnR w="0" cap="flat" cmpd="sng" algn="ctr">
+                      <a:noFill/>
+                    </a:lnR>
+                    <a:lnT w="0" cap="flat" cmpd="sng" algn="ctr">
+                      <a:noFill/>
+                    </a:lnT>
+                    <a:lnB w="9525" cap="flat" cmpd="sng" algn="ctr">
+                      <a:solidFill>
+                        <a:srgbClr val="E0E0E0"/>
+                      </a:solidFill>
+                      <a:prstDash val="solid"/>
+                      <a:round/>
+                      <a:headEnd type="none" w="med" len="med"/>
+                      <a:tailEnd type="none" w="med" len="med"/>
+                    </a:lnB>
+                    <a:solidFill>
+                      <a:srgbClr val="FFFFFF"/>
+                    </a:solidFill>
+                  </a:tcPr>
+                </a:tc>
+                <a:tc>
+                  <a:txBody>
+                    <a:bodyPr/>
+                    <a:lstStyle/>
+                    <a:p>
+                      <a:pPr algn="ctr" indent="0" marL="0">
+                        <a:buNone/>
+                      </a:pPr>
+                      <a:r>
+                        <a:rPr lang="en-US" sz="1300" dirty="0">
+                          <a:solidFill>
+                            <a:srgbClr val="0066CC"/>
+                          </a:solidFill>
+                          <a:latin typeface="Pretendard Medium" pitchFamily="34" charset="0"/>
+                          <a:ea typeface="Pretendard Medium" pitchFamily="34" charset="-122"/>
+                          <a:cs typeface="Pretendard Medium" pitchFamily="34" charset="-120"/>
+                        </a:rPr>
+                        <a:t>✓ 수정</a:t>
+                      </a:r>
+                      <a:endParaRPr lang="en-US" sz="1300" dirty="0">
+                        <a:latin typeface="Pretendard Medium" charset="0"/>
+                        <a:ea typeface="Pretendard Medium" charset="0"/>
+                        <a:cs typeface="Pretendard Medium" charset="0"/>
+                      </a:endParaRPr>
+                    </a:p>
+                  </a:txBody>
+                  <a:tcPr marL="76200" marR="76200" marT="50800" marB="50800" anchor="ctr">
+                    <a:lnL w="0" cap="flat" cmpd="sng" algn="ctr">
+                      <a:noFill/>
+                    </a:lnL>
+                    <a:lnR w="0" cap="flat" cmpd="sng" algn="ctr">
+                      <a:noFill/>
+                    </a:lnR>
+                    <a:lnT w="0" cap="flat" cmpd="sng" algn="ctr">
+                      <a:noFill/>
+                    </a:lnT>
+                    <a:lnB w="9525" cap="flat" cmpd="sng" algn="ctr">
+                      <a:solidFill>
+                        <a:srgbClr val="E0E0E0"/>
+                      </a:solidFill>
+                      <a:prstDash val="solid"/>
+                      <a:round/>
+                      <a:headEnd type="none" w="med" len="med"/>
+                      <a:tailEnd type="none" w="med" len="med"/>
+                    </a:lnB>
+                    <a:solidFill>
+                      <a:srgbClr val="FFFFFF"/>
+                    </a:solidFill>
+                  </a:tcPr>
+                </a:tc>
+              </a:tr>
+              <a:tr h="638556">
+                <a:tc>
+                  <a:txBody>
+                    <a:bodyPr/>
+                    <a:lstStyle/>
+                    <a:p>
+                      <a:pPr indent="0" marL="0">
+                        <a:buNone/>
+                      </a:pPr>
+                      <a:r>
+                        <a:rPr lang="en-US" sz="1300" dirty="0">
+                          <a:solidFill>
+                            <a:srgbClr val="7A7A7A"/>
+                          </a:solidFill>
+                          <a:latin typeface="Pretendard" pitchFamily="34" charset="0"/>
+                          <a:ea typeface="Pretendard" pitchFamily="34" charset="-122"/>
+                          <a:cs typeface="Pretendard" pitchFamily="34" charset="-120"/>
+                        </a:rPr>
+                        <a:t>낮음</a:t>
+                      </a:r>
+                      <a:endParaRPr lang="en-US" sz="1300" dirty="0">
+                        <a:latin typeface="Pretendard" charset="0"/>
+                        <a:ea typeface="Pretendard" charset="0"/>
+                        <a:cs typeface="Pretendard" charset="0"/>
+                      </a:endParaRPr>
+                    </a:p>
+                  </a:txBody>
+                  <a:tcPr marL="76200" marR="76200" marT="50800" marB="50800" anchor="ctr">
+                    <a:lnL w="0" cap="flat" cmpd="sng" algn="ctr">
+                      <a:noFill/>
+                    </a:lnL>
+                    <a:lnR w="0" cap="flat" cmpd="sng" algn="ctr">
+                      <a:noFill/>
+                    </a:lnR>
+                    <a:lnT w="0" cap="flat" cmpd="sng" algn="ctr">
+                      <a:noFill/>
+                    </a:lnT>
+                    <a:lnB w="9525" cap="flat" cmpd="sng" algn="ctr">
+                      <a:solidFill>
+                        <a:srgbClr val="E0E0E0"/>
+                      </a:solidFill>
+                      <a:prstDash val="solid"/>
+                      <a:round/>
+                      <a:headEnd type="none" w="med" len="med"/>
+                      <a:tailEnd type="none" w="med" len="med"/>
+                    </a:lnB>
+                    <a:solidFill>
+                      <a:srgbClr val="FFFFFF"/>
+                    </a:solidFill>
+                  </a:tcPr>
+                </a:tc>
+                <a:tc>
+                  <a:txBody>
+                    <a:bodyPr/>
+                    <a:lstStyle/>
+                    <a:p>
+                      <a:pPr indent="0" marL="0">
+                        <a:buNone/>
+                      </a:pPr>
+                      <a:r>
+                        <a:rPr lang="en-US" sz="1300" dirty="0">
+                          <a:solidFill>
+                            <a:srgbClr val="1D1D1F"/>
+                          </a:solidFill>
+                          <a:latin typeface="Pretendard SemiBold" pitchFamily="34" charset="0"/>
+                          <a:ea typeface="Pretendard SemiBold" pitchFamily="34" charset="-122"/>
+                          <a:cs typeface="Pretendard SemiBold" pitchFamily="34" charset="-120"/>
+                        </a:rPr>
+                        <a:t>스폰</a:t>
+                      </a:r>
+                      <a:endParaRPr lang="en-US" sz="1300" dirty="0">
+                        <a:latin typeface="Pretendard SemiBold" charset="0"/>
+                        <a:ea typeface="Pretendard SemiBold" charset="0"/>
+                        <a:cs typeface="Pretendard SemiBold" charset="0"/>
+                      </a:endParaRPr>
+                    </a:p>
+                  </a:txBody>
+                  <a:tcPr marL="76200" marR="76200" marT="50800" marB="50800" anchor="ctr">
+                    <a:lnL w="0" cap="flat" cmpd="sng" algn="ctr">
+                      <a:noFill/>
+                    </a:lnL>
+                    <a:lnR w="0" cap="flat" cmpd="sng" algn="ctr">
+                      <a:noFill/>
+                    </a:lnR>
+                    <a:lnT w="0" cap="flat" cmpd="sng" algn="ctr">
+                      <a:noFill/>
+                    </a:lnT>
+                    <a:lnB w="9525" cap="flat" cmpd="sng" algn="ctr">
+                      <a:solidFill>
+                        <a:srgbClr val="E0E0E0"/>
+                      </a:solidFill>
+                      <a:prstDash val="solid"/>
+                      <a:round/>
+                      <a:headEnd type="none" w="med" len="med"/>
+                      <a:tailEnd type="none" w="med" len="med"/>
+                    </a:lnB>
+                    <a:solidFill>
+                      <a:srgbClr val="FFFFFF"/>
+                    </a:solidFill>
+                  </a:tcPr>
+                </a:tc>
+                <a:tc>
+                  <a:txBody>
+                    <a:bodyPr/>
+                    <a:lstStyle/>
+                    <a:p>
+                      <a:pPr indent="0" marL="0">
+                        <a:buNone/>
+                      </a:pPr>
+                      <a:r>
+                        <a:rPr lang="en-US" sz="1300" dirty="0">
+                          <a:solidFill>
+                            <a:srgbClr val="333333"/>
+                          </a:solidFill>
+                          <a:latin typeface="Pretendard" pitchFamily="34" charset="0"/>
+                          <a:ea typeface="Pretendard" pitchFamily="34" charset="-122"/>
+                          <a:cs typeface="Pretendard" pitchFamily="34" charset="-120"/>
+                        </a:rPr>
+                        <a:t>통로 안에서 태어난 물고기가 아래 구역 소속이 되어 첫 프레임에 통로 길이만큼 아래로 순간이동</a:t>
+                      </a:r>
+                      <a:endParaRPr lang="en-US" sz="1300" dirty="0">
+                        <a:latin typeface="Pretendard" charset="0"/>
+                        <a:ea typeface="Pretendard" charset="0"/>
+                        <a:cs typeface="Pretendard" charset="0"/>
+                      </a:endParaRPr>
+                    </a:p>
+                  </a:txBody>
+                  <a:tcPr marL="76200" marR="76200" marT="50800" marB="50800" anchor="ctr">
+                    <a:lnL w="0" cap="flat" cmpd="sng" algn="ctr">
+                      <a:noFill/>
+                    </a:lnL>
+                    <a:lnR w="0" cap="flat" cmpd="sng" algn="ctr">
+                      <a:noFill/>
+                    </a:lnR>
+                    <a:lnT w="0" cap="flat" cmpd="sng" algn="ctr">
+                      <a:noFill/>
+                    </a:lnT>
+                    <a:lnB w="9525" cap="flat" cmpd="sng" algn="ctr">
+                      <a:solidFill>
+                        <a:srgbClr val="E0E0E0"/>
+                      </a:solidFill>
+                      <a:prstDash val="solid"/>
+                      <a:round/>
+                      <a:headEnd type="none" w="med" len="med"/>
+                      <a:tailEnd type="none" w="med" len="med"/>
+                    </a:lnB>
+                    <a:solidFill>
+                      <a:srgbClr val="FFFFFF"/>
+                    </a:solidFill>
+                  </a:tcPr>
+                </a:tc>
+                <a:tc>
+                  <a:txBody>
+                    <a:bodyPr/>
+                    <a:lstStyle/>
+                    <a:p>
+                      <a:pPr indent="0" marL="0">
+                        <a:buNone/>
+                      </a:pPr>
+                      <a:r>
+                        <a:rPr lang="en-US" sz="1300" dirty="0">
+                          <a:solidFill>
+                            <a:srgbClr val="333333"/>
+                          </a:solidFill>
+                          <a:latin typeface="Pretendard" pitchFamily="34" charset="0"/>
+                          <a:ea typeface="Pretendard" pitchFamily="34" charset="-122"/>
+                          <a:cs typeface="Pretendard" pitchFamily="34" charset="-120"/>
+                        </a:rPr>
+                        <a:t>통로 안은 위 구역 소속으로</a:t>
+                      </a:r>
+                      <a:endParaRPr lang="en-US" sz="1300" dirty="0">
+                        <a:latin typeface="Pretendard" charset="0"/>
+                        <a:ea typeface="Pretendard" charset="0"/>
+                        <a:cs typeface="Pretendard" charset="0"/>
+                      </a:endParaRPr>
+                    </a:p>
+                  </a:txBody>
+                  <a:tcPr marL="76200" marR="76200" marT="50800" marB="50800" anchor="ctr">
+                    <a:lnL w="0" cap="flat" cmpd="sng" algn="ctr">
+                      <a:noFill/>
+                    </a:lnL>
+                    <a:lnR w="0" cap="flat" cmpd="sng" algn="ctr">
+                      <a:noFill/>
+                    </a:lnR>
+                    <a:lnT w="0" cap="flat" cmpd="sng" algn="ctr">
+                      <a:noFill/>
+                    </a:lnT>
+                    <a:lnB w="9525" cap="flat" cmpd="sng" algn="ctr">
+                      <a:solidFill>
+                        <a:srgbClr val="E0E0E0"/>
+                      </a:solidFill>
+                      <a:prstDash val="solid"/>
+                      <a:round/>
+                      <a:headEnd type="none" w="med" len="med"/>
+                      <a:tailEnd type="none" w="med" len="med"/>
+                    </a:lnB>
+                    <a:solidFill>
+                      <a:srgbClr val="FFFFFF"/>
+                    </a:solidFill>
+                  </a:tcPr>
+                </a:tc>
+                <a:tc>
+                  <a:txBody>
+                    <a:bodyPr/>
+                    <a:lstStyle/>
+                    <a:p>
+                      <a:pPr algn="ctr" indent="0" marL="0">
+                        <a:buNone/>
+                      </a:pPr>
+                      <a:r>
+                        <a:rPr lang="en-US" sz="1300" dirty="0">
+                          <a:solidFill>
+                            <a:srgbClr val="0066CC"/>
+                          </a:solidFill>
+                          <a:latin typeface="Pretendard Medium" pitchFamily="34" charset="0"/>
+                          <a:ea typeface="Pretendard Medium" pitchFamily="34" charset="-122"/>
+                          <a:cs typeface="Pretendard Medium" pitchFamily="34" charset="-120"/>
+                        </a:rPr>
+                        <a:t>✓ 수정</a:t>
+                      </a:r>
+                      <a:endParaRPr lang="en-US" sz="1300" dirty="0">
+                        <a:latin typeface="Pretendard Medium" charset="0"/>
+                        <a:ea typeface="Pretendard Medium" charset="0"/>
+                        <a:cs typeface="Pretendard Medium" charset="0"/>
+                      </a:endParaRPr>
+                    </a:p>
+                  </a:txBody>
+                  <a:tcPr marL="76200" marR="76200" marT="50800" marB="50800" anchor="ctr">
+                    <a:lnL w="0" cap="flat" cmpd="sng" algn="ctr">
+                      <a:noFill/>
+                    </a:lnL>
+                    <a:lnR w="0" cap="flat" cmpd="sng" algn="ctr">
+                      <a:noFill/>
+                    </a:lnR>
+                    <a:lnT w="0" cap="flat" cmpd="sng" algn="ctr">
+                      <a:noFill/>
+                    </a:lnT>
+                    <a:lnB w="9525" cap="flat" cmpd="sng" algn="ctr">
+                      <a:solidFill>
+                        <a:srgbClr val="E0E0E0"/>
+                      </a:solidFill>
+                      <a:prstDash val="solid"/>
+                      <a:round/>
+                      <a:headEnd type="none" w="med" len="med"/>
+                      <a:tailEnd type="none" w="med" len="med"/>
+                    </a:lnB>
+                    <a:solidFill>
+                      <a:srgbClr val="FFFFFF"/>
+                    </a:solidFill>
+                  </a:tcPr>
+                </a:tc>
+              </a:tr>
+              <a:tr h="638556">
+                <a:tc>
+                  <a:txBody>
+                    <a:bodyPr/>
+                    <a:lstStyle/>
+                    <a:p>
+                      <a:pPr indent="0" marL="0">
+                        <a:buNone/>
+                      </a:pPr>
+                      <a:r>
+                        <a:rPr lang="en-US" sz="1300" dirty="0">
+                          <a:solidFill>
+                            <a:srgbClr val="7A7A7A"/>
+                          </a:solidFill>
+                          <a:latin typeface="Pretendard" pitchFamily="34" charset="0"/>
+                          <a:ea typeface="Pretendard" pitchFamily="34" charset="-122"/>
+                          <a:cs typeface="Pretendard" pitchFamily="34" charset="-120"/>
+                        </a:rPr>
+                        <a:t>낮음</a:t>
+                      </a:r>
+                      <a:endParaRPr lang="en-US" sz="1300" dirty="0">
+                        <a:latin typeface="Pretendard" charset="0"/>
+                        <a:ea typeface="Pretendard" charset="0"/>
+                        <a:cs typeface="Pretendard" charset="0"/>
+                      </a:endParaRPr>
+                    </a:p>
+                  </a:txBody>
+                  <a:tcPr marL="76200" marR="76200" marT="50800" marB="50800" anchor="ctr">
+                    <a:lnL w="0" cap="flat" cmpd="sng" algn="ctr">
+                      <a:noFill/>
+                    </a:lnL>
+                    <a:lnR w="0" cap="flat" cmpd="sng" algn="ctr">
+                      <a:noFill/>
+                    </a:lnR>
+                    <a:lnT w="0" cap="flat" cmpd="sng" algn="ctr">
+                      <a:noFill/>
+                    </a:lnT>
+                    <a:lnB w="9525" cap="flat" cmpd="sng" algn="ctr">
+                      <a:solidFill>
+                        <a:srgbClr val="E0E0E0"/>
+                      </a:solidFill>
+                      <a:prstDash val="solid"/>
+                      <a:round/>
+                      <a:headEnd type="none" w="med" len="med"/>
+                      <a:tailEnd type="none" w="med" len="med"/>
+                    </a:lnB>
+                    <a:solidFill>
+                      <a:srgbClr val="FFFFFF"/>
+                    </a:solidFill>
+                  </a:tcPr>
+                </a:tc>
+                <a:tc>
+                  <a:txBody>
+                    <a:bodyPr/>
+                    <a:lstStyle/>
+                    <a:p>
+                      <a:pPr indent="0" marL="0">
+                        <a:buNone/>
+                      </a:pPr>
+                      <a:r>
+                        <a:rPr lang="en-US" sz="1300" dirty="0">
+                          <a:solidFill>
+                            <a:srgbClr val="1D1D1F"/>
+                          </a:solidFill>
+                          <a:latin typeface="Pretendard SemiBold" pitchFamily="34" charset="0"/>
+                          <a:ea typeface="Pretendard SemiBold" pitchFamily="34" charset="-122"/>
+                          <a:cs typeface="Pretendard SemiBold" pitchFamily="34" charset="-120"/>
+                        </a:rPr>
+                        <a:t>HUD</a:t>
+                      </a:r>
+                      <a:endParaRPr lang="en-US" sz="1300" dirty="0">
+                        <a:latin typeface="Pretendard SemiBold" charset="0"/>
+                        <a:ea typeface="Pretendard SemiBold" charset="0"/>
+                        <a:cs typeface="Pretendard SemiBold" charset="0"/>
+                      </a:endParaRPr>
+                    </a:p>
+                  </a:txBody>
+                  <a:tcPr marL="76200" marR="76200" marT="50800" marB="50800" anchor="ctr">
+                    <a:lnL w="0" cap="flat" cmpd="sng" algn="ctr">
+                      <a:noFill/>
+                    </a:lnL>
+                    <a:lnR w="0" cap="flat" cmpd="sng" algn="ctr">
+                      <a:noFill/>
+                    </a:lnR>
+                    <a:lnT w="0" cap="flat" cmpd="sng" algn="ctr">
+                      <a:noFill/>
+                    </a:lnT>
+                    <a:lnB w="9525" cap="flat" cmpd="sng" algn="ctr">
+                      <a:solidFill>
+                        <a:srgbClr val="E0E0E0"/>
+                      </a:solidFill>
+                      <a:prstDash val="solid"/>
+                      <a:round/>
+                      <a:headEnd type="none" w="med" len="med"/>
+                      <a:tailEnd type="none" w="med" len="med"/>
+                    </a:lnB>
+                    <a:solidFill>
+                      <a:srgbClr val="FFFFFF"/>
+                    </a:solidFill>
+                  </a:tcPr>
+                </a:tc>
+                <a:tc>
+                  <a:txBody>
+                    <a:bodyPr/>
+                    <a:lstStyle/>
+                    <a:p>
+                      <a:pPr indent="0" marL="0">
+                        <a:buNone/>
+                      </a:pPr>
+                      <a:r>
+                        <a:rPr lang="en-US" sz="1300" dirty="0">
+                          <a:solidFill>
+                            <a:srgbClr val="333333"/>
+                          </a:solidFill>
+                          <a:latin typeface="Pretendard" pitchFamily="34" charset="0"/>
+                          <a:ea typeface="Pretendard" pitchFamily="34" charset="-122"/>
+                          <a:cs typeface="Pretendard" pitchFamily="34" charset="-120"/>
+                        </a:rPr>
+                        <a:t>시간 임박 중 일시정지하면 심박음 · 붉은 테두리가 계속됨</a:t>
+                      </a:r>
+                      <a:endParaRPr lang="en-US" sz="1300" dirty="0">
+                        <a:latin typeface="Pretendard" charset="0"/>
+                        <a:ea typeface="Pretendard" charset="0"/>
+                        <a:cs typeface="Pretendard" charset="0"/>
+                      </a:endParaRPr>
+                    </a:p>
+                  </a:txBody>
+                  <a:tcPr marL="76200" marR="76200" marT="50800" marB="50800" anchor="ctr">
+                    <a:lnL w="0" cap="flat" cmpd="sng" algn="ctr">
+                      <a:noFill/>
+                    </a:lnL>
+                    <a:lnR w="0" cap="flat" cmpd="sng" algn="ctr">
+                      <a:noFill/>
+                    </a:lnR>
+                    <a:lnT w="0" cap="flat" cmpd="sng" algn="ctr">
+                      <a:noFill/>
+                    </a:lnT>
+                    <a:lnB w="9525" cap="flat" cmpd="sng" algn="ctr">
+                      <a:solidFill>
+                        <a:srgbClr val="E0E0E0"/>
+                      </a:solidFill>
+                      <a:prstDash val="solid"/>
+                      <a:round/>
+                      <a:headEnd type="none" w="med" len="med"/>
+                      <a:tailEnd type="none" w="med" len="med"/>
+                    </a:lnB>
+                    <a:solidFill>
+                      <a:srgbClr val="FFFFFF"/>
+                    </a:solidFill>
+                  </a:tcPr>
+                </a:tc>
+                <a:tc>
+                  <a:txBody>
+                    <a:bodyPr/>
+                    <a:lstStyle/>
+                    <a:p>
+                      <a:pPr indent="0" marL="0">
+                        <a:buNone/>
+                      </a:pPr>
+                      <a:r>
+                        <a:rPr lang="en-US" sz="1300" dirty="0">
+                          <a:solidFill>
+                            <a:srgbClr val="333333"/>
+                          </a:solidFill>
+                          <a:latin typeface="Pretendard" pitchFamily="34" charset="0"/>
+                          <a:ea typeface="Pretendard" pitchFamily="34" charset="-122"/>
+                          <a:cs typeface="Pretendard" pitchFamily="34" charset="-120"/>
+                        </a:rPr>
+                        <a:t>일시정지 중엔 끔</a:t>
+                      </a:r>
+                      <a:endParaRPr lang="en-US" sz="1300" dirty="0">
+                        <a:latin typeface="Pretendard" charset="0"/>
+                        <a:ea typeface="Pretendard" charset="0"/>
+                        <a:cs typeface="Pretendard" charset="0"/>
+                      </a:endParaRPr>
+                    </a:p>
+                  </a:txBody>
+                  <a:tcPr marL="76200" marR="76200" marT="50800" marB="50800" anchor="ctr">
+                    <a:lnL w="0" cap="flat" cmpd="sng" algn="ctr">
+                      <a:noFill/>
+                    </a:lnL>
+                    <a:lnR w="0" cap="flat" cmpd="sng" algn="ctr">
+                      <a:noFill/>
+                    </a:lnR>
+                    <a:lnT w="0" cap="flat" cmpd="sng" algn="ctr">
+                      <a:noFill/>
+                    </a:lnT>
+                    <a:lnB w="9525" cap="flat" cmpd="sng" algn="ctr">
+                      <a:solidFill>
+                        <a:srgbClr val="E0E0E0"/>
+                      </a:solidFill>
+                      <a:prstDash val="solid"/>
+                      <a:round/>
+                      <a:headEnd type="none" w="med" len="med"/>
+                      <a:tailEnd type="none" w="med" len="med"/>
+                    </a:lnB>
+                    <a:solidFill>
+                      <a:srgbClr val="FFFFFF"/>
+                    </a:solidFill>
+                  </a:tcPr>
+                </a:tc>
+                <a:tc>
+                  <a:txBody>
+                    <a:bodyPr/>
+                    <a:lstStyle/>
+                    <a:p>
+                      <a:pPr algn="ctr" indent="0" marL="0">
+                        <a:buNone/>
+                      </a:pPr>
+                      <a:r>
+                        <a:rPr lang="en-US" sz="1300" dirty="0">
+                          <a:solidFill>
+                            <a:srgbClr val="0066CC"/>
+                          </a:solidFill>
+                          <a:latin typeface="Pretendard Medium" pitchFamily="34" charset="0"/>
+                          <a:ea typeface="Pretendard Medium" pitchFamily="34" charset="-122"/>
+                          <a:cs typeface="Pretendard Medium" pitchFamily="34" charset="-120"/>
+                        </a:rPr>
+                        <a:t>✓ 수정</a:t>
+                      </a:r>
+                      <a:endParaRPr lang="en-US" sz="1300" dirty="0">
+                        <a:latin typeface="Pretendard Medium" charset="0"/>
+                        <a:ea typeface="Pretendard Medium" charset="0"/>
+                        <a:cs typeface="Pretendard Medium" charset="0"/>
+                      </a:endParaRPr>
+                    </a:p>
+                  </a:txBody>
+                  <a:tcPr marL="76200" marR="76200" marT="50800" marB="50800" anchor="ctr">
+                    <a:lnL w="0" cap="flat" cmpd="sng" algn="ctr">
+                      <a:noFill/>
+                    </a:lnL>
+                    <a:lnR w="0" cap="flat" cmpd="sng" algn="ctr">
+                      <a:noFill/>
+                    </a:lnR>
+                    <a:lnT w="0" cap="flat" cmpd="sng" algn="ctr">
+                      <a:noFill/>
+                    </a:lnT>
+                    <a:lnB w="9525" cap="flat" cmpd="sng" algn="ctr">
+                      <a:solidFill>
+                        <a:srgbClr val="E0E0E0"/>
+                      </a:solidFill>
+                      <a:prstDash val="solid"/>
+                      <a:round/>
+                      <a:headEnd type="none" w="med" len="med"/>
+                      <a:tailEnd type="none" w="med" len="med"/>
+                    </a:lnB>
+                    <a:solidFill>
+                      <a:srgbClr val="FFFFFF"/>
+                    </a:solidFill>
+                  </a:tcPr>
+                </a:tc>
+              </a:tr>
+              <a:tr h="410718">
+                <a:tc>
+                  <a:txBody>
+                    <a:bodyPr/>
+                    <a:lstStyle/>
+                    <a:p>
+                      <a:pPr indent="0" marL="0">
+                        <a:buNone/>
+                      </a:pPr>
+                      <a:r>
+                        <a:rPr lang="en-US" sz="1300" dirty="0">
+                          <a:solidFill>
+                            <a:srgbClr val="7A7A7A"/>
+                          </a:solidFill>
+                          <a:latin typeface="Pretendard" pitchFamily="34" charset="0"/>
+                          <a:ea typeface="Pretendard" pitchFamily="34" charset="-122"/>
+                          <a:cs typeface="Pretendard" pitchFamily="34" charset="-120"/>
+                        </a:rPr>
+                        <a:t>낮음</a:t>
+                      </a:r>
+                      <a:endParaRPr lang="en-US" sz="1300" dirty="0">
+                        <a:latin typeface="Pretendard" charset="0"/>
+                        <a:ea typeface="Pretendard" charset="0"/>
+                        <a:cs typeface="Pretendard" charset="0"/>
+                      </a:endParaRPr>
+                    </a:p>
+                  </a:txBody>
+                  <a:tcPr marL="76200" marR="76200" marT="50800" marB="50800" anchor="ctr">
+                    <a:lnL w="0" cap="flat" cmpd="sng" algn="ctr">
+                      <a:noFill/>
+                    </a:lnL>
+                    <a:lnR w="0" cap="flat" cmpd="sng" algn="ctr">
+                      <a:noFill/>
+                    </a:lnR>
+                    <a:lnT w="0" cap="flat" cmpd="sng" algn="ctr">
+                      <a:noFill/>
+                    </a:lnT>
+                    <a:lnB w="9525" cap="flat" cmpd="sng" algn="ctr">
+                      <a:solidFill>
+                        <a:srgbClr val="E0E0E0"/>
+                      </a:solidFill>
+                      <a:prstDash val="solid"/>
+                      <a:round/>
+                      <a:headEnd type="none" w="med" len="med"/>
+                      <a:tailEnd type="none" w="med" len="med"/>
+                    </a:lnB>
+                    <a:solidFill>
+                      <a:srgbClr val="FFFFFF"/>
+                    </a:solidFill>
+                  </a:tcPr>
+                </a:tc>
+                <a:tc>
+                  <a:txBody>
+                    <a:bodyPr/>
+                    <a:lstStyle/>
+                    <a:p>
+                      <a:pPr indent="0" marL="0">
+                        <a:buNone/>
+                      </a:pPr>
+                      <a:r>
+                        <a:rPr lang="en-US" sz="1300" dirty="0">
+                          <a:solidFill>
+                            <a:srgbClr val="1D1D1F"/>
+                          </a:solidFill>
+                          <a:latin typeface="Pretendard SemiBold" pitchFamily="34" charset="0"/>
+                          <a:ea typeface="Pretendard SemiBold" pitchFamily="34" charset="-122"/>
+                          <a:cs typeface="Pretendard SemiBold" pitchFamily="34" charset="-120"/>
+                        </a:rPr>
+                        <a:t>개발자 모드</a:t>
+                      </a:r>
+                      <a:endParaRPr lang="en-US" sz="1300" dirty="0">
+                        <a:latin typeface="Pretendard SemiBold" charset="0"/>
+                        <a:ea typeface="Pretendard SemiBold" charset="0"/>
+                        <a:cs typeface="Pretendard SemiBold" charset="0"/>
+                      </a:endParaRPr>
+                    </a:p>
+                  </a:txBody>
+                  <a:tcPr marL="76200" marR="76200" marT="50800" marB="50800" anchor="ctr">
+                    <a:lnL w="0" cap="flat" cmpd="sng" algn="ctr">
+                      <a:noFill/>
+                    </a:lnL>
+                    <a:lnR w="0" cap="flat" cmpd="sng" algn="ctr">
+                      <a:noFill/>
+                    </a:lnR>
+                    <a:lnT w="0" cap="flat" cmpd="sng" algn="ctr">
+                      <a:noFill/>
+                    </a:lnT>
+                    <a:lnB w="9525" cap="flat" cmpd="sng" algn="ctr">
+                      <a:solidFill>
+                        <a:srgbClr val="E0E0E0"/>
+                      </a:solidFill>
+                      <a:prstDash val="solid"/>
+                      <a:round/>
+                      <a:headEnd type="none" w="med" len="med"/>
+                      <a:tailEnd type="none" w="med" len="med"/>
+                    </a:lnB>
+                    <a:solidFill>
+                      <a:srgbClr val="FFFFFF"/>
+                    </a:solidFill>
+                  </a:tcPr>
+                </a:tc>
+                <a:tc>
+                  <a:txBody>
+                    <a:bodyPr/>
+                    <a:lstStyle/>
+                    <a:p>
+                      <a:pPr indent="0" marL="0">
+                        <a:buNone/>
+                      </a:pPr>
+                      <a:r>
+                        <a:rPr lang="en-US" sz="1300" dirty="0">
+                          <a:solidFill>
+                            <a:srgbClr val="333333"/>
+                          </a:solidFill>
+                          <a:latin typeface="Pretendard" pitchFamily="34" charset="0"/>
+                          <a:ea typeface="Pretendard" pitchFamily="34" charset="-122"/>
+                          <a:cs typeface="Pretendard" pitchFamily="34" charset="-120"/>
+                        </a:rPr>
+                        <a:t>'칸 0개도달 1구역'처럼 글자가 붙어 나옴</a:t>
+                      </a:r>
+                      <a:endParaRPr lang="en-US" sz="1300" dirty="0">
+                        <a:latin typeface="Pretendard" charset="0"/>
+                        <a:ea typeface="Pretendard" charset="0"/>
+                        <a:cs typeface="Pretendard" charset="0"/>
+                      </a:endParaRPr>
+                    </a:p>
+                  </a:txBody>
+                  <a:tcPr marL="76200" marR="76200" marT="50800" marB="50800" anchor="ctr">
+                    <a:lnL w="0" cap="flat" cmpd="sng" algn="ctr">
+                      <a:noFill/>
+                    </a:lnL>
+                    <a:lnR w="0" cap="flat" cmpd="sng" algn="ctr">
+                      <a:noFill/>
+                    </a:lnR>
+                    <a:lnT w="0" cap="flat" cmpd="sng" algn="ctr">
+                      <a:noFill/>
+                    </a:lnT>
+                    <a:lnB w="9525" cap="flat" cmpd="sng" algn="ctr">
+                      <a:solidFill>
+                        <a:srgbClr val="E0E0E0"/>
+                      </a:solidFill>
+                      <a:prstDash val="solid"/>
+                      <a:round/>
+                      <a:headEnd type="none" w="med" len="med"/>
+                      <a:tailEnd type="none" w="med" len="med"/>
+                    </a:lnB>
+                    <a:solidFill>
+                      <a:srgbClr val="FFFFFF"/>
+                    </a:solidFill>
+                  </a:tcPr>
+                </a:tc>
+                <a:tc>
+                  <a:txBody>
+                    <a:bodyPr/>
+                    <a:lstStyle/>
+                    <a:p>
+                      <a:pPr indent="0" marL="0">
+                        <a:buNone/>
+                      </a:pPr>
+                      <a:r>
+                        <a:rPr lang="en-US" sz="1300" dirty="0">
+                          <a:solidFill>
+                            <a:srgbClr val="333333"/>
+                          </a:solidFill>
+                          <a:latin typeface="Pretendard" pitchFamily="34" charset="0"/>
+                          <a:ea typeface="Pretendard" pitchFamily="34" charset="-122"/>
+                          <a:cs typeface="Pretendard" pitchFamily="34" charset="-120"/>
+                        </a:rPr>
+                        <a:t>간격 추가</a:t>
+                      </a:r>
+                      <a:endParaRPr lang="en-US" sz="1300" dirty="0">
+                        <a:latin typeface="Pretendard" charset="0"/>
+                        <a:ea typeface="Pretendard" charset="0"/>
+                        <a:cs typeface="Pretendard" charset="0"/>
+                      </a:endParaRPr>
+                    </a:p>
+                  </a:txBody>
+                  <a:tcPr marL="76200" marR="76200" marT="50800" marB="50800" anchor="ctr">
+                    <a:lnL w="0" cap="flat" cmpd="sng" algn="ctr">
+                      <a:noFill/>
+                    </a:lnL>
+                    <a:lnR w="0" cap="flat" cmpd="sng" algn="ctr">
+                      <a:noFill/>
+                    </a:lnR>
+                    <a:lnT w="0" cap="flat" cmpd="sng" algn="ctr">
+                      <a:noFill/>
+                    </a:lnT>
+                    <a:lnB w="9525" cap="flat" cmpd="sng" algn="ctr">
+                      <a:solidFill>
+                        <a:srgbClr val="E0E0E0"/>
+                      </a:solidFill>
+                      <a:prstDash val="solid"/>
+                      <a:round/>
+                      <a:headEnd type="none" w="med" len="med"/>
+                      <a:tailEnd type="none" w="med" len="med"/>
+                    </a:lnB>
+                    <a:solidFill>
+                      <a:srgbClr val="FFFFFF"/>
+                    </a:solidFill>
+                  </a:tcPr>
+                </a:tc>
+                <a:tc>
+                  <a:txBody>
+                    <a:bodyPr/>
+                    <a:lstStyle/>
+                    <a:p>
+                      <a:pPr algn="ctr" indent="0" marL="0">
+                        <a:buNone/>
+                      </a:pPr>
+                      <a:r>
+                        <a:rPr lang="en-US" sz="1300" dirty="0">
+                          <a:solidFill>
+                            <a:srgbClr val="0066CC"/>
+                          </a:solidFill>
+                          <a:latin typeface="Pretendard Medium" pitchFamily="34" charset="0"/>
+                          <a:ea typeface="Pretendard Medium" pitchFamily="34" charset="-122"/>
+                          <a:cs typeface="Pretendard Medium" pitchFamily="34" charset="-120"/>
+                        </a:rPr>
+                        <a:t>✓ 수정</a:t>
+                      </a:r>
+                      <a:endParaRPr lang="en-US" sz="1300" dirty="0">
+                        <a:latin typeface="Pretendard Medium" charset="0"/>
+                        <a:ea typeface="Pretendard Medium" charset="0"/>
+                        <a:cs typeface="Pretendard Medium" charset="0"/>
+                      </a:endParaRPr>
+                    </a:p>
+                  </a:txBody>
+                  <a:tcPr marL="76200" marR="76200" marT="50800" marB="50800" anchor="ctr">
+                    <a:lnL w="0" cap="flat" cmpd="sng" algn="ctr">
+                      <a:noFill/>
+                    </a:lnL>
+                    <a:lnR w="0" cap="flat" cmpd="sng" algn="ctr">
+                      <a:noFill/>
+                    </a:lnR>
+                    <a:lnT w="0" cap="flat" cmpd="sng" algn="ctr">
+                      <a:noFill/>
+                    </a:lnT>
+                    <a:lnB w="9525" cap="flat" cmpd="sng" algn="ctr">
+                      <a:solidFill>
+                        <a:srgbClr val="E0E0E0"/>
+                      </a:solidFill>
+                      <a:prstDash val="solid"/>
+                      <a:round/>
+                      <a:headEnd type="none" w="med" len="med"/>
+                      <a:tailEnd type="none" w="med" len="med"/>
+                    </a:lnB>
+                    <a:solidFill>
+                      <a:srgbClr val="FFFFFF"/>
+                    </a:solidFill>
+                  </a:tcPr>
+                </a:tc>
+              </a:tr>
+              <a:tr h="638556">
+                <a:tc>
+                  <a:txBody>
+                    <a:bodyPr/>
+                    <a:lstStyle/>
+                    <a:p>
+                      <a:pPr indent="0" marL="0">
+                        <a:buNone/>
+                      </a:pPr>
+                      <a:r>
+                        <a:rPr lang="en-US" sz="1300" dirty="0">
+                          <a:solidFill>
+                            <a:srgbClr val="1D1D1F"/>
+                          </a:solidFill>
+                          <a:latin typeface="Pretendard Medium" pitchFamily="34" charset="0"/>
+                          <a:ea typeface="Pretendard Medium" pitchFamily="34" charset="-122"/>
+                          <a:cs typeface="Pretendard Medium" pitchFamily="34" charset="-120"/>
+                        </a:rPr>
+                        <a:t>중간</a:t>
+                      </a:r>
+                      <a:endParaRPr lang="en-US" sz="1300" dirty="0">
+                        <a:latin typeface="Pretendard Medium" charset="0"/>
+                        <a:ea typeface="Pretendard Medium" charset="0"/>
+                        <a:cs typeface="Pretendard Medium" charset="0"/>
+                      </a:endParaRPr>
+                    </a:p>
+                  </a:txBody>
+                  <a:tcPr marL="76200" marR="76200" marT="50800" marB="50800" anchor="ctr">
+                    <a:lnL w="0" cap="flat" cmpd="sng" algn="ctr">
+                      <a:noFill/>
+                    </a:lnL>
+                    <a:lnR w="0" cap="flat" cmpd="sng" algn="ctr">
+                      <a:noFill/>
+                    </a:lnR>
+                    <a:lnT w="0" cap="flat" cmpd="sng" algn="ctr">
+                      <a:noFill/>
+                    </a:lnT>
+                    <a:lnB w="9525" cap="flat" cmpd="sng" algn="ctr">
+                      <a:solidFill>
+                        <a:srgbClr val="E0E0E0"/>
+                      </a:solidFill>
+                      <a:prstDash val="solid"/>
+                      <a:round/>
+                      <a:headEnd type="none" w="med" len="med"/>
+                      <a:tailEnd type="none" w="med" len="med"/>
+                    </a:lnB>
+                    <a:solidFill>
+                      <a:srgbClr val="FFFFFF"/>
+                    </a:solidFill>
+                  </a:tcPr>
+                </a:tc>
+                <a:tc>
+                  <a:txBody>
+                    <a:bodyPr/>
+                    <a:lstStyle/>
+                    <a:p>
+                      <a:pPr indent="0" marL="0">
+                        <a:buNone/>
+                      </a:pPr>
+                      <a:r>
+                        <a:rPr lang="en-US" sz="1300" dirty="0">
+                          <a:solidFill>
+                            <a:srgbClr val="1D1D1F"/>
+                          </a:solidFill>
+                          <a:latin typeface="Pretendard SemiBold" pitchFamily="34" charset="0"/>
+                          <a:ea typeface="Pretendard SemiBold" pitchFamily="34" charset="-122"/>
+                          <a:cs typeface="Pretendard SemiBold" pitchFamily="34" charset="-120"/>
+                        </a:rPr>
+                        <a:t>미사일</a:t>
+                      </a:r>
+                      <a:endParaRPr lang="en-US" sz="1300" dirty="0">
+                        <a:latin typeface="Pretendard SemiBold" charset="0"/>
+                        <a:ea typeface="Pretendard SemiBold" charset="0"/>
+                        <a:cs typeface="Pretendard SemiBold" charset="0"/>
+                      </a:endParaRPr>
+                    </a:p>
+                  </a:txBody>
+                  <a:tcPr marL="76200" marR="76200" marT="50800" marB="50800" anchor="ctr">
+                    <a:lnL w="0" cap="flat" cmpd="sng" algn="ctr">
+                      <a:noFill/>
+                    </a:lnL>
+                    <a:lnR w="0" cap="flat" cmpd="sng" algn="ctr">
+                      <a:noFill/>
+                    </a:lnR>
+                    <a:lnT w="0" cap="flat" cmpd="sng" algn="ctr">
+                      <a:noFill/>
+                    </a:lnT>
+                    <a:lnB w="9525" cap="flat" cmpd="sng" algn="ctr">
+                      <a:solidFill>
+                        <a:srgbClr val="E0E0E0"/>
+                      </a:solidFill>
+                      <a:prstDash val="solid"/>
+                      <a:round/>
+                      <a:headEnd type="none" w="med" len="med"/>
+                      <a:tailEnd type="none" w="med" len="med"/>
+                    </a:lnB>
+                    <a:solidFill>
+                      <a:srgbClr val="FFFFFF"/>
+                    </a:solidFill>
+                  </a:tcPr>
+                </a:tc>
+                <a:tc>
+                  <a:txBody>
+                    <a:bodyPr/>
+                    <a:lstStyle/>
+                    <a:p>
+                      <a:pPr indent="0" marL="0">
+                        <a:buNone/>
+                      </a:pPr>
+                      <a:r>
+                        <a:rPr lang="en-US" sz="1300" dirty="0">
+                          <a:solidFill>
+                            <a:srgbClr val="333333"/>
+                          </a:solidFill>
+                          <a:latin typeface="Pretendard" pitchFamily="34" charset="0"/>
+                          <a:ea typeface="Pretendard" pitchFamily="34" charset="-122"/>
+                          <a:cs typeface="Pretendard" pitchFamily="34" charset="-120"/>
+                        </a:rPr>
+                        <a:t>미사일이 장애물 · 닫힌 통로 · 벽을 뚫고 날아가 건너편 물고기를 먹음</a:t>
+                      </a:r>
+                      <a:endParaRPr lang="en-US" sz="1300" dirty="0">
+                        <a:latin typeface="Pretendard" charset="0"/>
+                        <a:ea typeface="Pretendard" charset="0"/>
+                        <a:cs typeface="Pretendard" charset="0"/>
+                      </a:endParaRPr>
+                    </a:p>
+                  </a:txBody>
+                  <a:tcPr marL="76200" marR="76200" marT="50800" marB="50800" anchor="ctr">
+                    <a:lnL w="0" cap="flat" cmpd="sng" algn="ctr">
+                      <a:noFill/>
+                    </a:lnL>
+                    <a:lnR w="0" cap="flat" cmpd="sng" algn="ctr">
+                      <a:noFill/>
+                    </a:lnR>
+                    <a:lnT w="0" cap="flat" cmpd="sng" algn="ctr">
+                      <a:noFill/>
+                    </a:lnT>
+                    <a:lnB w="9525" cap="flat" cmpd="sng" algn="ctr">
+                      <a:solidFill>
+                        <a:srgbClr val="E0E0E0"/>
+                      </a:solidFill>
+                      <a:prstDash val="solid"/>
+                      <a:round/>
+                      <a:headEnd type="none" w="med" len="med"/>
+                      <a:tailEnd type="none" w="med" len="med"/>
+                    </a:lnB>
+                    <a:solidFill>
+                      <a:srgbClr val="FFFFFF"/>
+                    </a:solidFill>
+                  </a:tcPr>
+                </a:tc>
+                <a:tc>
+                  <a:txBody>
+                    <a:bodyPr/>
+                    <a:lstStyle/>
+                    <a:p>
+                      <a:pPr indent="0" marL="0">
+                        <a:buNone/>
+                      </a:pPr>
+                      <a:r>
+                        <a:rPr lang="en-US" sz="1300" dirty="0">
+                          <a:solidFill>
+                            <a:srgbClr val="333333"/>
+                          </a:solidFill>
+                          <a:latin typeface="Pretendard" pitchFamily="34" charset="0"/>
+                          <a:ea typeface="Pretendard" pitchFamily="34" charset="-122"/>
+                          <a:cs typeface="Pretendard" pitchFamily="34" charset="-120"/>
+                        </a:rPr>
+                        <a:t>매 프레임 이동 경로를 쓸어 벽에 닿으면 소멸 + 판정 원 안이라도 사이에 벽이 있으면 못 맞힘</a:t>
+                      </a:r>
+                      <a:endParaRPr lang="en-US" sz="1300" dirty="0">
+                        <a:latin typeface="Pretendard" charset="0"/>
+                        <a:ea typeface="Pretendard" charset="0"/>
+                        <a:cs typeface="Pretendard" charset="0"/>
+                      </a:endParaRPr>
+                    </a:p>
+                  </a:txBody>
+                  <a:tcPr marL="76200" marR="76200" marT="50800" marB="50800" anchor="ctr">
+                    <a:lnL w="0" cap="flat" cmpd="sng" algn="ctr">
+                      <a:noFill/>
+                    </a:lnL>
+                    <a:lnR w="0" cap="flat" cmpd="sng" algn="ctr">
+                      <a:noFill/>
+                    </a:lnR>
+                    <a:lnT w="0" cap="flat" cmpd="sng" algn="ctr">
+                      <a:noFill/>
+                    </a:lnT>
+                    <a:lnB w="9525" cap="flat" cmpd="sng" algn="ctr">
+                      <a:solidFill>
+                        <a:srgbClr val="E0E0E0"/>
+                      </a:solidFill>
+                      <a:prstDash val="solid"/>
+                      <a:round/>
+                      <a:headEnd type="none" w="med" len="med"/>
+                      <a:tailEnd type="none" w="med" len="med"/>
+                    </a:lnB>
+                    <a:solidFill>
+                      <a:srgbClr val="FFFFFF"/>
+                    </a:solidFill>
+                  </a:tcPr>
+                </a:tc>
+                <a:tc>
+                  <a:txBody>
+                    <a:bodyPr/>
+                    <a:lstStyle/>
+                    <a:p>
+                      <a:pPr algn="ctr" indent="0" marL="0">
+                        <a:buNone/>
+                      </a:pPr>
+                      <a:r>
+                        <a:rPr lang="en-US" sz="1300" dirty="0">
+                          <a:solidFill>
+                            <a:srgbClr val="0066CC"/>
+                          </a:solidFill>
+                          <a:latin typeface="Pretendard Medium" pitchFamily="34" charset="0"/>
+                          <a:ea typeface="Pretendard Medium" pitchFamily="34" charset="-122"/>
+                          <a:cs typeface="Pretendard Medium" pitchFamily="34" charset="-120"/>
+                        </a:rPr>
+                        <a:t>✓ 수정</a:t>
+                      </a:r>
+                      <a:endParaRPr lang="en-US" sz="1300" dirty="0">
+                        <a:latin typeface="Pretendard Medium" charset="0"/>
+                        <a:ea typeface="Pretendard Medium" charset="0"/>
+                        <a:cs typeface="Pretendard Medium" charset="0"/>
+                      </a:endParaRPr>
+                    </a:p>
+                  </a:txBody>
+                  <a:tcPr marL="76200" marR="76200" marT="50800" marB="50800" anchor="ctr">
+                    <a:lnL w="0" cap="flat" cmpd="sng" algn="ctr">
+                      <a:noFill/>
+                    </a:lnL>
+                    <a:lnR w="0" cap="flat" cmpd="sng" algn="ctr">
+                      <a:noFill/>
+                    </a:lnR>
+                    <a:lnT w="0" cap="flat" cmpd="sng" algn="ctr">
+                      <a:noFill/>
+                    </a:lnT>
+                    <a:lnB w="9525" cap="flat" cmpd="sng" algn="ctr">
+                      <a:solidFill>
+                        <a:srgbClr val="E0E0E0"/>
+                      </a:solidFill>
+                      <a:prstDash val="solid"/>
+                      <a:round/>
+                      <a:headEnd type="none" w="med" len="med"/>
+                      <a:tailEnd type="none" w="med" len="med"/>
+                    </a:lnB>
+                    <a:solidFill>
+                      <a:srgbClr val="FFFFFF"/>
+                    </a:solidFill>
+                  </a:tcPr>
+                </a:tc>
+              </a:tr>
+            </a:tbl>
+          </a:graphicData>
+        </a:graphic>
+      </p:graphicFrame>
+      <p:sp>
+        <p:nvSpPr>
+          <p:cNvPr id="6" name="Text 3"/>
+          <p:cNvSpPr txBox="1"/>
+          <p:nvPr/>
+        </p:nvSpPr>
+        <p:spPr>
+          <a:xfrm>
+            <a:off x="609905" y="6446520"/>
+            <a:ext cx="5486400" cy="274320"/>
+          </a:xfrm>
+          <a:prstGeom prst="rect">
+            <a:avLst/>
+          </a:prstGeom>
+          <a:noFill/>
+          <a:ln/>
+        </p:spPr>
+        <p:txBody>
+          <a:bodyPr wrap="square" lIns="0" tIns="0" rIns="0" bIns="0" rtlCol="0" anchor="ctr"/>
+          <a:lstStyle/>
+          <a:p>
+            <a:pPr indent="0" marL="0">
+              <a:buNone/>
+            </a:pPr>
+            <a:r>
+              <a:rPr lang="en-US" sz="1000" spc="200" kern="0" dirty="0">
+                <a:solidFill>
+                  <a:srgbClr val="7A7A7A"/>
+                </a:solidFill>
+                <a:latin typeface="Pretendard" pitchFamily="34" charset="0"/>
+                <a:ea typeface="Pretendard" pitchFamily="34" charset="-122"/>
+                <a:cs typeface="Pretendard" pitchFamily="34" charset="-120"/>
+              </a:rPr>
+              <a:t>QA REPORT  ·  FISH GAME</a:t>
+            </a:r>
+            <a:endParaRPr lang="en-US" sz="1000" dirty="0"/>
+          </a:p>
+        </p:txBody>
+      </p:sp>
+      <p:sp>
+        <p:nvSpPr>
+          <p:cNvPr id="7" name="Text 4"/>
+          <p:cNvSpPr txBox="1"/>
+          <p:nvPr/>
+        </p:nvSpPr>
+        <p:spPr>
+          <a:xfrm>
+            <a:off x="10515600" y="6446520"/>
+            <a:ext cx="1066190" cy="274320"/>
+          </a:xfrm>
+          <a:prstGeom prst="rect">
+            <a:avLst/>
+          </a:prstGeom>
+          <a:noFill/>
+          <a:ln/>
+        </p:spPr>
+        <p:txBody>
+          <a:bodyPr wrap="square" lIns="0" tIns="0" rIns="0" bIns="0" rtlCol="0" anchor="ctr"/>
+          <a:lstStyle/>
+          <a:p>
+            <a:pPr algn="r" indent="0" marL="0">
+              <a:buNone/>
+            </a:pPr>
+            <a:r>
+              <a:rPr lang="en-US" sz="1000" dirty="0">
+                <a:solidFill>
+                  <a:srgbClr val="7A7A7A"/>
+                </a:solidFill>
+                <a:latin typeface="Pretendard" pitchFamily="34" charset="0"/>
+                <a:ea typeface="Pretendard" pitchFamily="34" charset="-122"/>
+                <a:cs typeface="Pretendard" pitchFamily="34" charset="-120"/>
+              </a:rPr>
+              <a:t>23 / 25</a:t>
+            </a:r>
+            <a:endParaRPr lang="en-US" sz="1000" dirty="0"/>
+          </a:p>
+        </p:txBody>
+      </p:sp>
+    </p:spTree>
+  </p:cSld>
+  <p:clrMapOvr>
+    <a:masterClrMapping/>
+  </p:clrMapOvr>
+</p:sld>
+</file>
+
+<file path=ppt/slides/slide24.xml><?xml version="1.0" encoding="utf-8"?>
+<p:sld xmlns:a="http://schemas.openxmlformats.org/drawingml/2006/main" xmlns:r="http://schemas.openxmlformats.org/officeDocument/2006/relationships" xmlns:p="http://schemas.openxmlformats.org/presentationml/2006/main">
+  <p:cSld name="Slide 24">
     <p:bg>
       <p:bgPr>
         <a:solidFill>
@@ -19192,7 +25291,7 @@
       </p:sp>
       <p:graphicFrame>
         <p:nvGraphicFramePr>
-          <p:cNvPr id="21" name="Table 0"/>
+          <p:cNvPr id="25" name="Table 0"/>
           <p:cNvGraphicFramePr>
             <a:graphicFrameLocks noGrp="1"/>
           </p:cNvGraphicFramePr>
@@ -20345,7 +26444,7 @@
                           <a:ea typeface="Pretendard" pitchFamily="34" charset="-122"/>
                           <a:cs typeface="Pretendard" pitchFamily="34" charset="-120"/>
                         </a:rPr>
-                        <a:t>장애물·잠긴 통로에서 소멸</a:t>
+                        <a:t>R8 — 막히게 결정 · 수정 (사용자 요청)</a:t>
                       </a:r>
                       <a:endParaRPr lang="en-US" sz="1300" dirty="0">
                         <a:latin typeface="Pretendard" charset="0"/>
@@ -20395,7 +26494,7 @@
                           <a:ea typeface="Pretendard" pitchFamily="34" charset="-122"/>
                           <a:cs typeface="Pretendard" pitchFamily="34" charset="-120"/>
                         </a:rPr>
-                        <a:t>미정</a:t>
+                        <a:t>해결</a:t>
                       </a:r>
                       <a:endParaRPr lang="en-US" sz="1300" dirty="0">
                         <a:latin typeface="Pretendard" charset="0"/>
@@ -20950,6 +27049,258 @@
                           <a:cs typeface="Pretendard" pitchFamily="34" charset="-120"/>
                         </a:rPr>
                         <a:t>R4</a:t>
+                      </a:r>
+                      <a:endParaRPr lang="en-US" sz="1300" dirty="0">
+                        <a:latin typeface="Pretendard" charset="0"/>
+                        <a:ea typeface="Pretendard" charset="0"/>
+                        <a:cs typeface="Pretendard" charset="0"/>
+                      </a:endParaRPr>
+                    </a:p>
+                  </a:txBody>
+                  <a:tcPr marL="76200" marR="76200" marT="50800" marB="50800" anchor="ctr">
+                    <a:lnL w="0" cap="flat" cmpd="sng" algn="ctr">
+                      <a:noFill/>
+                    </a:lnL>
+                    <a:lnR w="0" cap="flat" cmpd="sng" algn="ctr">
+                      <a:noFill/>
+                    </a:lnR>
+                    <a:lnT w="0" cap="flat" cmpd="sng" algn="ctr">
+                      <a:noFill/>
+                    </a:lnT>
+                    <a:lnB w="9525" cap="flat" cmpd="sng" algn="ctr">
+                      <a:solidFill>
+                        <a:srgbClr val="E0E0E0"/>
+                      </a:solidFill>
+                      <a:prstDash val="solid"/>
+                      <a:round/>
+                      <a:headEnd type="none" w="med" len="med"/>
+                      <a:tailEnd type="none" w="med" len="med"/>
+                    </a:lnB>
+                    <a:solidFill>
+                      <a:srgbClr val="FFFFFF"/>
+                    </a:solidFill>
+                  </a:tcPr>
+                </a:tc>
+              </a:tr>
+              <a:tr h="638556">
+                <a:tc>
+                  <a:txBody>
+                    <a:bodyPr/>
+                    <a:lstStyle/>
+                    <a:p>
+                      <a:pPr indent="0" marL="0">
+                        <a:buNone/>
+                      </a:pPr>
+                      <a:r>
+                        <a:rPr lang="en-US" sz="1300" dirty="0">
+                          <a:solidFill>
+                            <a:srgbClr val="1D1D1F"/>
+                          </a:solidFill>
+                          <a:latin typeface="Pretendard SemiBold" pitchFamily="34" charset="0"/>
+                          <a:ea typeface="Pretendard SemiBold" pitchFamily="34" charset="-122"/>
+                          <a:cs typeface="Pretendard SemiBold" pitchFamily="34" charset="-120"/>
+                        </a:rPr>
+                        <a:t>스킬트리 UI</a:t>
+                      </a:r>
+                      <a:endParaRPr lang="en-US" sz="1300" dirty="0">
+                        <a:latin typeface="Pretendard SemiBold" charset="0"/>
+                        <a:ea typeface="Pretendard SemiBold" charset="0"/>
+                        <a:cs typeface="Pretendard SemiBold" charset="0"/>
+                      </a:endParaRPr>
+                    </a:p>
+                  </a:txBody>
+                  <a:tcPr marL="76200" marR="76200" marT="50800" marB="50800" anchor="ctr">
+                    <a:lnL w="0" cap="flat" cmpd="sng" algn="ctr">
+                      <a:noFill/>
+                    </a:lnL>
+                    <a:lnR w="0" cap="flat" cmpd="sng" algn="ctr">
+                      <a:noFill/>
+                    </a:lnR>
+                    <a:lnT w="0" cap="flat" cmpd="sng" algn="ctr">
+                      <a:noFill/>
+                    </a:lnT>
+                    <a:lnB w="9525" cap="flat" cmpd="sng" algn="ctr">
+                      <a:solidFill>
+                        <a:srgbClr val="E0E0E0"/>
+                      </a:solidFill>
+                      <a:prstDash val="solid"/>
+                      <a:round/>
+                      <a:headEnd type="none" w="med" len="med"/>
+                      <a:tailEnd type="none" w="med" len="med"/>
+                    </a:lnB>
+                    <a:solidFill>
+                      <a:srgbClr val="FFFFFF"/>
+                    </a:solidFill>
+                  </a:tcPr>
+                </a:tc>
+                <a:tc>
+                  <a:txBody>
+                    <a:bodyPr/>
+                    <a:lstStyle/>
+                    <a:p>
+                      <a:pPr indent="0" marL="0">
+                        <a:buNone/>
+                      </a:pPr>
+                      <a:r>
+                        <a:rPr lang="en-US" sz="1300" dirty="0">
+                          <a:solidFill>
+                            <a:srgbClr val="333333"/>
+                          </a:solidFill>
+                          <a:latin typeface="Pretendard" pitchFamily="34" charset="0"/>
+                          <a:ea typeface="Pretendard" pitchFamily="34" charset="-122"/>
+                          <a:cs typeface="Pretendard" pitchFamily="34" charset="-120"/>
+                        </a:rPr>
+                        <a:t>도형 범례 14개가 한 줄을 넘칠 수 있음 / 연출 때문에 매 프레임 UI 재빌드</a:t>
+                      </a:r>
+                      <a:endParaRPr lang="en-US" sz="1300" dirty="0">
+                        <a:latin typeface="Pretendard" charset="0"/>
+                        <a:ea typeface="Pretendard" charset="0"/>
+                        <a:cs typeface="Pretendard" charset="0"/>
+                      </a:endParaRPr>
+                    </a:p>
+                  </a:txBody>
+                  <a:tcPr marL="76200" marR="76200" marT="50800" marB="50800" anchor="ctr">
+                    <a:lnL w="0" cap="flat" cmpd="sng" algn="ctr">
+                      <a:noFill/>
+                    </a:lnL>
+                    <a:lnR w="0" cap="flat" cmpd="sng" algn="ctr">
+                      <a:noFill/>
+                    </a:lnR>
+                    <a:lnT w="0" cap="flat" cmpd="sng" algn="ctr">
+                      <a:noFill/>
+                    </a:lnT>
+                    <a:lnB w="9525" cap="flat" cmpd="sng" algn="ctr">
+                      <a:solidFill>
+                        <a:srgbClr val="E0E0E0"/>
+                      </a:solidFill>
+                      <a:prstDash val="solid"/>
+                      <a:round/>
+                      <a:headEnd type="none" w="med" len="med"/>
+                      <a:tailEnd type="none" w="med" len="med"/>
+                    </a:lnB>
+                    <a:solidFill>
+                      <a:srgbClr val="FFFFFF"/>
+                    </a:solidFill>
+                  </a:tcPr>
+                </a:tc>
+                <a:tc>
+                  <a:txBody>
+                    <a:bodyPr/>
+                    <a:lstStyle/>
+                    <a:p>
+                      <a:pPr indent="0" marL="0">
+                        <a:buNone/>
+                      </a:pPr>
+                      <a:r>
+                        <a:rPr lang="en-US" sz="1300" dirty="0">
+                          <a:solidFill>
+                            <a:srgbClr val="333333"/>
+                          </a:solidFill>
+                          <a:latin typeface="Pretendard" pitchFamily="34" charset="0"/>
+                          <a:ea typeface="Pretendard" pitchFamily="34" charset="-122"/>
+                          <a:cs typeface="Pretendard" pitchFamily="34" charset="-120"/>
+                        </a:rPr>
+                        <a:t>R6 — 범례가 남은 폭을 넘으면 한 줄 전체를 줄여 맞추도록 수정</a:t>
+                      </a:r>
+                      <a:endParaRPr lang="en-US" sz="1300" dirty="0">
+                        <a:latin typeface="Pretendard" charset="0"/>
+                        <a:ea typeface="Pretendard" charset="0"/>
+                        <a:cs typeface="Pretendard" charset="0"/>
+                      </a:endParaRPr>
+                    </a:p>
+                  </a:txBody>
+                  <a:tcPr marL="76200" marR="76200" marT="50800" marB="50800" anchor="ctr">
+                    <a:lnL w="0" cap="flat" cmpd="sng" algn="ctr">
+                      <a:noFill/>
+                    </a:lnL>
+                    <a:lnR w="0" cap="flat" cmpd="sng" algn="ctr">
+                      <a:noFill/>
+                    </a:lnR>
+                    <a:lnT w="0" cap="flat" cmpd="sng" algn="ctr">
+                      <a:noFill/>
+                    </a:lnT>
+                    <a:lnB w="9525" cap="flat" cmpd="sng" algn="ctr">
+                      <a:solidFill>
+                        <a:srgbClr val="E0E0E0"/>
+                      </a:solidFill>
+                      <a:prstDash val="solid"/>
+                      <a:round/>
+                      <a:headEnd type="none" w="med" len="med"/>
+                      <a:tailEnd type="none" w="med" len="med"/>
+                    </a:lnB>
+                    <a:solidFill>
+                      <a:srgbClr val="FFFFFF"/>
+                    </a:solidFill>
+                  </a:tcPr>
+                </a:tc>
+                <a:tc>
+                  <a:txBody>
+                    <a:bodyPr/>
+                    <a:lstStyle/>
+                    <a:p>
+                      <a:pPr algn="ctr" indent="0" marL="0">
+                        <a:buNone/>
+                      </a:pPr>
+                      <a:r>
+                        <a:rPr lang="en-US" sz="1300" dirty="0">
+                          <a:solidFill>
+                            <a:srgbClr val="7A7A7A"/>
+                          </a:solidFill>
+                          <a:latin typeface="Pretendard" pitchFamily="34" charset="0"/>
+                          <a:ea typeface="Pretendard" pitchFamily="34" charset="-122"/>
+                          <a:cs typeface="Pretendard" pitchFamily="34" charset="-120"/>
+                        </a:rPr>
+                        <a:t>해결</a:t>
+                      </a:r>
+                      <a:endParaRPr lang="en-US" sz="1300" dirty="0">
+                        <a:latin typeface="Pretendard" charset="0"/>
+                        <a:ea typeface="Pretendard" charset="0"/>
+                        <a:cs typeface="Pretendard" charset="0"/>
+                      </a:endParaRPr>
+                    </a:p>
+                  </a:txBody>
+                  <a:tcPr marL="76200" marR="76200" marT="50800" marB="50800" anchor="ctr">
+                    <a:lnL w="0" cap="flat" cmpd="sng" algn="ctr">
+                      <a:noFill/>
+                    </a:lnL>
+                    <a:lnR w="0" cap="flat" cmpd="sng" algn="ctr">
+                      <a:noFill/>
+                    </a:lnR>
+                    <a:lnT w="0" cap="flat" cmpd="sng" algn="ctr">
+                      <a:noFill/>
+                    </a:lnT>
+                    <a:lnB w="9525" cap="flat" cmpd="sng" algn="ctr">
+                      <a:solidFill>
+                        <a:srgbClr val="E0E0E0"/>
+                      </a:solidFill>
+                      <a:prstDash val="solid"/>
+                      <a:round/>
+                      <a:headEnd type="none" w="med" len="med"/>
+                      <a:tailEnd type="none" w="med" len="med"/>
+                    </a:lnB>
+                    <a:solidFill>
+                      <a:srgbClr val="FFFFFF"/>
+                    </a:solidFill>
+                  </a:tcPr>
+                </a:tc>
+                <a:tc>
+                  <a:txBody>
+                    <a:bodyPr/>
+                    <a:lstStyle/>
+                    <a:p>
+                      <a:pPr algn="ctr" indent="0" marL="0">
+                        <a:buNone/>
+                      </a:pPr>
+                      <a:r>
+                        <a:rPr lang="en-US" sz="1300" dirty="0">
+                          <a:solidFill>
+                            <a:srgbClr val="7A7A7A"/>
+                          </a:solidFill>
+                          <a:latin typeface="Pretendard" pitchFamily="34" charset="0"/>
+                          <a:ea typeface="Pretendard" pitchFamily="34" charset="-122"/>
+                          <a:cs typeface="Pretendard" pitchFamily="34" charset="-120"/>
+                        </a:rPr>
+                        <a:t>R3</a:t>
                       </a:r>
                       <a:endParaRPr lang="en-US" sz="1300" dirty="0">
                         <a:latin typeface="Pretendard" charset="0"/>
@@ -21059,7 +27410,7 @@
                 <a:ea typeface="Pretendard" pitchFamily="34" charset="-122"/>
                 <a:cs typeface="Pretendard" pitchFamily="34" charset="-120"/>
               </a:rPr>
-              <a:t>20 / 21</a:t>
+              <a:t>24 / 25</a:t>
             </a:r>
             <a:endParaRPr lang="en-US" sz="1000" dirty="0"/>
           </a:p>
@@ -21073,9 +27424,9 @@
 </p:sld>
 </file>
 
-<file path=ppt/slides/slide21.xml><?xml version="1.0" encoding="utf-8"?>
+<file path=ppt/slides/slide25.xml><?xml version="1.0" encoding="utf-8"?>
 <p:sld xmlns:a="http://schemas.openxmlformats.org/drawingml/2006/main" xmlns:r="http://schemas.openxmlformats.org/officeDocument/2006/relationships" xmlns:p="http://schemas.openxmlformats.org/presentationml/2006/main">
-  <p:cSld name="Slide 21">
+  <p:cSld name="Slide 25">
     <p:bg>
       <p:bgPr>
         <a:solidFill>
@@ -21200,7 +27551,7 @@
       </p:sp>
       <p:graphicFrame>
         <p:nvGraphicFramePr>
-          <p:cNvPr id="22" name="Table 0"/>
+          <p:cNvPr id="26" name="Table 0"/>
           <p:cNvGraphicFramePr>
             <a:graphicFrameLocks noGrp="1"/>
           </p:cNvGraphicFramePr>
@@ -21497,7 +27848,7 @@
                           <a:ea typeface="Pretendard SemiBold" pitchFamily="34" charset="-122"/>
                           <a:cs typeface="Pretendard SemiBold" pitchFamily="34" charset="-120"/>
                         </a:rPr>
-                        <a:t>스킬트리 UI</a:t>
+                        <a:t>사운드</a:t>
                       </a:r>
                       <a:endParaRPr lang="en-US" sz="1300" dirty="0">
                         <a:latin typeface="Pretendard SemiBold" charset="0"/>
@@ -21547,7 +27898,7 @@
                           <a:ea typeface="Pretendard" pitchFamily="34" charset="-122"/>
                           <a:cs typeface="Pretendard" pitchFamily="34" charset="-120"/>
                         </a:rPr>
-                        <a:t>도형 범례 14개가 한 줄을 넘칠 수 있음 / 연출 때문에 매 프레임 UI 재빌드</a:t>
+                        <a:t>배경음 파일이 아직 없어 배경음 슬라이더는 소리 변화가 없음</a:t>
                       </a:r>
                       <a:endParaRPr lang="en-US" sz="1300" dirty="0">
                         <a:latin typeface="Pretendard" charset="0"/>
@@ -21597,7 +27948,7 @@
                           <a:ea typeface="Pretendard" pitchFamily="34" charset="-122"/>
                           <a:cs typeface="Pretendard" pitchFamily="34" charset="-120"/>
                         </a:rPr>
-                        <a:t>R6 — 범례가 남은 폭을 넘으면 한 줄 전체를 줄여 맞추도록 수정</a:t>
+                        <a:t>SoundBank의 menuMusic · gameplayMusic에 클립 넣기</a:t>
                       </a:r>
                       <a:endParaRPr lang="en-US" sz="1300" dirty="0">
                         <a:latin typeface="Pretendard" charset="0"/>
@@ -21647,7 +27998,7 @@
                           <a:ea typeface="Pretendard" pitchFamily="34" charset="-122"/>
                           <a:cs typeface="Pretendard" pitchFamily="34" charset="-120"/>
                         </a:rPr>
-                        <a:t>해결</a:t>
+                        <a:t>미정</a:t>
                       </a:r>
                       <a:endParaRPr lang="en-US" sz="1300" dirty="0">
                         <a:latin typeface="Pretendard" charset="0"/>
@@ -21697,7 +28048,7 @@
                           <a:ea typeface="Pretendard" pitchFamily="34" charset="-122"/>
                           <a:cs typeface="Pretendard" pitchFamily="34" charset="-120"/>
                         </a:rPr>
-                        <a:t>R3</a:t>
+                        <a:t>R5</a:t>
                       </a:r>
                       <a:endParaRPr lang="en-US" sz="1300" dirty="0">
                         <a:latin typeface="Pretendard" charset="0"/>
@@ -21749,7 +28100,7 @@
                           <a:ea typeface="Pretendard SemiBold" pitchFamily="34" charset="-122"/>
                           <a:cs typeface="Pretendard SemiBold" pitchFamily="34" charset="-120"/>
                         </a:rPr>
-                        <a:t>사운드</a:t>
+                        <a:t>설정 화면</a:t>
                       </a:r>
                       <a:endParaRPr lang="en-US" sz="1300" dirty="0">
                         <a:latin typeface="Pretendard SemiBold" charset="0"/>
@@ -21799,7 +28150,7 @@
                           <a:ea typeface="Pretendard" pitchFamily="34" charset="-122"/>
                           <a:cs typeface="Pretendard" pitchFamily="34" charset="-120"/>
                         </a:rPr>
-                        <a:t>배경음 파일이 아직 없어 배경음 슬라이더는 소리 변화가 없음</a:t>
+                        <a:t>해상도 · 화면 모드는 에디터에서 바뀌지 않아 빌드에서만 확인 가능</a:t>
                       </a:r>
                       <a:endParaRPr lang="en-US" sz="1300" dirty="0">
                         <a:latin typeface="Pretendard" charset="0"/>
@@ -21849,7 +28200,7 @@
                           <a:ea typeface="Pretendard" pitchFamily="34" charset="-122"/>
                           <a:cs typeface="Pretendard" pitchFamily="34" charset="-120"/>
                         </a:rPr>
-                        <a:t>SoundBank의 menuMusic · gameplayMusic에 클립 넣기</a:t>
+                        <a:t>PC 빌드로 해상도 · 전체화면 전환 확인</a:t>
                       </a:r>
                       <a:endParaRPr lang="en-US" sz="1300" dirty="0">
                         <a:latin typeface="Pretendard" charset="0"/>
@@ -21891,6 +28242,56 @@
                         <a:buNone/>
                       </a:pPr>
                       <a:r>
+                        <a:rPr lang="en-US" sz="1300" b="1" dirty="0">
+                          <a:solidFill>
+                            <a:srgbClr val="0066CC"/>
+                          </a:solidFill>
+                          <a:latin typeface="Pretendard SemiBold" pitchFamily="34" charset="0"/>
+                          <a:ea typeface="Pretendard SemiBold" pitchFamily="34" charset="-122"/>
+                          <a:cs typeface="Pretendard SemiBold" pitchFamily="34" charset="-120"/>
+                        </a:rPr>
+                        <a:t>확인 필요</a:t>
+                      </a:r>
+                      <a:endParaRPr lang="en-US" sz="1300" dirty="0">
+                        <a:latin typeface="Pretendard SemiBold" charset="0"/>
+                        <a:ea typeface="Pretendard SemiBold" charset="0"/>
+                        <a:cs typeface="Pretendard SemiBold" charset="0"/>
+                      </a:endParaRPr>
+                    </a:p>
+                  </a:txBody>
+                  <a:tcPr marL="76200" marR="76200" marT="50800" marB="50800" anchor="ctr">
+                    <a:lnL w="0" cap="flat" cmpd="sng" algn="ctr">
+                      <a:noFill/>
+                    </a:lnL>
+                    <a:lnR w="0" cap="flat" cmpd="sng" algn="ctr">
+                      <a:noFill/>
+                    </a:lnR>
+                    <a:lnT w="0" cap="flat" cmpd="sng" algn="ctr">
+                      <a:noFill/>
+                    </a:lnT>
+                    <a:lnB w="9525" cap="flat" cmpd="sng" algn="ctr">
+                      <a:solidFill>
+                        <a:srgbClr val="E0E0E0"/>
+                      </a:solidFill>
+                      <a:prstDash val="solid"/>
+                      <a:round/>
+                      <a:headEnd type="none" w="med" len="med"/>
+                      <a:tailEnd type="none" w="med" len="med"/>
+                    </a:lnB>
+                    <a:solidFill>
+                      <a:srgbClr val="FFFFFF"/>
+                    </a:solidFill>
+                  </a:tcPr>
+                </a:tc>
+                <a:tc>
+                  <a:txBody>
+                    <a:bodyPr/>
+                    <a:lstStyle/>
+                    <a:p>
+                      <a:pPr algn="ctr" indent="0" marL="0">
+                        <a:buNone/>
+                      </a:pPr>
+                      <a:r>
                         <a:rPr lang="en-US" sz="1300" dirty="0">
                           <a:solidFill>
                             <a:srgbClr val="7A7A7A"/>
@@ -21899,7 +28300,7 @@
                           <a:ea typeface="Pretendard" pitchFamily="34" charset="-122"/>
                           <a:cs typeface="Pretendard" pitchFamily="34" charset="-120"/>
                         </a:rPr>
-                        <a:t>미정</a:t>
+                        <a:t>R5</a:t>
                       </a:r>
                       <a:endParaRPr lang="en-US" sz="1300" dirty="0">
                         <a:latin typeface="Pretendard" charset="0"/>
@@ -21932,24 +28333,76 @@
                     </a:solidFill>
                   </a:tcPr>
                 </a:tc>
-                <a:tc>
-                  <a:txBody>
-                    <a:bodyPr/>
-                    <a:lstStyle/>
-                    <a:p>
-                      <a:pPr algn="ctr" indent="0" marL="0">
+              </a:tr>
+              <a:tr h="866394">
+                <a:tc>
+                  <a:txBody>
+                    <a:bodyPr/>
+                    <a:lstStyle/>
+                    <a:p>
+                      <a:pPr indent="0" marL="0">
                         <a:buNone/>
                       </a:pPr>
                       <a:r>
                         <a:rPr lang="en-US" sz="1300" dirty="0">
                           <a:solidFill>
-                            <a:srgbClr val="7A7A7A"/>
+                            <a:srgbClr val="1D1D1F"/>
+                          </a:solidFill>
+                          <a:latin typeface="Pretendard SemiBold" pitchFamily="34" charset="0"/>
+                          <a:ea typeface="Pretendard SemiBold" pitchFamily="34" charset="-122"/>
+                          <a:cs typeface="Pretendard SemiBold" pitchFamily="34" charset="-120"/>
+                        </a:rPr>
+                        <a:t>ESC</a:t>
+                      </a:r>
+                      <a:endParaRPr lang="en-US" sz="1300" dirty="0">
+                        <a:latin typeface="Pretendard SemiBold" charset="0"/>
+                        <a:ea typeface="Pretendard SemiBold" charset="0"/>
+                        <a:cs typeface="Pretendard SemiBold" charset="0"/>
+                      </a:endParaRPr>
+                    </a:p>
+                  </a:txBody>
+                  <a:tcPr marL="76200" marR="76200" marT="50800" marB="50800" anchor="ctr">
+                    <a:lnL w="0" cap="flat" cmpd="sng" algn="ctr">
+                      <a:noFill/>
+                    </a:lnL>
+                    <a:lnR w="0" cap="flat" cmpd="sng" algn="ctr">
+                      <a:noFill/>
+                    </a:lnR>
+                    <a:lnT w="0" cap="flat" cmpd="sng" algn="ctr">
+                      <a:noFill/>
+                    </a:lnT>
+                    <a:lnB w="9525" cap="flat" cmpd="sng" algn="ctr">
+                      <a:solidFill>
+                        <a:srgbClr val="E0E0E0"/>
+                      </a:solidFill>
+                      <a:prstDash val="solid"/>
+                      <a:round/>
+                      <a:headEnd type="none" w="med" len="med"/>
+                      <a:tailEnd type="none" w="med" len="med"/>
+                    </a:lnB>
+                    <a:solidFill>
+                      <a:srgbClr val="FFFFFF"/>
+                    </a:solidFill>
+                  </a:tcPr>
+                </a:tc>
+                <a:tc>
+                  <a:txBody>
+                    <a:bodyPr/>
+                    <a:lstStyle/>
+                    <a:p>
+                      <a:pPr indent="0" marL="0">
+                        <a:buNone/>
+                      </a:pPr>
+                      <a:r>
+                        <a:rPr lang="en-US" sz="1300" dirty="0">
+                          <a:solidFill>
+                            <a:srgbClr val="333333"/>
                           </a:solidFill>
                           <a:latin typeface="Pretendard" pitchFamily="34" charset="0"/>
                           <a:ea typeface="Pretendard" pitchFamily="34" charset="-122"/>
                           <a:cs typeface="Pretendard" pitchFamily="34" charset="-120"/>
                         </a:rPr>
-                        <a:t>R5</a:t>
+                        <a:t>자동 테스트의 ESC 입력이 게임에 전달되지 않아 일시정지 열기 · 설정 창 ESC 닫기를 확인하지 못함 (Enter · 방향키는 정상)</a:t>
                       </a:r>
                       <a:endParaRPr lang="en-US" sz="1300" dirty="0">
                         <a:latin typeface="Pretendard" charset="0"/>
@@ -21982,8 +28435,6 @@
                     </a:solidFill>
                   </a:tcPr>
                 </a:tc>
-              </a:tr>
-              <a:tr h="638556">
                 <a:tc>
                   <a:txBody>
                     <a:bodyPr/>
@@ -21995,13 +28446,63 @@
                       <a:r>
                         <a:rPr lang="en-US" sz="1300" dirty="0">
                           <a:solidFill>
-                            <a:srgbClr val="1D1D1F"/>
+                            <a:srgbClr val="333333"/>
+                          </a:solidFill>
+                          <a:latin typeface="Pretendard" pitchFamily="34" charset="0"/>
+                          <a:ea typeface="Pretendard" pitchFamily="34" charset="-122"/>
+                          <a:cs typeface="Pretendard" pitchFamily="34" charset="-120"/>
+                        </a:rPr>
+                        <a:t>직접 ESC로 일시정지 → 설정 → ESC 닫기 → ESC 재개 확인</a:t>
+                      </a:r>
+                      <a:endParaRPr lang="en-US" sz="1300" dirty="0">
+                        <a:latin typeface="Pretendard" charset="0"/>
+                        <a:ea typeface="Pretendard" charset="0"/>
+                        <a:cs typeface="Pretendard" charset="0"/>
+                      </a:endParaRPr>
+                    </a:p>
+                  </a:txBody>
+                  <a:tcPr marL="76200" marR="76200" marT="50800" marB="50800" anchor="ctr">
+                    <a:lnL w="0" cap="flat" cmpd="sng" algn="ctr">
+                      <a:noFill/>
+                    </a:lnL>
+                    <a:lnR w="0" cap="flat" cmpd="sng" algn="ctr">
+                      <a:noFill/>
+                    </a:lnR>
+                    <a:lnT w="0" cap="flat" cmpd="sng" algn="ctr">
+                      <a:noFill/>
+                    </a:lnT>
+                    <a:lnB w="9525" cap="flat" cmpd="sng" algn="ctr">
+                      <a:solidFill>
+                        <a:srgbClr val="E0E0E0"/>
+                      </a:solidFill>
+                      <a:prstDash val="solid"/>
+                      <a:round/>
+                      <a:headEnd type="none" w="med" len="med"/>
+                      <a:tailEnd type="none" w="med" len="med"/>
+                    </a:lnB>
+                    <a:solidFill>
+                      <a:srgbClr val="FFFFFF"/>
+                    </a:solidFill>
+                  </a:tcPr>
+                </a:tc>
+                <a:tc>
+                  <a:txBody>
+                    <a:bodyPr/>
+                    <a:lstStyle/>
+                    <a:p>
+                      <a:pPr algn="ctr" indent="0" marL="0">
+                        <a:buNone/>
+                      </a:pPr>
+                      <a:r>
+                        <a:rPr lang="en-US" sz="1300" b="1" dirty="0">
+                          <a:solidFill>
+                            <a:srgbClr val="0066CC"/>
                           </a:solidFill>
                           <a:latin typeface="Pretendard SemiBold" pitchFamily="34" charset="0"/>
                           <a:ea typeface="Pretendard SemiBold" pitchFamily="34" charset="-122"/>
                           <a:cs typeface="Pretendard SemiBold" pitchFamily="34" charset="-120"/>
                         </a:rPr>
-                        <a:t>설정 화면</a:t>
+                        <a:t>확인 필요</a:t>
                       </a:r>
                       <a:endParaRPr lang="en-US" sz="1300" dirty="0">
                         <a:latin typeface="Pretendard SemiBold" charset="0"/>
@@ -22039,19 +28540,19 @@
                     <a:bodyPr/>
                     <a:lstStyle/>
                     <a:p>
-                      <a:pPr indent="0" marL="0">
+                      <a:pPr algn="ctr" indent="0" marL="0">
                         <a:buNone/>
                       </a:pPr>
                       <a:r>
                         <a:rPr lang="en-US" sz="1300" dirty="0">
                           <a:solidFill>
-                            <a:srgbClr val="333333"/>
+                            <a:srgbClr val="7A7A7A"/>
                           </a:solidFill>
                           <a:latin typeface="Pretendard" pitchFamily="34" charset="0"/>
                           <a:ea typeface="Pretendard" pitchFamily="34" charset="-122"/>
                           <a:cs typeface="Pretendard" pitchFamily="34" charset="-120"/>
                         </a:rPr>
-                        <a:t>해상도 · 화면 모드는 에디터에서 바뀌지 않아 빌드에서만 확인 가능</a:t>
+                        <a:t>R6</a:t>
                       </a:r>
                       <a:endParaRPr lang="en-US" sz="1300" dirty="0">
                         <a:latin typeface="Pretendard" charset="0"/>
@@ -22084,6 +28585,58 @@
                     </a:solidFill>
                   </a:tcPr>
                 </a:tc>
+              </a:tr>
+              <a:tr h="638556">
+                <a:tc>
+                  <a:txBody>
+                    <a:bodyPr/>
+                    <a:lstStyle/>
+                    <a:p>
+                      <a:pPr indent="0" marL="0">
+                        <a:buNone/>
+                      </a:pPr>
+                      <a:r>
+                        <a:rPr lang="en-US" sz="1300" dirty="0">
+                          <a:solidFill>
+                            <a:srgbClr val="1D1D1F"/>
+                          </a:solidFill>
+                          <a:latin typeface="Pretendard SemiBold" pitchFamily="34" charset="0"/>
+                          <a:ea typeface="Pretendard SemiBold" pitchFamily="34" charset="-122"/>
+                          <a:cs typeface="Pretendard SemiBold" pitchFamily="34" charset="-120"/>
+                        </a:rPr>
+                        <a:t>인게임 배경</a:t>
+                      </a:r>
+                      <a:endParaRPr lang="en-US" sz="1300" dirty="0">
+                        <a:latin typeface="Pretendard SemiBold" charset="0"/>
+                        <a:ea typeface="Pretendard SemiBold" charset="0"/>
+                        <a:cs typeface="Pretendard SemiBold" charset="0"/>
+                      </a:endParaRPr>
+                    </a:p>
+                  </a:txBody>
+                  <a:tcPr marL="76200" marR="76200" marT="50800" marB="50800" anchor="ctr">
+                    <a:lnL w="0" cap="flat" cmpd="sng" algn="ctr">
+                      <a:noFill/>
+                    </a:lnL>
+                    <a:lnR w="0" cap="flat" cmpd="sng" algn="ctr">
+                      <a:noFill/>
+                    </a:lnR>
+                    <a:lnT w="0" cap="flat" cmpd="sng" algn="ctr">
+                      <a:noFill/>
+                    </a:lnT>
+                    <a:lnB w="9525" cap="flat" cmpd="sng" algn="ctr">
+                      <a:solidFill>
+                        <a:srgbClr val="E0E0E0"/>
+                      </a:solidFill>
+                      <a:prstDash val="solid"/>
+                      <a:round/>
+                      <a:headEnd type="none" w="med" len="med"/>
+                      <a:tailEnd type="none" w="med" len="med"/>
+                    </a:lnB>
+                    <a:solidFill>
+                      <a:srgbClr val="FFFFFF"/>
+                    </a:solidFill>
+                  </a:tcPr>
+                </a:tc>
                 <a:tc>
                   <a:txBody>
                     <a:bodyPr/>
@@ -22101,7 +28654,7 @@
                           <a:ea typeface="Pretendard" pitchFamily="34" charset="-122"/>
                           <a:cs typeface="Pretendard" pitchFamily="34" charset="-120"/>
                         </a:rPr>
-                        <a:t>PC 빌드로 해상도 · 전체화면 전환 확인</a:t>
+                        <a:t>이번 배경 · 통과 수정은 Unity가 닫혀 있어 실행 화면으로 확인하지 못함</a:t>
                       </a:r>
                       <a:endParaRPr lang="en-US" sz="1300" dirty="0">
                         <a:latin typeface="Pretendard" charset="0"/>
@@ -22139,19 +28692,171 @@
                     <a:bodyPr/>
                     <a:lstStyle/>
                     <a:p>
+                      <a:pPr indent="0" marL="0">
+                        <a:buNone/>
+                      </a:pPr>
+                      <a:r>
+                        <a:rPr lang="en-US" sz="1300" dirty="0">
+                          <a:solidFill>
+                            <a:srgbClr val="333333"/>
+                          </a:solidFill>
+                          <a:latin typeface="Pretendard" pitchFamily="34" charset="0"/>
+                          <a:ea typeface="Pretendard" pitchFamily="34" charset="-122"/>
+                          <a:cs typeface="Pretendard" pitchFamily="34" charset="-120"/>
+                        </a:rPr>
+                        <a:t>R8 — 에디터에서 어항 · 하수구 확인 (선형 색 수정 후)</a:t>
+                      </a:r>
+                      <a:endParaRPr lang="en-US" sz="1300" dirty="0">
+                        <a:latin typeface="Pretendard" charset="0"/>
+                        <a:ea typeface="Pretendard" charset="0"/>
+                        <a:cs typeface="Pretendard" charset="0"/>
+                      </a:endParaRPr>
+                    </a:p>
+                  </a:txBody>
+                  <a:tcPr marL="76200" marR="76200" marT="50800" marB="50800" anchor="ctr">
+                    <a:lnL w="0" cap="flat" cmpd="sng" algn="ctr">
+                      <a:noFill/>
+                    </a:lnL>
+                    <a:lnR w="0" cap="flat" cmpd="sng" algn="ctr">
+                      <a:noFill/>
+                    </a:lnR>
+                    <a:lnT w="0" cap="flat" cmpd="sng" algn="ctr">
+                      <a:noFill/>
+                    </a:lnT>
+                    <a:lnB w="9525" cap="flat" cmpd="sng" algn="ctr">
+                      <a:solidFill>
+                        <a:srgbClr val="E0E0E0"/>
+                      </a:solidFill>
+                      <a:prstDash val="solid"/>
+                      <a:round/>
+                      <a:headEnd type="none" w="med" len="med"/>
+                      <a:tailEnd type="none" w="med" len="med"/>
+                    </a:lnB>
+                    <a:solidFill>
+                      <a:srgbClr val="FFFFFF"/>
+                    </a:solidFill>
+                  </a:tcPr>
+                </a:tc>
+                <a:tc>
+                  <a:txBody>
+                    <a:bodyPr/>
+                    <a:lstStyle/>
+                    <a:p>
                       <a:pPr algn="ctr" indent="0" marL="0">
                         <a:buNone/>
                       </a:pPr>
                       <a:r>
-                        <a:rPr lang="en-US" sz="1300" b="1" dirty="0">
-                          <a:solidFill>
-                            <a:srgbClr val="0066CC"/>
+                        <a:rPr lang="en-US" sz="1300" dirty="0">
+                          <a:solidFill>
+                            <a:srgbClr val="7A7A7A"/>
+                          </a:solidFill>
+                          <a:latin typeface="Pretendard" pitchFamily="34" charset="0"/>
+                          <a:ea typeface="Pretendard" pitchFamily="34" charset="-122"/>
+                          <a:cs typeface="Pretendard" pitchFamily="34" charset="-120"/>
+                        </a:rPr>
+                        <a:t>해결</a:t>
+                      </a:r>
+                      <a:endParaRPr lang="en-US" sz="1300" dirty="0">
+                        <a:latin typeface="Pretendard" charset="0"/>
+                        <a:ea typeface="Pretendard" charset="0"/>
+                        <a:cs typeface="Pretendard" charset="0"/>
+                      </a:endParaRPr>
+                    </a:p>
+                  </a:txBody>
+                  <a:tcPr marL="76200" marR="76200" marT="50800" marB="50800" anchor="ctr">
+                    <a:lnL w="0" cap="flat" cmpd="sng" algn="ctr">
+                      <a:noFill/>
+                    </a:lnL>
+                    <a:lnR w="0" cap="flat" cmpd="sng" algn="ctr">
+                      <a:noFill/>
+                    </a:lnR>
+                    <a:lnT w="0" cap="flat" cmpd="sng" algn="ctr">
+                      <a:noFill/>
+                    </a:lnT>
+                    <a:lnB w="9525" cap="flat" cmpd="sng" algn="ctr">
+                      <a:solidFill>
+                        <a:srgbClr val="E0E0E0"/>
+                      </a:solidFill>
+                      <a:prstDash val="solid"/>
+                      <a:round/>
+                      <a:headEnd type="none" w="med" len="med"/>
+                      <a:tailEnd type="none" w="med" len="med"/>
+                    </a:lnB>
+                    <a:solidFill>
+                      <a:srgbClr val="FFFFFF"/>
+                    </a:solidFill>
+                  </a:tcPr>
+                </a:tc>
+                <a:tc>
+                  <a:txBody>
+                    <a:bodyPr/>
+                    <a:lstStyle/>
+                    <a:p>
+                      <a:pPr algn="ctr" indent="0" marL="0">
+                        <a:buNone/>
+                      </a:pPr>
+                      <a:r>
+                        <a:rPr lang="en-US" sz="1300" dirty="0">
+                          <a:solidFill>
+                            <a:srgbClr val="7A7A7A"/>
+                          </a:solidFill>
+                          <a:latin typeface="Pretendard" pitchFamily="34" charset="0"/>
+                          <a:ea typeface="Pretendard" pitchFamily="34" charset="-122"/>
+                          <a:cs typeface="Pretendard" pitchFamily="34" charset="-120"/>
+                        </a:rPr>
+                        <a:t>R7</a:t>
+                      </a:r>
+                      <a:endParaRPr lang="en-US" sz="1300" dirty="0">
+                        <a:latin typeface="Pretendard" charset="0"/>
+                        <a:ea typeface="Pretendard" charset="0"/>
+                        <a:cs typeface="Pretendard" charset="0"/>
+                      </a:endParaRPr>
+                    </a:p>
+                  </a:txBody>
+                  <a:tcPr marL="76200" marR="76200" marT="50800" marB="50800" anchor="ctr">
+                    <a:lnL w="0" cap="flat" cmpd="sng" algn="ctr">
+                      <a:noFill/>
+                    </a:lnL>
+                    <a:lnR w="0" cap="flat" cmpd="sng" algn="ctr">
+                      <a:noFill/>
+                    </a:lnR>
+                    <a:lnT w="0" cap="flat" cmpd="sng" algn="ctr">
+                      <a:noFill/>
+                    </a:lnT>
+                    <a:lnB w="9525" cap="flat" cmpd="sng" algn="ctr">
+                      <a:solidFill>
+                        <a:srgbClr val="E0E0E0"/>
+                      </a:solidFill>
+                      <a:prstDash val="solid"/>
+                      <a:round/>
+                      <a:headEnd type="none" w="med" len="med"/>
+                      <a:tailEnd type="none" w="med" len="med"/>
+                    </a:lnB>
+                    <a:solidFill>
+                      <a:srgbClr val="FFFFFF"/>
+                    </a:solidFill>
+                  </a:tcPr>
+                </a:tc>
+              </a:tr>
+              <a:tr h="638556">
+                <a:tc>
+                  <a:txBody>
+                    <a:bodyPr/>
+                    <a:lstStyle/>
+                    <a:p>
+                      <a:pPr indent="0" marL="0">
+                        <a:buNone/>
+                      </a:pPr>
+                      <a:r>
+                        <a:rPr lang="en-US" sz="1300" dirty="0">
+                          <a:solidFill>
+                            <a:srgbClr val="1D1D1F"/>
                           </a:solidFill>
                           <a:latin typeface="Pretendard SemiBold" pitchFamily="34" charset="0"/>
                           <a:ea typeface="Pretendard SemiBold" pitchFamily="34" charset="-122"/>
                           <a:cs typeface="Pretendard SemiBold" pitchFamily="34" charset="-120"/>
                         </a:rPr>
-                        <a:t>확인 필요</a:t>
+                        <a:t>미사일</a:t>
                       </a:r>
                       <a:endParaRPr lang="en-US" sz="1300" dirty="0">
                         <a:latin typeface="Pretendard SemiBold" charset="0"/>
@@ -22189,19 +28894,19 @@
                     <a:bodyPr/>
                     <a:lstStyle/>
                     <a:p>
-                      <a:pPr algn="ctr" indent="0" marL="0">
+                      <a:pPr indent="0" marL="0">
                         <a:buNone/>
                       </a:pPr>
                       <a:r>
                         <a:rPr lang="en-US" sz="1300" dirty="0">
                           <a:solidFill>
-                            <a:srgbClr val="7A7A7A"/>
+                            <a:srgbClr val="333333"/>
                           </a:solidFill>
                           <a:latin typeface="Pretendard" pitchFamily="34" charset="0"/>
                           <a:ea typeface="Pretendard" pitchFamily="34" charset="-122"/>
                           <a:cs typeface="Pretendard" pitchFamily="34" charset="-120"/>
                         </a:rPr>
-                        <a:t>R5</a:t>
+                        <a:t>미사일이 장애물 · 닫힌 통로를 무시하고 날아가 건너편 물고기를 먹을 수 있음 (의도인지 미정)</a:t>
                       </a:r>
                       <a:endParaRPr lang="en-US" sz="1300" dirty="0">
                         <a:latin typeface="Pretendard" charset="0"/>
@@ -22234,58 +28939,6 @@
                     </a:solidFill>
                   </a:tcPr>
                 </a:tc>
-              </a:tr>
-              <a:tr h="866394">
-                <a:tc>
-                  <a:txBody>
-                    <a:bodyPr/>
-                    <a:lstStyle/>
-                    <a:p>
-                      <a:pPr indent="0" marL="0">
-                        <a:buNone/>
-                      </a:pPr>
-                      <a:r>
-                        <a:rPr lang="en-US" sz="1300" dirty="0">
-                          <a:solidFill>
-                            <a:srgbClr val="1D1D1F"/>
-                          </a:solidFill>
-                          <a:latin typeface="Pretendard SemiBold" pitchFamily="34" charset="0"/>
-                          <a:ea typeface="Pretendard SemiBold" pitchFamily="34" charset="-122"/>
-                          <a:cs typeface="Pretendard SemiBold" pitchFamily="34" charset="-120"/>
-                        </a:rPr>
-                        <a:t>ESC</a:t>
-                      </a:r>
-                      <a:endParaRPr lang="en-US" sz="1300" dirty="0">
-                        <a:latin typeface="Pretendard SemiBold" charset="0"/>
-                        <a:ea typeface="Pretendard SemiBold" charset="0"/>
-                        <a:cs typeface="Pretendard SemiBold" charset="0"/>
-                      </a:endParaRPr>
-                    </a:p>
-                  </a:txBody>
-                  <a:tcPr marL="76200" marR="76200" marT="50800" marB="50800" anchor="ctr">
-                    <a:lnL w="0" cap="flat" cmpd="sng" algn="ctr">
-                      <a:noFill/>
-                    </a:lnL>
-                    <a:lnR w="0" cap="flat" cmpd="sng" algn="ctr">
-                      <a:noFill/>
-                    </a:lnR>
-                    <a:lnT w="0" cap="flat" cmpd="sng" algn="ctr">
-                      <a:noFill/>
-                    </a:lnT>
-                    <a:lnB w="9525" cap="flat" cmpd="sng" algn="ctr">
-                      <a:solidFill>
-                        <a:srgbClr val="E0E0E0"/>
-                      </a:solidFill>
-                      <a:prstDash val="solid"/>
-                      <a:round/>
-                      <a:headEnd type="none" w="med" len="med"/>
-                      <a:tailEnd type="none" w="med" len="med"/>
-                    </a:lnB>
-                    <a:solidFill>
-                      <a:srgbClr val="FFFFFF"/>
-                    </a:solidFill>
-                  </a:tcPr>
-                </a:tc>
                 <a:tc>
                   <a:txBody>
                     <a:bodyPr/>
@@ -22303,7 +28956,7 @@
                           <a:ea typeface="Pretendard" pitchFamily="34" charset="-122"/>
                           <a:cs typeface="Pretendard" pitchFamily="34" charset="-120"/>
                         </a:rPr>
-                        <a:t>자동 테스트의 ESC 입력이 게임에 전달되지 않아 일시정지 열기 · 설정 창 ESC 닫기를 확인하지 못함 (Enter · 방향키는 정상)</a:t>
+                        <a:t>R8 — 막히게 결정 · 수정 (사용자 요청)</a:t>
                       </a:r>
                       <a:endParaRPr lang="en-US" sz="1300" dirty="0">
                         <a:latin typeface="Pretendard" charset="0"/>
@@ -22341,19 +28994,19 @@
                     <a:bodyPr/>
                     <a:lstStyle/>
                     <a:p>
-                      <a:pPr indent="0" marL="0">
+                      <a:pPr algn="ctr" indent="0" marL="0">
                         <a:buNone/>
                       </a:pPr>
                       <a:r>
                         <a:rPr lang="en-US" sz="1300" dirty="0">
                           <a:solidFill>
-                            <a:srgbClr val="333333"/>
+                            <a:srgbClr val="7A7A7A"/>
                           </a:solidFill>
                           <a:latin typeface="Pretendard" pitchFamily="34" charset="0"/>
                           <a:ea typeface="Pretendard" pitchFamily="34" charset="-122"/>
                           <a:cs typeface="Pretendard" pitchFamily="34" charset="-120"/>
                         </a:rPr>
-                        <a:t>직접 ESC로 일시정지 → 설정 → ESC 닫기 → ESC 재개 확인</a:t>
+                        <a:t>해결</a:t>
                       </a:r>
                       <a:endParaRPr lang="en-US" sz="1300" dirty="0">
                         <a:latin typeface="Pretendard" charset="0"/>
@@ -22395,56 +29048,6 @@
                         <a:buNone/>
                       </a:pPr>
                       <a:r>
-                        <a:rPr lang="en-US" sz="1300" b="1" dirty="0">
-                          <a:solidFill>
-                            <a:srgbClr val="0066CC"/>
-                          </a:solidFill>
-                          <a:latin typeface="Pretendard SemiBold" pitchFamily="34" charset="0"/>
-                          <a:ea typeface="Pretendard SemiBold" pitchFamily="34" charset="-122"/>
-                          <a:cs typeface="Pretendard SemiBold" pitchFamily="34" charset="-120"/>
-                        </a:rPr>
-                        <a:t>확인 필요</a:t>
-                      </a:r>
-                      <a:endParaRPr lang="en-US" sz="1300" dirty="0">
-                        <a:latin typeface="Pretendard SemiBold" charset="0"/>
-                        <a:ea typeface="Pretendard SemiBold" charset="0"/>
-                        <a:cs typeface="Pretendard SemiBold" charset="0"/>
-                      </a:endParaRPr>
-                    </a:p>
-                  </a:txBody>
-                  <a:tcPr marL="76200" marR="76200" marT="50800" marB="50800" anchor="ctr">
-                    <a:lnL w="0" cap="flat" cmpd="sng" algn="ctr">
-                      <a:noFill/>
-                    </a:lnL>
-                    <a:lnR w="0" cap="flat" cmpd="sng" algn="ctr">
-                      <a:noFill/>
-                    </a:lnR>
-                    <a:lnT w="0" cap="flat" cmpd="sng" algn="ctr">
-                      <a:noFill/>
-                    </a:lnT>
-                    <a:lnB w="9525" cap="flat" cmpd="sng" algn="ctr">
-                      <a:solidFill>
-                        <a:srgbClr val="E0E0E0"/>
-                      </a:solidFill>
-                      <a:prstDash val="solid"/>
-                      <a:round/>
-                      <a:headEnd type="none" w="med" len="med"/>
-                      <a:tailEnd type="none" w="med" len="med"/>
-                    </a:lnB>
-                    <a:solidFill>
-                      <a:srgbClr val="FFFFFF"/>
-                    </a:solidFill>
-                  </a:tcPr>
-                </a:tc>
-                <a:tc>
-                  <a:txBody>
-                    <a:bodyPr/>
-                    <a:lstStyle/>
-                    <a:p>
-                      <a:pPr algn="ctr" indent="0" marL="0">
-                        <a:buNone/>
-                      </a:pPr>
-                      <a:r>
                         <a:rPr lang="en-US" sz="1300" dirty="0">
                           <a:solidFill>
                             <a:srgbClr val="7A7A7A"/>
@@ -22453,7 +29056,7 @@
                           <a:ea typeface="Pretendard" pitchFamily="34" charset="-122"/>
                           <a:cs typeface="Pretendard" pitchFamily="34" charset="-120"/>
                         </a:rPr>
-                        <a:t>R6</a:t>
+                        <a:t>R8</a:t>
                       </a:r>
                       <a:endParaRPr lang="en-US" sz="1300" dirty="0">
                         <a:latin typeface="Pretendard" charset="0"/>
@@ -22494,387 +29097,6 @@
       <p:sp>
         <p:nvSpPr>
           <p:cNvPr id="6" name="Text 3"/>
-          <p:cNvSpPr txBox="1"/>
-          <p:nvPr/>
-        </p:nvSpPr>
-        <p:spPr>
-          <a:xfrm>
-            <a:off x="609905" y="5257800"/>
-            <a:ext cx="2651760" cy="502920"/>
-          </a:xfrm>
-          <a:prstGeom prst="rect">
-            <a:avLst/>
-          </a:prstGeom>
-          <a:noFill/>
-          <a:ln/>
-        </p:spPr>
-        <p:txBody>
-          <a:bodyPr wrap="square" lIns="0" tIns="0" rIns="0" bIns="0" rtlCol="0" anchor="ctr"/>
-          <a:lstStyle/>
-          <a:p>
-            <a:pPr indent="0" marL="0">
-              <a:buNone/>
-            </a:pPr>
-            <a:r>
-              <a:rPr lang="en-US" sz="2800" dirty="0">
-                <a:solidFill>
-                  <a:srgbClr val="1D1D1F"/>
-                </a:solidFill>
-                <a:latin typeface="Pretendard SemiBold" pitchFamily="34" charset="0"/>
-                <a:ea typeface="Pretendard SemiBold" pitchFamily="34" charset="-122"/>
-                <a:cs typeface="Pretendard SemiBold" pitchFamily="34" charset="-120"/>
-              </a:rPr>
-              <a:t>9건</a:t>
-            </a:r>
-            <a:endParaRPr lang="en-US" sz="2800" dirty="0"/>
-          </a:p>
-        </p:txBody>
-      </p:sp>
-      <p:sp>
-        <p:nvSpPr>
-          <p:cNvPr id="7" name="Text 4"/>
-          <p:cNvSpPr txBox="1"/>
-          <p:nvPr/>
-        </p:nvSpPr>
-        <p:spPr>
-          <a:xfrm>
-            <a:off x="609905" y="5788152"/>
-            <a:ext cx="2651760" cy="228600"/>
-          </a:xfrm>
-          <a:prstGeom prst="rect">
-            <a:avLst/>
-          </a:prstGeom>
-          <a:noFill/>
-          <a:ln/>
-        </p:spPr>
-        <p:txBody>
-          <a:bodyPr wrap="square" lIns="0" tIns="0" rIns="0" bIns="0" rtlCol="0" anchor="t"/>
-          <a:lstStyle/>
-          <a:p>
-            <a:pPr indent="0" marL="0">
-              <a:buNone/>
-            </a:pPr>
-            <a:r>
-              <a:rPr lang="en-US" sz="1200" dirty="0">
-                <a:solidFill>
-                  <a:srgbClr val="7A7A7A"/>
-                </a:solidFill>
-                <a:latin typeface="Pretendard" pitchFamily="34" charset="0"/>
-                <a:ea typeface="Pretendard" pitchFamily="34" charset="-122"/>
-                <a:cs typeface="Pretendard" pitchFamily="34" charset="-120"/>
-              </a:rPr>
-              <a:t>남은 위험</a:t>
-            </a:r>
-            <a:endParaRPr lang="en-US" sz="1200" dirty="0"/>
-          </a:p>
-        </p:txBody>
-      </p:sp>
-      <p:sp>
-        <p:nvSpPr>
-          <p:cNvPr id="8" name="Shape 5"/>
-          <p:cNvSpPr/>
-          <p:nvPr/>
-        </p:nvSpPr>
-        <p:spPr>
-          <a:xfrm>
-            <a:off x="3353105" y="5303520"/>
-            <a:ext cx="0" cy="868680"/>
-          </a:xfrm>
-          <a:prstGeom prst="line">
-            <a:avLst/>
-          </a:prstGeom>
-          <a:noFill/>
-          <a:ln w="9525">
-            <a:solidFill>
-              <a:srgbClr val="E0E0E0"/>
-            </a:solidFill>
-            <a:prstDash val="solid"/>
-          </a:ln>
-        </p:spPr>
-      </p:sp>
-      <p:sp>
-        <p:nvSpPr>
-          <p:cNvPr id="9" name="Text 6"/>
-          <p:cNvSpPr txBox="1"/>
-          <p:nvPr/>
-        </p:nvSpPr>
-        <p:spPr>
-          <a:xfrm>
-            <a:off x="3627425" y="5257800"/>
-            <a:ext cx="2377440" cy="502920"/>
-          </a:xfrm>
-          <a:prstGeom prst="rect">
-            <a:avLst/>
-          </a:prstGeom>
-          <a:noFill/>
-          <a:ln/>
-        </p:spPr>
-        <p:txBody>
-          <a:bodyPr wrap="square" lIns="0" tIns="0" rIns="0" bIns="0" rtlCol="0" anchor="ctr"/>
-          <a:lstStyle/>
-          <a:p>
-            <a:pPr indent="0" marL="0">
-              <a:buNone/>
-            </a:pPr>
-            <a:r>
-              <a:rPr lang="en-US" sz="2800" dirty="0">
-                <a:solidFill>
-                  <a:srgbClr val="1D1D1F"/>
-                </a:solidFill>
-                <a:latin typeface="Pretendard SemiBold" pitchFamily="34" charset="0"/>
-                <a:ea typeface="Pretendard SemiBold" pitchFamily="34" charset="-122"/>
-                <a:cs typeface="Pretendard SemiBold" pitchFamily="34" charset="-120"/>
-              </a:rPr>
-              <a:t>4건</a:t>
-            </a:r>
-            <a:endParaRPr lang="en-US" sz="2800" dirty="0"/>
-          </a:p>
-        </p:txBody>
-      </p:sp>
-      <p:sp>
-        <p:nvSpPr>
-          <p:cNvPr id="10" name="Text 7"/>
-          <p:cNvSpPr txBox="1"/>
-          <p:nvPr/>
-        </p:nvSpPr>
-        <p:spPr>
-          <a:xfrm>
-            <a:off x="3627425" y="5788152"/>
-            <a:ext cx="2377440" cy="228600"/>
-          </a:xfrm>
-          <a:prstGeom prst="rect">
-            <a:avLst/>
-          </a:prstGeom>
-          <a:noFill/>
-          <a:ln/>
-        </p:spPr>
-        <p:txBody>
-          <a:bodyPr wrap="square" lIns="0" tIns="0" rIns="0" bIns="0" rtlCol="0" anchor="t"/>
-          <a:lstStyle/>
-          <a:p>
-            <a:pPr indent="0" marL="0">
-              <a:buNone/>
-            </a:pPr>
-            <a:r>
-              <a:rPr lang="en-US" sz="1200" dirty="0">
-                <a:solidFill>
-                  <a:srgbClr val="7A7A7A"/>
-                </a:solidFill>
-                <a:latin typeface="Pretendard" pitchFamily="34" charset="0"/>
-                <a:ea typeface="Pretendard" pitchFamily="34" charset="-122"/>
-                <a:cs typeface="Pretendard" pitchFamily="34" charset="-120"/>
-              </a:rPr>
-              <a:t>플레이테스트로 확인 필요</a:t>
-            </a:r>
-            <a:endParaRPr lang="en-US" sz="1200" dirty="0"/>
-          </a:p>
-        </p:txBody>
-      </p:sp>
-      <p:sp>
-        <p:nvSpPr>
-          <p:cNvPr id="11" name="Shape 8"/>
-          <p:cNvSpPr/>
-          <p:nvPr/>
-        </p:nvSpPr>
-        <p:spPr>
-          <a:xfrm>
-            <a:off x="6096305" y="5303520"/>
-            <a:ext cx="0" cy="868680"/>
-          </a:xfrm>
-          <a:prstGeom prst="line">
-            <a:avLst/>
-          </a:prstGeom>
-          <a:noFill/>
-          <a:ln w="9525">
-            <a:solidFill>
-              <a:srgbClr val="E0E0E0"/>
-            </a:solidFill>
-            <a:prstDash val="solid"/>
-          </a:ln>
-        </p:spPr>
-      </p:sp>
-      <p:sp>
-        <p:nvSpPr>
-          <p:cNvPr id="12" name="Text 9"/>
-          <p:cNvSpPr txBox="1"/>
-          <p:nvPr/>
-        </p:nvSpPr>
-        <p:spPr>
-          <a:xfrm>
-            <a:off x="6370625" y="5257800"/>
-            <a:ext cx="2377440" cy="502920"/>
-          </a:xfrm>
-          <a:prstGeom prst="rect">
-            <a:avLst/>
-          </a:prstGeom>
-          <a:noFill/>
-          <a:ln/>
-        </p:spPr>
-        <p:txBody>
-          <a:bodyPr wrap="square" lIns="0" tIns="0" rIns="0" bIns="0" rtlCol="0" anchor="ctr"/>
-          <a:lstStyle/>
-          <a:p>
-            <a:pPr indent="0" marL="0">
-              <a:buNone/>
-            </a:pPr>
-            <a:r>
-              <a:rPr lang="en-US" sz="2800" dirty="0">
-                <a:solidFill>
-                  <a:srgbClr val="1D1D1F"/>
-                </a:solidFill>
-                <a:latin typeface="Pretendard SemiBold" pitchFamily="34" charset="0"/>
-                <a:ea typeface="Pretendard SemiBold" pitchFamily="34" charset="-122"/>
-                <a:cs typeface="Pretendard SemiBold" pitchFamily="34" charset="-120"/>
-              </a:rPr>
-              <a:t>5건</a:t>
-            </a:r>
-            <a:endParaRPr lang="en-US" sz="2800" dirty="0"/>
-          </a:p>
-        </p:txBody>
-      </p:sp>
-      <p:sp>
-        <p:nvSpPr>
-          <p:cNvPr id="13" name="Text 10"/>
-          <p:cNvSpPr txBox="1"/>
-          <p:nvPr/>
-        </p:nvSpPr>
-        <p:spPr>
-          <a:xfrm>
-            <a:off x="6370625" y="5788152"/>
-            <a:ext cx="2377440" cy="228600"/>
-          </a:xfrm>
-          <a:prstGeom prst="rect">
-            <a:avLst/>
-          </a:prstGeom>
-          <a:noFill/>
-          <a:ln/>
-        </p:spPr>
-        <p:txBody>
-          <a:bodyPr wrap="square" lIns="0" tIns="0" rIns="0" bIns="0" rtlCol="0" anchor="t"/>
-          <a:lstStyle/>
-          <a:p>
-            <a:pPr indent="0" marL="0">
-              <a:buNone/>
-            </a:pPr>
-            <a:r>
-              <a:rPr lang="en-US" sz="1200" dirty="0">
-                <a:solidFill>
-                  <a:srgbClr val="7A7A7A"/>
-                </a:solidFill>
-                <a:latin typeface="Pretendard" pitchFamily="34" charset="0"/>
-                <a:ea typeface="Pretendard" pitchFamily="34" charset="-122"/>
-                <a:cs typeface="Pretendard" pitchFamily="34" charset="-120"/>
-              </a:rPr>
-              <a:t>조치 방법 미정</a:t>
-            </a:r>
-            <a:endParaRPr lang="en-US" sz="1200" dirty="0"/>
-          </a:p>
-        </p:txBody>
-      </p:sp>
-      <p:sp>
-        <p:nvSpPr>
-          <p:cNvPr id="14" name="Shape 11"/>
-          <p:cNvSpPr/>
-          <p:nvPr/>
-        </p:nvSpPr>
-        <p:spPr>
-          <a:xfrm>
-            <a:off x="8839505" y="5303520"/>
-            <a:ext cx="0" cy="868680"/>
-          </a:xfrm>
-          <a:prstGeom prst="line">
-            <a:avLst/>
-          </a:prstGeom>
-          <a:noFill/>
-          <a:ln w="9525">
-            <a:solidFill>
-              <a:srgbClr val="E0E0E0"/>
-            </a:solidFill>
-            <a:prstDash val="solid"/>
-          </a:ln>
-        </p:spPr>
-      </p:sp>
-      <p:sp>
-        <p:nvSpPr>
-          <p:cNvPr id="15" name="Text 12"/>
-          <p:cNvSpPr txBox="1"/>
-          <p:nvPr/>
-        </p:nvSpPr>
-        <p:spPr>
-          <a:xfrm>
-            <a:off x="9113825" y="5257800"/>
-            <a:ext cx="2377440" cy="502920"/>
-          </a:xfrm>
-          <a:prstGeom prst="rect">
-            <a:avLst/>
-          </a:prstGeom>
-          <a:noFill/>
-          <a:ln/>
-        </p:spPr>
-        <p:txBody>
-          <a:bodyPr wrap="square" lIns="0" tIns="0" rIns="0" bIns="0" rtlCol="0" anchor="ctr"/>
-          <a:lstStyle/>
-          <a:p>
-            <a:pPr indent="0" marL="0">
-              <a:buNone/>
-            </a:pPr>
-            <a:r>
-              <a:rPr lang="en-US" sz="2800" dirty="0">
-                <a:solidFill>
-                  <a:srgbClr val="1D1D1F"/>
-                </a:solidFill>
-                <a:latin typeface="Pretendard SemiBold" pitchFamily="34" charset="0"/>
-                <a:ea typeface="Pretendard SemiBold" pitchFamily="34" charset="-122"/>
-                <a:cs typeface="Pretendard SemiBold" pitchFamily="34" charset="-120"/>
-              </a:rPr>
-              <a:t>2026-09-24</a:t>
-            </a:r>
-            <a:endParaRPr lang="en-US" sz="2800" dirty="0"/>
-          </a:p>
-        </p:txBody>
-      </p:sp>
-      <p:sp>
-        <p:nvSpPr>
-          <p:cNvPr id="16" name="Text 13"/>
-          <p:cNvSpPr txBox="1"/>
-          <p:nvPr/>
-        </p:nvSpPr>
-        <p:spPr>
-          <a:xfrm>
-            <a:off x="9113825" y="5788152"/>
-            <a:ext cx="2377440" cy="228600"/>
-          </a:xfrm>
-          <a:prstGeom prst="rect">
-            <a:avLst/>
-          </a:prstGeom>
-          <a:noFill/>
-          <a:ln/>
-        </p:spPr>
-        <p:txBody>
-          <a:bodyPr wrap="square" lIns="0" tIns="0" rIns="0" bIns="0" rtlCol="0" anchor="t"/>
-          <a:lstStyle/>
-          <a:p>
-            <a:pPr indent="0" marL="0">
-              <a:buNone/>
-            </a:pPr>
-            <a:r>
-              <a:rPr lang="en-US" sz="1200" dirty="0">
-                <a:solidFill>
-                  <a:srgbClr val="7A7A7A"/>
-                </a:solidFill>
-                <a:latin typeface="Pretendard" pitchFamily="34" charset="0"/>
-                <a:ea typeface="Pretendard" pitchFamily="34" charset="-122"/>
-                <a:cs typeface="Pretendard" pitchFamily="34" charset="-120"/>
-              </a:rPr>
-              <a:t>마지막 갱신</a:t>
-            </a:r>
-            <a:endParaRPr lang="en-US" sz="1200" dirty="0"/>
-          </a:p>
-        </p:txBody>
-      </p:sp>
-      <p:sp>
-        <p:nvSpPr>
-          <p:cNvPr id="17" name="Text 14"/>
           <p:cNvSpPr txBox="1"/>
           <p:nvPr/>
         </p:nvSpPr>
@@ -22913,7 +29135,7 @@
       </p:sp>
       <p:sp>
         <p:nvSpPr>
-          <p:cNvPr id="18" name="Text 15"/>
+          <p:cNvPr id="7" name="Text 4"/>
           <p:cNvSpPr txBox="1"/>
           <p:nvPr/>
         </p:nvSpPr>
@@ -22944,7 +29166,7 @@
                 <a:ea typeface="Pretendard" pitchFamily="34" charset="-122"/>
                 <a:cs typeface="Pretendard" pitchFamily="34" charset="-120"/>
               </a:rPr>
-              <a:t>21 / 21</a:t>
+              <a:t>25 / 25</a:t>
             </a:r>
             <a:endParaRPr lang="en-US" sz="1000" dirty="0"/>
           </a:p>
@@ -23108,7 +29330,7 @@
         <p:spPr>
           <a:xfrm>
             <a:off x="6279185" y="1600200"/>
-            <a:ext cx="5303520" cy="662940"/>
+            <a:ext cx="5303520" cy="465201"/>
           </a:xfrm>
           <a:prstGeom prst="rect">
             <a:avLst/>
@@ -23210,7 +29432,7 @@
         </p:nvSpPr>
         <p:spPr>
           <a:xfrm>
-            <a:off x="9936785" y="1657350"/>
+            <a:off x="9936785" y="1558481"/>
             <a:ext cx="1371600" cy="411480"/>
           </a:xfrm>
           <a:prstGeom prst="rect">
@@ -23249,7 +29471,7 @@
         </p:nvSpPr>
         <p:spPr>
           <a:xfrm>
-            <a:off x="9936785" y="2059686"/>
+            <a:off x="9936785" y="1960817"/>
             <a:ext cx="1371600" cy="201168"/>
           </a:xfrm>
           <a:prstGeom prst="rect">
@@ -23288,8 +29510,8 @@
         </p:nvSpPr>
         <p:spPr>
           <a:xfrm>
-            <a:off x="6279185" y="2391156"/>
-            <a:ext cx="5303520" cy="662940"/>
+            <a:off x="6279185" y="2193417"/>
+            <a:ext cx="5303520" cy="465201"/>
           </a:xfrm>
           <a:prstGeom prst="rect">
             <a:avLst/>
@@ -23313,7 +29535,7 @@
         </p:nvSpPr>
         <p:spPr>
           <a:xfrm>
-            <a:off x="6553505" y="2482596"/>
+            <a:off x="6553505" y="2284857"/>
             <a:ext cx="3291840" cy="237744"/>
           </a:xfrm>
           <a:prstGeom prst="rect">
@@ -23352,7 +29574,7 @@
         </p:nvSpPr>
         <p:spPr>
           <a:xfrm>
-            <a:off x="6553505" y="2720340"/>
+            <a:off x="6553505" y="2522601"/>
             <a:ext cx="3291840" cy="384048"/>
           </a:xfrm>
           <a:prstGeom prst="rect">
@@ -23391,7 +29613,7 @@
         </p:nvSpPr>
         <p:spPr>
           <a:xfrm>
-            <a:off x="9936785" y="2448306"/>
+            <a:off x="9936785" y="2151698"/>
             <a:ext cx="1371600" cy="411480"/>
           </a:xfrm>
           <a:prstGeom prst="rect">
@@ -23430,7 +29652,7 @@
         </p:nvSpPr>
         <p:spPr>
           <a:xfrm>
-            <a:off x="9936785" y="2850642"/>
+            <a:off x="9936785" y="2554034"/>
             <a:ext cx="1371600" cy="201168"/>
           </a:xfrm>
           <a:prstGeom prst="rect">
@@ -23469,8 +29691,8 @@
         </p:nvSpPr>
         <p:spPr>
           <a:xfrm>
-            <a:off x="6279185" y="3182112"/>
-            <a:ext cx="5303520" cy="662940"/>
+            <a:off x="6279185" y="2786634"/>
+            <a:ext cx="5303520" cy="465201"/>
           </a:xfrm>
           <a:prstGeom prst="rect">
             <a:avLst/>
@@ -23494,7 +29716,7 @@
         </p:nvSpPr>
         <p:spPr>
           <a:xfrm>
-            <a:off x="6553505" y="3273552"/>
+            <a:off x="6553505" y="2878074"/>
             <a:ext cx="3291840" cy="237744"/>
           </a:xfrm>
           <a:prstGeom prst="rect">
@@ -23533,7 +29755,7 @@
         </p:nvSpPr>
         <p:spPr>
           <a:xfrm>
-            <a:off x="6553505" y="3511296"/>
+            <a:off x="6553505" y="3115818"/>
             <a:ext cx="3291840" cy="384048"/>
           </a:xfrm>
           <a:prstGeom prst="rect">
@@ -23572,7 +29794,7 @@
         </p:nvSpPr>
         <p:spPr>
           <a:xfrm>
-            <a:off x="9936785" y="3239262"/>
+            <a:off x="9936785" y="2744915"/>
             <a:ext cx="1371600" cy="411480"/>
           </a:xfrm>
           <a:prstGeom prst="rect">
@@ -23611,7 +29833,7 @@
         </p:nvSpPr>
         <p:spPr>
           <a:xfrm>
-            <a:off x="9936785" y="3641598"/>
+            <a:off x="9936785" y="3147251"/>
             <a:ext cx="1371600" cy="201168"/>
           </a:xfrm>
           <a:prstGeom prst="rect">
@@ -23650,8 +29872,8 @@
         </p:nvSpPr>
         <p:spPr>
           <a:xfrm>
-            <a:off x="6279185" y="3973068"/>
-            <a:ext cx="5303520" cy="662940"/>
+            <a:off x="6279185" y="3379851"/>
+            <a:ext cx="5303520" cy="465201"/>
           </a:xfrm>
           <a:prstGeom prst="rect">
             <a:avLst/>
@@ -23675,7 +29897,7 @@
         </p:nvSpPr>
         <p:spPr>
           <a:xfrm>
-            <a:off x="6553505" y="4064508"/>
+            <a:off x="6553505" y="3471291"/>
             <a:ext cx="3291840" cy="237744"/>
           </a:xfrm>
           <a:prstGeom prst="rect">
@@ -23714,7 +29936,7 @@
         </p:nvSpPr>
         <p:spPr>
           <a:xfrm>
-            <a:off x="6553505" y="4302252"/>
+            <a:off x="6553505" y="3709035"/>
             <a:ext cx="3291840" cy="384048"/>
           </a:xfrm>
           <a:prstGeom prst="rect">
@@ -23753,7 +29975,7 @@
         </p:nvSpPr>
         <p:spPr>
           <a:xfrm>
-            <a:off x="9936785" y="4030218"/>
+            <a:off x="9936785" y="3338132"/>
             <a:ext cx="1371600" cy="411480"/>
           </a:xfrm>
           <a:prstGeom prst="rect">
@@ -23792,7 +30014,7 @@
         </p:nvSpPr>
         <p:spPr>
           <a:xfrm>
-            <a:off x="9936785" y="4432554"/>
+            <a:off x="9936785" y="3740468"/>
             <a:ext cx="1371600" cy="201168"/>
           </a:xfrm>
           <a:prstGeom prst="rect">
@@ -23831,8 +30053,8 @@
         </p:nvSpPr>
         <p:spPr>
           <a:xfrm>
-            <a:off x="6279185" y="4764024"/>
-            <a:ext cx="5303520" cy="662940"/>
+            <a:off x="6279185" y="3973068"/>
+            <a:ext cx="5303520" cy="465201"/>
           </a:xfrm>
           <a:prstGeom prst="rect">
             <a:avLst/>
@@ -23856,7 +30078,7 @@
         </p:nvSpPr>
         <p:spPr>
           <a:xfrm>
-            <a:off x="6553505" y="4855464"/>
+            <a:off x="6553505" y="4064508"/>
             <a:ext cx="3291840" cy="237744"/>
           </a:xfrm>
           <a:prstGeom prst="rect">
@@ -23895,7 +30117,7 @@
         </p:nvSpPr>
         <p:spPr>
           <a:xfrm>
-            <a:off x="6553505" y="5093208"/>
+            <a:off x="6553505" y="4302252"/>
             <a:ext cx="3291840" cy="384048"/>
           </a:xfrm>
           <a:prstGeom prst="rect">
@@ -23934,7 +30156,7 @@
         </p:nvSpPr>
         <p:spPr>
           <a:xfrm>
-            <a:off x="9936785" y="4821174"/>
+            <a:off x="9936785" y="3931348"/>
             <a:ext cx="1371600" cy="411480"/>
           </a:xfrm>
           <a:prstGeom prst="rect">
@@ -23973,7 +30195,7 @@
         </p:nvSpPr>
         <p:spPr>
           <a:xfrm>
-            <a:off x="9936785" y="5223510"/>
+            <a:off x="9936785" y="4333684"/>
             <a:ext cx="1371600" cy="201168"/>
           </a:xfrm>
           <a:prstGeom prst="rect">
@@ -24012,8 +30234,8 @@
         </p:nvSpPr>
         <p:spPr>
           <a:xfrm>
-            <a:off x="6279185" y="5554980"/>
-            <a:ext cx="5303520" cy="662940"/>
+            <a:off x="6279185" y="4566285"/>
+            <a:ext cx="5303520" cy="465201"/>
           </a:xfrm>
           <a:prstGeom prst="rect">
             <a:avLst/>
@@ -24037,7 +30259,7 @@
         </p:nvSpPr>
         <p:spPr>
           <a:xfrm>
-            <a:off x="6553505" y="5646420"/>
+            <a:off x="6553505" y="4657725"/>
             <a:ext cx="3291840" cy="237744"/>
           </a:xfrm>
           <a:prstGeom prst="rect">
@@ -24076,7 +30298,7 @@
         </p:nvSpPr>
         <p:spPr>
           <a:xfrm>
-            <a:off x="6553505" y="5884164"/>
+            <a:off x="6553505" y="4895469"/>
             <a:ext cx="3291840" cy="384048"/>
           </a:xfrm>
           <a:prstGeom prst="rect">
@@ -24115,7 +30337,7 @@
         </p:nvSpPr>
         <p:spPr>
           <a:xfrm>
-            <a:off x="9936785" y="5612130"/>
+            <a:off x="9936785" y="4524565"/>
             <a:ext cx="1371600" cy="411480"/>
           </a:xfrm>
           <a:prstGeom prst="rect">
@@ -24154,7 +30376,7 @@
         </p:nvSpPr>
         <p:spPr>
           <a:xfrm>
-            <a:off x="9936785" y="6014466"/>
+            <a:off x="9936785" y="4926901"/>
             <a:ext cx="1371600" cy="201168"/>
           </a:xfrm>
           <a:prstGeom prst="rect">
@@ -24187,7 +30409,369 @@
       </p:sp>
       <p:sp>
         <p:nvSpPr>
-          <p:cNvPr id="36" name="Text 33"/>
+          <p:cNvPr id="36" name="Shape 33"/>
+          <p:cNvSpPr/>
+          <p:nvPr/>
+        </p:nvSpPr>
+        <p:spPr>
+          <a:xfrm>
+            <a:off x="6279185" y="5159502"/>
+            <a:ext cx="5303520" cy="465201"/>
+          </a:xfrm>
+          <a:prstGeom prst="rect">
+            <a:avLst/>
+          </a:prstGeom>
+          <a:solidFill>
+            <a:srgbClr val="FFFFFF"/>
+          </a:solidFill>
+          <a:ln w="9525">
+            <a:solidFill>
+              <a:srgbClr val="E0E0E0"/>
+            </a:solidFill>
+            <a:prstDash val="solid"/>
+          </a:ln>
+        </p:spPr>
+      </p:sp>
+      <p:sp>
+        <p:nvSpPr>
+          <p:cNvPr id="37" name="Text 34"/>
+          <p:cNvSpPr txBox="1"/>
+          <p:nvPr/>
+        </p:nvSpPr>
+        <p:spPr>
+          <a:xfrm>
+            <a:off x="6553505" y="5250942"/>
+            <a:ext cx="3291840" cy="237744"/>
+          </a:xfrm>
+          <a:prstGeom prst="rect">
+            <a:avLst/>
+          </a:prstGeom>
+          <a:noFill/>
+          <a:ln/>
+        </p:spPr>
+        <p:txBody>
+          <a:bodyPr wrap="square" lIns="0" tIns="0" rIns="0" bIns="0" rtlCol="0" anchor="ctr"/>
+          <a:lstStyle/>
+          <a:p>
+            <a:pPr indent="0" marL="0">
+              <a:buNone/>
+            </a:pPr>
+            <a:r>
+              <a:rPr lang="en-US" sz="1200" b="1" dirty="0">
+                <a:solidFill>
+                  <a:srgbClr val="0066CC"/>
+                </a:solidFill>
+                <a:latin typeface="Pretendard SemiBold" pitchFamily="34" charset="0"/>
+                <a:ea typeface="Pretendard SemiBold" pitchFamily="34" charset="-122"/>
+                <a:cs typeface="Pretendard SemiBold" pitchFamily="34" charset="-120"/>
+              </a:rPr>
+              <a:t>R7  2026-09-25   ·   높음 1 · 중간 1 · 낮음 1</a:t>
+            </a:r>
+            <a:endParaRPr lang="en-US" sz="1200" dirty="0"/>
+          </a:p>
+        </p:txBody>
+      </p:sp>
+      <p:sp>
+        <p:nvSpPr>
+          <p:cNvPr id="38" name="Text 35"/>
+          <p:cNvSpPr txBox="1"/>
+          <p:nvPr/>
+        </p:nvSpPr>
+        <p:spPr>
+          <a:xfrm>
+            <a:off x="6553505" y="5488686"/>
+            <a:ext cx="3291840" cy="384048"/>
+          </a:xfrm>
+          <a:prstGeom prst="rect">
+            <a:avLst/>
+          </a:prstGeom>
+          <a:noFill/>
+          <a:ln/>
+        </p:spPr>
+        <p:txBody>
+          <a:bodyPr wrap="square" lIns="0" tIns="0" rIns="0" bIns="0" rtlCol="0" anchor="ctr"/>
+          <a:lstStyle/>
+          <a:p>
+            <a:pPr indent="0" marL="0">
+              <a:buNone/>
+            </a:pPr>
+            <a:r>
+              <a:rPr lang="en-US" sz="1800" dirty="0">
+                <a:solidFill>
+                  <a:srgbClr val="1D1D1F"/>
+                </a:solidFill>
+                <a:latin typeface="Pretendard SemiBold" pitchFamily="34" charset="0"/>
+                <a:ea typeface="Pretendard SemiBold" pitchFamily="34" charset="-122"/>
+                <a:cs typeface="Pretendard SemiBold" pitchFamily="34" charset="-120"/>
+              </a:rPr>
+              <a:t>장애물 통과 · 인게임 배경</a:t>
+            </a:r>
+            <a:endParaRPr lang="en-US" sz="1800" dirty="0"/>
+          </a:p>
+        </p:txBody>
+      </p:sp>
+      <p:sp>
+        <p:nvSpPr>
+          <p:cNvPr id="39" name="Text 36"/>
+          <p:cNvSpPr txBox="1"/>
+          <p:nvPr/>
+        </p:nvSpPr>
+        <p:spPr>
+          <a:xfrm>
+            <a:off x="9936785" y="5117783"/>
+            <a:ext cx="1371600" cy="411480"/>
+          </a:xfrm>
+          <a:prstGeom prst="rect">
+            <a:avLst/>
+          </a:prstGeom>
+          <a:noFill/>
+          <a:ln/>
+        </p:spPr>
+        <p:txBody>
+          <a:bodyPr wrap="square" lIns="0" tIns="0" rIns="0" bIns="0" rtlCol="0" anchor="ctr"/>
+          <a:lstStyle/>
+          <a:p>
+            <a:pPr algn="r" indent="0" marL="0">
+              <a:buNone/>
+            </a:pPr>
+            <a:r>
+              <a:rPr lang="en-US" sz="2400" dirty="0">
+                <a:solidFill>
+                  <a:srgbClr val="1D1D1F"/>
+                </a:solidFill>
+                <a:latin typeface="Pretendard SemiBold" pitchFamily="34" charset="0"/>
+                <a:ea typeface="Pretendard SemiBold" pitchFamily="34" charset="-122"/>
+                <a:cs typeface="Pretendard SemiBold" pitchFamily="34" charset="-120"/>
+              </a:rPr>
+              <a:t>3/3</a:t>
+            </a:r>
+            <a:endParaRPr lang="en-US" sz="2400" dirty="0"/>
+          </a:p>
+        </p:txBody>
+      </p:sp>
+      <p:sp>
+        <p:nvSpPr>
+          <p:cNvPr id="40" name="Text 37"/>
+          <p:cNvSpPr txBox="1"/>
+          <p:nvPr/>
+        </p:nvSpPr>
+        <p:spPr>
+          <a:xfrm>
+            <a:off x="9936785" y="5520118"/>
+            <a:ext cx="1371600" cy="201168"/>
+          </a:xfrm>
+          <a:prstGeom prst="rect">
+            <a:avLst/>
+          </a:prstGeom>
+          <a:noFill/>
+          <a:ln/>
+        </p:spPr>
+        <p:txBody>
+          <a:bodyPr wrap="square" lIns="0" tIns="0" rIns="0" bIns="0" rtlCol="0" anchor="ctr"/>
+          <a:lstStyle/>
+          <a:p>
+            <a:pPr algn="r" indent="0" marL="0">
+              <a:buNone/>
+            </a:pPr>
+            <a:r>
+              <a:rPr lang="en-US" sz="1100" dirty="0">
+                <a:solidFill>
+                  <a:srgbClr val="7A7A7A"/>
+                </a:solidFill>
+                <a:latin typeface="Pretendard" pitchFamily="34" charset="0"/>
+                <a:ea typeface="Pretendard" pitchFamily="34" charset="-122"/>
+                <a:cs typeface="Pretendard" pitchFamily="34" charset="-120"/>
+              </a:rPr>
+              <a:t>수정</a:t>
+            </a:r>
+            <a:endParaRPr lang="en-US" sz="1100" dirty="0"/>
+          </a:p>
+        </p:txBody>
+      </p:sp>
+      <p:sp>
+        <p:nvSpPr>
+          <p:cNvPr id="41" name="Shape 38"/>
+          <p:cNvSpPr/>
+          <p:nvPr/>
+        </p:nvSpPr>
+        <p:spPr>
+          <a:xfrm>
+            <a:off x="6279185" y="5752719"/>
+            <a:ext cx="5303520" cy="465201"/>
+          </a:xfrm>
+          <a:prstGeom prst="rect">
+            <a:avLst/>
+          </a:prstGeom>
+          <a:solidFill>
+            <a:srgbClr val="FFFFFF"/>
+          </a:solidFill>
+          <a:ln w="9525">
+            <a:solidFill>
+              <a:srgbClr val="E0E0E0"/>
+            </a:solidFill>
+            <a:prstDash val="solid"/>
+          </a:ln>
+        </p:spPr>
+      </p:sp>
+      <p:sp>
+        <p:nvSpPr>
+          <p:cNvPr id="42" name="Text 39"/>
+          <p:cNvSpPr txBox="1"/>
+          <p:nvPr/>
+        </p:nvSpPr>
+        <p:spPr>
+          <a:xfrm>
+            <a:off x="6553505" y="5844159"/>
+            <a:ext cx="3291840" cy="237744"/>
+          </a:xfrm>
+          <a:prstGeom prst="rect">
+            <a:avLst/>
+          </a:prstGeom>
+          <a:noFill/>
+          <a:ln/>
+        </p:spPr>
+        <p:txBody>
+          <a:bodyPr wrap="square" lIns="0" tIns="0" rIns="0" bIns="0" rtlCol="0" anchor="ctr"/>
+          <a:lstStyle/>
+          <a:p>
+            <a:pPr indent="0" marL="0">
+              <a:buNone/>
+            </a:pPr>
+            <a:r>
+              <a:rPr lang="en-US" sz="1200" b="1" dirty="0">
+                <a:solidFill>
+                  <a:srgbClr val="0066CC"/>
+                </a:solidFill>
+                <a:latin typeface="Pretendard SemiBold" pitchFamily="34" charset="0"/>
+                <a:ea typeface="Pretendard SemiBold" pitchFamily="34" charset="-122"/>
+                <a:cs typeface="Pretendard SemiBold" pitchFamily="34" charset="-120"/>
+              </a:rPr>
+              <a:t>R8  2026-09-25   ·   높음 0 · 중간 3 · 낮음 4</a:t>
+            </a:r>
+            <a:endParaRPr lang="en-US" sz="1200" dirty="0"/>
+          </a:p>
+        </p:txBody>
+      </p:sp>
+      <p:sp>
+        <p:nvSpPr>
+          <p:cNvPr id="43" name="Text 40"/>
+          <p:cNvSpPr txBox="1"/>
+          <p:nvPr/>
+        </p:nvSpPr>
+        <p:spPr>
+          <a:xfrm>
+            <a:off x="6553505" y="6081903"/>
+            <a:ext cx="3291840" cy="384048"/>
+          </a:xfrm>
+          <a:prstGeom prst="rect">
+            <a:avLst/>
+          </a:prstGeom>
+          <a:noFill/>
+          <a:ln/>
+        </p:spPr>
+        <p:txBody>
+          <a:bodyPr wrap="square" lIns="0" tIns="0" rIns="0" bIns="0" rtlCol="0" anchor="ctr"/>
+          <a:lstStyle/>
+          <a:p>
+            <a:pPr indent="0" marL="0">
+              <a:buNone/>
+            </a:pPr>
+            <a:r>
+              <a:rPr lang="en-US" sz="1800" dirty="0">
+                <a:solidFill>
+                  <a:srgbClr val="1D1D1F"/>
+                </a:solidFill>
+                <a:latin typeface="Pretendard SemiBold" pitchFamily="34" charset="0"/>
+                <a:ea typeface="Pretendard SemiBold" pitchFamily="34" charset="-122"/>
+                <a:cs typeface="Pretendard SemiBold" pitchFamily="34" charset="-120"/>
+              </a:rPr>
+              <a:t>3차 버그 점검</a:t>
+            </a:r>
+            <a:endParaRPr lang="en-US" sz="1800" dirty="0"/>
+          </a:p>
+        </p:txBody>
+      </p:sp>
+      <p:sp>
+        <p:nvSpPr>
+          <p:cNvPr id="44" name="Text 41"/>
+          <p:cNvSpPr txBox="1"/>
+          <p:nvPr/>
+        </p:nvSpPr>
+        <p:spPr>
+          <a:xfrm>
+            <a:off x="9936785" y="5711000"/>
+            <a:ext cx="1371600" cy="411480"/>
+          </a:xfrm>
+          <a:prstGeom prst="rect">
+            <a:avLst/>
+          </a:prstGeom>
+          <a:noFill/>
+          <a:ln/>
+        </p:spPr>
+        <p:txBody>
+          <a:bodyPr wrap="square" lIns="0" tIns="0" rIns="0" bIns="0" rtlCol="0" anchor="ctr"/>
+          <a:lstStyle/>
+          <a:p>
+            <a:pPr algn="r" indent="0" marL="0">
+              <a:buNone/>
+            </a:pPr>
+            <a:r>
+              <a:rPr lang="en-US" sz="2400" dirty="0">
+                <a:solidFill>
+                  <a:srgbClr val="1D1D1F"/>
+                </a:solidFill>
+                <a:latin typeface="Pretendard SemiBold" pitchFamily="34" charset="0"/>
+                <a:ea typeface="Pretendard SemiBold" pitchFamily="34" charset="-122"/>
+                <a:cs typeface="Pretendard SemiBold" pitchFamily="34" charset="-120"/>
+              </a:rPr>
+              <a:t>7/7</a:t>
+            </a:r>
+            <a:endParaRPr lang="en-US" sz="2400" dirty="0"/>
+          </a:p>
+        </p:txBody>
+      </p:sp>
+      <p:sp>
+        <p:nvSpPr>
+          <p:cNvPr id="45" name="Text 42"/>
+          <p:cNvSpPr txBox="1"/>
+          <p:nvPr/>
+        </p:nvSpPr>
+        <p:spPr>
+          <a:xfrm>
+            <a:off x="9936785" y="6113335"/>
+            <a:ext cx="1371600" cy="201168"/>
+          </a:xfrm>
+          <a:prstGeom prst="rect">
+            <a:avLst/>
+          </a:prstGeom>
+          <a:noFill/>
+          <a:ln/>
+        </p:spPr>
+        <p:txBody>
+          <a:bodyPr wrap="square" lIns="0" tIns="0" rIns="0" bIns="0" rtlCol="0" anchor="ctr"/>
+          <a:lstStyle/>
+          <a:p>
+            <a:pPr algn="r" indent="0" marL="0">
+              <a:buNone/>
+            </a:pPr>
+            <a:r>
+              <a:rPr lang="en-US" sz="1100" dirty="0">
+                <a:solidFill>
+                  <a:srgbClr val="7A7A7A"/>
+                </a:solidFill>
+                <a:latin typeface="Pretendard" pitchFamily="34" charset="0"/>
+                <a:ea typeface="Pretendard" pitchFamily="34" charset="-122"/>
+                <a:cs typeface="Pretendard" pitchFamily="34" charset="-120"/>
+              </a:rPr>
+              <a:t>수정</a:t>
+            </a:r>
+            <a:endParaRPr lang="en-US" sz="1100" dirty="0"/>
+          </a:p>
+        </p:txBody>
+      </p:sp>
+      <p:sp>
+        <p:nvSpPr>
+          <p:cNvPr id="46" name="Text 43"/>
           <p:cNvSpPr txBox="1"/>
           <p:nvPr/>
         </p:nvSpPr>
@@ -24226,7 +30810,7 @@
       </p:sp>
       <p:sp>
         <p:nvSpPr>
-          <p:cNvPr id="37" name="Text 34"/>
+          <p:cNvPr id="47" name="Text 44"/>
           <p:cNvSpPr txBox="1"/>
           <p:nvPr/>
         </p:nvSpPr>
@@ -24257,7 +30841,7 @@
                 <a:ea typeface="Pretendard" pitchFamily="34" charset="-122"/>
                 <a:cs typeface="Pretendard" pitchFamily="34" charset="-120"/>
               </a:rPr>
-              <a:t>03 / 21</a:t>
+              <a:t>03 / 25</a:t>
             </a:r>
             <a:endParaRPr lang="en-US" sz="1000" dirty="0"/>
           </a:p>
@@ -25164,7 +31748,7 @@
                 <a:ea typeface="Pretendard" pitchFamily="34" charset="-122"/>
                 <a:cs typeface="Pretendard" pitchFamily="34" charset="-120"/>
               </a:rPr>
-              <a:t>04 / 21</a:t>
+              <a:t>04 / 25</a:t>
             </a:r>
             <a:endParaRPr lang="en-US" sz="1000" dirty="0"/>
           </a:p>
@@ -27553,7 +34137,7 @@
                 <a:ea typeface="Pretendard" pitchFamily="34" charset="-122"/>
                 <a:cs typeface="Pretendard" pitchFamily="34" charset="-120"/>
               </a:rPr>
-              <a:t>05 / 21</a:t>
+              <a:t>05 / 25</a:t>
             </a:r>
             <a:endParaRPr lang="en-US" sz="1000" dirty="0"/>
           </a:p>
@@ -28304,7 +34888,7 @@
                 <a:ea typeface="Pretendard" pitchFamily="34" charset="-122"/>
                 <a:cs typeface="Pretendard" pitchFamily="34" charset="-120"/>
               </a:rPr>
-              <a:t>06 / 21</a:t>
+              <a:t>06 / 25</a:t>
             </a:r>
             <a:endParaRPr lang="en-US" sz="1000" dirty="0"/>
           </a:p>
@@ -30564,7 +37148,7 @@
                 <a:ea typeface="Pretendard" pitchFamily="34" charset="-122"/>
                 <a:cs typeface="Pretendard" pitchFamily="34" charset="-120"/>
               </a:rPr>
-              <a:t>07 / 21</a:t>
+              <a:t>07 / 25</a:t>
             </a:r>
             <a:endParaRPr lang="en-US" sz="1000" dirty="0"/>
           </a:p>
@@ -32824,7 +39408,7 @@
                 <a:ea typeface="Pretendard" pitchFamily="34" charset="-122"/>
                 <a:cs typeface="Pretendard" pitchFamily="34" charset="-120"/>
               </a:rPr>
-              <a:t>08 / 21</a:t>
+              <a:t>08 / 25</a:t>
             </a:r>
             <a:endParaRPr lang="en-US" sz="1000" dirty="0"/>
           </a:p>
@@ -33731,7 +40315,7 @@
                 <a:ea typeface="Pretendard" pitchFamily="34" charset="-122"/>
                 <a:cs typeface="Pretendard" pitchFamily="34" charset="-120"/>
               </a:rPr>
-              <a:t>09 / 21</a:t>
+              <a:t>09 / 25</a:t>
             </a:r>
             <a:endParaRPr lang="en-US" sz="1000" dirty="0"/>
           </a:p>

--- a/Docs/QA/물고기게임_QA리포트.pptx
+++ b/Docs/QA/물고기게임_QA리포트.pptx
@@ -30,9 +30,12 @@
     <p:sldId id="278" r:id="rId24"/>
     <p:sldId id="279" r:id="rId25"/>
     <p:sldId id="280" r:id="rId26"/>
+    <p:sldId id="281" r:id="rId27"/>
+    <p:sldId id="282" r:id="rId28"/>
+    <p:sldId id="283" r:id="rId29"/>
   </p:sldIdLst>
   <p:notesMasterIdLst>
-    <p:notesMasterId r:id="rId27"/>
+    <p:notesMasterId r:id="rId30"/>
   </p:notesMasterIdLst>
   <p:sldSz cx="12191695" cy="6858000"/>
   <p:notesSz cx="6858000" cy="12191695"/>
@@ -191,9 +194,9 @@
           </c:dLbls>
           <c:cat>
             <c:multiLvlStrRef>
-              <c:f>Sheet1!$A$2:$A$9</c:f>
+              <c:f>Sheet1!$A$2:$A$10</c:f>
               <c:multiLvlStrCache>
-                <c:ptCount val="8"/>
+                <c:ptCount val="9"/>
                 <c:lvl>
                   <c:pt idx="0">
                     <c:v>R1</c:v>
@@ -219,16 +222,19 @@
                   <c:pt idx="7">
                     <c:v>R8</c:v>
                   </c:pt>
+                  <c:pt idx="8">
+                    <c:v>R9</c:v>
+                  </c:pt>
                 </c:lvl>
               </c:multiLvlStrCache>
             </c:multiLvlStrRef>
           </c:cat>
           <c:val>
             <c:numRef>
-              <c:f>Sheet1!$B$2:$B$9</c:f>
+              <c:f>Sheet1!$B$2:$B$10</c:f>
               <c:numCache>
                 <c:formatCode>General</c:formatCode>
-                <c:ptCount val="8"/>
+                <c:ptCount val="9"/>
                 <c:pt idx="0">
                   <c:v>2</c:v>
                 </c:pt>
@@ -252,6 +258,9 @@
                 </c:pt>
                 <c:pt idx="7">
                   <c:v>0</c:v>
+                </c:pt>
+                <c:pt idx="8">
+                  <c:v>1</c:v>
                 </c:pt>
               </c:numCache>
             </c:numRef>
@@ -305,9 +314,9 @@
           </c:dLbls>
           <c:cat>
             <c:multiLvlStrRef>
-              <c:f>Sheet1!$A$2:$A$9</c:f>
+              <c:f>Sheet1!$A$2:$A$10</c:f>
               <c:multiLvlStrCache>
-                <c:ptCount val="8"/>
+                <c:ptCount val="9"/>
                 <c:lvl>
                   <c:pt idx="0">
                     <c:v>R1</c:v>
@@ -333,16 +342,19 @@
                   <c:pt idx="7">
                     <c:v>R8</c:v>
                   </c:pt>
+                  <c:pt idx="8">
+                    <c:v>R9</c:v>
+                  </c:pt>
                 </c:lvl>
               </c:multiLvlStrCache>
             </c:multiLvlStrRef>
           </c:cat>
           <c:val>
             <c:numRef>
-              <c:f>Sheet1!$C$2:$C$9</c:f>
+              <c:f>Sheet1!$C$2:$C$10</c:f>
               <c:numCache>
                 <c:formatCode>General</c:formatCode>
-                <c:ptCount val="8"/>
+                <c:ptCount val="9"/>
                 <c:pt idx="0">
                   <c:v>4</c:v>
                 </c:pt>
@@ -366,6 +378,9 @@
                 </c:pt>
                 <c:pt idx="7">
                   <c:v>3</c:v>
+                </c:pt>
+                <c:pt idx="8">
+                  <c:v>1</c:v>
                 </c:pt>
               </c:numCache>
             </c:numRef>
@@ -419,9 +434,9 @@
           </c:dLbls>
           <c:cat>
             <c:multiLvlStrRef>
-              <c:f>Sheet1!$A$2:$A$9</c:f>
+              <c:f>Sheet1!$A$2:$A$10</c:f>
               <c:multiLvlStrCache>
-                <c:ptCount val="8"/>
+                <c:ptCount val="9"/>
                 <c:lvl>
                   <c:pt idx="0">
                     <c:v>R1</c:v>
@@ -447,16 +462,19 @@
                   <c:pt idx="7">
                     <c:v>R8</c:v>
                   </c:pt>
+                  <c:pt idx="8">
+                    <c:v>R9</c:v>
+                  </c:pt>
                 </c:lvl>
               </c:multiLvlStrCache>
             </c:multiLvlStrRef>
           </c:cat>
           <c:val>
             <c:numRef>
-              <c:f>Sheet1!$D$2:$D$9</c:f>
+              <c:f>Sheet1!$D$2:$D$10</c:f>
               <c:numCache>
                 <c:formatCode>General</c:formatCode>
-                <c:ptCount val="8"/>
+                <c:ptCount val="9"/>
                 <c:pt idx="0">
                   <c:v>0</c:v>
                 </c:pt>
@@ -480,6 +498,9 @@
                 </c:pt>
                 <c:pt idx="7">
                   <c:v>4</c:v>
+                </c:pt>
+                <c:pt idx="8">
+                  <c:v>1</c:v>
                 </c:pt>
               </c:numCache>
             </c:numRef>
@@ -2984,6 +3005,270 @@
             <a:fld id="{F7021451-1387-4CA6-816F-3879F97B5CBC}" type="slidenum">
               <a:rPr lang="en-US"/>
               <a:t>25</a:t>
+            </a:fld>
+            <a:endParaRPr lang="en-US"/>
+          </a:p>
+        </p:txBody>
+      </p:sp>
+    </p:spTree>
+    <p:extLst>
+      <p:ext uri="{BB962C8B-B14F-4D97-AF65-F5344CB8AC3E}">
+        <p14:creationId xmlns:p14="http://schemas.microsoft.com/office/powerpoint/2010/main" val="1024086991"/>
+      </p:ext>
+    </p:extLst>
+  </p:cSld>
+  <p:clrMapOvr>
+    <a:masterClrMapping/>
+  </p:clrMapOvr>
+</p:notes>
+</file>
+
+<file path=ppt/notesSlides/notesSlide26.xml><?xml version="1.0" encoding="utf-8"?>
+<p:notes xmlns:a="http://schemas.openxmlformats.org/drawingml/2006/main" xmlns:r="http://schemas.openxmlformats.org/officeDocument/2006/relationships" xmlns:p="http://schemas.openxmlformats.org/presentationml/2006/main">
+  <p:cSld>
+    <p:spTree>
+      <p:nvGrpSpPr>
+        <p:cNvPr id="1" name=""/>
+        <p:cNvGrpSpPr/>
+        <p:nvPr/>
+      </p:nvGrpSpPr>
+      <p:grpSpPr>
+        <a:xfrm>
+          <a:off x="0" y="0"/>
+          <a:ext cx="0" cy="0"/>
+          <a:chOff x="0" y="0"/>
+          <a:chExt cx="0" cy="0"/>
+        </a:xfrm>
+      </p:grpSpPr>
+      <p:sp>
+        <p:nvSpPr>
+          <p:cNvPr id="2" name="Slide Image Placeholder 1"/>
+          <p:cNvSpPr>
+            <a:spLocks noGrp="1" noRot="1" noChangeAspect="1"/>
+          </p:cNvSpPr>
+          <p:nvPr>
+            <p:ph type="sldImg"/>
+          </p:nvPr>
+        </p:nvSpPr>
+        <p:spPr/>
+      </p:sp>
+      <p:sp>
+        <p:nvSpPr>
+          <p:cNvPr id="3" name="Notes Placeholder 2"/>
+          <p:cNvSpPr>
+            <a:spLocks noGrp="1"/>
+          </p:cNvSpPr>
+          <p:nvPr>
+            <p:ph type="body" idx="1"/>
+          </p:nvPr>
+        </p:nvSpPr>
+        <p:spPr/>
+        <p:txBody>
+          <a:bodyPr/>
+          <a:lstStyle/>
+          <a:p>
+            <a:r>
+              <a:rPr lang="en-US" dirty="0"/>
+              <a:t/>
+            </a:r>
+            <a:endParaRPr lang="en-US" dirty="0"/>
+          </a:p>
+        </p:txBody>
+      </p:sp>
+      <p:sp>
+        <p:nvSpPr>
+          <p:cNvPr id="4" name="Slide Number Placeholder 3"/>
+          <p:cNvSpPr>
+            <a:spLocks noGrp="1"/>
+          </p:cNvSpPr>
+          <p:nvPr>
+            <p:ph type="sldNum" sz="quarter" idx="10"/>
+          </p:nvPr>
+        </p:nvSpPr>
+        <p:spPr/>
+        <p:txBody>
+          <a:bodyPr/>
+          <a:lstStyle/>
+          <a:p>
+            <a:fld id="{F7021451-1387-4CA6-816F-3879F97B5CBC}" type="slidenum">
+              <a:rPr lang="en-US"/>
+              <a:t>26</a:t>
+            </a:fld>
+            <a:endParaRPr lang="en-US"/>
+          </a:p>
+        </p:txBody>
+      </p:sp>
+    </p:spTree>
+    <p:extLst>
+      <p:ext uri="{BB962C8B-B14F-4D97-AF65-F5344CB8AC3E}">
+        <p14:creationId xmlns:p14="http://schemas.microsoft.com/office/powerpoint/2010/main" val="1024086991"/>
+      </p:ext>
+    </p:extLst>
+  </p:cSld>
+  <p:clrMapOvr>
+    <a:masterClrMapping/>
+  </p:clrMapOvr>
+</p:notes>
+</file>
+
+<file path=ppt/notesSlides/notesSlide27.xml><?xml version="1.0" encoding="utf-8"?>
+<p:notes xmlns:a="http://schemas.openxmlformats.org/drawingml/2006/main" xmlns:r="http://schemas.openxmlformats.org/officeDocument/2006/relationships" xmlns:p="http://schemas.openxmlformats.org/presentationml/2006/main">
+  <p:cSld>
+    <p:spTree>
+      <p:nvGrpSpPr>
+        <p:cNvPr id="1" name=""/>
+        <p:cNvGrpSpPr/>
+        <p:nvPr/>
+      </p:nvGrpSpPr>
+      <p:grpSpPr>
+        <a:xfrm>
+          <a:off x="0" y="0"/>
+          <a:ext cx="0" cy="0"/>
+          <a:chOff x="0" y="0"/>
+          <a:chExt cx="0" cy="0"/>
+        </a:xfrm>
+      </p:grpSpPr>
+      <p:sp>
+        <p:nvSpPr>
+          <p:cNvPr id="2" name="Slide Image Placeholder 1"/>
+          <p:cNvSpPr>
+            <a:spLocks noGrp="1" noRot="1" noChangeAspect="1"/>
+          </p:cNvSpPr>
+          <p:nvPr>
+            <p:ph type="sldImg"/>
+          </p:nvPr>
+        </p:nvSpPr>
+        <p:spPr/>
+      </p:sp>
+      <p:sp>
+        <p:nvSpPr>
+          <p:cNvPr id="3" name="Notes Placeholder 2"/>
+          <p:cNvSpPr>
+            <a:spLocks noGrp="1"/>
+          </p:cNvSpPr>
+          <p:nvPr>
+            <p:ph type="body" idx="1"/>
+          </p:nvPr>
+        </p:nvSpPr>
+        <p:spPr/>
+        <p:txBody>
+          <a:bodyPr/>
+          <a:lstStyle/>
+          <a:p>
+            <a:r>
+              <a:rPr lang="en-US" dirty="0"/>
+              <a:t/>
+            </a:r>
+            <a:endParaRPr lang="en-US" dirty="0"/>
+          </a:p>
+        </p:txBody>
+      </p:sp>
+      <p:sp>
+        <p:nvSpPr>
+          <p:cNvPr id="4" name="Slide Number Placeholder 3"/>
+          <p:cNvSpPr>
+            <a:spLocks noGrp="1"/>
+          </p:cNvSpPr>
+          <p:nvPr>
+            <p:ph type="sldNum" sz="quarter" idx="10"/>
+          </p:nvPr>
+        </p:nvSpPr>
+        <p:spPr/>
+        <p:txBody>
+          <a:bodyPr/>
+          <a:lstStyle/>
+          <a:p>
+            <a:fld id="{F7021451-1387-4CA6-816F-3879F97B5CBC}" type="slidenum">
+              <a:rPr lang="en-US"/>
+              <a:t>27</a:t>
+            </a:fld>
+            <a:endParaRPr lang="en-US"/>
+          </a:p>
+        </p:txBody>
+      </p:sp>
+    </p:spTree>
+    <p:extLst>
+      <p:ext uri="{BB962C8B-B14F-4D97-AF65-F5344CB8AC3E}">
+        <p14:creationId xmlns:p14="http://schemas.microsoft.com/office/powerpoint/2010/main" val="1024086991"/>
+      </p:ext>
+    </p:extLst>
+  </p:cSld>
+  <p:clrMapOvr>
+    <a:masterClrMapping/>
+  </p:clrMapOvr>
+</p:notes>
+</file>
+
+<file path=ppt/notesSlides/notesSlide28.xml><?xml version="1.0" encoding="utf-8"?>
+<p:notes xmlns:a="http://schemas.openxmlformats.org/drawingml/2006/main" xmlns:r="http://schemas.openxmlformats.org/officeDocument/2006/relationships" xmlns:p="http://schemas.openxmlformats.org/presentationml/2006/main">
+  <p:cSld>
+    <p:spTree>
+      <p:nvGrpSpPr>
+        <p:cNvPr id="1" name=""/>
+        <p:cNvGrpSpPr/>
+        <p:nvPr/>
+      </p:nvGrpSpPr>
+      <p:grpSpPr>
+        <a:xfrm>
+          <a:off x="0" y="0"/>
+          <a:ext cx="0" cy="0"/>
+          <a:chOff x="0" y="0"/>
+          <a:chExt cx="0" cy="0"/>
+        </a:xfrm>
+      </p:grpSpPr>
+      <p:sp>
+        <p:nvSpPr>
+          <p:cNvPr id="2" name="Slide Image Placeholder 1"/>
+          <p:cNvSpPr>
+            <a:spLocks noGrp="1" noRot="1" noChangeAspect="1"/>
+          </p:cNvSpPr>
+          <p:nvPr>
+            <p:ph type="sldImg"/>
+          </p:nvPr>
+        </p:nvSpPr>
+        <p:spPr/>
+      </p:sp>
+      <p:sp>
+        <p:nvSpPr>
+          <p:cNvPr id="3" name="Notes Placeholder 2"/>
+          <p:cNvSpPr>
+            <a:spLocks noGrp="1"/>
+          </p:cNvSpPr>
+          <p:nvPr>
+            <p:ph type="body" idx="1"/>
+          </p:nvPr>
+        </p:nvSpPr>
+        <p:spPr/>
+        <p:txBody>
+          <a:bodyPr/>
+          <a:lstStyle/>
+          <a:p>
+            <a:r>
+              <a:rPr lang="en-US" dirty="0"/>
+              <a:t/>
+            </a:r>
+            <a:endParaRPr lang="en-US" dirty="0"/>
+          </a:p>
+        </p:txBody>
+      </p:sp>
+      <p:sp>
+        <p:nvSpPr>
+          <p:cNvPr id="4" name="Slide Number Placeholder 3"/>
+          <p:cNvSpPr>
+            <a:spLocks noGrp="1"/>
+          </p:cNvSpPr>
+          <p:nvPr>
+            <p:ph type="sldNum" sz="quarter" idx="10"/>
+          </p:nvPr>
+        </p:nvSpPr>
+        <p:spPr/>
+        <p:txBody>
+          <a:bodyPr/>
+          <a:lstStyle/>
+          <a:p>
+            <a:fld id="{F7021451-1387-4CA6-816F-3879F97B5CBC}" type="slidenum">
+              <a:rPr lang="en-US"/>
+              <a:t>28</a:t>
             </a:fld>
             <a:endParaRPr lang="en-US"/>
           </a:p>
@@ -4122,7 +4407,7 @@
                 <a:ea typeface="Pretendard" pitchFamily="34" charset="-122"/>
                 <a:cs typeface="Pretendard" pitchFamily="34" charset="-120"/>
               </a:rPr>
-              <a:t>업데이트 2026-09-25   ·   QA 8회   ·   이슈 61건</a:t>
+              <a:t>업데이트 2026-09-29   ·   QA 9회   ·   이슈 64건</a:t>
             </a:r>
             <a:endParaRPr lang="en-US" sz="1300" dirty="0"/>
           </a:p>
@@ -6382,7 +6667,7 @@
                 <a:ea typeface="Pretendard" pitchFamily="34" charset="-122"/>
                 <a:cs typeface="Pretendard" pitchFamily="34" charset="-120"/>
               </a:rPr>
-              <a:t>10 / 25</a:t>
+              <a:t>10 / 28</a:t>
             </a:r>
             <a:endParaRPr lang="en-US" sz="1000" dirty="0"/>
           </a:p>
@@ -7133,7 +7418,7 @@
                 <a:ea typeface="Pretendard" pitchFamily="34" charset="-122"/>
                 <a:cs typeface="Pretendard" pitchFamily="34" charset="-120"/>
               </a:rPr>
-              <a:t>11 / 25</a:t>
+              <a:t>11 / 28</a:t>
             </a:r>
             <a:endParaRPr lang="en-US" sz="1000" dirty="0"/>
           </a:p>
@@ -8889,7 +9174,7 @@
                 <a:ea typeface="Pretendard" pitchFamily="34" charset="-122"/>
                 <a:cs typeface="Pretendard" pitchFamily="34" charset="-120"/>
               </a:rPr>
-              <a:t>12 / 25</a:t>
+              <a:t>12 / 28</a:t>
             </a:r>
             <a:endParaRPr lang="en-US" sz="1000" dirty="0"/>
           </a:p>
@@ -10897,7 +11182,7 @@
                 <a:ea typeface="Pretendard" pitchFamily="34" charset="-122"/>
                 <a:cs typeface="Pretendard" pitchFamily="34" charset="-120"/>
               </a:rPr>
-              <a:t>13 / 25</a:t>
+              <a:t>13 / 28</a:t>
             </a:r>
             <a:endParaRPr lang="en-US" sz="1000" dirty="0"/>
           </a:p>
@@ -11312,7 +11597,7 @@
                 <a:ea typeface="Pretendard" pitchFamily="34" charset="-122"/>
                 <a:cs typeface="Pretendard" pitchFamily="34" charset="-120"/>
               </a:rPr>
-              <a:t>14 / 25</a:t>
+              <a:t>14 / 28</a:t>
             </a:r>
             <a:endParaRPr lang="en-US" sz="1000" dirty="0"/>
           </a:p>
@@ -12219,7 +12504,7 @@
                 <a:ea typeface="Pretendard" pitchFamily="34" charset="-122"/>
                 <a:cs typeface="Pretendard" pitchFamily="34" charset="-120"/>
               </a:rPr>
-              <a:t>15 / 25</a:t>
+              <a:t>15 / 28</a:t>
             </a:r>
             <a:endParaRPr lang="en-US" sz="1000" dirty="0"/>
           </a:p>
@@ -14227,7 +14512,7 @@
                 <a:ea typeface="Pretendard" pitchFamily="34" charset="-122"/>
                 <a:cs typeface="Pretendard" pitchFamily="34" charset="-120"/>
               </a:rPr>
-              <a:t>16 / 25</a:t>
+              <a:t>16 / 28</a:t>
             </a:r>
             <a:endParaRPr lang="en-US" sz="1000" dirty="0"/>
           </a:p>
@@ -15134,7 +15419,7 @@
                 <a:ea typeface="Pretendard" pitchFamily="34" charset="-122"/>
                 <a:cs typeface="Pretendard" pitchFamily="34" charset="-120"/>
               </a:rPr>
-              <a:t>17 / 25</a:t>
+              <a:t>17 / 28</a:t>
             </a:r>
             <a:endParaRPr lang="en-US" sz="1000" dirty="0"/>
           </a:p>
@@ -16386,7 +16671,7 @@
                 <a:ea typeface="Pretendard" pitchFamily="34" charset="-122"/>
                 <a:cs typeface="Pretendard" pitchFamily="34" charset="-120"/>
               </a:rPr>
-              <a:t>18 / 25</a:t>
+              <a:t>18 / 28</a:t>
             </a:r>
             <a:endParaRPr lang="en-US" sz="1000" dirty="0"/>
           </a:p>
@@ -18271,7 +18556,7 @@
                 <a:ea typeface="Pretendard" pitchFamily="34" charset="-122"/>
                 <a:cs typeface="Pretendard" pitchFamily="34" charset="-120"/>
               </a:rPr>
-              <a:t>19 / 25</a:t>
+              <a:t>19 / 28</a:t>
             </a:r>
             <a:endParaRPr lang="en-US" sz="1000" dirty="0"/>
           </a:p>
@@ -19023,7 +19308,7 @@
                 <a:ea typeface="Pretendard SemiBold" pitchFamily="34" charset="-122"/>
                 <a:cs typeface="Pretendard SemiBold" pitchFamily="34" charset="-120"/>
               </a:rPr>
-              <a:t>8회</a:t>
+              <a:t>9회</a:t>
             </a:r>
             <a:endParaRPr lang="en-US" sz="2800" dirty="0"/>
           </a:p>
@@ -19124,7 +19409,7 @@
                 <a:ea typeface="Pretendard SemiBold" pitchFamily="34" charset="-122"/>
                 <a:cs typeface="Pretendard SemiBold" pitchFamily="34" charset="-120"/>
               </a:rPr>
-              <a:t>61건</a:t>
+              <a:t>64건</a:t>
             </a:r>
             <a:endParaRPr lang="en-US" sz="2800" dirty="0"/>
           </a:p>
@@ -19225,7 +19510,7 @@
                 <a:ea typeface="Pretendard SemiBold" pitchFamily="34" charset="-122"/>
                 <a:cs typeface="Pretendard SemiBold" pitchFamily="34" charset="-120"/>
               </a:rPr>
-              <a:t>61건</a:t>
+              <a:t>64건</a:t>
             </a:r>
             <a:endParaRPr lang="en-US" sz="2800" dirty="0"/>
           </a:p>
@@ -19326,7 +19611,7 @@
                 <a:ea typeface="Pretendard SemiBold" pitchFamily="34" charset="-122"/>
                 <a:cs typeface="Pretendard SemiBold" pitchFamily="34" charset="-120"/>
               </a:rPr>
-              <a:t>8건</a:t>
+              <a:t>10건</a:t>
             </a:r>
             <a:endParaRPr lang="en-US" sz="2800" dirty="0"/>
           </a:p>
@@ -19443,7 +19728,7 @@
                 <a:ea typeface="Pretendard" pitchFamily="34" charset="-122"/>
                 <a:cs typeface="Pretendard" pitchFamily="34" charset="-120"/>
               </a:rPr>
-              <a:t>02 / 25</a:t>
+              <a:t>02 / 28</a:t>
             </a:r>
             <a:endParaRPr lang="en-US" sz="1000" dirty="0"/>
           </a:p>
@@ -20350,7 +20635,7 @@
                 <a:ea typeface="Pretendard" pitchFamily="34" charset="-122"/>
                 <a:cs typeface="Pretendard" pitchFamily="34" charset="-120"/>
               </a:rPr>
-              <a:t>20 / 25</a:t>
+              <a:t>20 / 28</a:t>
             </a:r>
             <a:endParaRPr lang="en-US" sz="1000" dirty="0"/>
           </a:p>
@@ -21983,7 +22268,7 @@
                 <a:ea typeface="Pretendard" pitchFamily="34" charset="-122"/>
                 <a:cs typeface="Pretendard" pitchFamily="34" charset="-120"/>
               </a:rPr>
-              <a:t>21 / 25</a:t>
+              <a:t>21 / 28</a:t>
             </a:r>
             <a:endParaRPr lang="en-US" sz="1000" dirty="0"/>
           </a:p>
@@ -22890,7 +23175,7 @@
                 <a:ea typeface="Pretendard" pitchFamily="34" charset="-122"/>
                 <a:cs typeface="Pretendard" pitchFamily="34" charset="-120"/>
               </a:rPr>
-              <a:t>22 / 25</a:t>
+              <a:t>22 / 28</a:t>
             </a:r>
             <a:endParaRPr lang="en-US" sz="1000" dirty="0"/>
           </a:p>
@@ -25150,7 +25435,7 @@
                 <a:ea typeface="Pretendard" pitchFamily="34" charset="-122"/>
                 <a:cs typeface="Pretendard" pitchFamily="34" charset="-120"/>
               </a:rPr>
-              <a:t>23 / 25</a:t>
+              <a:t>23 / 28</a:t>
             </a:r>
             <a:endParaRPr lang="en-US" sz="1000" dirty="0"/>
           </a:p>
@@ -25167,6 +25452,2546 @@
 <file path=ppt/slides/slide24.xml><?xml version="1.0" encoding="utf-8"?>
 <p:sld xmlns:a="http://schemas.openxmlformats.org/drawingml/2006/main" xmlns:r="http://schemas.openxmlformats.org/officeDocument/2006/relationships" xmlns:p="http://schemas.openxmlformats.org/presentationml/2006/main">
   <p:cSld name="Slide 24">
+    <p:bg>
+      <p:bgPr>
+        <a:solidFill>
+          <a:srgbClr val="272729"/>
+        </a:solidFill>
+      </p:bgPr>
+    </p:bg>
+    <p:spTree>
+      <p:nvGrpSpPr>
+        <p:cNvPr id="1" name=""/>
+        <p:cNvGrpSpPr/>
+        <p:nvPr/>
+      </p:nvGrpSpPr>
+      <p:grpSpPr>
+        <a:xfrm>
+          <a:off x="0" y="0"/>
+          <a:ext cx="0" cy="0"/>
+          <a:chOff x="0" y="0"/>
+          <a:chExt cx="0" cy="0"/>
+        </a:xfrm>
+      </p:grpSpPr>
+      <p:sp>
+        <p:nvSpPr>
+          <p:cNvPr id="2" name="Text 0"/>
+          <p:cNvSpPr txBox="1"/>
+          <p:nvPr/>
+        </p:nvSpPr>
+        <p:spPr>
+          <a:xfrm>
+            <a:off x="609905" y="320040"/>
+            <a:ext cx="10972800" cy="228600"/>
+          </a:xfrm>
+          <a:prstGeom prst="rect">
+            <a:avLst/>
+          </a:prstGeom>
+          <a:noFill/>
+          <a:ln/>
+        </p:spPr>
+        <p:txBody>
+          <a:bodyPr wrap="square" lIns="0" tIns="0" rIns="0" bIns="0" rtlCol="0" anchor="t"/>
+          <a:lstStyle/>
+          <a:p>
+            <a:pPr indent="0" marL="0">
+              <a:buNone/>
+            </a:pPr>
+            <a:r>
+              <a:rPr lang="en-US" sz="1100" b="1" spc="200" kern="0" dirty="0">
+                <a:solidFill>
+                  <a:srgbClr val="2997FF"/>
+                </a:solidFill>
+                <a:latin typeface="Pretendard SemiBold" pitchFamily="34" charset="0"/>
+                <a:ea typeface="Pretendard SemiBold" pitchFamily="34" charset="-122"/>
+                <a:cs typeface="Pretendard SemiBold" pitchFamily="34" charset="-120"/>
+              </a:rPr>
+              <a:t>R9  ·  2026-09-29</a:t>
+            </a:r>
+            <a:endParaRPr lang="en-US" sz="1100" dirty="0"/>
+          </a:p>
+        </p:txBody>
+      </p:sp>
+      <p:sp>
+        <p:nvSpPr>
+          <p:cNvPr id="3" name="Text 1"/>
+          <p:cNvSpPr txBox="1"/>
+          <p:nvPr/>
+        </p:nvSpPr>
+        <p:spPr>
+          <a:xfrm>
+            <a:off x="609905" y="594360"/>
+            <a:ext cx="10972800" cy="777240"/>
+          </a:xfrm>
+          <a:prstGeom prst="rect">
+            <a:avLst/>
+          </a:prstGeom>
+          <a:noFill/>
+          <a:ln/>
+        </p:spPr>
+        <p:txBody>
+          <a:bodyPr wrap="square" lIns="0" tIns="0" rIns="0" bIns="0" rtlCol="0" anchor="t"/>
+          <a:lstStyle/>
+          <a:p>
+            <a:pPr indent="0" marL="0">
+              <a:buNone/>
+            </a:pPr>
+            <a:r>
+              <a:rPr lang="en-US" sz="4000" dirty="0">
+                <a:solidFill>
+                  <a:srgbClr val="FFFFFF"/>
+                </a:solidFill>
+                <a:latin typeface="Pretendard SemiBold" pitchFamily="34" charset="0"/>
+                <a:ea typeface="Pretendard SemiBold" pitchFamily="34" charset="-122"/>
+                <a:cs typeface="Pretendard SemiBold" pitchFamily="34" charset="-120"/>
+              </a:rPr>
+              <a:t>스킬트리 메인 화면 개편 · 칸별 고정 가격</a:t>
+            </a:r>
+            <a:endParaRPr lang="en-US" sz="4000" dirty="0"/>
+          </a:p>
+        </p:txBody>
+      </p:sp>
+      <p:sp>
+        <p:nvSpPr>
+          <p:cNvPr id="4" name="Shape 2"/>
+          <p:cNvSpPr/>
+          <p:nvPr/>
+        </p:nvSpPr>
+        <p:spPr>
+          <a:xfrm>
+            <a:off x="609905" y="1417320"/>
+            <a:ext cx="10972800" cy="0"/>
+          </a:xfrm>
+          <a:prstGeom prst="line">
+            <a:avLst/>
+          </a:prstGeom>
+          <a:noFill/>
+          <a:ln w="9525">
+            <a:solidFill>
+              <a:srgbClr val="3A3A3C"/>
+            </a:solidFill>
+            <a:prstDash val="solid"/>
+          </a:ln>
+        </p:spPr>
+      </p:sp>
+      <p:sp>
+        <p:nvSpPr>
+          <p:cNvPr id="5" name="Text 3"/>
+          <p:cNvSpPr txBox="1"/>
+          <p:nvPr/>
+        </p:nvSpPr>
+        <p:spPr>
+          <a:xfrm>
+            <a:off x="609905" y="1691640"/>
+            <a:ext cx="1097280" cy="320040"/>
+          </a:xfrm>
+          <a:prstGeom prst="rect">
+            <a:avLst/>
+          </a:prstGeom>
+          <a:noFill/>
+          <a:ln/>
+        </p:spPr>
+        <p:txBody>
+          <a:bodyPr wrap="square" lIns="0" tIns="0" rIns="0" bIns="0" rtlCol="0" anchor="ctr"/>
+          <a:lstStyle/>
+          <a:p>
+            <a:pPr indent="0" marL="0">
+              <a:buNone/>
+            </a:pPr>
+            <a:r>
+              <a:rPr lang="en-US" sz="1300" dirty="0">
+                <a:solidFill>
+                  <a:srgbClr val="8E8E93"/>
+                </a:solidFill>
+                <a:latin typeface="Pretendard SemiBold" pitchFamily="34" charset="0"/>
+                <a:ea typeface="Pretendard SemiBold" pitchFamily="34" charset="-122"/>
+                <a:cs typeface="Pretendard SemiBold" pitchFamily="34" charset="-120"/>
+              </a:rPr>
+              <a:t>계기</a:t>
+            </a:r>
+            <a:endParaRPr lang="en-US" sz="1300" dirty="0"/>
+          </a:p>
+        </p:txBody>
+      </p:sp>
+      <p:sp>
+        <p:nvSpPr>
+          <p:cNvPr id="6" name="Text 4"/>
+          <p:cNvSpPr txBox="1"/>
+          <p:nvPr/>
+        </p:nvSpPr>
+        <p:spPr>
+          <a:xfrm>
+            <a:off x="1707185" y="1691640"/>
+            <a:ext cx="9875520" cy="320040"/>
+          </a:xfrm>
+          <a:prstGeom prst="rect">
+            <a:avLst/>
+          </a:prstGeom>
+          <a:noFill/>
+          <a:ln/>
+        </p:spPr>
+        <p:txBody>
+          <a:bodyPr wrap="square" lIns="0" tIns="0" rIns="0" bIns="0" rtlCol="0" anchor="ctr"/>
+          <a:lstStyle/>
+          <a:p>
+            <a:pPr indent="0" marL="0">
+              <a:buNone/>
+            </a:pPr>
+            <a:r>
+              <a:rPr lang="en-US" sz="1800" dirty="0">
+                <a:solidFill>
+                  <a:srgbClr val="FFFFFF"/>
+                </a:solidFill>
+                <a:latin typeface="Pretendard" pitchFamily="34" charset="0"/>
+                <a:ea typeface="Pretendard" pitchFamily="34" charset="-122"/>
+                <a:cs typeface="Pretendard" pitchFamily="34" charset="-120"/>
+              </a:rPr>
+              <a:t>트리를 화면 전체로, UI 정리, 툴팁, 다음 칸만 보이기, 찍을 때 가격 상승 제거 요청</a:t>
+            </a:r>
+            <a:endParaRPr lang="en-US" sz="1800" dirty="0"/>
+          </a:p>
+        </p:txBody>
+      </p:sp>
+      <p:sp>
+        <p:nvSpPr>
+          <p:cNvPr id="7" name="Text 5"/>
+          <p:cNvSpPr txBox="1"/>
+          <p:nvPr/>
+        </p:nvSpPr>
+        <p:spPr>
+          <a:xfrm>
+            <a:off x="609905" y="2148840"/>
+            <a:ext cx="1097280" cy="548640"/>
+          </a:xfrm>
+          <a:prstGeom prst="rect">
+            <a:avLst/>
+          </a:prstGeom>
+          <a:noFill/>
+          <a:ln/>
+        </p:spPr>
+        <p:txBody>
+          <a:bodyPr wrap="square" lIns="0" tIns="0" rIns="0" bIns="0" rtlCol="0" anchor="t"/>
+          <a:lstStyle/>
+          <a:p>
+            <a:pPr indent="0" marL="0">
+              <a:buNone/>
+            </a:pPr>
+            <a:r>
+              <a:rPr lang="en-US" sz="1300" dirty="0">
+                <a:solidFill>
+                  <a:srgbClr val="8E8E93"/>
+                </a:solidFill>
+                <a:latin typeface="Pretendard SemiBold" pitchFamily="34" charset="0"/>
+                <a:ea typeface="Pretendard SemiBold" pitchFamily="34" charset="-122"/>
+                <a:cs typeface="Pretendard SemiBold" pitchFamily="34" charset="-120"/>
+              </a:rPr>
+              <a:t>방법</a:t>
+            </a:r>
+            <a:endParaRPr lang="en-US" sz="1300" dirty="0"/>
+          </a:p>
+        </p:txBody>
+      </p:sp>
+      <p:sp>
+        <p:nvSpPr>
+          <p:cNvPr id="8" name="Text 6"/>
+          <p:cNvSpPr txBox="1"/>
+          <p:nvPr/>
+        </p:nvSpPr>
+        <p:spPr>
+          <a:xfrm>
+            <a:off x="1707185" y="2103120"/>
+            <a:ext cx="9875520" cy="731520"/>
+          </a:xfrm>
+          <a:prstGeom prst="rect">
+            <a:avLst/>
+          </a:prstGeom>
+          <a:noFill/>
+          <a:ln/>
+        </p:spPr>
+        <p:txBody>
+          <a:bodyPr wrap="square" lIns="0" tIns="0" rIns="0" bIns="0" rtlCol="0" anchor="t"/>
+          <a:lstStyle/>
+          <a:p>
+            <a:pPr indent="0" marL="0">
+              <a:lnSpc>
+                <a:spcPct val="130000"/>
+              </a:lnSpc>
+              <a:buNone/>
+            </a:pPr>
+            <a:r>
+              <a:rPr lang="en-US" sz="1800" dirty="0">
+                <a:solidFill>
+                  <a:srgbClr val="CCCCCC"/>
+                </a:solidFill>
+                <a:latin typeface="Pretendard" pitchFamily="34" charset="0"/>
+                <a:ea typeface="Pretendard" pitchFamily="34" charset="-122"/>
+                <a:cs typeface="Pretendard" pitchFamily="34" charset="-120"/>
+              </a:rPr>
+              <a:t>밸런스 시뮬레이터로 가격 방식 비교 (BFS 순번 vs 깊이 × 배율, 25회) + 정적 검사</a:t>
+            </a:r>
+            <a:endParaRPr lang="en-US" sz="1800" dirty="0"/>
+          </a:p>
+        </p:txBody>
+      </p:sp>
+      <p:sp>
+        <p:nvSpPr>
+          <p:cNvPr id="9" name="Text 7"/>
+          <p:cNvSpPr txBox="1"/>
+          <p:nvPr/>
+        </p:nvSpPr>
+        <p:spPr>
+          <a:xfrm>
+            <a:off x="609905" y="4846320"/>
+            <a:ext cx="2651760" cy="502920"/>
+          </a:xfrm>
+          <a:prstGeom prst="rect">
+            <a:avLst/>
+          </a:prstGeom>
+          <a:noFill/>
+          <a:ln/>
+        </p:spPr>
+        <p:txBody>
+          <a:bodyPr wrap="square" lIns="0" tIns="0" rIns="0" bIns="0" rtlCol="0" anchor="ctr"/>
+          <a:lstStyle/>
+          <a:p>
+            <a:pPr indent="0" marL="0">
+              <a:buNone/>
+            </a:pPr>
+            <a:r>
+              <a:rPr lang="en-US" sz="2800" dirty="0">
+                <a:solidFill>
+                  <a:srgbClr val="FFFFFF"/>
+                </a:solidFill>
+                <a:latin typeface="Pretendard SemiBold" pitchFamily="34" charset="0"/>
+                <a:ea typeface="Pretendard SemiBold" pitchFamily="34" charset="-122"/>
+                <a:cs typeface="Pretendard SemiBold" pitchFamily="34" charset="-120"/>
+              </a:rPr>
+              <a:t>3건</a:t>
+            </a:r>
+            <a:endParaRPr lang="en-US" sz="2800" dirty="0"/>
+          </a:p>
+        </p:txBody>
+      </p:sp>
+      <p:sp>
+        <p:nvSpPr>
+          <p:cNvPr id="10" name="Text 8"/>
+          <p:cNvSpPr txBox="1"/>
+          <p:nvPr/>
+        </p:nvSpPr>
+        <p:spPr>
+          <a:xfrm>
+            <a:off x="609905" y="5376672"/>
+            <a:ext cx="2651760" cy="228600"/>
+          </a:xfrm>
+          <a:prstGeom prst="rect">
+            <a:avLst/>
+          </a:prstGeom>
+          <a:noFill/>
+          <a:ln/>
+        </p:spPr>
+        <p:txBody>
+          <a:bodyPr wrap="square" lIns="0" tIns="0" rIns="0" bIns="0" rtlCol="0" anchor="t"/>
+          <a:lstStyle/>
+          <a:p>
+            <a:pPr indent="0" marL="0">
+              <a:buNone/>
+            </a:pPr>
+            <a:r>
+              <a:rPr lang="en-US" sz="1200" dirty="0">
+                <a:solidFill>
+                  <a:srgbClr val="CCCCCC"/>
+                </a:solidFill>
+                <a:latin typeface="Pretendard" pitchFamily="34" charset="0"/>
+                <a:ea typeface="Pretendard" pitchFamily="34" charset="-122"/>
+                <a:cs typeface="Pretendard" pitchFamily="34" charset="-120"/>
+              </a:rPr>
+              <a:t>발견한 이슈</a:t>
+            </a:r>
+            <a:endParaRPr lang="en-US" sz="1200" dirty="0"/>
+          </a:p>
+        </p:txBody>
+      </p:sp>
+      <p:sp>
+        <p:nvSpPr>
+          <p:cNvPr id="11" name="Text 9"/>
+          <p:cNvSpPr txBox="1"/>
+          <p:nvPr/>
+        </p:nvSpPr>
+        <p:spPr>
+          <a:xfrm>
+            <a:off x="609905" y="5596128"/>
+            <a:ext cx="2651760" cy="201168"/>
+          </a:xfrm>
+          <a:prstGeom prst="rect">
+            <a:avLst/>
+          </a:prstGeom>
+          <a:noFill/>
+          <a:ln/>
+        </p:spPr>
+        <p:txBody>
+          <a:bodyPr wrap="square" lIns="0" tIns="0" rIns="0" bIns="0" rtlCol="0" anchor="t"/>
+          <a:lstStyle/>
+          <a:p>
+            <a:pPr indent="0" marL="0">
+              <a:buNone/>
+            </a:pPr>
+            <a:r>
+              <a:rPr lang="en-US" sz="1050" dirty="0">
+                <a:solidFill>
+                  <a:srgbClr val="8E8E93"/>
+                </a:solidFill>
+                <a:latin typeface="Pretendard" pitchFamily="34" charset="0"/>
+                <a:ea typeface="Pretendard" pitchFamily="34" charset="-122"/>
+                <a:cs typeface="Pretendard" pitchFamily="34" charset="-120"/>
+              </a:rPr>
+              <a:t>높음 1 · 중간 1 · 낮음 1</a:t>
+            </a:r>
+            <a:endParaRPr lang="en-US" sz="1050" dirty="0"/>
+          </a:p>
+        </p:txBody>
+      </p:sp>
+      <p:sp>
+        <p:nvSpPr>
+          <p:cNvPr id="12" name="Shape 10"/>
+          <p:cNvSpPr/>
+          <p:nvPr/>
+        </p:nvSpPr>
+        <p:spPr>
+          <a:xfrm>
+            <a:off x="3353105" y="4892040"/>
+            <a:ext cx="0" cy="868680"/>
+          </a:xfrm>
+          <a:prstGeom prst="line">
+            <a:avLst/>
+          </a:prstGeom>
+          <a:noFill/>
+          <a:ln w="9525">
+            <a:solidFill>
+              <a:srgbClr val="3A3A3C"/>
+            </a:solidFill>
+            <a:prstDash val="solid"/>
+          </a:ln>
+        </p:spPr>
+      </p:sp>
+      <p:sp>
+        <p:nvSpPr>
+          <p:cNvPr id="13" name="Text 11"/>
+          <p:cNvSpPr txBox="1"/>
+          <p:nvPr/>
+        </p:nvSpPr>
+        <p:spPr>
+          <a:xfrm>
+            <a:off x="3627425" y="4846320"/>
+            <a:ext cx="2377440" cy="502920"/>
+          </a:xfrm>
+          <a:prstGeom prst="rect">
+            <a:avLst/>
+          </a:prstGeom>
+          <a:noFill/>
+          <a:ln/>
+        </p:spPr>
+        <p:txBody>
+          <a:bodyPr wrap="square" lIns="0" tIns="0" rIns="0" bIns="0" rtlCol="0" anchor="ctr"/>
+          <a:lstStyle/>
+          <a:p>
+            <a:pPr indent="0" marL="0">
+              <a:buNone/>
+            </a:pPr>
+            <a:r>
+              <a:rPr lang="en-US" sz="2800" dirty="0">
+                <a:solidFill>
+                  <a:srgbClr val="FFFFFF"/>
+                </a:solidFill>
+                <a:latin typeface="Pretendard SemiBold" pitchFamily="34" charset="0"/>
+                <a:ea typeface="Pretendard SemiBold" pitchFamily="34" charset="-122"/>
+                <a:cs typeface="Pretendard SemiBold" pitchFamily="34" charset="-120"/>
+              </a:rPr>
+              <a:t>4.43h</a:t>
+            </a:r>
+            <a:endParaRPr lang="en-US" sz="2800" dirty="0"/>
+          </a:p>
+        </p:txBody>
+      </p:sp>
+      <p:sp>
+        <p:nvSpPr>
+          <p:cNvPr id="14" name="Text 12"/>
+          <p:cNvSpPr txBox="1"/>
+          <p:nvPr/>
+        </p:nvSpPr>
+        <p:spPr>
+          <a:xfrm>
+            <a:off x="3627425" y="5376672"/>
+            <a:ext cx="2377440" cy="228600"/>
+          </a:xfrm>
+          <a:prstGeom prst="rect">
+            <a:avLst/>
+          </a:prstGeom>
+          <a:noFill/>
+          <a:ln/>
+        </p:spPr>
+        <p:txBody>
+          <a:bodyPr wrap="square" lIns="0" tIns="0" rIns="0" bIns="0" rtlCol="0" anchor="t"/>
+          <a:lstStyle/>
+          <a:p>
+            <a:pPr indent="0" marL="0">
+              <a:buNone/>
+            </a:pPr>
+            <a:r>
+              <a:rPr lang="en-US" sz="1200" dirty="0">
+                <a:solidFill>
+                  <a:srgbClr val="CCCCCC"/>
+                </a:solidFill>
+                <a:latin typeface="Pretendard" pitchFamily="34" charset="0"/>
+                <a:ea typeface="Pretendard" pitchFamily="34" charset="-122"/>
+                <a:cs typeface="Pretendard" pitchFamily="34" charset="-120"/>
+              </a:rPr>
+              <a:t>클리어</a:t>
+            </a:r>
+            <a:endParaRPr lang="en-US" sz="1200" dirty="0"/>
+          </a:p>
+        </p:txBody>
+      </p:sp>
+      <p:sp>
+        <p:nvSpPr>
+          <p:cNvPr id="15" name="Text 13"/>
+          <p:cNvSpPr txBox="1"/>
+          <p:nvPr/>
+        </p:nvSpPr>
+        <p:spPr>
+          <a:xfrm>
+            <a:off x="3627425" y="5596128"/>
+            <a:ext cx="2377440" cy="201168"/>
+          </a:xfrm>
+          <a:prstGeom prst="rect">
+            <a:avLst/>
+          </a:prstGeom>
+          <a:noFill/>
+          <a:ln/>
+        </p:spPr>
+        <p:txBody>
+          <a:bodyPr wrap="square" lIns="0" tIns="0" rIns="0" bIns="0" rtlCol="0" anchor="t"/>
+          <a:lstStyle/>
+          <a:p>
+            <a:pPr indent="0" marL="0">
+              <a:buNone/>
+            </a:pPr>
+            <a:r>
+              <a:rPr lang="en-US" sz="1050" dirty="0">
+                <a:solidFill>
+                  <a:srgbClr val="8E8E93"/>
+                </a:solidFill>
+                <a:latin typeface="Pretendard" pitchFamily="34" charset="0"/>
+                <a:ea typeface="Pretendard" pitchFamily="34" charset="-122"/>
+                <a:cs typeface="Pretendard" pitchFamily="34" charset="-120"/>
+              </a:rPr>
+              <a:t>시뮬 중앙 (25회)</a:t>
+            </a:r>
+            <a:endParaRPr lang="en-US" sz="1050" dirty="0"/>
+          </a:p>
+        </p:txBody>
+      </p:sp>
+      <p:sp>
+        <p:nvSpPr>
+          <p:cNvPr id="16" name="Shape 14"/>
+          <p:cNvSpPr/>
+          <p:nvPr/>
+        </p:nvSpPr>
+        <p:spPr>
+          <a:xfrm>
+            <a:off x="6096305" y="4892040"/>
+            <a:ext cx="0" cy="868680"/>
+          </a:xfrm>
+          <a:prstGeom prst="line">
+            <a:avLst/>
+          </a:prstGeom>
+          <a:noFill/>
+          <a:ln w="9525">
+            <a:solidFill>
+              <a:srgbClr val="3A3A3C"/>
+            </a:solidFill>
+            <a:prstDash val="solid"/>
+          </a:ln>
+        </p:spPr>
+      </p:sp>
+      <p:sp>
+        <p:nvSpPr>
+          <p:cNvPr id="17" name="Text 15"/>
+          <p:cNvSpPr txBox="1"/>
+          <p:nvPr/>
+        </p:nvSpPr>
+        <p:spPr>
+          <a:xfrm>
+            <a:off x="6370625" y="4846320"/>
+            <a:ext cx="2377440" cy="502920"/>
+          </a:xfrm>
+          <a:prstGeom prst="rect">
+            <a:avLst/>
+          </a:prstGeom>
+          <a:noFill/>
+          <a:ln/>
+        </p:spPr>
+        <p:txBody>
+          <a:bodyPr wrap="square" lIns="0" tIns="0" rIns="0" bIns="0" rtlCol="0" anchor="ctr"/>
+          <a:lstStyle/>
+          <a:p>
+            <a:pPr indent="0" marL="0">
+              <a:buNone/>
+            </a:pPr>
+            <a:r>
+              <a:rPr lang="en-US" sz="2800" dirty="0">
+                <a:solidFill>
+                  <a:srgbClr val="FFFFFF"/>
+                </a:solidFill>
+                <a:latin typeface="Pretendard SemiBold" pitchFamily="34" charset="0"/>
+                <a:ea typeface="Pretendard SemiBold" pitchFamily="34" charset="-122"/>
+                <a:cs typeface="Pretendard SemiBold" pitchFamily="34" charset="-120"/>
+              </a:rPr>
+              <a:t>+1.0h</a:t>
+            </a:r>
+            <a:endParaRPr lang="en-US" sz="2800" dirty="0"/>
+          </a:p>
+        </p:txBody>
+      </p:sp>
+      <p:sp>
+        <p:nvSpPr>
+          <p:cNvPr id="18" name="Text 16"/>
+          <p:cNvSpPr txBox="1"/>
+          <p:nvPr/>
+        </p:nvSpPr>
+        <p:spPr>
+          <a:xfrm>
+            <a:off x="6370625" y="5376672"/>
+            <a:ext cx="2377440" cy="228600"/>
+          </a:xfrm>
+          <a:prstGeom prst="rect">
+            <a:avLst/>
+          </a:prstGeom>
+          <a:noFill/>
+          <a:ln/>
+        </p:spPr>
+        <p:txBody>
+          <a:bodyPr wrap="square" lIns="0" tIns="0" rIns="0" bIns="0" rtlCol="0" anchor="t"/>
+          <a:lstStyle/>
+          <a:p>
+            <a:pPr indent="0" marL="0">
+              <a:buNone/>
+            </a:pPr>
+            <a:r>
+              <a:rPr lang="en-US" sz="1200" dirty="0">
+                <a:solidFill>
+                  <a:srgbClr val="CCCCCC"/>
+                </a:solidFill>
+                <a:latin typeface="Pretendard" pitchFamily="34" charset="0"/>
+                <a:ea typeface="Pretendard" pitchFamily="34" charset="-122"/>
+                <a:cs typeface="Pretendard" pitchFamily="34" charset="-120"/>
+              </a:rPr>
+              <a:t>풀트리</a:t>
+            </a:r>
+            <a:endParaRPr lang="en-US" sz="1200" dirty="0"/>
+          </a:p>
+        </p:txBody>
+      </p:sp>
+      <p:sp>
+        <p:nvSpPr>
+          <p:cNvPr id="19" name="Text 17"/>
+          <p:cNvSpPr txBox="1"/>
+          <p:nvPr/>
+        </p:nvSpPr>
+        <p:spPr>
+          <a:xfrm>
+            <a:off x="6370625" y="5596128"/>
+            <a:ext cx="2377440" cy="201168"/>
+          </a:xfrm>
+          <a:prstGeom prst="rect">
+            <a:avLst/>
+          </a:prstGeom>
+          <a:noFill/>
+          <a:ln/>
+        </p:spPr>
+        <p:txBody>
+          <a:bodyPr wrap="square" lIns="0" tIns="0" rIns="0" bIns="0" rtlCol="0" anchor="t"/>
+          <a:lstStyle/>
+          <a:p>
+            <a:pPr indent="0" marL="0">
+              <a:buNone/>
+            </a:pPr>
+            <a:r>
+              <a:rPr lang="en-US" sz="1050" dirty="0">
+                <a:solidFill>
+                  <a:srgbClr val="8E8E93"/>
+                </a:solidFill>
+                <a:latin typeface="Pretendard" pitchFamily="34" charset="0"/>
+                <a:ea typeface="Pretendard" pitchFamily="34" charset="-122"/>
+                <a:cs typeface="Pretendard" pitchFamily="34" charset="-120"/>
+              </a:rPr>
+              <a:t>클리어 후 (예전 +5.5h)</a:t>
+            </a:r>
+            <a:endParaRPr lang="en-US" sz="1050" dirty="0"/>
+          </a:p>
+        </p:txBody>
+      </p:sp>
+      <p:sp>
+        <p:nvSpPr>
+          <p:cNvPr id="20" name="Shape 18"/>
+          <p:cNvSpPr/>
+          <p:nvPr/>
+        </p:nvSpPr>
+        <p:spPr>
+          <a:xfrm>
+            <a:off x="8839505" y="4892040"/>
+            <a:ext cx="0" cy="868680"/>
+          </a:xfrm>
+          <a:prstGeom prst="line">
+            <a:avLst/>
+          </a:prstGeom>
+          <a:noFill/>
+          <a:ln w="9525">
+            <a:solidFill>
+              <a:srgbClr val="3A3A3C"/>
+            </a:solidFill>
+            <a:prstDash val="solid"/>
+          </a:ln>
+        </p:spPr>
+      </p:sp>
+      <p:sp>
+        <p:nvSpPr>
+          <p:cNvPr id="21" name="Text 19"/>
+          <p:cNvSpPr txBox="1"/>
+          <p:nvPr/>
+        </p:nvSpPr>
+        <p:spPr>
+          <a:xfrm>
+            <a:off x="9113825" y="4846320"/>
+            <a:ext cx="2377440" cy="502920"/>
+          </a:xfrm>
+          <a:prstGeom prst="rect">
+            <a:avLst/>
+          </a:prstGeom>
+          <a:noFill/>
+          <a:ln/>
+        </p:spPr>
+        <p:txBody>
+          <a:bodyPr wrap="square" lIns="0" tIns="0" rIns="0" bIns="0" rtlCol="0" anchor="ctr"/>
+          <a:lstStyle/>
+          <a:p>
+            <a:pPr indent="0" marL="0">
+              <a:buNone/>
+            </a:pPr>
+            <a:r>
+              <a:rPr lang="en-US" sz="2800" dirty="0">
+                <a:solidFill>
+                  <a:srgbClr val="FFFFFF"/>
+                </a:solidFill>
+                <a:latin typeface="Pretendard SemiBold" pitchFamily="34" charset="0"/>
+                <a:ea typeface="Pretendard SemiBold" pitchFamily="34" charset="-122"/>
+                <a:cs typeface="Pretendard SemiBold" pitchFamily="34" charset="-120"/>
+              </a:rPr>
+              <a:t>4</a:t>
+            </a:r>
+            <a:endParaRPr lang="en-US" sz="2800" dirty="0"/>
+          </a:p>
+        </p:txBody>
+      </p:sp>
+      <p:sp>
+        <p:nvSpPr>
+          <p:cNvPr id="22" name="Text 20"/>
+          <p:cNvSpPr txBox="1"/>
+          <p:nvPr/>
+        </p:nvSpPr>
+        <p:spPr>
+          <a:xfrm>
+            <a:off x="9113825" y="5376672"/>
+            <a:ext cx="2377440" cy="228600"/>
+          </a:xfrm>
+          <a:prstGeom prst="rect">
+            <a:avLst/>
+          </a:prstGeom>
+          <a:noFill/>
+          <a:ln/>
+        </p:spPr>
+        <p:txBody>
+          <a:bodyPr wrap="square" lIns="0" tIns="0" rIns="0" bIns="0" rtlCol="0" anchor="t"/>
+          <a:lstStyle/>
+          <a:p>
+            <a:pPr indent="0" marL="0">
+              <a:buNone/>
+            </a:pPr>
+            <a:r>
+              <a:rPr lang="en-US" sz="1200" dirty="0">
+                <a:solidFill>
+                  <a:srgbClr val="CCCCCC"/>
+                </a:solidFill>
+                <a:latin typeface="Pretendard" pitchFamily="34" charset="0"/>
+                <a:ea typeface="Pretendard" pitchFamily="34" charset="-122"/>
+                <a:cs typeface="Pretendard" pitchFamily="34" charset="-120"/>
+              </a:rPr>
+              <a:t>남긴 UI</a:t>
+            </a:r>
+            <a:endParaRPr lang="en-US" sz="1200" dirty="0"/>
+          </a:p>
+        </p:txBody>
+      </p:sp>
+      <p:sp>
+        <p:nvSpPr>
+          <p:cNvPr id="23" name="Text 21"/>
+          <p:cNvSpPr txBox="1"/>
+          <p:nvPr/>
+        </p:nvSpPr>
+        <p:spPr>
+          <a:xfrm>
+            <a:off x="9113825" y="5596128"/>
+            <a:ext cx="2377440" cy="201168"/>
+          </a:xfrm>
+          <a:prstGeom prst="rect">
+            <a:avLst/>
+          </a:prstGeom>
+          <a:noFill/>
+          <a:ln/>
+        </p:spPr>
+        <p:txBody>
+          <a:bodyPr wrap="square" lIns="0" tIns="0" rIns="0" bIns="0" rtlCol="0" anchor="t"/>
+          <a:lstStyle/>
+          <a:p>
+            <a:pPr indent="0" marL="0">
+              <a:buNone/>
+            </a:pPr>
+            <a:r>
+              <a:rPr lang="en-US" sz="1050" dirty="0">
+                <a:solidFill>
+                  <a:srgbClr val="8E8E93"/>
+                </a:solidFill>
+                <a:latin typeface="Pretendard" pitchFamily="34" charset="0"/>
+                <a:ea typeface="Pretendard" pitchFamily="34" charset="-122"/>
+                <a:cs typeface="Pretendard" pitchFamily="34" charset="-120"/>
+              </a:rPr>
+              <a:t>재화 · 맵 · 설정 · 도감</a:t>
+            </a:r>
+            <a:endParaRPr lang="en-US" sz="1050" dirty="0"/>
+          </a:p>
+        </p:txBody>
+      </p:sp>
+      <p:sp>
+        <p:nvSpPr>
+          <p:cNvPr id="24" name="Text 22"/>
+          <p:cNvSpPr txBox="1"/>
+          <p:nvPr/>
+        </p:nvSpPr>
+        <p:spPr>
+          <a:xfrm>
+            <a:off x="609905" y="6446520"/>
+            <a:ext cx="5486400" cy="274320"/>
+          </a:xfrm>
+          <a:prstGeom prst="rect">
+            <a:avLst/>
+          </a:prstGeom>
+          <a:noFill/>
+          <a:ln/>
+        </p:spPr>
+        <p:txBody>
+          <a:bodyPr wrap="square" lIns="0" tIns="0" rIns="0" bIns="0" rtlCol="0" anchor="ctr"/>
+          <a:lstStyle/>
+          <a:p>
+            <a:pPr indent="0" marL="0">
+              <a:buNone/>
+            </a:pPr>
+            <a:r>
+              <a:rPr lang="en-US" sz="1000" spc="200" kern="0" dirty="0">
+                <a:solidFill>
+                  <a:srgbClr val="8E8E93"/>
+                </a:solidFill>
+                <a:latin typeface="Pretendard" pitchFamily="34" charset="0"/>
+                <a:ea typeface="Pretendard" pitchFamily="34" charset="-122"/>
+                <a:cs typeface="Pretendard" pitchFamily="34" charset="-120"/>
+              </a:rPr>
+              <a:t>QA REPORT  ·  FISH GAME</a:t>
+            </a:r>
+            <a:endParaRPr lang="en-US" sz="1000" dirty="0"/>
+          </a:p>
+        </p:txBody>
+      </p:sp>
+      <p:sp>
+        <p:nvSpPr>
+          <p:cNvPr id="25" name="Text 23"/>
+          <p:cNvSpPr txBox="1"/>
+          <p:nvPr/>
+        </p:nvSpPr>
+        <p:spPr>
+          <a:xfrm>
+            <a:off x="10515600" y="6446520"/>
+            <a:ext cx="1066190" cy="274320"/>
+          </a:xfrm>
+          <a:prstGeom prst="rect">
+            <a:avLst/>
+          </a:prstGeom>
+          <a:noFill/>
+          <a:ln/>
+        </p:spPr>
+        <p:txBody>
+          <a:bodyPr wrap="square" lIns="0" tIns="0" rIns="0" bIns="0" rtlCol="0" anchor="ctr"/>
+          <a:lstStyle/>
+          <a:p>
+            <a:pPr algn="r" indent="0" marL="0">
+              <a:buNone/>
+            </a:pPr>
+            <a:r>
+              <a:rPr lang="en-US" sz="1000" dirty="0">
+                <a:solidFill>
+                  <a:srgbClr val="8E8E93"/>
+                </a:solidFill>
+                <a:latin typeface="Pretendard" pitchFamily="34" charset="0"/>
+                <a:ea typeface="Pretendard" pitchFamily="34" charset="-122"/>
+                <a:cs typeface="Pretendard" pitchFamily="34" charset="-120"/>
+              </a:rPr>
+              <a:t>24 / 28</a:t>
+            </a:r>
+            <a:endParaRPr lang="en-US" sz="1000" dirty="0"/>
+          </a:p>
+        </p:txBody>
+      </p:sp>
+    </p:spTree>
+  </p:cSld>
+  <p:clrMapOvr>
+    <a:masterClrMapping/>
+  </p:clrMapOvr>
+</p:sld>
+</file>
+
+<file path=ppt/slides/slide25.xml><?xml version="1.0" encoding="utf-8"?>
+<p:sld xmlns:a="http://schemas.openxmlformats.org/drawingml/2006/main" xmlns:r="http://schemas.openxmlformats.org/officeDocument/2006/relationships" xmlns:p="http://schemas.openxmlformats.org/presentationml/2006/main">
+  <p:cSld name="Slide 25">
+    <p:bg>
+      <p:bgPr>
+        <a:solidFill>
+          <a:srgbClr val="FFFFFF"/>
+        </a:solidFill>
+      </p:bgPr>
+    </p:bg>
+    <p:spTree>
+      <p:nvGrpSpPr>
+        <p:cNvPr id="1" name=""/>
+        <p:cNvGrpSpPr/>
+        <p:nvPr/>
+      </p:nvGrpSpPr>
+      <p:grpSpPr>
+        <a:xfrm>
+          <a:off x="0" y="0"/>
+          <a:ext cx="0" cy="0"/>
+          <a:chOff x="0" y="0"/>
+          <a:chExt cx="0" cy="0"/>
+        </a:xfrm>
+      </p:grpSpPr>
+      <p:sp>
+        <p:nvSpPr>
+          <p:cNvPr id="2" name="Text 0"/>
+          <p:cNvSpPr txBox="1"/>
+          <p:nvPr/>
+        </p:nvSpPr>
+        <p:spPr>
+          <a:xfrm>
+            <a:off x="609905" y="320040"/>
+            <a:ext cx="10972800" cy="228600"/>
+          </a:xfrm>
+          <a:prstGeom prst="rect">
+            <a:avLst/>
+          </a:prstGeom>
+          <a:noFill/>
+          <a:ln/>
+        </p:spPr>
+        <p:txBody>
+          <a:bodyPr wrap="square" lIns="0" tIns="0" rIns="0" bIns="0" rtlCol="0" anchor="t"/>
+          <a:lstStyle/>
+          <a:p>
+            <a:pPr indent="0" marL="0">
+              <a:buNone/>
+            </a:pPr>
+            <a:r>
+              <a:rPr lang="en-US" sz="1100" b="1" dirty="0">
+                <a:solidFill>
+                  <a:srgbClr val="0066CC"/>
+                </a:solidFill>
+                <a:latin typeface="Pretendard SemiBold" pitchFamily="34" charset="0"/>
+                <a:ea typeface="Pretendard SemiBold" pitchFamily="34" charset="-122"/>
+                <a:cs typeface="Pretendard SemiBold" pitchFamily="34" charset="-120"/>
+              </a:rPr>
+              <a:t>R9  ·  스킬트리 메인 화면 개편 · 칸별 고정 가격</a:t>
+            </a:r>
+            <a:endParaRPr lang="en-US" sz="1100" dirty="0"/>
+          </a:p>
+        </p:txBody>
+      </p:sp>
+      <p:sp>
+        <p:nvSpPr>
+          <p:cNvPr id="3" name="Text 1"/>
+          <p:cNvSpPr txBox="1"/>
+          <p:nvPr/>
+        </p:nvSpPr>
+        <p:spPr>
+          <a:xfrm>
+            <a:off x="609905" y="594360"/>
+            <a:ext cx="10972800" cy="777240"/>
+          </a:xfrm>
+          <a:prstGeom prst="rect">
+            <a:avLst/>
+          </a:prstGeom>
+          <a:noFill/>
+          <a:ln/>
+        </p:spPr>
+        <p:txBody>
+          <a:bodyPr wrap="square" lIns="0" tIns="0" rIns="0" bIns="0" rtlCol="0" anchor="t"/>
+          <a:lstStyle/>
+          <a:p>
+            <a:pPr indent="0" marL="0">
+              <a:buNone/>
+            </a:pPr>
+            <a:r>
+              <a:rPr lang="en-US" sz="4000" dirty="0">
+                <a:solidFill>
+                  <a:srgbClr val="1D1D1F"/>
+                </a:solidFill>
+                <a:latin typeface="Pretendard SemiBold" pitchFamily="34" charset="0"/>
+                <a:ea typeface="Pretendard SemiBold" pitchFamily="34" charset="-122"/>
+                <a:cs typeface="Pretendard SemiBold" pitchFamily="34" charset="-120"/>
+              </a:rPr>
+              <a:t>발견한 문제와 조치</a:t>
+            </a:r>
+            <a:endParaRPr lang="en-US" sz="4000" dirty="0"/>
+          </a:p>
+        </p:txBody>
+      </p:sp>
+      <p:sp>
+        <p:nvSpPr>
+          <p:cNvPr id="4" name="Shape 2"/>
+          <p:cNvSpPr/>
+          <p:nvPr/>
+        </p:nvSpPr>
+        <p:spPr>
+          <a:xfrm>
+            <a:off x="609905" y="1417320"/>
+            <a:ext cx="10972800" cy="0"/>
+          </a:xfrm>
+          <a:prstGeom prst="line">
+            <a:avLst/>
+          </a:prstGeom>
+          <a:noFill/>
+          <a:ln w="9525">
+            <a:solidFill>
+              <a:srgbClr val="E0E0E0"/>
+            </a:solidFill>
+            <a:prstDash val="solid"/>
+          </a:ln>
+        </p:spPr>
+      </p:sp>
+      <p:graphicFrame>
+        <p:nvGraphicFramePr>
+          <p:cNvPr id="26" name="Table 0"/>
+          <p:cNvGraphicFramePr>
+            <a:graphicFrameLocks noGrp="1"/>
+          </p:cNvGraphicFramePr>
+          <p:nvPr>
+            <p:extLst>
+              <p:ext uri="{D42A27DB-BD31-4B8C-83A1-F6EECF244321}">
+                <p14:modId xmlns:p14="http://schemas.microsoft.com/office/powerpoint/2010/main" val="1579011935"/>
+              </p:ext>
+            </p:extLst>
+          </p:nvPr>
+        </p:nvGraphicFramePr>
+        <p:xfrm>
+          <a:off x="609905" y="1600200"/>
+          <a:ext cx="10972800" cy="914400"/>
+        </p:xfrm>
+        <a:graphic>
+          <a:graphicData uri="http://schemas.openxmlformats.org/drawingml/2006/table">
+            <a:tbl>
+              <a:tblPr/>
+              <a:tblGrid>
+                <a:gridCol w="731520"/>
+                <a:gridCol w="1188720"/>
+                <a:gridCol w="4206240"/>
+                <a:gridCol w="3931920"/>
+                <a:gridCol w="914400"/>
+              </a:tblGrid>
+              <a:tr h="329184">
+                <a:tc>
+                  <a:txBody>
+                    <a:bodyPr/>
+                    <a:lstStyle/>
+                    <a:p>
+                      <a:pPr indent="0" marL="0">
+                        <a:buNone/>
+                      </a:pPr>
+                      <a:r>
+                        <a:rPr lang="en-US" sz="1200" b="1" dirty="0">
+                          <a:solidFill>
+                            <a:srgbClr val="7A7A7A"/>
+                          </a:solidFill>
+                          <a:latin typeface="Pretendard SemiBold" pitchFamily="34" charset="0"/>
+                          <a:ea typeface="Pretendard SemiBold" pitchFamily="34" charset="-122"/>
+                          <a:cs typeface="Pretendard SemiBold" pitchFamily="34" charset="-120"/>
+                        </a:rPr>
+                        <a:t>심각도</a:t>
+                      </a:r>
+                      <a:endParaRPr lang="en-US" sz="1200" dirty="0">
+                        <a:latin typeface="Pretendard SemiBold" charset="0"/>
+                        <a:ea typeface="Pretendard SemiBold" charset="0"/>
+                        <a:cs typeface="Pretendard SemiBold" charset="0"/>
+                      </a:endParaRPr>
+                    </a:p>
+                  </a:txBody>
+                  <a:tcPr marL="76200" marR="76200" marT="50800" marB="50800" anchor="ctr">
+                    <a:lnL w="0" cap="flat" cmpd="sng" algn="ctr">
+                      <a:noFill/>
+                    </a:lnL>
+                    <a:lnR w="0" cap="flat" cmpd="sng" algn="ctr">
+                      <a:noFill/>
+                    </a:lnR>
+                    <a:lnT w="0" cap="flat" cmpd="sng" algn="ctr">
+                      <a:noFill/>
+                    </a:lnT>
+                    <a:lnB w="9525" cap="flat" cmpd="sng" algn="ctr">
+                      <a:solidFill>
+                        <a:srgbClr val="E0E0E0"/>
+                      </a:solidFill>
+                      <a:prstDash val="solid"/>
+                      <a:round/>
+                      <a:headEnd type="none" w="med" len="med"/>
+                      <a:tailEnd type="none" w="med" len="med"/>
+                    </a:lnB>
+                    <a:solidFill>
+                      <a:srgbClr val="F5F5F7"/>
+                    </a:solidFill>
+                  </a:tcPr>
+                </a:tc>
+                <a:tc>
+                  <a:txBody>
+                    <a:bodyPr/>
+                    <a:lstStyle/>
+                    <a:p>
+                      <a:pPr indent="0" marL="0">
+                        <a:buNone/>
+                      </a:pPr>
+                      <a:r>
+                        <a:rPr lang="en-US" sz="1200" b="1" dirty="0">
+                          <a:solidFill>
+                            <a:srgbClr val="7A7A7A"/>
+                          </a:solidFill>
+                          <a:latin typeface="Pretendard SemiBold" pitchFamily="34" charset="0"/>
+                          <a:ea typeface="Pretendard SemiBold" pitchFamily="34" charset="-122"/>
+                          <a:cs typeface="Pretendard SemiBold" pitchFamily="34" charset="-120"/>
+                        </a:rPr>
+                        <a:t>영역</a:t>
+                      </a:r>
+                      <a:endParaRPr lang="en-US" sz="1200" dirty="0">
+                        <a:latin typeface="Pretendard SemiBold" charset="0"/>
+                        <a:ea typeface="Pretendard SemiBold" charset="0"/>
+                        <a:cs typeface="Pretendard SemiBold" charset="0"/>
+                      </a:endParaRPr>
+                    </a:p>
+                  </a:txBody>
+                  <a:tcPr marL="76200" marR="76200" marT="50800" marB="50800" anchor="ctr">
+                    <a:lnL w="0" cap="flat" cmpd="sng" algn="ctr">
+                      <a:noFill/>
+                    </a:lnL>
+                    <a:lnR w="0" cap="flat" cmpd="sng" algn="ctr">
+                      <a:noFill/>
+                    </a:lnR>
+                    <a:lnT w="0" cap="flat" cmpd="sng" algn="ctr">
+                      <a:noFill/>
+                    </a:lnT>
+                    <a:lnB w="9525" cap="flat" cmpd="sng" algn="ctr">
+                      <a:solidFill>
+                        <a:srgbClr val="E0E0E0"/>
+                      </a:solidFill>
+                      <a:prstDash val="solid"/>
+                      <a:round/>
+                      <a:headEnd type="none" w="med" len="med"/>
+                      <a:tailEnd type="none" w="med" len="med"/>
+                    </a:lnB>
+                    <a:solidFill>
+                      <a:srgbClr val="F5F5F7"/>
+                    </a:solidFill>
+                  </a:tcPr>
+                </a:tc>
+                <a:tc>
+                  <a:txBody>
+                    <a:bodyPr/>
+                    <a:lstStyle/>
+                    <a:p>
+                      <a:pPr indent="0" marL="0">
+                        <a:buNone/>
+                      </a:pPr>
+                      <a:r>
+                        <a:rPr lang="en-US" sz="1200" b="1" dirty="0">
+                          <a:solidFill>
+                            <a:srgbClr val="7A7A7A"/>
+                          </a:solidFill>
+                          <a:latin typeface="Pretendard SemiBold" pitchFamily="34" charset="0"/>
+                          <a:ea typeface="Pretendard SemiBold" pitchFamily="34" charset="-122"/>
+                          <a:cs typeface="Pretendard SemiBold" pitchFamily="34" charset="-120"/>
+                        </a:rPr>
+                        <a:t>문제</a:t>
+                      </a:r>
+                      <a:endParaRPr lang="en-US" sz="1200" dirty="0">
+                        <a:latin typeface="Pretendard SemiBold" charset="0"/>
+                        <a:ea typeface="Pretendard SemiBold" charset="0"/>
+                        <a:cs typeface="Pretendard SemiBold" charset="0"/>
+                      </a:endParaRPr>
+                    </a:p>
+                  </a:txBody>
+                  <a:tcPr marL="76200" marR="76200" marT="50800" marB="50800" anchor="ctr">
+                    <a:lnL w="0" cap="flat" cmpd="sng" algn="ctr">
+                      <a:noFill/>
+                    </a:lnL>
+                    <a:lnR w="0" cap="flat" cmpd="sng" algn="ctr">
+                      <a:noFill/>
+                    </a:lnR>
+                    <a:lnT w="0" cap="flat" cmpd="sng" algn="ctr">
+                      <a:noFill/>
+                    </a:lnT>
+                    <a:lnB w="9525" cap="flat" cmpd="sng" algn="ctr">
+                      <a:solidFill>
+                        <a:srgbClr val="E0E0E0"/>
+                      </a:solidFill>
+                      <a:prstDash val="solid"/>
+                      <a:round/>
+                      <a:headEnd type="none" w="med" len="med"/>
+                      <a:tailEnd type="none" w="med" len="med"/>
+                    </a:lnB>
+                    <a:solidFill>
+                      <a:srgbClr val="F5F5F7"/>
+                    </a:solidFill>
+                  </a:tcPr>
+                </a:tc>
+                <a:tc>
+                  <a:txBody>
+                    <a:bodyPr/>
+                    <a:lstStyle/>
+                    <a:p>
+                      <a:pPr indent="0" marL="0">
+                        <a:buNone/>
+                      </a:pPr>
+                      <a:r>
+                        <a:rPr lang="en-US" sz="1200" b="1" dirty="0">
+                          <a:solidFill>
+                            <a:srgbClr val="7A7A7A"/>
+                          </a:solidFill>
+                          <a:latin typeface="Pretendard SemiBold" pitchFamily="34" charset="0"/>
+                          <a:ea typeface="Pretendard SemiBold" pitchFamily="34" charset="-122"/>
+                          <a:cs typeface="Pretendard SemiBold" pitchFamily="34" charset="-120"/>
+                        </a:rPr>
+                        <a:t>조치</a:t>
+                      </a:r>
+                      <a:endParaRPr lang="en-US" sz="1200" dirty="0">
+                        <a:latin typeface="Pretendard SemiBold" charset="0"/>
+                        <a:ea typeface="Pretendard SemiBold" charset="0"/>
+                        <a:cs typeface="Pretendard SemiBold" charset="0"/>
+                      </a:endParaRPr>
+                    </a:p>
+                  </a:txBody>
+                  <a:tcPr marL="76200" marR="76200" marT="50800" marB="50800" anchor="ctr">
+                    <a:lnL w="0" cap="flat" cmpd="sng" algn="ctr">
+                      <a:noFill/>
+                    </a:lnL>
+                    <a:lnR w="0" cap="flat" cmpd="sng" algn="ctr">
+                      <a:noFill/>
+                    </a:lnR>
+                    <a:lnT w="0" cap="flat" cmpd="sng" algn="ctr">
+                      <a:noFill/>
+                    </a:lnT>
+                    <a:lnB w="9525" cap="flat" cmpd="sng" algn="ctr">
+                      <a:solidFill>
+                        <a:srgbClr val="E0E0E0"/>
+                      </a:solidFill>
+                      <a:prstDash val="solid"/>
+                      <a:round/>
+                      <a:headEnd type="none" w="med" len="med"/>
+                      <a:tailEnd type="none" w="med" len="med"/>
+                    </a:lnB>
+                    <a:solidFill>
+                      <a:srgbClr val="F5F5F7"/>
+                    </a:solidFill>
+                  </a:tcPr>
+                </a:tc>
+                <a:tc>
+                  <a:txBody>
+                    <a:bodyPr/>
+                    <a:lstStyle/>
+                    <a:p>
+                      <a:pPr indent="0" marL="0">
+                        <a:buNone/>
+                      </a:pPr>
+                      <a:r>
+                        <a:rPr lang="en-US" sz="1200" b="1" dirty="0">
+                          <a:solidFill>
+                            <a:srgbClr val="7A7A7A"/>
+                          </a:solidFill>
+                          <a:latin typeface="Pretendard SemiBold" pitchFamily="34" charset="0"/>
+                          <a:ea typeface="Pretendard SemiBold" pitchFamily="34" charset="-122"/>
+                          <a:cs typeface="Pretendard SemiBold" pitchFamily="34" charset="-120"/>
+                        </a:rPr>
+                        <a:t>상태</a:t>
+                      </a:r>
+                      <a:endParaRPr lang="en-US" sz="1200" dirty="0">
+                        <a:latin typeface="Pretendard SemiBold" charset="0"/>
+                        <a:ea typeface="Pretendard SemiBold" charset="0"/>
+                        <a:cs typeface="Pretendard SemiBold" charset="0"/>
+                      </a:endParaRPr>
+                    </a:p>
+                  </a:txBody>
+                  <a:tcPr marL="76200" marR="76200" marT="50800" marB="50800" anchor="ctr">
+                    <a:lnL w="0" cap="flat" cmpd="sng" algn="ctr">
+                      <a:noFill/>
+                    </a:lnL>
+                    <a:lnR w="0" cap="flat" cmpd="sng" algn="ctr">
+                      <a:noFill/>
+                    </a:lnR>
+                    <a:lnT w="0" cap="flat" cmpd="sng" algn="ctr">
+                      <a:noFill/>
+                    </a:lnT>
+                    <a:lnB w="9525" cap="flat" cmpd="sng" algn="ctr">
+                      <a:solidFill>
+                        <a:srgbClr val="E0E0E0"/>
+                      </a:solidFill>
+                      <a:prstDash val="solid"/>
+                      <a:round/>
+                      <a:headEnd type="none" w="med" len="med"/>
+                      <a:tailEnd type="none" w="med" len="med"/>
+                    </a:lnB>
+                    <a:solidFill>
+                      <a:srgbClr val="F5F5F7"/>
+                    </a:solidFill>
+                  </a:tcPr>
+                </a:tc>
+              </a:tr>
+              <a:tr h="638556">
+                <a:tc>
+                  <a:txBody>
+                    <a:bodyPr/>
+                    <a:lstStyle/>
+                    <a:p>
+                      <a:pPr indent="0" marL="0">
+                        <a:buNone/>
+                      </a:pPr>
+                      <a:r>
+                        <a:rPr lang="en-US" sz="1300" b="1" dirty="0">
+                          <a:solidFill>
+                            <a:srgbClr val="0066CC"/>
+                          </a:solidFill>
+                          <a:latin typeface="Pretendard SemiBold" pitchFamily="34" charset="0"/>
+                          <a:ea typeface="Pretendard SemiBold" pitchFamily="34" charset="-122"/>
+                          <a:cs typeface="Pretendard SemiBold" pitchFamily="34" charset="-120"/>
+                        </a:rPr>
+                        <a:t>높음</a:t>
+                      </a:r>
+                      <a:endParaRPr lang="en-US" sz="1300" dirty="0">
+                        <a:latin typeface="Pretendard SemiBold" charset="0"/>
+                        <a:ea typeface="Pretendard SemiBold" charset="0"/>
+                        <a:cs typeface="Pretendard SemiBold" charset="0"/>
+                      </a:endParaRPr>
+                    </a:p>
+                  </a:txBody>
+                  <a:tcPr marL="76200" marR="76200" marT="50800" marB="50800" anchor="ctr">
+                    <a:lnL w="0" cap="flat" cmpd="sng" algn="ctr">
+                      <a:noFill/>
+                    </a:lnL>
+                    <a:lnR w="0" cap="flat" cmpd="sng" algn="ctr">
+                      <a:noFill/>
+                    </a:lnR>
+                    <a:lnT w="0" cap="flat" cmpd="sng" algn="ctr">
+                      <a:noFill/>
+                    </a:lnT>
+                    <a:lnB w="9525" cap="flat" cmpd="sng" algn="ctr">
+                      <a:solidFill>
+                        <a:srgbClr val="E0E0E0"/>
+                      </a:solidFill>
+                      <a:prstDash val="solid"/>
+                      <a:round/>
+                      <a:headEnd type="none" w="med" len="med"/>
+                      <a:tailEnd type="none" w="med" len="med"/>
+                    </a:lnB>
+                    <a:solidFill>
+                      <a:srgbClr val="FFFFFF"/>
+                    </a:solidFill>
+                  </a:tcPr>
+                </a:tc>
+                <a:tc>
+                  <a:txBody>
+                    <a:bodyPr/>
+                    <a:lstStyle/>
+                    <a:p>
+                      <a:pPr indent="0" marL="0">
+                        <a:buNone/>
+                      </a:pPr>
+                      <a:r>
+                        <a:rPr lang="en-US" sz="1300" dirty="0">
+                          <a:solidFill>
+                            <a:srgbClr val="1D1D1F"/>
+                          </a:solidFill>
+                          <a:latin typeface="Pretendard SemiBold" pitchFamily="34" charset="0"/>
+                          <a:ea typeface="Pretendard SemiBold" pitchFamily="34" charset="-122"/>
+                          <a:cs typeface="Pretendard SemiBold" pitchFamily="34" charset="-120"/>
+                        </a:rPr>
+                        <a:t>가격</a:t>
+                      </a:r>
+                      <a:endParaRPr lang="en-US" sz="1300" dirty="0">
+                        <a:latin typeface="Pretendard SemiBold" charset="0"/>
+                        <a:ea typeface="Pretendard SemiBold" charset="0"/>
+                        <a:cs typeface="Pretendard SemiBold" charset="0"/>
+                      </a:endParaRPr>
+                    </a:p>
+                  </a:txBody>
+                  <a:tcPr marL="76200" marR="76200" marT="50800" marB="50800" anchor="ctr">
+                    <a:lnL w="0" cap="flat" cmpd="sng" algn="ctr">
+                      <a:noFill/>
+                    </a:lnL>
+                    <a:lnR w="0" cap="flat" cmpd="sng" algn="ctr">
+                      <a:noFill/>
+                    </a:lnR>
+                    <a:lnT w="0" cap="flat" cmpd="sng" algn="ctr">
+                      <a:noFill/>
+                    </a:lnT>
+                    <a:lnB w="9525" cap="flat" cmpd="sng" algn="ctr">
+                      <a:solidFill>
+                        <a:srgbClr val="E0E0E0"/>
+                      </a:solidFill>
+                      <a:prstDash val="solid"/>
+                      <a:round/>
+                      <a:headEnd type="none" w="med" len="med"/>
+                      <a:tailEnd type="none" w="med" len="med"/>
+                    </a:lnB>
+                    <a:solidFill>
+                      <a:srgbClr val="FFFFFF"/>
+                    </a:solidFill>
+                  </a:tcPr>
+                </a:tc>
+                <a:tc>
+                  <a:txBody>
+                    <a:bodyPr/>
+                    <a:lstStyle/>
+                    <a:p>
+                      <a:pPr indent="0" marL="0">
+                        <a:buNone/>
+                      </a:pPr>
+                      <a:r>
+                        <a:rPr lang="en-US" sz="1300" dirty="0">
+                          <a:solidFill>
+                            <a:srgbClr val="333333"/>
+                          </a:solidFill>
+                          <a:latin typeface="Pretendard" pitchFamily="34" charset="0"/>
+                          <a:ea typeface="Pretendard" pitchFamily="34" charset="-122"/>
+                          <a:cs typeface="Pretendard" pitchFamily="34" charset="-120"/>
+                        </a:rPr>
+                        <a:t>칸 순번을 BFS 순서로 그대로 고정하면 깊은 칸이 처음부터 비싸 클리어 127시간으로 무너짐 (시뮬 25회)</a:t>
+                      </a:r>
+                      <a:endParaRPr lang="en-US" sz="1300" dirty="0">
+                        <a:latin typeface="Pretendard" charset="0"/>
+                        <a:ea typeface="Pretendard" charset="0"/>
+                        <a:cs typeface="Pretendard" charset="0"/>
+                      </a:endParaRPr>
+                    </a:p>
+                  </a:txBody>
+                  <a:tcPr marL="76200" marR="76200" marT="50800" marB="50800" anchor="ctr">
+                    <a:lnL w="0" cap="flat" cmpd="sng" algn="ctr">
+                      <a:noFill/>
+                    </a:lnL>
+                    <a:lnR w="0" cap="flat" cmpd="sng" algn="ctr">
+                      <a:noFill/>
+                    </a:lnR>
+                    <a:lnT w="0" cap="flat" cmpd="sng" algn="ctr">
+                      <a:noFill/>
+                    </a:lnT>
+                    <a:lnB w="9525" cap="flat" cmpd="sng" algn="ctr">
+                      <a:solidFill>
+                        <a:srgbClr val="E0E0E0"/>
+                      </a:solidFill>
+                      <a:prstDash val="solid"/>
+                      <a:round/>
+                      <a:headEnd type="none" w="med" len="med"/>
+                      <a:tailEnd type="none" w="med" len="med"/>
+                    </a:lnB>
+                    <a:solidFill>
+                      <a:srgbClr val="FFFFFF"/>
+                    </a:solidFill>
+                  </a:tcPr>
+                </a:tc>
+                <a:tc>
+                  <a:txBody>
+                    <a:bodyPr/>
+                    <a:lstStyle/>
+                    <a:p>
+                      <a:pPr indent="0" marL="0">
+                        <a:buNone/>
+                      </a:pPr>
+                      <a:r>
+                        <a:rPr lang="en-US" sz="1300" dirty="0">
+                          <a:solidFill>
+                            <a:srgbClr val="333333"/>
+                          </a:solidFill>
+                          <a:latin typeface="Pretendard" pitchFamily="34" charset="0"/>
+                          <a:ea typeface="Pretendard" pitchFamily="34" charset="-122"/>
+                          <a:cs typeface="Pretendard" pitchFamily="34" charset="-120"/>
+                        </a:rPr>
+                        <a:t>깊이 × 5 번째 곡선 값으로 — 클리어 중앙 4.43h (목표 4.5h), 풀트리 클리어 후 +1.0h</a:t>
+                      </a:r>
+                      <a:endParaRPr lang="en-US" sz="1300" dirty="0">
+                        <a:latin typeface="Pretendard" charset="0"/>
+                        <a:ea typeface="Pretendard" charset="0"/>
+                        <a:cs typeface="Pretendard" charset="0"/>
+                      </a:endParaRPr>
+                    </a:p>
+                  </a:txBody>
+                  <a:tcPr marL="76200" marR="76200" marT="50800" marB="50800" anchor="ctr">
+                    <a:lnL w="0" cap="flat" cmpd="sng" algn="ctr">
+                      <a:noFill/>
+                    </a:lnL>
+                    <a:lnR w="0" cap="flat" cmpd="sng" algn="ctr">
+                      <a:noFill/>
+                    </a:lnR>
+                    <a:lnT w="0" cap="flat" cmpd="sng" algn="ctr">
+                      <a:noFill/>
+                    </a:lnT>
+                    <a:lnB w="9525" cap="flat" cmpd="sng" algn="ctr">
+                      <a:solidFill>
+                        <a:srgbClr val="E0E0E0"/>
+                      </a:solidFill>
+                      <a:prstDash val="solid"/>
+                      <a:round/>
+                      <a:headEnd type="none" w="med" len="med"/>
+                      <a:tailEnd type="none" w="med" len="med"/>
+                    </a:lnB>
+                    <a:solidFill>
+                      <a:srgbClr val="FFFFFF"/>
+                    </a:solidFill>
+                  </a:tcPr>
+                </a:tc>
+                <a:tc>
+                  <a:txBody>
+                    <a:bodyPr/>
+                    <a:lstStyle/>
+                    <a:p>
+                      <a:pPr algn="ctr" indent="0" marL="0">
+                        <a:buNone/>
+                      </a:pPr>
+                      <a:r>
+                        <a:rPr lang="en-US" sz="1300" dirty="0">
+                          <a:solidFill>
+                            <a:srgbClr val="0066CC"/>
+                          </a:solidFill>
+                          <a:latin typeface="Pretendard Medium" pitchFamily="34" charset="0"/>
+                          <a:ea typeface="Pretendard Medium" pitchFamily="34" charset="-122"/>
+                          <a:cs typeface="Pretendard Medium" pitchFamily="34" charset="-120"/>
+                        </a:rPr>
+                        <a:t>✓ 수정</a:t>
+                      </a:r>
+                      <a:endParaRPr lang="en-US" sz="1300" dirty="0">
+                        <a:latin typeface="Pretendard Medium" charset="0"/>
+                        <a:ea typeface="Pretendard Medium" charset="0"/>
+                        <a:cs typeface="Pretendard Medium" charset="0"/>
+                      </a:endParaRPr>
+                    </a:p>
+                  </a:txBody>
+                  <a:tcPr marL="76200" marR="76200" marT="50800" marB="50800" anchor="ctr">
+                    <a:lnL w="0" cap="flat" cmpd="sng" algn="ctr">
+                      <a:noFill/>
+                    </a:lnL>
+                    <a:lnR w="0" cap="flat" cmpd="sng" algn="ctr">
+                      <a:noFill/>
+                    </a:lnR>
+                    <a:lnT w="0" cap="flat" cmpd="sng" algn="ctr">
+                      <a:noFill/>
+                    </a:lnT>
+                    <a:lnB w="9525" cap="flat" cmpd="sng" algn="ctr">
+                      <a:solidFill>
+                        <a:srgbClr val="E0E0E0"/>
+                      </a:solidFill>
+                      <a:prstDash val="solid"/>
+                      <a:round/>
+                      <a:headEnd type="none" w="med" len="med"/>
+                      <a:tailEnd type="none" w="med" len="med"/>
+                    </a:lnB>
+                    <a:solidFill>
+                      <a:srgbClr val="FFFFFF"/>
+                    </a:solidFill>
+                  </a:tcPr>
+                </a:tc>
+              </a:tr>
+              <a:tr h="638556">
+                <a:tc>
+                  <a:txBody>
+                    <a:bodyPr/>
+                    <a:lstStyle/>
+                    <a:p>
+                      <a:pPr indent="0" marL="0">
+                        <a:buNone/>
+                      </a:pPr>
+                      <a:r>
+                        <a:rPr lang="en-US" sz="1300" dirty="0">
+                          <a:solidFill>
+                            <a:srgbClr val="1D1D1F"/>
+                          </a:solidFill>
+                          <a:latin typeface="Pretendard Medium" pitchFamily="34" charset="0"/>
+                          <a:ea typeface="Pretendard Medium" pitchFamily="34" charset="-122"/>
+                          <a:cs typeface="Pretendard Medium" pitchFamily="34" charset="-120"/>
+                        </a:rPr>
+                        <a:t>중간</a:t>
+                      </a:r>
+                      <a:endParaRPr lang="en-US" sz="1300" dirty="0">
+                        <a:latin typeface="Pretendard Medium" charset="0"/>
+                        <a:ea typeface="Pretendard Medium" charset="0"/>
+                        <a:cs typeface="Pretendard Medium" charset="0"/>
+                      </a:endParaRPr>
+                    </a:p>
+                  </a:txBody>
+                  <a:tcPr marL="76200" marR="76200" marT="50800" marB="50800" anchor="ctr">
+                    <a:lnL w="0" cap="flat" cmpd="sng" algn="ctr">
+                      <a:noFill/>
+                    </a:lnL>
+                    <a:lnR w="0" cap="flat" cmpd="sng" algn="ctr">
+                      <a:noFill/>
+                    </a:lnR>
+                    <a:lnT w="0" cap="flat" cmpd="sng" algn="ctr">
+                      <a:noFill/>
+                    </a:lnT>
+                    <a:lnB w="9525" cap="flat" cmpd="sng" algn="ctr">
+                      <a:solidFill>
+                        <a:srgbClr val="E0E0E0"/>
+                      </a:solidFill>
+                      <a:prstDash val="solid"/>
+                      <a:round/>
+                      <a:headEnd type="none" w="med" len="med"/>
+                      <a:tailEnd type="none" w="med" len="med"/>
+                    </a:lnB>
+                    <a:solidFill>
+                      <a:srgbClr val="FFFFFF"/>
+                    </a:solidFill>
+                  </a:tcPr>
+                </a:tc>
+                <a:tc>
+                  <a:txBody>
+                    <a:bodyPr/>
+                    <a:lstStyle/>
+                    <a:p>
+                      <a:pPr indent="0" marL="0">
+                        <a:buNone/>
+                      </a:pPr>
+                      <a:r>
+                        <a:rPr lang="en-US" sz="1300" dirty="0">
+                          <a:solidFill>
+                            <a:srgbClr val="1D1D1F"/>
+                          </a:solidFill>
+                          <a:latin typeface="Pretendard SemiBold" pitchFamily="34" charset="0"/>
+                          <a:ea typeface="Pretendard SemiBold" pitchFamily="34" charset="-122"/>
+                          <a:cs typeface="Pretendard SemiBold" pitchFamily="34" charset="-120"/>
+                        </a:rPr>
+                        <a:t>스킬트리</a:t>
+                      </a:r>
+                      <a:endParaRPr lang="en-US" sz="1300" dirty="0">
+                        <a:latin typeface="Pretendard SemiBold" charset="0"/>
+                        <a:ea typeface="Pretendard SemiBold" charset="0"/>
+                        <a:cs typeface="Pretendard SemiBold" charset="0"/>
+                      </a:endParaRPr>
+                    </a:p>
+                  </a:txBody>
+                  <a:tcPr marL="76200" marR="76200" marT="50800" marB="50800" anchor="ctr">
+                    <a:lnL w="0" cap="flat" cmpd="sng" algn="ctr">
+                      <a:noFill/>
+                    </a:lnL>
+                    <a:lnR w="0" cap="flat" cmpd="sng" algn="ctr">
+                      <a:noFill/>
+                    </a:lnR>
+                    <a:lnT w="0" cap="flat" cmpd="sng" algn="ctr">
+                      <a:noFill/>
+                    </a:lnT>
+                    <a:lnB w="9525" cap="flat" cmpd="sng" algn="ctr">
+                      <a:solidFill>
+                        <a:srgbClr val="E0E0E0"/>
+                      </a:solidFill>
+                      <a:prstDash val="solid"/>
+                      <a:round/>
+                      <a:headEnd type="none" w="med" len="med"/>
+                      <a:tailEnd type="none" w="med" len="med"/>
+                    </a:lnB>
+                    <a:solidFill>
+                      <a:srgbClr val="FFFFFF"/>
+                    </a:solidFill>
+                  </a:tcPr>
+                </a:tc>
+                <a:tc>
+                  <a:txBody>
+                    <a:bodyPr/>
+                    <a:lstStyle/>
+                    <a:p>
+                      <a:pPr indent="0" marL="0">
+                        <a:buNone/>
+                      </a:pPr>
+                      <a:r>
+                        <a:rPr lang="en-US" sz="1300" dirty="0">
+                          <a:solidFill>
+                            <a:srgbClr val="333333"/>
+                          </a:solidFill>
+                          <a:latin typeface="Pretendard" pitchFamily="34" charset="0"/>
+                          <a:ea typeface="Pretendard" pitchFamily="34" charset="-122"/>
+                          <a:cs typeface="Pretendard" pitchFamily="34" charset="-120"/>
+                        </a:rPr>
+                        <a:t>숨은 칸으로 이어지는 선 · 모듈 판이 남으면 다음 칸 위치가 드러남</a:t>
+                      </a:r>
+                      <a:endParaRPr lang="en-US" sz="1300" dirty="0">
+                        <a:latin typeface="Pretendard" charset="0"/>
+                        <a:ea typeface="Pretendard" charset="0"/>
+                        <a:cs typeface="Pretendard" charset="0"/>
+                      </a:endParaRPr>
+                    </a:p>
+                  </a:txBody>
+                  <a:tcPr marL="76200" marR="76200" marT="50800" marB="50800" anchor="ctr">
+                    <a:lnL w="0" cap="flat" cmpd="sng" algn="ctr">
+                      <a:noFill/>
+                    </a:lnL>
+                    <a:lnR w="0" cap="flat" cmpd="sng" algn="ctr">
+                      <a:noFill/>
+                    </a:lnR>
+                    <a:lnT w="0" cap="flat" cmpd="sng" algn="ctr">
+                      <a:noFill/>
+                    </a:lnT>
+                    <a:lnB w="9525" cap="flat" cmpd="sng" algn="ctr">
+                      <a:solidFill>
+                        <a:srgbClr val="E0E0E0"/>
+                      </a:solidFill>
+                      <a:prstDash val="solid"/>
+                      <a:round/>
+                      <a:headEnd type="none" w="med" len="med"/>
+                      <a:tailEnd type="none" w="med" len="med"/>
+                    </a:lnB>
+                    <a:solidFill>
+                      <a:srgbClr val="FFFFFF"/>
+                    </a:solidFill>
+                  </a:tcPr>
+                </a:tc>
+                <a:tc>
+                  <a:txBody>
+                    <a:bodyPr/>
+                    <a:lstStyle/>
+                    <a:p>
+                      <a:pPr indent="0" marL="0">
+                        <a:buNone/>
+                      </a:pPr>
+                      <a:r>
+                        <a:rPr lang="en-US" sz="1300" dirty="0">
+                          <a:solidFill>
+                            <a:srgbClr val="333333"/>
+                          </a:solidFill>
+                          <a:latin typeface="Pretendard" pitchFamily="34" charset="0"/>
+                          <a:ea typeface="Pretendard" pitchFamily="34" charset="-122"/>
+                          <a:cs typeface="Pretendard" pitchFamily="34" charset="-120"/>
+                        </a:rPr>
+                        <a:t>두 끝이 모두 보이는 선만, 한 칸이라도 드러난 판만 표시</a:t>
+                      </a:r>
+                      <a:endParaRPr lang="en-US" sz="1300" dirty="0">
+                        <a:latin typeface="Pretendard" charset="0"/>
+                        <a:ea typeface="Pretendard" charset="0"/>
+                        <a:cs typeface="Pretendard" charset="0"/>
+                      </a:endParaRPr>
+                    </a:p>
+                  </a:txBody>
+                  <a:tcPr marL="76200" marR="76200" marT="50800" marB="50800" anchor="ctr">
+                    <a:lnL w="0" cap="flat" cmpd="sng" algn="ctr">
+                      <a:noFill/>
+                    </a:lnL>
+                    <a:lnR w="0" cap="flat" cmpd="sng" algn="ctr">
+                      <a:noFill/>
+                    </a:lnR>
+                    <a:lnT w="0" cap="flat" cmpd="sng" algn="ctr">
+                      <a:noFill/>
+                    </a:lnT>
+                    <a:lnB w="9525" cap="flat" cmpd="sng" algn="ctr">
+                      <a:solidFill>
+                        <a:srgbClr val="E0E0E0"/>
+                      </a:solidFill>
+                      <a:prstDash val="solid"/>
+                      <a:round/>
+                      <a:headEnd type="none" w="med" len="med"/>
+                      <a:tailEnd type="none" w="med" len="med"/>
+                    </a:lnB>
+                    <a:solidFill>
+                      <a:srgbClr val="FFFFFF"/>
+                    </a:solidFill>
+                  </a:tcPr>
+                </a:tc>
+                <a:tc>
+                  <a:txBody>
+                    <a:bodyPr/>
+                    <a:lstStyle/>
+                    <a:p>
+                      <a:pPr algn="ctr" indent="0" marL="0">
+                        <a:buNone/>
+                      </a:pPr>
+                      <a:r>
+                        <a:rPr lang="en-US" sz="1300" dirty="0">
+                          <a:solidFill>
+                            <a:srgbClr val="0066CC"/>
+                          </a:solidFill>
+                          <a:latin typeface="Pretendard Medium" pitchFamily="34" charset="0"/>
+                          <a:ea typeface="Pretendard Medium" pitchFamily="34" charset="-122"/>
+                          <a:cs typeface="Pretendard Medium" pitchFamily="34" charset="-120"/>
+                        </a:rPr>
+                        <a:t>✓ 수정</a:t>
+                      </a:r>
+                      <a:endParaRPr lang="en-US" sz="1300" dirty="0">
+                        <a:latin typeface="Pretendard Medium" charset="0"/>
+                        <a:ea typeface="Pretendard Medium" charset="0"/>
+                        <a:cs typeface="Pretendard Medium" charset="0"/>
+                      </a:endParaRPr>
+                    </a:p>
+                  </a:txBody>
+                  <a:tcPr marL="76200" marR="76200" marT="50800" marB="50800" anchor="ctr">
+                    <a:lnL w="0" cap="flat" cmpd="sng" algn="ctr">
+                      <a:noFill/>
+                    </a:lnL>
+                    <a:lnR w="0" cap="flat" cmpd="sng" algn="ctr">
+                      <a:noFill/>
+                    </a:lnR>
+                    <a:lnT w="0" cap="flat" cmpd="sng" algn="ctr">
+                      <a:noFill/>
+                    </a:lnT>
+                    <a:lnB w="9525" cap="flat" cmpd="sng" algn="ctr">
+                      <a:solidFill>
+                        <a:srgbClr val="E0E0E0"/>
+                      </a:solidFill>
+                      <a:prstDash val="solid"/>
+                      <a:round/>
+                      <a:headEnd type="none" w="med" len="med"/>
+                      <a:tailEnd type="none" w="med" len="med"/>
+                    </a:lnB>
+                    <a:solidFill>
+                      <a:srgbClr val="FFFFFF"/>
+                    </a:solidFill>
+                  </a:tcPr>
+                </a:tc>
+              </a:tr>
+              <a:tr h="638556">
+                <a:tc>
+                  <a:txBody>
+                    <a:bodyPr/>
+                    <a:lstStyle/>
+                    <a:p>
+                      <a:pPr indent="0" marL="0">
+                        <a:buNone/>
+                      </a:pPr>
+                      <a:r>
+                        <a:rPr lang="en-US" sz="1300" dirty="0">
+                          <a:solidFill>
+                            <a:srgbClr val="7A7A7A"/>
+                          </a:solidFill>
+                          <a:latin typeface="Pretendard" pitchFamily="34" charset="0"/>
+                          <a:ea typeface="Pretendard" pitchFamily="34" charset="-122"/>
+                          <a:cs typeface="Pretendard" pitchFamily="34" charset="-120"/>
+                        </a:rPr>
+                        <a:t>낮음</a:t>
+                      </a:r>
+                      <a:endParaRPr lang="en-US" sz="1300" dirty="0">
+                        <a:latin typeface="Pretendard" charset="0"/>
+                        <a:ea typeface="Pretendard" charset="0"/>
+                        <a:cs typeface="Pretendard" charset="0"/>
+                      </a:endParaRPr>
+                    </a:p>
+                  </a:txBody>
+                  <a:tcPr marL="76200" marR="76200" marT="50800" marB="50800" anchor="ctr">
+                    <a:lnL w="0" cap="flat" cmpd="sng" algn="ctr">
+                      <a:noFill/>
+                    </a:lnL>
+                    <a:lnR w="0" cap="flat" cmpd="sng" algn="ctr">
+                      <a:noFill/>
+                    </a:lnR>
+                    <a:lnT w="0" cap="flat" cmpd="sng" algn="ctr">
+                      <a:noFill/>
+                    </a:lnT>
+                    <a:lnB w="9525" cap="flat" cmpd="sng" algn="ctr">
+                      <a:solidFill>
+                        <a:srgbClr val="E0E0E0"/>
+                      </a:solidFill>
+                      <a:prstDash val="solid"/>
+                      <a:round/>
+                      <a:headEnd type="none" w="med" len="med"/>
+                      <a:tailEnd type="none" w="med" len="med"/>
+                    </a:lnB>
+                    <a:solidFill>
+                      <a:srgbClr val="FFFFFF"/>
+                    </a:solidFill>
+                  </a:tcPr>
+                </a:tc>
+                <a:tc>
+                  <a:txBody>
+                    <a:bodyPr/>
+                    <a:lstStyle/>
+                    <a:p>
+                      <a:pPr indent="0" marL="0">
+                        <a:buNone/>
+                      </a:pPr>
+                      <a:r>
+                        <a:rPr lang="en-US" sz="1300" dirty="0">
+                          <a:solidFill>
+                            <a:srgbClr val="1D1D1F"/>
+                          </a:solidFill>
+                          <a:latin typeface="Pretendard SemiBold" pitchFamily="34" charset="0"/>
+                          <a:ea typeface="Pretendard SemiBold" pitchFamily="34" charset="-122"/>
+                          <a:cs typeface="Pretendard SemiBold" pitchFamily="34" charset="-120"/>
+                        </a:rPr>
+                        <a:t>툴팁</a:t>
+                      </a:r>
+                      <a:endParaRPr lang="en-US" sz="1300" dirty="0">
+                        <a:latin typeface="Pretendard SemiBold" charset="0"/>
+                        <a:ea typeface="Pretendard SemiBold" charset="0"/>
+                        <a:cs typeface="Pretendard SemiBold" charset="0"/>
+                      </a:endParaRPr>
+                    </a:p>
+                  </a:txBody>
+                  <a:tcPr marL="76200" marR="76200" marT="50800" marB="50800" anchor="ctr">
+                    <a:lnL w="0" cap="flat" cmpd="sng" algn="ctr">
+                      <a:noFill/>
+                    </a:lnL>
+                    <a:lnR w="0" cap="flat" cmpd="sng" algn="ctr">
+                      <a:noFill/>
+                    </a:lnR>
+                    <a:lnT w="0" cap="flat" cmpd="sng" algn="ctr">
+                      <a:noFill/>
+                    </a:lnT>
+                    <a:lnB w="9525" cap="flat" cmpd="sng" algn="ctr">
+                      <a:solidFill>
+                        <a:srgbClr val="E0E0E0"/>
+                      </a:solidFill>
+                      <a:prstDash val="solid"/>
+                      <a:round/>
+                      <a:headEnd type="none" w="med" len="med"/>
+                      <a:tailEnd type="none" w="med" len="med"/>
+                    </a:lnB>
+                    <a:solidFill>
+                      <a:srgbClr val="FFFFFF"/>
+                    </a:solidFill>
+                  </a:tcPr>
+                </a:tc>
+                <a:tc>
+                  <a:txBody>
+                    <a:bodyPr/>
+                    <a:lstStyle/>
+                    <a:p>
+                      <a:pPr indent="0" marL="0">
+                        <a:buNone/>
+                      </a:pPr>
+                      <a:r>
+                        <a:rPr lang="en-US" sz="1300" dirty="0">
+                          <a:solidFill>
+                            <a:srgbClr val="333333"/>
+                          </a:solidFill>
+                          <a:latin typeface="Pretendard" pitchFamily="34" charset="0"/>
+                          <a:ea typeface="Pretendard" pitchFamily="34" charset="-122"/>
+                          <a:cs typeface="Pretendard" pitchFamily="34" charset="-120"/>
+                        </a:rPr>
+                        <a:t>줌 · 드래그 중 툴팁이 칸에서 떨어짐</a:t>
+                      </a:r>
+                      <a:endParaRPr lang="en-US" sz="1300" dirty="0">
+                        <a:latin typeface="Pretendard" charset="0"/>
+                        <a:ea typeface="Pretendard" charset="0"/>
+                        <a:cs typeface="Pretendard" charset="0"/>
+                      </a:endParaRPr>
+                    </a:p>
+                  </a:txBody>
+                  <a:tcPr marL="76200" marR="76200" marT="50800" marB="50800" anchor="ctr">
+                    <a:lnL w="0" cap="flat" cmpd="sng" algn="ctr">
+                      <a:noFill/>
+                    </a:lnL>
+                    <a:lnR w="0" cap="flat" cmpd="sng" algn="ctr">
+                      <a:noFill/>
+                    </a:lnR>
+                    <a:lnT w="0" cap="flat" cmpd="sng" algn="ctr">
+                      <a:noFill/>
+                    </a:lnT>
+                    <a:lnB w="9525" cap="flat" cmpd="sng" algn="ctr">
+                      <a:solidFill>
+                        <a:srgbClr val="E0E0E0"/>
+                      </a:solidFill>
+                      <a:prstDash val="solid"/>
+                      <a:round/>
+                      <a:headEnd type="none" w="med" len="med"/>
+                      <a:tailEnd type="none" w="med" len="med"/>
+                    </a:lnB>
+                    <a:solidFill>
+                      <a:srgbClr val="FFFFFF"/>
+                    </a:solidFill>
+                  </a:tcPr>
+                </a:tc>
+                <a:tc>
+                  <a:txBody>
+                    <a:bodyPr/>
+                    <a:lstStyle/>
+                    <a:p>
+                      <a:pPr indent="0" marL="0">
+                        <a:buNone/>
+                      </a:pPr>
+                      <a:r>
+                        <a:rPr lang="en-US" sz="1300" dirty="0">
+                          <a:solidFill>
+                            <a:srgbClr val="333333"/>
+                          </a:solidFill>
+                          <a:latin typeface="Pretendard" pitchFamily="34" charset="0"/>
+                          <a:ea typeface="Pretendard" pitchFamily="34" charset="-122"/>
+                          <a:cs typeface="Pretendard" pitchFamily="34" charset="-120"/>
+                        </a:rPr>
+                        <a:t>매 프레임 칸 옆으로 다시 붙이고 화면 밖이면 반대편으로</a:t>
+                      </a:r>
+                      <a:endParaRPr lang="en-US" sz="1300" dirty="0">
+                        <a:latin typeface="Pretendard" charset="0"/>
+                        <a:ea typeface="Pretendard" charset="0"/>
+                        <a:cs typeface="Pretendard" charset="0"/>
+                      </a:endParaRPr>
+                    </a:p>
+                  </a:txBody>
+                  <a:tcPr marL="76200" marR="76200" marT="50800" marB="50800" anchor="ctr">
+                    <a:lnL w="0" cap="flat" cmpd="sng" algn="ctr">
+                      <a:noFill/>
+                    </a:lnL>
+                    <a:lnR w="0" cap="flat" cmpd="sng" algn="ctr">
+                      <a:noFill/>
+                    </a:lnR>
+                    <a:lnT w="0" cap="flat" cmpd="sng" algn="ctr">
+                      <a:noFill/>
+                    </a:lnT>
+                    <a:lnB w="9525" cap="flat" cmpd="sng" algn="ctr">
+                      <a:solidFill>
+                        <a:srgbClr val="E0E0E0"/>
+                      </a:solidFill>
+                      <a:prstDash val="solid"/>
+                      <a:round/>
+                      <a:headEnd type="none" w="med" len="med"/>
+                      <a:tailEnd type="none" w="med" len="med"/>
+                    </a:lnB>
+                    <a:solidFill>
+                      <a:srgbClr val="FFFFFF"/>
+                    </a:solidFill>
+                  </a:tcPr>
+                </a:tc>
+                <a:tc>
+                  <a:txBody>
+                    <a:bodyPr/>
+                    <a:lstStyle/>
+                    <a:p>
+                      <a:pPr algn="ctr" indent="0" marL="0">
+                        <a:buNone/>
+                      </a:pPr>
+                      <a:r>
+                        <a:rPr lang="en-US" sz="1300" dirty="0">
+                          <a:solidFill>
+                            <a:srgbClr val="0066CC"/>
+                          </a:solidFill>
+                          <a:latin typeface="Pretendard Medium" pitchFamily="34" charset="0"/>
+                          <a:ea typeface="Pretendard Medium" pitchFamily="34" charset="-122"/>
+                          <a:cs typeface="Pretendard Medium" pitchFamily="34" charset="-120"/>
+                        </a:rPr>
+                        <a:t>✓ 수정</a:t>
+                      </a:r>
+                      <a:endParaRPr lang="en-US" sz="1300" dirty="0">
+                        <a:latin typeface="Pretendard Medium" charset="0"/>
+                        <a:ea typeface="Pretendard Medium" charset="0"/>
+                        <a:cs typeface="Pretendard Medium" charset="0"/>
+                      </a:endParaRPr>
+                    </a:p>
+                  </a:txBody>
+                  <a:tcPr marL="76200" marR="76200" marT="50800" marB="50800" anchor="ctr">
+                    <a:lnL w="0" cap="flat" cmpd="sng" algn="ctr">
+                      <a:noFill/>
+                    </a:lnL>
+                    <a:lnR w="0" cap="flat" cmpd="sng" algn="ctr">
+                      <a:noFill/>
+                    </a:lnR>
+                    <a:lnT w="0" cap="flat" cmpd="sng" algn="ctr">
+                      <a:noFill/>
+                    </a:lnT>
+                    <a:lnB w="9525" cap="flat" cmpd="sng" algn="ctr">
+                      <a:solidFill>
+                        <a:srgbClr val="E0E0E0"/>
+                      </a:solidFill>
+                      <a:prstDash val="solid"/>
+                      <a:round/>
+                      <a:headEnd type="none" w="med" len="med"/>
+                      <a:tailEnd type="none" w="med" len="med"/>
+                    </a:lnB>
+                    <a:solidFill>
+                      <a:srgbClr val="FFFFFF"/>
+                    </a:solidFill>
+                  </a:tcPr>
+                </a:tc>
+              </a:tr>
+            </a:tbl>
+          </a:graphicData>
+        </a:graphic>
+      </p:graphicFrame>
+      <p:sp>
+        <p:nvSpPr>
+          <p:cNvPr id="6" name="Text 3"/>
+          <p:cNvSpPr txBox="1"/>
+          <p:nvPr/>
+        </p:nvSpPr>
+        <p:spPr>
+          <a:xfrm>
+            <a:off x="609905" y="5257800"/>
+            <a:ext cx="2651760" cy="502920"/>
+          </a:xfrm>
+          <a:prstGeom prst="rect">
+            <a:avLst/>
+          </a:prstGeom>
+          <a:noFill/>
+          <a:ln/>
+        </p:spPr>
+        <p:txBody>
+          <a:bodyPr wrap="square" lIns="0" tIns="0" rIns="0" bIns="0" rtlCol="0" anchor="ctr"/>
+          <a:lstStyle/>
+          <a:p>
+            <a:pPr indent="0" marL="0">
+              <a:buNone/>
+            </a:pPr>
+            <a:r>
+              <a:rPr lang="en-US" sz="2800" dirty="0">
+                <a:solidFill>
+                  <a:srgbClr val="1D1D1F"/>
+                </a:solidFill>
+                <a:latin typeface="Pretendard SemiBold" pitchFamily="34" charset="0"/>
+                <a:ea typeface="Pretendard SemiBold" pitchFamily="34" charset="-122"/>
+                <a:cs typeface="Pretendard SemiBold" pitchFamily="34" charset="-120"/>
+              </a:rPr>
+              <a:t>3건</a:t>
+            </a:r>
+            <a:endParaRPr lang="en-US" sz="2800" dirty="0"/>
+          </a:p>
+        </p:txBody>
+      </p:sp>
+      <p:sp>
+        <p:nvSpPr>
+          <p:cNvPr id="7" name="Text 4"/>
+          <p:cNvSpPr txBox="1"/>
+          <p:nvPr/>
+        </p:nvSpPr>
+        <p:spPr>
+          <a:xfrm>
+            <a:off x="609905" y="5788152"/>
+            <a:ext cx="2651760" cy="228600"/>
+          </a:xfrm>
+          <a:prstGeom prst="rect">
+            <a:avLst/>
+          </a:prstGeom>
+          <a:noFill/>
+          <a:ln/>
+        </p:spPr>
+        <p:txBody>
+          <a:bodyPr wrap="square" lIns="0" tIns="0" rIns="0" bIns="0" rtlCol="0" anchor="t"/>
+          <a:lstStyle/>
+          <a:p>
+            <a:pPr indent="0" marL="0">
+              <a:buNone/>
+            </a:pPr>
+            <a:r>
+              <a:rPr lang="en-US" sz="1200" dirty="0">
+                <a:solidFill>
+                  <a:srgbClr val="7A7A7A"/>
+                </a:solidFill>
+                <a:latin typeface="Pretendard" pitchFamily="34" charset="0"/>
+                <a:ea typeface="Pretendard" pitchFamily="34" charset="-122"/>
+                <a:cs typeface="Pretendard" pitchFamily="34" charset="-120"/>
+              </a:rPr>
+              <a:t>이 회차에서 발견</a:t>
+            </a:r>
+            <a:endParaRPr lang="en-US" sz="1200" dirty="0"/>
+          </a:p>
+        </p:txBody>
+      </p:sp>
+      <p:sp>
+        <p:nvSpPr>
+          <p:cNvPr id="8" name="Shape 5"/>
+          <p:cNvSpPr/>
+          <p:nvPr/>
+        </p:nvSpPr>
+        <p:spPr>
+          <a:xfrm>
+            <a:off x="3353105" y="5303520"/>
+            <a:ext cx="0" cy="868680"/>
+          </a:xfrm>
+          <a:prstGeom prst="line">
+            <a:avLst/>
+          </a:prstGeom>
+          <a:noFill/>
+          <a:ln w="9525">
+            <a:solidFill>
+              <a:srgbClr val="E0E0E0"/>
+            </a:solidFill>
+            <a:prstDash val="solid"/>
+          </a:ln>
+        </p:spPr>
+      </p:sp>
+      <p:sp>
+        <p:nvSpPr>
+          <p:cNvPr id="9" name="Text 6"/>
+          <p:cNvSpPr txBox="1"/>
+          <p:nvPr/>
+        </p:nvSpPr>
+        <p:spPr>
+          <a:xfrm>
+            <a:off x="3627425" y="5257800"/>
+            <a:ext cx="2377440" cy="502920"/>
+          </a:xfrm>
+          <a:prstGeom prst="rect">
+            <a:avLst/>
+          </a:prstGeom>
+          <a:noFill/>
+          <a:ln/>
+        </p:spPr>
+        <p:txBody>
+          <a:bodyPr wrap="square" lIns="0" tIns="0" rIns="0" bIns="0" rtlCol="0" anchor="ctr"/>
+          <a:lstStyle/>
+          <a:p>
+            <a:pPr indent="0" marL="0">
+              <a:buNone/>
+            </a:pPr>
+            <a:r>
+              <a:rPr lang="en-US" sz="2800" dirty="0">
+                <a:solidFill>
+                  <a:srgbClr val="1D1D1F"/>
+                </a:solidFill>
+                <a:latin typeface="Pretendard SemiBold" pitchFamily="34" charset="0"/>
+                <a:ea typeface="Pretendard SemiBold" pitchFamily="34" charset="-122"/>
+                <a:cs typeface="Pretendard SemiBold" pitchFamily="34" charset="-120"/>
+              </a:rPr>
+              <a:t>1건</a:t>
+            </a:r>
+            <a:endParaRPr lang="en-US" sz="2800" dirty="0"/>
+          </a:p>
+        </p:txBody>
+      </p:sp>
+      <p:sp>
+        <p:nvSpPr>
+          <p:cNvPr id="10" name="Text 7"/>
+          <p:cNvSpPr txBox="1"/>
+          <p:nvPr/>
+        </p:nvSpPr>
+        <p:spPr>
+          <a:xfrm>
+            <a:off x="3627425" y="5788152"/>
+            <a:ext cx="2377440" cy="228600"/>
+          </a:xfrm>
+          <a:prstGeom prst="rect">
+            <a:avLst/>
+          </a:prstGeom>
+          <a:noFill/>
+          <a:ln/>
+        </p:spPr>
+        <p:txBody>
+          <a:bodyPr wrap="square" lIns="0" tIns="0" rIns="0" bIns="0" rtlCol="0" anchor="t"/>
+          <a:lstStyle/>
+          <a:p>
+            <a:pPr indent="0" marL="0">
+              <a:buNone/>
+            </a:pPr>
+            <a:r>
+              <a:rPr lang="en-US" sz="1200" dirty="0">
+                <a:solidFill>
+                  <a:srgbClr val="7A7A7A"/>
+                </a:solidFill>
+                <a:latin typeface="Pretendard" pitchFamily="34" charset="0"/>
+                <a:ea typeface="Pretendard" pitchFamily="34" charset="-122"/>
+                <a:cs typeface="Pretendard" pitchFamily="34" charset="-120"/>
+              </a:rPr>
+              <a:t>높음</a:t>
+            </a:r>
+            <a:endParaRPr lang="en-US" sz="1200" dirty="0"/>
+          </a:p>
+        </p:txBody>
+      </p:sp>
+      <p:sp>
+        <p:nvSpPr>
+          <p:cNvPr id="11" name="Shape 8"/>
+          <p:cNvSpPr/>
+          <p:nvPr/>
+        </p:nvSpPr>
+        <p:spPr>
+          <a:xfrm>
+            <a:off x="6096305" y="5303520"/>
+            <a:ext cx="0" cy="868680"/>
+          </a:xfrm>
+          <a:prstGeom prst="line">
+            <a:avLst/>
+          </a:prstGeom>
+          <a:noFill/>
+          <a:ln w="9525">
+            <a:solidFill>
+              <a:srgbClr val="E0E0E0"/>
+            </a:solidFill>
+            <a:prstDash val="solid"/>
+          </a:ln>
+        </p:spPr>
+      </p:sp>
+      <p:sp>
+        <p:nvSpPr>
+          <p:cNvPr id="12" name="Text 9"/>
+          <p:cNvSpPr txBox="1"/>
+          <p:nvPr/>
+        </p:nvSpPr>
+        <p:spPr>
+          <a:xfrm>
+            <a:off x="6370625" y="5257800"/>
+            <a:ext cx="2377440" cy="502920"/>
+          </a:xfrm>
+          <a:prstGeom prst="rect">
+            <a:avLst/>
+          </a:prstGeom>
+          <a:noFill/>
+          <a:ln/>
+        </p:spPr>
+        <p:txBody>
+          <a:bodyPr wrap="square" lIns="0" tIns="0" rIns="0" bIns="0" rtlCol="0" anchor="ctr"/>
+          <a:lstStyle/>
+          <a:p>
+            <a:pPr indent="0" marL="0">
+              <a:buNone/>
+            </a:pPr>
+            <a:r>
+              <a:rPr lang="en-US" sz="2800" dirty="0">
+                <a:solidFill>
+                  <a:srgbClr val="1D1D1F"/>
+                </a:solidFill>
+                <a:latin typeface="Pretendard SemiBold" pitchFamily="34" charset="0"/>
+                <a:ea typeface="Pretendard SemiBold" pitchFamily="34" charset="-122"/>
+                <a:cs typeface="Pretendard SemiBold" pitchFamily="34" charset="-120"/>
+              </a:rPr>
+              <a:t>2건</a:t>
+            </a:r>
+            <a:endParaRPr lang="en-US" sz="2800" dirty="0"/>
+          </a:p>
+        </p:txBody>
+      </p:sp>
+      <p:sp>
+        <p:nvSpPr>
+          <p:cNvPr id="13" name="Text 10"/>
+          <p:cNvSpPr txBox="1"/>
+          <p:nvPr/>
+        </p:nvSpPr>
+        <p:spPr>
+          <a:xfrm>
+            <a:off x="6370625" y="5788152"/>
+            <a:ext cx="2377440" cy="228600"/>
+          </a:xfrm>
+          <a:prstGeom prst="rect">
+            <a:avLst/>
+          </a:prstGeom>
+          <a:noFill/>
+          <a:ln/>
+        </p:spPr>
+        <p:txBody>
+          <a:bodyPr wrap="square" lIns="0" tIns="0" rIns="0" bIns="0" rtlCol="0" anchor="t"/>
+          <a:lstStyle/>
+          <a:p>
+            <a:pPr indent="0" marL="0">
+              <a:buNone/>
+            </a:pPr>
+            <a:r>
+              <a:rPr lang="en-US" sz="1200" dirty="0">
+                <a:solidFill>
+                  <a:srgbClr val="7A7A7A"/>
+                </a:solidFill>
+                <a:latin typeface="Pretendard" pitchFamily="34" charset="0"/>
+                <a:ea typeface="Pretendard" pitchFamily="34" charset="-122"/>
+                <a:cs typeface="Pretendard" pitchFamily="34" charset="-120"/>
+              </a:rPr>
+              <a:t>중간 · 낮음</a:t>
+            </a:r>
+            <a:endParaRPr lang="en-US" sz="1200" dirty="0"/>
+          </a:p>
+        </p:txBody>
+      </p:sp>
+      <p:sp>
+        <p:nvSpPr>
+          <p:cNvPr id="14" name="Shape 11"/>
+          <p:cNvSpPr/>
+          <p:nvPr/>
+        </p:nvSpPr>
+        <p:spPr>
+          <a:xfrm>
+            <a:off x="8839505" y="5303520"/>
+            <a:ext cx="0" cy="868680"/>
+          </a:xfrm>
+          <a:prstGeom prst="line">
+            <a:avLst/>
+          </a:prstGeom>
+          <a:noFill/>
+          <a:ln w="9525">
+            <a:solidFill>
+              <a:srgbClr val="E0E0E0"/>
+            </a:solidFill>
+            <a:prstDash val="solid"/>
+          </a:ln>
+        </p:spPr>
+      </p:sp>
+      <p:sp>
+        <p:nvSpPr>
+          <p:cNvPr id="15" name="Text 12"/>
+          <p:cNvSpPr txBox="1"/>
+          <p:nvPr/>
+        </p:nvSpPr>
+        <p:spPr>
+          <a:xfrm>
+            <a:off x="9113825" y="5257800"/>
+            <a:ext cx="2377440" cy="502920"/>
+          </a:xfrm>
+          <a:prstGeom prst="rect">
+            <a:avLst/>
+          </a:prstGeom>
+          <a:noFill/>
+          <a:ln/>
+        </p:spPr>
+        <p:txBody>
+          <a:bodyPr wrap="square" lIns="0" tIns="0" rIns="0" bIns="0" rtlCol="0" anchor="ctr"/>
+          <a:lstStyle/>
+          <a:p>
+            <a:pPr indent="0" marL="0">
+              <a:buNone/>
+            </a:pPr>
+            <a:r>
+              <a:rPr lang="en-US" sz="2800" dirty="0">
+                <a:solidFill>
+                  <a:srgbClr val="1D1D1F"/>
+                </a:solidFill>
+                <a:latin typeface="Pretendard SemiBold" pitchFamily="34" charset="0"/>
+                <a:ea typeface="Pretendard SemiBold" pitchFamily="34" charset="-122"/>
+                <a:cs typeface="Pretendard SemiBold" pitchFamily="34" charset="-120"/>
+              </a:rPr>
+              <a:t>3/3</a:t>
+            </a:r>
+            <a:endParaRPr lang="en-US" sz="2800" dirty="0"/>
+          </a:p>
+        </p:txBody>
+      </p:sp>
+      <p:sp>
+        <p:nvSpPr>
+          <p:cNvPr id="16" name="Text 13"/>
+          <p:cNvSpPr txBox="1"/>
+          <p:nvPr/>
+        </p:nvSpPr>
+        <p:spPr>
+          <a:xfrm>
+            <a:off x="9113825" y="5788152"/>
+            <a:ext cx="2377440" cy="228600"/>
+          </a:xfrm>
+          <a:prstGeom prst="rect">
+            <a:avLst/>
+          </a:prstGeom>
+          <a:noFill/>
+          <a:ln/>
+        </p:spPr>
+        <p:txBody>
+          <a:bodyPr wrap="square" lIns="0" tIns="0" rIns="0" bIns="0" rtlCol="0" anchor="t"/>
+          <a:lstStyle/>
+          <a:p>
+            <a:pPr indent="0" marL="0">
+              <a:buNone/>
+            </a:pPr>
+            <a:r>
+              <a:rPr lang="en-US" sz="1200" dirty="0">
+                <a:solidFill>
+                  <a:srgbClr val="7A7A7A"/>
+                </a:solidFill>
+                <a:latin typeface="Pretendard" pitchFamily="34" charset="0"/>
+                <a:ea typeface="Pretendard" pitchFamily="34" charset="-122"/>
+                <a:cs typeface="Pretendard" pitchFamily="34" charset="-120"/>
+              </a:rPr>
+              <a:t>수정 완료</a:t>
+            </a:r>
+            <a:endParaRPr lang="en-US" sz="1200" dirty="0"/>
+          </a:p>
+        </p:txBody>
+      </p:sp>
+      <p:sp>
+        <p:nvSpPr>
+          <p:cNvPr id="17" name="Text 14"/>
+          <p:cNvSpPr txBox="1"/>
+          <p:nvPr/>
+        </p:nvSpPr>
+        <p:spPr>
+          <a:xfrm>
+            <a:off x="609905" y="6446520"/>
+            <a:ext cx="5486400" cy="274320"/>
+          </a:xfrm>
+          <a:prstGeom prst="rect">
+            <a:avLst/>
+          </a:prstGeom>
+          <a:noFill/>
+          <a:ln/>
+        </p:spPr>
+        <p:txBody>
+          <a:bodyPr wrap="square" lIns="0" tIns="0" rIns="0" bIns="0" rtlCol="0" anchor="ctr"/>
+          <a:lstStyle/>
+          <a:p>
+            <a:pPr indent="0" marL="0">
+              <a:buNone/>
+            </a:pPr>
+            <a:r>
+              <a:rPr lang="en-US" sz="1000" spc="200" kern="0" dirty="0">
+                <a:solidFill>
+                  <a:srgbClr val="7A7A7A"/>
+                </a:solidFill>
+                <a:latin typeface="Pretendard" pitchFamily="34" charset="0"/>
+                <a:ea typeface="Pretendard" pitchFamily="34" charset="-122"/>
+                <a:cs typeface="Pretendard" pitchFamily="34" charset="-120"/>
+              </a:rPr>
+              <a:t>QA REPORT  ·  FISH GAME</a:t>
+            </a:r>
+            <a:endParaRPr lang="en-US" sz="1000" dirty="0"/>
+          </a:p>
+        </p:txBody>
+      </p:sp>
+      <p:sp>
+        <p:nvSpPr>
+          <p:cNvPr id="18" name="Text 15"/>
+          <p:cNvSpPr txBox="1"/>
+          <p:nvPr/>
+        </p:nvSpPr>
+        <p:spPr>
+          <a:xfrm>
+            <a:off x="10515600" y="6446520"/>
+            <a:ext cx="1066190" cy="274320"/>
+          </a:xfrm>
+          <a:prstGeom prst="rect">
+            <a:avLst/>
+          </a:prstGeom>
+          <a:noFill/>
+          <a:ln/>
+        </p:spPr>
+        <p:txBody>
+          <a:bodyPr wrap="square" lIns="0" tIns="0" rIns="0" bIns="0" rtlCol="0" anchor="ctr"/>
+          <a:lstStyle/>
+          <a:p>
+            <a:pPr algn="r" indent="0" marL="0">
+              <a:buNone/>
+            </a:pPr>
+            <a:r>
+              <a:rPr lang="en-US" sz="1000" dirty="0">
+                <a:solidFill>
+                  <a:srgbClr val="7A7A7A"/>
+                </a:solidFill>
+                <a:latin typeface="Pretendard" pitchFamily="34" charset="0"/>
+                <a:ea typeface="Pretendard" pitchFamily="34" charset="-122"/>
+                <a:cs typeface="Pretendard" pitchFamily="34" charset="-120"/>
+              </a:rPr>
+              <a:t>25 / 28</a:t>
+            </a:r>
+            <a:endParaRPr lang="en-US" sz="1000" dirty="0"/>
+          </a:p>
+        </p:txBody>
+      </p:sp>
+    </p:spTree>
+  </p:cSld>
+  <p:clrMapOvr>
+    <a:masterClrMapping/>
+  </p:clrMapOvr>
+</p:sld>
+</file>
+
+<file path=ppt/slides/slide26.xml><?xml version="1.0" encoding="utf-8"?>
+<p:sld xmlns:a="http://schemas.openxmlformats.org/drawingml/2006/main" xmlns:r="http://schemas.openxmlformats.org/officeDocument/2006/relationships" xmlns:p="http://schemas.openxmlformats.org/presentationml/2006/main">
+  <p:cSld name="Slide 26">
     <p:bg>
       <p:bgPr>
         <a:solidFill>
@@ -25260,7 +28085,7 @@
                 <a:ea typeface="Pretendard SemiBold" pitchFamily="34" charset="-122"/>
                 <a:cs typeface="Pretendard SemiBold" pitchFamily="34" charset="-120"/>
               </a:rPr>
-              <a:t>남은 위험 · 플레이테스트 체크리스트  (1/2)</a:t>
+              <a:t>남은 위험 · 플레이테스트 체크리스트  (1/3)</a:t>
             </a:r>
             <a:endParaRPr lang="en-US" sz="4000" dirty="0"/>
           </a:p>
@@ -25291,7 +28116,7 @@
       </p:sp>
       <p:graphicFrame>
         <p:nvGraphicFramePr>
-          <p:cNvPr id="25" name="Table 0"/>
+          <p:cNvPr id="27" name="Table 0"/>
           <p:cNvGraphicFramePr>
             <a:graphicFrameLocks noGrp="1"/>
           </p:cNvGraphicFramePr>
@@ -27410,7 +30235,7 @@
                 <a:ea typeface="Pretendard" pitchFamily="34" charset="-122"/>
                 <a:cs typeface="Pretendard" pitchFamily="34" charset="-120"/>
               </a:rPr>
-              <a:t>24 / 25</a:t>
+              <a:t>26 / 28</a:t>
             </a:r>
             <a:endParaRPr lang="en-US" sz="1000" dirty="0"/>
           </a:p>
@@ -27424,9 +30249,9 @@
 </p:sld>
 </file>
 
-<file path=ppt/slides/slide25.xml><?xml version="1.0" encoding="utf-8"?>
+<file path=ppt/slides/slide27.xml><?xml version="1.0" encoding="utf-8"?>
 <p:sld xmlns:a="http://schemas.openxmlformats.org/drawingml/2006/main" xmlns:r="http://schemas.openxmlformats.org/officeDocument/2006/relationships" xmlns:p="http://schemas.openxmlformats.org/presentationml/2006/main">
-  <p:cSld name="Slide 25">
+  <p:cSld name="Slide 27">
     <p:bg>
       <p:bgPr>
         <a:solidFill>
@@ -27520,7 +30345,7 @@
                 <a:ea typeface="Pretendard SemiBold" pitchFamily="34" charset="-122"/>
                 <a:cs typeface="Pretendard SemiBold" pitchFamily="34" charset="-120"/>
               </a:rPr>
-              <a:t>남은 위험 · 플레이테스트 체크리스트  (2/2)</a:t>
+              <a:t>남은 위험 · 플레이테스트 체크리스트  (2/3)</a:t>
             </a:r>
             <a:endParaRPr lang="en-US" sz="4000" dirty="0"/>
           </a:p>
@@ -27551,7 +30376,7 @@
       </p:sp>
       <p:graphicFrame>
         <p:nvGraphicFramePr>
-          <p:cNvPr id="26" name="Table 0"/>
+          <p:cNvPr id="28" name="Table 0"/>
           <p:cNvGraphicFramePr>
             <a:graphicFrameLocks noGrp="1"/>
           </p:cNvGraphicFramePr>
@@ -29057,6 +31882,258 @@
                           <a:cs typeface="Pretendard" pitchFamily="34" charset="-120"/>
                         </a:rPr>
                         <a:t>R8</a:t>
+                      </a:r>
+                      <a:endParaRPr lang="en-US" sz="1300" dirty="0">
+                        <a:latin typeface="Pretendard" charset="0"/>
+                        <a:ea typeface="Pretendard" charset="0"/>
+                        <a:cs typeface="Pretendard" charset="0"/>
+                      </a:endParaRPr>
+                    </a:p>
+                  </a:txBody>
+                  <a:tcPr marL="76200" marR="76200" marT="50800" marB="50800" anchor="ctr">
+                    <a:lnL w="0" cap="flat" cmpd="sng" algn="ctr">
+                      <a:noFill/>
+                    </a:lnL>
+                    <a:lnR w="0" cap="flat" cmpd="sng" algn="ctr">
+                      <a:noFill/>
+                    </a:lnR>
+                    <a:lnT w="0" cap="flat" cmpd="sng" algn="ctr">
+                      <a:noFill/>
+                    </a:lnT>
+                    <a:lnB w="9525" cap="flat" cmpd="sng" algn="ctr">
+                      <a:solidFill>
+                        <a:srgbClr val="E0E0E0"/>
+                      </a:solidFill>
+                      <a:prstDash val="solid"/>
+                      <a:round/>
+                      <a:headEnd type="none" w="med" len="med"/>
+                      <a:tailEnd type="none" w="med" len="med"/>
+                    </a:lnB>
+                    <a:solidFill>
+                      <a:srgbClr val="FFFFFF"/>
+                    </a:solidFill>
+                  </a:tcPr>
+                </a:tc>
+              </a:tr>
+              <a:tr h="638556">
+                <a:tc>
+                  <a:txBody>
+                    <a:bodyPr/>
+                    <a:lstStyle/>
+                    <a:p>
+                      <a:pPr indent="0" marL="0">
+                        <a:buNone/>
+                      </a:pPr>
+                      <a:r>
+                        <a:rPr lang="en-US" sz="1300" dirty="0">
+                          <a:solidFill>
+                            <a:srgbClr val="1D1D1F"/>
+                          </a:solidFill>
+                          <a:latin typeface="Pretendard SemiBold" pitchFamily="34" charset="0"/>
+                          <a:ea typeface="Pretendard SemiBold" pitchFamily="34" charset="-122"/>
+                          <a:cs typeface="Pretendard SemiBold" pitchFamily="34" charset="-120"/>
+                        </a:rPr>
+                        <a:t>스킬트리 화면</a:t>
+                      </a:r>
+                      <a:endParaRPr lang="en-US" sz="1300" dirty="0">
+                        <a:latin typeface="Pretendard SemiBold" charset="0"/>
+                        <a:ea typeface="Pretendard SemiBold" charset="0"/>
+                        <a:cs typeface="Pretendard SemiBold" charset="0"/>
+                      </a:endParaRPr>
+                    </a:p>
+                  </a:txBody>
+                  <a:tcPr marL="76200" marR="76200" marT="50800" marB="50800" anchor="ctr">
+                    <a:lnL w="0" cap="flat" cmpd="sng" algn="ctr">
+                      <a:noFill/>
+                    </a:lnL>
+                    <a:lnR w="0" cap="flat" cmpd="sng" algn="ctr">
+                      <a:noFill/>
+                    </a:lnR>
+                    <a:lnT w="0" cap="flat" cmpd="sng" algn="ctr">
+                      <a:noFill/>
+                    </a:lnT>
+                    <a:lnB w="9525" cap="flat" cmpd="sng" algn="ctr">
+                      <a:solidFill>
+                        <a:srgbClr val="E0E0E0"/>
+                      </a:solidFill>
+                      <a:prstDash val="solid"/>
+                      <a:round/>
+                      <a:headEnd type="none" w="med" len="med"/>
+                      <a:tailEnd type="none" w="med" len="med"/>
+                    </a:lnB>
+                    <a:solidFill>
+                      <a:srgbClr val="FFFFFF"/>
+                    </a:solidFill>
+                  </a:tcPr>
+                </a:tc>
+                <a:tc>
+                  <a:txBody>
+                    <a:bodyPr/>
+                    <a:lstStyle/>
+                    <a:p>
+                      <a:pPr indent="0" marL="0">
+                        <a:buNone/>
+                      </a:pPr>
+                      <a:r>
+                        <a:rPr lang="en-US" sz="1300" dirty="0">
+                          <a:solidFill>
+                            <a:srgbClr val="333333"/>
+                          </a:solidFill>
+                          <a:latin typeface="Pretendard" pitchFamily="34" charset="0"/>
+                          <a:ea typeface="Pretendard" pitchFamily="34" charset="-122"/>
+                          <a:cs typeface="Pretendard" pitchFamily="34" charset="-120"/>
+                        </a:rPr>
+                        <a:t>개편한 메인 화면은 Unity가 닫혀 있어 실행 확인 전</a:t>
+                      </a:r>
+                      <a:endParaRPr lang="en-US" sz="1300" dirty="0">
+                        <a:latin typeface="Pretendard" charset="0"/>
+                        <a:ea typeface="Pretendard" charset="0"/>
+                        <a:cs typeface="Pretendard" charset="0"/>
+                      </a:endParaRPr>
+                    </a:p>
+                  </a:txBody>
+                  <a:tcPr marL="76200" marR="76200" marT="50800" marB="50800" anchor="ctr">
+                    <a:lnL w="0" cap="flat" cmpd="sng" algn="ctr">
+                      <a:noFill/>
+                    </a:lnL>
+                    <a:lnR w="0" cap="flat" cmpd="sng" algn="ctr">
+                      <a:noFill/>
+                    </a:lnR>
+                    <a:lnT w="0" cap="flat" cmpd="sng" algn="ctr">
+                      <a:noFill/>
+                    </a:lnT>
+                    <a:lnB w="9525" cap="flat" cmpd="sng" algn="ctr">
+                      <a:solidFill>
+                        <a:srgbClr val="E0E0E0"/>
+                      </a:solidFill>
+                      <a:prstDash val="solid"/>
+                      <a:round/>
+                      <a:headEnd type="none" w="med" len="med"/>
+                      <a:tailEnd type="none" w="med" len="med"/>
+                    </a:lnB>
+                    <a:solidFill>
+                      <a:srgbClr val="FFFFFF"/>
+                    </a:solidFill>
+                  </a:tcPr>
+                </a:tc>
+                <a:tc>
+                  <a:txBody>
+                    <a:bodyPr/>
+                    <a:lstStyle/>
+                    <a:p>
+                      <a:pPr indent="0" marL="0">
+                        <a:buNone/>
+                      </a:pPr>
+                      <a:r>
+                        <a:rPr lang="en-US" sz="1300" dirty="0">
+                          <a:solidFill>
+                            <a:srgbClr val="333333"/>
+                          </a:solidFill>
+                          <a:latin typeface="Pretendard" pitchFamily="34" charset="0"/>
+                          <a:ea typeface="Pretendard" pitchFamily="34" charset="-122"/>
+                          <a:cs typeface="Pretendard" pitchFamily="34" charset="-120"/>
+                        </a:rPr>
+                        <a:t>씬 생성 후 툴팁 위치 · 숨김 · 설정 메뉴 확인</a:t>
+                      </a:r>
+                      <a:endParaRPr lang="en-US" sz="1300" dirty="0">
+                        <a:latin typeface="Pretendard" charset="0"/>
+                        <a:ea typeface="Pretendard" charset="0"/>
+                        <a:cs typeface="Pretendard" charset="0"/>
+                      </a:endParaRPr>
+                    </a:p>
+                  </a:txBody>
+                  <a:tcPr marL="76200" marR="76200" marT="50800" marB="50800" anchor="ctr">
+                    <a:lnL w="0" cap="flat" cmpd="sng" algn="ctr">
+                      <a:noFill/>
+                    </a:lnL>
+                    <a:lnR w="0" cap="flat" cmpd="sng" algn="ctr">
+                      <a:noFill/>
+                    </a:lnR>
+                    <a:lnT w="0" cap="flat" cmpd="sng" algn="ctr">
+                      <a:noFill/>
+                    </a:lnT>
+                    <a:lnB w="9525" cap="flat" cmpd="sng" algn="ctr">
+                      <a:solidFill>
+                        <a:srgbClr val="E0E0E0"/>
+                      </a:solidFill>
+                      <a:prstDash val="solid"/>
+                      <a:round/>
+                      <a:headEnd type="none" w="med" len="med"/>
+                      <a:tailEnd type="none" w="med" len="med"/>
+                    </a:lnB>
+                    <a:solidFill>
+                      <a:srgbClr val="FFFFFF"/>
+                    </a:solidFill>
+                  </a:tcPr>
+                </a:tc>
+                <a:tc>
+                  <a:txBody>
+                    <a:bodyPr/>
+                    <a:lstStyle/>
+                    <a:p>
+                      <a:pPr algn="ctr" indent="0" marL="0">
+                        <a:buNone/>
+                      </a:pPr>
+                      <a:r>
+                        <a:rPr lang="en-US" sz="1300" b="1" dirty="0">
+                          <a:solidFill>
+                            <a:srgbClr val="0066CC"/>
+                          </a:solidFill>
+                          <a:latin typeface="Pretendard SemiBold" pitchFamily="34" charset="0"/>
+                          <a:ea typeface="Pretendard SemiBold" pitchFamily="34" charset="-122"/>
+                          <a:cs typeface="Pretendard SemiBold" pitchFamily="34" charset="-120"/>
+                        </a:rPr>
+                        <a:t>확인 필요</a:t>
+                      </a:r>
+                      <a:endParaRPr lang="en-US" sz="1300" dirty="0">
+                        <a:latin typeface="Pretendard SemiBold" charset="0"/>
+                        <a:ea typeface="Pretendard SemiBold" charset="0"/>
+                        <a:cs typeface="Pretendard SemiBold" charset="0"/>
+                      </a:endParaRPr>
+                    </a:p>
+                  </a:txBody>
+                  <a:tcPr marL="76200" marR="76200" marT="50800" marB="50800" anchor="ctr">
+                    <a:lnL w="0" cap="flat" cmpd="sng" algn="ctr">
+                      <a:noFill/>
+                    </a:lnL>
+                    <a:lnR w="0" cap="flat" cmpd="sng" algn="ctr">
+                      <a:noFill/>
+                    </a:lnR>
+                    <a:lnT w="0" cap="flat" cmpd="sng" algn="ctr">
+                      <a:noFill/>
+                    </a:lnT>
+                    <a:lnB w="9525" cap="flat" cmpd="sng" algn="ctr">
+                      <a:solidFill>
+                        <a:srgbClr val="E0E0E0"/>
+                      </a:solidFill>
+                      <a:prstDash val="solid"/>
+                      <a:round/>
+                      <a:headEnd type="none" w="med" len="med"/>
+                      <a:tailEnd type="none" w="med" len="med"/>
+                    </a:lnB>
+                    <a:solidFill>
+                      <a:srgbClr val="FFFFFF"/>
+                    </a:solidFill>
+                  </a:tcPr>
+                </a:tc>
+                <a:tc>
+                  <a:txBody>
+                    <a:bodyPr/>
+                    <a:lstStyle/>
+                    <a:p>
+                      <a:pPr algn="ctr" indent="0" marL="0">
+                        <a:buNone/>
+                      </a:pPr>
+                      <a:r>
+                        <a:rPr lang="en-US" sz="1300" dirty="0">
+                          <a:solidFill>
+                            <a:srgbClr val="7A7A7A"/>
+                          </a:solidFill>
+                          <a:latin typeface="Pretendard" pitchFamily="34" charset="0"/>
+                          <a:ea typeface="Pretendard" pitchFamily="34" charset="-122"/>
+                          <a:cs typeface="Pretendard" pitchFamily="34" charset="-120"/>
+                        </a:rPr>
+                        <a:t>R9</a:t>
                       </a:r>
                       <a:endParaRPr lang="en-US" sz="1300" dirty="0">
                         <a:latin typeface="Pretendard" charset="0"/>
@@ -29166,7 +32243,1136 @@
                 <a:ea typeface="Pretendard" pitchFamily="34" charset="-122"/>
                 <a:cs typeface="Pretendard" pitchFamily="34" charset="-120"/>
               </a:rPr>
-              <a:t>25 / 25</a:t>
+              <a:t>27 / 28</a:t>
+            </a:r>
+            <a:endParaRPr lang="en-US" sz="1000" dirty="0"/>
+          </a:p>
+        </p:txBody>
+      </p:sp>
+    </p:spTree>
+  </p:cSld>
+  <p:clrMapOvr>
+    <a:masterClrMapping/>
+  </p:clrMapOvr>
+</p:sld>
+</file>
+
+<file path=ppt/slides/slide28.xml><?xml version="1.0" encoding="utf-8"?>
+<p:sld xmlns:a="http://schemas.openxmlformats.org/drawingml/2006/main" xmlns:r="http://schemas.openxmlformats.org/officeDocument/2006/relationships" xmlns:p="http://schemas.openxmlformats.org/presentationml/2006/main">
+  <p:cSld name="Slide 28">
+    <p:bg>
+      <p:bgPr>
+        <a:solidFill>
+          <a:srgbClr val="FFFFFF"/>
+        </a:solidFill>
+      </p:bgPr>
+    </p:bg>
+    <p:spTree>
+      <p:nvGrpSpPr>
+        <p:cNvPr id="1" name=""/>
+        <p:cNvGrpSpPr/>
+        <p:nvPr/>
+      </p:nvGrpSpPr>
+      <p:grpSpPr>
+        <a:xfrm>
+          <a:off x="0" y="0"/>
+          <a:ext cx="0" cy="0"/>
+          <a:chOff x="0" y="0"/>
+          <a:chExt cx="0" cy="0"/>
+        </a:xfrm>
+      </p:grpSpPr>
+      <p:sp>
+        <p:nvSpPr>
+          <p:cNvPr id="2" name="Text 0"/>
+          <p:cNvSpPr txBox="1"/>
+          <p:nvPr/>
+        </p:nvSpPr>
+        <p:spPr>
+          <a:xfrm>
+            <a:off x="609905" y="320040"/>
+            <a:ext cx="10972800" cy="228600"/>
+          </a:xfrm>
+          <a:prstGeom prst="rect">
+            <a:avLst/>
+          </a:prstGeom>
+          <a:noFill/>
+          <a:ln/>
+        </p:spPr>
+        <p:txBody>
+          <a:bodyPr wrap="square" lIns="0" tIns="0" rIns="0" bIns="0" rtlCol="0" anchor="t"/>
+          <a:lstStyle/>
+          <a:p>
+            <a:pPr indent="0" marL="0">
+              <a:buNone/>
+            </a:pPr>
+            <a:r>
+              <a:rPr lang="en-US" sz="1100" b="1" spc="200" kern="0" dirty="0">
+                <a:solidFill>
+                  <a:srgbClr val="0066CC"/>
+                </a:solidFill>
+                <a:latin typeface="Pretendard SemiBold" pitchFamily="34" charset="0"/>
+                <a:ea typeface="Pretendard SemiBold" pitchFamily="34" charset="-122"/>
+                <a:cs typeface="Pretendard SemiBold" pitchFamily="34" charset="-120"/>
+              </a:rPr>
+              <a:t>NEXT  OPEN RISKS</a:t>
+            </a:r>
+            <a:endParaRPr lang="en-US" sz="1100" dirty="0"/>
+          </a:p>
+        </p:txBody>
+      </p:sp>
+      <p:sp>
+        <p:nvSpPr>
+          <p:cNvPr id="3" name="Text 1"/>
+          <p:cNvSpPr txBox="1"/>
+          <p:nvPr/>
+        </p:nvSpPr>
+        <p:spPr>
+          <a:xfrm>
+            <a:off x="609905" y="594360"/>
+            <a:ext cx="10972800" cy="777240"/>
+          </a:xfrm>
+          <a:prstGeom prst="rect">
+            <a:avLst/>
+          </a:prstGeom>
+          <a:noFill/>
+          <a:ln/>
+        </p:spPr>
+        <p:txBody>
+          <a:bodyPr wrap="square" lIns="0" tIns="0" rIns="0" bIns="0" rtlCol="0" anchor="t"/>
+          <a:lstStyle/>
+          <a:p>
+            <a:pPr indent="0" marL="0">
+              <a:buNone/>
+            </a:pPr>
+            <a:r>
+              <a:rPr lang="en-US" sz="4000" dirty="0">
+                <a:solidFill>
+                  <a:srgbClr val="1D1D1F"/>
+                </a:solidFill>
+                <a:latin typeface="Pretendard SemiBold" pitchFamily="34" charset="0"/>
+                <a:ea typeface="Pretendard SemiBold" pitchFamily="34" charset="-122"/>
+                <a:cs typeface="Pretendard SemiBold" pitchFamily="34" charset="-120"/>
+              </a:rPr>
+              <a:t>남은 위험 · 플레이테스트 체크리스트  (3/3)</a:t>
+            </a:r>
+            <a:endParaRPr lang="en-US" sz="4000" dirty="0"/>
+          </a:p>
+        </p:txBody>
+      </p:sp>
+      <p:sp>
+        <p:nvSpPr>
+          <p:cNvPr id="4" name="Shape 2"/>
+          <p:cNvSpPr/>
+          <p:nvPr/>
+        </p:nvSpPr>
+        <p:spPr>
+          <a:xfrm>
+            <a:off x="609905" y="1417320"/>
+            <a:ext cx="10972800" cy="0"/>
+          </a:xfrm>
+          <a:prstGeom prst="line">
+            <a:avLst/>
+          </a:prstGeom>
+          <a:noFill/>
+          <a:ln w="9525">
+            <a:solidFill>
+              <a:srgbClr val="E0E0E0"/>
+            </a:solidFill>
+            <a:prstDash val="solid"/>
+          </a:ln>
+        </p:spPr>
+      </p:sp>
+      <p:graphicFrame>
+        <p:nvGraphicFramePr>
+          <p:cNvPr id="29" name="Table 0"/>
+          <p:cNvGraphicFramePr>
+            <a:graphicFrameLocks noGrp="1"/>
+          </p:cNvGraphicFramePr>
+          <p:nvPr>
+            <p:extLst>
+              <p:ext uri="{D42A27DB-BD31-4B8C-83A1-F6EECF244321}">
+                <p14:modId xmlns:p14="http://schemas.microsoft.com/office/powerpoint/2010/main" val="1579011935"/>
+              </p:ext>
+            </p:extLst>
+          </p:nvPr>
+        </p:nvGraphicFramePr>
+        <p:xfrm>
+          <a:off x="609905" y="1600200"/>
+          <a:ext cx="10972800" cy="914400"/>
+        </p:xfrm>
+        <a:graphic>
+          <a:graphicData uri="http://schemas.openxmlformats.org/drawingml/2006/table">
+            <a:tbl>
+              <a:tblPr/>
+              <a:tblGrid>
+                <a:gridCol w="1188720"/>
+                <a:gridCol w="4206240"/>
+                <a:gridCol w="3566160"/>
+                <a:gridCol w="1097280"/>
+                <a:gridCol w="914400"/>
+              </a:tblGrid>
+              <a:tr h="329184">
+                <a:tc>
+                  <a:txBody>
+                    <a:bodyPr/>
+                    <a:lstStyle/>
+                    <a:p>
+                      <a:pPr indent="0" marL="0">
+                        <a:buNone/>
+                      </a:pPr>
+                      <a:r>
+                        <a:rPr lang="en-US" sz="1200" b="1" dirty="0">
+                          <a:solidFill>
+                            <a:srgbClr val="7A7A7A"/>
+                          </a:solidFill>
+                          <a:latin typeface="Pretendard SemiBold" pitchFamily="34" charset="0"/>
+                          <a:ea typeface="Pretendard SemiBold" pitchFamily="34" charset="-122"/>
+                          <a:cs typeface="Pretendard SemiBold" pitchFamily="34" charset="-120"/>
+                        </a:rPr>
+                        <a:t>영역</a:t>
+                      </a:r>
+                      <a:endParaRPr lang="en-US" sz="1200" dirty="0">
+                        <a:latin typeface="Pretendard SemiBold" charset="0"/>
+                        <a:ea typeface="Pretendard SemiBold" charset="0"/>
+                        <a:cs typeface="Pretendard SemiBold" charset="0"/>
+                      </a:endParaRPr>
+                    </a:p>
+                  </a:txBody>
+                  <a:tcPr marL="76200" marR="76200" marT="50800" marB="50800" anchor="ctr">
+                    <a:lnL w="0" cap="flat" cmpd="sng" algn="ctr">
+                      <a:noFill/>
+                    </a:lnL>
+                    <a:lnR w="0" cap="flat" cmpd="sng" algn="ctr">
+                      <a:noFill/>
+                    </a:lnR>
+                    <a:lnT w="0" cap="flat" cmpd="sng" algn="ctr">
+                      <a:noFill/>
+                    </a:lnT>
+                    <a:lnB w="9525" cap="flat" cmpd="sng" algn="ctr">
+                      <a:solidFill>
+                        <a:srgbClr val="E0E0E0"/>
+                      </a:solidFill>
+                      <a:prstDash val="solid"/>
+                      <a:round/>
+                      <a:headEnd type="none" w="med" len="med"/>
+                      <a:tailEnd type="none" w="med" len="med"/>
+                    </a:lnB>
+                    <a:solidFill>
+                      <a:srgbClr val="F5F5F7"/>
+                    </a:solidFill>
+                  </a:tcPr>
+                </a:tc>
+                <a:tc>
+                  <a:txBody>
+                    <a:bodyPr/>
+                    <a:lstStyle/>
+                    <a:p>
+                      <a:pPr indent="0" marL="0">
+                        <a:buNone/>
+                      </a:pPr>
+                      <a:r>
+                        <a:rPr lang="en-US" sz="1200" b="1" dirty="0">
+                          <a:solidFill>
+                            <a:srgbClr val="7A7A7A"/>
+                          </a:solidFill>
+                          <a:latin typeface="Pretendard SemiBold" pitchFamily="34" charset="0"/>
+                          <a:ea typeface="Pretendard SemiBold" pitchFamily="34" charset="-122"/>
+                          <a:cs typeface="Pretendard SemiBold" pitchFamily="34" charset="-120"/>
+                        </a:rPr>
+                        <a:t>위험</a:t>
+                      </a:r>
+                      <a:endParaRPr lang="en-US" sz="1200" dirty="0">
+                        <a:latin typeface="Pretendard SemiBold" charset="0"/>
+                        <a:ea typeface="Pretendard SemiBold" charset="0"/>
+                        <a:cs typeface="Pretendard SemiBold" charset="0"/>
+                      </a:endParaRPr>
+                    </a:p>
+                  </a:txBody>
+                  <a:tcPr marL="76200" marR="76200" marT="50800" marB="50800" anchor="ctr">
+                    <a:lnL w="0" cap="flat" cmpd="sng" algn="ctr">
+                      <a:noFill/>
+                    </a:lnL>
+                    <a:lnR w="0" cap="flat" cmpd="sng" algn="ctr">
+                      <a:noFill/>
+                    </a:lnR>
+                    <a:lnT w="0" cap="flat" cmpd="sng" algn="ctr">
+                      <a:noFill/>
+                    </a:lnT>
+                    <a:lnB w="9525" cap="flat" cmpd="sng" algn="ctr">
+                      <a:solidFill>
+                        <a:srgbClr val="E0E0E0"/>
+                      </a:solidFill>
+                      <a:prstDash val="solid"/>
+                      <a:round/>
+                      <a:headEnd type="none" w="med" len="med"/>
+                      <a:tailEnd type="none" w="med" len="med"/>
+                    </a:lnB>
+                    <a:solidFill>
+                      <a:srgbClr val="F5F5F7"/>
+                    </a:solidFill>
+                  </a:tcPr>
+                </a:tc>
+                <a:tc>
+                  <a:txBody>
+                    <a:bodyPr/>
+                    <a:lstStyle/>
+                    <a:p>
+                      <a:pPr indent="0" marL="0">
+                        <a:buNone/>
+                      </a:pPr>
+                      <a:r>
+                        <a:rPr lang="en-US" sz="1200" b="1" dirty="0">
+                          <a:solidFill>
+                            <a:srgbClr val="7A7A7A"/>
+                          </a:solidFill>
+                          <a:latin typeface="Pretendard SemiBold" pitchFamily="34" charset="0"/>
+                          <a:ea typeface="Pretendard SemiBold" pitchFamily="34" charset="-122"/>
+                          <a:cs typeface="Pretendard SemiBold" pitchFamily="34" charset="-120"/>
+                        </a:rPr>
+                        <a:t>다음 조치</a:t>
+                      </a:r>
+                      <a:endParaRPr lang="en-US" sz="1200" dirty="0">
+                        <a:latin typeface="Pretendard SemiBold" charset="0"/>
+                        <a:ea typeface="Pretendard SemiBold" charset="0"/>
+                        <a:cs typeface="Pretendard SemiBold" charset="0"/>
+                      </a:endParaRPr>
+                    </a:p>
+                  </a:txBody>
+                  <a:tcPr marL="76200" marR="76200" marT="50800" marB="50800" anchor="ctr">
+                    <a:lnL w="0" cap="flat" cmpd="sng" algn="ctr">
+                      <a:noFill/>
+                    </a:lnL>
+                    <a:lnR w="0" cap="flat" cmpd="sng" algn="ctr">
+                      <a:noFill/>
+                    </a:lnR>
+                    <a:lnT w="0" cap="flat" cmpd="sng" algn="ctr">
+                      <a:noFill/>
+                    </a:lnT>
+                    <a:lnB w="9525" cap="flat" cmpd="sng" algn="ctr">
+                      <a:solidFill>
+                        <a:srgbClr val="E0E0E0"/>
+                      </a:solidFill>
+                      <a:prstDash val="solid"/>
+                      <a:round/>
+                      <a:headEnd type="none" w="med" len="med"/>
+                      <a:tailEnd type="none" w="med" len="med"/>
+                    </a:lnB>
+                    <a:solidFill>
+                      <a:srgbClr val="F5F5F7"/>
+                    </a:solidFill>
+                  </a:tcPr>
+                </a:tc>
+                <a:tc>
+                  <a:txBody>
+                    <a:bodyPr/>
+                    <a:lstStyle/>
+                    <a:p>
+                      <a:pPr indent="0" marL="0">
+                        <a:buNone/>
+                      </a:pPr>
+                      <a:r>
+                        <a:rPr lang="en-US" sz="1200" b="1" dirty="0">
+                          <a:solidFill>
+                            <a:srgbClr val="7A7A7A"/>
+                          </a:solidFill>
+                          <a:latin typeface="Pretendard SemiBold" pitchFamily="34" charset="0"/>
+                          <a:ea typeface="Pretendard SemiBold" pitchFamily="34" charset="-122"/>
+                          <a:cs typeface="Pretendard SemiBold" pitchFamily="34" charset="-120"/>
+                        </a:rPr>
+                        <a:t>상태</a:t>
+                      </a:r>
+                      <a:endParaRPr lang="en-US" sz="1200" dirty="0">
+                        <a:latin typeface="Pretendard SemiBold" charset="0"/>
+                        <a:ea typeface="Pretendard SemiBold" charset="0"/>
+                        <a:cs typeface="Pretendard SemiBold" charset="0"/>
+                      </a:endParaRPr>
+                    </a:p>
+                  </a:txBody>
+                  <a:tcPr marL="76200" marR="76200" marT="50800" marB="50800" anchor="ctr">
+                    <a:lnL w="0" cap="flat" cmpd="sng" algn="ctr">
+                      <a:noFill/>
+                    </a:lnL>
+                    <a:lnR w="0" cap="flat" cmpd="sng" algn="ctr">
+                      <a:noFill/>
+                    </a:lnR>
+                    <a:lnT w="0" cap="flat" cmpd="sng" algn="ctr">
+                      <a:noFill/>
+                    </a:lnT>
+                    <a:lnB w="9525" cap="flat" cmpd="sng" algn="ctr">
+                      <a:solidFill>
+                        <a:srgbClr val="E0E0E0"/>
+                      </a:solidFill>
+                      <a:prstDash val="solid"/>
+                      <a:round/>
+                      <a:headEnd type="none" w="med" len="med"/>
+                      <a:tailEnd type="none" w="med" len="med"/>
+                    </a:lnB>
+                    <a:solidFill>
+                      <a:srgbClr val="F5F5F7"/>
+                    </a:solidFill>
+                  </a:tcPr>
+                </a:tc>
+                <a:tc>
+                  <a:txBody>
+                    <a:bodyPr/>
+                    <a:lstStyle/>
+                    <a:p>
+                      <a:pPr indent="0" marL="0">
+                        <a:buNone/>
+                      </a:pPr>
+                      <a:r>
+                        <a:rPr lang="en-US" sz="1200" b="1" dirty="0">
+                          <a:solidFill>
+                            <a:srgbClr val="7A7A7A"/>
+                          </a:solidFill>
+                          <a:latin typeface="Pretendard SemiBold" pitchFamily="34" charset="0"/>
+                          <a:ea typeface="Pretendard SemiBold" pitchFamily="34" charset="-122"/>
+                          <a:cs typeface="Pretendard SemiBold" pitchFamily="34" charset="-120"/>
+                        </a:rPr>
+                        <a:t>출처</a:t>
+                      </a:r>
+                      <a:endParaRPr lang="en-US" sz="1200" dirty="0">
+                        <a:latin typeface="Pretendard SemiBold" charset="0"/>
+                        <a:ea typeface="Pretendard SemiBold" charset="0"/>
+                        <a:cs typeface="Pretendard SemiBold" charset="0"/>
+                      </a:endParaRPr>
+                    </a:p>
+                  </a:txBody>
+                  <a:tcPr marL="76200" marR="76200" marT="50800" marB="50800" anchor="ctr">
+                    <a:lnL w="0" cap="flat" cmpd="sng" algn="ctr">
+                      <a:noFill/>
+                    </a:lnL>
+                    <a:lnR w="0" cap="flat" cmpd="sng" algn="ctr">
+                      <a:noFill/>
+                    </a:lnR>
+                    <a:lnT w="0" cap="flat" cmpd="sng" algn="ctr">
+                      <a:noFill/>
+                    </a:lnT>
+                    <a:lnB w="9525" cap="flat" cmpd="sng" algn="ctr">
+                      <a:solidFill>
+                        <a:srgbClr val="E0E0E0"/>
+                      </a:solidFill>
+                      <a:prstDash val="solid"/>
+                      <a:round/>
+                      <a:headEnd type="none" w="med" len="med"/>
+                      <a:tailEnd type="none" w="med" len="med"/>
+                    </a:lnB>
+                    <a:solidFill>
+                      <a:srgbClr val="F5F5F7"/>
+                    </a:solidFill>
+                  </a:tcPr>
+                </a:tc>
+              </a:tr>
+              <a:tr h="638556">
+                <a:tc>
+                  <a:txBody>
+                    <a:bodyPr/>
+                    <a:lstStyle/>
+                    <a:p>
+                      <a:pPr indent="0" marL="0">
+                        <a:buNone/>
+                      </a:pPr>
+                      <a:r>
+                        <a:rPr lang="en-US" sz="1300" dirty="0">
+                          <a:solidFill>
+                            <a:srgbClr val="1D1D1F"/>
+                          </a:solidFill>
+                          <a:latin typeface="Pretendard SemiBold" pitchFamily="34" charset="0"/>
+                          <a:ea typeface="Pretendard SemiBold" pitchFamily="34" charset="-122"/>
+                          <a:cs typeface="Pretendard SemiBold" pitchFamily="34" charset="-120"/>
+                        </a:rPr>
+                        <a:t>밸런스</a:t>
+                      </a:r>
+                      <a:endParaRPr lang="en-US" sz="1300" dirty="0">
+                        <a:latin typeface="Pretendard SemiBold" charset="0"/>
+                        <a:ea typeface="Pretendard SemiBold" charset="0"/>
+                        <a:cs typeface="Pretendard SemiBold" charset="0"/>
+                      </a:endParaRPr>
+                    </a:p>
+                  </a:txBody>
+                  <a:tcPr marL="76200" marR="76200" marT="50800" marB="50800" anchor="ctr">
+                    <a:lnL w="0" cap="flat" cmpd="sng" algn="ctr">
+                      <a:noFill/>
+                    </a:lnL>
+                    <a:lnR w="0" cap="flat" cmpd="sng" algn="ctr">
+                      <a:noFill/>
+                    </a:lnR>
+                    <a:lnT w="0" cap="flat" cmpd="sng" algn="ctr">
+                      <a:noFill/>
+                    </a:lnT>
+                    <a:lnB w="9525" cap="flat" cmpd="sng" algn="ctr">
+                      <a:solidFill>
+                        <a:srgbClr val="E0E0E0"/>
+                      </a:solidFill>
+                      <a:prstDash val="solid"/>
+                      <a:round/>
+                      <a:headEnd type="none" w="med" len="med"/>
+                      <a:tailEnd type="none" w="med" len="med"/>
+                    </a:lnB>
+                    <a:solidFill>
+                      <a:srgbClr val="FFFFFF"/>
+                    </a:solidFill>
+                  </a:tcPr>
+                </a:tc>
+                <a:tc>
+                  <a:txBody>
+                    <a:bodyPr/>
+                    <a:lstStyle/>
+                    <a:p>
+                      <a:pPr indent="0" marL="0">
+                        <a:buNone/>
+                      </a:pPr>
+                      <a:r>
+                        <a:rPr lang="en-US" sz="1300" dirty="0">
+                          <a:solidFill>
+                            <a:srgbClr val="333333"/>
+                          </a:solidFill>
+                          <a:latin typeface="Pretendard" pitchFamily="34" charset="0"/>
+                          <a:ea typeface="Pretendard" pitchFamily="34" charset="-122"/>
+                          <a:cs typeface="Pretendard" pitchFamily="34" charset="-120"/>
+                        </a:rPr>
+                        <a:t>칸별 고정 가격으로 풀트리 달성이 클리어 후 +5.5h → +1.0h로 짧아짐</a:t>
+                      </a:r>
+                      <a:endParaRPr lang="en-US" sz="1300" dirty="0">
+                        <a:latin typeface="Pretendard" charset="0"/>
+                        <a:ea typeface="Pretendard" charset="0"/>
+                        <a:cs typeface="Pretendard" charset="0"/>
+                      </a:endParaRPr>
+                    </a:p>
+                  </a:txBody>
+                  <a:tcPr marL="76200" marR="76200" marT="50800" marB="50800" anchor="ctr">
+                    <a:lnL w="0" cap="flat" cmpd="sng" algn="ctr">
+                      <a:noFill/>
+                    </a:lnL>
+                    <a:lnR w="0" cap="flat" cmpd="sng" algn="ctr">
+                      <a:noFill/>
+                    </a:lnR>
+                    <a:lnT w="0" cap="flat" cmpd="sng" algn="ctr">
+                      <a:noFill/>
+                    </a:lnT>
+                    <a:lnB w="9525" cap="flat" cmpd="sng" algn="ctr">
+                      <a:solidFill>
+                        <a:srgbClr val="E0E0E0"/>
+                      </a:solidFill>
+                      <a:prstDash val="solid"/>
+                      <a:round/>
+                      <a:headEnd type="none" w="med" len="med"/>
+                      <a:tailEnd type="none" w="med" len="med"/>
+                    </a:lnB>
+                    <a:solidFill>
+                      <a:srgbClr val="FFFFFF"/>
+                    </a:solidFill>
+                  </a:tcPr>
+                </a:tc>
+                <a:tc>
+                  <a:txBody>
+                    <a:bodyPr/>
+                    <a:lstStyle/>
+                    <a:p>
+                      <a:pPr indent="0" marL="0">
+                        <a:buNone/>
+                      </a:pPr>
+                      <a:r>
+                        <a:rPr lang="en-US" sz="1300" dirty="0">
+                          <a:solidFill>
+                            <a:srgbClr val="333333"/>
+                          </a:solidFill>
+                          <a:latin typeface="Pretendard" pitchFamily="34" charset="0"/>
+                          <a:ea typeface="Pretendard" pitchFamily="34" charset="-122"/>
+                          <a:cs typeface="Pretendard" pitchFamily="34" charset="-120"/>
+                        </a:rPr>
+                        <a:t>더 길게 원하면 깊은 칸 가격만 올리기</a:t>
+                      </a:r>
+                      <a:endParaRPr lang="en-US" sz="1300" dirty="0">
+                        <a:latin typeface="Pretendard" charset="0"/>
+                        <a:ea typeface="Pretendard" charset="0"/>
+                        <a:cs typeface="Pretendard" charset="0"/>
+                      </a:endParaRPr>
+                    </a:p>
+                  </a:txBody>
+                  <a:tcPr marL="76200" marR="76200" marT="50800" marB="50800" anchor="ctr">
+                    <a:lnL w="0" cap="flat" cmpd="sng" algn="ctr">
+                      <a:noFill/>
+                    </a:lnL>
+                    <a:lnR w="0" cap="flat" cmpd="sng" algn="ctr">
+                      <a:noFill/>
+                    </a:lnR>
+                    <a:lnT w="0" cap="flat" cmpd="sng" algn="ctr">
+                      <a:noFill/>
+                    </a:lnT>
+                    <a:lnB w="9525" cap="flat" cmpd="sng" algn="ctr">
+                      <a:solidFill>
+                        <a:srgbClr val="E0E0E0"/>
+                      </a:solidFill>
+                      <a:prstDash val="solid"/>
+                      <a:round/>
+                      <a:headEnd type="none" w="med" len="med"/>
+                      <a:tailEnd type="none" w="med" len="med"/>
+                    </a:lnB>
+                    <a:solidFill>
+                      <a:srgbClr val="FFFFFF"/>
+                    </a:solidFill>
+                  </a:tcPr>
+                </a:tc>
+                <a:tc>
+                  <a:txBody>
+                    <a:bodyPr/>
+                    <a:lstStyle/>
+                    <a:p>
+                      <a:pPr algn="ctr" indent="0" marL="0">
+                        <a:buNone/>
+                      </a:pPr>
+                      <a:r>
+                        <a:rPr lang="en-US" sz="1300" dirty="0">
+                          <a:solidFill>
+                            <a:srgbClr val="7A7A7A"/>
+                          </a:solidFill>
+                          <a:latin typeface="Pretendard" pitchFamily="34" charset="0"/>
+                          <a:ea typeface="Pretendard" pitchFamily="34" charset="-122"/>
+                          <a:cs typeface="Pretendard" pitchFamily="34" charset="-120"/>
+                        </a:rPr>
+                        <a:t>미정</a:t>
+                      </a:r>
+                      <a:endParaRPr lang="en-US" sz="1300" dirty="0">
+                        <a:latin typeface="Pretendard" charset="0"/>
+                        <a:ea typeface="Pretendard" charset="0"/>
+                        <a:cs typeface="Pretendard" charset="0"/>
+                      </a:endParaRPr>
+                    </a:p>
+                  </a:txBody>
+                  <a:tcPr marL="76200" marR="76200" marT="50800" marB="50800" anchor="ctr">
+                    <a:lnL w="0" cap="flat" cmpd="sng" algn="ctr">
+                      <a:noFill/>
+                    </a:lnL>
+                    <a:lnR w="0" cap="flat" cmpd="sng" algn="ctr">
+                      <a:noFill/>
+                    </a:lnR>
+                    <a:lnT w="0" cap="flat" cmpd="sng" algn="ctr">
+                      <a:noFill/>
+                    </a:lnT>
+                    <a:lnB w="9525" cap="flat" cmpd="sng" algn="ctr">
+                      <a:solidFill>
+                        <a:srgbClr val="E0E0E0"/>
+                      </a:solidFill>
+                      <a:prstDash val="solid"/>
+                      <a:round/>
+                      <a:headEnd type="none" w="med" len="med"/>
+                      <a:tailEnd type="none" w="med" len="med"/>
+                    </a:lnB>
+                    <a:solidFill>
+                      <a:srgbClr val="FFFFFF"/>
+                    </a:solidFill>
+                  </a:tcPr>
+                </a:tc>
+                <a:tc>
+                  <a:txBody>
+                    <a:bodyPr/>
+                    <a:lstStyle/>
+                    <a:p>
+                      <a:pPr algn="ctr" indent="0" marL="0">
+                        <a:buNone/>
+                      </a:pPr>
+                      <a:r>
+                        <a:rPr lang="en-US" sz="1300" dirty="0">
+                          <a:solidFill>
+                            <a:srgbClr val="7A7A7A"/>
+                          </a:solidFill>
+                          <a:latin typeface="Pretendard" pitchFamily="34" charset="0"/>
+                          <a:ea typeface="Pretendard" pitchFamily="34" charset="-122"/>
+                          <a:cs typeface="Pretendard" pitchFamily="34" charset="-120"/>
+                        </a:rPr>
+                        <a:t>R9</a:t>
+                      </a:r>
+                      <a:endParaRPr lang="en-US" sz="1300" dirty="0">
+                        <a:latin typeface="Pretendard" charset="0"/>
+                        <a:ea typeface="Pretendard" charset="0"/>
+                        <a:cs typeface="Pretendard" charset="0"/>
+                      </a:endParaRPr>
+                    </a:p>
+                  </a:txBody>
+                  <a:tcPr marL="76200" marR="76200" marT="50800" marB="50800" anchor="ctr">
+                    <a:lnL w="0" cap="flat" cmpd="sng" algn="ctr">
+                      <a:noFill/>
+                    </a:lnL>
+                    <a:lnR w="0" cap="flat" cmpd="sng" algn="ctr">
+                      <a:noFill/>
+                    </a:lnR>
+                    <a:lnT w="0" cap="flat" cmpd="sng" algn="ctr">
+                      <a:noFill/>
+                    </a:lnT>
+                    <a:lnB w="9525" cap="flat" cmpd="sng" algn="ctr">
+                      <a:solidFill>
+                        <a:srgbClr val="E0E0E0"/>
+                      </a:solidFill>
+                      <a:prstDash val="solid"/>
+                      <a:round/>
+                      <a:headEnd type="none" w="med" len="med"/>
+                      <a:tailEnd type="none" w="med" len="med"/>
+                    </a:lnB>
+                    <a:solidFill>
+                      <a:srgbClr val="FFFFFF"/>
+                    </a:solidFill>
+                  </a:tcPr>
+                </a:tc>
+              </a:tr>
+            </a:tbl>
+          </a:graphicData>
+        </a:graphic>
+      </p:graphicFrame>
+      <p:sp>
+        <p:nvSpPr>
+          <p:cNvPr id="6" name="Text 3"/>
+          <p:cNvSpPr txBox="1"/>
+          <p:nvPr/>
+        </p:nvSpPr>
+        <p:spPr>
+          <a:xfrm>
+            <a:off x="609905" y="5257800"/>
+            <a:ext cx="2651760" cy="502920"/>
+          </a:xfrm>
+          <a:prstGeom prst="rect">
+            <a:avLst/>
+          </a:prstGeom>
+          <a:noFill/>
+          <a:ln/>
+        </p:spPr>
+        <p:txBody>
+          <a:bodyPr wrap="square" lIns="0" tIns="0" rIns="0" bIns="0" rtlCol="0" anchor="ctr"/>
+          <a:lstStyle/>
+          <a:p>
+            <a:pPr indent="0" marL="0">
+              <a:buNone/>
+            </a:pPr>
+            <a:r>
+              <a:rPr lang="en-US" sz="2800" dirty="0">
+                <a:solidFill>
+                  <a:srgbClr val="1D1D1F"/>
+                </a:solidFill>
+                <a:latin typeface="Pretendard SemiBold" pitchFamily="34" charset="0"/>
+                <a:ea typeface="Pretendard SemiBold" pitchFamily="34" charset="-122"/>
+                <a:cs typeface="Pretendard SemiBold" pitchFamily="34" charset="-120"/>
+              </a:rPr>
+              <a:t>10건</a:t>
+            </a:r>
+            <a:endParaRPr lang="en-US" sz="2800" dirty="0"/>
+          </a:p>
+        </p:txBody>
+      </p:sp>
+      <p:sp>
+        <p:nvSpPr>
+          <p:cNvPr id="7" name="Text 4"/>
+          <p:cNvSpPr txBox="1"/>
+          <p:nvPr/>
+        </p:nvSpPr>
+        <p:spPr>
+          <a:xfrm>
+            <a:off x="609905" y="5788152"/>
+            <a:ext cx="2651760" cy="228600"/>
+          </a:xfrm>
+          <a:prstGeom prst="rect">
+            <a:avLst/>
+          </a:prstGeom>
+          <a:noFill/>
+          <a:ln/>
+        </p:spPr>
+        <p:txBody>
+          <a:bodyPr wrap="square" lIns="0" tIns="0" rIns="0" bIns="0" rtlCol="0" anchor="t"/>
+          <a:lstStyle/>
+          <a:p>
+            <a:pPr indent="0" marL="0">
+              <a:buNone/>
+            </a:pPr>
+            <a:r>
+              <a:rPr lang="en-US" sz="1200" dirty="0">
+                <a:solidFill>
+                  <a:srgbClr val="7A7A7A"/>
+                </a:solidFill>
+                <a:latin typeface="Pretendard" pitchFamily="34" charset="0"/>
+                <a:ea typeface="Pretendard" pitchFamily="34" charset="-122"/>
+                <a:cs typeface="Pretendard" pitchFamily="34" charset="-120"/>
+              </a:rPr>
+              <a:t>남은 위험</a:t>
+            </a:r>
+            <a:endParaRPr lang="en-US" sz="1200" dirty="0"/>
+          </a:p>
+        </p:txBody>
+      </p:sp>
+      <p:sp>
+        <p:nvSpPr>
+          <p:cNvPr id="8" name="Shape 5"/>
+          <p:cNvSpPr/>
+          <p:nvPr/>
+        </p:nvSpPr>
+        <p:spPr>
+          <a:xfrm>
+            <a:off x="3353105" y="5303520"/>
+            <a:ext cx="0" cy="868680"/>
+          </a:xfrm>
+          <a:prstGeom prst="line">
+            <a:avLst/>
+          </a:prstGeom>
+          <a:noFill/>
+          <a:ln w="9525">
+            <a:solidFill>
+              <a:srgbClr val="E0E0E0"/>
+            </a:solidFill>
+            <a:prstDash val="solid"/>
+          </a:ln>
+        </p:spPr>
+      </p:sp>
+      <p:sp>
+        <p:nvSpPr>
+          <p:cNvPr id="9" name="Text 6"/>
+          <p:cNvSpPr txBox="1"/>
+          <p:nvPr/>
+        </p:nvSpPr>
+        <p:spPr>
+          <a:xfrm>
+            <a:off x="3627425" y="5257800"/>
+            <a:ext cx="2377440" cy="502920"/>
+          </a:xfrm>
+          <a:prstGeom prst="rect">
+            <a:avLst/>
+          </a:prstGeom>
+          <a:noFill/>
+          <a:ln/>
+        </p:spPr>
+        <p:txBody>
+          <a:bodyPr wrap="square" lIns="0" tIns="0" rIns="0" bIns="0" rtlCol="0" anchor="ctr"/>
+          <a:lstStyle/>
+          <a:p>
+            <a:pPr indent="0" marL="0">
+              <a:buNone/>
+            </a:pPr>
+            <a:r>
+              <a:rPr lang="en-US" sz="2800" dirty="0">
+                <a:solidFill>
+                  <a:srgbClr val="1D1D1F"/>
+                </a:solidFill>
+                <a:latin typeface="Pretendard SemiBold" pitchFamily="34" charset="0"/>
+                <a:ea typeface="Pretendard SemiBold" pitchFamily="34" charset="-122"/>
+                <a:cs typeface="Pretendard SemiBold" pitchFamily="34" charset="-120"/>
+              </a:rPr>
+              <a:t>5건</a:t>
+            </a:r>
+            <a:endParaRPr lang="en-US" sz="2800" dirty="0"/>
+          </a:p>
+        </p:txBody>
+      </p:sp>
+      <p:sp>
+        <p:nvSpPr>
+          <p:cNvPr id="10" name="Text 7"/>
+          <p:cNvSpPr txBox="1"/>
+          <p:nvPr/>
+        </p:nvSpPr>
+        <p:spPr>
+          <a:xfrm>
+            <a:off x="3627425" y="5788152"/>
+            <a:ext cx="2377440" cy="228600"/>
+          </a:xfrm>
+          <a:prstGeom prst="rect">
+            <a:avLst/>
+          </a:prstGeom>
+          <a:noFill/>
+          <a:ln/>
+        </p:spPr>
+        <p:txBody>
+          <a:bodyPr wrap="square" lIns="0" tIns="0" rIns="0" bIns="0" rtlCol="0" anchor="t"/>
+          <a:lstStyle/>
+          <a:p>
+            <a:pPr indent="0" marL="0">
+              <a:buNone/>
+            </a:pPr>
+            <a:r>
+              <a:rPr lang="en-US" sz="1200" dirty="0">
+                <a:solidFill>
+                  <a:srgbClr val="7A7A7A"/>
+                </a:solidFill>
+                <a:latin typeface="Pretendard" pitchFamily="34" charset="0"/>
+                <a:ea typeface="Pretendard" pitchFamily="34" charset="-122"/>
+                <a:cs typeface="Pretendard" pitchFamily="34" charset="-120"/>
+              </a:rPr>
+              <a:t>플레이테스트로 확인 필요</a:t>
+            </a:r>
+            <a:endParaRPr lang="en-US" sz="1200" dirty="0"/>
+          </a:p>
+        </p:txBody>
+      </p:sp>
+      <p:sp>
+        <p:nvSpPr>
+          <p:cNvPr id="11" name="Shape 8"/>
+          <p:cNvSpPr/>
+          <p:nvPr/>
+        </p:nvSpPr>
+        <p:spPr>
+          <a:xfrm>
+            <a:off x="6096305" y="5303520"/>
+            <a:ext cx="0" cy="868680"/>
+          </a:xfrm>
+          <a:prstGeom prst="line">
+            <a:avLst/>
+          </a:prstGeom>
+          <a:noFill/>
+          <a:ln w="9525">
+            <a:solidFill>
+              <a:srgbClr val="E0E0E0"/>
+            </a:solidFill>
+            <a:prstDash val="solid"/>
+          </a:ln>
+        </p:spPr>
+      </p:sp>
+      <p:sp>
+        <p:nvSpPr>
+          <p:cNvPr id="12" name="Text 9"/>
+          <p:cNvSpPr txBox="1"/>
+          <p:nvPr/>
+        </p:nvSpPr>
+        <p:spPr>
+          <a:xfrm>
+            <a:off x="6370625" y="5257800"/>
+            <a:ext cx="2377440" cy="502920"/>
+          </a:xfrm>
+          <a:prstGeom prst="rect">
+            <a:avLst/>
+          </a:prstGeom>
+          <a:noFill/>
+          <a:ln/>
+        </p:spPr>
+        <p:txBody>
+          <a:bodyPr wrap="square" lIns="0" tIns="0" rIns="0" bIns="0" rtlCol="0" anchor="ctr"/>
+          <a:lstStyle/>
+          <a:p>
+            <a:pPr indent="0" marL="0">
+              <a:buNone/>
+            </a:pPr>
+            <a:r>
+              <a:rPr lang="en-US" sz="2800" dirty="0">
+                <a:solidFill>
+                  <a:srgbClr val="1D1D1F"/>
+                </a:solidFill>
+                <a:latin typeface="Pretendard SemiBold" pitchFamily="34" charset="0"/>
+                <a:ea typeface="Pretendard SemiBold" pitchFamily="34" charset="-122"/>
+                <a:cs typeface="Pretendard SemiBold" pitchFamily="34" charset="-120"/>
+              </a:rPr>
+              <a:t>5건</a:t>
+            </a:r>
+            <a:endParaRPr lang="en-US" sz="2800" dirty="0"/>
+          </a:p>
+        </p:txBody>
+      </p:sp>
+      <p:sp>
+        <p:nvSpPr>
+          <p:cNvPr id="13" name="Text 10"/>
+          <p:cNvSpPr txBox="1"/>
+          <p:nvPr/>
+        </p:nvSpPr>
+        <p:spPr>
+          <a:xfrm>
+            <a:off x="6370625" y="5788152"/>
+            <a:ext cx="2377440" cy="228600"/>
+          </a:xfrm>
+          <a:prstGeom prst="rect">
+            <a:avLst/>
+          </a:prstGeom>
+          <a:noFill/>
+          <a:ln/>
+        </p:spPr>
+        <p:txBody>
+          <a:bodyPr wrap="square" lIns="0" tIns="0" rIns="0" bIns="0" rtlCol="0" anchor="t"/>
+          <a:lstStyle/>
+          <a:p>
+            <a:pPr indent="0" marL="0">
+              <a:buNone/>
+            </a:pPr>
+            <a:r>
+              <a:rPr lang="en-US" sz="1200" dirty="0">
+                <a:solidFill>
+                  <a:srgbClr val="7A7A7A"/>
+                </a:solidFill>
+                <a:latin typeface="Pretendard" pitchFamily="34" charset="0"/>
+                <a:ea typeface="Pretendard" pitchFamily="34" charset="-122"/>
+                <a:cs typeface="Pretendard" pitchFamily="34" charset="-120"/>
+              </a:rPr>
+              <a:t>조치 방법 미정</a:t>
+            </a:r>
+            <a:endParaRPr lang="en-US" sz="1200" dirty="0"/>
+          </a:p>
+        </p:txBody>
+      </p:sp>
+      <p:sp>
+        <p:nvSpPr>
+          <p:cNvPr id="14" name="Shape 11"/>
+          <p:cNvSpPr/>
+          <p:nvPr/>
+        </p:nvSpPr>
+        <p:spPr>
+          <a:xfrm>
+            <a:off x="8839505" y="5303520"/>
+            <a:ext cx="0" cy="868680"/>
+          </a:xfrm>
+          <a:prstGeom prst="line">
+            <a:avLst/>
+          </a:prstGeom>
+          <a:noFill/>
+          <a:ln w="9525">
+            <a:solidFill>
+              <a:srgbClr val="E0E0E0"/>
+            </a:solidFill>
+            <a:prstDash val="solid"/>
+          </a:ln>
+        </p:spPr>
+      </p:sp>
+      <p:sp>
+        <p:nvSpPr>
+          <p:cNvPr id="15" name="Text 12"/>
+          <p:cNvSpPr txBox="1"/>
+          <p:nvPr/>
+        </p:nvSpPr>
+        <p:spPr>
+          <a:xfrm>
+            <a:off x="9113825" y="5257800"/>
+            <a:ext cx="2377440" cy="502920"/>
+          </a:xfrm>
+          <a:prstGeom prst="rect">
+            <a:avLst/>
+          </a:prstGeom>
+          <a:noFill/>
+          <a:ln/>
+        </p:spPr>
+        <p:txBody>
+          <a:bodyPr wrap="square" lIns="0" tIns="0" rIns="0" bIns="0" rtlCol="0" anchor="ctr"/>
+          <a:lstStyle/>
+          <a:p>
+            <a:pPr indent="0" marL="0">
+              <a:buNone/>
+            </a:pPr>
+            <a:r>
+              <a:rPr lang="en-US" sz="2800" dirty="0">
+                <a:solidFill>
+                  <a:srgbClr val="1D1D1F"/>
+                </a:solidFill>
+                <a:latin typeface="Pretendard SemiBold" pitchFamily="34" charset="0"/>
+                <a:ea typeface="Pretendard SemiBold" pitchFamily="34" charset="-122"/>
+                <a:cs typeface="Pretendard SemiBold" pitchFamily="34" charset="-120"/>
+              </a:rPr>
+              <a:t>2026-09-29</a:t>
+            </a:r>
+            <a:endParaRPr lang="en-US" sz="2800" dirty="0"/>
+          </a:p>
+        </p:txBody>
+      </p:sp>
+      <p:sp>
+        <p:nvSpPr>
+          <p:cNvPr id="16" name="Text 13"/>
+          <p:cNvSpPr txBox="1"/>
+          <p:nvPr/>
+        </p:nvSpPr>
+        <p:spPr>
+          <a:xfrm>
+            <a:off x="9113825" y="5788152"/>
+            <a:ext cx="2377440" cy="228600"/>
+          </a:xfrm>
+          <a:prstGeom prst="rect">
+            <a:avLst/>
+          </a:prstGeom>
+          <a:noFill/>
+          <a:ln/>
+        </p:spPr>
+        <p:txBody>
+          <a:bodyPr wrap="square" lIns="0" tIns="0" rIns="0" bIns="0" rtlCol="0" anchor="t"/>
+          <a:lstStyle/>
+          <a:p>
+            <a:pPr indent="0" marL="0">
+              <a:buNone/>
+            </a:pPr>
+            <a:r>
+              <a:rPr lang="en-US" sz="1200" dirty="0">
+                <a:solidFill>
+                  <a:srgbClr val="7A7A7A"/>
+                </a:solidFill>
+                <a:latin typeface="Pretendard" pitchFamily="34" charset="0"/>
+                <a:ea typeface="Pretendard" pitchFamily="34" charset="-122"/>
+                <a:cs typeface="Pretendard" pitchFamily="34" charset="-120"/>
+              </a:rPr>
+              <a:t>마지막 갱신</a:t>
+            </a:r>
+            <a:endParaRPr lang="en-US" sz="1200" dirty="0"/>
+          </a:p>
+        </p:txBody>
+      </p:sp>
+      <p:sp>
+        <p:nvSpPr>
+          <p:cNvPr id="17" name="Text 14"/>
+          <p:cNvSpPr txBox="1"/>
+          <p:nvPr/>
+        </p:nvSpPr>
+        <p:spPr>
+          <a:xfrm>
+            <a:off x="609905" y="6446520"/>
+            <a:ext cx="5486400" cy="274320"/>
+          </a:xfrm>
+          <a:prstGeom prst="rect">
+            <a:avLst/>
+          </a:prstGeom>
+          <a:noFill/>
+          <a:ln/>
+        </p:spPr>
+        <p:txBody>
+          <a:bodyPr wrap="square" lIns="0" tIns="0" rIns="0" bIns="0" rtlCol="0" anchor="ctr"/>
+          <a:lstStyle/>
+          <a:p>
+            <a:pPr indent="0" marL="0">
+              <a:buNone/>
+            </a:pPr>
+            <a:r>
+              <a:rPr lang="en-US" sz="1000" spc="200" kern="0" dirty="0">
+                <a:solidFill>
+                  <a:srgbClr val="7A7A7A"/>
+                </a:solidFill>
+                <a:latin typeface="Pretendard" pitchFamily="34" charset="0"/>
+                <a:ea typeface="Pretendard" pitchFamily="34" charset="-122"/>
+                <a:cs typeface="Pretendard" pitchFamily="34" charset="-120"/>
+              </a:rPr>
+              <a:t>QA REPORT  ·  FISH GAME</a:t>
+            </a:r>
+            <a:endParaRPr lang="en-US" sz="1000" dirty="0"/>
+          </a:p>
+        </p:txBody>
+      </p:sp>
+      <p:sp>
+        <p:nvSpPr>
+          <p:cNvPr id="18" name="Text 15"/>
+          <p:cNvSpPr txBox="1"/>
+          <p:nvPr/>
+        </p:nvSpPr>
+        <p:spPr>
+          <a:xfrm>
+            <a:off x="10515600" y="6446520"/>
+            <a:ext cx="1066190" cy="274320"/>
+          </a:xfrm>
+          <a:prstGeom prst="rect">
+            <a:avLst/>
+          </a:prstGeom>
+          <a:noFill/>
+          <a:ln/>
+        </p:spPr>
+        <p:txBody>
+          <a:bodyPr wrap="square" lIns="0" tIns="0" rIns="0" bIns="0" rtlCol="0" anchor="ctr"/>
+          <a:lstStyle/>
+          <a:p>
+            <a:pPr algn="r" indent="0" marL="0">
+              <a:buNone/>
+            </a:pPr>
+            <a:r>
+              <a:rPr lang="en-US" sz="1000" dirty="0">
+                <a:solidFill>
+                  <a:srgbClr val="7A7A7A"/>
+                </a:solidFill>
+                <a:latin typeface="Pretendard" pitchFamily="34" charset="0"/>
+                <a:ea typeface="Pretendard" pitchFamily="34" charset="-122"/>
+                <a:cs typeface="Pretendard" pitchFamily="34" charset="-120"/>
+              </a:rPr>
+              <a:t>28 / 28</a:t>
             </a:r>
             <a:endParaRPr lang="en-US" sz="1000" dirty="0"/>
           </a:p>
@@ -29330,7 +33536,7 @@
         <p:spPr>
           <a:xfrm>
             <a:off x="6279185" y="1600200"/>
-            <a:ext cx="5303520" cy="465201"/>
+            <a:ext cx="5303520" cy="399288"/>
           </a:xfrm>
           <a:prstGeom prst="rect">
             <a:avLst/>
@@ -29432,7 +33638,7 @@
         </p:nvSpPr>
         <p:spPr>
           <a:xfrm>
-            <a:off x="9936785" y="1558481"/>
+            <a:off x="9936785" y="1525524"/>
             <a:ext cx="1371600" cy="411480"/>
           </a:xfrm>
           <a:prstGeom prst="rect">
@@ -29471,7 +33677,7 @@
         </p:nvSpPr>
         <p:spPr>
           <a:xfrm>
-            <a:off x="9936785" y="1960817"/>
+            <a:off x="9936785" y="1927860"/>
             <a:ext cx="1371600" cy="201168"/>
           </a:xfrm>
           <a:prstGeom prst="rect">
@@ -29510,8 +33716,8 @@
         </p:nvSpPr>
         <p:spPr>
           <a:xfrm>
-            <a:off x="6279185" y="2193417"/>
-            <a:ext cx="5303520" cy="465201"/>
+            <a:off x="6279185" y="2127504"/>
+            <a:ext cx="5303520" cy="399288"/>
           </a:xfrm>
           <a:prstGeom prst="rect">
             <a:avLst/>
@@ -29535,7 +33741,7 @@
         </p:nvSpPr>
         <p:spPr>
           <a:xfrm>
-            <a:off x="6553505" y="2284857"/>
+            <a:off x="6553505" y="2218944"/>
             <a:ext cx="3291840" cy="237744"/>
           </a:xfrm>
           <a:prstGeom prst="rect">
@@ -29574,7 +33780,7 @@
         </p:nvSpPr>
         <p:spPr>
           <a:xfrm>
-            <a:off x="6553505" y="2522601"/>
+            <a:off x="6553505" y="2456688"/>
             <a:ext cx="3291840" cy="384048"/>
           </a:xfrm>
           <a:prstGeom prst="rect">
@@ -29613,7 +33819,7 @@
         </p:nvSpPr>
         <p:spPr>
           <a:xfrm>
-            <a:off x="9936785" y="2151698"/>
+            <a:off x="9936785" y="2052828"/>
             <a:ext cx="1371600" cy="411480"/>
           </a:xfrm>
           <a:prstGeom prst="rect">
@@ -29652,7 +33858,7 @@
         </p:nvSpPr>
         <p:spPr>
           <a:xfrm>
-            <a:off x="9936785" y="2554034"/>
+            <a:off x="9936785" y="2455164"/>
             <a:ext cx="1371600" cy="201168"/>
           </a:xfrm>
           <a:prstGeom prst="rect">
@@ -29691,8 +33897,8 @@
         </p:nvSpPr>
         <p:spPr>
           <a:xfrm>
-            <a:off x="6279185" y="2786634"/>
-            <a:ext cx="5303520" cy="465201"/>
+            <a:off x="6279185" y="2654808"/>
+            <a:ext cx="5303520" cy="399288"/>
           </a:xfrm>
           <a:prstGeom prst="rect">
             <a:avLst/>
@@ -29716,7 +33922,7 @@
         </p:nvSpPr>
         <p:spPr>
           <a:xfrm>
-            <a:off x="6553505" y="2878074"/>
+            <a:off x="6553505" y="2746248"/>
             <a:ext cx="3291840" cy="237744"/>
           </a:xfrm>
           <a:prstGeom prst="rect">
@@ -29755,7 +33961,7 @@
         </p:nvSpPr>
         <p:spPr>
           <a:xfrm>
-            <a:off x="6553505" y="3115818"/>
+            <a:off x="6553505" y="2983992"/>
             <a:ext cx="3291840" cy="384048"/>
           </a:xfrm>
           <a:prstGeom prst="rect">
@@ -29794,7 +34000,7 @@
         </p:nvSpPr>
         <p:spPr>
           <a:xfrm>
-            <a:off x="9936785" y="2744915"/>
+            <a:off x="9936785" y="2580132"/>
             <a:ext cx="1371600" cy="411480"/>
           </a:xfrm>
           <a:prstGeom prst="rect">
@@ -29833,7 +34039,7 @@
         </p:nvSpPr>
         <p:spPr>
           <a:xfrm>
-            <a:off x="9936785" y="3147251"/>
+            <a:off x="9936785" y="2982468"/>
             <a:ext cx="1371600" cy="201168"/>
           </a:xfrm>
           <a:prstGeom prst="rect">
@@ -29872,8 +34078,8 @@
         </p:nvSpPr>
         <p:spPr>
           <a:xfrm>
-            <a:off x="6279185" y="3379851"/>
-            <a:ext cx="5303520" cy="465201"/>
+            <a:off x="6279185" y="3182112"/>
+            <a:ext cx="5303520" cy="399288"/>
           </a:xfrm>
           <a:prstGeom prst="rect">
             <a:avLst/>
@@ -29897,7 +34103,7 @@
         </p:nvSpPr>
         <p:spPr>
           <a:xfrm>
-            <a:off x="6553505" y="3471291"/>
+            <a:off x="6553505" y="3273552"/>
             <a:ext cx="3291840" cy="237744"/>
           </a:xfrm>
           <a:prstGeom prst="rect">
@@ -29936,7 +34142,7 @@
         </p:nvSpPr>
         <p:spPr>
           <a:xfrm>
-            <a:off x="6553505" y="3709035"/>
+            <a:off x="6553505" y="3511296"/>
             <a:ext cx="3291840" cy="384048"/>
           </a:xfrm>
           <a:prstGeom prst="rect">
@@ -29975,7 +34181,7 @@
         </p:nvSpPr>
         <p:spPr>
           <a:xfrm>
-            <a:off x="9936785" y="3338132"/>
+            <a:off x="9936785" y="3107436"/>
             <a:ext cx="1371600" cy="411480"/>
           </a:xfrm>
           <a:prstGeom prst="rect">
@@ -30014,7 +34220,7 @@
         </p:nvSpPr>
         <p:spPr>
           <a:xfrm>
-            <a:off x="9936785" y="3740468"/>
+            <a:off x="9936785" y="3509772"/>
             <a:ext cx="1371600" cy="201168"/>
           </a:xfrm>
           <a:prstGeom prst="rect">
@@ -30053,8 +34259,8 @@
         </p:nvSpPr>
         <p:spPr>
           <a:xfrm>
-            <a:off x="6279185" y="3973068"/>
-            <a:ext cx="5303520" cy="465201"/>
+            <a:off x="6279185" y="3709416"/>
+            <a:ext cx="5303520" cy="399288"/>
           </a:xfrm>
           <a:prstGeom prst="rect">
             <a:avLst/>
@@ -30078,7 +34284,7 @@
         </p:nvSpPr>
         <p:spPr>
           <a:xfrm>
-            <a:off x="6553505" y="4064508"/>
+            <a:off x="6553505" y="3800856"/>
             <a:ext cx="3291840" cy="237744"/>
           </a:xfrm>
           <a:prstGeom prst="rect">
@@ -30117,7 +34323,7 @@
         </p:nvSpPr>
         <p:spPr>
           <a:xfrm>
-            <a:off x="6553505" y="4302252"/>
+            <a:off x="6553505" y="4038600"/>
             <a:ext cx="3291840" cy="384048"/>
           </a:xfrm>
           <a:prstGeom prst="rect">
@@ -30156,7 +34362,7 @@
         </p:nvSpPr>
         <p:spPr>
           <a:xfrm>
-            <a:off x="9936785" y="3931348"/>
+            <a:off x="9936785" y="3634740"/>
             <a:ext cx="1371600" cy="411480"/>
           </a:xfrm>
           <a:prstGeom prst="rect">
@@ -30195,7 +34401,7 @@
         </p:nvSpPr>
         <p:spPr>
           <a:xfrm>
-            <a:off x="9936785" y="4333684"/>
+            <a:off x="9936785" y="4037076"/>
             <a:ext cx="1371600" cy="201168"/>
           </a:xfrm>
           <a:prstGeom prst="rect">
@@ -30234,8 +34440,8 @@
         </p:nvSpPr>
         <p:spPr>
           <a:xfrm>
-            <a:off x="6279185" y="4566285"/>
-            <a:ext cx="5303520" cy="465201"/>
+            <a:off x="6279185" y="4236720"/>
+            <a:ext cx="5303520" cy="399288"/>
           </a:xfrm>
           <a:prstGeom prst="rect">
             <a:avLst/>
@@ -30259,7 +34465,7 @@
         </p:nvSpPr>
         <p:spPr>
           <a:xfrm>
-            <a:off x="6553505" y="4657725"/>
+            <a:off x="6553505" y="4328160"/>
             <a:ext cx="3291840" cy="237744"/>
           </a:xfrm>
           <a:prstGeom prst="rect">
@@ -30298,7 +34504,7 @@
         </p:nvSpPr>
         <p:spPr>
           <a:xfrm>
-            <a:off x="6553505" y="4895469"/>
+            <a:off x="6553505" y="4565904"/>
             <a:ext cx="3291840" cy="384048"/>
           </a:xfrm>
           <a:prstGeom prst="rect">
@@ -30337,7 +34543,7 @@
         </p:nvSpPr>
         <p:spPr>
           <a:xfrm>
-            <a:off x="9936785" y="4524565"/>
+            <a:off x="9936785" y="4162044"/>
             <a:ext cx="1371600" cy="411480"/>
           </a:xfrm>
           <a:prstGeom prst="rect">
@@ -30376,7 +34582,7 @@
         </p:nvSpPr>
         <p:spPr>
           <a:xfrm>
-            <a:off x="9936785" y="4926901"/>
+            <a:off x="9936785" y="4564380"/>
             <a:ext cx="1371600" cy="201168"/>
           </a:xfrm>
           <a:prstGeom prst="rect">
@@ -30415,8 +34621,8 @@
         </p:nvSpPr>
         <p:spPr>
           <a:xfrm>
-            <a:off x="6279185" y="5159502"/>
-            <a:ext cx="5303520" cy="465201"/>
+            <a:off x="6279185" y="4764024"/>
+            <a:ext cx="5303520" cy="399288"/>
           </a:xfrm>
           <a:prstGeom prst="rect">
             <a:avLst/>
@@ -30440,7 +34646,7 @@
         </p:nvSpPr>
         <p:spPr>
           <a:xfrm>
-            <a:off x="6553505" y="5250942"/>
+            <a:off x="6553505" y="4855464"/>
             <a:ext cx="3291840" cy="237744"/>
           </a:xfrm>
           <a:prstGeom prst="rect">
@@ -30479,7 +34685,7 @@
         </p:nvSpPr>
         <p:spPr>
           <a:xfrm>
-            <a:off x="6553505" y="5488686"/>
+            <a:off x="6553505" y="5093208"/>
             <a:ext cx="3291840" cy="384048"/>
           </a:xfrm>
           <a:prstGeom prst="rect">
@@ -30518,7 +34724,7 @@
         </p:nvSpPr>
         <p:spPr>
           <a:xfrm>
-            <a:off x="9936785" y="5117783"/>
+            <a:off x="9936785" y="4689348"/>
             <a:ext cx="1371600" cy="411480"/>
           </a:xfrm>
           <a:prstGeom prst="rect">
@@ -30557,7 +34763,7 @@
         </p:nvSpPr>
         <p:spPr>
           <a:xfrm>
-            <a:off x="9936785" y="5520118"/>
+            <a:off x="9936785" y="5091684"/>
             <a:ext cx="1371600" cy="201168"/>
           </a:xfrm>
           <a:prstGeom prst="rect">
@@ -30596,8 +34802,8 @@
         </p:nvSpPr>
         <p:spPr>
           <a:xfrm>
-            <a:off x="6279185" y="5752719"/>
-            <a:ext cx="5303520" cy="465201"/>
+            <a:off x="6279185" y="5291328"/>
+            <a:ext cx="5303520" cy="399288"/>
           </a:xfrm>
           <a:prstGeom prst="rect">
             <a:avLst/>
@@ -30621,7 +34827,7 @@
         </p:nvSpPr>
         <p:spPr>
           <a:xfrm>
-            <a:off x="6553505" y="5844159"/>
+            <a:off x="6553505" y="5382768"/>
             <a:ext cx="3291840" cy="237744"/>
           </a:xfrm>
           <a:prstGeom prst="rect">
@@ -30660,7 +34866,7 @@
         </p:nvSpPr>
         <p:spPr>
           <a:xfrm>
-            <a:off x="6553505" y="6081903"/>
+            <a:off x="6553505" y="5620512"/>
             <a:ext cx="3291840" cy="384048"/>
           </a:xfrm>
           <a:prstGeom prst="rect">
@@ -30699,7 +34905,7 @@
         </p:nvSpPr>
         <p:spPr>
           <a:xfrm>
-            <a:off x="9936785" y="5711000"/>
+            <a:off x="9936785" y="5216652"/>
             <a:ext cx="1371600" cy="411480"/>
           </a:xfrm>
           <a:prstGeom prst="rect">
@@ -30738,7 +34944,7 @@
         </p:nvSpPr>
         <p:spPr>
           <a:xfrm>
-            <a:off x="9936785" y="6113335"/>
+            <a:off x="9936785" y="5618988"/>
             <a:ext cx="1371600" cy="201168"/>
           </a:xfrm>
           <a:prstGeom prst="rect">
@@ -30771,7 +34977,188 @@
       </p:sp>
       <p:sp>
         <p:nvSpPr>
-          <p:cNvPr id="46" name="Text 43"/>
+          <p:cNvPr id="46" name="Shape 43"/>
+          <p:cNvSpPr/>
+          <p:nvPr/>
+        </p:nvSpPr>
+        <p:spPr>
+          <a:xfrm>
+            <a:off x="6279185" y="5818632"/>
+            <a:ext cx="5303520" cy="399288"/>
+          </a:xfrm>
+          <a:prstGeom prst="rect">
+            <a:avLst/>
+          </a:prstGeom>
+          <a:solidFill>
+            <a:srgbClr val="FFFFFF"/>
+          </a:solidFill>
+          <a:ln w="9525">
+            <a:solidFill>
+              <a:srgbClr val="E0E0E0"/>
+            </a:solidFill>
+            <a:prstDash val="solid"/>
+          </a:ln>
+        </p:spPr>
+      </p:sp>
+      <p:sp>
+        <p:nvSpPr>
+          <p:cNvPr id="47" name="Text 44"/>
+          <p:cNvSpPr txBox="1"/>
+          <p:nvPr/>
+        </p:nvSpPr>
+        <p:spPr>
+          <a:xfrm>
+            <a:off x="6553505" y="5910072"/>
+            <a:ext cx="3291840" cy="237744"/>
+          </a:xfrm>
+          <a:prstGeom prst="rect">
+            <a:avLst/>
+          </a:prstGeom>
+          <a:noFill/>
+          <a:ln/>
+        </p:spPr>
+        <p:txBody>
+          <a:bodyPr wrap="square" lIns="0" tIns="0" rIns="0" bIns="0" rtlCol="0" anchor="ctr"/>
+          <a:lstStyle/>
+          <a:p>
+            <a:pPr indent="0" marL="0">
+              <a:buNone/>
+            </a:pPr>
+            <a:r>
+              <a:rPr lang="en-US" sz="1200" b="1" dirty="0">
+                <a:solidFill>
+                  <a:srgbClr val="0066CC"/>
+                </a:solidFill>
+                <a:latin typeface="Pretendard SemiBold" pitchFamily="34" charset="0"/>
+                <a:ea typeface="Pretendard SemiBold" pitchFamily="34" charset="-122"/>
+                <a:cs typeface="Pretendard SemiBold" pitchFamily="34" charset="-120"/>
+              </a:rPr>
+              <a:t>R9  2026-09-29   ·   높음 1 · 중간 1 · 낮음 1</a:t>
+            </a:r>
+            <a:endParaRPr lang="en-US" sz="1200" dirty="0"/>
+          </a:p>
+        </p:txBody>
+      </p:sp>
+      <p:sp>
+        <p:nvSpPr>
+          <p:cNvPr id="48" name="Text 45"/>
+          <p:cNvSpPr txBox="1"/>
+          <p:nvPr/>
+        </p:nvSpPr>
+        <p:spPr>
+          <a:xfrm>
+            <a:off x="6553505" y="6147816"/>
+            <a:ext cx="3291840" cy="384048"/>
+          </a:xfrm>
+          <a:prstGeom prst="rect">
+            <a:avLst/>
+          </a:prstGeom>
+          <a:noFill/>
+          <a:ln/>
+        </p:spPr>
+        <p:txBody>
+          <a:bodyPr wrap="square" lIns="0" tIns="0" rIns="0" bIns="0" rtlCol="0" anchor="ctr"/>
+          <a:lstStyle/>
+          <a:p>
+            <a:pPr indent="0" marL="0">
+              <a:buNone/>
+            </a:pPr>
+            <a:r>
+              <a:rPr lang="en-US" sz="1800" dirty="0">
+                <a:solidFill>
+                  <a:srgbClr val="1D1D1F"/>
+                </a:solidFill>
+                <a:latin typeface="Pretendard SemiBold" pitchFamily="34" charset="0"/>
+                <a:ea typeface="Pretendard SemiBold" pitchFamily="34" charset="-122"/>
+                <a:cs typeface="Pretendard SemiBold" pitchFamily="34" charset="-120"/>
+              </a:rPr>
+              <a:t>스킬트리 메인 화면 개편 · 칸별 고정 가격</a:t>
+            </a:r>
+            <a:endParaRPr lang="en-US" sz="1800" dirty="0"/>
+          </a:p>
+        </p:txBody>
+      </p:sp>
+      <p:sp>
+        <p:nvSpPr>
+          <p:cNvPr id="49" name="Text 46"/>
+          <p:cNvSpPr txBox="1"/>
+          <p:nvPr/>
+        </p:nvSpPr>
+        <p:spPr>
+          <a:xfrm>
+            <a:off x="9936785" y="5743956"/>
+            <a:ext cx="1371600" cy="411480"/>
+          </a:xfrm>
+          <a:prstGeom prst="rect">
+            <a:avLst/>
+          </a:prstGeom>
+          <a:noFill/>
+          <a:ln/>
+        </p:spPr>
+        <p:txBody>
+          <a:bodyPr wrap="square" lIns="0" tIns="0" rIns="0" bIns="0" rtlCol="0" anchor="ctr"/>
+          <a:lstStyle/>
+          <a:p>
+            <a:pPr algn="r" indent="0" marL="0">
+              <a:buNone/>
+            </a:pPr>
+            <a:r>
+              <a:rPr lang="en-US" sz="2400" dirty="0">
+                <a:solidFill>
+                  <a:srgbClr val="1D1D1F"/>
+                </a:solidFill>
+                <a:latin typeface="Pretendard SemiBold" pitchFamily="34" charset="0"/>
+                <a:ea typeface="Pretendard SemiBold" pitchFamily="34" charset="-122"/>
+                <a:cs typeface="Pretendard SemiBold" pitchFamily="34" charset="-120"/>
+              </a:rPr>
+              <a:t>3/3</a:t>
+            </a:r>
+            <a:endParaRPr lang="en-US" sz="2400" dirty="0"/>
+          </a:p>
+        </p:txBody>
+      </p:sp>
+      <p:sp>
+        <p:nvSpPr>
+          <p:cNvPr id="50" name="Text 47"/>
+          <p:cNvSpPr txBox="1"/>
+          <p:nvPr/>
+        </p:nvSpPr>
+        <p:spPr>
+          <a:xfrm>
+            <a:off x="9936785" y="6146292"/>
+            <a:ext cx="1371600" cy="201168"/>
+          </a:xfrm>
+          <a:prstGeom prst="rect">
+            <a:avLst/>
+          </a:prstGeom>
+          <a:noFill/>
+          <a:ln/>
+        </p:spPr>
+        <p:txBody>
+          <a:bodyPr wrap="square" lIns="0" tIns="0" rIns="0" bIns="0" rtlCol="0" anchor="ctr"/>
+          <a:lstStyle/>
+          <a:p>
+            <a:pPr algn="r" indent="0" marL="0">
+              <a:buNone/>
+            </a:pPr>
+            <a:r>
+              <a:rPr lang="en-US" sz="1100" dirty="0">
+                <a:solidFill>
+                  <a:srgbClr val="7A7A7A"/>
+                </a:solidFill>
+                <a:latin typeface="Pretendard" pitchFamily="34" charset="0"/>
+                <a:ea typeface="Pretendard" pitchFamily="34" charset="-122"/>
+                <a:cs typeface="Pretendard" pitchFamily="34" charset="-120"/>
+              </a:rPr>
+              <a:t>수정</a:t>
+            </a:r>
+            <a:endParaRPr lang="en-US" sz="1100" dirty="0"/>
+          </a:p>
+        </p:txBody>
+      </p:sp>
+      <p:sp>
+        <p:nvSpPr>
+          <p:cNvPr id="51" name="Text 48"/>
           <p:cNvSpPr txBox="1"/>
           <p:nvPr/>
         </p:nvSpPr>
@@ -30810,7 +35197,7 @@
       </p:sp>
       <p:sp>
         <p:nvSpPr>
-          <p:cNvPr id="47" name="Text 44"/>
+          <p:cNvPr id="52" name="Text 49"/>
           <p:cNvSpPr txBox="1"/>
           <p:nvPr/>
         </p:nvSpPr>
@@ -30841,7 +35228,7 @@
                 <a:ea typeface="Pretendard" pitchFamily="34" charset="-122"/>
                 <a:cs typeface="Pretendard" pitchFamily="34" charset="-120"/>
               </a:rPr>
-              <a:t>03 / 25</a:t>
+              <a:t>03 / 28</a:t>
             </a:r>
             <a:endParaRPr lang="en-US" sz="1000" dirty="0"/>
           </a:p>
@@ -31748,7 +36135,7 @@
                 <a:ea typeface="Pretendard" pitchFamily="34" charset="-122"/>
                 <a:cs typeface="Pretendard" pitchFamily="34" charset="-120"/>
               </a:rPr>
-              <a:t>04 / 25</a:t>
+              <a:t>04 / 28</a:t>
             </a:r>
             <a:endParaRPr lang="en-US" sz="1000" dirty="0"/>
           </a:p>
@@ -34137,7 +38524,7 @@
                 <a:ea typeface="Pretendard" pitchFamily="34" charset="-122"/>
                 <a:cs typeface="Pretendard" pitchFamily="34" charset="-120"/>
               </a:rPr>
-              <a:t>05 / 25</a:t>
+              <a:t>05 / 28</a:t>
             </a:r>
             <a:endParaRPr lang="en-US" sz="1000" dirty="0"/>
           </a:p>
@@ -34888,7 +39275,7 @@
                 <a:ea typeface="Pretendard" pitchFamily="34" charset="-122"/>
                 <a:cs typeface="Pretendard" pitchFamily="34" charset="-120"/>
               </a:rPr>
-              <a:t>06 / 25</a:t>
+              <a:t>06 / 28</a:t>
             </a:r>
             <a:endParaRPr lang="en-US" sz="1000" dirty="0"/>
           </a:p>
@@ -37148,7 +41535,7 @@
                 <a:ea typeface="Pretendard" pitchFamily="34" charset="-122"/>
                 <a:cs typeface="Pretendard" pitchFamily="34" charset="-120"/>
               </a:rPr>
-              <a:t>07 / 25</a:t>
+              <a:t>07 / 28</a:t>
             </a:r>
             <a:endParaRPr lang="en-US" sz="1000" dirty="0"/>
           </a:p>
@@ -39408,7 +43795,7 @@
                 <a:ea typeface="Pretendard" pitchFamily="34" charset="-122"/>
                 <a:cs typeface="Pretendard" pitchFamily="34" charset="-120"/>
               </a:rPr>
-              <a:t>08 / 25</a:t>
+              <a:t>08 / 28</a:t>
             </a:r>
             <a:endParaRPr lang="en-US" sz="1000" dirty="0"/>
           </a:p>
@@ -40315,7 +44702,7 @@
                 <a:ea typeface="Pretendard" pitchFamily="34" charset="-122"/>
                 <a:cs typeface="Pretendard" pitchFamily="34" charset="-120"/>
               </a:rPr>
-              <a:t>09 / 25</a:t>
+              <a:t>09 / 28</a:t>
             </a:r>
             <a:endParaRPr lang="en-US" sz="1000" dirty="0"/>
           </a:p>

--- a/Docs/QA/물고기게임_QA리포트.pptx
+++ b/Docs/QA/물고기게임_QA리포트.pptx
@@ -380,7 +380,7 @@
                   <c:v>3</c:v>
                 </c:pt>
                 <c:pt idx="8">
-                  <c:v>1</c:v>
+                  <c:v>2</c:v>
                 </c:pt>
               </c:numCache>
             </c:numRef>
@@ -4407,7 +4407,7 @@
                 <a:ea typeface="Pretendard" pitchFamily="34" charset="-122"/>
                 <a:cs typeface="Pretendard" pitchFamily="34" charset="-120"/>
               </a:rPr>
-              <a:t>업데이트 2026-09-29   ·   QA 9회   ·   이슈 64건</a:t>
+              <a:t>업데이트 2026-09-29   ·   QA 9회   ·   이슈 65건</a:t>
             </a:r>
             <a:endParaRPr lang="en-US" sz="1300" dirty="0"/>
           </a:p>
@@ -19409,7 +19409,7 @@
                 <a:ea typeface="Pretendard SemiBold" pitchFamily="34" charset="-122"/>
                 <a:cs typeface="Pretendard SemiBold" pitchFamily="34" charset="-120"/>
               </a:rPr>
-              <a:t>64건</a:t>
+              <a:t>65건</a:t>
             </a:r>
             <a:endParaRPr lang="en-US" sz="2800" dirty="0"/>
           </a:p>
@@ -19510,7 +19510,7 @@
                 <a:ea typeface="Pretendard SemiBold" pitchFamily="34" charset="-122"/>
                 <a:cs typeface="Pretendard SemiBold" pitchFamily="34" charset="-120"/>
               </a:rPr>
-              <a:t>64건</a:t>
+              <a:t>65건</a:t>
             </a:r>
             <a:endParaRPr lang="en-US" sz="2800" dirty="0"/>
           </a:p>
@@ -25766,7 +25766,7 @@
                 <a:ea typeface="Pretendard SemiBold" pitchFamily="34" charset="-122"/>
                 <a:cs typeface="Pretendard SemiBold" pitchFamily="34" charset="-120"/>
               </a:rPr>
-              <a:t>3건</a:t>
+              <a:t>4건</a:t>
             </a:r>
             <a:endParaRPr lang="en-US" sz="2800" dirty="0"/>
           </a:p>
@@ -25844,7 +25844,7 @@
                 <a:ea typeface="Pretendard" pitchFamily="34" charset="-122"/>
                 <a:cs typeface="Pretendard" pitchFamily="34" charset="-120"/>
               </a:rPr>
-              <a:t>높음 1 · 중간 1 · 낮음 1</a:t>
+              <a:t>높음 1 · 중간 2 · 낮음 1</a:t>
             </a:r>
             <a:endParaRPr lang="en-US" sz="1050" dirty="0"/>
           </a:p>
@@ -27518,6 +27518,258 @@
                   </a:tcPr>
                 </a:tc>
               </a:tr>
+              <a:tr h="638556">
+                <a:tc>
+                  <a:txBody>
+                    <a:bodyPr/>
+                    <a:lstStyle/>
+                    <a:p>
+                      <a:pPr indent="0" marL="0">
+                        <a:buNone/>
+                      </a:pPr>
+                      <a:r>
+                        <a:rPr lang="en-US" sz="1300" dirty="0">
+                          <a:solidFill>
+                            <a:srgbClr val="1D1D1F"/>
+                          </a:solidFill>
+                          <a:latin typeface="Pretendard Medium" pitchFamily="34" charset="0"/>
+                          <a:ea typeface="Pretendard Medium" pitchFamily="34" charset="-122"/>
+                          <a:cs typeface="Pretendard Medium" pitchFamily="34" charset="-120"/>
+                        </a:rPr>
+                        <a:t>중간</a:t>
+                      </a:r>
+                      <a:endParaRPr lang="en-US" sz="1300" dirty="0">
+                        <a:latin typeface="Pretendard Medium" charset="0"/>
+                        <a:ea typeface="Pretendard Medium" charset="0"/>
+                        <a:cs typeface="Pretendard Medium" charset="0"/>
+                      </a:endParaRPr>
+                    </a:p>
+                  </a:txBody>
+                  <a:tcPr marL="76200" marR="76200" marT="50800" marB="50800" anchor="ctr">
+                    <a:lnL w="0" cap="flat" cmpd="sng" algn="ctr">
+                      <a:noFill/>
+                    </a:lnL>
+                    <a:lnR w="0" cap="flat" cmpd="sng" algn="ctr">
+                      <a:noFill/>
+                    </a:lnR>
+                    <a:lnT w="0" cap="flat" cmpd="sng" algn="ctr">
+                      <a:noFill/>
+                    </a:lnT>
+                    <a:lnB w="9525" cap="flat" cmpd="sng" algn="ctr">
+                      <a:solidFill>
+                        <a:srgbClr val="E0E0E0"/>
+                      </a:solidFill>
+                      <a:prstDash val="solid"/>
+                      <a:round/>
+                      <a:headEnd type="none" w="med" len="med"/>
+                      <a:tailEnd type="none" w="med" len="med"/>
+                    </a:lnB>
+                    <a:solidFill>
+                      <a:srgbClr val="FFFFFF"/>
+                    </a:solidFill>
+                  </a:tcPr>
+                </a:tc>
+                <a:tc>
+                  <a:txBody>
+                    <a:bodyPr/>
+                    <a:lstStyle/>
+                    <a:p>
+                      <a:pPr indent="0" marL="0">
+                        <a:buNone/>
+                      </a:pPr>
+                      <a:r>
+                        <a:rPr lang="en-US" sz="1300" dirty="0">
+                          <a:solidFill>
+                            <a:srgbClr val="1D1D1F"/>
+                          </a:solidFill>
+                          <a:latin typeface="Pretendard SemiBold" pitchFamily="34" charset="0"/>
+                          <a:ea typeface="Pretendard SemiBold" pitchFamily="34" charset="-122"/>
+                          <a:cs typeface="Pretendard SemiBold" pitchFamily="34" charset="-120"/>
+                        </a:rPr>
+                        <a:t>밸런스</a:t>
+                      </a:r>
+                      <a:endParaRPr lang="en-US" sz="1300" dirty="0">
+                        <a:latin typeface="Pretendard SemiBold" charset="0"/>
+                        <a:ea typeface="Pretendard SemiBold" charset="0"/>
+                        <a:cs typeface="Pretendard SemiBold" charset="0"/>
+                      </a:endParaRPr>
+                    </a:p>
+                  </a:txBody>
+                  <a:tcPr marL="76200" marR="76200" marT="50800" marB="50800" anchor="ctr">
+                    <a:lnL w="0" cap="flat" cmpd="sng" algn="ctr">
+                      <a:noFill/>
+                    </a:lnL>
+                    <a:lnR w="0" cap="flat" cmpd="sng" algn="ctr">
+                      <a:noFill/>
+                    </a:lnR>
+                    <a:lnT w="0" cap="flat" cmpd="sng" algn="ctr">
+                      <a:noFill/>
+                    </a:lnT>
+                    <a:lnB w="9525" cap="flat" cmpd="sng" algn="ctr">
+                      <a:solidFill>
+                        <a:srgbClr val="E0E0E0"/>
+                      </a:solidFill>
+                      <a:prstDash val="solid"/>
+                      <a:round/>
+                      <a:headEnd type="none" w="med" len="med"/>
+                      <a:tailEnd type="none" w="med" len="med"/>
+                    </a:lnB>
+                    <a:solidFill>
+                      <a:srgbClr val="FFFFFF"/>
+                    </a:solidFill>
+                  </a:tcPr>
+                </a:tc>
+                <a:tc>
+                  <a:txBody>
+                    <a:bodyPr/>
+                    <a:lstStyle/>
+                    <a:p>
+                      <a:pPr indent="0" marL="0">
+                        <a:buNone/>
+                      </a:pPr>
+                      <a:r>
+                        <a:rPr lang="en-US" sz="1300" dirty="0">
+                          <a:solidFill>
+                            <a:srgbClr val="333333"/>
+                          </a:solidFill>
+                          <a:latin typeface="Pretendard" pitchFamily="34" charset="0"/>
+                          <a:ea typeface="Pretendard" pitchFamily="34" charset="-122"/>
+                          <a:cs typeface="Pretendard" pitchFamily="34" charset="-120"/>
+                        </a:rPr>
+                        <a:t>장애물 · 히든 아이템 삭제로 히든 재화 보너스(+최대 40%)가 사라져 클리어가 5.04h로 늘어남</a:t>
+                      </a:r>
+                      <a:endParaRPr lang="en-US" sz="1300" dirty="0">
+                        <a:latin typeface="Pretendard" charset="0"/>
+                        <a:ea typeface="Pretendard" charset="0"/>
+                        <a:cs typeface="Pretendard" charset="0"/>
+                      </a:endParaRPr>
+                    </a:p>
+                  </a:txBody>
+                  <a:tcPr marL="76200" marR="76200" marT="50800" marB="50800" anchor="ctr">
+                    <a:lnL w="0" cap="flat" cmpd="sng" algn="ctr">
+                      <a:noFill/>
+                    </a:lnL>
+                    <a:lnR w="0" cap="flat" cmpd="sng" algn="ctr">
+                      <a:noFill/>
+                    </a:lnR>
+                    <a:lnT w="0" cap="flat" cmpd="sng" algn="ctr">
+                      <a:noFill/>
+                    </a:lnT>
+                    <a:lnB w="9525" cap="flat" cmpd="sng" algn="ctr">
+                      <a:solidFill>
+                        <a:srgbClr val="E0E0E0"/>
+                      </a:solidFill>
+                      <a:prstDash val="solid"/>
+                      <a:round/>
+                      <a:headEnd type="none" w="med" len="med"/>
+                      <a:tailEnd type="none" w="med" len="med"/>
+                    </a:lnB>
+                    <a:solidFill>
+                      <a:srgbClr val="FFFFFF"/>
+                    </a:solidFill>
+                  </a:tcPr>
+                </a:tc>
+                <a:tc>
+                  <a:txBody>
+                    <a:bodyPr/>
+                    <a:lstStyle/>
+                    <a:p>
+                      <a:pPr indent="0" marL="0">
+                        <a:buNone/>
+                      </a:pPr>
+                      <a:r>
+                        <a:rPr lang="en-US" sz="1300" dirty="0">
+                          <a:solidFill>
+                            <a:srgbClr val="333333"/>
+                          </a:solidFill>
+                          <a:latin typeface="Pretendard" pitchFamily="34" charset="0"/>
+                          <a:ea typeface="Pretendard" pitchFamily="34" charset="-122"/>
+                          <a:cs typeface="Pretendard" pitchFamily="34" charset="-120"/>
+                        </a:rPr>
+                        <a:t>가격 깊이 배율 5 → 4.75로 재조정 — 클리어 중앙 4.49h, 풀트리 클리어 후 +1.2h (12회)</a:t>
+                      </a:r>
+                      <a:endParaRPr lang="en-US" sz="1300" dirty="0">
+                        <a:latin typeface="Pretendard" charset="0"/>
+                        <a:ea typeface="Pretendard" charset="0"/>
+                        <a:cs typeface="Pretendard" charset="0"/>
+                      </a:endParaRPr>
+                    </a:p>
+                  </a:txBody>
+                  <a:tcPr marL="76200" marR="76200" marT="50800" marB="50800" anchor="ctr">
+                    <a:lnL w="0" cap="flat" cmpd="sng" algn="ctr">
+                      <a:noFill/>
+                    </a:lnL>
+                    <a:lnR w="0" cap="flat" cmpd="sng" algn="ctr">
+                      <a:noFill/>
+                    </a:lnR>
+                    <a:lnT w="0" cap="flat" cmpd="sng" algn="ctr">
+                      <a:noFill/>
+                    </a:lnT>
+                    <a:lnB w="9525" cap="flat" cmpd="sng" algn="ctr">
+                      <a:solidFill>
+                        <a:srgbClr val="E0E0E0"/>
+                      </a:solidFill>
+                      <a:prstDash val="solid"/>
+                      <a:round/>
+                      <a:headEnd type="none" w="med" len="med"/>
+                      <a:tailEnd type="none" w="med" len="med"/>
+                    </a:lnB>
+                    <a:solidFill>
+                      <a:srgbClr val="FFFFFF"/>
+                    </a:solidFill>
+                  </a:tcPr>
+                </a:tc>
+                <a:tc>
+                  <a:txBody>
+                    <a:bodyPr/>
+                    <a:lstStyle/>
+                    <a:p>
+                      <a:pPr algn="ctr" indent="0" marL="0">
+                        <a:buNone/>
+                      </a:pPr>
+                      <a:r>
+                        <a:rPr lang="en-US" sz="1300" dirty="0">
+                          <a:solidFill>
+                            <a:srgbClr val="0066CC"/>
+                          </a:solidFill>
+                          <a:latin typeface="Pretendard Medium" pitchFamily="34" charset="0"/>
+                          <a:ea typeface="Pretendard Medium" pitchFamily="34" charset="-122"/>
+                          <a:cs typeface="Pretendard Medium" pitchFamily="34" charset="-120"/>
+                        </a:rPr>
+                        <a:t>✓ 수정</a:t>
+                      </a:r>
+                      <a:endParaRPr lang="en-US" sz="1300" dirty="0">
+                        <a:latin typeface="Pretendard Medium" charset="0"/>
+                        <a:ea typeface="Pretendard Medium" charset="0"/>
+                        <a:cs typeface="Pretendard Medium" charset="0"/>
+                      </a:endParaRPr>
+                    </a:p>
+                  </a:txBody>
+                  <a:tcPr marL="76200" marR="76200" marT="50800" marB="50800" anchor="ctr">
+                    <a:lnL w="0" cap="flat" cmpd="sng" algn="ctr">
+                      <a:noFill/>
+                    </a:lnL>
+                    <a:lnR w="0" cap="flat" cmpd="sng" algn="ctr">
+                      <a:noFill/>
+                    </a:lnR>
+                    <a:lnT w="0" cap="flat" cmpd="sng" algn="ctr">
+                      <a:noFill/>
+                    </a:lnT>
+                    <a:lnB w="9525" cap="flat" cmpd="sng" algn="ctr">
+                      <a:solidFill>
+                        <a:srgbClr val="E0E0E0"/>
+                      </a:solidFill>
+                      <a:prstDash val="solid"/>
+                      <a:round/>
+                      <a:headEnd type="none" w="med" len="med"/>
+                      <a:tailEnd type="none" w="med" len="med"/>
+                    </a:lnB>
+                    <a:solidFill>
+                      <a:srgbClr val="FFFFFF"/>
+                    </a:solidFill>
+                  </a:tcPr>
+                </a:tc>
+              </a:tr>
             </a:tbl>
           </a:graphicData>
         </a:graphic>
@@ -27555,7 +27807,7 @@
                 <a:ea typeface="Pretendard SemiBold" pitchFamily="34" charset="-122"/>
                 <a:cs typeface="Pretendard SemiBold" pitchFamily="34" charset="-120"/>
               </a:rPr>
-              <a:t>3건</a:t>
+              <a:t>4건</a:t>
             </a:r>
             <a:endParaRPr lang="en-US" sz="2800" dirty="0"/>
           </a:p>
@@ -27757,7 +28009,7 @@
                 <a:ea typeface="Pretendard SemiBold" pitchFamily="34" charset="-122"/>
                 <a:cs typeface="Pretendard SemiBold" pitchFamily="34" charset="-120"/>
               </a:rPr>
-              <a:t>2건</a:t>
+              <a:t>3건</a:t>
             </a:r>
             <a:endParaRPr lang="en-US" sz="2800" dirty="0"/>
           </a:p>
@@ -27858,7 +28110,7 @@
                 <a:ea typeface="Pretendard SemiBold" pitchFamily="34" charset="-122"/>
                 <a:cs typeface="Pretendard SemiBold" pitchFamily="34" charset="-120"/>
               </a:rPr>
-              <a:t>3/3</a:t>
+              <a:t>4/4</a:t>
             </a:r>
             <a:endParaRPr lang="en-US" sz="2800" dirty="0"/>
           </a:p>
@@ -35033,7 +35285,7 @@
                 <a:ea typeface="Pretendard SemiBold" pitchFamily="34" charset="-122"/>
                 <a:cs typeface="Pretendard SemiBold" pitchFamily="34" charset="-120"/>
               </a:rPr>
-              <a:t>R9  2026-09-29   ·   높음 1 · 중간 1 · 낮음 1</a:t>
+              <a:t>R9  2026-09-29   ·   높음 1 · 중간 2 · 낮음 1</a:t>
             </a:r>
             <a:endParaRPr lang="en-US" sz="1200" dirty="0"/>
           </a:p>
@@ -35111,7 +35363,7 @@
                 <a:ea typeface="Pretendard SemiBold" pitchFamily="34" charset="-122"/>
                 <a:cs typeface="Pretendard SemiBold" pitchFamily="34" charset="-120"/>
               </a:rPr>
-              <a:t>3/3</a:t>
+              <a:t>4/4</a:t>
             </a:r>
             <a:endParaRPr lang="en-US" sz="2400" dirty="0"/>
           </a:p>

--- a/Docs/QA/물고기게임_QA리포트.pptx
+++ b/Docs/QA/물고기게임_QA리포트.pptx
@@ -500,7 +500,7 @@
                   <c:v>4</c:v>
                 </c:pt>
                 <c:pt idx="8">
-                  <c:v>1</c:v>
+                  <c:v>2</c:v>
                 </c:pt>
               </c:numCache>
             </c:numRef>
@@ -4407,7 +4407,7 @@
                 <a:ea typeface="Pretendard" pitchFamily="34" charset="-122"/>
                 <a:cs typeface="Pretendard" pitchFamily="34" charset="-120"/>
               </a:rPr>
-              <a:t>업데이트 2026-09-29   ·   QA 9회   ·   이슈 65건</a:t>
+              <a:t>업데이트 2026-09-29   ·   QA 9회   ·   이슈 66건</a:t>
             </a:r>
             <a:endParaRPr lang="en-US" sz="1300" dirty="0"/>
           </a:p>
@@ -19409,7 +19409,7 @@
                 <a:ea typeface="Pretendard SemiBold" pitchFamily="34" charset="-122"/>
                 <a:cs typeface="Pretendard SemiBold" pitchFamily="34" charset="-120"/>
               </a:rPr>
-              <a:t>65건</a:t>
+              <a:t>66건</a:t>
             </a:r>
             <a:endParaRPr lang="en-US" sz="2800" dirty="0"/>
           </a:p>
@@ -19510,7 +19510,7 @@
                 <a:ea typeface="Pretendard SemiBold" pitchFamily="34" charset="-122"/>
                 <a:cs typeface="Pretendard SemiBold" pitchFamily="34" charset="-120"/>
               </a:rPr>
-              <a:t>65건</a:t>
+              <a:t>66건</a:t>
             </a:r>
             <a:endParaRPr lang="en-US" sz="2800" dirty="0"/>
           </a:p>
@@ -25766,7 +25766,7 @@
                 <a:ea typeface="Pretendard SemiBold" pitchFamily="34" charset="-122"/>
                 <a:cs typeface="Pretendard SemiBold" pitchFamily="34" charset="-120"/>
               </a:rPr>
-              <a:t>4건</a:t>
+              <a:t>5건</a:t>
             </a:r>
             <a:endParaRPr lang="en-US" sz="2800" dirty="0"/>
           </a:p>
@@ -25844,7 +25844,7 @@
                 <a:ea typeface="Pretendard" pitchFamily="34" charset="-122"/>
                 <a:cs typeface="Pretendard" pitchFamily="34" charset="-120"/>
               </a:rPr>
-              <a:t>높음 1 · 중간 2 · 낮음 1</a:t>
+              <a:t>높음 1 · 중간 2 · 낮음 2</a:t>
             </a:r>
             <a:endParaRPr lang="en-US" sz="1050" dirty="0"/>
           </a:p>
@@ -27770,6 +27770,258 @@
                   </a:tcPr>
                 </a:tc>
               </a:tr>
+              <a:tr h="638556">
+                <a:tc>
+                  <a:txBody>
+                    <a:bodyPr/>
+                    <a:lstStyle/>
+                    <a:p>
+                      <a:pPr indent="0" marL="0">
+                        <a:buNone/>
+                      </a:pPr>
+                      <a:r>
+                        <a:rPr lang="en-US" sz="1300" dirty="0">
+                          <a:solidFill>
+                            <a:srgbClr val="7A7A7A"/>
+                          </a:solidFill>
+                          <a:latin typeface="Pretendard" pitchFamily="34" charset="0"/>
+                          <a:ea typeface="Pretendard" pitchFamily="34" charset="-122"/>
+                          <a:cs typeface="Pretendard" pitchFamily="34" charset="-120"/>
+                        </a:rPr>
+                        <a:t>낮음</a:t>
+                      </a:r>
+                      <a:endParaRPr lang="en-US" sz="1300" dirty="0">
+                        <a:latin typeface="Pretendard" charset="0"/>
+                        <a:ea typeface="Pretendard" charset="0"/>
+                        <a:cs typeface="Pretendard" charset="0"/>
+                      </a:endParaRPr>
+                    </a:p>
+                  </a:txBody>
+                  <a:tcPr marL="76200" marR="76200" marT="50800" marB="50800" anchor="ctr">
+                    <a:lnL w="0" cap="flat" cmpd="sng" algn="ctr">
+                      <a:noFill/>
+                    </a:lnL>
+                    <a:lnR w="0" cap="flat" cmpd="sng" algn="ctr">
+                      <a:noFill/>
+                    </a:lnR>
+                    <a:lnT w="0" cap="flat" cmpd="sng" algn="ctr">
+                      <a:noFill/>
+                    </a:lnT>
+                    <a:lnB w="9525" cap="flat" cmpd="sng" algn="ctr">
+                      <a:solidFill>
+                        <a:srgbClr val="E0E0E0"/>
+                      </a:solidFill>
+                      <a:prstDash val="solid"/>
+                      <a:round/>
+                      <a:headEnd type="none" w="med" len="med"/>
+                      <a:tailEnd type="none" w="med" len="med"/>
+                    </a:lnB>
+                    <a:solidFill>
+                      <a:srgbClr val="FFFFFF"/>
+                    </a:solidFill>
+                  </a:tcPr>
+                </a:tc>
+                <a:tc>
+                  <a:txBody>
+                    <a:bodyPr/>
+                    <a:lstStyle/>
+                    <a:p>
+                      <a:pPr indent="0" marL="0">
+                        <a:buNone/>
+                      </a:pPr>
+                      <a:r>
+                        <a:rPr lang="en-US" sz="1300" dirty="0">
+                          <a:solidFill>
+                            <a:srgbClr val="1D1D1F"/>
+                          </a:solidFill>
+                          <a:latin typeface="Pretendard SemiBold" pitchFamily="34" charset="0"/>
+                          <a:ea typeface="Pretendard SemiBold" pitchFamily="34" charset="-122"/>
+                          <a:cs typeface="Pretendard SemiBold" pitchFamily="34" charset="-120"/>
+                        </a:rPr>
+                        <a:t>밸런스</a:t>
+                      </a:r>
+                      <a:endParaRPr lang="en-US" sz="1300" dirty="0">
+                        <a:latin typeface="Pretendard SemiBold" charset="0"/>
+                        <a:ea typeface="Pretendard SemiBold" charset="0"/>
+                        <a:cs typeface="Pretendard SemiBold" charset="0"/>
+                      </a:endParaRPr>
+                    </a:p>
+                  </a:txBody>
+                  <a:tcPr marL="76200" marR="76200" marT="50800" marB="50800" anchor="ctr">
+                    <a:lnL w="0" cap="flat" cmpd="sng" algn="ctr">
+                      <a:noFill/>
+                    </a:lnL>
+                    <a:lnR w="0" cap="flat" cmpd="sng" algn="ctr">
+                      <a:noFill/>
+                    </a:lnR>
+                    <a:lnT w="0" cap="flat" cmpd="sng" algn="ctr">
+                      <a:noFill/>
+                    </a:lnT>
+                    <a:lnB w="9525" cap="flat" cmpd="sng" algn="ctr">
+                      <a:solidFill>
+                        <a:srgbClr val="E0E0E0"/>
+                      </a:solidFill>
+                      <a:prstDash val="solid"/>
+                      <a:round/>
+                      <a:headEnd type="none" w="med" len="med"/>
+                      <a:tailEnd type="none" w="med" len="med"/>
+                    </a:lnB>
+                    <a:solidFill>
+                      <a:srgbClr val="FFFFFF"/>
+                    </a:solidFill>
+                  </a:tcPr>
+                </a:tc>
+                <a:tc>
+                  <a:txBody>
+                    <a:bodyPr/>
+                    <a:lstStyle/>
+                    <a:p>
+                      <a:pPr indent="0" marL="0">
+                        <a:buNone/>
+                      </a:pPr>
+                      <a:r>
+                        <a:rPr lang="en-US" sz="1300" dirty="0">
+                          <a:solidFill>
+                            <a:srgbClr val="333333"/>
+                          </a:solidFill>
+                          <a:latin typeface="Pretendard" pitchFamily="34" charset="0"/>
+                          <a:ea typeface="Pretendard" pitchFamily="34" charset="-122"/>
+                          <a:cs typeface="Pretendard" pitchFamily="34" charset="-120"/>
+                        </a:rPr>
+                        <a:t>부스터 · 청소기 · 황금 미끼 해금이 15~30으로 너무 싸 첫 판 만에 찍힘</a:t>
+                      </a:r>
+                      <a:endParaRPr lang="en-US" sz="1300" dirty="0">
+                        <a:latin typeface="Pretendard" charset="0"/>
+                        <a:ea typeface="Pretendard" charset="0"/>
+                        <a:cs typeface="Pretendard" charset="0"/>
+                      </a:endParaRPr>
+                    </a:p>
+                  </a:txBody>
+                  <a:tcPr marL="76200" marR="76200" marT="50800" marB="50800" anchor="ctr">
+                    <a:lnL w="0" cap="flat" cmpd="sng" algn="ctr">
+                      <a:noFill/>
+                    </a:lnL>
+                    <a:lnR w="0" cap="flat" cmpd="sng" algn="ctr">
+                      <a:noFill/>
+                    </a:lnR>
+                    <a:lnT w="0" cap="flat" cmpd="sng" algn="ctr">
+                      <a:noFill/>
+                    </a:lnT>
+                    <a:lnB w="9525" cap="flat" cmpd="sng" algn="ctr">
+                      <a:solidFill>
+                        <a:srgbClr val="E0E0E0"/>
+                      </a:solidFill>
+                      <a:prstDash val="solid"/>
+                      <a:round/>
+                      <a:headEnd type="none" w="med" len="med"/>
+                      <a:tailEnd type="none" w="med" len="med"/>
+                    </a:lnB>
+                    <a:solidFill>
+                      <a:srgbClr val="FFFFFF"/>
+                    </a:solidFill>
+                  </a:tcPr>
+                </a:tc>
+                <a:tc>
+                  <a:txBody>
+                    <a:bodyPr/>
+                    <a:lstStyle/>
+                    <a:p>
+                      <a:pPr indent="0" marL="0">
+                        <a:buNone/>
+                      </a:pPr>
+                      <a:r>
+                        <a:rPr lang="en-US" sz="1300" dirty="0">
+                          <a:solidFill>
+                            <a:srgbClr val="333333"/>
+                          </a:solidFill>
+                          <a:latin typeface="Pretendard" pitchFamily="34" charset="0"/>
+                          <a:ea typeface="Pretendard" pitchFamily="34" charset="-122"/>
+                          <a:cs typeface="Pretendard" pitchFamily="34" charset="-120"/>
+                        </a:rPr>
+                        <a:t>세 칸만 가격 5배(75 · 125 · 150), 깊이 배율 4.75 → 4.6으로 전체 클리어 4.62h 유지 (12회)</a:t>
+                      </a:r>
+                      <a:endParaRPr lang="en-US" sz="1300" dirty="0">
+                        <a:latin typeface="Pretendard" charset="0"/>
+                        <a:ea typeface="Pretendard" charset="0"/>
+                        <a:cs typeface="Pretendard" charset="0"/>
+                      </a:endParaRPr>
+                    </a:p>
+                  </a:txBody>
+                  <a:tcPr marL="76200" marR="76200" marT="50800" marB="50800" anchor="ctr">
+                    <a:lnL w="0" cap="flat" cmpd="sng" algn="ctr">
+                      <a:noFill/>
+                    </a:lnL>
+                    <a:lnR w="0" cap="flat" cmpd="sng" algn="ctr">
+                      <a:noFill/>
+                    </a:lnR>
+                    <a:lnT w="0" cap="flat" cmpd="sng" algn="ctr">
+                      <a:noFill/>
+                    </a:lnT>
+                    <a:lnB w="9525" cap="flat" cmpd="sng" algn="ctr">
+                      <a:solidFill>
+                        <a:srgbClr val="E0E0E0"/>
+                      </a:solidFill>
+                      <a:prstDash val="solid"/>
+                      <a:round/>
+                      <a:headEnd type="none" w="med" len="med"/>
+                      <a:tailEnd type="none" w="med" len="med"/>
+                    </a:lnB>
+                    <a:solidFill>
+                      <a:srgbClr val="FFFFFF"/>
+                    </a:solidFill>
+                  </a:tcPr>
+                </a:tc>
+                <a:tc>
+                  <a:txBody>
+                    <a:bodyPr/>
+                    <a:lstStyle/>
+                    <a:p>
+                      <a:pPr algn="ctr" indent="0" marL="0">
+                        <a:buNone/>
+                      </a:pPr>
+                      <a:r>
+                        <a:rPr lang="en-US" sz="1300" dirty="0">
+                          <a:solidFill>
+                            <a:srgbClr val="0066CC"/>
+                          </a:solidFill>
+                          <a:latin typeface="Pretendard Medium" pitchFamily="34" charset="0"/>
+                          <a:ea typeface="Pretendard Medium" pitchFamily="34" charset="-122"/>
+                          <a:cs typeface="Pretendard Medium" pitchFamily="34" charset="-120"/>
+                        </a:rPr>
+                        <a:t>✓ 수정</a:t>
+                      </a:r>
+                      <a:endParaRPr lang="en-US" sz="1300" dirty="0">
+                        <a:latin typeface="Pretendard Medium" charset="0"/>
+                        <a:ea typeface="Pretendard Medium" charset="0"/>
+                        <a:cs typeface="Pretendard Medium" charset="0"/>
+                      </a:endParaRPr>
+                    </a:p>
+                  </a:txBody>
+                  <a:tcPr marL="76200" marR="76200" marT="50800" marB="50800" anchor="ctr">
+                    <a:lnL w="0" cap="flat" cmpd="sng" algn="ctr">
+                      <a:noFill/>
+                    </a:lnL>
+                    <a:lnR w="0" cap="flat" cmpd="sng" algn="ctr">
+                      <a:noFill/>
+                    </a:lnR>
+                    <a:lnT w="0" cap="flat" cmpd="sng" algn="ctr">
+                      <a:noFill/>
+                    </a:lnT>
+                    <a:lnB w="9525" cap="flat" cmpd="sng" algn="ctr">
+                      <a:solidFill>
+                        <a:srgbClr val="E0E0E0"/>
+                      </a:solidFill>
+                      <a:prstDash val="solid"/>
+                      <a:round/>
+                      <a:headEnd type="none" w="med" len="med"/>
+                      <a:tailEnd type="none" w="med" len="med"/>
+                    </a:lnB>
+                    <a:solidFill>
+                      <a:srgbClr val="FFFFFF"/>
+                    </a:solidFill>
+                  </a:tcPr>
+                </a:tc>
+              </a:tr>
             </a:tbl>
           </a:graphicData>
         </a:graphic>
@@ -27807,7 +28059,7 @@
                 <a:ea typeface="Pretendard SemiBold" pitchFamily="34" charset="-122"/>
                 <a:cs typeface="Pretendard SemiBold" pitchFamily="34" charset="-120"/>
               </a:rPr>
-              <a:t>4건</a:t>
+              <a:t>5건</a:t>
             </a:r>
             <a:endParaRPr lang="en-US" sz="2800" dirty="0"/>
           </a:p>
@@ -28009,7 +28261,7 @@
                 <a:ea typeface="Pretendard SemiBold" pitchFamily="34" charset="-122"/>
                 <a:cs typeface="Pretendard SemiBold" pitchFamily="34" charset="-120"/>
               </a:rPr>
-              <a:t>3건</a:t>
+              <a:t>4건</a:t>
             </a:r>
             <a:endParaRPr lang="en-US" sz="2800" dirty="0"/>
           </a:p>
@@ -28110,7 +28362,7 @@
                 <a:ea typeface="Pretendard SemiBold" pitchFamily="34" charset="-122"/>
                 <a:cs typeface="Pretendard SemiBold" pitchFamily="34" charset="-120"/>
               </a:rPr>
-              <a:t>4/4</a:t>
+              <a:t>5/5</a:t>
             </a:r>
             <a:endParaRPr lang="en-US" sz="2800" dirty="0"/>
           </a:p>
@@ -35285,7 +35537,7 @@
                 <a:ea typeface="Pretendard SemiBold" pitchFamily="34" charset="-122"/>
                 <a:cs typeface="Pretendard SemiBold" pitchFamily="34" charset="-120"/>
               </a:rPr>
-              <a:t>R9  2026-09-29   ·   높음 1 · 중간 2 · 낮음 1</a:t>
+              <a:t>R9  2026-09-29   ·   높음 1 · 중간 2 · 낮음 2</a:t>
             </a:r>
             <a:endParaRPr lang="en-US" sz="1200" dirty="0"/>
           </a:p>
@@ -35363,7 +35615,7 @@
                 <a:ea typeface="Pretendard SemiBold" pitchFamily="34" charset="-122"/>
                 <a:cs typeface="Pretendard SemiBold" pitchFamily="34" charset="-120"/>
               </a:rPr>
-              <a:t>4/4</a:t>
+              <a:t>5/5</a:t>
             </a:r>
             <a:endParaRPr lang="en-US" sz="2400" dirty="0"/>
           </a:p>

--- a/Docs/QA/물고기게임_QA리포트.pptx
+++ b/Docs/QA/물고기게임_QA리포트.pptx
@@ -33,9 +33,11 @@
     <p:sldId id="281" r:id="rId27"/>
     <p:sldId id="282" r:id="rId28"/>
     <p:sldId id="283" r:id="rId29"/>
+    <p:sldId id="284" r:id="rId30"/>
+    <p:sldId id="285" r:id="rId31"/>
   </p:sldIdLst>
   <p:notesMasterIdLst>
-    <p:notesMasterId r:id="rId30"/>
+    <p:notesMasterId r:id="rId32"/>
   </p:notesMasterIdLst>
   <p:sldSz cx="12191695" cy="6858000"/>
   <p:notesSz cx="6858000" cy="12191695"/>
@@ -194,9 +196,9 @@
           </c:dLbls>
           <c:cat>
             <c:multiLvlStrRef>
-              <c:f>Sheet1!$A$2:$A$10</c:f>
+              <c:f>Sheet1!$A$2:$A$11</c:f>
               <c:multiLvlStrCache>
-                <c:ptCount val="9"/>
+                <c:ptCount val="10"/>
                 <c:lvl>
                   <c:pt idx="0">
                     <c:v>R1</c:v>
@@ -225,16 +227,19 @@
                   <c:pt idx="8">
                     <c:v>R9</c:v>
                   </c:pt>
+                  <c:pt idx="9">
+                    <c:v>R10</c:v>
+                  </c:pt>
                 </c:lvl>
               </c:multiLvlStrCache>
             </c:multiLvlStrRef>
           </c:cat>
           <c:val>
             <c:numRef>
-              <c:f>Sheet1!$B$2:$B$10</c:f>
+              <c:f>Sheet1!$B$2:$B$11</c:f>
               <c:numCache>
                 <c:formatCode>General</c:formatCode>
-                <c:ptCount val="9"/>
+                <c:ptCount val="10"/>
                 <c:pt idx="0">
                   <c:v>2</c:v>
                 </c:pt>
@@ -261,6 +266,9 @@
                 </c:pt>
                 <c:pt idx="8">
                   <c:v>1</c:v>
+                </c:pt>
+                <c:pt idx="9">
+                  <c:v>2</c:v>
                 </c:pt>
               </c:numCache>
             </c:numRef>
@@ -314,9 +322,9 @@
           </c:dLbls>
           <c:cat>
             <c:multiLvlStrRef>
-              <c:f>Sheet1!$A$2:$A$10</c:f>
+              <c:f>Sheet1!$A$2:$A$11</c:f>
               <c:multiLvlStrCache>
-                <c:ptCount val="9"/>
+                <c:ptCount val="10"/>
                 <c:lvl>
                   <c:pt idx="0">
                     <c:v>R1</c:v>
@@ -345,16 +353,19 @@
                   <c:pt idx="8">
                     <c:v>R9</c:v>
                   </c:pt>
+                  <c:pt idx="9">
+                    <c:v>R10</c:v>
+                  </c:pt>
                 </c:lvl>
               </c:multiLvlStrCache>
             </c:multiLvlStrRef>
           </c:cat>
           <c:val>
             <c:numRef>
-              <c:f>Sheet1!$C$2:$C$10</c:f>
+              <c:f>Sheet1!$C$2:$C$11</c:f>
               <c:numCache>
                 <c:formatCode>General</c:formatCode>
-                <c:ptCount val="9"/>
+                <c:ptCount val="10"/>
                 <c:pt idx="0">
                   <c:v>4</c:v>
                 </c:pt>
@@ -380,6 +391,9 @@
                   <c:v>3</c:v>
                 </c:pt>
                 <c:pt idx="8">
+                  <c:v>2</c:v>
+                </c:pt>
+                <c:pt idx="9">
                   <c:v>2</c:v>
                 </c:pt>
               </c:numCache>
@@ -434,9 +448,9 @@
           </c:dLbls>
           <c:cat>
             <c:multiLvlStrRef>
-              <c:f>Sheet1!$A$2:$A$10</c:f>
+              <c:f>Sheet1!$A$2:$A$11</c:f>
               <c:multiLvlStrCache>
-                <c:ptCount val="9"/>
+                <c:ptCount val="10"/>
                 <c:lvl>
                   <c:pt idx="0">
                     <c:v>R1</c:v>
@@ -465,16 +479,19 @@
                   <c:pt idx="8">
                     <c:v>R9</c:v>
                   </c:pt>
+                  <c:pt idx="9">
+                    <c:v>R10</c:v>
+                  </c:pt>
                 </c:lvl>
               </c:multiLvlStrCache>
             </c:multiLvlStrRef>
           </c:cat>
           <c:val>
             <c:numRef>
-              <c:f>Sheet1!$D$2:$D$10</c:f>
+              <c:f>Sheet1!$D$2:$D$11</c:f>
               <c:numCache>
                 <c:formatCode>General</c:formatCode>
-                <c:ptCount val="9"/>
+                <c:ptCount val="10"/>
                 <c:pt idx="0">
                   <c:v>0</c:v>
                 </c:pt>
@@ -501,6 +518,9 @@
                 </c:pt>
                 <c:pt idx="8">
                   <c:v>2</c:v>
+                </c:pt>
+                <c:pt idx="9">
+                  <c:v>0</c:v>
                 </c:pt>
               </c:numCache>
             </c:numRef>
@@ -3287,6 +3307,94 @@
 </p:notes>
 </file>
 
+<file path=ppt/notesSlides/notesSlide29.xml><?xml version="1.0" encoding="utf-8"?>
+<p:notes xmlns:a="http://schemas.openxmlformats.org/drawingml/2006/main" xmlns:r="http://schemas.openxmlformats.org/officeDocument/2006/relationships" xmlns:p="http://schemas.openxmlformats.org/presentationml/2006/main">
+  <p:cSld>
+    <p:spTree>
+      <p:nvGrpSpPr>
+        <p:cNvPr id="1" name=""/>
+        <p:cNvGrpSpPr/>
+        <p:nvPr/>
+      </p:nvGrpSpPr>
+      <p:grpSpPr>
+        <a:xfrm>
+          <a:off x="0" y="0"/>
+          <a:ext cx="0" cy="0"/>
+          <a:chOff x="0" y="0"/>
+          <a:chExt cx="0" cy="0"/>
+        </a:xfrm>
+      </p:grpSpPr>
+      <p:sp>
+        <p:nvSpPr>
+          <p:cNvPr id="2" name="Slide Image Placeholder 1"/>
+          <p:cNvSpPr>
+            <a:spLocks noGrp="1" noRot="1" noChangeAspect="1"/>
+          </p:cNvSpPr>
+          <p:nvPr>
+            <p:ph type="sldImg"/>
+          </p:nvPr>
+        </p:nvSpPr>
+        <p:spPr/>
+      </p:sp>
+      <p:sp>
+        <p:nvSpPr>
+          <p:cNvPr id="3" name="Notes Placeholder 2"/>
+          <p:cNvSpPr>
+            <a:spLocks noGrp="1"/>
+          </p:cNvSpPr>
+          <p:nvPr>
+            <p:ph type="body" idx="1"/>
+          </p:nvPr>
+        </p:nvSpPr>
+        <p:spPr/>
+        <p:txBody>
+          <a:bodyPr/>
+          <a:lstStyle/>
+          <a:p>
+            <a:r>
+              <a:rPr lang="en-US" dirty="0"/>
+              <a:t/>
+            </a:r>
+            <a:endParaRPr lang="en-US" dirty="0"/>
+          </a:p>
+        </p:txBody>
+      </p:sp>
+      <p:sp>
+        <p:nvSpPr>
+          <p:cNvPr id="4" name="Slide Number Placeholder 3"/>
+          <p:cNvSpPr>
+            <a:spLocks noGrp="1"/>
+          </p:cNvSpPr>
+          <p:nvPr>
+            <p:ph type="sldNum" sz="quarter" idx="10"/>
+          </p:nvPr>
+        </p:nvSpPr>
+        <p:spPr/>
+        <p:txBody>
+          <a:bodyPr/>
+          <a:lstStyle/>
+          <a:p>
+            <a:fld id="{F7021451-1387-4CA6-816F-3879F97B5CBC}" type="slidenum">
+              <a:rPr lang="en-US"/>
+              <a:t>29</a:t>
+            </a:fld>
+            <a:endParaRPr lang="en-US"/>
+          </a:p>
+        </p:txBody>
+      </p:sp>
+    </p:spTree>
+    <p:extLst>
+      <p:ext uri="{BB962C8B-B14F-4D97-AF65-F5344CB8AC3E}">
+        <p14:creationId xmlns:p14="http://schemas.microsoft.com/office/powerpoint/2010/main" val="1024086991"/>
+      </p:ext>
+    </p:extLst>
+  </p:cSld>
+  <p:clrMapOvr>
+    <a:masterClrMapping/>
+  </p:clrMapOvr>
+</p:notes>
+</file>
+
 <file path=ppt/notesSlides/notesSlide3.xml><?xml version="1.0" encoding="utf-8"?>
 <p:notes xmlns:a="http://schemas.openxmlformats.org/drawingml/2006/main" xmlns:r="http://schemas.openxmlformats.org/officeDocument/2006/relationships" xmlns:p="http://schemas.openxmlformats.org/presentationml/2006/main">
   <p:cSld>
@@ -3357,6 +3465,94 @@
             <a:fld id="{F7021451-1387-4CA6-816F-3879F97B5CBC}" type="slidenum">
               <a:rPr lang="en-US"/>
               <a:t>3</a:t>
+            </a:fld>
+            <a:endParaRPr lang="en-US"/>
+          </a:p>
+        </p:txBody>
+      </p:sp>
+    </p:spTree>
+    <p:extLst>
+      <p:ext uri="{BB962C8B-B14F-4D97-AF65-F5344CB8AC3E}">
+        <p14:creationId xmlns:p14="http://schemas.microsoft.com/office/powerpoint/2010/main" val="1024086991"/>
+      </p:ext>
+    </p:extLst>
+  </p:cSld>
+  <p:clrMapOvr>
+    <a:masterClrMapping/>
+  </p:clrMapOvr>
+</p:notes>
+</file>
+
+<file path=ppt/notesSlides/notesSlide30.xml><?xml version="1.0" encoding="utf-8"?>
+<p:notes xmlns:a="http://schemas.openxmlformats.org/drawingml/2006/main" xmlns:r="http://schemas.openxmlformats.org/officeDocument/2006/relationships" xmlns:p="http://schemas.openxmlformats.org/presentationml/2006/main">
+  <p:cSld>
+    <p:spTree>
+      <p:nvGrpSpPr>
+        <p:cNvPr id="1" name=""/>
+        <p:cNvGrpSpPr/>
+        <p:nvPr/>
+      </p:nvGrpSpPr>
+      <p:grpSpPr>
+        <a:xfrm>
+          <a:off x="0" y="0"/>
+          <a:ext cx="0" cy="0"/>
+          <a:chOff x="0" y="0"/>
+          <a:chExt cx="0" cy="0"/>
+        </a:xfrm>
+      </p:grpSpPr>
+      <p:sp>
+        <p:nvSpPr>
+          <p:cNvPr id="2" name="Slide Image Placeholder 1"/>
+          <p:cNvSpPr>
+            <a:spLocks noGrp="1" noRot="1" noChangeAspect="1"/>
+          </p:cNvSpPr>
+          <p:nvPr>
+            <p:ph type="sldImg"/>
+          </p:nvPr>
+        </p:nvSpPr>
+        <p:spPr/>
+      </p:sp>
+      <p:sp>
+        <p:nvSpPr>
+          <p:cNvPr id="3" name="Notes Placeholder 2"/>
+          <p:cNvSpPr>
+            <a:spLocks noGrp="1"/>
+          </p:cNvSpPr>
+          <p:nvPr>
+            <p:ph type="body" idx="1"/>
+          </p:nvPr>
+        </p:nvSpPr>
+        <p:spPr/>
+        <p:txBody>
+          <a:bodyPr/>
+          <a:lstStyle/>
+          <a:p>
+            <a:r>
+              <a:rPr lang="en-US" dirty="0"/>
+              <a:t/>
+            </a:r>
+            <a:endParaRPr lang="en-US" dirty="0"/>
+          </a:p>
+        </p:txBody>
+      </p:sp>
+      <p:sp>
+        <p:nvSpPr>
+          <p:cNvPr id="4" name="Slide Number Placeholder 3"/>
+          <p:cNvSpPr>
+            <a:spLocks noGrp="1"/>
+          </p:cNvSpPr>
+          <p:nvPr>
+            <p:ph type="sldNum" sz="quarter" idx="10"/>
+          </p:nvPr>
+        </p:nvSpPr>
+        <p:spPr/>
+        <p:txBody>
+          <a:bodyPr/>
+          <a:lstStyle/>
+          <a:p>
+            <a:fld id="{F7021451-1387-4CA6-816F-3879F97B5CBC}" type="slidenum">
+              <a:rPr lang="en-US"/>
+              <a:t>30</a:t>
             </a:fld>
             <a:endParaRPr lang="en-US"/>
           </a:p>
@@ -4407,7 +4603,7 @@
                 <a:ea typeface="Pretendard" pitchFamily="34" charset="-122"/>
                 <a:cs typeface="Pretendard" pitchFamily="34" charset="-120"/>
               </a:rPr>
-              <a:t>업데이트 2026-09-29   ·   QA 9회   ·   이슈 66건</a:t>
+              <a:t>업데이트 2026-10-05   ·   QA 10회   ·   이슈 70건</a:t>
             </a:r>
             <a:endParaRPr lang="en-US" sz="1300" dirty="0"/>
           </a:p>
@@ -6667,7 +6863,7 @@
                 <a:ea typeface="Pretendard" pitchFamily="34" charset="-122"/>
                 <a:cs typeface="Pretendard" pitchFamily="34" charset="-120"/>
               </a:rPr>
-              <a:t>10 / 28</a:t>
+              <a:t>10 / 30</a:t>
             </a:r>
             <a:endParaRPr lang="en-US" sz="1000" dirty="0"/>
           </a:p>
@@ -7418,7 +7614,7 @@
                 <a:ea typeface="Pretendard" pitchFamily="34" charset="-122"/>
                 <a:cs typeface="Pretendard" pitchFamily="34" charset="-120"/>
               </a:rPr>
-              <a:t>11 / 28</a:t>
+              <a:t>11 / 30</a:t>
             </a:r>
             <a:endParaRPr lang="en-US" sz="1000" dirty="0"/>
           </a:p>
@@ -9174,7 +9370,7 @@
                 <a:ea typeface="Pretendard" pitchFamily="34" charset="-122"/>
                 <a:cs typeface="Pretendard" pitchFamily="34" charset="-120"/>
               </a:rPr>
-              <a:t>12 / 28</a:t>
+              <a:t>12 / 30</a:t>
             </a:r>
             <a:endParaRPr lang="en-US" sz="1000" dirty="0"/>
           </a:p>
@@ -11182,7 +11378,7 @@
                 <a:ea typeface="Pretendard" pitchFamily="34" charset="-122"/>
                 <a:cs typeface="Pretendard" pitchFamily="34" charset="-120"/>
               </a:rPr>
-              <a:t>13 / 28</a:t>
+              <a:t>13 / 30</a:t>
             </a:r>
             <a:endParaRPr lang="en-US" sz="1000" dirty="0"/>
           </a:p>
@@ -11597,7 +11793,7 @@
                 <a:ea typeface="Pretendard" pitchFamily="34" charset="-122"/>
                 <a:cs typeface="Pretendard" pitchFamily="34" charset="-120"/>
               </a:rPr>
-              <a:t>14 / 28</a:t>
+              <a:t>14 / 30</a:t>
             </a:r>
             <a:endParaRPr lang="en-US" sz="1000" dirty="0"/>
           </a:p>
@@ -12504,7 +12700,7 @@
                 <a:ea typeface="Pretendard" pitchFamily="34" charset="-122"/>
                 <a:cs typeface="Pretendard" pitchFamily="34" charset="-120"/>
               </a:rPr>
-              <a:t>15 / 28</a:t>
+              <a:t>15 / 30</a:t>
             </a:r>
             <a:endParaRPr lang="en-US" sz="1000" dirty="0"/>
           </a:p>
@@ -14512,7 +14708,7 @@
                 <a:ea typeface="Pretendard" pitchFamily="34" charset="-122"/>
                 <a:cs typeface="Pretendard" pitchFamily="34" charset="-120"/>
               </a:rPr>
-              <a:t>16 / 28</a:t>
+              <a:t>16 / 30</a:t>
             </a:r>
             <a:endParaRPr lang="en-US" sz="1000" dirty="0"/>
           </a:p>
@@ -15419,7 +15615,7 @@
                 <a:ea typeface="Pretendard" pitchFamily="34" charset="-122"/>
                 <a:cs typeface="Pretendard" pitchFamily="34" charset="-120"/>
               </a:rPr>
-              <a:t>17 / 28</a:t>
+              <a:t>17 / 30</a:t>
             </a:r>
             <a:endParaRPr lang="en-US" sz="1000" dirty="0"/>
           </a:p>
@@ -16671,7 +16867,7 @@
                 <a:ea typeface="Pretendard" pitchFamily="34" charset="-122"/>
                 <a:cs typeface="Pretendard" pitchFamily="34" charset="-120"/>
               </a:rPr>
-              <a:t>18 / 28</a:t>
+              <a:t>18 / 30</a:t>
             </a:r>
             <a:endParaRPr lang="en-US" sz="1000" dirty="0"/>
           </a:p>
@@ -18556,7 +18752,7 @@
                 <a:ea typeface="Pretendard" pitchFamily="34" charset="-122"/>
                 <a:cs typeface="Pretendard" pitchFamily="34" charset="-120"/>
               </a:rPr>
-              <a:t>19 / 28</a:t>
+              <a:t>19 / 30</a:t>
             </a:r>
             <a:endParaRPr lang="en-US" sz="1000" dirty="0"/>
           </a:p>
@@ -19308,7 +19504,7 @@
                 <a:ea typeface="Pretendard SemiBold" pitchFamily="34" charset="-122"/>
                 <a:cs typeface="Pretendard SemiBold" pitchFamily="34" charset="-120"/>
               </a:rPr>
-              <a:t>9회</a:t>
+              <a:t>10회</a:t>
             </a:r>
             <a:endParaRPr lang="en-US" sz="2800" dirty="0"/>
           </a:p>
@@ -19409,7 +19605,7 @@
                 <a:ea typeface="Pretendard SemiBold" pitchFamily="34" charset="-122"/>
                 <a:cs typeface="Pretendard SemiBold" pitchFamily="34" charset="-120"/>
               </a:rPr>
-              <a:t>66건</a:t>
+              <a:t>70건</a:t>
             </a:r>
             <a:endParaRPr lang="en-US" sz="2800" dirty="0"/>
           </a:p>
@@ -19510,7 +19706,7 @@
                 <a:ea typeface="Pretendard SemiBold" pitchFamily="34" charset="-122"/>
                 <a:cs typeface="Pretendard SemiBold" pitchFamily="34" charset="-120"/>
               </a:rPr>
-              <a:t>66건</a:t>
+              <a:t>70건</a:t>
             </a:r>
             <a:endParaRPr lang="en-US" sz="2800" dirty="0"/>
           </a:p>
@@ -19611,7 +19807,7 @@
                 <a:ea typeface="Pretendard SemiBold" pitchFamily="34" charset="-122"/>
                 <a:cs typeface="Pretendard SemiBold" pitchFamily="34" charset="-120"/>
               </a:rPr>
-              <a:t>10건</a:t>
+              <a:t>11건</a:t>
             </a:r>
             <a:endParaRPr lang="en-US" sz="2800" dirty="0"/>
           </a:p>
@@ -19728,7 +19924,7 @@
                 <a:ea typeface="Pretendard" pitchFamily="34" charset="-122"/>
                 <a:cs typeface="Pretendard" pitchFamily="34" charset="-120"/>
               </a:rPr>
-              <a:t>02 / 28</a:t>
+              <a:t>02 / 30</a:t>
             </a:r>
             <a:endParaRPr lang="en-US" sz="1000" dirty="0"/>
           </a:p>
@@ -20635,7 +20831,7 @@
                 <a:ea typeface="Pretendard" pitchFamily="34" charset="-122"/>
                 <a:cs typeface="Pretendard" pitchFamily="34" charset="-120"/>
               </a:rPr>
-              <a:t>20 / 28</a:t>
+              <a:t>20 / 30</a:t>
             </a:r>
             <a:endParaRPr lang="en-US" sz="1000" dirty="0"/>
           </a:p>
@@ -22268,7 +22464,7 @@
                 <a:ea typeface="Pretendard" pitchFamily="34" charset="-122"/>
                 <a:cs typeface="Pretendard" pitchFamily="34" charset="-120"/>
               </a:rPr>
-              <a:t>21 / 28</a:t>
+              <a:t>21 / 30</a:t>
             </a:r>
             <a:endParaRPr lang="en-US" sz="1000" dirty="0"/>
           </a:p>
@@ -23175,7 +23371,7 @@
                 <a:ea typeface="Pretendard" pitchFamily="34" charset="-122"/>
                 <a:cs typeface="Pretendard" pitchFamily="34" charset="-120"/>
               </a:rPr>
-              <a:t>22 / 28</a:t>
+              <a:t>22 / 30</a:t>
             </a:r>
             <a:endParaRPr lang="en-US" sz="1000" dirty="0"/>
           </a:p>
@@ -25435,7 +25631,7 @@
                 <a:ea typeface="Pretendard" pitchFamily="34" charset="-122"/>
                 <a:cs typeface="Pretendard" pitchFamily="34" charset="-120"/>
               </a:rPr>
-              <a:t>23 / 28</a:t>
+              <a:t>23 / 30</a:t>
             </a:r>
             <a:endParaRPr lang="en-US" sz="1000" dirty="0"/>
           </a:p>
@@ -26342,7 +26538,7 @@
                 <a:ea typeface="Pretendard" pitchFamily="34" charset="-122"/>
                 <a:cs typeface="Pretendard" pitchFamily="34" charset="-120"/>
               </a:rPr>
-              <a:t>24 / 28</a:t>
+              <a:t>24 / 30</a:t>
             </a:r>
             <a:endParaRPr lang="en-US" sz="1000" dirty="0"/>
           </a:p>
@@ -28479,7 +28675,7 @@
                 <a:ea typeface="Pretendard" pitchFamily="34" charset="-122"/>
                 <a:cs typeface="Pretendard" pitchFamily="34" charset="-120"/>
               </a:rPr>
-              <a:t>25 / 28</a:t>
+              <a:t>25 / 30</a:t>
             </a:r>
             <a:endParaRPr lang="en-US" sz="1000" dirty="0"/>
           </a:p>
@@ -28496,6 +28692,2417 @@
 <file path=ppt/slides/slide26.xml><?xml version="1.0" encoding="utf-8"?>
 <p:sld xmlns:a="http://schemas.openxmlformats.org/drawingml/2006/main" xmlns:r="http://schemas.openxmlformats.org/officeDocument/2006/relationships" xmlns:p="http://schemas.openxmlformats.org/presentationml/2006/main">
   <p:cSld name="Slide 26">
+    <p:bg>
+      <p:bgPr>
+        <a:solidFill>
+          <a:srgbClr val="272729"/>
+        </a:solidFill>
+      </p:bgPr>
+    </p:bg>
+    <p:spTree>
+      <p:nvGrpSpPr>
+        <p:cNvPr id="1" name=""/>
+        <p:cNvGrpSpPr/>
+        <p:nvPr/>
+      </p:nvGrpSpPr>
+      <p:grpSpPr>
+        <a:xfrm>
+          <a:off x="0" y="0"/>
+          <a:ext cx="0" cy="0"/>
+          <a:chOff x="0" y="0"/>
+          <a:chExt cx="0" cy="0"/>
+        </a:xfrm>
+      </p:grpSpPr>
+      <p:sp>
+        <p:nvSpPr>
+          <p:cNvPr id="2" name="Text 0"/>
+          <p:cNvSpPr txBox="1"/>
+          <p:nvPr/>
+        </p:nvSpPr>
+        <p:spPr>
+          <a:xfrm>
+            <a:off x="609905" y="320040"/>
+            <a:ext cx="10972800" cy="228600"/>
+          </a:xfrm>
+          <a:prstGeom prst="rect">
+            <a:avLst/>
+          </a:prstGeom>
+          <a:noFill/>
+          <a:ln/>
+        </p:spPr>
+        <p:txBody>
+          <a:bodyPr wrap="square" lIns="0" tIns="0" rIns="0" bIns="0" rtlCol="0" anchor="t"/>
+          <a:lstStyle/>
+          <a:p>
+            <a:pPr indent="0" marL="0">
+              <a:buNone/>
+            </a:pPr>
+            <a:r>
+              <a:rPr lang="en-US" sz="1100" b="1" spc="200" kern="0" dirty="0">
+                <a:solidFill>
+                  <a:srgbClr val="2997FF"/>
+                </a:solidFill>
+                <a:latin typeface="Pretendard SemiBold" pitchFamily="34" charset="0"/>
+                <a:ea typeface="Pretendard SemiBold" pitchFamily="34" charset="-122"/>
+                <a:cs typeface="Pretendard SemiBold" pitchFamily="34" charset="-120"/>
+              </a:rPr>
+              <a:t>R10  ·  2026-10-05</a:t>
+            </a:r>
+            <a:endParaRPr lang="en-US" sz="1100" dirty="0"/>
+          </a:p>
+        </p:txBody>
+      </p:sp>
+      <p:sp>
+        <p:nvSpPr>
+          <p:cNvPr id="3" name="Text 1"/>
+          <p:cNvSpPr txBox="1"/>
+          <p:nvPr/>
+        </p:nvSpPr>
+        <p:spPr>
+          <a:xfrm>
+            <a:off x="609905" y="594360"/>
+            <a:ext cx="10972800" cy="777240"/>
+          </a:xfrm>
+          <a:prstGeom prst="rect">
+            <a:avLst/>
+          </a:prstGeom>
+          <a:noFill/>
+          <a:ln/>
+        </p:spPr>
+        <p:txBody>
+          <a:bodyPr wrap="square" lIns="0" tIns="0" rIns="0" bIns="0" rtlCol="0" anchor="t"/>
+          <a:lstStyle/>
+          <a:p>
+            <a:pPr indent="0" marL="0">
+              <a:buNone/>
+            </a:pPr>
+            <a:r>
+              <a:rPr lang="en-US" sz="4000" dirty="0">
+                <a:solidFill>
+                  <a:srgbClr val="FFFFFF"/>
+                </a:solidFill>
+                <a:latin typeface="Pretendard SemiBold" pitchFamily="34" charset="0"/>
+                <a:ea typeface="Pretendard SemiBold" pitchFamily="34" charset="-122"/>
+                <a:cs typeface="Pretendard SemiBold" pitchFamily="34" charset="-120"/>
+              </a:rPr>
+              <a:t>플레이 시간 표기 · 포식 가시성 · 노가다 완화</a:t>
+            </a:r>
+            <a:endParaRPr lang="en-US" sz="4000" dirty="0"/>
+          </a:p>
+        </p:txBody>
+      </p:sp>
+      <p:sp>
+        <p:nvSpPr>
+          <p:cNvPr id="4" name="Shape 2"/>
+          <p:cNvSpPr/>
+          <p:nvPr/>
+        </p:nvSpPr>
+        <p:spPr>
+          <a:xfrm>
+            <a:off x="609905" y="1417320"/>
+            <a:ext cx="10972800" cy="0"/>
+          </a:xfrm>
+          <a:prstGeom prst="line">
+            <a:avLst/>
+          </a:prstGeom>
+          <a:noFill/>
+          <a:ln w="9525">
+            <a:solidFill>
+              <a:srgbClr val="3A3A3C"/>
+            </a:solidFill>
+            <a:prstDash val="solid"/>
+          </a:ln>
+        </p:spPr>
+      </p:sp>
+      <p:sp>
+        <p:nvSpPr>
+          <p:cNvPr id="5" name="Text 3"/>
+          <p:cNvSpPr txBox="1"/>
+          <p:nvPr/>
+        </p:nvSpPr>
+        <p:spPr>
+          <a:xfrm>
+            <a:off x="609905" y="1691640"/>
+            <a:ext cx="1097280" cy="320040"/>
+          </a:xfrm>
+          <a:prstGeom prst="rect">
+            <a:avLst/>
+          </a:prstGeom>
+          <a:noFill/>
+          <a:ln/>
+        </p:spPr>
+        <p:txBody>
+          <a:bodyPr wrap="square" lIns="0" tIns="0" rIns="0" bIns="0" rtlCol="0" anchor="ctr"/>
+          <a:lstStyle/>
+          <a:p>
+            <a:pPr indent="0" marL="0">
+              <a:buNone/>
+            </a:pPr>
+            <a:r>
+              <a:rPr lang="en-US" sz="1300" dirty="0">
+                <a:solidFill>
+                  <a:srgbClr val="8E8E93"/>
+                </a:solidFill>
+                <a:latin typeface="Pretendard SemiBold" pitchFamily="34" charset="0"/>
+                <a:ea typeface="Pretendard SemiBold" pitchFamily="34" charset="-122"/>
+                <a:cs typeface="Pretendard SemiBold" pitchFamily="34" charset="-120"/>
+              </a:rPr>
+              <a:t>계기</a:t>
+            </a:r>
+            <a:endParaRPr lang="en-US" sz="1300" dirty="0"/>
+          </a:p>
+        </p:txBody>
+      </p:sp>
+      <p:sp>
+        <p:nvSpPr>
+          <p:cNvPr id="6" name="Text 4"/>
+          <p:cNvSpPr txBox="1"/>
+          <p:nvPr/>
+        </p:nvSpPr>
+        <p:spPr>
+          <a:xfrm>
+            <a:off x="1707185" y="1691640"/>
+            <a:ext cx="9875520" cy="320040"/>
+          </a:xfrm>
+          <a:prstGeom prst="rect">
+            <a:avLst/>
+          </a:prstGeom>
+          <a:noFill/>
+          <a:ln/>
+        </p:spPr>
+        <p:txBody>
+          <a:bodyPr wrap="square" lIns="0" tIns="0" rIns="0" bIns="0" rtlCol="0" anchor="ctr"/>
+          <a:lstStyle/>
+          <a:p>
+            <a:pPr indent="0" marL="0">
+              <a:buNone/>
+            </a:pPr>
+            <a:r>
+              <a:rPr lang="en-US" sz="1800" dirty="0">
+                <a:solidFill>
+                  <a:srgbClr val="FFFFFF"/>
+                </a:solidFill>
+                <a:latin typeface="Pretendard" pitchFamily="34" charset="0"/>
+                <a:ea typeface="Pretendard" pitchFamily="34" charset="-122"/>
+                <a:cs typeface="Pretendard" pitchFamily="34" charset="-120"/>
+              </a:rPr>
+              <a:t>외부 QA — 결과 화면 생존 시간이 실제와 다름, 먹을 수 있는 물고기 구분 필요, 스킬 재화 노가다가 심함</a:t>
+            </a:r>
+            <a:endParaRPr lang="en-US" sz="1800" dirty="0"/>
+          </a:p>
+        </p:txBody>
+      </p:sp>
+      <p:sp>
+        <p:nvSpPr>
+          <p:cNvPr id="7" name="Text 5"/>
+          <p:cNvSpPr txBox="1"/>
+          <p:nvPr/>
+        </p:nvSpPr>
+        <p:spPr>
+          <a:xfrm>
+            <a:off x="609905" y="2148840"/>
+            <a:ext cx="1097280" cy="548640"/>
+          </a:xfrm>
+          <a:prstGeom prst="rect">
+            <a:avLst/>
+          </a:prstGeom>
+          <a:noFill/>
+          <a:ln/>
+        </p:spPr>
+        <p:txBody>
+          <a:bodyPr wrap="square" lIns="0" tIns="0" rIns="0" bIns="0" rtlCol="0" anchor="t"/>
+          <a:lstStyle/>
+          <a:p>
+            <a:pPr indent="0" marL="0">
+              <a:buNone/>
+            </a:pPr>
+            <a:r>
+              <a:rPr lang="en-US" sz="1300" dirty="0">
+                <a:solidFill>
+                  <a:srgbClr val="8E8E93"/>
+                </a:solidFill>
+                <a:latin typeface="Pretendard SemiBold" pitchFamily="34" charset="0"/>
+                <a:ea typeface="Pretendard SemiBold" pitchFamily="34" charset="-122"/>
+                <a:cs typeface="Pretendard SemiBold" pitchFamily="34" charset="-120"/>
+              </a:rPr>
+              <a:t>방법</a:t>
+            </a:r>
+            <a:endParaRPr lang="en-US" sz="1300" dirty="0"/>
+          </a:p>
+        </p:txBody>
+      </p:sp>
+      <p:sp>
+        <p:nvSpPr>
+          <p:cNvPr id="8" name="Text 6"/>
+          <p:cNvSpPr txBox="1"/>
+          <p:nvPr/>
+        </p:nvSpPr>
+        <p:spPr>
+          <a:xfrm>
+            <a:off x="1707185" y="2103120"/>
+            <a:ext cx="9875520" cy="731520"/>
+          </a:xfrm>
+          <a:prstGeom prst="rect">
+            <a:avLst/>
+          </a:prstGeom>
+          <a:noFill/>
+          <a:ln/>
+        </p:spPr>
+        <p:txBody>
+          <a:bodyPr wrap="square" lIns="0" tIns="0" rIns="0" bIns="0" rtlCol="0" anchor="t"/>
+          <a:lstStyle/>
+          <a:p>
+            <a:pPr indent="0" marL="0">
+              <a:lnSpc>
+                <a:spcPct val="130000"/>
+              </a:lnSpc>
+              <a:buNone/>
+            </a:pPr>
+            <a:r>
+              <a:rPr lang="en-US" sz="1800" dirty="0">
+                <a:solidFill>
+                  <a:srgbClr val="CCCCCC"/>
+                </a:solidFill>
+                <a:latin typeface="Pretendard" pitchFamily="34" charset="0"/>
+                <a:ea typeface="Pretendard" pitchFamily="34" charset="-122"/>
+                <a:cs typeface="Pretendard" pitchFamily="34" charset="-120"/>
+              </a:rPr>
+              <a:t>코드 추적 + 밸런스 시뮬레이터 리튠 (6회 · 12회 반복, 실제 플레이어처럼 '살 수 있으면 바로 사는' 구매 모델로 교체)</a:t>
+            </a:r>
+            <a:endParaRPr lang="en-US" sz="1800" dirty="0"/>
+          </a:p>
+        </p:txBody>
+      </p:sp>
+      <p:sp>
+        <p:nvSpPr>
+          <p:cNvPr id="9" name="Text 7"/>
+          <p:cNvSpPr txBox="1"/>
+          <p:nvPr/>
+        </p:nvSpPr>
+        <p:spPr>
+          <a:xfrm>
+            <a:off x="609905" y="4846320"/>
+            <a:ext cx="2651760" cy="502920"/>
+          </a:xfrm>
+          <a:prstGeom prst="rect">
+            <a:avLst/>
+          </a:prstGeom>
+          <a:noFill/>
+          <a:ln/>
+        </p:spPr>
+        <p:txBody>
+          <a:bodyPr wrap="square" lIns="0" tIns="0" rIns="0" bIns="0" rtlCol="0" anchor="ctr"/>
+          <a:lstStyle/>
+          <a:p>
+            <a:pPr indent="0" marL="0">
+              <a:buNone/>
+            </a:pPr>
+            <a:r>
+              <a:rPr lang="en-US" sz="2800" dirty="0">
+                <a:solidFill>
+                  <a:srgbClr val="FFFFFF"/>
+                </a:solidFill>
+                <a:latin typeface="Pretendard SemiBold" pitchFamily="34" charset="0"/>
+                <a:ea typeface="Pretendard SemiBold" pitchFamily="34" charset="-122"/>
+                <a:cs typeface="Pretendard SemiBold" pitchFamily="34" charset="-120"/>
+              </a:rPr>
+              <a:t>4건</a:t>
+            </a:r>
+            <a:endParaRPr lang="en-US" sz="2800" dirty="0"/>
+          </a:p>
+        </p:txBody>
+      </p:sp>
+      <p:sp>
+        <p:nvSpPr>
+          <p:cNvPr id="10" name="Text 8"/>
+          <p:cNvSpPr txBox="1"/>
+          <p:nvPr/>
+        </p:nvSpPr>
+        <p:spPr>
+          <a:xfrm>
+            <a:off x="609905" y="5376672"/>
+            <a:ext cx="2651760" cy="228600"/>
+          </a:xfrm>
+          <a:prstGeom prst="rect">
+            <a:avLst/>
+          </a:prstGeom>
+          <a:noFill/>
+          <a:ln/>
+        </p:spPr>
+        <p:txBody>
+          <a:bodyPr wrap="square" lIns="0" tIns="0" rIns="0" bIns="0" rtlCol="0" anchor="t"/>
+          <a:lstStyle/>
+          <a:p>
+            <a:pPr indent="0" marL="0">
+              <a:buNone/>
+            </a:pPr>
+            <a:r>
+              <a:rPr lang="en-US" sz="1200" dirty="0">
+                <a:solidFill>
+                  <a:srgbClr val="CCCCCC"/>
+                </a:solidFill>
+                <a:latin typeface="Pretendard" pitchFamily="34" charset="0"/>
+                <a:ea typeface="Pretendard" pitchFamily="34" charset="-122"/>
+                <a:cs typeface="Pretendard" pitchFamily="34" charset="-120"/>
+              </a:rPr>
+              <a:t>발견한 이슈</a:t>
+            </a:r>
+            <a:endParaRPr lang="en-US" sz="1200" dirty="0"/>
+          </a:p>
+        </p:txBody>
+      </p:sp>
+      <p:sp>
+        <p:nvSpPr>
+          <p:cNvPr id="11" name="Text 9"/>
+          <p:cNvSpPr txBox="1"/>
+          <p:nvPr/>
+        </p:nvSpPr>
+        <p:spPr>
+          <a:xfrm>
+            <a:off x="609905" y="5596128"/>
+            <a:ext cx="2651760" cy="201168"/>
+          </a:xfrm>
+          <a:prstGeom prst="rect">
+            <a:avLst/>
+          </a:prstGeom>
+          <a:noFill/>
+          <a:ln/>
+        </p:spPr>
+        <p:txBody>
+          <a:bodyPr wrap="square" lIns="0" tIns="0" rIns="0" bIns="0" rtlCol="0" anchor="t"/>
+          <a:lstStyle/>
+          <a:p>
+            <a:pPr indent="0" marL="0">
+              <a:buNone/>
+            </a:pPr>
+            <a:r>
+              <a:rPr lang="en-US" sz="1050" dirty="0">
+                <a:solidFill>
+                  <a:srgbClr val="8E8E93"/>
+                </a:solidFill>
+                <a:latin typeface="Pretendard" pitchFamily="34" charset="0"/>
+                <a:ea typeface="Pretendard" pitchFamily="34" charset="-122"/>
+                <a:cs typeface="Pretendard" pitchFamily="34" charset="-120"/>
+              </a:rPr>
+              <a:t>높음 2 · 중간 2 · 낮음 0</a:t>
+            </a:r>
+            <a:endParaRPr lang="en-US" sz="1050" dirty="0"/>
+          </a:p>
+        </p:txBody>
+      </p:sp>
+      <p:sp>
+        <p:nvSpPr>
+          <p:cNvPr id="12" name="Shape 10"/>
+          <p:cNvSpPr/>
+          <p:nvPr/>
+        </p:nvSpPr>
+        <p:spPr>
+          <a:xfrm>
+            <a:off x="3353105" y="4892040"/>
+            <a:ext cx="0" cy="868680"/>
+          </a:xfrm>
+          <a:prstGeom prst="line">
+            <a:avLst/>
+          </a:prstGeom>
+          <a:noFill/>
+          <a:ln w="9525">
+            <a:solidFill>
+              <a:srgbClr val="3A3A3C"/>
+            </a:solidFill>
+            <a:prstDash val="solid"/>
+          </a:ln>
+        </p:spPr>
+      </p:sp>
+      <p:sp>
+        <p:nvSpPr>
+          <p:cNvPr id="13" name="Text 11"/>
+          <p:cNvSpPr txBox="1"/>
+          <p:nvPr/>
+        </p:nvSpPr>
+        <p:spPr>
+          <a:xfrm>
+            <a:off x="3627425" y="4846320"/>
+            <a:ext cx="2377440" cy="502920"/>
+          </a:xfrm>
+          <a:prstGeom prst="rect">
+            <a:avLst/>
+          </a:prstGeom>
+          <a:noFill/>
+          <a:ln/>
+        </p:spPr>
+        <p:txBody>
+          <a:bodyPr wrap="square" lIns="0" tIns="0" rIns="0" bIns="0" rtlCol="0" anchor="ctr"/>
+          <a:lstStyle/>
+          <a:p>
+            <a:pPr indent="0" marL="0">
+              <a:buNone/>
+            </a:pPr>
+            <a:r>
+              <a:rPr lang="en-US" sz="2800" dirty="0">
+                <a:solidFill>
+                  <a:srgbClr val="FFFFFF"/>
+                </a:solidFill>
+                <a:latin typeface="Pretendard SemiBold" pitchFamily="34" charset="0"/>
+                <a:ea typeface="Pretendard SemiBold" pitchFamily="34" charset="-122"/>
+                <a:cs typeface="Pretendard SemiBold" pitchFamily="34" charset="-120"/>
+              </a:rPr>
+              <a:t>2.3h</a:t>
+            </a:r>
+            <a:endParaRPr lang="en-US" sz="2800" dirty="0"/>
+          </a:p>
+        </p:txBody>
+      </p:sp>
+      <p:sp>
+        <p:nvSpPr>
+          <p:cNvPr id="14" name="Text 12"/>
+          <p:cNvSpPr txBox="1"/>
+          <p:nvPr/>
+        </p:nvSpPr>
+        <p:spPr>
+          <a:xfrm>
+            <a:off x="3627425" y="5376672"/>
+            <a:ext cx="2377440" cy="228600"/>
+          </a:xfrm>
+          <a:prstGeom prst="rect">
+            <a:avLst/>
+          </a:prstGeom>
+          <a:noFill/>
+          <a:ln/>
+        </p:spPr>
+        <p:txBody>
+          <a:bodyPr wrap="square" lIns="0" tIns="0" rIns="0" bIns="0" rtlCol="0" anchor="t"/>
+          <a:lstStyle/>
+          <a:p>
+            <a:pPr indent="0" marL="0">
+              <a:buNone/>
+            </a:pPr>
+            <a:r>
+              <a:rPr lang="en-US" sz="1200" dirty="0">
+                <a:solidFill>
+                  <a:srgbClr val="CCCCCC"/>
+                </a:solidFill>
+                <a:latin typeface="Pretendard" pitchFamily="34" charset="0"/>
+                <a:ea typeface="Pretendard" pitchFamily="34" charset="-122"/>
+                <a:cs typeface="Pretendard" pitchFamily="34" charset="-120"/>
+              </a:rPr>
+              <a:t>클리어</a:t>
+            </a:r>
+            <a:endParaRPr lang="en-US" sz="1200" dirty="0"/>
+          </a:p>
+        </p:txBody>
+      </p:sp>
+      <p:sp>
+        <p:nvSpPr>
+          <p:cNvPr id="15" name="Text 13"/>
+          <p:cNvSpPr txBox="1"/>
+          <p:nvPr/>
+        </p:nvSpPr>
+        <p:spPr>
+          <a:xfrm>
+            <a:off x="3627425" y="5596128"/>
+            <a:ext cx="2377440" cy="201168"/>
+          </a:xfrm>
+          <a:prstGeom prst="rect">
+            <a:avLst/>
+          </a:prstGeom>
+          <a:noFill/>
+          <a:ln/>
+        </p:spPr>
+        <p:txBody>
+          <a:bodyPr wrap="square" lIns="0" tIns="0" rIns="0" bIns="0" rtlCol="0" anchor="t"/>
+          <a:lstStyle/>
+          <a:p>
+            <a:pPr indent="0" marL="0">
+              <a:buNone/>
+            </a:pPr>
+            <a:r>
+              <a:rPr lang="en-US" sz="1050" dirty="0">
+                <a:solidFill>
+                  <a:srgbClr val="8E8E93"/>
+                </a:solidFill>
+                <a:latin typeface="Pretendard" pitchFamily="34" charset="0"/>
+                <a:ea typeface="Pretendard" pitchFamily="34" charset="-122"/>
+                <a:cs typeface="Pretendard" pitchFamily="34" charset="-120"/>
+              </a:rPr>
+              <a:t>시뮬 중앙 (예전 6.1h)</a:t>
+            </a:r>
+            <a:endParaRPr lang="en-US" sz="1050" dirty="0"/>
+          </a:p>
+        </p:txBody>
+      </p:sp>
+      <p:sp>
+        <p:nvSpPr>
+          <p:cNvPr id="16" name="Shape 14"/>
+          <p:cNvSpPr/>
+          <p:nvPr/>
+        </p:nvSpPr>
+        <p:spPr>
+          <a:xfrm>
+            <a:off x="6096305" y="4892040"/>
+            <a:ext cx="0" cy="868680"/>
+          </a:xfrm>
+          <a:prstGeom prst="line">
+            <a:avLst/>
+          </a:prstGeom>
+          <a:noFill/>
+          <a:ln w="9525">
+            <a:solidFill>
+              <a:srgbClr val="3A3A3C"/>
+            </a:solidFill>
+            <a:prstDash val="solid"/>
+          </a:ln>
+        </p:spPr>
+      </p:sp>
+      <p:sp>
+        <p:nvSpPr>
+          <p:cNvPr id="17" name="Text 15"/>
+          <p:cNvSpPr txBox="1"/>
+          <p:nvPr/>
+        </p:nvSpPr>
+        <p:spPr>
+          <a:xfrm>
+            <a:off x="6370625" y="4846320"/>
+            <a:ext cx="2377440" cy="502920"/>
+          </a:xfrm>
+          <a:prstGeom prst="rect">
+            <a:avLst/>
+          </a:prstGeom>
+          <a:noFill/>
+          <a:ln/>
+        </p:spPr>
+        <p:txBody>
+          <a:bodyPr wrap="square" lIns="0" tIns="0" rIns="0" bIns="0" rtlCol="0" anchor="ctr"/>
+          <a:lstStyle/>
+          <a:p>
+            <a:pPr indent="0" marL="0">
+              <a:buNone/>
+            </a:pPr>
+            <a:r>
+              <a:rPr lang="en-US" sz="2800" dirty="0">
+                <a:solidFill>
+                  <a:srgbClr val="FFFFFF"/>
+                </a:solidFill>
+                <a:latin typeface="Pretendard SemiBold" pitchFamily="34" charset="0"/>
+                <a:ea typeface="Pretendard SemiBold" pitchFamily="34" charset="-122"/>
+                <a:cs typeface="Pretendard SemiBold" pitchFamily="34" charset="-120"/>
+              </a:rPr>
+              <a:t>68%</a:t>
+            </a:r>
+            <a:endParaRPr lang="en-US" sz="2800" dirty="0"/>
+          </a:p>
+        </p:txBody>
+      </p:sp>
+      <p:sp>
+        <p:nvSpPr>
+          <p:cNvPr id="18" name="Text 16"/>
+          <p:cNvSpPr txBox="1"/>
+          <p:nvPr/>
+        </p:nvSpPr>
+        <p:spPr>
+          <a:xfrm>
+            <a:off x="6370625" y="5376672"/>
+            <a:ext cx="2377440" cy="228600"/>
+          </a:xfrm>
+          <a:prstGeom prst="rect">
+            <a:avLst/>
+          </a:prstGeom>
+          <a:noFill/>
+          <a:ln/>
+        </p:spPr>
+        <p:txBody>
+          <a:bodyPr wrap="square" lIns="0" tIns="0" rIns="0" bIns="0" rtlCol="0" anchor="t"/>
+          <a:lstStyle/>
+          <a:p>
+            <a:pPr indent="0" marL="0">
+              <a:buNone/>
+            </a:pPr>
+            <a:r>
+              <a:rPr lang="en-US" sz="1200" dirty="0">
+                <a:solidFill>
+                  <a:srgbClr val="CCCCCC"/>
+                </a:solidFill>
+                <a:latin typeface="Pretendard" pitchFamily="34" charset="0"/>
+                <a:ea typeface="Pretendard" pitchFamily="34" charset="-122"/>
+                <a:cs typeface="Pretendard" pitchFamily="34" charset="-120"/>
+              </a:rPr>
+              <a:t>구매한 판</a:t>
+            </a:r>
+            <a:endParaRPr lang="en-US" sz="1200" dirty="0"/>
+          </a:p>
+        </p:txBody>
+      </p:sp>
+      <p:sp>
+        <p:nvSpPr>
+          <p:cNvPr id="19" name="Text 17"/>
+          <p:cNvSpPr txBox="1"/>
+          <p:nvPr/>
+        </p:nvSpPr>
+        <p:spPr>
+          <a:xfrm>
+            <a:off x="6370625" y="5596128"/>
+            <a:ext cx="2377440" cy="201168"/>
+          </a:xfrm>
+          <a:prstGeom prst="rect">
+            <a:avLst/>
+          </a:prstGeom>
+          <a:noFill/>
+          <a:ln/>
+        </p:spPr>
+        <p:txBody>
+          <a:bodyPr wrap="square" lIns="0" tIns="0" rIns="0" bIns="0" rtlCol="0" anchor="t"/>
+          <a:lstStyle/>
+          <a:p>
+            <a:pPr indent="0" marL="0">
+              <a:buNone/>
+            </a:pPr>
+            <a:r>
+              <a:rPr lang="en-US" sz="1050" dirty="0">
+                <a:solidFill>
+                  <a:srgbClr val="8E8E93"/>
+                </a:solidFill>
+                <a:latin typeface="Pretendard" pitchFamily="34" charset="0"/>
+                <a:ea typeface="Pretendard" pitchFamily="34" charset="-122"/>
+                <a:cs typeface="Pretendard" pitchFamily="34" charset="-120"/>
+              </a:rPr>
+              <a:t>예전 14%</a:t>
+            </a:r>
+            <a:endParaRPr lang="en-US" sz="1050" dirty="0"/>
+          </a:p>
+        </p:txBody>
+      </p:sp>
+      <p:sp>
+        <p:nvSpPr>
+          <p:cNvPr id="20" name="Shape 18"/>
+          <p:cNvSpPr/>
+          <p:nvPr/>
+        </p:nvSpPr>
+        <p:spPr>
+          <a:xfrm>
+            <a:off x="8839505" y="4892040"/>
+            <a:ext cx="0" cy="868680"/>
+          </a:xfrm>
+          <a:prstGeom prst="line">
+            <a:avLst/>
+          </a:prstGeom>
+          <a:noFill/>
+          <a:ln w="9525">
+            <a:solidFill>
+              <a:srgbClr val="3A3A3C"/>
+            </a:solidFill>
+            <a:prstDash val="solid"/>
+          </a:ln>
+        </p:spPr>
+      </p:sp>
+      <p:sp>
+        <p:nvSpPr>
+          <p:cNvPr id="21" name="Text 19"/>
+          <p:cNvSpPr txBox="1"/>
+          <p:nvPr/>
+        </p:nvSpPr>
+        <p:spPr>
+          <a:xfrm>
+            <a:off x="9113825" y="4846320"/>
+            <a:ext cx="2377440" cy="502920"/>
+          </a:xfrm>
+          <a:prstGeom prst="rect">
+            <a:avLst/>
+          </a:prstGeom>
+          <a:noFill/>
+          <a:ln/>
+        </p:spPr>
+        <p:txBody>
+          <a:bodyPr wrap="square" lIns="0" tIns="0" rIns="0" bIns="0" rtlCol="0" anchor="ctr"/>
+          <a:lstStyle/>
+          <a:p>
+            <a:pPr indent="0" marL="0">
+              <a:buNone/>
+            </a:pPr>
+            <a:r>
+              <a:rPr lang="en-US" sz="2800" dirty="0">
+                <a:solidFill>
+                  <a:srgbClr val="FFFFFF"/>
+                </a:solidFill>
+                <a:latin typeface="Pretendard SemiBold" pitchFamily="34" charset="0"/>
+                <a:ea typeface="Pretendard SemiBold" pitchFamily="34" charset="-122"/>
+                <a:cs typeface="Pretendard SemiBold" pitchFamily="34" charset="-120"/>
+              </a:rPr>
+              <a:t>89초</a:t>
+            </a:r>
+            <a:endParaRPr lang="en-US" sz="2800" dirty="0"/>
+          </a:p>
+        </p:txBody>
+      </p:sp>
+      <p:sp>
+        <p:nvSpPr>
+          <p:cNvPr id="22" name="Text 20"/>
+          <p:cNvSpPr txBox="1"/>
+          <p:nvPr/>
+        </p:nvSpPr>
+        <p:spPr>
+          <a:xfrm>
+            <a:off x="9113825" y="5376672"/>
+            <a:ext cx="2377440" cy="228600"/>
+          </a:xfrm>
+          <a:prstGeom prst="rect">
+            <a:avLst/>
+          </a:prstGeom>
+          <a:noFill/>
+          <a:ln/>
+        </p:spPr>
+        <p:txBody>
+          <a:bodyPr wrap="square" lIns="0" tIns="0" rIns="0" bIns="0" rtlCol="0" anchor="t"/>
+          <a:lstStyle/>
+          <a:p>
+            <a:pPr indent="0" marL="0">
+              <a:buNone/>
+            </a:pPr>
+            <a:r>
+              <a:rPr lang="en-US" sz="1200" dirty="0">
+                <a:solidFill>
+                  <a:srgbClr val="CCCCCC"/>
+                </a:solidFill>
+                <a:latin typeface="Pretendard" pitchFamily="34" charset="0"/>
+                <a:ea typeface="Pretendard" pitchFamily="34" charset="-122"/>
+                <a:cs typeface="Pretendard" pitchFamily="34" charset="-120"/>
+              </a:rPr>
+              <a:t>한 판</a:t>
+            </a:r>
+            <a:endParaRPr lang="en-US" sz="1200" dirty="0"/>
+          </a:p>
+        </p:txBody>
+      </p:sp>
+      <p:sp>
+        <p:nvSpPr>
+          <p:cNvPr id="23" name="Text 21"/>
+          <p:cNvSpPr txBox="1"/>
+          <p:nvPr/>
+        </p:nvSpPr>
+        <p:spPr>
+          <a:xfrm>
+            <a:off x="9113825" y="5596128"/>
+            <a:ext cx="2377440" cy="201168"/>
+          </a:xfrm>
+          <a:prstGeom prst="rect">
+            <a:avLst/>
+          </a:prstGeom>
+          <a:noFill/>
+          <a:ln/>
+        </p:spPr>
+        <p:txBody>
+          <a:bodyPr wrap="square" lIns="0" tIns="0" rIns="0" bIns="0" rtlCol="0" anchor="t"/>
+          <a:lstStyle/>
+          <a:p>
+            <a:pPr indent="0" marL="0">
+              <a:buNone/>
+            </a:pPr>
+            <a:r>
+              <a:rPr lang="en-US" sz="1050" dirty="0">
+                <a:solidFill>
+                  <a:srgbClr val="8E8E93"/>
+                </a:solidFill>
+                <a:latin typeface="Pretendard" pitchFamily="34" charset="0"/>
+                <a:ea typeface="Pretendard" pitchFamily="34" charset="-122"/>
+                <a:cs typeface="Pretendard" pitchFamily="34" charset="-120"/>
+              </a:rPr>
+              <a:t>예전 30초 · 총 88판 (예전 553판)</a:t>
+            </a:r>
+            <a:endParaRPr lang="en-US" sz="1050" dirty="0"/>
+          </a:p>
+        </p:txBody>
+      </p:sp>
+      <p:sp>
+        <p:nvSpPr>
+          <p:cNvPr id="24" name="Text 22"/>
+          <p:cNvSpPr txBox="1"/>
+          <p:nvPr/>
+        </p:nvSpPr>
+        <p:spPr>
+          <a:xfrm>
+            <a:off x="609905" y="6446520"/>
+            <a:ext cx="5486400" cy="274320"/>
+          </a:xfrm>
+          <a:prstGeom prst="rect">
+            <a:avLst/>
+          </a:prstGeom>
+          <a:noFill/>
+          <a:ln/>
+        </p:spPr>
+        <p:txBody>
+          <a:bodyPr wrap="square" lIns="0" tIns="0" rIns="0" bIns="0" rtlCol="0" anchor="ctr"/>
+          <a:lstStyle/>
+          <a:p>
+            <a:pPr indent="0" marL="0">
+              <a:buNone/>
+            </a:pPr>
+            <a:r>
+              <a:rPr lang="en-US" sz="1000" spc="200" kern="0" dirty="0">
+                <a:solidFill>
+                  <a:srgbClr val="8E8E93"/>
+                </a:solidFill>
+                <a:latin typeface="Pretendard" pitchFamily="34" charset="0"/>
+                <a:ea typeface="Pretendard" pitchFamily="34" charset="-122"/>
+                <a:cs typeface="Pretendard" pitchFamily="34" charset="-120"/>
+              </a:rPr>
+              <a:t>QA REPORT  ·  FISH GAME</a:t>
+            </a:r>
+            <a:endParaRPr lang="en-US" sz="1000" dirty="0"/>
+          </a:p>
+        </p:txBody>
+      </p:sp>
+      <p:sp>
+        <p:nvSpPr>
+          <p:cNvPr id="25" name="Text 23"/>
+          <p:cNvSpPr txBox="1"/>
+          <p:nvPr/>
+        </p:nvSpPr>
+        <p:spPr>
+          <a:xfrm>
+            <a:off x="10515600" y="6446520"/>
+            <a:ext cx="1066190" cy="274320"/>
+          </a:xfrm>
+          <a:prstGeom prst="rect">
+            <a:avLst/>
+          </a:prstGeom>
+          <a:noFill/>
+          <a:ln/>
+        </p:spPr>
+        <p:txBody>
+          <a:bodyPr wrap="square" lIns="0" tIns="0" rIns="0" bIns="0" rtlCol="0" anchor="ctr"/>
+          <a:lstStyle/>
+          <a:p>
+            <a:pPr algn="r" indent="0" marL="0">
+              <a:buNone/>
+            </a:pPr>
+            <a:r>
+              <a:rPr lang="en-US" sz="1000" dirty="0">
+                <a:solidFill>
+                  <a:srgbClr val="8E8E93"/>
+                </a:solidFill>
+                <a:latin typeface="Pretendard" pitchFamily="34" charset="0"/>
+                <a:ea typeface="Pretendard" pitchFamily="34" charset="-122"/>
+                <a:cs typeface="Pretendard" pitchFamily="34" charset="-120"/>
+              </a:rPr>
+              <a:t>26 / 30</a:t>
+            </a:r>
+            <a:endParaRPr lang="en-US" sz="1000" dirty="0"/>
+          </a:p>
+        </p:txBody>
+      </p:sp>
+    </p:spTree>
+  </p:cSld>
+  <p:clrMapOvr>
+    <a:masterClrMapping/>
+  </p:clrMapOvr>
+</p:sld>
+</file>
+
+<file path=ppt/slides/slide27.xml><?xml version="1.0" encoding="utf-8"?>
+<p:sld xmlns:a="http://schemas.openxmlformats.org/drawingml/2006/main" xmlns:r="http://schemas.openxmlformats.org/officeDocument/2006/relationships" xmlns:p="http://schemas.openxmlformats.org/presentationml/2006/main">
+  <p:cSld name="Slide 27">
+    <p:bg>
+      <p:bgPr>
+        <a:solidFill>
+          <a:srgbClr val="FFFFFF"/>
+        </a:solidFill>
+      </p:bgPr>
+    </p:bg>
+    <p:spTree>
+      <p:nvGrpSpPr>
+        <p:cNvPr id="1" name=""/>
+        <p:cNvGrpSpPr/>
+        <p:nvPr/>
+      </p:nvGrpSpPr>
+      <p:grpSpPr>
+        <a:xfrm>
+          <a:off x="0" y="0"/>
+          <a:ext cx="0" cy="0"/>
+          <a:chOff x="0" y="0"/>
+          <a:chExt cx="0" cy="0"/>
+        </a:xfrm>
+      </p:grpSpPr>
+      <p:sp>
+        <p:nvSpPr>
+          <p:cNvPr id="2" name="Text 0"/>
+          <p:cNvSpPr txBox="1"/>
+          <p:nvPr/>
+        </p:nvSpPr>
+        <p:spPr>
+          <a:xfrm>
+            <a:off x="609905" y="320040"/>
+            <a:ext cx="10972800" cy="228600"/>
+          </a:xfrm>
+          <a:prstGeom prst="rect">
+            <a:avLst/>
+          </a:prstGeom>
+          <a:noFill/>
+          <a:ln/>
+        </p:spPr>
+        <p:txBody>
+          <a:bodyPr wrap="square" lIns="0" tIns="0" rIns="0" bIns="0" rtlCol="0" anchor="t"/>
+          <a:lstStyle/>
+          <a:p>
+            <a:pPr indent="0" marL="0">
+              <a:buNone/>
+            </a:pPr>
+            <a:r>
+              <a:rPr lang="en-US" sz="1100" b="1" dirty="0">
+                <a:solidFill>
+                  <a:srgbClr val="0066CC"/>
+                </a:solidFill>
+                <a:latin typeface="Pretendard SemiBold" pitchFamily="34" charset="0"/>
+                <a:ea typeface="Pretendard SemiBold" pitchFamily="34" charset="-122"/>
+                <a:cs typeface="Pretendard SemiBold" pitchFamily="34" charset="-120"/>
+              </a:rPr>
+              <a:t>R10  ·  플레이 시간 표기 · 포식 가시성 · 노가다 완화</a:t>
+            </a:r>
+            <a:endParaRPr lang="en-US" sz="1100" dirty="0"/>
+          </a:p>
+        </p:txBody>
+      </p:sp>
+      <p:sp>
+        <p:nvSpPr>
+          <p:cNvPr id="3" name="Text 1"/>
+          <p:cNvSpPr txBox="1"/>
+          <p:nvPr/>
+        </p:nvSpPr>
+        <p:spPr>
+          <a:xfrm>
+            <a:off x="609905" y="594360"/>
+            <a:ext cx="10972800" cy="777240"/>
+          </a:xfrm>
+          <a:prstGeom prst="rect">
+            <a:avLst/>
+          </a:prstGeom>
+          <a:noFill/>
+          <a:ln/>
+        </p:spPr>
+        <p:txBody>
+          <a:bodyPr wrap="square" lIns="0" tIns="0" rIns="0" bIns="0" rtlCol="0" anchor="t"/>
+          <a:lstStyle/>
+          <a:p>
+            <a:pPr indent="0" marL="0">
+              <a:buNone/>
+            </a:pPr>
+            <a:r>
+              <a:rPr lang="en-US" sz="4000" dirty="0">
+                <a:solidFill>
+                  <a:srgbClr val="1D1D1F"/>
+                </a:solidFill>
+                <a:latin typeface="Pretendard SemiBold" pitchFamily="34" charset="0"/>
+                <a:ea typeface="Pretendard SemiBold" pitchFamily="34" charset="-122"/>
+                <a:cs typeface="Pretendard SemiBold" pitchFamily="34" charset="-120"/>
+              </a:rPr>
+              <a:t>발견한 문제와 조치</a:t>
+            </a:r>
+            <a:endParaRPr lang="en-US" sz="4000" dirty="0"/>
+          </a:p>
+        </p:txBody>
+      </p:sp>
+      <p:sp>
+        <p:nvSpPr>
+          <p:cNvPr id="4" name="Shape 2"/>
+          <p:cNvSpPr/>
+          <p:nvPr/>
+        </p:nvSpPr>
+        <p:spPr>
+          <a:xfrm>
+            <a:off x="609905" y="1417320"/>
+            <a:ext cx="10972800" cy="0"/>
+          </a:xfrm>
+          <a:prstGeom prst="line">
+            <a:avLst/>
+          </a:prstGeom>
+          <a:noFill/>
+          <a:ln w="9525">
+            <a:solidFill>
+              <a:srgbClr val="E0E0E0"/>
+            </a:solidFill>
+            <a:prstDash val="solid"/>
+          </a:ln>
+        </p:spPr>
+      </p:sp>
+      <p:graphicFrame>
+        <p:nvGraphicFramePr>
+          <p:cNvPr id="28" name="Table 0"/>
+          <p:cNvGraphicFramePr>
+            <a:graphicFrameLocks noGrp="1"/>
+          </p:cNvGraphicFramePr>
+          <p:nvPr>
+            <p:extLst>
+              <p:ext uri="{D42A27DB-BD31-4B8C-83A1-F6EECF244321}">
+                <p14:modId xmlns:p14="http://schemas.microsoft.com/office/powerpoint/2010/main" val="1579011935"/>
+              </p:ext>
+            </p:extLst>
+          </p:nvPr>
+        </p:nvGraphicFramePr>
+        <p:xfrm>
+          <a:off x="609905" y="1600200"/>
+          <a:ext cx="10972800" cy="914400"/>
+        </p:xfrm>
+        <a:graphic>
+          <a:graphicData uri="http://schemas.openxmlformats.org/drawingml/2006/table">
+            <a:tbl>
+              <a:tblPr/>
+              <a:tblGrid>
+                <a:gridCol w="731520"/>
+                <a:gridCol w="1188720"/>
+                <a:gridCol w="4206240"/>
+                <a:gridCol w="3931920"/>
+                <a:gridCol w="914400"/>
+              </a:tblGrid>
+              <a:tr h="329184">
+                <a:tc>
+                  <a:txBody>
+                    <a:bodyPr/>
+                    <a:lstStyle/>
+                    <a:p>
+                      <a:pPr indent="0" marL="0">
+                        <a:buNone/>
+                      </a:pPr>
+                      <a:r>
+                        <a:rPr lang="en-US" sz="1200" b="1" dirty="0">
+                          <a:solidFill>
+                            <a:srgbClr val="7A7A7A"/>
+                          </a:solidFill>
+                          <a:latin typeface="Pretendard SemiBold" pitchFamily="34" charset="0"/>
+                          <a:ea typeface="Pretendard SemiBold" pitchFamily="34" charset="-122"/>
+                          <a:cs typeface="Pretendard SemiBold" pitchFamily="34" charset="-120"/>
+                        </a:rPr>
+                        <a:t>심각도</a:t>
+                      </a:r>
+                      <a:endParaRPr lang="en-US" sz="1200" dirty="0">
+                        <a:latin typeface="Pretendard SemiBold" charset="0"/>
+                        <a:ea typeface="Pretendard SemiBold" charset="0"/>
+                        <a:cs typeface="Pretendard SemiBold" charset="0"/>
+                      </a:endParaRPr>
+                    </a:p>
+                  </a:txBody>
+                  <a:tcPr marL="76200" marR="76200" marT="50800" marB="50800" anchor="ctr">
+                    <a:lnL w="0" cap="flat" cmpd="sng" algn="ctr">
+                      <a:noFill/>
+                    </a:lnL>
+                    <a:lnR w="0" cap="flat" cmpd="sng" algn="ctr">
+                      <a:noFill/>
+                    </a:lnR>
+                    <a:lnT w="0" cap="flat" cmpd="sng" algn="ctr">
+                      <a:noFill/>
+                    </a:lnT>
+                    <a:lnB w="9525" cap="flat" cmpd="sng" algn="ctr">
+                      <a:solidFill>
+                        <a:srgbClr val="E0E0E0"/>
+                      </a:solidFill>
+                      <a:prstDash val="solid"/>
+                      <a:round/>
+                      <a:headEnd type="none" w="med" len="med"/>
+                      <a:tailEnd type="none" w="med" len="med"/>
+                    </a:lnB>
+                    <a:solidFill>
+                      <a:srgbClr val="F5F5F7"/>
+                    </a:solidFill>
+                  </a:tcPr>
+                </a:tc>
+                <a:tc>
+                  <a:txBody>
+                    <a:bodyPr/>
+                    <a:lstStyle/>
+                    <a:p>
+                      <a:pPr indent="0" marL="0">
+                        <a:buNone/>
+                      </a:pPr>
+                      <a:r>
+                        <a:rPr lang="en-US" sz="1200" b="1" dirty="0">
+                          <a:solidFill>
+                            <a:srgbClr val="7A7A7A"/>
+                          </a:solidFill>
+                          <a:latin typeface="Pretendard SemiBold" pitchFamily="34" charset="0"/>
+                          <a:ea typeface="Pretendard SemiBold" pitchFamily="34" charset="-122"/>
+                          <a:cs typeface="Pretendard SemiBold" pitchFamily="34" charset="-120"/>
+                        </a:rPr>
+                        <a:t>영역</a:t>
+                      </a:r>
+                      <a:endParaRPr lang="en-US" sz="1200" dirty="0">
+                        <a:latin typeface="Pretendard SemiBold" charset="0"/>
+                        <a:ea typeface="Pretendard SemiBold" charset="0"/>
+                        <a:cs typeface="Pretendard SemiBold" charset="0"/>
+                      </a:endParaRPr>
+                    </a:p>
+                  </a:txBody>
+                  <a:tcPr marL="76200" marR="76200" marT="50800" marB="50800" anchor="ctr">
+                    <a:lnL w="0" cap="flat" cmpd="sng" algn="ctr">
+                      <a:noFill/>
+                    </a:lnL>
+                    <a:lnR w="0" cap="flat" cmpd="sng" algn="ctr">
+                      <a:noFill/>
+                    </a:lnR>
+                    <a:lnT w="0" cap="flat" cmpd="sng" algn="ctr">
+                      <a:noFill/>
+                    </a:lnT>
+                    <a:lnB w="9525" cap="flat" cmpd="sng" algn="ctr">
+                      <a:solidFill>
+                        <a:srgbClr val="E0E0E0"/>
+                      </a:solidFill>
+                      <a:prstDash val="solid"/>
+                      <a:round/>
+                      <a:headEnd type="none" w="med" len="med"/>
+                      <a:tailEnd type="none" w="med" len="med"/>
+                    </a:lnB>
+                    <a:solidFill>
+                      <a:srgbClr val="F5F5F7"/>
+                    </a:solidFill>
+                  </a:tcPr>
+                </a:tc>
+                <a:tc>
+                  <a:txBody>
+                    <a:bodyPr/>
+                    <a:lstStyle/>
+                    <a:p>
+                      <a:pPr indent="0" marL="0">
+                        <a:buNone/>
+                      </a:pPr>
+                      <a:r>
+                        <a:rPr lang="en-US" sz="1200" b="1" dirty="0">
+                          <a:solidFill>
+                            <a:srgbClr val="7A7A7A"/>
+                          </a:solidFill>
+                          <a:latin typeface="Pretendard SemiBold" pitchFamily="34" charset="0"/>
+                          <a:ea typeface="Pretendard SemiBold" pitchFamily="34" charset="-122"/>
+                          <a:cs typeface="Pretendard SemiBold" pitchFamily="34" charset="-120"/>
+                        </a:rPr>
+                        <a:t>문제</a:t>
+                      </a:r>
+                      <a:endParaRPr lang="en-US" sz="1200" dirty="0">
+                        <a:latin typeface="Pretendard SemiBold" charset="0"/>
+                        <a:ea typeface="Pretendard SemiBold" charset="0"/>
+                        <a:cs typeface="Pretendard SemiBold" charset="0"/>
+                      </a:endParaRPr>
+                    </a:p>
+                  </a:txBody>
+                  <a:tcPr marL="76200" marR="76200" marT="50800" marB="50800" anchor="ctr">
+                    <a:lnL w="0" cap="flat" cmpd="sng" algn="ctr">
+                      <a:noFill/>
+                    </a:lnL>
+                    <a:lnR w="0" cap="flat" cmpd="sng" algn="ctr">
+                      <a:noFill/>
+                    </a:lnR>
+                    <a:lnT w="0" cap="flat" cmpd="sng" algn="ctr">
+                      <a:noFill/>
+                    </a:lnT>
+                    <a:lnB w="9525" cap="flat" cmpd="sng" algn="ctr">
+                      <a:solidFill>
+                        <a:srgbClr val="E0E0E0"/>
+                      </a:solidFill>
+                      <a:prstDash val="solid"/>
+                      <a:round/>
+                      <a:headEnd type="none" w="med" len="med"/>
+                      <a:tailEnd type="none" w="med" len="med"/>
+                    </a:lnB>
+                    <a:solidFill>
+                      <a:srgbClr val="F5F5F7"/>
+                    </a:solidFill>
+                  </a:tcPr>
+                </a:tc>
+                <a:tc>
+                  <a:txBody>
+                    <a:bodyPr/>
+                    <a:lstStyle/>
+                    <a:p>
+                      <a:pPr indent="0" marL="0">
+                        <a:buNone/>
+                      </a:pPr>
+                      <a:r>
+                        <a:rPr lang="en-US" sz="1200" b="1" dirty="0">
+                          <a:solidFill>
+                            <a:srgbClr val="7A7A7A"/>
+                          </a:solidFill>
+                          <a:latin typeface="Pretendard SemiBold" pitchFamily="34" charset="0"/>
+                          <a:ea typeface="Pretendard SemiBold" pitchFamily="34" charset="-122"/>
+                          <a:cs typeface="Pretendard SemiBold" pitchFamily="34" charset="-120"/>
+                        </a:rPr>
+                        <a:t>조치</a:t>
+                      </a:r>
+                      <a:endParaRPr lang="en-US" sz="1200" dirty="0">
+                        <a:latin typeface="Pretendard SemiBold" charset="0"/>
+                        <a:ea typeface="Pretendard SemiBold" charset="0"/>
+                        <a:cs typeface="Pretendard SemiBold" charset="0"/>
+                      </a:endParaRPr>
+                    </a:p>
+                  </a:txBody>
+                  <a:tcPr marL="76200" marR="76200" marT="50800" marB="50800" anchor="ctr">
+                    <a:lnL w="0" cap="flat" cmpd="sng" algn="ctr">
+                      <a:noFill/>
+                    </a:lnL>
+                    <a:lnR w="0" cap="flat" cmpd="sng" algn="ctr">
+                      <a:noFill/>
+                    </a:lnR>
+                    <a:lnT w="0" cap="flat" cmpd="sng" algn="ctr">
+                      <a:noFill/>
+                    </a:lnT>
+                    <a:lnB w="9525" cap="flat" cmpd="sng" algn="ctr">
+                      <a:solidFill>
+                        <a:srgbClr val="E0E0E0"/>
+                      </a:solidFill>
+                      <a:prstDash val="solid"/>
+                      <a:round/>
+                      <a:headEnd type="none" w="med" len="med"/>
+                      <a:tailEnd type="none" w="med" len="med"/>
+                    </a:lnB>
+                    <a:solidFill>
+                      <a:srgbClr val="F5F5F7"/>
+                    </a:solidFill>
+                  </a:tcPr>
+                </a:tc>
+                <a:tc>
+                  <a:txBody>
+                    <a:bodyPr/>
+                    <a:lstStyle/>
+                    <a:p>
+                      <a:pPr indent="0" marL="0">
+                        <a:buNone/>
+                      </a:pPr>
+                      <a:r>
+                        <a:rPr lang="en-US" sz="1200" b="1" dirty="0">
+                          <a:solidFill>
+                            <a:srgbClr val="7A7A7A"/>
+                          </a:solidFill>
+                          <a:latin typeface="Pretendard SemiBold" pitchFamily="34" charset="0"/>
+                          <a:ea typeface="Pretendard SemiBold" pitchFamily="34" charset="-122"/>
+                          <a:cs typeface="Pretendard SemiBold" pitchFamily="34" charset="-120"/>
+                        </a:rPr>
+                        <a:t>상태</a:t>
+                      </a:r>
+                      <a:endParaRPr lang="en-US" sz="1200" dirty="0">
+                        <a:latin typeface="Pretendard SemiBold" charset="0"/>
+                        <a:ea typeface="Pretendard SemiBold" charset="0"/>
+                        <a:cs typeface="Pretendard SemiBold" charset="0"/>
+                      </a:endParaRPr>
+                    </a:p>
+                  </a:txBody>
+                  <a:tcPr marL="76200" marR="76200" marT="50800" marB="50800" anchor="ctr">
+                    <a:lnL w="0" cap="flat" cmpd="sng" algn="ctr">
+                      <a:noFill/>
+                    </a:lnL>
+                    <a:lnR w="0" cap="flat" cmpd="sng" algn="ctr">
+                      <a:noFill/>
+                    </a:lnR>
+                    <a:lnT w="0" cap="flat" cmpd="sng" algn="ctr">
+                      <a:noFill/>
+                    </a:lnT>
+                    <a:lnB w="9525" cap="flat" cmpd="sng" algn="ctr">
+                      <a:solidFill>
+                        <a:srgbClr val="E0E0E0"/>
+                      </a:solidFill>
+                      <a:prstDash val="solid"/>
+                      <a:round/>
+                      <a:headEnd type="none" w="med" len="med"/>
+                      <a:tailEnd type="none" w="med" len="med"/>
+                    </a:lnB>
+                    <a:solidFill>
+                      <a:srgbClr val="F5F5F7"/>
+                    </a:solidFill>
+                  </a:tcPr>
+                </a:tc>
+              </a:tr>
+              <a:tr h="866394">
+                <a:tc>
+                  <a:txBody>
+                    <a:bodyPr/>
+                    <a:lstStyle/>
+                    <a:p>
+                      <a:pPr indent="0" marL="0">
+                        <a:buNone/>
+                      </a:pPr>
+                      <a:r>
+                        <a:rPr lang="en-US" sz="1300" b="1" dirty="0">
+                          <a:solidFill>
+                            <a:srgbClr val="0066CC"/>
+                          </a:solidFill>
+                          <a:latin typeface="Pretendard SemiBold" pitchFamily="34" charset="0"/>
+                          <a:ea typeface="Pretendard SemiBold" pitchFamily="34" charset="-122"/>
+                          <a:cs typeface="Pretendard SemiBold" pitchFamily="34" charset="-120"/>
+                        </a:rPr>
+                        <a:t>높음</a:t>
+                      </a:r>
+                      <a:endParaRPr lang="en-US" sz="1300" dirty="0">
+                        <a:latin typeface="Pretendard SemiBold" charset="0"/>
+                        <a:ea typeface="Pretendard SemiBold" charset="0"/>
+                        <a:cs typeface="Pretendard SemiBold" charset="0"/>
+                      </a:endParaRPr>
+                    </a:p>
+                  </a:txBody>
+                  <a:tcPr marL="76200" marR="76200" marT="50800" marB="50800" anchor="ctr">
+                    <a:lnL w="0" cap="flat" cmpd="sng" algn="ctr">
+                      <a:noFill/>
+                    </a:lnL>
+                    <a:lnR w="0" cap="flat" cmpd="sng" algn="ctr">
+                      <a:noFill/>
+                    </a:lnR>
+                    <a:lnT w="0" cap="flat" cmpd="sng" algn="ctr">
+                      <a:noFill/>
+                    </a:lnT>
+                    <a:lnB w="9525" cap="flat" cmpd="sng" algn="ctr">
+                      <a:solidFill>
+                        <a:srgbClr val="E0E0E0"/>
+                      </a:solidFill>
+                      <a:prstDash val="solid"/>
+                      <a:round/>
+                      <a:headEnd type="none" w="med" len="med"/>
+                      <a:tailEnd type="none" w="med" len="med"/>
+                    </a:lnB>
+                    <a:solidFill>
+                      <a:srgbClr val="FFFFFF"/>
+                    </a:solidFill>
+                  </a:tcPr>
+                </a:tc>
+                <a:tc>
+                  <a:txBody>
+                    <a:bodyPr/>
+                    <a:lstStyle/>
+                    <a:p>
+                      <a:pPr indent="0" marL="0">
+                        <a:buNone/>
+                      </a:pPr>
+                      <a:r>
+                        <a:rPr lang="en-US" sz="1300" dirty="0">
+                          <a:solidFill>
+                            <a:srgbClr val="1D1D1F"/>
+                          </a:solidFill>
+                          <a:latin typeface="Pretendard SemiBold" pitchFamily="34" charset="0"/>
+                          <a:ea typeface="Pretendard SemiBold" pitchFamily="34" charset="-122"/>
+                          <a:cs typeface="Pretendard SemiBold" pitchFamily="34" charset="-120"/>
+                        </a:rPr>
+                        <a:t>플레이 시간</a:t>
+                      </a:r>
+                      <a:endParaRPr lang="en-US" sz="1300" dirty="0">
+                        <a:latin typeface="Pretendard SemiBold" charset="0"/>
+                        <a:ea typeface="Pretendard SemiBold" charset="0"/>
+                        <a:cs typeface="Pretendard SemiBold" charset="0"/>
+                      </a:endParaRPr>
+                    </a:p>
+                  </a:txBody>
+                  <a:tcPr marL="76200" marR="76200" marT="50800" marB="50800" anchor="ctr">
+                    <a:lnL w="0" cap="flat" cmpd="sng" algn="ctr">
+                      <a:noFill/>
+                    </a:lnL>
+                    <a:lnR w="0" cap="flat" cmpd="sng" algn="ctr">
+                      <a:noFill/>
+                    </a:lnR>
+                    <a:lnT w="0" cap="flat" cmpd="sng" algn="ctr">
+                      <a:noFill/>
+                    </a:lnT>
+                    <a:lnB w="9525" cap="flat" cmpd="sng" algn="ctr">
+                      <a:solidFill>
+                        <a:srgbClr val="E0E0E0"/>
+                      </a:solidFill>
+                      <a:prstDash val="solid"/>
+                      <a:round/>
+                      <a:headEnd type="none" w="med" len="med"/>
+                      <a:tailEnd type="none" w="med" len="med"/>
+                    </a:lnB>
+                    <a:solidFill>
+                      <a:srgbClr val="FFFFFF"/>
+                    </a:solidFill>
+                  </a:tcPr>
+                </a:tc>
+                <a:tc>
+                  <a:txBody>
+                    <a:bodyPr/>
+                    <a:lstStyle/>
+                    <a:p>
+                      <a:pPr indent="0" marL="0">
+                        <a:buNone/>
+                      </a:pPr>
+                      <a:r>
+                        <a:rPr lang="en-US" sz="1300" dirty="0">
+                          <a:solidFill>
+                            <a:srgbClr val="333333"/>
+                          </a:solidFill>
+                          <a:latin typeface="Pretendard" pitchFamily="34" charset="0"/>
+                          <a:ea typeface="Pretendard" pitchFamily="34" charset="-122"/>
+                          <a:cs typeface="Pretendard" pitchFamily="34" charset="-120"/>
+                        </a:rPr>
+                        <a:t>제한시간 소모가 처음부터 가속돼 안 먹고 버티면 30초 제한인데 약 20초로 찍힘 — 표시된 제한시간과 실제 시간이 다름</a:t>
+                      </a:r>
+                      <a:endParaRPr lang="en-US" sz="1300" dirty="0">
+                        <a:latin typeface="Pretendard" charset="0"/>
+                        <a:ea typeface="Pretendard" charset="0"/>
+                        <a:cs typeface="Pretendard" charset="0"/>
+                      </a:endParaRPr>
+                    </a:p>
+                  </a:txBody>
+                  <a:tcPr marL="76200" marR="76200" marT="50800" marB="50800" anchor="ctr">
+                    <a:lnL w="0" cap="flat" cmpd="sng" algn="ctr">
+                      <a:noFill/>
+                    </a:lnL>
+                    <a:lnR w="0" cap="flat" cmpd="sng" algn="ctr">
+                      <a:noFill/>
+                    </a:lnR>
+                    <a:lnT w="0" cap="flat" cmpd="sng" algn="ctr">
+                      <a:noFill/>
+                    </a:lnT>
+                    <a:lnB w="9525" cap="flat" cmpd="sng" algn="ctr">
+                      <a:solidFill>
+                        <a:srgbClr val="E0E0E0"/>
+                      </a:solidFill>
+                      <a:prstDash val="solid"/>
+                      <a:round/>
+                      <a:headEnd type="none" w="med" len="med"/>
+                      <a:tailEnd type="none" w="med" len="med"/>
+                    </a:lnB>
+                    <a:solidFill>
+                      <a:srgbClr val="FFFFFF"/>
+                    </a:solidFill>
+                  </a:tcPr>
+                </a:tc>
+                <a:tc>
+                  <a:txBody>
+                    <a:bodyPr/>
+                    <a:lstStyle/>
+                    <a:p>
+                      <a:pPr indent="0" marL="0">
+                        <a:buNone/>
+                      </a:pPr>
+                      <a:r>
+                        <a:rPr lang="en-US" sz="1300" dirty="0">
+                          <a:solidFill>
+                            <a:srgbClr val="333333"/>
+                          </a:solidFill>
+                          <a:latin typeface="Pretendard" pitchFamily="34" charset="0"/>
+                          <a:ea typeface="Pretendard" pitchFamily="34" charset="-122"/>
+                          <a:cs typeface="Pretendard" pitchFamily="34" charset="-120"/>
+                        </a:rPr>
+                        <a:t>첫 제한시간(30초)까지는 1배로 정직하게 흐르고 그 뒤부터 가속. 결과는 일시정지를 뺀 실제 벽시계 시간으로 기록, 라벨 '플레이 시간'</a:t>
+                      </a:r>
+                      <a:endParaRPr lang="en-US" sz="1300" dirty="0">
+                        <a:latin typeface="Pretendard" charset="0"/>
+                        <a:ea typeface="Pretendard" charset="0"/>
+                        <a:cs typeface="Pretendard" charset="0"/>
+                      </a:endParaRPr>
+                    </a:p>
+                  </a:txBody>
+                  <a:tcPr marL="76200" marR="76200" marT="50800" marB="50800" anchor="ctr">
+                    <a:lnL w="0" cap="flat" cmpd="sng" algn="ctr">
+                      <a:noFill/>
+                    </a:lnL>
+                    <a:lnR w="0" cap="flat" cmpd="sng" algn="ctr">
+                      <a:noFill/>
+                    </a:lnR>
+                    <a:lnT w="0" cap="flat" cmpd="sng" algn="ctr">
+                      <a:noFill/>
+                    </a:lnT>
+                    <a:lnB w="9525" cap="flat" cmpd="sng" algn="ctr">
+                      <a:solidFill>
+                        <a:srgbClr val="E0E0E0"/>
+                      </a:solidFill>
+                      <a:prstDash val="solid"/>
+                      <a:round/>
+                      <a:headEnd type="none" w="med" len="med"/>
+                      <a:tailEnd type="none" w="med" len="med"/>
+                    </a:lnB>
+                    <a:solidFill>
+                      <a:srgbClr val="FFFFFF"/>
+                    </a:solidFill>
+                  </a:tcPr>
+                </a:tc>
+                <a:tc>
+                  <a:txBody>
+                    <a:bodyPr/>
+                    <a:lstStyle/>
+                    <a:p>
+                      <a:pPr algn="ctr" indent="0" marL="0">
+                        <a:buNone/>
+                      </a:pPr>
+                      <a:r>
+                        <a:rPr lang="en-US" sz="1300" dirty="0">
+                          <a:solidFill>
+                            <a:srgbClr val="0066CC"/>
+                          </a:solidFill>
+                          <a:latin typeface="Pretendard Medium" pitchFamily="34" charset="0"/>
+                          <a:ea typeface="Pretendard Medium" pitchFamily="34" charset="-122"/>
+                          <a:cs typeface="Pretendard Medium" pitchFamily="34" charset="-120"/>
+                        </a:rPr>
+                        <a:t>✓ 수정</a:t>
+                      </a:r>
+                      <a:endParaRPr lang="en-US" sz="1300" dirty="0">
+                        <a:latin typeface="Pretendard Medium" charset="0"/>
+                        <a:ea typeface="Pretendard Medium" charset="0"/>
+                        <a:cs typeface="Pretendard Medium" charset="0"/>
+                      </a:endParaRPr>
+                    </a:p>
+                  </a:txBody>
+                  <a:tcPr marL="76200" marR="76200" marT="50800" marB="50800" anchor="ctr">
+                    <a:lnL w="0" cap="flat" cmpd="sng" algn="ctr">
+                      <a:noFill/>
+                    </a:lnL>
+                    <a:lnR w="0" cap="flat" cmpd="sng" algn="ctr">
+                      <a:noFill/>
+                    </a:lnR>
+                    <a:lnT w="0" cap="flat" cmpd="sng" algn="ctr">
+                      <a:noFill/>
+                    </a:lnT>
+                    <a:lnB w="9525" cap="flat" cmpd="sng" algn="ctr">
+                      <a:solidFill>
+                        <a:srgbClr val="E0E0E0"/>
+                      </a:solidFill>
+                      <a:prstDash val="solid"/>
+                      <a:round/>
+                      <a:headEnd type="none" w="med" len="med"/>
+                      <a:tailEnd type="none" w="med" len="med"/>
+                    </a:lnB>
+                    <a:solidFill>
+                      <a:srgbClr val="FFFFFF"/>
+                    </a:solidFill>
+                  </a:tcPr>
+                </a:tc>
+              </a:tr>
+              <a:tr h="866394">
+                <a:tc>
+                  <a:txBody>
+                    <a:bodyPr/>
+                    <a:lstStyle/>
+                    <a:p>
+                      <a:pPr indent="0" marL="0">
+                        <a:buNone/>
+                      </a:pPr>
+                      <a:r>
+                        <a:rPr lang="en-US" sz="1300" dirty="0">
+                          <a:solidFill>
+                            <a:srgbClr val="1D1D1F"/>
+                          </a:solidFill>
+                          <a:latin typeface="Pretendard Medium" pitchFamily="34" charset="0"/>
+                          <a:ea typeface="Pretendard Medium" pitchFamily="34" charset="-122"/>
+                          <a:cs typeface="Pretendard Medium" pitchFamily="34" charset="-120"/>
+                        </a:rPr>
+                        <a:t>중간</a:t>
+                      </a:r>
+                      <a:endParaRPr lang="en-US" sz="1300" dirty="0">
+                        <a:latin typeface="Pretendard Medium" charset="0"/>
+                        <a:ea typeface="Pretendard Medium" charset="0"/>
+                        <a:cs typeface="Pretendard Medium" charset="0"/>
+                      </a:endParaRPr>
+                    </a:p>
+                  </a:txBody>
+                  <a:tcPr marL="76200" marR="76200" marT="50800" marB="50800" anchor="ctr">
+                    <a:lnL w="0" cap="flat" cmpd="sng" algn="ctr">
+                      <a:noFill/>
+                    </a:lnL>
+                    <a:lnR w="0" cap="flat" cmpd="sng" algn="ctr">
+                      <a:noFill/>
+                    </a:lnR>
+                    <a:lnT w="0" cap="flat" cmpd="sng" algn="ctr">
+                      <a:noFill/>
+                    </a:lnT>
+                    <a:lnB w="9525" cap="flat" cmpd="sng" algn="ctr">
+                      <a:solidFill>
+                        <a:srgbClr val="E0E0E0"/>
+                      </a:solidFill>
+                      <a:prstDash val="solid"/>
+                      <a:round/>
+                      <a:headEnd type="none" w="med" len="med"/>
+                      <a:tailEnd type="none" w="med" len="med"/>
+                    </a:lnB>
+                    <a:solidFill>
+                      <a:srgbClr val="FFFFFF"/>
+                    </a:solidFill>
+                  </a:tcPr>
+                </a:tc>
+                <a:tc>
+                  <a:txBody>
+                    <a:bodyPr/>
+                    <a:lstStyle/>
+                    <a:p>
+                      <a:pPr indent="0" marL="0">
+                        <a:buNone/>
+                      </a:pPr>
+                      <a:r>
+                        <a:rPr lang="en-US" sz="1300" dirty="0">
+                          <a:solidFill>
+                            <a:srgbClr val="1D1D1F"/>
+                          </a:solidFill>
+                          <a:latin typeface="Pretendard SemiBold" pitchFamily="34" charset="0"/>
+                          <a:ea typeface="Pretendard SemiBold" pitchFamily="34" charset="-122"/>
+                          <a:cs typeface="Pretendard SemiBold" pitchFamily="34" charset="-120"/>
+                        </a:rPr>
+                        <a:t>가시성</a:t>
+                      </a:r>
+                      <a:endParaRPr lang="en-US" sz="1300" dirty="0">
+                        <a:latin typeface="Pretendard SemiBold" charset="0"/>
+                        <a:ea typeface="Pretendard SemiBold" charset="0"/>
+                        <a:cs typeface="Pretendard SemiBold" charset="0"/>
+                      </a:endParaRPr>
+                    </a:p>
+                  </a:txBody>
+                  <a:tcPr marL="76200" marR="76200" marT="50800" marB="50800" anchor="ctr">
+                    <a:lnL w="0" cap="flat" cmpd="sng" algn="ctr">
+                      <a:noFill/>
+                    </a:lnL>
+                    <a:lnR w="0" cap="flat" cmpd="sng" algn="ctr">
+                      <a:noFill/>
+                    </a:lnR>
+                    <a:lnT w="0" cap="flat" cmpd="sng" algn="ctr">
+                      <a:noFill/>
+                    </a:lnT>
+                    <a:lnB w="9525" cap="flat" cmpd="sng" algn="ctr">
+                      <a:solidFill>
+                        <a:srgbClr val="E0E0E0"/>
+                      </a:solidFill>
+                      <a:prstDash val="solid"/>
+                      <a:round/>
+                      <a:headEnd type="none" w="med" len="med"/>
+                      <a:tailEnd type="none" w="med" len="med"/>
+                    </a:lnB>
+                    <a:solidFill>
+                      <a:srgbClr val="FFFFFF"/>
+                    </a:solidFill>
+                  </a:tcPr>
+                </a:tc>
+                <a:tc>
+                  <a:txBody>
+                    <a:bodyPr/>
+                    <a:lstStyle/>
+                    <a:p>
+                      <a:pPr indent="0" marL="0">
+                        <a:buNone/>
+                      </a:pPr>
+                      <a:r>
+                        <a:rPr lang="en-US" sz="1300" dirty="0">
+                          <a:solidFill>
+                            <a:srgbClr val="333333"/>
+                          </a:solidFill>
+                          <a:latin typeface="Pretendard" pitchFamily="34" charset="0"/>
+                          <a:ea typeface="Pretendard" pitchFamily="34" charset="-122"/>
+                          <a:cs typeface="Pretendard" pitchFamily="34" charset="-120"/>
+                        </a:rPr>
+                        <a:t>어떤 물고기를 먹을 수 있고 어떤 물고기가 위험한지 크기만으로는 구분이 어려움</a:t>
+                      </a:r>
+                      <a:endParaRPr lang="en-US" sz="1300" dirty="0">
+                        <a:latin typeface="Pretendard" charset="0"/>
+                        <a:ea typeface="Pretendard" charset="0"/>
+                        <a:cs typeface="Pretendard" charset="0"/>
+                      </a:endParaRPr>
+                    </a:p>
+                  </a:txBody>
+                  <a:tcPr marL="76200" marR="76200" marT="50800" marB="50800" anchor="ctr">
+                    <a:lnL w="0" cap="flat" cmpd="sng" algn="ctr">
+                      <a:noFill/>
+                    </a:lnL>
+                    <a:lnR w="0" cap="flat" cmpd="sng" algn="ctr">
+                      <a:noFill/>
+                    </a:lnR>
+                    <a:lnT w="0" cap="flat" cmpd="sng" algn="ctr">
+                      <a:noFill/>
+                    </a:lnT>
+                    <a:lnB w="9525" cap="flat" cmpd="sng" algn="ctr">
+                      <a:solidFill>
+                        <a:srgbClr val="E0E0E0"/>
+                      </a:solidFill>
+                      <a:prstDash val="solid"/>
+                      <a:round/>
+                      <a:headEnd type="none" w="med" len="med"/>
+                      <a:tailEnd type="none" w="med" len="med"/>
+                    </a:lnB>
+                    <a:solidFill>
+                      <a:srgbClr val="FFFFFF"/>
+                    </a:solidFill>
+                  </a:tcPr>
+                </a:tc>
+                <a:tc>
+                  <a:txBody>
+                    <a:bodyPr/>
+                    <a:lstStyle/>
+                    <a:p>
+                      <a:pPr indent="0" marL="0">
+                        <a:buNone/>
+                      </a:pPr>
+                      <a:r>
+                        <a:rPr lang="en-US" sz="1300" dirty="0">
+                          <a:solidFill>
+                            <a:srgbClr val="333333"/>
+                          </a:solidFill>
+                          <a:latin typeface="Pretendard" pitchFamily="34" charset="0"/>
+                          <a:ea typeface="Pretendard" pitchFamily="34" charset="-122"/>
+                          <a:cs typeface="Pretendard" pitchFamily="34" charset="-120"/>
+                        </a:rPr>
+                        <a:t>물고기 뒤에 옅은 빛 — 초록 = 먹을 수 있음, 빨강(맥박) = 나를 먹을 수 있음. 실제 포식 판정과 같은 기준이라 판 중에 커지면 바로 색이 바뀜</a:t>
+                      </a:r>
+                      <a:endParaRPr lang="en-US" sz="1300" dirty="0">
+                        <a:latin typeface="Pretendard" charset="0"/>
+                        <a:ea typeface="Pretendard" charset="0"/>
+                        <a:cs typeface="Pretendard" charset="0"/>
+                      </a:endParaRPr>
+                    </a:p>
+                  </a:txBody>
+                  <a:tcPr marL="76200" marR="76200" marT="50800" marB="50800" anchor="ctr">
+                    <a:lnL w="0" cap="flat" cmpd="sng" algn="ctr">
+                      <a:noFill/>
+                    </a:lnL>
+                    <a:lnR w="0" cap="flat" cmpd="sng" algn="ctr">
+                      <a:noFill/>
+                    </a:lnR>
+                    <a:lnT w="0" cap="flat" cmpd="sng" algn="ctr">
+                      <a:noFill/>
+                    </a:lnT>
+                    <a:lnB w="9525" cap="flat" cmpd="sng" algn="ctr">
+                      <a:solidFill>
+                        <a:srgbClr val="E0E0E0"/>
+                      </a:solidFill>
+                      <a:prstDash val="solid"/>
+                      <a:round/>
+                      <a:headEnd type="none" w="med" len="med"/>
+                      <a:tailEnd type="none" w="med" len="med"/>
+                    </a:lnB>
+                    <a:solidFill>
+                      <a:srgbClr val="FFFFFF"/>
+                    </a:solidFill>
+                  </a:tcPr>
+                </a:tc>
+                <a:tc>
+                  <a:txBody>
+                    <a:bodyPr/>
+                    <a:lstStyle/>
+                    <a:p>
+                      <a:pPr algn="ctr" indent="0" marL="0">
+                        <a:buNone/>
+                      </a:pPr>
+                      <a:r>
+                        <a:rPr lang="en-US" sz="1300" dirty="0">
+                          <a:solidFill>
+                            <a:srgbClr val="0066CC"/>
+                          </a:solidFill>
+                          <a:latin typeface="Pretendard Medium" pitchFamily="34" charset="0"/>
+                          <a:ea typeface="Pretendard Medium" pitchFamily="34" charset="-122"/>
+                          <a:cs typeface="Pretendard Medium" pitchFamily="34" charset="-120"/>
+                        </a:rPr>
+                        <a:t>✓ 수정</a:t>
+                      </a:r>
+                      <a:endParaRPr lang="en-US" sz="1300" dirty="0">
+                        <a:latin typeface="Pretendard Medium" charset="0"/>
+                        <a:ea typeface="Pretendard Medium" charset="0"/>
+                        <a:cs typeface="Pretendard Medium" charset="0"/>
+                      </a:endParaRPr>
+                    </a:p>
+                  </a:txBody>
+                  <a:tcPr marL="76200" marR="76200" marT="50800" marB="50800" anchor="ctr">
+                    <a:lnL w="0" cap="flat" cmpd="sng" algn="ctr">
+                      <a:noFill/>
+                    </a:lnL>
+                    <a:lnR w="0" cap="flat" cmpd="sng" algn="ctr">
+                      <a:noFill/>
+                    </a:lnR>
+                    <a:lnT w="0" cap="flat" cmpd="sng" algn="ctr">
+                      <a:noFill/>
+                    </a:lnT>
+                    <a:lnB w="9525" cap="flat" cmpd="sng" algn="ctr">
+                      <a:solidFill>
+                        <a:srgbClr val="E0E0E0"/>
+                      </a:solidFill>
+                      <a:prstDash val="solid"/>
+                      <a:round/>
+                      <a:headEnd type="none" w="med" len="med"/>
+                      <a:tailEnd type="none" w="med" len="med"/>
+                    </a:lnB>
+                    <a:solidFill>
+                      <a:srgbClr val="FFFFFF"/>
+                    </a:solidFill>
+                  </a:tcPr>
+                </a:tc>
+              </a:tr>
+              <a:tr h="866394">
+                <a:tc>
+                  <a:txBody>
+                    <a:bodyPr/>
+                    <a:lstStyle/>
+                    <a:p>
+                      <a:pPr indent="0" marL="0">
+                        <a:buNone/>
+                      </a:pPr>
+                      <a:r>
+                        <a:rPr lang="en-US" sz="1300" b="1" dirty="0">
+                          <a:solidFill>
+                            <a:srgbClr val="0066CC"/>
+                          </a:solidFill>
+                          <a:latin typeface="Pretendard SemiBold" pitchFamily="34" charset="0"/>
+                          <a:ea typeface="Pretendard SemiBold" pitchFamily="34" charset="-122"/>
+                          <a:cs typeface="Pretendard SemiBold" pitchFamily="34" charset="-120"/>
+                        </a:rPr>
+                        <a:t>높음</a:t>
+                      </a:r>
+                      <a:endParaRPr lang="en-US" sz="1300" dirty="0">
+                        <a:latin typeface="Pretendard SemiBold" charset="0"/>
+                        <a:ea typeface="Pretendard SemiBold" charset="0"/>
+                        <a:cs typeface="Pretendard SemiBold" charset="0"/>
+                      </a:endParaRPr>
+                    </a:p>
+                  </a:txBody>
+                  <a:tcPr marL="76200" marR="76200" marT="50800" marB="50800" anchor="ctr">
+                    <a:lnL w="0" cap="flat" cmpd="sng" algn="ctr">
+                      <a:noFill/>
+                    </a:lnL>
+                    <a:lnR w="0" cap="flat" cmpd="sng" algn="ctr">
+                      <a:noFill/>
+                    </a:lnR>
+                    <a:lnT w="0" cap="flat" cmpd="sng" algn="ctr">
+                      <a:noFill/>
+                    </a:lnT>
+                    <a:lnB w="9525" cap="flat" cmpd="sng" algn="ctr">
+                      <a:solidFill>
+                        <a:srgbClr val="E0E0E0"/>
+                      </a:solidFill>
+                      <a:prstDash val="solid"/>
+                      <a:round/>
+                      <a:headEnd type="none" w="med" len="med"/>
+                      <a:tailEnd type="none" w="med" len="med"/>
+                    </a:lnB>
+                    <a:solidFill>
+                      <a:srgbClr val="FFFFFF"/>
+                    </a:solidFill>
+                  </a:tcPr>
+                </a:tc>
+                <a:tc>
+                  <a:txBody>
+                    <a:bodyPr/>
+                    <a:lstStyle/>
+                    <a:p>
+                      <a:pPr indent="0" marL="0">
+                        <a:buNone/>
+                      </a:pPr>
+                      <a:r>
+                        <a:rPr lang="en-US" sz="1300" dirty="0">
+                          <a:solidFill>
+                            <a:srgbClr val="1D1D1F"/>
+                          </a:solidFill>
+                          <a:latin typeface="Pretendard SemiBold" pitchFamily="34" charset="0"/>
+                          <a:ea typeface="Pretendard SemiBold" pitchFamily="34" charset="-122"/>
+                          <a:cs typeface="Pretendard SemiBold" pitchFamily="34" charset="-120"/>
+                        </a:rPr>
+                        <a:t>밸런스</a:t>
+                      </a:r>
+                      <a:endParaRPr lang="en-US" sz="1300" dirty="0">
+                        <a:latin typeface="Pretendard SemiBold" charset="0"/>
+                        <a:ea typeface="Pretendard SemiBold" charset="0"/>
+                        <a:cs typeface="Pretendard SemiBold" charset="0"/>
+                      </a:endParaRPr>
+                    </a:p>
+                  </a:txBody>
+                  <a:tcPr marL="76200" marR="76200" marT="50800" marB="50800" anchor="ctr">
+                    <a:lnL w="0" cap="flat" cmpd="sng" algn="ctr">
+                      <a:noFill/>
+                    </a:lnL>
+                    <a:lnR w="0" cap="flat" cmpd="sng" algn="ctr">
+                      <a:noFill/>
+                    </a:lnR>
+                    <a:lnT w="0" cap="flat" cmpd="sng" algn="ctr">
+                      <a:noFill/>
+                    </a:lnT>
+                    <a:lnB w="9525" cap="flat" cmpd="sng" algn="ctr">
+                      <a:solidFill>
+                        <a:srgbClr val="E0E0E0"/>
+                      </a:solidFill>
+                      <a:prstDash val="solid"/>
+                      <a:round/>
+                      <a:headEnd type="none" w="med" len="med"/>
+                      <a:tailEnd type="none" w="med" len="med"/>
+                    </a:lnB>
+                    <a:solidFill>
+                      <a:srgbClr val="FFFFFF"/>
+                    </a:solidFill>
+                  </a:tcPr>
+                </a:tc>
+                <a:tc>
+                  <a:txBody>
+                    <a:bodyPr/>
+                    <a:lstStyle/>
+                    <a:p>
+                      <a:pPr indent="0" marL="0">
+                        <a:buNone/>
+                      </a:pPr>
+                      <a:r>
+                        <a:rPr lang="en-US" sz="1300" dirty="0">
+                          <a:solidFill>
+                            <a:srgbClr val="333333"/>
+                          </a:solidFill>
+                          <a:latin typeface="Pretendard" pitchFamily="34" charset="0"/>
+                          <a:ea typeface="Pretendard" pitchFamily="34" charset="-122"/>
+                          <a:cs typeface="Pretendard" pitchFamily="34" charset="-120"/>
+                        </a:rPr>
+                        <a:t>구매가 일어나는 판이 14%뿐, 최장 30판 연속 빈손, 첫 구역(어항)에서만 4시간 — 노가다 체감의 원인</a:t>
+                      </a:r>
+                      <a:endParaRPr lang="en-US" sz="1300" dirty="0">
+                        <a:latin typeface="Pretendard" charset="0"/>
+                        <a:ea typeface="Pretendard" charset="0"/>
+                        <a:cs typeface="Pretendard" charset="0"/>
+                      </a:endParaRPr>
+                    </a:p>
+                  </a:txBody>
+                  <a:tcPr marL="76200" marR="76200" marT="50800" marB="50800" anchor="ctr">
+                    <a:lnL w="0" cap="flat" cmpd="sng" algn="ctr">
+                      <a:noFill/>
+                    </a:lnL>
+                    <a:lnR w="0" cap="flat" cmpd="sng" algn="ctr">
+                      <a:noFill/>
+                    </a:lnR>
+                    <a:lnT w="0" cap="flat" cmpd="sng" algn="ctr">
+                      <a:noFill/>
+                    </a:lnT>
+                    <a:lnB w="9525" cap="flat" cmpd="sng" algn="ctr">
+                      <a:solidFill>
+                        <a:srgbClr val="E0E0E0"/>
+                      </a:solidFill>
+                      <a:prstDash val="solid"/>
+                      <a:round/>
+                      <a:headEnd type="none" w="med" len="med"/>
+                      <a:tailEnd type="none" w="med" len="med"/>
+                    </a:lnB>
+                    <a:solidFill>
+                      <a:srgbClr val="FFFFFF"/>
+                    </a:solidFill>
+                  </a:tcPr>
+                </a:tc>
+                <a:tc>
+                  <a:txBody>
+                    <a:bodyPr/>
+                    <a:lstStyle/>
+                    <a:p>
+                      <a:pPr indent="0" marL="0">
+                        <a:buNone/>
+                      </a:pPr>
+                      <a:r>
+                        <a:rPr lang="en-US" sz="1300" dirty="0">
+                          <a:solidFill>
+                            <a:srgbClr val="333333"/>
+                          </a:solidFill>
+                          <a:latin typeface="Pretendard" pitchFamily="34" charset="0"/>
+                          <a:ea typeface="Pretendard" pitchFamily="34" charset="-122"/>
+                          <a:cs typeface="Pretendard" pitchFamily="34" charset="-120"/>
+                        </a:rPr>
+                        <a:t>재화 2배, 판 안 성장 0.15→0.5, 소모 가속 2.2→1.0, 어항·하수구 재화 상향, 가격 깊이 배율 4.6→6.0 — 구매한 판 68%, 최장 빈손 6~7판, 어항 11분</a:t>
+                      </a:r>
+                      <a:endParaRPr lang="en-US" sz="1300" dirty="0">
+                        <a:latin typeface="Pretendard" charset="0"/>
+                        <a:ea typeface="Pretendard" charset="0"/>
+                        <a:cs typeface="Pretendard" charset="0"/>
+                      </a:endParaRPr>
+                    </a:p>
+                  </a:txBody>
+                  <a:tcPr marL="76200" marR="76200" marT="50800" marB="50800" anchor="ctr">
+                    <a:lnL w="0" cap="flat" cmpd="sng" algn="ctr">
+                      <a:noFill/>
+                    </a:lnL>
+                    <a:lnR w="0" cap="flat" cmpd="sng" algn="ctr">
+                      <a:noFill/>
+                    </a:lnR>
+                    <a:lnT w="0" cap="flat" cmpd="sng" algn="ctr">
+                      <a:noFill/>
+                    </a:lnT>
+                    <a:lnB w="9525" cap="flat" cmpd="sng" algn="ctr">
+                      <a:solidFill>
+                        <a:srgbClr val="E0E0E0"/>
+                      </a:solidFill>
+                      <a:prstDash val="solid"/>
+                      <a:round/>
+                      <a:headEnd type="none" w="med" len="med"/>
+                      <a:tailEnd type="none" w="med" len="med"/>
+                    </a:lnB>
+                    <a:solidFill>
+                      <a:srgbClr val="FFFFFF"/>
+                    </a:solidFill>
+                  </a:tcPr>
+                </a:tc>
+                <a:tc>
+                  <a:txBody>
+                    <a:bodyPr/>
+                    <a:lstStyle/>
+                    <a:p>
+                      <a:pPr algn="ctr" indent="0" marL="0">
+                        <a:buNone/>
+                      </a:pPr>
+                      <a:r>
+                        <a:rPr lang="en-US" sz="1300" dirty="0">
+                          <a:solidFill>
+                            <a:srgbClr val="0066CC"/>
+                          </a:solidFill>
+                          <a:latin typeface="Pretendard Medium" pitchFamily="34" charset="0"/>
+                          <a:ea typeface="Pretendard Medium" pitchFamily="34" charset="-122"/>
+                          <a:cs typeface="Pretendard Medium" pitchFamily="34" charset="-120"/>
+                        </a:rPr>
+                        <a:t>✓ 수정</a:t>
+                      </a:r>
+                      <a:endParaRPr lang="en-US" sz="1300" dirty="0">
+                        <a:latin typeface="Pretendard Medium" charset="0"/>
+                        <a:ea typeface="Pretendard Medium" charset="0"/>
+                        <a:cs typeface="Pretendard Medium" charset="0"/>
+                      </a:endParaRPr>
+                    </a:p>
+                  </a:txBody>
+                  <a:tcPr marL="76200" marR="76200" marT="50800" marB="50800" anchor="ctr">
+                    <a:lnL w="0" cap="flat" cmpd="sng" algn="ctr">
+                      <a:noFill/>
+                    </a:lnL>
+                    <a:lnR w="0" cap="flat" cmpd="sng" algn="ctr">
+                      <a:noFill/>
+                    </a:lnR>
+                    <a:lnT w="0" cap="flat" cmpd="sng" algn="ctr">
+                      <a:noFill/>
+                    </a:lnT>
+                    <a:lnB w="9525" cap="flat" cmpd="sng" algn="ctr">
+                      <a:solidFill>
+                        <a:srgbClr val="E0E0E0"/>
+                      </a:solidFill>
+                      <a:prstDash val="solid"/>
+                      <a:round/>
+                      <a:headEnd type="none" w="med" len="med"/>
+                      <a:tailEnd type="none" w="med" len="med"/>
+                    </a:lnB>
+                    <a:solidFill>
+                      <a:srgbClr val="FFFFFF"/>
+                    </a:solidFill>
+                  </a:tcPr>
+                </a:tc>
+              </a:tr>
+              <a:tr h="638556">
+                <a:tc>
+                  <a:txBody>
+                    <a:bodyPr/>
+                    <a:lstStyle/>
+                    <a:p>
+                      <a:pPr indent="0" marL="0">
+                        <a:buNone/>
+                      </a:pPr>
+                      <a:r>
+                        <a:rPr lang="en-US" sz="1300" dirty="0">
+                          <a:solidFill>
+                            <a:srgbClr val="1D1D1F"/>
+                          </a:solidFill>
+                          <a:latin typeface="Pretendard Medium" pitchFamily="34" charset="0"/>
+                          <a:ea typeface="Pretendard Medium" pitchFamily="34" charset="-122"/>
+                          <a:cs typeface="Pretendard Medium" pitchFamily="34" charset="-120"/>
+                        </a:rPr>
+                        <a:t>중간</a:t>
+                      </a:r>
+                      <a:endParaRPr lang="en-US" sz="1300" dirty="0">
+                        <a:latin typeface="Pretendard Medium" charset="0"/>
+                        <a:ea typeface="Pretendard Medium" charset="0"/>
+                        <a:cs typeface="Pretendard Medium" charset="0"/>
+                      </a:endParaRPr>
+                    </a:p>
+                  </a:txBody>
+                  <a:tcPr marL="76200" marR="76200" marT="50800" marB="50800" anchor="ctr">
+                    <a:lnL w="0" cap="flat" cmpd="sng" algn="ctr">
+                      <a:noFill/>
+                    </a:lnL>
+                    <a:lnR w="0" cap="flat" cmpd="sng" algn="ctr">
+                      <a:noFill/>
+                    </a:lnR>
+                    <a:lnT w="0" cap="flat" cmpd="sng" algn="ctr">
+                      <a:noFill/>
+                    </a:lnT>
+                    <a:lnB w="9525" cap="flat" cmpd="sng" algn="ctr">
+                      <a:solidFill>
+                        <a:srgbClr val="E0E0E0"/>
+                      </a:solidFill>
+                      <a:prstDash val="solid"/>
+                      <a:round/>
+                      <a:headEnd type="none" w="med" len="med"/>
+                      <a:tailEnd type="none" w="med" len="med"/>
+                    </a:lnB>
+                    <a:solidFill>
+                      <a:srgbClr val="FFFFFF"/>
+                    </a:solidFill>
+                  </a:tcPr>
+                </a:tc>
+                <a:tc>
+                  <a:txBody>
+                    <a:bodyPr/>
+                    <a:lstStyle/>
+                    <a:p>
+                      <a:pPr indent="0" marL="0">
+                        <a:buNone/>
+                      </a:pPr>
+                      <a:r>
+                        <a:rPr lang="en-US" sz="1300" dirty="0">
+                          <a:solidFill>
+                            <a:srgbClr val="1D1D1F"/>
+                          </a:solidFill>
+                          <a:latin typeface="Pretendard SemiBold" pitchFamily="34" charset="0"/>
+                          <a:ea typeface="Pretendard SemiBold" pitchFamily="34" charset="-122"/>
+                          <a:cs typeface="Pretendard SemiBold" pitchFamily="34" charset="-120"/>
+                        </a:rPr>
+                        <a:t>데이터</a:t>
+                      </a:r>
+                      <a:endParaRPr lang="en-US" sz="1300" dirty="0">
+                        <a:latin typeface="Pretendard SemiBold" charset="0"/>
+                        <a:ea typeface="Pretendard SemiBold" charset="0"/>
+                        <a:cs typeface="Pretendard SemiBold" charset="0"/>
+                      </a:endParaRPr>
+                    </a:p>
+                  </a:txBody>
+                  <a:tcPr marL="76200" marR="76200" marT="50800" marB="50800" anchor="ctr">
+                    <a:lnL w="0" cap="flat" cmpd="sng" algn="ctr">
+                      <a:noFill/>
+                    </a:lnL>
+                    <a:lnR w="0" cap="flat" cmpd="sng" algn="ctr">
+                      <a:noFill/>
+                    </a:lnR>
+                    <a:lnT w="0" cap="flat" cmpd="sng" algn="ctr">
+                      <a:noFill/>
+                    </a:lnT>
+                    <a:lnB w="9525" cap="flat" cmpd="sng" algn="ctr">
+                      <a:solidFill>
+                        <a:srgbClr val="E0E0E0"/>
+                      </a:solidFill>
+                      <a:prstDash val="solid"/>
+                      <a:round/>
+                      <a:headEnd type="none" w="med" len="med"/>
+                      <a:tailEnd type="none" w="med" len="med"/>
+                    </a:lnB>
+                    <a:solidFill>
+                      <a:srgbClr val="FFFFFF"/>
+                    </a:solidFill>
+                  </a:tcPr>
+                </a:tc>
+                <a:tc>
+                  <a:txBody>
+                    <a:bodyPr/>
+                    <a:lstStyle/>
+                    <a:p>
+                      <a:pPr indent="0" marL="0">
+                        <a:buNone/>
+                      </a:pPr>
+                      <a:r>
+                        <a:rPr lang="en-US" sz="1300" dirty="0">
+                          <a:solidFill>
+                            <a:srgbClr val="333333"/>
+                          </a:solidFill>
+                          <a:latin typeface="Pretendard" pitchFamily="34" charset="0"/>
+                          <a:ea typeface="Pretendard" pitchFamily="34" charset="-122"/>
+                          <a:cs typeface="Pretendard" pitchFamily="34" charset="-120"/>
+                        </a:rPr>
+                        <a:t>구역 에셋의 재화 배율이 생성기 값과 달라(어항 0.29 / 하수구 0.13 등) 실제 게임이 시뮬보다 훨씬 느렸음</a:t>
+                      </a:r>
+                      <a:endParaRPr lang="en-US" sz="1300" dirty="0">
+                        <a:latin typeface="Pretendard" charset="0"/>
+                        <a:ea typeface="Pretendard" charset="0"/>
+                        <a:cs typeface="Pretendard" charset="0"/>
+                      </a:endParaRPr>
+                    </a:p>
+                  </a:txBody>
+                  <a:tcPr marL="76200" marR="76200" marT="50800" marB="50800" anchor="ctr">
+                    <a:lnL w="0" cap="flat" cmpd="sng" algn="ctr">
+                      <a:noFill/>
+                    </a:lnL>
+                    <a:lnR w="0" cap="flat" cmpd="sng" algn="ctr">
+                      <a:noFill/>
+                    </a:lnR>
+                    <a:lnT w="0" cap="flat" cmpd="sng" algn="ctr">
+                      <a:noFill/>
+                    </a:lnT>
+                    <a:lnB w="9525" cap="flat" cmpd="sng" algn="ctr">
+                      <a:solidFill>
+                        <a:srgbClr val="E0E0E0"/>
+                      </a:solidFill>
+                      <a:prstDash val="solid"/>
+                      <a:round/>
+                      <a:headEnd type="none" w="med" len="med"/>
+                      <a:tailEnd type="none" w="med" len="med"/>
+                    </a:lnB>
+                    <a:solidFill>
+                      <a:srgbClr val="FFFFFF"/>
+                    </a:solidFill>
+                  </a:tcPr>
+                </a:tc>
+                <a:tc>
+                  <a:txBody>
+                    <a:bodyPr/>
+                    <a:lstStyle/>
+                    <a:p>
+                      <a:pPr indent="0" marL="0">
+                        <a:buNone/>
+                      </a:pPr>
+                      <a:r>
+                        <a:rPr lang="en-US" sz="1300" dirty="0">
+                          <a:solidFill>
+                            <a:srgbClr val="333333"/>
+                          </a:solidFill>
+                          <a:latin typeface="Pretendard" pitchFamily="34" charset="0"/>
+                          <a:ea typeface="Pretendard" pitchFamily="34" charset="-122"/>
+                          <a:cs typeface="Pretendard" pitchFamily="34" charset="-120"/>
+                        </a:rPr>
+                        <a:t>에셋과 ContentGenerator를 새 값(1.2 · 1.0 · 0.198 · 0.209)으로 통일</a:t>
+                      </a:r>
+                      <a:endParaRPr lang="en-US" sz="1300" dirty="0">
+                        <a:latin typeface="Pretendard" charset="0"/>
+                        <a:ea typeface="Pretendard" charset="0"/>
+                        <a:cs typeface="Pretendard" charset="0"/>
+                      </a:endParaRPr>
+                    </a:p>
+                  </a:txBody>
+                  <a:tcPr marL="76200" marR="76200" marT="50800" marB="50800" anchor="ctr">
+                    <a:lnL w="0" cap="flat" cmpd="sng" algn="ctr">
+                      <a:noFill/>
+                    </a:lnL>
+                    <a:lnR w="0" cap="flat" cmpd="sng" algn="ctr">
+                      <a:noFill/>
+                    </a:lnR>
+                    <a:lnT w="0" cap="flat" cmpd="sng" algn="ctr">
+                      <a:noFill/>
+                    </a:lnT>
+                    <a:lnB w="9525" cap="flat" cmpd="sng" algn="ctr">
+                      <a:solidFill>
+                        <a:srgbClr val="E0E0E0"/>
+                      </a:solidFill>
+                      <a:prstDash val="solid"/>
+                      <a:round/>
+                      <a:headEnd type="none" w="med" len="med"/>
+                      <a:tailEnd type="none" w="med" len="med"/>
+                    </a:lnB>
+                    <a:solidFill>
+                      <a:srgbClr val="FFFFFF"/>
+                    </a:solidFill>
+                  </a:tcPr>
+                </a:tc>
+                <a:tc>
+                  <a:txBody>
+                    <a:bodyPr/>
+                    <a:lstStyle/>
+                    <a:p>
+                      <a:pPr algn="ctr" indent="0" marL="0">
+                        <a:buNone/>
+                      </a:pPr>
+                      <a:r>
+                        <a:rPr lang="en-US" sz="1300" dirty="0">
+                          <a:solidFill>
+                            <a:srgbClr val="0066CC"/>
+                          </a:solidFill>
+                          <a:latin typeface="Pretendard Medium" pitchFamily="34" charset="0"/>
+                          <a:ea typeface="Pretendard Medium" pitchFamily="34" charset="-122"/>
+                          <a:cs typeface="Pretendard Medium" pitchFamily="34" charset="-120"/>
+                        </a:rPr>
+                        <a:t>✓ 수정</a:t>
+                      </a:r>
+                      <a:endParaRPr lang="en-US" sz="1300" dirty="0">
+                        <a:latin typeface="Pretendard Medium" charset="0"/>
+                        <a:ea typeface="Pretendard Medium" charset="0"/>
+                        <a:cs typeface="Pretendard Medium" charset="0"/>
+                      </a:endParaRPr>
+                    </a:p>
+                  </a:txBody>
+                  <a:tcPr marL="76200" marR="76200" marT="50800" marB="50800" anchor="ctr">
+                    <a:lnL w="0" cap="flat" cmpd="sng" algn="ctr">
+                      <a:noFill/>
+                    </a:lnL>
+                    <a:lnR w="0" cap="flat" cmpd="sng" algn="ctr">
+                      <a:noFill/>
+                    </a:lnR>
+                    <a:lnT w="0" cap="flat" cmpd="sng" algn="ctr">
+                      <a:noFill/>
+                    </a:lnT>
+                    <a:lnB w="9525" cap="flat" cmpd="sng" algn="ctr">
+                      <a:solidFill>
+                        <a:srgbClr val="E0E0E0"/>
+                      </a:solidFill>
+                      <a:prstDash val="solid"/>
+                      <a:round/>
+                      <a:headEnd type="none" w="med" len="med"/>
+                      <a:tailEnd type="none" w="med" len="med"/>
+                    </a:lnB>
+                    <a:solidFill>
+                      <a:srgbClr val="FFFFFF"/>
+                    </a:solidFill>
+                  </a:tcPr>
+                </a:tc>
+              </a:tr>
+            </a:tbl>
+          </a:graphicData>
+        </a:graphic>
+      </p:graphicFrame>
+      <p:sp>
+        <p:nvSpPr>
+          <p:cNvPr id="6" name="Text 3"/>
+          <p:cNvSpPr txBox="1"/>
+          <p:nvPr/>
+        </p:nvSpPr>
+        <p:spPr>
+          <a:xfrm>
+            <a:off x="609905" y="6446520"/>
+            <a:ext cx="5486400" cy="274320"/>
+          </a:xfrm>
+          <a:prstGeom prst="rect">
+            <a:avLst/>
+          </a:prstGeom>
+          <a:noFill/>
+          <a:ln/>
+        </p:spPr>
+        <p:txBody>
+          <a:bodyPr wrap="square" lIns="0" tIns="0" rIns="0" bIns="0" rtlCol="0" anchor="ctr"/>
+          <a:lstStyle/>
+          <a:p>
+            <a:pPr indent="0" marL="0">
+              <a:buNone/>
+            </a:pPr>
+            <a:r>
+              <a:rPr lang="en-US" sz="1000" spc="200" kern="0" dirty="0">
+                <a:solidFill>
+                  <a:srgbClr val="7A7A7A"/>
+                </a:solidFill>
+                <a:latin typeface="Pretendard" pitchFamily="34" charset="0"/>
+                <a:ea typeface="Pretendard" pitchFamily="34" charset="-122"/>
+                <a:cs typeface="Pretendard" pitchFamily="34" charset="-120"/>
+              </a:rPr>
+              <a:t>QA REPORT  ·  FISH GAME</a:t>
+            </a:r>
+            <a:endParaRPr lang="en-US" sz="1000" dirty="0"/>
+          </a:p>
+        </p:txBody>
+      </p:sp>
+      <p:sp>
+        <p:nvSpPr>
+          <p:cNvPr id="7" name="Text 4"/>
+          <p:cNvSpPr txBox="1"/>
+          <p:nvPr/>
+        </p:nvSpPr>
+        <p:spPr>
+          <a:xfrm>
+            <a:off x="10515600" y="6446520"/>
+            <a:ext cx="1066190" cy="274320"/>
+          </a:xfrm>
+          <a:prstGeom prst="rect">
+            <a:avLst/>
+          </a:prstGeom>
+          <a:noFill/>
+          <a:ln/>
+        </p:spPr>
+        <p:txBody>
+          <a:bodyPr wrap="square" lIns="0" tIns="0" rIns="0" bIns="0" rtlCol="0" anchor="ctr"/>
+          <a:lstStyle/>
+          <a:p>
+            <a:pPr algn="r" indent="0" marL="0">
+              <a:buNone/>
+            </a:pPr>
+            <a:r>
+              <a:rPr lang="en-US" sz="1000" dirty="0">
+                <a:solidFill>
+                  <a:srgbClr val="7A7A7A"/>
+                </a:solidFill>
+                <a:latin typeface="Pretendard" pitchFamily="34" charset="0"/>
+                <a:ea typeface="Pretendard" pitchFamily="34" charset="-122"/>
+                <a:cs typeface="Pretendard" pitchFamily="34" charset="-120"/>
+              </a:rPr>
+              <a:t>27 / 30</a:t>
+            </a:r>
+            <a:endParaRPr lang="en-US" sz="1000" dirty="0"/>
+          </a:p>
+        </p:txBody>
+      </p:sp>
+    </p:spTree>
+  </p:cSld>
+  <p:clrMapOvr>
+    <a:masterClrMapping/>
+  </p:clrMapOvr>
+</p:sld>
+</file>
+
+<file path=ppt/slides/slide28.xml><?xml version="1.0" encoding="utf-8"?>
+<p:sld xmlns:a="http://schemas.openxmlformats.org/drawingml/2006/main" xmlns:r="http://schemas.openxmlformats.org/officeDocument/2006/relationships" xmlns:p="http://schemas.openxmlformats.org/presentationml/2006/main">
+  <p:cSld name="Slide 28">
     <p:bg>
       <p:bgPr>
         <a:solidFill>
@@ -28620,7 +31227,7 @@
       </p:sp>
       <p:graphicFrame>
         <p:nvGraphicFramePr>
-          <p:cNvPr id="27" name="Table 0"/>
+          <p:cNvPr id="29" name="Table 0"/>
           <p:cNvGraphicFramePr>
             <a:graphicFrameLocks noGrp="1"/>
           </p:cNvGraphicFramePr>
@@ -30378,258 +32985,6 @@
                           <a:cs typeface="Pretendard" pitchFamily="34" charset="-120"/>
                         </a:rPr>
                         <a:t>R4</a:t>
-                      </a:r>
-                      <a:endParaRPr lang="en-US" sz="1300" dirty="0">
-                        <a:latin typeface="Pretendard" charset="0"/>
-                        <a:ea typeface="Pretendard" charset="0"/>
-                        <a:cs typeface="Pretendard" charset="0"/>
-                      </a:endParaRPr>
-                    </a:p>
-                  </a:txBody>
-                  <a:tcPr marL="76200" marR="76200" marT="50800" marB="50800" anchor="ctr">
-                    <a:lnL w="0" cap="flat" cmpd="sng" algn="ctr">
-                      <a:noFill/>
-                    </a:lnL>
-                    <a:lnR w="0" cap="flat" cmpd="sng" algn="ctr">
-                      <a:noFill/>
-                    </a:lnR>
-                    <a:lnT w="0" cap="flat" cmpd="sng" algn="ctr">
-                      <a:noFill/>
-                    </a:lnT>
-                    <a:lnB w="9525" cap="flat" cmpd="sng" algn="ctr">
-                      <a:solidFill>
-                        <a:srgbClr val="E0E0E0"/>
-                      </a:solidFill>
-                      <a:prstDash val="solid"/>
-                      <a:round/>
-                      <a:headEnd type="none" w="med" len="med"/>
-                      <a:tailEnd type="none" w="med" len="med"/>
-                    </a:lnB>
-                    <a:solidFill>
-                      <a:srgbClr val="FFFFFF"/>
-                    </a:solidFill>
-                  </a:tcPr>
-                </a:tc>
-              </a:tr>
-              <a:tr h="638556">
-                <a:tc>
-                  <a:txBody>
-                    <a:bodyPr/>
-                    <a:lstStyle/>
-                    <a:p>
-                      <a:pPr indent="0" marL="0">
-                        <a:buNone/>
-                      </a:pPr>
-                      <a:r>
-                        <a:rPr lang="en-US" sz="1300" dirty="0">
-                          <a:solidFill>
-                            <a:srgbClr val="1D1D1F"/>
-                          </a:solidFill>
-                          <a:latin typeface="Pretendard SemiBold" pitchFamily="34" charset="0"/>
-                          <a:ea typeface="Pretendard SemiBold" pitchFamily="34" charset="-122"/>
-                          <a:cs typeface="Pretendard SemiBold" pitchFamily="34" charset="-120"/>
-                        </a:rPr>
-                        <a:t>스킬트리 UI</a:t>
-                      </a:r>
-                      <a:endParaRPr lang="en-US" sz="1300" dirty="0">
-                        <a:latin typeface="Pretendard SemiBold" charset="0"/>
-                        <a:ea typeface="Pretendard SemiBold" charset="0"/>
-                        <a:cs typeface="Pretendard SemiBold" charset="0"/>
-                      </a:endParaRPr>
-                    </a:p>
-                  </a:txBody>
-                  <a:tcPr marL="76200" marR="76200" marT="50800" marB="50800" anchor="ctr">
-                    <a:lnL w="0" cap="flat" cmpd="sng" algn="ctr">
-                      <a:noFill/>
-                    </a:lnL>
-                    <a:lnR w="0" cap="flat" cmpd="sng" algn="ctr">
-                      <a:noFill/>
-                    </a:lnR>
-                    <a:lnT w="0" cap="flat" cmpd="sng" algn="ctr">
-                      <a:noFill/>
-                    </a:lnT>
-                    <a:lnB w="9525" cap="flat" cmpd="sng" algn="ctr">
-                      <a:solidFill>
-                        <a:srgbClr val="E0E0E0"/>
-                      </a:solidFill>
-                      <a:prstDash val="solid"/>
-                      <a:round/>
-                      <a:headEnd type="none" w="med" len="med"/>
-                      <a:tailEnd type="none" w="med" len="med"/>
-                    </a:lnB>
-                    <a:solidFill>
-                      <a:srgbClr val="FFFFFF"/>
-                    </a:solidFill>
-                  </a:tcPr>
-                </a:tc>
-                <a:tc>
-                  <a:txBody>
-                    <a:bodyPr/>
-                    <a:lstStyle/>
-                    <a:p>
-                      <a:pPr indent="0" marL="0">
-                        <a:buNone/>
-                      </a:pPr>
-                      <a:r>
-                        <a:rPr lang="en-US" sz="1300" dirty="0">
-                          <a:solidFill>
-                            <a:srgbClr val="333333"/>
-                          </a:solidFill>
-                          <a:latin typeface="Pretendard" pitchFamily="34" charset="0"/>
-                          <a:ea typeface="Pretendard" pitchFamily="34" charset="-122"/>
-                          <a:cs typeface="Pretendard" pitchFamily="34" charset="-120"/>
-                        </a:rPr>
-                        <a:t>도형 범례 14개가 한 줄을 넘칠 수 있음 / 연출 때문에 매 프레임 UI 재빌드</a:t>
-                      </a:r>
-                      <a:endParaRPr lang="en-US" sz="1300" dirty="0">
-                        <a:latin typeface="Pretendard" charset="0"/>
-                        <a:ea typeface="Pretendard" charset="0"/>
-                        <a:cs typeface="Pretendard" charset="0"/>
-                      </a:endParaRPr>
-                    </a:p>
-                  </a:txBody>
-                  <a:tcPr marL="76200" marR="76200" marT="50800" marB="50800" anchor="ctr">
-                    <a:lnL w="0" cap="flat" cmpd="sng" algn="ctr">
-                      <a:noFill/>
-                    </a:lnL>
-                    <a:lnR w="0" cap="flat" cmpd="sng" algn="ctr">
-                      <a:noFill/>
-                    </a:lnR>
-                    <a:lnT w="0" cap="flat" cmpd="sng" algn="ctr">
-                      <a:noFill/>
-                    </a:lnT>
-                    <a:lnB w="9525" cap="flat" cmpd="sng" algn="ctr">
-                      <a:solidFill>
-                        <a:srgbClr val="E0E0E0"/>
-                      </a:solidFill>
-                      <a:prstDash val="solid"/>
-                      <a:round/>
-                      <a:headEnd type="none" w="med" len="med"/>
-                      <a:tailEnd type="none" w="med" len="med"/>
-                    </a:lnB>
-                    <a:solidFill>
-                      <a:srgbClr val="FFFFFF"/>
-                    </a:solidFill>
-                  </a:tcPr>
-                </a:tc>
-                <a:tc>
-                  <a:txBody>
-                    <a:bodyPr/>
-                    <a:lstStyle/>
-                    <a:p>
-                      <a:pPr indent="0" marL="0">
-                        <a:buNone/>
-                      </a:pPr>
-                      <a:r>
-                        <a:rPr lang="en-US" sz="1300" dirty="0">
-                          <a:solidFill>
-                            <a:srgbClr val="333333"/>
-                          </a:solidFill>
-                          <a:latin typeface="Pretendard" pitchFamily="34" charset="0"/>
-                          <a:ea typeface="Pretendard" pitchFamily="34" charset="-122"/>
-                          <a:cs typeface="Pretendard" pitchFamily="34" charset="-120"/>
-                        </a:rPr>
-                        <a:t>R6 — 범례가 남은 폭을 넘으면 한 줄 전체를 줄여 맞추도록 수정</a:t>
-                      </a:r>
-                      <a:endParaRPr lang="en-US" sz="1300" dirty="0">
-                        <a:latin typeface="Pretendard" charset="0"/>
-                        <a:ea typeface="Pretendard" charset="0"/>
-                        <a:cs typeface="Pretendard" charset="0"/>
-                      </a:endParaRPr>
-                    </a:p>
-                  </a:txBody>
-                  <a:tcPr marL="76200" marR="76200" marT="50800" marB="50800" anchor="ctr">
-                    <a:lnL w="0" cap="flat" cmpd="sng" algn="ctr">
-                      <a:noFill/>
-                    </a:lnL>
-                    <a:lnR w="0" cap="flat" cmpd="sng" algn="ctr">
-                      <a:noFill/>
-                    </a:lnR>
-                    <a:lnT w="0" cap="flat" cmpd="sng" algn="ctr">
-                      <a:noFill/>
-                    </a:lnT>
-                    <a:lnB w="9525" cap="flat" cmpd="sng" algn="ctr">
-                      <a:solidFill>
-                        <a:srgbClr val="E0E0E0"/>
-                      </a:solidFill>
-                      <a:prstDash val="solid"/>
-                      <a:round/>
-                      <a:headEnd type="none" w="med" len="med"/>
-                      <a:tailEnd type="none" w="med" len="med"/>
-                    </a:lnB>
-                    <a:solidFill>
-                      <a:srgbClr val="FFFFFF"/>
-                    </a:solidFill>
-                  </a:tcPr>
-                </a:tc>
-                <a:tc>
-                  <a:txBody>
-                    <a:bodyPr/>
-                    <a:lstStyle/>
-                    <a:p>
-                      <a:pPr algn="ctr" indent="0" marL="0">
-                        <a:buNone/>
-                      </a:pPr>
-                      <a:r>
-                        <a:rPr lang="en-US" sz="1300" dirty="0">
-                          <a:solidFill>
-                            <a:srgbClr val="7A7A7A"/>
-                          </a:solidFill>
-                          <a:latin typeface="Pretendard" pitchFamily="34" charset="0"/>
-                          <a:ea typeface="Pretendard" pitchFamily="34" charset="-122"/>
-                          <a:cs typeface="Pretendard" pitchFamily="34" charset="-120"/>
-                        </a:rPr>
-                        <a:t>해결</a:t>
-                      </a:r>
-                      <a:endParaRPr lang="en-US" sz="1300" dirty="0">
-                        <a:latin typeface="Pretendard" charset="0"/>
-                        <a:ea typeface="Pretendard" charset="0"/>
-                        <a:cs typeface="Pretendard" charset="0"/>
-                      </a:endParaRPr>
-                    </a:p>
-                  </a:txBody>
-                  <a:tcPr marL="76200" marR="76200" marT="50800" marB="50800" anchor="ctr">
-                    <a:lnL w="0" cap="flat" cmpd="sng" algn="ctr">
-                      <a:noFill/>
-                    </a:lnL>
-                    <a:lnR w="0" cap="flat" cmpd="sng" algn="ctr">
-                      <a:noFill/>
-                    </a:lnR>
-                    <a:lnT w="0" cap="flat" cmpd="sng" algn="ctr">
-                      <a:noFill/>
-                    </a:lnT>
-                    <a:lnB w="9525" cap="flat" cmpd="sng" algn="ctr">
-                      <a:solidFill>
-                        <a:srgbClr val="E0E0E0"/>
-                      </a:solidFill>
-                      <a:prstDash val="solid"/>
-                      <a:round/>
-                      <a:headEnd type="none" w="med" len="med"/>
-                      <a:tailEnd type="none" w="med" len="med"/>
-                    </a:lnB>
-                    <a:solidFill>
-                      <a:srgbClr val="FFFFFF"/>
-                    </a:solidFill>
-                  </a:tcPr>
-                </a:tc>
-                <a:tc>
-                  <a:txBody>
-                    <a:bodyPr/>
-                    <a:lstStyle/>
-                    <a:p>
-                      <a:pPr algn="ctr" indent="0" marL="0">
-                        <a:buNone/>
-                      </a:pPr>
-                      <a:r>
-                        <a:rPr lang="en-US" sz="1300" dirty="0">
-                          <a:solidFill>
-                            <a:srgbClr val="7A7A7A"/>
-                          </a:solidFill>
-                          <a:latin typeface="Pretendard" pitchFamily="34" charset="0"/>
-                          <a:ea typeface="Pretendard" pitchFamily="34" charset="-122"/>
-                          <a:cs typeface="Pretendard" pitchFamily="34" charset="-120"/>
-                        </a:rPr>
-                        <a:t>R3</a:t>
                       </a:r>
                       <a:endParaRPr lang="en-US" sz="1300" dirty="0">
                         <a:latin typeface="Pretendard" charset="0"/>
@@ -30739,7 +33094,7 @@
                 <a:ea typeface="Pretendard" pitchFamily="34" charset="-122"/>
                 <a:cs typeface="Pretendard" pitchFamily="34" charset="-120"/>
               </a:rPr>
-              <a:t>26 / 28</a:t>
+              <a:t>28 / 30</a:t>
             </a:r>
             <a:endParaRPr lang="en-US" sz="1000" dirty="0"/>
           </a:p>
@@ -30753,9 +33108,9 @@
 </p:sld>
 </file>
 
-<file path=ppt/slides/slide27.xml><?xml version="1.0" encoding="utf-8"?>
+<file path=ppt/slides/slide29.xml><?xml version="1.0" encoding="utf-8"?>
 <p:sld xmlns:a="http://schemas.openxmlformats.org/drawingml/2006/main" xmlns:r="http://schemas.openxmlformats.org/officeDocument/2006/relationships" xmlns:p="http://schemas.openxmlformats.org/presentationml/2006/main">
-  <p:cSld name="Slide 27">
+  <p:cSld name="Slide 29">
     <p:bg>
       <p:bgPr>
         <a:solidFill>
@@ -30880,7 +33235,7 @@
       </p:sp>
       <p:graphicFrame>
         <p:nvGraphicFramePr>
-          <p:cNvPr id="28" name="Table 0"/>
+          <p:cNvPr id="30" name="Table 0"/>
           <p:cNvGraphicFramePr>
             <a:graphicFrameLocks noGrp="1"/>
           </p:cNvGraphicFramePr>
@@ -31177,7 +33532,7 @@
                           <a:ea typeface="Pretendard SemiBold" pitchFamily="34" charset="-122"/>
                           <a:cs typeface="Pretendard SemiBold" pitchFamily="34" charset="-120"/>
                         </a:rPr>
-                        <a:t>사운드</a:t>
+                        <a:t>스킬트리 UI</a:t>
                       </a:r>
                       <a:endParaRPr lang="en-US" sz="1300" dirty="0">
                         <a:latin typeface="Pretendard SemiBold" charset="0"/>
@@ -31227,7 +33582,7 @@
                           <a:ea typeface="Pretendard" pitchFamily="34" charset="-122"/>
                           <a:cs typeface="Pretendard" pitchFamily="34" charset="-120"/>
                         </a:rPr>
-                        <a:t>배경음 파일이 아직 없어 배경음 슬라이더는 소리 변화가 없음</a:t>
+                        <a:t>도형 범례 14개가 한 줄을 넘칠 수 있음 / 연출 때문에 매 프레임 UI 재빌드</a:t>
                       </a:r>
                       <a:endParaRPr lang="en-US" sz="1300" dirty="0">
                         <a:latin typeface="Pretendard" charset="0"/>
@@ -31277,7 +33632,7 @@
                           <a:ea typeface="Pretendard" pitchFamily="34" charset="-122"/>
                           <a:cs typeface="Pretendard" pitchFamily="34" charset="-120"/>
                         </a:rPr>
-                        <a:t>SoundBank의 menuMusic · gameplayMusic에 클립 넣기</a:t>
+                        <a:t>R6 — 범례가 남은 폭을 넘으면 한 줄 전체를 줄여 맞추도록 수정</a:t>
                       </a:r>
                       <a:endParaRPr lang="en-US" sz="1300" dirty="0">
                         <a:latin typeface="Pretendard" charset="0"/>
@@ -31327,7 +33682,7 @@
                           <a:ea typeface="Pretendard" pitchFamily="34" charset="-122"/>
                           <a:cs typeface="Pretendard" pitchFamily="34" charset="-120"/>
                         </a:rPr>
-                        <a:t>미정</a:t>
+                        <a:t>해결</a:t>
                       </a:r>
                       <a:endParaRPr lang="en-US" sz="1300" dirty="0">
                         <a:latin typeface="Pretendard" charset="0"/>
@@ -31377,7 +33732,7 @@
                           <a:ea typeface="Pretendard" pitchFamily="34" charset="-122"/>
                           <a:cs typeface="Pretendard" pitchFamily="34" charset="-120"/>
                         </a:rPr>
-                        <a:t>R5</a:t>
+                        <a:t>R3</a:t>
                       </a:r>
                       <a:endParaRPr lang="en-US" sz="1300" dirty="0">
                         <a:latin typeface="Pretendard" charset="0"/>
@@ -31429,7 +33784,7 @@
                           <a:ea typeface="Pretendard SemiBold" pitchFamily="34" charset="-122"/>
                           <a:cs typeface="Pretendard SemiBold" pitchFamily="34" charset="-120"/>
                         </a:rPr>
-                        <a:t>설정 화면</a:t>
+                        <a:t>사운드</a:t>
                       </a:r>
                       <a:endParaRPr lang="en-US" sz="1300" dirty="0">
                         <a:latin typeface="Pretendard SemiBold" charset="0"/>
@@ -31479,7 +33834,7 @@
                           <a:ea typeface="Pretendard" pitchFamily="34" charset="-122"/>
                           <a:cs typeface="Pretendard" pitchFamily="34" charset="-120"/>
                         </a:rPr>
-                        <a:t>해상도 · 화면 모드는 에디터에서 바뀌지 않아 빌드에서만 확인 가능</a:t>
+                        <a:t>배경음 파일이 아직 없어 배경음 슬라이더는 소리 변화가 없음</a:t>
                       </a:r>
                       <a:endParaRPr lang="en-US" sz="1300" dirty="0">
                         <a:latin typeface="Pretendard" charset="0"/>
@@ -31529,7 +33884,7 @@
                           <a:ea typeface="Pretendard" pitchFamily="34" charset="-122"/>
                           <a:cs typeface="Pretendard" pitchFamily="34" charset="-120"/>
                         </a:rPr>
-                        <a:t>PC 빌드로 해상도 · 전체화면 전환 확인</a:t>
+                        <a:t>SoundBank의 menuMusic · gameplayMusic에 클립 넣기</a:t>
                       </a:r>
                       <a:endParaRPr lang="en-US" sz="1300" dirty="0">
                         <a:latin typeface="Pretendard" charset="0"/>
@@ -31571,15 +33926,117 @@
                         <a:buNone/>
                       </a:pPr>
                       <a:r>
-                        <a:rPr lang="en-US" sz="1300" b="1" dirty="0">
-                          <a:solidFill>
-                            <a:srgbClr val="0066CC"/>
+                        <a:rPr lang="en-US" sz="1300" dirty="0">
+                          <a:solidFill>
+                            <a:srgbClr val="7A7A7A"/>
+                          </a:solidFill>
+                          <a:latin typeface="Pretendard" pitchFamily="34" charset="0"/>
+                          <a:ea typeface="Pretendard" pitchFamily="34" charset="-122"/>
+                          <a:cs typeface="Pretendard" pitchFamily="34" charset="-120"/>
+                        </a:rPr>
+                        <a:t>미정</a:t>
+                      </a:r>
+                      <a:endParaRPr lang="en-US" sz="1300" dirty="0">
+                        <a:latin typeface="Pretendard" charset="0"/>
+                        <a:ea typeface="Pretendard" charset="0"/>
+                        <a:cs typeface="Pretendard" charset="0"/>
+                      </a:endParaRPr>
+                    </a:p>
+                  </a:txBody>
+                  <a:tcPr marL="76200" marR="76200" marT="50800" marB="50800" anchor="ctr">
+                    <a:lnL w="0" cap="flat" cmpd="sng" algn="ctr">
+                      <a:noFill/>
+                    </a:lnL>
+                    <a:lnR w="0" cap="flat" cmpd="sng" algn="ctr">
+                      <a:noFill/>
+                    </a:lnR>
+                    <a:lnT w="0" cap="flat" cmpd="sng" algn="ctr">
+                      <a:noFill/>
+                    </a:lnT>
+                    <a:lnB w="9525" cap="flat" cmpd="sng" algn="ctr">
+                      <a:solidFill>
+                        <a:srgbClr val="E0E0E0"/>
+                      </a:solidFill>
+                      <a:prstDash val="solid"/>
+                      <a:round/>
+                      <a:headEnd type="none" w="med" len="med"/>
+                      <a:tailEnd type="none" w="med" len="med"/>
+                    </a:lnB>
+                    <a:solidFill>
+                      <a:srgbClr val="FFFFFF"/>
+                    </a:solidFill>
+                  </a:tcPr>
+                </a:tc>
+                <a:tc>
+                  <a:txBody>
+                    <a:bodyPr/>
+                    <a:lstStyle/>
+                    <a:p>
+                      <a:pPr algn="ctr" indent="0" marL="0">
+                        <a:buNone/>
+                      </a:pPr>
+                      <a:r>
+                        <a:rPr lang="en-US" sz="1300" dirty="0">
+                          <a:solidFill>
+                            <a:srgbClr val="7A7A7A"/>
+                          </a:solidFill>
+                          <a:latin typeface="Pretendard" pitchFamily="34" charset="0"/>
+                          <a:ea typeface="Pretendard" pitchFamily="34" charset="-122"/>
+                          <a:cs typeface="Pretendard" pitchFamily="34" charset="-120"/>
+                        </a:rPr>
+                        <a:t>R5</a:t>
+                      </a:r>
+                      <a:endParaRPr lang="en-US" sz="1300" dirty="0">
+                        <a:latin typeface="Pretendard" charset="0"/>
+                        <a:ea typeface="Pretendard" charset="0"/>
+                        <a:cs typeface="Pretendard" charset="0"/>
+                      </a:endParaRPr>
+                    </a:p>
+                  </a:txBody>
+                  <a:tcPr marL="76200" marR="76200" marT="50800" marB="50800" anchor="ctr">
+                    <a:lnL w="0" cap="flat" cmpd="sng" algn="ctr">
+                      <a:noFill/>
+                    </a:lnL>
+                    <a:lnR w="0" cap="flat" cmpd="sng" algn="ctr">
+                      <a:noFill/>
+                    </a:lnR>
+                    <a:lnT w="0" cap="flat" cmpd="sng" algn="ctr">
+                      <a:noFill/>
+                    </a:lnT>
+                    <a:lnB w="9525" cap="flat" cmpd="sng" algn="ctr">
+                      <a:solidFill>
+                        <a:srgbClr val="E0E0E0"/>
+                      </a:solidFill>
+                      <a:prstDash val="solid"/>
+                      <a:round/>
+                      <a:headEnd type="none" w="med" len="med"/>
+                      <a:tailEnd type="none" w="med" len="med"/>
+                    </a:lnB>
+                    <a:solidFill>
+                      <a:srgbClr val="FFFFFF"/>
+                    </a:solidFill>
+                  </a:tcPr>
+                </a:tc>
+              </a:tr>
+              <a:tr h="638556">
+                <a:tc>
+                  <a:txBody>
+                    <a:bodyPr/>
+                    <a:lstStyle/>
+                    <a:p>
+                      <a:pPr indent="0" marL="0">
+                        <a:buNone/>
+                      </a:pPr>
+                      <a:r>
+                        <a:rPr lang="en-US" sz="1300" dirty="0">
+                          <a:solidFill>
+                            <a:srgbClr val="1D1D1F"/>
                           </a:solidFill>
                           <a:latin typeface="Pretendard SemiBold" pitchFamily="34" charset="0"/>
                           <a:ea typeface="Pretendard SemiBold" pitchFamily="34" charset="-122"/>
                           <a:cs typeface="Pretendard SemiBold" pitchFamily="34" charset="-120"/>
                         </a:rPr>
-                        <a:t>확인 필요</a:t>
+                        <a:t>설정 화면</a:t>
                       </a:r>
                       <a:endParaRPr lang="en-US" sz="1300" dirty="0">
                         <a:latin typeface="Pretendard SemiBold" charset="0"/>
@@ -31617,19 +34074,19 @@
                     <a:bodyPr/>
                     <a:lstStyle/>
                     <a:p>
-                      <a:pPr algn="ctr" indent="0" marL="0">
+                      <a:pPr indent="0" marL="0">
                         <a:buNone/>
                       </a:pPr>
                       <a:r>
                         <a:rPr lang="en-US" sz="1300" dirty="0">
                           <a:solidFill>
-                            <a:srgbClr val="7A7A7A"/>
+                            <a:srgbClr val="333333"/>
                           </a:solidFill>
                           <a:latin typeface="Pretendard" pitchFamily="34" charset="0"/>
                           <a:ea typeface="Pretendard" pitchFamily="34" charset="-122"/>
                           <a:cs typeface="Pretendard" pitchFamily="34" charset="-120"/>
                         </a:rPr>
-                        <a:t>R5</a:t>
+                        <a:t>해상도 · 화면 모드는 에디터에서 바뀌지 않아 빌드에서만 확인 가능</a:t>
                       </a:r>
                       <a:endParaRPr lang="en-US" sz="1300" dirty="0">
                         <a:latin typeface="Pretendard" charset="0"/>
@@ -31662,8 +34119,6 @@
                     </a:solidFill>
                   </a:tcPr>
                 </a:tc>
-              </a:tr>
-              <a:tr h="866394">
                 <a:tc>
                   <a:txBody>
                     <a:bodyPr/>
@@ -31675,13 +34130,63 @@
                       <a:r>
                         <a:rPr lang="en-US" sz="1300" dirty="0">
                           <a:solidFill>
-                            <a:srgbClr val="1D1D1F"/>
+                            <a:srgbClr val="333333"/>
+                          </a:solidFill>
+                          <a:latin typeface="Pretendard" pitchFamily="34" charset="0"/>
+                          <a:ea typeface="Pretendard" pitchFamily="34" charset="-122"/>
+                          <a:cs typeface="Pretendard" pitchFamily="34" charset="-120"/>
+                        </a:rPr>
+                        <a:t>PC 빌드로 해상도 · 전체화면 전환 확인</a:t>
+                      </a:r>
+                      <a:endParaRPr lang="en-US" sz="1300" dirty="0">
+                        <a:latin typeface="Pretendard" charset="0"/>
+                        <a:ea typeface="Pretendard" charset="0"/>
+                        <a:cs typeface="Pretendard" charset="0"/>
+                      </a:endParaRPr>
+                    </a:p>
+                  </a:txBody>
+                  <a:tcPr marL="76200" marR="76200" marT="50800" marB="50800" anchor="ctr">
+                    <a:lnL w="0" cap="flat" cmpd="sng" algn="ctr">
+                      <a:noFill/>
+                    </a:lnL>
+                    <a:lnR w="0" cap="flat" cmpd="sng" algn="ctr">
+                      <a:noFill/>
+                    </a:lnR>
+                    <a:lnT w="0" cap="flat" cmpd="sng" algn="ctr">
+                      <a:noFill/>
+                    </a:lnT>
+                    <a:lnB w="9525" cap="flat" cmpd="sng" algn="ctr">
+                      <a:solidFill>
+                        <a:srgbClr val="E0E0E0"/>
+                      </a:solidFill>
+                      <a:prstDash val="solid"/>
+                      <a:round/>
+                      <a:headEnd type="none" w="med" len="med"/>
+                      <a:tailEnd type="none" w="med" len="med"/>
+                    </a:lnB>
+                    <a:solidFill>
+                      <a:srgbClr val="FFFFFF"/>
+                    </a:solidFill>
+                  </a:tcPr>
+                </a:tc>
+                <a:tc>
+                  <a:txBody>
+                    <a:bodyPr/>
+                    <a:lstStyle/>
+                    <a:p>
+                      <a:pPr algn="ctr" indent="0" marL="0">
+                        <a:buNone/>
+                      </a:pPr>
+                      <a:r>
+                        <a:rPr lang="en-US" sz="1300" b="1" dirty="0">
+                          <a:solidFill>
+                            <a:srgbClr val="0066CC"/>
                           </a:solidFill>
                           <a:latin typeface="Pretendard SemiBold" pitchFamily="34" charset="0"/>
                           <a:ea typeface="Pretendard SemiBold" pitchFamily="34" charset="-122"/>
                           <a:cs typeface="Pretendard SemiBold" pitchFamily="34" charset="-120"/>
                         </a:rPr>
-                        <a:t>ESC</a:t>
+                        <a:t>확인 필요</a:t>
                       </a:r>
                       <a:endParaRPr lang="en-US" sz="1300" dirty="0">
                         <a:latin typeface="Pretendard SemiBold" charset="0"/>
@@ -31719,19 +34224,19 @@
                     <a:bodyPr/>
                     <a:lstStyle/>
                     <a:p>
-                      <a:pPr indent="0" marL="0">
+                      <a:pPr algn="ctr" indent="0" marL="0">
                         <a:buNone/>
                       </a:pPr>
                       <a:r>
                         <a:rPr lang="en-US" sz="1300" dirty="0">
                           <a:solidFill>
-                            <a:srgbClr val="333333"/>
+                            <a:srgbClr val="7A7A7A"/>
                           </a:solidFill>
                           <a:latin typeface="Pretendard" pitchFamily="34" charset="0"/>
                           <a:ea typeface="Pretendard" pitchFamily="34" charset="-122"/>
                           <a:cs typeface="Pretendard" pitchFamily="34" charset="-120"/>
                         </a:rPr>
-                        <a:t>자동 테스트의 ESC 입력이 게임에 전달되지 않아 일시정지 열기 · 설정 창 ESC 닫기를 확인하지 못함 (Enter · 방향키는 정상)</a:t>
+                        <a:t>R5</a:t>
                       </a:r>
                       <a:endParaRPr lang="en-US" sz="1300" dirty="0">
                         <a:latin typeface="Pretendard" charset="0"/>
@@ -31764,6 +34269,58 @@
                     </a:solidFill>
                   </a:tcPr>
                 </a:tc>
+              </a:tr>
+              <a:tr h="866394">
+                <a:tc>
+                  <a:txBody>
+                    <a:bodyPr/>
+                    <a:lstStyle/>
+                    <a:p>
+                      <a:pPr indent="0" marL="0">
+                        <a:buNone/>
+                      </a:pPr>
+                      <a:r>
+                        <a:rPr lang="en-US" sz="1300" dirty="0">
+                          <a:solidFill>
+                            <a:srgbClr val="1D1D1F"/>
+                          </a:solidFill>
+                          <a:latin typeface="Pretendard SemiBold" pitchFamily="34" charset="0"/>
+                          <a:ea typeface="Pretendard SemiBold" pitchFamily="34" charset="-122"/>
+                          <a:cs typeface="Pretendard SemiBold" pitchFamily="34" charset="-120"/>
+                        </a:rPr>
+                        <a:t>ESC</a:t>
+                      </a:r>
+                      <a:endParaRPr lang="en-US" sz="1300" dirty="0">
+                        <a:latin typeface="Pretendard SemiBold" charset="0"/>
+                        <a:ea typeface="Pretendard SemiBold" charset="0"/>
+                        <a:cs typeface="Pretendard SemiBold" charset="0"/>
+                      </a:endParaRPr>
+                    </a:p>
+                  </a:txBody>
+                  <a:tcPr marL="76200" marR="76200" marT="50800" marB="50800" anchor="ctr">
+                    <a:lnL w="0" cap="flat" cmpd="sng" algn="ctr">
+                      <a:noFill/>
+                    </a:lnL>
+                    <a:lnR w="0" cap="flat" cmpd="sng" algn="ctr">
+                      <a:noFill/>
+                    </a:lnR>
+                    <a:lnT w="0" cap="flat" cmpd="sng" algn="ctr">
+                      <a:noFill/>
+                    </a:lnT>
+                    <a:lnB w="9525" cap="flat" cmpd="sng" algn="ctr">
+                      <a:solidFill>
+                        <a:srgbClr val="E0E0E0"/>
+                      </a:solidFill>
+                      <a:prstDash val="solid"/>
+                      <a:round/>
+                      <a:headEnd type="none" w="med" len="med"/>
+                      <a:tailEnd type="none" w="med" len="med"/>
+                    </a:lnB>
+                    <a:solidFill>
+                      <a:srgbClr val="FFFFFF"/>
+                    </a:solidFill>
+                  </a:tcPr>
+                </a:tc>
                 <a:tc>
                   <a:txBody>
                     <a:bodyPr/>
@@ -31781,7 +34338,7 @@
                           <a:ea typeface="Pretendard" pitchFamily="34" charset="-122"/>
                           <a:cs typeface="Pretendard" pitchFamily="34" charset="-120"/>
                         </a:rPr>
-                        <a:t>직접 ESC로 일시정지 → 설정 → ESC 닫기 → ESC 재개 확인</a:t>
+                        <a:t>자동 테스트의 ESC 입력이 게임에 전달되지 않아 일시정지 열기 · 설정 창 ESC 닫기를 확인하지 못함 (Enter · 방향키는 정상)</a:t>
                       </a:r>
                       <a:endParaRPr lang="en-US" sz="1300" dirty="0">
                         <a:latin typeface="Pretendard" charset="0"/>
@@ -31819,6 +34376,56 @@
                     <a:bodyPr/>
                     <a:lstStyle/>
                     <a:p>
+                      <a:pPr indent="0" marL="0">
+                        <a:buNone/>
+                      </a:pPr>
+                      <a:r>
+                        <a:rPr lang="en-US" sz="1300" dirty="0">
+                          <a:solidFill>
+                            <a:srgbClr val="333333"/>
+                          </a:solidFill>
+                          <a:latin typeface="Pretendard" pitchFamily="34" charset="0"/>
+                          <a:ea typeface="Pretendard" pitchFamily="34" charset="-122"/>
+                          <a:cs typeface="Pretendard" pitchFamily="34" charset="-120"/>
+                        </a:rPr>
+                        <a:t>직접 ESC로 일시정지 → 설정 → ESC 닫기 → ESC 재개 확인</a:t>
+                      </a:r>
+                      <a:endParaRPr lang="en-US" sz="1300" dirty="0">
+                        <a:latin typeface="Pretendard" charset="0"/>
+                        <a:ea typeface="Pretendard" charset="0"/>
+                        <a:cs typeface="Pretendard" charset="0"/>
+                      </a:endParaRPr>
+                    </a:p>
+                  </a:txBody>
+                  <a:tcPr marL="76200" marR="76200" marT="50800" marB="50800" anchor="ctr">
+                    <a:lnL w="0" cap="flat" cmpd="sng" algn="ctr">
+                      <a:noFill/>
+                    </a:lnL>
+                    <a:lnR w="0" cap="flat" cmpd="sng" algn="ctr">
+                      <a:noFill/>
+                    </a:lnR>
+                    <a:lnT w="0" cap="flat" cmpd="sng" algn="ctr">
+                      <a:noFill/>
+                    </a:lnT>
+                    <a:lnB w="9525" cap="flat" cmpd="sng" algn="ctr">
+                      <a:solidFill>
+                        <a:srgbClr val="E0E0E0"/>
+                      </a:solidFill>
+                      <a:prstDash val="solid"/>
+                      <a:round/>
+                      <a:headEnd type="none" w="med" len="med"/>
+                      <a:tailEnd type="none" w="med" len="med"/>
+                    </a:lnB>
+                    <a:solidFill>
+                      <a:srgbClr val="FFFFFF"/>
+                    </a:solidFill>
+                  </a:tcPr>
+                </a:tc>
+                <a:tc>
+                  <a:txBody>
+                    <a:bodyPr/>
+                    <a:lstStyle/>
+                    <a:p>
                       <a:pPr algn="ctr" indent="0" marL="0">
                         <a:buNone/>
                       </a:pPr>
@@ -32134,510 +34741,6 @@
                           <a:cs typeface="Pretendard" pitchFamily="34" charset="-120"/>
                         </a:rPr>
                         <a:t>R7</a:t>
-                      </a:r>
-                      <a:endParaRPr lang="en-US" sz="1300" dirty="0">
-                        <a:latin typeface="Pretendard" charset="0"/>
-                        <a:ea typeface="Pretendard" charset="0"/>
-                        <a:cs typeface="Pretendard" charset="0"/>
-                      </a:endParaRPr>
-                    </a:p>
-                  </a:txBody>
-                  <a:tcPr marL="76200" marR="76200" marT="50800" marB="50800" anchor="ctr">
-                    <a:lnL w="0" cap="flat" cmpd="sng" algn="ctr">
-                      <a:noFill/>
-                    </a:lnL>
-                    <a:lnR w="0" cap="flat" cmpd="sng" algn="ctr">
-                      <a:noFill/>
-                    </a:lnR>
-                    <a:lnT w="0" cap="flat" cmpd="sng" algn="ctr">
-                      <a:noFill/>
-                    </a:lnT>
-                    <a:lnB w="9525" cap="flat" cmpd="sng" algn="ctr">
-                      <a:solidFill>
-                        <a:srgbClr val="E0E0E0"/>
-                      </a:solidFill>
-                      <a:prstDash val="solid"/>
-                      <a:round/>
-                      <a:headEnd type="none" w="med" len="med"/>
-                      <a:tailEnd type="none" w="med" len="med"/>
-                    </a:lnB>
-                    <a:solidFill>
-                      <a:srgbClr val="FFFFFF"/>
-                    </a:solidFill>
-                  </a:tcPr>
-                </a:tc>
-              </a:tr>
-              <a:tr h="638556">
-                <a:tc>
-                  <a:txBody>
-                    <a:bodyPr/>
-                    <a:lstStyle/>
-                    <a:p>
-                      <a:pPr indent="0" marL="0">
-                        <a:buNone/>
-                      </a:pPr>
-                      <a:r>
-                        <a:rPr lang="en-US" sz="1300" dirty="0">
-                          <a:solidFill>
-                            <a:srgbClr val="1D1D1F"/>
-                          </a:solidFill>
-                          <a:latin typeface="Pretendard SemiBold" pitchFamily="34" charset="0"/>
-                          <a:ea typeface="Pretendard SemiBold" pitchFamily="34" charset="-122"/>
-                          <a:cs typeface="Pretendard SemiBold" pitchFamily="34" charset="-120"/>
-                        </a:rPr>
-                        <a:t>미사일</a:t>
-                      </a:r>
-                      <a:endParaRPr lang="en-US" sz="1300" dirty="0">
-                        <a:latin typeface="Pretendard SemiBold" charset="0"/>
-                        <a:ea typeface="Pretendard SemiBold" charset="0"/>
-                        <a:cs typeface="Pretendard SemiBold" charset="0"/>
-                      </a:endParaRPr>
-                    </a:p>
-                  </a:txBody>
-                  <a:tcPr marL="76200" marR="76200" marT="50800" marB="50800" anchor="ctr">
-                    <a:lnL w="0" cap="flat" cmpd="sng" algn="ctr">
-                      <a:noFill/>
-                    </a:lnL>
-                    <a:lnR w="0" cap="flat" cmpd="sng" algn="ctr">
-                      <a:noFill/>
-                    </a:lnR>
-                    <a:lnT w="0" cap="flat" cmpd="sng" algn="ctr">
-                      <a:noFill/>
-                    </a:lnT>
-                    <a:lnB w="9525" cap="flat" cmpd="sng" algn="ctr">
-                      <a:solidFill>
-                        <a:srgbClr val="E0E0E0"/>
-                      </a:solidFill>
-                      <a:prstDash val="solid"/>
-                      <a:round/>
-                      <a:headEnd type="none" w="med" len="med"/>
-                      <a:tailEnd type="none" w="med" len="med"/>
-                    </a:lnB>
-                    <a:solidFill>
-                      <a:srgbClr val="FFFFFF"/>
-                    </a:solidFill>
-                  </a:tcPr>
-                </a:tc>
-                <a:tc>
-                  <a:txBody>
-                    <a:bodyPr/>
-                    <a:lstStyle/>
-                    <a:p>
-                      <a:pPr indent="0" marL="0">
-                        <a:buNone/>
-                      </a:pPr>
-                      <a:r>
-                        <a:rPr lang="en-US" sz="1300" dirty="0">
-                          <a:solidFill>
-                            <a:srgbClr val="333333"/>
-                          </a:solidFill>
-                          <a:latin typeface="Pretendard" pitchFamily="34" charset="0"/>
-                          <a:ea typeface="Pretendard" pitchFamily="34" charset="-122"/>
-                          <a:cs typeface="Pretendard" pitchFamily="34" charset="-120"/>
-                        </a:rPr>
-                        <a:t>미사일이 장애물 · 닫힌 통로를 무시하고 날아가 건너편 물고기를 먹을 수 있음 (의도인지 미정)</a:t>
-                      </a:r>
-                      <a:endParaRPr lang="en-US" sz="1300" dirty="0">
-                        <a:latin typeface="Pretendard" charset="0"/>
-                        <a:ea typeface="Pretendard" charset="0"/>
-                        <a:cs typeface="Pretendard" charset="0"/>
-                      </a:endParaRPr>
-                    </a:p>
-                  </a:txBody>
-                  <a:tcPr marL="76200" marR="76200" marT="50800" marB="50800" anchor="ctr">
-                    <a:lnL w="0" cap="flat" cmpd="sng" algn="ctr">
-                      <a:noFill/>
-                    </a:lnL>
-                    <a:lnR w="0" cap="flat" cmpd="sng" algn="ctr">
-                      <a:noFill/>
-                    </a:lnR>
-                    <a:lnT w="0" cap="flat" cmpd="sng" algn="ctr">
-                      <a:noFill/>
-                    </a:lnT>
-                    <a:lnB w="9525" cap="flat" cmpd="sng" algn="ctr">
-                      <a:solidFill>
-                        <a:srgbClr val="E0E0E0"/>
-                      </a:solidFill>
-                      <a:prstDash val="solid"/>
-                      <a:round/>
-                      <a:headEnd type="none" w="med" len="med"/>
-                      <a:tailEnd type="none" w="med" len="med"/>
-                    </a:lnB>
-                    <a:solidFill>
-                      <a:srgbClr val="FFFFFF"/>
-                    </a:solidFill>
-                  </a:tcPr>
-                </a:tc>
-                <a:tc>
-                  <a:txBody>
-                    <a:bodyPr/>
-                    <a:lstStyle/>
-                    <a:p>
-                      <a:pPr indent="0" marL="0">
-                        <a:buNone/>
-                      </a:pPr>
-                      <a:r>
-                        <a:rPr lang="en-US" sz="1300" dirty="0">
-                          <a:solidFill>
-                            <a:srgbClr val="333333"/>
-                          </a:solidFill>
-                          <a:latin typeface="Pretendard" pitchFamily="34" charset="0"/>
-                          <a:ea typeface="Pretendard" pitchFamily="34" charset="-122"/>
-                          <a:cs typeface="Pretendard" pitchFamily="34" charset="-120"/>
-                        </a:rPr>
-                        <a:t>R8 — 막히게 결정 · 수정 (사용자 요청)</a:t>
-                      </a:r>
-                      <a:endParaRPr lang="en-US" sz="1300" dirty="0">
-                        <a:latin typeface="Pretendard" charset="0"/>
-                        <a:ea typeface="Pretendard" charset="0"/>
-                        <a:cs typeface="Pretendard" charset="0"/>
-                      </a:endParaRPr>
-                    </a:p>
-                  </a:txBody>
-                  <a:tcPr marL="76200" marR="76200" marT="50800" marB="50800" anchor="ctr">
-                    <a:lnL w="0" cap="flat" cmpd="sng" algn="ctr">
-                      <a:noFill/>
-                    </a:lnL>
-                    <a:lnR w="0" cap="flat" cmpd="sng" algn="ctr">
-                      <a:noFill/>
-                    </a:lnR>
-                    <a:lnT w="0" cap="flat" cmpd="sng" algn="ctr">
-                      <a:noFill/>
-                    </a:lnT>
-                    <a:lnB w="9525" cap="flat" cmpd="sng" algn="ctr">
-                      <a:solidFill>
-                        <a:srgbClr val="E0E0E0"/>
-                      </a:solidFill>
-                      <a:prstDash val="solid"/>
-                      <a:round/>
-                      <a:headEnd type="none" w="med" len="med"/>
-                      <a:tailEnd type="none" w="med" len="med"/>
-                    </a:lnB>
-                    <a:solidFill>
-                      <a:srgbClr val="FFFFFF"/>
-                    </a:solidFill>
-                  </a:tcPr>
-                </a:tc>
-                <a:tc>
-                  <a:txBody>
-                    <a:bodyPr/>
-                    <a:lstStyle/>
-                    <a:p>
-                      <a:pPr algn="ctr" indent="0" marL="0">
-                        <a:buNone/>
-                      </a:pPr>
-                      <a:r>
-                        <a:rPr lang="en-US" sz="1300" dirty="0">
-                          <a:solidFill>
-                            <a:srgbClr val="7A7A7A"/>
-                          </a:solidFill>
-                          <a:latin typeface="Pretendard" pitchFamily="34" charset="0"/>
-                          <a:ea typeface="Pretendard" pitchFamily="34" charset="-122"/>
-                          <a:cs typeface="Pretendard" pitchFamily="34" charset="-120"/>
-                        </a:rPr>
-                        <a:t>해결</a:t>
-                      </a:r>
-                      <a:endParaRPr lang="en-US" sz="1300" dirty="0">
-                        <a:latin typeface="Pretendard" charset="0"/>
-                        <a:ea typeface="Pretendard" charset="0"/>
-                        <a:cs typeface="Pretendard" charset="0"/>
-                      </a:endParaRPr>
-                    </a:p>
-                  </a:txBody>
-                  <a:tcPr marL="76200" marR="76200" marT="50800" marB="50800" anchor="ctr">
-                    <a:lnL w="0" cap="flat" cmpd="sng" algn="ctr">
-                      <a:noFill/>
-                    </a:lnL>
-                    <a:lnR w="0" cap="flat" cmpd="sng" algn="ctr">
-                      <a:noFill/>
-                    </a:lnR>
-                    <a:lnT w="0" cap="flat" cmpd="sng" algn="ctr">
-                      <a:noFill/>
-                    </a:lnT>
-                    <a:lnB w="9525" cap="flat" cmpd="sng" algn="ctr">
-                      <a:solidFill>
-                        <a:srgbClr val="E0E0E0"/>
-                      </a:solidFill>
-                      <a:prstDash val="solid"/>
-                      <a:round/>
-                      <a:headEnd type="none" w="med" len="med"/>
-                      <a:tailEnd type="none" w="med" len="med"/>
-                    </a:lnB>
-                    <a:solidFill>
-                      <a:srgbClr val="FFFFFF"/>
-                    </a:solidFill>
-                  </a:tcPr>
-                </a:tc>
-                <a:tc>
-                  <a:txBody>
-                    <a:bodyPr/>
-                    <a:lstStyle/>
-                    <a:p>
-                      <a:pPr algn="ctr" indent="0" marL="0">
-                        <a:buNone/>
-                      </a:pPr>
-                      <a:r>
-                        <a:rPr lang="en-US" sz="1300" dirty="0">
-                          <a:solidFill>
-                            <a:srgbClr val="7A7A7A"/>
-                          </a:solidFill>
-                          <a:latin typeface="Pretendard" pitchFamily="34" charset="0"/>
-                          <a:ea typeface="Pretendard" pitchFamily="34" charset="-122"/>
-                          <a:cs typeface="Pretendard" pitchFamily="34" charset="-120"/>
-                        </a:rPr>
-                        <a:t>R8</a:t>
-                      </a:r>
-                      <a:endParaRPr lang="en-US" sz="1300" dirty="0">
-                        <a:latin typeface="Pretendard" charset="0"/>
-                        <a:ea typeface="Pretendard" charset="0"/>
-                        <a:cs typeface="Pretendard" charset="0"/>
-                      </a:endParaRPr>
-                    </a:p>
-                  </a:txBody>
-                  <a:tcPr marL="76200" marR="76200" marT="50800" marB="50800" anchor="ctr">
-                    <a:lnL w="0" cap="flat" cmpd="sng" algn="ctr">
-                      <a:noFill/>
-                    </a:lnL>
-                    <a:lnR w="0" cap="flat" cmpd="sng" algn="ctr">
-                      <a:noFill/>
-                    </a:lnR>
-                    <a:lnT w="0" cap="flat" cmpd="sng" algn="ctr">
-                      <a:noFill/>
-                    </a:lnT>
-                    <a:lnB w="9525" cap="flat" cmpd="sng" algn="ctr">
-                      <a:solidFill>
-                        <a:srgbClr val="E0E0E0"/>
-                      </a:solidFill>
-                      <a:prstDash val="solid"/>
-                      <a:round/>
-                      <a:headEnd type="none" w="med" len="med"/>
-                      <a:tailEnd type="none" w="med" len="med"/>
-                    </a:lnB>
-                    <a:solidFill>
-                      <a:srgbClr val="FFFFFF"/>
-                    </a:solidFill>
-                  </a:tcPr>
-                </a:tc>
-              </a:tr>
-              <a:tr h="638556">
-                <a:tc>
-                  <a:txBody>
-                    <a:bodyPr/>
-                    <a:lstStyle/>
-                    <a:p>
-                      <a:pPr indent="0" marL="0">
-                        <a:buNone/>
-                      </a:pPr>
-                      <a:r>
-                        <a:rPr lang="en-US" sz="1300" dirty="0">
-                          <a:solidFill>
-                            <a:srgbClr val="1D1D1F"/>
-                          </a:solidFill>
-                          <a:latin typeface="Pretendard SemiBold" pitchFamily="34" charset="0"/>
-                          <a:ea typeface="Pretendard SemiBold" pitchFamily="34" charset="-122"/>
-                          <a:cs typeface="Pretendard SemiBold" pitchFamily="34" charset="-120"/>
-                        </a:rPr>
-                        <a:t>스킬트리 화면</a:t>
-                      </a:r>
-                      <a:endParaRPr lang="en-US" sz="1300" dirty="0">
-                        <a:latin typeface="Pretendard SemiBold" charset="0"/>
-                        <a:ea typeface="Pretendard SemiBold" charset="0"/>
-                        <a:cs typeface="Pretendard SemiBold" charset="0"/>
-                      </a:endParaRPr>
-                    </a:p>
-                  </a:txBody>
-                  <a:tcPr marL="76200" marR="76200" marT="50800" marB="50800" anchor="ctr">
-                    <a:lnL w="0" cap="flat" cmpd="sng" algn="ctr">
-                      <a:noFill/>
-                    </a:lnL>
-                    <a:lnR w="0" cap="flat" cmpd="sng" algn="ctr">
-                      <a:noFill/>
-                    </a:lnR>
-                    <a:lnT w="0" cap="flat" cmpd="sng" algn="ctr">
-                      <a:noFill/>
-                    </a:lnT>
-                    <a:lnB w="9525" cap="flat" cmpd="sng" algn="ctr">
-                      <a:solidFill>
-                        <a:srgbClr val="E0E0E0"/>
-                      </a:solidFill>
-                      <a:prstDash val="solid"/>
-                      <a:round/>
-                      <a:headEnd type="none" w="med" len="med"/>
-                      <a:tailEnd type="none" w="med" len="med"/>
-                    </a:lnB>
-                    <a:solidFill>
-                      <a:srgbClr val="FFFFFF"/>
-                    </a:solidFill>
-                  </a:tcPr>
-                </a:tc>
-                <a:tc>
-                  <a:txBody>
-                    <a:bodyPr/>
-                    <a:lstStyle/>
-                    <a:p>
-                      <a:pPr indent="0" marL="0">
-                        <a:buNone/>
-                      </a:pPr>
-                      <a:r>
-                        <a:rPr lang="en-US" sz="1300" dirty="0">
-                          <a:solidFill>
-                            <a:srgbClr val="333333"/>
-                          </a:solidFill>
-                          <a:latin typeface="Pretendard" pitchFamily="34" charset="0"/>
-                          <a:ea typeface="Pretendard" pitchFamily="34" charset="-122"/>
-                          <a:cs typeface="Pretendard" pitchFamily="34" charset="-120"/>
-                        </a:rPr>
-                        <a:t>개편한 메인 화면은 Unity가 닫혀 있어 실행 확인 전</a:t>
-                      </a:r>
-                      <a:endParaRPr lang="en-US" sz="1300" dirty="0">
-                        <a:latin typeface="Pretendard" charset="0"/>
-                        <a:ea typeface="Pretendard" charset="0"/>
-                        <a:cs typeface="Pretendard" charset="0"/>
-                      </a:endParaRPr>
-                    </a:p>
-                  </a:txBody>
-                  <a:tcPr marL="76200" marR="76200" marT="50800" marB="50800" anchor="ctr">
-                    <a:lnL w="0" cap="flat" cmpd="sng" algn="ctr">
-                      <a:noFill/>
-                    </a:lnL>
-                    <a:lnR w="0" cap="flat" cmpd="sng" algn="ctr">
-                      <a:noFill/>
-                    </a:lnR>
-                    <a:lnT w="0" cap="flat" cmpd="sng" algn="ctr">
-                      <a:noFill/>
-                    </a:lnT>
-                    <a:lnB w="9525" cap="flat" cmpd="sng" algn="ctr">
-                      <a:solidFill>
-                        <a:srgbClr val="E0E0E0"/>
-                      </a:solidFill>
-                      <a:prstDash val="solid"/>
-                      <a:round/>
-                      <a:headEnd type="none" w="med" len="med"/>
-                      <a:tailEnd type="none" w="med" len="med"/>
-                    </a:lnB>
-                    <a:solidFill>
-                      <a:srgbClr val="FFFFFF"/>
-                    </a:solidFill>
-                  </a:tcPr>
-                </a:tc>
-                <a:tc>
-                  <a:txBody>
-                    <a:bodyPr/>
-                    <a:lstStyle/>
-                    <a:p>
-                      <a:pPr indent="0" marL="0">
-                        <a:buNone/>
-                      </a:pPr>
-                      <a:r>
-                        <a:rPr lang="en-US" sz="1300" dirty="0">
-                          <a:solidFill>
-                            <a:srgbClr val="333333"/>
-                          </a:solidFill>
-                          <a:latin typeface="Pretendard" pitchFamily="34" charset="0"/>
-                          <a:ea typeface="Pretendard" pitchFamily="34" charset="-122"/>
-                          <a:cs typeface="Pretendard" pitchFamily="34" charset="-120"/>
-                        </a:rPr>
-                        <a:t>씬 생성 후 툴팁 위치 · 숨김 · 설정 메뉴 확인</a:t>
-                      </a:r>
-                      <a:endParaRPr lang="en-US" sz="1300" dirty="0">
-                        <a:latin typeface="Pretendard" charset="0"/>
-                        <a:ea typeface="Pretendard" charset="0"/>
-                        <a:cs typeface="Pretendard" charset="0"/>
-                      </a:endParaRPr>
-                    </a:p>
-                  </a:txBody>
-                  <a:tcPr marL="76200" marR="76200" marT="50800" marB="50800" anchor="ctr">
-                    <a:lnL w="0" cap="flat" cmpd="sng" algn="ctr">
-                      <a:noFill/>
-                    </a:lnL>
-                    <a:lnR w="0" cap="flat" cmpd="sng" algn="ctr">
-                      <a:noFill/>
-                    </a:lnR>
-                    <a:lnT w="0" cap="flat" cmpd="sng" algn="ctr">
-                      <a:noFill/>
-                    </a:lnT>
-                    <a:lnB w="9525" cap="flat" cmpd="sng" algn="ctr">
-                      <a:solidFill>
-                        <a:srgbClr val="E0E0E0"/>
-                      </a:solidFill>
-                      <a:prstDash val="solid"/>
-                      <a:round/>
-                      <a:headEnd type="none" w="med" len="med"/>
-                      <a:tailEnd type="none" w="med" len="med"/>
-                    </a:lnB>
-                    <a:solidFill>
-                      <a:srgbClr val="FFFFFF"/>
-                    </a:solidFill>
-                  </a:tcPr>
-                </a:tc>
-                <a:tc>
-                  <a:txBody>
-                    <a:bodyPr/>
-                    <a:lstStyle/>
-                    <a:p>
-                      <a:pPr algn="ctr" indent="0" marL="0">
-                        <a:buNone/>
-                      </a:pPr>
-                      <a:r>
-                        <a:rPr lang="en-US" sz="1300" b="1" dirty="0">
-                          <a:solidFill>
-                            <a:srgbClr val="0066CC"/>
-                          </a:solidFill>
-                          <a:latin typeface="Pretendard SemiBold" pitchFamily="34" charset="0"/>
-                          <a:ea typeface="Pretendard SemiBold" pitchFamily="34" charset="-122"/>
-                          <a:cs typeface="Pretendard SemiBold" pitchFamily="34" charset="-120"/>
-                        </a:rPr>
-                        <a:t>확인 필요</a:t>
-                      </a:r>
-                      <a:endParaRPr lang="en-US" sz="1300" dirty="0">
-                        <a:latin typeface="Pretendard SemiBold" charset="0"/>
-                        <a:ea typeface="Pretendard SemiBold" charset="0"/>
-                        <a:cs typeface="Pretendard SemiBold" charset="0"/>
-                      </a:endParaRPr>
-                    </a:p>
-                  </a:txBody>
-                  <a:tcPr marL="76200" marR="76200" marT="50800" marB="50800" anchor="ctr">
-                    <a:lnL w="0" cap="flat" cmpd="sng" algn="ctr">
-                      <a:noFill/>
-                    </a:lnL>
-                    <a:lnR w="0" cap="flat" cmpd="sng" algn="ctr">
-                      <a:noFill/>
-                    </a:lnR>
-                    <a:lnT w="0" cap="flat" cmpd="sng" algn="ctr">
-                      <a:noFill/>
-                    </a:lnT>
-                    <a:lnB w="9525" cap="flat" cmpd="sng" algn="ctr">
-                      <a:solidFill>
-                        <a:srgbClr val="E0E0E0"/>
-                      </a:solidFill>
-                      <a:prstDash val="solid"/>
-                      <a:round/>
-                      <a:headEnd type="none" w="med" len="med"/>
-                      <a:tailEnd type="none" w="med" len="med"/>
-                    </a:lnB>
-                    <a:solidFill>
-                      <a:srgbClr val="FFFFFF"/>
-                    </a:solidFill>
-                  </a:tcPr>
-                </a:tc>
-                <a:tc>
-                  <a:txBody>
-                    <a:bodyPr/>
-                    <a:lstStyle/>
-                    <a:p>
-                      <a:pPr algn="ctr" indent="0" marL="0">
-                        <a:buNone/>
-                      </a:pPr>
-                      <a:r>
-                        <a:rPr lang="en-US" sz="1300" dirty="0">
-                          <a:solidFill>
-                            <a:srgbClr val="7A7A7A"/>
-                          </a:solidFill>
-                          <a:latin typeface="Pretendard" pitchFamily="34" charset="0"/>
-                          <a:ea typeface="Pretendard" pitchFamily="34" charset="-122"/>
-                          <a:cs typeface="Pretendard" pitchFamily="34" charset="-120"/>
-                        </a:rPr>
-                        <a:t>R9</a:t>
                       </a:r>
                       <a:endParaRPr lang="en-US" sz="1300" dirty="0">
                         <a:latin typeface="Pretendard" charset="0"/>
@@ -32747,7 +34850,7 @@
                 <a:ea typeface="Pretendard" pitchFamily="34" charset="-122"/>
                 <a:cs typeface="Pretendard" pitchFamily="34" charset="-120"/>
               </a:rPr>
-              <a:t>27 / 28</a:t>
+              <a:t>29 / 30</a:t>
             </a:r>
             <a:endParaRPr lang="en-US" sz="1000" dirty="0"/>
           </a:p>
@@ -32761,9 +34864,2046 @@
 </p:sld>
 </file>
 
-<file path=ppt/slides/slide28.xml><?xml version="1.0" encoding="utf-8"?>
+<file path=ppt/slides/slide3.xml><?xml version="1.0" encoding="utf-8"?>
 <p:sld xmlns:a="http://schemas.openxmlformats.org/drawingml/2006/main" xmlns:r="http://schemas.openxmlformats.org/officeDocument/2006/relationships" xmlns:p="http://schemas.openxmlformats.org/presentationml/2006/main">
-  <p:cSld name="Slide 28">
+  <p:cSld name="Slide 3">
+    <p:bg>
+      <p:bgPr>
+        <a:solidFill>
+          <a:srgbClr val="F5F5F7"/>
+        </a:solidFill>
+      </p:bgPr>
+    </p:bg>
+    <p:spTree>
+      <p:nvGrpSpPr>
+        <p:cNvPr id="1" name=""/>
+        <p:cNvGrpSpPr/>
+        <p:nvPr/>
+      </p:nvGrpSpPr>
+      <p:grpSpPr>
+        <a:xfrm>
+          <a:off x="0" y="0"/>
+          <a:ext cx="0" cy="0"/>
+          <a:chOff x="0" y="0"/>
+          <a:chExt cx="0" cy="0"/>
+        </a:xfrm>
+      </p:grpSpPr>
+      <p:sp>
+        <p:nvSpPr>
+          <p:cNvPr id="2" name="Text 0"/>
+          <p:cNvSpPr txBox="1"/>
+          <p:nvPr/>
+        </p:nvSpPr>
+        <p:spPr>
+          <a:xfrm>
+            <a:off x="609905" y="320040"/>
+            <a:ext cx="10972800" cy="228600"/>
+          </a:xfrm>
+          <a:prstGeom prst="rect">
+            <a:avLst/>
+          </a:prstGeom>
+          <a:noFill/>
+          <a:ln/>
+        </p:spPr>
+        <p:txBody>
+          <a:bodyPr wrap="square" lIns="0" tIns="0" rIns="0" bIns="0" rtlCol="0" anchor="t"/>
+          <a:lstStyle/>
+          <a:p>
+            <a:pPr indent="0" marL="0">
+              <a:buNone/>
+            </a:pPr>
+            <a:r>
+              <a:rPr lang="en-US" sz="1100" b="1" spc="200" kern="0" dirty="0">
+                <a:solidFill>
+                  <a:srgbClr val="0066CC"/>
+                </a:solidFill>
+                <a:latin typeface="Pretendard SemiBold" pitchFamily="34" charset="0"/>
+                <a:ea typeface="Pretendard SemiBold" pitchFamily="34" charset="-122"/>
+                <a:cs typeface="Pretendard SemiBold" pitchFamily="34" charset="-120"/>
+              </a:rPr>
+              <a:t>01  OVERVIEW</a:t>
+            </a:r>
+            <a:endParaRPr lang="en-US" sz="1100" dirty="0"/>
+          </a:p>
+        </p:txBody>
+      </p:sp>
+      <p:sp>
+        <p:nvSpPr>
+          <p:cNvPr id="3" name="Text 1"/>
+          <p:cNvSpPr txBox="1"/>
+          <p:nvPr/>
+        </p:nvSpPr>
+        <p:spPr>
+          <a:xfrm>
+            <a:off x="609905" y="594360"/>
+            <a:ext cx="10972800" cy="777240"/>
+          </a:xfrm>
+          <a:prstGeom prst="rect">
+            <a:avLst/>
+          </a:prstGeom>
+          <a:noFill/>
+          <a:ln/>
+        </p:spPr>
+        <p:txBody>
+          <a:bodyPr wrap="square" lIns="0" tIns="0" rIns="0" bIns="0" rtlCol="0" anchor="t"/>
+          <a:lstStyle/>
+          <a:p>
+            <a:pPr indent="0" marL="0">
+              <a:buNone/>
+            </a:pPr>
+            <a:r>
+              <a:rPr lang="en-US" sz="4000" dirty="0">
+                <a:solidFill>
+                  <a:srgbClr val="1D1D1F"/>
+                </a:solidFill>
+                <a:latin typeface="Pretendard SemiBold" pitchFamily="34" charset="0"/>
+                <a:ea typeface="Pretendard SemiBold" pitchFamily="34" charset="-122"/>
+                <a:cs typeface="Pretendard SemiBold" pitchFamily="34" charset="-120"/>
+              </a:rPr>
+              <a:t>회차별 이슈 현황</a:t>
+            </a:r>
+            <a:endParaRPr lang="en-US" sz="4000" dirty="0"/>
+          </a:p>
+        </p:txBody>
+      </p:sp>
+      <p:sp>
+        <p:nvSpPr>
+          <p:cNvPr id="4" name="Shape 2"/>
+          <p:cNvSpPr/>
+          <p:nvPr/>
+        </p:nvSpPr>
+        <p:spPr>
+          <a:xfrm>
+            <a:off x="609905" y="1417320"/>
+            <a:ext cx="10972800" cy="0"/>
+          </a:xfrm>
+          <a:prstGeom prst="line">
+            <a:avLst/>
+          </a:prstGeom>
+          <a:noFill/>
+          <a:ln w="9525">
+            <a:solidFill>
+              <a:srgbClr val="E0E0E0"/>
+            </a:solidFill>
+            <a:prstDash val="solid"/>
+          </a:ln>
+        </p:spPr>
+      </p:sp>
+      <p:graphicFrame>
+        <p:nvGraphicFramePr>
+          <p:cNvPr id="5" name="Chart 0" descr=""/>
+          <p:cNvGraphicFramePr/>
+          <p:nvPr/>
+        </p:nvGraphicFramePr>
+        <p:xfrm>
+          <a:off x="518465" y="1600200"/>
+          <a:ext cx="5669280" cy="4480560"/>
+        </p:xfrm>
+        <a:graphic xmlns:a="http://schemas.openxmlformats.org/drawingml/2006/main">
+          <a:graphicData uri="http://schemas.openxmlformats.org/drawingml/2006/chart">
+            <c:chart xmlns:c="http://schemas.openxmlformats.org/drawingml/2006/chart" r:id="rId1"/>
+          </a:graphicData>
+        </a:graphic>
+      </p:graphicFrame>
+      <p:sp>
+        <p:nvSpPr>
+          <p:cNvPr id="6" name="Shape 3"/>
+          <p:cNvSpPr/>
+          <p:nvPr/>
+        </p:nvSpPr>
+        <p:spPr>
+          <a:xfrm>
+            <a:off x="6279185" y="1600200"/>
+            <a:ext cx="5303520" cy="346558"/>
+          </a:xfrm>
+          <a:prstGeom prst="rect">
+            <a:avLst/>
+          </a:prstGeom>
+          <a:solidFill>
+            <a:srgbClr val="FFFFFF"/>
+          </a:solidFill>
+          <a:ln w="9525">
+            <a:solidFill>
+              <a:srgbClr val="E0E0E0"/>
+            </a:solidFill>
+            <a:prstDash val="solid"/>
+          </a:ln>
+        </p:spPr>
+      </p:sp>
+      <p:sp>
+        <p:nvSpPr>
+          <p:cNvPr id="7" name="Text 4"/>
+          <p:cNvSpPr txBox="1"/>
+          <p:nvPr/>
+        </p:nvSpPr>
+        <p:spPr>
+          <a:xfrm>
+            <a:off x="6553505" y="1691640"/>
+            <a:ext cx="3291840" cy="237744"/>
+          </a:xfrm>
+          <a:prstGeom prst="rect">
+            <a:avLst/>
+          </a:prstGeom>
+          <a:noFill/>
+          <a:ln/>
+        </p:spPr>
+        <p:txBody>
+          <a:bodyPr wrap="square" lIns="0" tIns="0" rIns="0" bIns="0" rtlCol="0" anchor="ctr"/>
+          <a:lstStyle/>
+          <a:p>
+            <a:pPr indent="0" marL="0">
+              <a:buNone/>
+            </a:pPr>
+            <a:r>
+              <a:rPr lang="en-US" sz="1200" b="1" dirty="0">
+                <a:solidFill>
+                  <a:srgbClr val="0066CC"/>
+                </a:solidFill>
+                <a:latin typeface="Pretendard SemiBold" pitchFamily="34" charset="0"/>
+                <a:ea typeface="Pretendard SemiBold" pitchFamily="34" charset="-122"/>
+                <a:cs typeface="Pretendard SemiBold" pitchFamily="34" charset="-120"/>
+              </a:rPr>
+              <a:t>R1  2026-09-22   ·   높음 2 · 중간 4 · 낮음 0</a:t>
+            </a:r>
+            <a:endParaRPr lang="en-US" sz="1200" dirty="0"/>
+          </a:p>
+        </p:txBody>
+      </p:sp>
+      <p:sp>
+        <p:nvSpPr>
+          <p:cNvPr id="8" name="Text 5"/>
+          <p:cNvSpPr txBox="1"/>
+          <p:nvPr/>
+        </p:nvSpPr>
+        <p:spPr>
+          <a:xfrm>
+            <a:off x="6553505" y="1929384"/>
+            <a:ext cx="3291840" cy="384048"/>
+          </a:xfrm>
+          <a:prstGeom prst="rect">
+            <a:avLst/>
+          </a:prstGeom>
+          <a:noFill/>
+          <a:ln/>
+        </p:spPr>
+        <p:txBody>
+          <a:bodyPr wrap="square" lIns="0" tIns="0" rIns="0" bIns="0" rtlCol="0" anchor="ctr"/>
+          <a:lstStyle/>
+          <a:p>
+            <a:pPr indent="0" marL="0">
+              <a:buNone/>
+            </a:pPr>
+            <a:r>
+              <a:rPr lang="en-US" sz="1800" dirty="0">
+                <a:solidFill>
+                  <a:srgbClr val="1D1D1F"/>
+                </a:solidFill>
+                <a:latin typeface="Pretendard SemiBold" pitchFamily="34" charset="0"/>
+                <a:ea typeface="Pretendard SemiBold" pitchFamily="34" charset="-122"/>
+                <a:cs typeface="Pretendard SemiBold" pitchFamily="34" charset="-120"/>
+              </a:rPr>
+              <a:t>크기 상한 · 풀트리 밸런스</a:t>
+            </a:r>
+            <a:endParaRPr lang="en-US" sz="1800" dirty="0"/>
+          </a:p>
+        </p:txBody>
+      </p:sp>
+      <p:sp>
+        <p:nvSpPr>
+          <p:cNvPr id="9" name="Text 6"/>
+          <p:cNvSpPr txBox="1"/>
+          <p:nvPr/>
+        </p:nvSpPr>
+        <p:spPr>
+          <a:xfrm>
+            <a:off x="9936785" y="1499159"/>
+            <a:ext cx="1371600" cy="411480"/>
+          </a:xfrm>
+          <a:prstGeom prst="rect">
+            <a:avLst/>
+          </a:prstGeom>
+          <a:noFill/>
+          <a:ln/>
+        </p:spPr>
+        <p:txBody>
+          <a:bodyPr wrap="square" lIns="0" tIns="0" rIns="0" bIns="0" rtlCol="0" anchor="ctr"/>
+          <a:lstStyle/>
+          <a:p>
+            <a:pPr algn="r" indent="0" marL="0">
+              <a:buNone/>
+            </a:pPr>
+            <a:r>
+              <a:rPr lang="en-US" sz="2400" dirty="0">
+                <a:solidFill>
+                  <a:srgbClr val="1D1D1F"/>
+                </a:solidFill>
+                <a:latin typeface="Pretendard SemiBold" pitchFamily="34" charset="0"/>
+                <a:ea typeface="Pretendard SemiBold" pitchFamily="34" charset="-122"/>
+                <a:cs typeface="Pretendard SemiBold" pitchFamily="34" charset="-120"/>
+              </a:rPr>
+              <a:t>6/6</a:t>
+            </a:r>
+            <a:endParaRPr lang="en-US" sz="2400" dirty="0"/>
+          </a:p>
+        </p:txBody>
+      </p:sp>
+      <p:sp>
+        <p:nvSpPr>
+          <p:cNvPr id="10" name="Text 7"/>
+          <p:cNvSpPr txBox="1"/>
+          <p:nvPr/>
+        </p:nvSpPr>
+        <p:spPr>
+          <a:xfrm>
+            <a:off x="9936785" y="1901495"/>
+            <a:ext cx="1371600" cy="201168"/>
+          </a:xfrm>
+          <a:prstGeom prst="rect">
+            <a:avLst/>
+          </a:prstGeom>
+          <a:noFill/>
+          <a:ln/>
+        </p:spPr>
+        <p:txBody>
+          <a:bodyPr wrap="square" lIns="0" tIns="0" rIns="0" bIns="0" rtlCol="0" anchor="ctr"/>
+          <a:lstStyle/>
+          <a:p>
+            <a:pPr algn="r" indent="0" marL="0">
+              <a:buNone/>
+            </a:pPr>
+            <a:r>
+              <a:rPr lang="en-US" sz="1100" dirty="0">
+                <a:solidFill>
+                  <a:srgbClr val="7A7A7A"/>
+                </a:solidFill>
+                <a:latin typeface="Pretendard" pitchFamily="34" charset="0"/>
+                <a:ea typeface="Pretendard" pitchFamily="34" charset="-122"/>
+                <a:cs typeface="Pretendard" pitchFamily="34" charset="-120"/>
+              </a:rPr>
+              <a:t>수정</a:t>
+            </a:r>
+            <a:endParaRPr lang="en-US" sz="1100" dirty="0"/>
+          </a:p>
+        </p:txBody>
+      </p:sp>
+      <p:sp>
+        <p:nvSpPr>
+          <p:cNvPr id="11" name="Shape 8"/>
+          <p:cNvSpPr/>
+          <p:nvPr/>
+        </p:nvSpPr>
+        <p:spPr>
+          <a:xfrm>
+            <a:off x="6279185" y="2074774"/>
+            <a:ext cx="5303520" cy="346558"/>
+          </a:xfrm>
+          <a:prstGeom prst="rect">
+            <a:avLst/>
+          </a:prstGeom>
+          <a:solidFill>
+            <a:srgbClr val="FFFFFF"/>
+          </a:solidFill>
+          <a:ln w="9525">
+            <a:solidFill>
+              <a:srgbClr val="E0E0E0"/>
+            </a:solidFill>
+            <a:prstDash val="solid"/>
+          </a:ln>
+        </p:spPr>
+      </p:sp>
+      <p:sp>
+        <p:nvSpPr>
+          <p:cNvPr id="12" name="Text 9"/>
+          <p:cNvSpPr txBox="1"/>
+          <p:nvPr/>
+        </p:nvSpPr>
+        <p:spPr>
+          <a:xfrm>
+            <a:off x="6553505" y="2166214"/>
+            <a:ext cx="3291840" cy="237744"/>
+          </a:xfrm>
+          <a:prstGeom prst="rect">
+            <a:avLst/>
+          </a:prstGeom>
+          <a:noFill/>
+          <a:ln/>
+        </p:spPr>
+        <p:txBody>
+          <a:bodyPr wrap="square" lIns="0" tIns="0" rIns="0" bIns="0" rtlCol="0" anchor="ctr"/>
+          <a:lstStyle/>
+          <a:p>
+            <a:pPr indent="0" marL="0">
+              <a:buNone/>
+            </a:pPr>
+            <a:r>
+              <a:rPr lang="en-US" sz="1200" b="1" dirty="0">
+                <a:solidFill>
+                  <a:srgbClr val="0066CC"/>
+                </a:solidFill>
+                <a:latin typeface="Pretendard SemiBold" pitchFamily="34" charset="0"/>
+                <a:ea typeface="Pretendard SemiBold" pitchFamily="34" charset="-122"/>
+                <a:cs typeface="Pretendard SemiBold" pitchFamily="34" charset="-120"/>
+              </a:rPr>
+              <a:t>R2  2026-09-22   ·   높음 4 · 중간 8 · 낮음 2</a:t>
+            </a:r>
+            <a:endParaRPr lang="en-US" sz="1200" dirty="0"/>
+          </a:p>
+        </p:txBody>
+      </p:sp>
+      <p:sp>
+        <p:nvSpPr>
+          <p:cNvPr id="13" name="Text 10"/>
+          <p:cNvSpPr txBox="1"/>
+          <p:nvPr/>
+        </p:nvSpPr>
+        <p:spPr>
+          <a:xfrm>
+            <a:off x="6553505" y="2403958"/>
+            <a:ext cx="3291840" cy="384048"/>
+          </a:xfrm>
+          <a:prstGeom prst="rect">
+            <a:avLst/>
+          </a:prstGeom>
+          <a:noFill/>
+          <a:ln/>
+        </p:spPr>
+        <p:txBody>
+          <a:bodyPr wrap="square" lIns="0" tIns="0" rIns="0" bIns="0" rtlCol="0" anchor="ctr"/>
+          <a:lstStyle/>
+          <a:p>
+            <a:pPr indent="0" marL="0">
+              <a:buNone/>
+            </a:pPr>
+            <a:r>
+              <a:rPr lang="en-US" sz="1800" dirty="0">
+                <a:solidFill>
+                  <a:srgbClr val="1D1D1F"/>
+                </a:solidFill>
+                <a:latin typeface="Pretendard SemiBold" pitchFamily="34" charset="0"/>
+                <a:ea typeface="Pretendard SemiBold" pitchFamily="34" charset="-122"/>
+                <a:cs typeface="Pretendard SemiBold" pitchFamily="34" charset="-120"/>
+              </a:rPr>
+              <a:t>1차 전체 QA</a:t>
+            </a:r>
+            <a:endParaRPr lang="en-US" sz="1800" dirty="0"/>
+          </a:p>
+        </p:txBody>
+      </p:sp>
+      <p:sp>
+        <p:nvSpPr>
+          <p:cNvPr id="14" name="Text 11"/>
+          <p:cNvSpPr txBox="1"/>
+          <p:nvPr/>
+        </p:nvSpPr>
+        <p:spPr>
+          <a:xfrm>
+            <a:off x="9936785" y="1973732"/>
+            <a:ext cx="1371600" cy="411480"/>
+          </a:xfrm>
+          <a:prstGeom prst="rect">
+            <a:avLst/>
+          </a:prstGeom>
+          <a:noFill/>
+          <a:ln/>
+        </p:spPr>
+        <p:txBody>
+          <a:bodyPr wrap="square" lIns="0" tIns="0" rIns="0" bIns="0" rtlCol="0" anchor="ctr"/>
+          <a:lstStyle/>
+          <a:p>
+            <a:pPr algn="r" indent="0" marL="0">
+              <a:buNone/>
+            </a:pPr>
+            <a:r>
+              <a:rPr lang="en-US" sz="2400" dirty="0">
+                <a:solidFill>
+                  <a:srgbClr val="1D1D1F"/>
+                </a:solidFill>
+                <a:latin typeface="Pretendard SemiBold" pitchFamily="34" charset="0"/>
+                <a:ea typeface="Pretendard SemiBold" pitchFamily="34" charset="-122"/>
+                <a:cs typeface="Pretendard SemiBold" pitchFamily="34" charset="-120"/>
+              </a:rPr>
+              <a:t>14/14</a:t>
+            </a:r>
+            <a:endParaRPr lang="en-US" sz="2400" dirty="0"/>
+          </a:p>
+        </p:txBody>
+      </p:sp>
+      <p:sp>
+        <p:nvSpPr>
+          <p:cNvPr id="15" name="Text 12"/>
+          <p:cNvSpPr txBox="1"/>
+          <p:nvPr/>
+        </p:nvSpPr>
+        <p:spPr>
+          <a:xfrm>
+            <a:off x="9936785" y="2376068"/>
+            <a:ext cx="1371600" cy="201168"/>
+          </a:xfrm>
+          <a:prstGeom prst="rect">
+            <a:avLst/>
+          </a:prstGeom>
+          <a:noFill/>
+          <a:ln/>
+        </p:spPr>
+        <p:txBody>
+          <a:bodyPr wrap="square" lIns="0" tIns="0" rIns="0" bIns="0" rtlCol="0" anchor="ctr"/>
+          <a:lstStyle/>
+          <a:p>
+            <a:pPr algn="r" indent="0" marL="0">
+              <a:buNone/>
+            </a:pPr>
+            <a:r>
+              <a:rPr lang="en-US" sz="1100" dirty="0">
+                <a:solidFill>
+                  <a:srgbClr val="7A7A7A"/>
+                </a:solidFill>
+                <a:latin typeface="Pretendard" pitchFamily="34" charset="0"/>
+                <a:ea typeface="Pretendard" pitchFamily="34" charset="-122"/>
+                <a:cs typeface="Pretendard" pitchFamily="34" charset="-120"/>
+              </a:rPr>
+              <a:t>수정</a:t>
+            </a:r>
+            <a:endParaRPr lang="en-US" sz="1100" dirty="0"/>
+          </a:p>
+        </p:txBody>
+      </p:sp>
+      <p:sp>
+        <p:nvSpPr>
+          <p:cNvPr id="16" name="Shape 13"/>
+          <p:cNvSpPr/>
+          <p:nvPr/>
+        </p:nvSpPr>
+        <p:spPr>
+          <a:xfrm>
+            <a:off x="6279185" y="2549347"/>
+            <a:ext cx="5303520" cy="346558"/>
+          </a:xfrm>
+          <a:prstGeom prst="rect">
+            <a:avLst/>
+          </a:prstGeom>
+          <a:solidFill>
+            <a:srgbClr val="FFFFFF"/>
+          </a:solidFill>
+          <a:ln w="9525">
+            <a:solidFill>
+              <a:srgbClr val="E0E0E0"/>
+            </a:solidFill>
+            <a:prstDash val="solid"/>
+          </a:ln>
+        </p:spPr>
+      </p:sp>
+      <p:sp>
+        <p:nvSpPr>
+          <p:cNvPr id="17" name="Text 14"/>
+          <p:cNvSpPr txBox="1"/>
+          <p:nvPr/>
+        </p:nvSpPr>
+        <p:spPr>
+          <a:xfrm>
+            <a:off x="6553505" y="2640787"/>
+            <a:ext cx="3291840" cy="237744"/>
+          </a:xfrm>
+          <a:prstGeom prst="rect">
+            <a:avLst/>
+          </a:prstGeom>
+          <a:noFill/>
+          <a:ln/>
+        </p:spPr>
+        <p:txBody>
+          <a:bodyPr wrap="square" lIns="0" tIns="0" rIns="0" bIns="0" rtlCol="0" anchor="ctr"/>
+          <a:lstStyle/>
+          <a:p>
+            <a:pPr indent="0" marL="0">
+              <a:buNone/>
+            </a:pPr>
+            <a:r>
+              <a:rPr lang="en-US" sz="1200" b="1" dirty="0">
+                <a:solidFill>
+                  <a:srgbClr val="0066CC"/>
+                </a:solidFill>
+                <a:latin typeface="Pretendard SemiBold" pitchFamily="34" charset="0"/>
+                <a:ea typeface="Pretendard SemiBold" pitchFamily="34" charset="-122"/>
+                <a:cs typeface="Pretendard SemiBold" pitchFamily="34" charset="-120"/>
+              </a:rPr>
+              <a:t>R3  2026-09-24   ·   높음 1 · 중간 3 · 낮음 3</a:t>
+            </a:r>
+            <a:endParaRPr lang="en-US" sz="1200" dirty="0"/>
+          </a:p>
+        </p:txBody>
+      </p:sp>
+      <p:sp>
+        <p:nvSpPr>
+          <p:cNvPr id="18" name="Text 15"/>
+          <p:cNvSpPr txBox="1"/>
+          <p:nvPr/>
+        </p:nvSpPr>
+        <p:spPr>
+          <a:xfrm>
+            <a:off x="6553505" y="2878531"/>
+            <a:ext cx="3291840" cy="384048"/>
+          </a:xfrm>
+          <a:prstGeom prst="rect">
+            <a:avLst/>
+          </a:prstGeom>
+          <a:noFill/>
+          <a:ln/>
+        </p:spPr>
+        <p:txBody>
+          <a:bodyPr wrap="square" lIns="0" tIns="0" rIns="0" bIns="0" rtlCol="0" anchor="ctr"/>
+          <a:lstStyle/>
+          <a:p>
+            <a:pPr indent="0" marL="0">
+              <a:buNone/>
+            </a:pPr>
+            <a:r>
+              <a:rPr lang="en-US" sz="1800" dirty="0">
+                <a:solidFill>
+                  <a:srgbClr val="1D1D1F"/>
+                </a:solidFill>
+                <a:latin typeface="Pretendard SemiBold" pitchFamily="34" charset="0"/>
+                <a:ea typeface="Pretendard SemiBold" pitchFamily="34" charset="-122"/>
+                <a:cs typeface="Pretendard SemiBold" pitchFamily="34" charset="-120"/>
+              </a:rPr>
+              <a:t>스킬트리 도면형 개편 리뷰</a:t>
+            </a:r>
+            <a:endParaRPr lang="en-US" sz="1800" dirty="0"/>
+          </a:p>
+        </p:txBody>
+      </p:sp>
+      <p:sp>
+        <p:nvSpPr>
+          <p:cNvPr id="19" name="Text 16"/>
+          <p:cNvSpPr txBox="1"/>
+          <p:nvPr/>
+        </p:nvSpPr>
+        <p:spPr>
+          <a:xfrm>
+            <a:off x="9936785" y="2448306"/>
+            <a:ext cx="1371600" cy="411480"/>
+          </a:xfrm>
+          <a:prstGeom prst="rect">
+            <a:avLst/>
+          </a:prstGeom>
+          <a:noFill/>
+          <a:ln/>
+        </p:spPr>
+        <p:txBody>
+          <a:bodyPr wrap="square" lIns="0" tIns="0" rIns="0" bIns="0" rtlCol="0" anchor="ctr"/>
+          <a:lstStyle/>
+          <a:p>
+            <a:pPr algn="r" indent="0" marL="0">
+              <a:buNone/>
+            </a:pPr>
+            <a:r>
+              <a:rPr lang="en-US" sz="2400" dirty="0">
+                <a:solidFill>
+                  <a:srgbClr val="1D1D1F"/>
+                </a:solidFill>
+                <a:latin typeface="Pretendard SemiBold" pitchFamily="34" charset="0"/>
+                <a:ea typeface="Pretendard SemiBold" pitchFamily="34" charset="-122"/>
+                <a:cs typeface="Pretendard SemiBold" pitchFamily="34" charset="-120"/>
+              </a:rPr>
+              <a:t>7/7</a:t>
+            </a:r>
+            <a:endParaRPr lang="en-US" sz="2400" dirty="0"/>
+          </a:p>
+        </p:txBody>
+      </p:sp>
+      <p:sp>
+        <p:nvSpPr>
+          <p:cNvPr id="20" name="Text 17"/>
+          <p:cNvSpPr txBox="1"/>
+          <p:nvPr/>
+        </p:nvSpPr>
+        <p:spPr>
+          <a:xfrm>
+            <a:off x="9936785" y="2850642"/>
+            <a:ext cx="1371600" cy="201168"/>
+          </a:xfrm>
+          <a:prstGeom prst="rect">
+            <a:avLst/>
+          </a:prstGeom>
+          <a:noFill/>
+          <a:ln/>
+        </p:spPr>
+        <p:txBody>
+          <a:bodyPr wrap="square" lIns="0" tIns="0" rIns="0" bIns="0" rtlCol="0" anchor="ctr"/>
+          <a:lstStyle/>
+          <a:p>
+            <a:pPr algn="r" indent="0" marL="0">
+              <a:buNone/>
+            </a:pPr>
+            <a:r>
+              <a:rPr lang="en-US" sz="1100" dirty="0">
+                <a:solidFill>
+                  <a:srgbClr val="7A7A7A"/>
+                </a:solidFill>
+                <a:latin typeface="Pretendard" pitchFamily="34" charset="0"/>
+                <a:ea typeface="Pretendard" pitchFamily="34" charset="-122"/>
+                <a:cs typeface="Pretendard" pitchFamily="34" charset="-120"/>
+              </a:rPr>
+              <a:t>수정</a:t>
+            </a:r>
+            <a:endParaRPr lang="en-US" sz="1100" dirty="0"/>
+          </a:p>
+        </p:txBody>
+      </p:sp>
+      <p:sp>
+        <p:nvSpPr>
+          <p:cNvPr id="21" name="Shape 18"/>
+          <p:cNvSpPr/>
+          <p:nvPr/>
+        </p:nvSpPr>
+        <p:spPr>
+          <a:xfrm>
+            <a:off x="6279185" y="3023921"/>
+            <a:ext cx="5303520" cy="346558"/>
+          </a:xfrm>
+          <a:prstGeom prst="rect">
+            <a:avLst/>
+          </a:prstGeom>
+          <a:solidFill>
+            <a:srgbClr val="FFFFFF"/>
+          </a:solidFill>
+          <a:ln w="9525">
+            <a:solidFill>
+              <a:srgbClr val="E0E0E0"/>
+            </a:solidFill>
+            <a:prstDash val="solid"/>
+          </a:ln>
+        </p:spPr>
+      </p:sp>
+      <p:sp>
+        <p:nvSpPr>
+          <p:cNvPr id="22" name="Text 19"/>
+          <p:cNvSpPr txBox="1"/>
+          <p:nvPr/>
+        </p:nvSpPr>
+        <p:spPr>
+          <a:xfrm>
+            <a:off x="6553505" y="3115361"/>
+            <a:ext cx="3291840" cy="237744"/>
+          </a:xfrm>
+          <a:prstGeom prst="rect">
+            <a:avLst/>
+          </a:prstGeom>
+          <a:noFill/>
+          <a:ln/>
+        </p:spPr>
+        <p:txBody>
+          <a:bodyPr wrap="square" lIns="0" tIns="0" rIns="0" bIns="0" rtlCol="0" anchor="ctr"/>
+          <a:lstStyle/>
+          <a:p>
+            <a:pPr indent="0" marL="0">
+              <a:buNone/>
+            </a:pPr>
+            <a:r>
+              <a:rPr lang="en-US" sz="1200" b="1" dirty="0">
+                <a:solidFill>
+                  <a:srgbClr val="0066CC"/>
+                </a:solidFill>
+                <a:latin typeface="Pretendard SemiBold" pitchFamily="34" charset="0"/>
+                <a:ea typeface="Pretendard SemiBold" pitchFamily="34" charset="-122"/>
+                <a:cs typeface="Pretendard SemiBold" pitchFamily="34" charset="-120"/>
+              </a:rPr>
+              <a:t>R4  2026-09-24   ·   높음 3 · 중간 6 · 낮음 2</a:t>
+            </a:r>
+            <a:endParaRPr lang="en-US" sz="1200" dirty="0"/>
+          </a:p>
+        </p:txBody>
+      </p:sp>
+      <p:sp>
+        <p:nvSpPr>
+          <p:cNvPr id="23" name="Text 20"/>
+          <p:cNvSpPr txBox="1"/>
+          <p:nvPr/>
+        </p:nvSpPr>
+        <p:spPr>
+          <a:xfrm>
+            <a:off x="6553505" y="3353105"/>
+            <a:ext cx="3291840" cy="384048"/>
+          </a:xfrm>
+          <a:prstGeom prst="rect">
+            <a:avLst/>
+          </a:prstGeom>
+          <a:noFill/>
+          <a:ln/>
+        </p:spPr>
+        <p:txBody>
+          <a:bodyPr wrap="square" lIns="0" tIns="0" rIns="0" bIns="0" rtlCol="0" anchor="ctr"/>
+          <a:lstStyle/>
+          <a:p>
+            <a:pPr indent="0" marL="0">
+              <a:buNone/>
+            </a:pPr>
+            <a:r>
+              <a:rPr lang="en-US" sz="1800" dirty="0">
+                <a:solidFill>
+                  <a:srgbClr val="1D1D1F"/>
+                </a:solidFill>
+                <a:latin typeface="Pretendard SemiBold" pitchFamily="34" charset="0"/>
+                <a:ea typeface="Pretendard SemiBold" pitchFamily="34" charset="-122"/>
+                <a:cs typeface="Pretendard SemiBold" pitchFamily="34" charset="-120"/>
+              </a:rPr>
+              <a:t>2차 · 인게임 밸런스와 QA</a:t>
+            </a:r>
+            <a:endParaRPr lang="en-US" sz="1800" dirty="0"/>
+          </a:p>
+        </p:txBody>
+      </p:sp>
+      <p:sp>
+        <p:nvSpPr>
+          <p:cNvPr id="24" name="Text 21"/>
+          <p:cNvSpPr txBox="1"/>
+          <p:nvPr/>
+        </p:nvSpPr>
+        <p:spPr>
+          <a:xfrm>
+            <a:off x="9936785" y="2922880"/>
+            <a:ext cx="1371600" cy="411480"/>
+          </a:xfrm>
+          <a:prstGeom prst="rect">
+            <a:avLst/>
+          </a:prstGeom>
+          <a:noFill/>
+          <a:ln/>
+        </p:spPr>
+        <p:txBody>
+          <a:bodyPr wrap="square" lIns="0" tIns="0" rIns="0" bIns="0" rtlCol="0" anchor="ctr"/>
+          <a:lstStyle/>
+          <a:p>
+            <a:pPr algn="r" indent="0" marL="0">
+              <a:buNone/>
+            </a:pPr>
+            <a:r>
+              <a:rPr lang="en-US" sz="2400" dirty="0">
+                <a:solidFill>
+                  <a:srgbClr val="1D1D1F"/>
+                </a:solidFill>
+                <a:latin typeface="Pretendard SemiBold" pitchFamily="34" charset="0"/>
+                <a:ea typeface="Pretendard SemiBold" pitchFamily="34" charset="-122"/>
+                <a:cs typeface="Pretendard SemiBold" pitchFamily="34" charset="-120"/>
+              </a:rPr>
+              <a:t>11/11</a:t>
+            </a:r>
+            <a:endParaRPr lang="en-US" sz="2400" dirty="0"/>
+          </a:p>
+        </p:txBody>
+      </p:sp>
+      <p:sp>
+        <p:nvSpPr>
+          <p:cNvPr id="25" name="Text 22"/>
+          <p:cNvSpPr txBox="1"/>
+          <p:nvPr/>
+        </p:nvSpPr>
+        <p:spPr>
+          <a:xfrm>
+            <a:off x="9936785" y="3325216"/>
+            <a:ext cx="1371600" cy="201168"/>
+          </a:xfrm>
+          <a:prstGeom prst="rect">
+            <a:avLst/>
+          </a:prstGeom>
+          <a:noFill/>
+          <a:ln/>
+        </p:spPr>
+        <p:txBody>
+          <a:bodyPr wrap="square" lIns="0" tIns="0" rIns="0" bIns="0" rtlCol="0" anchor="ctr"/>
+          <a:lstStyle/>
+          <a:p>
+            <a:pPr algn="r" indent="0" marL="0">
+              <a:buNone/>
+            </a:pPr>
+            <a:r>
+              <a:rPr lang="en-US" sz="1100" dirty="0">
+                <a:solidFill>
+                  <a:srgbClr val="7A7A7A"/>
+                </a:solidFill>
+                <a:latin typeface="Pretendard" pitchFamily="34" charset="0"/>
+                <a:ea typeface="Pretendard" pitchFamily="34" charset="-122"/>
+                <a:cs typeface="Pretendard" pitchFamily="34" charset="-120"/>
+              </a:rPr>
+              <a:t>수정</a:t>
+            </a:r>
+            <a:endParaRPr lang="en-US" sz="1100" dirty="0"/>
+          </a:p>
+        </p:txBody>
+      </p:sp>
+      <p:sp>
+        <p:nvSpPr>
+          <p:cNvPr id="26" name="Shape 23"/>
+          <p:cNvSpPr/>
+          <p:nvPr/>
+        </p:nvSpPr>
+        <p:spPr>
+          <a:xfrm>
+            <a:off x="6279185" y="3498494"/>
+            <a:ext cx="5303520" cy="346558"/>
+          </a:xfrm>
+          <a:prstGeom prst="rect">
+            <a:avLst/>
+          </a:prstGeom>
+          <a:solidFill>
+            <a:srgbClr val="FFFFFF"/>
+          </a:solidFill>
+          <a:ln w="9525">
+            <a:solidFill>
+              <a:srgbClr val="E0E0E0"/>
+            </a:solidFill>
+            <a:prstDash val="solid"/>
+          </a:ln>
+        </p:spPr>
+      </p:sp>
+      <p:sp>
+        <p:nvSpPr>
+          <p:cNvPr id="27" name="Text 24"/>
+          <p:cNvSpPr txBox="1"/>
+          <p:nvPr/>
+        </p:nvSpPr>
+        <p:spPr>
+          <a:xfrm>
+            <a:off x="6553505" y="3589934"/>
+            <a:ext cx="3291840" cy="237744"/>
+          </a:xfrm>
+          <a:prstGeom prst="rect">
+            <a:avLst/>
+          </a:prstGeom>
+          <a:noFill/>
+          <a:ln/>
+        </p:spPr>
+        <p:txBody>
+          <a:bodyPr wrap="square" lIns="0" tIns="0" rIns="0" bIns="0" rtlCol="0" anchor="ctr"/>
+          <a:lstStyle/>
+          <a:p>
+            <a:pPr indent="0" marL="0">
+              <a:buNone/>
+            </a:pPr>
+            <a:r>
+              <a:rPr lang="en-US" sz="1200" b="1" dirty="0">
+                <a:solidFill>
+                  <a:srgbClr val="0066CC"/>
+                </a:solidFill>
+                <a:latin typeface="Pretendard SemiBold" pitchFamily="34" charset="0"/>
+                <a:ea typeface="Pretendard SemiBold" pitchFamily="34" charset="-122"/>
+                <a:cs typeface="Pretendard SemiBold" pitchFamily="34" charset="-120"/>
+              </a:rPr>
+              <a:t>R5  2026-09-24   ·   높음 0 · 중간 3 · 낮음 3</a:t>
+            </a:r>
+            <a:endParaRPr lang="en-US" sz="1200" dirty="0"/>
+          </a:p>
+        </p:txBody>
+      </p:sp>
+      <p:sp>
+        <p:nvSpPr>
+          <p:cNvPr id="28" name="Text 25"/>
+          <p:cNvSpPr txBox="1"/>
+          <p:nvPr/>
+        </p:nvSpPr>
+        <p:spPr>
+          <a:xfrm>
+            <a:off x="6553505" y="3827678"/>
+            <a:ext cx="3291840" cy="384048"/>
+          </a:xfrm>
+          <a:prstGeom prst="rect">
+            <a:avLst/>
+          </a:prstGeom>
+          <a:noFill/>
+          <a:ln/>
+        </p:spPr>
+        <p:txBody>
+          <a:bodyPr wrap="square" lIns="0" tIns="0" rIns="0" bIns="0" rtlCol="0" anchor="ctr"/>
+          <a:lstStyle/>
+          <a:p>
+            <a:pPr indent="0" marL="0">
+              <a:buNone/>
+            </a:pPr>
+            <a:r>
+              <a:rPr lang="en-US" sz="1800" dirty="0">
+                <a:solidFill>
+                  <a:srgbClr val="1D1D1F"/>
+                </a:solidFill>
+                <a:latin typeface="Pretendard SemiBold" pitchFamily="34" charset="0"/>
+                <a:ea typeface="Pretendard SemiBold" pitchFamily="34" charset="-122"/>
+                <a:cs typeface="Pretendard SemiBold" pitchFamily="34" charset="-120"/>
+              </a:rPr>
+              <a:t>타이틀 · 설정 화면 추가 리뷰</a:t>
+            </a:r>
+            <a:endParaRPr lang="en-US" sz="1800" dirty="0"/>
+          </a:p>
+        </p:txBody>
+      </p:sp>
+      <p:sp>
+        <p:nvSpPr>
+          <p:cNvPr id="29" name="Text 26"/>
+          <p:cNvSpPr txBox="1"/>
+          <p:nvPr/>
+        </p:nvSpPr>
+        <p:spPr>
+          <a:xfrm>
+            <a:off x="9936785" y="3397453"/>
+            <a:ext cx="1371600" cy="411480"/>
+          </a:xfrm>
+          <a:prstGeom prst="rect">
+            <a:avLst/>
+          </a:prstGeom>
+          <a:noFill/>
+          <a:ln/>
+        </p:spPr>
+        <p:txBody>
+          <a:bodyPr wrap="square" lIns="0" tIns="0" rIns="0" bIns="0" rtlCol="0" anchor="ctr"/>
+          <a:lstStyle/>
+          <a:p>
+            <a:pPr algn="r" indent="0" marL="0">
+              <a:buNone/>
+            </a:pPr>
+            <a:r>
+              <a:rPr lang="en-US" sz="2400" dirty="0">
+                <a:solidFill>
+                  <a:srgbClr val="1D1D1F"/>
+                </a:solidFill>
+                <a:latin typeface="Pretendard SemiBold" pitchFamily="34" charset="0"/>
+                <a:ea typeface="Pretendard SemiBold" pitchFamily="34" charset="-122"/>
+                <a:cs typeface="Pretendard SemiBold" pitchFamily="34" charset="-120"/>
+              </a:rPr>
+              <a:t>6/6</a:t>
+            </a:r>
+            <a:endParaRPr lang="en-US" sz="2400" dirty="0"/>
+          </a:p>
+        </p:txBody>
+      </p:sp>
+      <p:sp>
+        <p:nvSpPr>
+          <p:cNvPr id="30" name="Text 27"/>
+          <p:cNvSpPr txBox="1"/>
+          <p:nvPr/>
+        </p:nvSpPr>
+        <p:spPr>
+          <a:xfrm>
+            <a:off x="9936785" y="3799789"/>
+            <a:ext cx="1371600" cy="201168"/>
+          </a:xfrm>
+          <a:prstGeom prst="rect">
+            <a:avLst/>
+          </a:prstGeom>
+          <a:noFill/>
+          <a:ln/>
+        </p:spPr>
+        <p:txBody>
+          <a:bodyPr wrap="square" lIns="0" tIns="0" rIns="0" bIns="0" rtlCol="0" anchor="ctr"/>
+          <a:lstStyle/>
+          <a:p>
+            <a:pPr algn="r" indent="0" marL="0">
+              <a:buNone/>
+            </a:pPr>
+            <a:r>
+              <a:rPr lang="en-US" sz="1100" dirty="0">
+                <a:solidFill>
+                  <a:srgbClr val="7A7A7A"/>
+                </a:solidFill>
+                <a:latin typeface="Pretendard" pitchFamily="34" charset="0"/>
+                <a:ea typeface="Pretendard" pitchFamily="34" charset="-122"/>
+                <a:cs typeface="Pretendard" pitchFamily="34" charset="-120"/>
+              </a:rPr>
+              <a:t>수정</a:t>
+            </a:r>
+            <a:endParaRPr lang="en-US" sz="1100" dirty="0"/>
+          </a:p>
+        </p:txBody>
+      </p:sp>
+      <p:sp>
+        <p:nvSpPr>
+          <p:cNvPr id="31" name="Shape 28"/>
+          <p:cNvSpPr/>
+          <p:nvPr/>
+        </p:nvSpPr>
+        <p:spPr>
+          <a:xfrm>
+            <a:off x="6279185" y="3973068"/>
+            <a:ext cx="5303520" cy="346558"/>
+          </a:xfrm>
+          <a:prstGeom prst="rect">
+            <a:avLst/>
+          </a:prstGeom>
+          <a:solidFill>
+            <a:srgbClr val="FFFFFF"/>
+          </a:solidFill>
+          <a:ln w="9525">
+            <a:solidFill>
+              <a:srgbClr val="E0E0E0"/>
+            </a:solidFill>
+            <a:prstDash val="solid"/>
+          </a:ln>
+        </p:spPr>
+      </p:sp>
+      <p:sp>
+        <p:nvSpPr>
+          <p:cNvPr id="32" name="Text 29"/>
+          <p:cNvSpPr txBox="1"/>
+          <p:nvPr/>
+        </p:nvSpPr>
+        <p:spPr>
+          <a:xfrm>
+            <a:off x="6553505" y="4064508"/>
+            <a:ext cx="3291840" cy="237744"/>
+          </a:xfrm>
+          <a:prstGeom prst="rect">
+            <a:avLst/>
+          </a:prstGeom>
+          <a:noFill/>
+          <a:ln/>
+        </p:spPr>
+        <p:txBody>
+          <a:bodyPr wrap="square" lIns="0" tIns="0" rIns="0" bIns="0" rtlCol="0" anchor="ctr"/>
+          <a:lstStyle/>
+          <a:p>
+            <a:pPr indent="0" marL="0">
+              <a:buNone/>
+            </a:pPr>
+            <a:r>
+              <a:rPr lang="en-US" sz="1200" b="1" dirty="0">
+                <a:solidFill>
+                  <a:srgbClr val="0066CC"/>
+                </a:solidFill>
+                <a:latin typeface="Pretendard SemiBold" pitchFamily="34" charset="0"/>
+                <a:ea typeface="Pretendard SemiBold" pitchFamily="34" charset="-122"/>
+                <a:cs typeface="Pretendard SemiBold" pitchFamily="34" charset="-120"/>
+              </a:rPr>
+              <a:t>R6  2026-09-24   ·   높음 1 · 중간 3 · 낮음 3</a:t>
+            </a:r>
+            <a:endParaRPr lang="en-US" sz="1200" dirty="0"/>
+          </a:p>
+        </p:txBody>
+      </p:sp>
+      <p:sp>
+        <p:nvSpPr>
+          <p:cNvPr id="33" name="Text 30"/>
+          <p:cNvSpPr txBox="1"/>
+          <p:nvPr/>
+        </p:nvSpPr>
+        <p:spPr>
+          <a:xfrm>
+            <a:off x="6553505" y="4302252"/>
+            <a:ext cx="3291840" cy="384048"/>
+          </a:xfrm>
+          <a:prstGeom prst="rect">
+            <a:avLst/>
+          </a:prstGeom>
+          <a:noFill/>
+          <a:ln/>
+        </p:spPr>
+        <p:txBody>
+          <a:bodyPr wrap="square" lIns="0" tIns="0" rIns="0" bIns="0" rtlCol="0" anchor="ctr"/>
+          <a:lstStyle/>
+          <a:p>
+            <a:pPr indent="0" marL="0">
+              <a:buNone/>
+            </a:pPr>
+            <a:r>
+              <a:rPr lang="en-US" sz="1800" dirty="0">
+                <a:solidFill>
+                  <a:srgbClr val="1D1D1F"/>
+                </a:solidFill>
+                <a:latin typeface="Pretendard SemiBold" pitchFamily="34" charset="0"/>
+                <a:ea typeface="Pretendard SemiBold" pitchFamily="34" charset="-122"/>
+                <a:cs typeface="Pretendard SemiBold" pitchFamily="34" charset="-120"/>
+              </a:rPr>
+              <a:t>에디터 실행 테스트</a:t>
+            </a:r>
+            <a:endParaRPr lang="en-US" sz="1800" dirty="0"/>
+          </a:p>
+        </p:txBody>
+      </p:sp>
+      <p:sp>
+        <p:nvSpPr>
+          <p:cNvPr id="34" name="Text 31"/>
+          <p:cNvSpPr txBox="1"/>
+          <p:nvPr/>
+        </p:nvSpPr>
+        <p:spPr>
+          <a:xfrm>
+            <a:off x="9936785" y="3872027"/>
+            <a:ext cx="1371600" cy="411480"/>
+          </a:xfrm>
+          <a:prstGeom prst="rect">
+            <a:avLst/>
+          </a:prstGeom>
+          <a:noFill/>
+          <a:ln/>
+        </p:spPr>
+        <p:txBody>
+          <a:bodyPr wrap="square" lIns="0" tIns="0" rIns="0" bIns="0" rtlCol="0" anchor="ctr"/>
+          <a:lstStyle/>
+          <a:p>
+            <a:pPr algn="r" indent="0" marL="0">
+              <a:buNone/>
+            </a:pPr>
+            <a:r>
+              <a:rPr lang="en-US" sz="2400" dirty="0">
+                <a:solidFill>
+                  <a:srgbClr val="1D1D1F"/>
+                </a:solidFill>
+                <a:latin typeface="Pretendard SemiBold" pitchFamily="34" charset="0"/>
+                <a:ea typeface="Pretendard SemiBold" pitchFamily="34" charset="-122"/>
+                <a:cs typeface="Pretendard SemiBold" pitchFamily="34" charset="-120"/>
+              </a:rPr>
+              <a:t>7/7</a:t>
+            </a:r>
+            <a:endParaRPr lang="en-US" sz="2400" dirty="0"/>
+          </a:p>
+        </p:txBody>
+      </p:sp>
+      <p:sp>
+        <p:nvSpPr>
+          <p:cNvPr id="35" name="Text 32"/>
+          <p:cNvSpPr txBox="1"/>
+          <p:nvPr/>
+        </p:nvSpPr>
+        <p:spPr>
+          <a:xfrm>
+            <a:off x="9936785" y="4274363"/>
+            <a:ext cx="1371600" cy="201168"/>
+          </a:xfrm>
+          <a:prstGeom prst="rect">
+            <a:avLst/>
+          </a:prstGeom>
+          <a:noFill/>
+          <a:ln/>
+        </p:spPr>
+        <p:txBody>
+          <a:bodyPr wrap="square" lIns="0" tIns="0" rIns="0" bIns="0" rtlCol="0" anchor="ctr"/>
+          <a:lstStyle/>
+          <a:p>
+            <a:pPr algn="r" indent="0" marL="0">
+              <a:buNone/>
+            </a:pPr>
+            <a:r>
+              <a:rPr lang="en-US" sz="1100" dirty="0">
+                <a:solidFill>
+                  <a:srgbClr val="7A7A7A"/>
+                </a:solidFill>
+                <a:latin typeface="Pretendard" pitchFamily="34" charset="0"/>
+                <a:ea typeface="Pretendard" pitchFamily="34" charset="-122"/>
+                <a:cs typeface="Pretendard" pitchFamily="34" charset="-120"/>
+              </a:rPr>
+              <a:t>수정</a:t>
+            </a:r>
+            <a:endParaRPr lang="en-US" sz="1100" dirty="0"/>
+          </a:p>
+        </p:txBody>
+      </p:sp>
+      <p:sp>
+        <p:nvSpPr>
+          <p:cNvPr id="36" name="Shape 33"/>
+          <p:cNvSpPr/>
+          <p:nvPr/>
+        </p:nvSpPr>
+        <p:spPr>
+          <a:xfrm>
+            <a:off x="6279185" y="4447642"/>
+            <a:ext cx="5303520" cy="346558"/>
+          </a:xfrm>
+          <a:prstGeom prst="rect">
+            <a:avLst/>
+          </a:prstGeom>
+          <a:solidFill>
+            <a:srgbClr val="FFFFFF"/>
+          </a:solidFill>
+          <a:ln w="9525">
+            <a:solidFill>
+              <a:srgbClr val="E0E0E0"/>
+            </a:solidFill>
+            <a:prstDash val="solid"/>
+          </a:ln>
+        </p:spPr>
+      </p:sp>
+      <p:sp>
+        <p:nvSpPr>
+          <p:cNvPr id="37" name="Text 34"/>
+          <p:cNvSpPr txBox="1"/>
+          <p:nvPr/>
+        </p:nvSpPr>
+        <p:spPr>
+          <a:xfrm>
+            <a:off x="6553505" y="4539082"/>
+            <a:ext cx="3291840" cy="237744"/>
+          </a:xfrm>
+          <a:prstGeom prst="rect">
+            <a:avLst/>
+          </a:prstGeom>
+          <a:noFill/>
+          <a:ln/>
+        </p:spPr>
+        <p:txBody>
+          <a:bodyPr wrap="square" lIns="0" tIns="0" rIns="0" bIns="0" rtlCol="0" anchor="ctr"/>
+          <a:lstStyle/>
+          <a:p>
+            <a:pPr indent="0" marL="0">
+              <a:buNone/>
+            </a:pPr>
+            <a:r>
+              <a:rPr lang="en-US" sz="1200" b="1" dirty="0">
+                <a:solidFill>
+                  <a:srgbClr val="0066CC"/>
+                </a:solidFill>
+                <a:latin typeface="Pretendard SemiBold" pitchFamily="34" charset="0"/>
+                <a:ea typeface="Pretendard SemiBold" pitchFamily="34" charset="-122"/>
+                <a:cs typeface="Pretendard SemiBold" pitchFamily="34" charset="-120"/>
+              </a:rPr>
+              <a:t>R7  2026-09-25   ·   높음 1 · 중간 1 · 낮음 1</a:t>
+            </a:r>
+            <a:endParaRPr lang="en-US" sz="1200" dirty="0"/>
+          </a:p>
+        </p:txBody>
+      </p:sp>
+      <p:sp>
+        <p:nvSpPr>
+          <p:cNvPr id="38" name="Text 35"/>
+          <p:cNvSpPr txBox="1"/>
+          <p:nvPr/>
+        </p:nvSpPr>
+        <p:spPr>
+          <a:xfrm>
+            <a:off x="6553505" y="4776826"/>
+            <a:ext cx="3291840" cy="384048"/>
+          </a:xfrm>
+          <a:prstGeom prst="rect">
+            <a:avLst/>
+          </a:prstGeom>
+          <a:noFill/>
+          <a:ln/>
+        </p:spPr>
+        <p:txBody>
+          <a:bodyPr wrap="square" lIns="0" tIns="0" rIns="0" bIns="0" rtlCol="0" anchor="ctr"/>
+          <a:lstStyle/>
+          <a:p>
+            <a:pPr indent="0" marL="0">
+              <a:buNone/>
+            </a:pPr>
+            <a:r>
+              <a:rPr lang="en-US" sz="1800" dirty="0">
+                <a:solidFill>
+                  <a:srgbClr val="1D1D1F"/>
+                </a:solidFill>
+                <a:latin typeface="Pretendard SemiBold" pitchFamily="34" charset="0"/>
+                <a:ea typeface="Pretendard SemiBold" pitchFamily="34" charset="-122"/>
+                <a:cs typeface="Pretendard SemiBold" pitchFamily="34" charset="-120"/>
+              </a:rPr>
+              <a:t>장애물 통과 · 인게임 배경</a:t>
+            </a:r>
+            <a:endParaRPr lang="en-US" sz="1800" dirty="0"/>
+          </a:p>
+        </p:txBody>
+      </p:sp>
+      <p:sp>
+        <p:nvSpPr>
+          <p:cNvPr id="39" name="Text 36"/>
+          <p:cNvSpPr txBox="1"/>
+          <p:nvPr/>
+        </p:nvSpPr>
+        <p:spPr>
+          <a:xfrm>
+            <a:off x="9936785" y="4346600"/>
+            <a:ext cx="1371600" cy="411480"/>
+          </a:xfrm>
+          <a:prstGeom prst="rect">
+            <a:avLst/>
+          </a:prstGeom>
+          <a:noFill/>
+          <a:ln/>
+        </p:spPr>
+        <p:txBody>
+          <a:bodyPr wrap="square" lIns="0" tIns="0" rIns="0" bIns="0" rtlCol="0" anchor="ctr"/>
+          <a:lstStyle/>
+          <a:p>
+            <a:pPr algn="r" indent="0" marL="0">
+              <a:buNone/>
+            </a:pPr>
+            <a:r>
+              <a:rPr lang="en-US" sz="2400" dirty="0">
+                <a:solidFill>
+                  <a:srgbClr val="1D1D1F"/>
+                </a:solidFill>
+                <a:latin typeface="Pretendard SemiBold" pitchFamily="34" charset="0"/>
+                <a:ea typeface="Pretendard SemiBold" pitchFamily="34" charset="-122"/>
+                <a:cs typeface="Pretendard SemiBold" pitchFamily="34" charset="-120"/>
+              </a:rPr>
+              <a:t>3/3</a:t>
+            </a:r>
+            <a:endParaRPr lang="en-US" sz="2400" dirty="0"/>
+          </a:p>
+        </p:txBody>
+      </p:sp>
+      <p:sp>
+        <p:nvSpPr>
+          <p:cNvPr id="40" name="Text 37"/>
+          <p:cNvSpPr txBox="1"/>
+          <p:nvPr/>
+        </p:nvSpPr>
+        <p:spPr>
+          <a:xfrm>
+            <a:off x="9936785" y="4748936"/>
+            <a:ext cx="1371600" cy="201168"/>
+          </a:xfrm>
+          <a:prstGeom prst="rect">
+            <a:avLst/>
+          </a:prstGeom>
+          <a:noFill/>
+          <a:ln/>
+        </p:spPr>
+        <p:txBody>
+          <a:bodyPr wrap="square" lIns="0" tIns="0" rIns="0" bIns="0" rtlCol="0" anchor="ctr"/>
+          <a:lstStyle/>
+          <a:p>
+            <a:pPr algn="r" indent="0" marL="0">
+              <a:buNone/>
+            </a:pPr>
+            <a:r>
+              <a:rPr lang="en-US" sz="1100" dirty="0">
+                <a:solidFill>
+                  <a:srgbClr val="7A7A7A"/>
+                </a:solidFill>
+                <a:latin typeface="Pretendard" pitchFamily="34" charset="0"/>
+                <a:ea typeface="Pretendard" pitchFamily="34" charset="-122"/>
+                <a:cs typeface="Pretendard" pitchFamily="34" charset="-120"/>
+              </a:rPr>
+              <a:t>수정</a:t>
+            </a:r>
+            <a:endParaRPr lang="en-US" sz="1100" dirty="0"/>
+          </a:p>
+        </p:txBody>
+      </p:sp>
+      <p:sp>
+        <p:nvSpPr>
+          <p:cNvPr id="41" name="Shape 38"/>
+          <p:cNvSpPr/>
+          <p:nvPr/>
+        </p:nvSpPr>
+        <p:spPr>
+          <a:xfrm>
+            <a:off x="6279185" y="4922215"/>
+            <a:ext cx="5303520" cy="346558"/>
+          </a:xfrm>
+          <a:prstGeom prst="rect">
+            <a:avLst/>
+          </a:prstGeom>
+          <a:solidFill>
+            <a:srgbClr val="FFFFFF"/>
+          </a:solidFill>
+          <a:ln w="9525">
+            <a:solidFill>
+              <a:srgbClr val="E0E0E0"/>
+            </a:solidFill>
+            <a:prstDash val="solid"/>
+          </a:ln>
+        </p:spPr>
+      </p:sp>
+      <p:sp>
+        <p:nvSpPr>
+          <p:cNvPr id="42" name="Text 39"/>
+          <p:cNvSpPr txBox="1"/>
+          <p:nvPr/>
+        </p:nvSpPr>
+        <p:spPr>
+          <a:xfrm>
+            <a:off x="6553505" y="5013655"/>
+            <a:ext cx="3291840" cy="237744"/>
+          </a:xfrm>
+          <a:prstGeom prst="rect">
+            <a:avLst/>
+          </a:prstGeom>
+          <a:noFill/>
+          <a:ln/>
+        </p:spPr>
+        <p:txBody>
+          <a:bodyPr wrap="square" lIns="0" tIns="0" rIns="0" bIns="0" rtlCol="0" anchor="ctr"/>
+          <a:lstStyle/>
+          <a:p>
+            <a:pPr indent="0" marL="0">
+              <a:buNone/>
+            </a:pPr>
+            <a:r>
+              <a:rPr lang="en-US" sz="1200" b="1" dirty="0">
+                <a:solidFill>
+                  <a:srgbClr val="0066CC"/>
+                </a:solidFill>
+                <a:latin typeface="Pretendard SemiBold" pitchFamily="34" charset="0"/>
+                <a:ea typeface="Pretendard SemiBold" pitchFamily="34" charset="-122"/>
+                <a:cs typeface="Pretendard SemiBold" pitchFamily="34" charset="-120"/>
+              </a:rPr>
+              <a:t>R8  2026-09-25   ·   높음 0 · 중간 3 · 낮음 4</a:t>
+            </a:r>
+            <a:endParaRPr lang="en-US" sz="1200" dirty="0"/>
+          </a:p>
+        </p:txBody>
+      </p:sp>
+      <p:sp>
+        <p:nvSpPr>
+          <p:cNvPr id="43" name="Text 40"/>
+          <p:cNvSpPr txBox="1"/>
+          <p:nvPr/>
+        </p:nvSpPr>
+        <p:spPr>
+          <a:xfrm>
+            <a:off x="6553505" y="5251399"/>
+            <a:ext cx="3291840" cy="384048"/>
+          </a:xfrm>
+          <a:prstGeom prst="rect">
+            <a:avLst/>
+          </a:prstGeom>
+          <a:noFill/>
+          <a:ln/>
+        </p:spPr>
+        <p:txBody>
+          <a:bodyPr wrap="square" lIns="0" tIns="0" rIns="0" bIns="0" rtlCol="0" anchor="ctr"/>
+          <a:lstStyle/>
+          <a:p>
+            <a:pPr indent="0" marL="0">
+              <a:buNone/>
+            </a:pPr>
+            <a:r>
+              <a:rPr lang="en-US" sz="1800" dirty="0">
+                <a:solidFill>
+                  <a:srgbClr val="1D1D1F"/>
+                </a:solidFill>
+                <a:latin typeface="Pretendard SemiBold" pitchFamily="34" charset="0"/>
+                <a:ea typeface="Pretendard SemiBold" pitchFamily="34" charset="-122"/>
+                <a:cs typeface="Pretendard SemiBold" pitchFamily="34" charset="-120"/>
+              </a:rPr>
+              <a:t>3차 버그 점검</a:t>
+            </a:r>
+            <a:endParaRPr lang="en-US" sz="1800" dirty="0"/>
+          </a:p>
+        </p:txBody>
+      </p:sp>
+      <p:sp>
+        <p:nvSpPr>
+          <p:cNvPr id="44" name="Text 41"/>
+          <p:cNvSpPr txBox="1"/>
+          <p:nvPr/>
+        </p:nvSpPr>
+        <p:spPr>
+          <a:xfrm>
+            <a:off x="9936785" y="4821174"/>
+            <a:ext cx="1371600" cy="411480"/>
+          </a:xfrm>
+          <a:prstGeom prst="rect">
+            <a:avLst/>
+          </a:prstGeom>
+          <a:noFill/>
+          <a:ln/>
+        </p:spPr>
+        <p:txBody>
+          <a:bodyPr wrap="square" lIns="0" tIns="0" rIns="0" bIns="0" rtlCol="0" anchor="ctr"/>
+          <a:lstStyle/>
+          <a:p>
+            <a:pPr algn="r" indent="0" marL="0">
+              <a:buNone/>
+            </a:pPr>
+            <a:r>
+              <a:rPr lang="en-US" sz="2400" dirty="0">
+                <a:solidFill>
+                  <a:srgbClr val="1D1D1F"/>
+                </a:solidFill>
+                <a:latin typeface="Pretendard SemiBold" pitchFamily="34" charset="0"/>
+                <a:ea typeface="Pretendard SemiBold" pitchFamily="34" charset="-122"/>
+                <a:cs typeface="Pretendard SemiBold" pitchFamily="34" charset="-120"/>
+              </a:rPr>
+              <a:t>7/7</a:t>
+            </a:r>
+            <a:endParaRPr lang="en-US" sz="2400" dirty="0"/>
+          </a:p>
+        </p:txBody>
+      </p:sp>
+      <p:sp>
+        <p:nvSpPr>
+          <p:cNvPr id="45" name="Text 42"/>
+          <p:cNvSpPr txBox="1"/>
+          <p:nvPr/>
+        </p:nvSpPr>
+        <p:spPr>
+          <a:xfrm>
+            <a:off x="9936785" y="5223510"/>
+            <a:ext cx="1371600" cy="201168"/>
+          </a:xfrm>
+          <a:prstGeom prst="rect">
+            <a:avLst/>
+          </a:prstGeom>
+          <a:noFill/>
+          <a:ln/>
+        </p:spPr>
+        <p:txBody>
+          <a:bodyPr wrap="square" lIns="0" tIns="0" rIns="0" bIns="0" rtlCol="0" anchor="ctr"/>
+          <a:lstStyle/>
+          <a:p>
+            <a:pPr algn="r" indent="0" marL="0">
+              <a:buNone/>
+            </a:pPr>
+            <a:r>
+              <a:rPr lang="en-US" sz="1100" dirty="0">
+                <a:solidFill>
+                  <a:srgbClr val="7A7A7A"/>
+                </a:solidFill>
+                <a:latin typeface="Pretendard" pitchFamily="34" charset="0"/>
+                <a:ea typeface="Pretendard" pitchFamily="34" charset="-122"/>
+                <a:cs typeface="Pretendard" pitchFamily="34" charset="-120"/>
+              </a:rPr>
+              <a:t>수정</a:t>
+            </a:r>
+            <a:endParaRPr lang="en-US" sz="1100" dirty="0"/>
+          </a:p>
+        </p:txBody>
+      </p:sp>
+      <p:sp>
+        <p:nvSpPr>
+          <p:cNvPr id="46" name="Shape 43"/>
+          <p:cNvSpPr/>
+          <p:nvPr/>
+        </p:nvSpPr>
+        <p:spPr>
+          <a:xfrm>
+            <a:off x="6279185" y="5396789"/>
+            <a:ext cx="5303520" cy="346558"/>
+          </a:xfrm>
+          <a:prstGeom prst="rect">
+            <a:avLst/>
+          </a:prstGeom>
+          <a:solidFill>
+            <a:srgbClr val="FFFFFF"/>
+          </a:solidFill>
+          <a:ln w="9525">
+            <a:solidFill>
+              <a:srgbClr val="E0E0E0"/>
+            </a:solidFill>
+            <a:prstDash val="solid"/>
+          </a:ln>
+        </p:spPr>
+      </p:sp>
+      <p:sp>
+        <p:nvSpPr>
+          <p:cNvPr id="47" name="Text 44"/>
+          <p:cNvSpPr txBox="1"/>
+          <p:nvPr/>
+        </p:nvSpPr>
+        <p:spPr>
+          <a:xfrm>
+            <a:off x="6553505" y="5488229"/>
+            <a:ext cx="3291840" cy="237744"/>
+          </a:xfrm>
+          <a:prstGeom prst="rect">
+            <a:avLst/>
+          </a:prstGeom>
+          <a:noFill/>
+          <a:ln/>
+        </p:spPr>
+        <p:txBody>
+          <a:bodyPr wrap="square" lIns="0" tIns="0" rIns="0" bIns="0" rtlCol="0" anchor="ctr"/>
+          <a:lstStyle/>
+          <a:p>
+            <a:pPr indent="0" marL="0">
+              <a:buNone/>
+            </a:pPr>
+            <a:r>
+              <a:rPr lang="en-US" sz="1200" b="1" dirty="0">
+                <a:solidFill>
+                  <a:srgbClr val="0066CC"/>
+                </a:solidFill>
+                <a:latin typeface="Pretendard SemiBold" pitchFamily="34" charset="0"/>
+                <a:ea typeface="Pretendard SemiBold" pitchFamily="34" charset="-122"/>
+                <a:cs typeface="Pretendard SemiBold" pitchFamily="34" charset="-120"/>
+              </a:rPr>
+              <a:t>R9  2026-09-29   ·   높음 1 · 중간 2 · 낮음 2</a:t>
+            </a:r>
+            <a:endParaRPr lang="en-US" sz="1200" dirty="0"/>
+          </a:p>
+        </p:txBody>
+      </p:sp>
+      <p:sp>
+        <p:nvSpPr>
+          <p:cNvPr id="48" name="Text 45"/>
+          <p:cNvSpPr txBox="1"/>
+          <p:nvPr/>
+        </p:nvSpPr>
+        <p:spPr>
+          <a:xfrm>
+            <a:off x="6553505" y="5725973"/>
+            <a:ext cx="3291840" cy="384048"/>
+          </a:xfrm>
+          <a:prstGeom prst="rect">
+            <a:avLst/>
+          </a:prstGeom>
+          <a:noFill/>
+          <a:ln/>
+        </p:spPr>
+        <p:txBody>
+          <a:bodyPr wrap="square" lIns="0" tIns="0" rIns="0" bIns="0" rtlCol="0" anchor="ctr"/>
+          <a:lstStyle/>
+          <a:p>
+            <a:pPr indent="0" marL="0">
+              <a:buNone/>
+            </a:pPr>
+            <a:r>
+              <a:rPr lang="en-US" sz="1800" dirty="0">
+                <a:solidFill>
+                  <a:srgbClr val="1D1D1F"/>
+                </a:solidFill>
+                <a:latin typeface="Pretendard SemiBold" pitchFamily="34" charset="0"/>
+                <a:ea typeface="Pretendard SemiBold" pitchFamily="34" charset="-122"/>
+                <a:cs typeface="Pretendard SemiBold" pitchFamily="34" charset="-120"/>
+              </a:rPr>
+              <a:t>스킬트리 메인 화면 개편 · 칸별 고정 가격</a:t>
+            </a:r>
+            <a:endParaRPr lang="en-US" sz="1800" dirty="0"/>
+          </a:p>
+        </p:txBody>
+      </p:sp>
+      <p:sp>
+        <p:nvSpPr>
+          <p:cNvPr id="49" name="Text 46"/>
+          <p:cNvSpPr txBox="1"/>
+          <p:nvPr/>
+        </p:nvSpPr>
+        <p:spPr>
+          <a:xfrm>
+            <a:off x="9936785" y="5295748"/>
+            <a:ext cx="1371600" cy="411480"/>
+          </a:xfrm>
+          <a:prstGeom prst="rect">
+            <a:avLst/>
+          </a:prstGeom>
+          <a:noFill/>
+          <a:ln/>
+        </p:spPr>
+        <p:txBody>
+          <a:bodyPr wrap="square" lIns="0" tIns="0" rIns="0" bIns="0" rtlCol="0" anchor="ctr"/>
+          <a:lstStyle/>
+          <a:p>
+            <a:pPr algn="r" indent="0" marL="0">
+              <a:buNone/>
+            </a:pPr>
+            <a:r>
+              <a:rPr lang="en-US" sz="2400" dirty="0">
+                <a:solidFill>
+                  <a:srgbClr val="1D1D1F"/>
+                </a:solidFill>
+                <a:latin typeface="Pretendard SemiBold" pitchFamily="34" charset="0"/>
+                <a:ea typeface="Pretendard SemiBold" pitchFamily="34" charset="-122"/>
+                <a:cs typeface="Pretendard SemiBold" pitchFamily="34" charset="-120"/>
+              </a:rPr>
+              <a:t>5/5</a:t>
+            </a:r>
+            <a:endParaRPr lang="en-US" sz="2400" dirty="0"/>
+          </a:p>
+        </p:txBody>
+      </p:sp>
+      <p:sp>
+        <p:nvSpPr>
+          <p:cNvPr id="50" name="Text 47"/>
+          <p:cNvSpPr txBox="1"/>
+          <p:nvPr/>
+        </p:nvSpPr>
+        <p:spPr>
+          <a:xfrm>
+            <a:off x="9936785" y="5698084"/>
+            <a:ext cx="1371600" cy="201168"/>
+          </a:xfrm>
+          <a:prstGeom prst="rect">
+            <a:avLst/>
+          </a:prstGeom>
+          <a:noFill/>
+          <a:ln/>
+        </p:spPr>
+        <p:txBody>
+          <a:bodyPr wrap="square" lIns="0" tIns="0" rIns="0" bIns="0" rtlCol="0" anchor="ctr"/>
+          <a:lstStyle/>
+          <a:p>
+            <a:pPr algn="r" indent="0" marL="0">
+              <a:buNone/>
+            </a:pPr>
+            <a:r>
+              <a:rPr lang="en-US" sz="1100" dirty="0">
+                <a:solidFill>
+                  <a:srgbClr val="7A7A7A"/>
+                </a:solidFill>
+                <a:latin typeface="Pretendard" pitchFamily="34" charset="0"/>
+                <a:ea typeface="Pretendard" pitchFamily="34" charset="-122"/>
+                <a:cs typeface="Pretendard" pitchFamily="34" charset="-120"/>
+              </a:rPr>
+              <a:t>수정</a:t>
+            </a:r>
+            <a:endParaRPr lang="en-US" sz="1100" dirty="0"/>
+          </a:p>
+        </p:txBody>
+      </p:sp>
+      <p:sp>
+        <p:nvSpPr>
+          <p:cNvPr id="51" name="Shape 48"/>
+          <p:cNvSpPr/>
+          <p:nvPr/>
+        </p:nvSpPr>
+        <p:spPr>
+          <a:xfrm>
+            <a:off x="6279185" y="5871362"/>
+            <a:ext cx="5303520" cy="346558"/>
+          </a:xfrm>
+          <a:prstGeom prst="rect">
+            <a:avLst/>
+          </a:prstGeom>
+          <a:solidFill>
+            <a:srgbClr val="FFFFFF"/>
+          </a:solidFill>
+          <a:ln w="9525">
+            <a:solidFill>
+              <a:srgbClr val="E0E0E0"/>
+            </a:solidFill>
+            <a:prstDash val="solid"/>
+          </a:ln>
+        </p:spPr>
+      </p:sp>
+      <p:sp>
+        <p:nvSpPr>
+          <p:cNvPr id="52" name="Text 49"/>
+          <p:cNvSpPr txBox="1"/>
+          <p:nvPr/>
+        </p:nvSpPr>
+        <p:spPr>
+          <a:xfrm>
+            <a:off x="6553505" y="5962802"/>
+            <a:ext cx="3291840" cy="237744"/>
+          </a:xfrm>
+          <a:prstGeom prst="rect">
+            <a:avLst/>
+          </a:prstGeom>
+          <a:noFill/>
+          <a:ln/>
+        </p:spPr>
+        <p:txBody>
+          <a:bodyPr wrap="square" lIns="0" tIns="0" rIns="0" bIns="0" rtlCol="0" anchor="ctr"/>
+          <a:lstStyle/>
+          <a:p>
+            <a:pPr indent="0" marL="0">
+              <a:buNone/>
+            </a:pPr>
+            <a:r>
+              <a:rPr lang="en-US" sz="1200" b="1" dirty="0">
+                <a:solidFill>
+                  <a:srgbClr val="0066CC"/>
+                </a:solidFill>
+                <a:latin typeface="Pretendard SemiBold" pitchFamily="34" charset="0"/>
+                <a:ea typeface="Pretendard SemiBold" pitchFamily="34" charset="-122"/>
+                <a:cs typeface="Pretendard SemiBold" pitchFamily="34" charset="-120"/>
+              </a:rPr>
+              <a:t>R10  2026-10-05   ·   높음 2 · 중간 2 · 낮음 0</a:t>
+            </a:r>
+            <a:endParaRPr lang="en-US" sz="1200" dirty="0"/>
+          </a:p>
+        </p:txBody>
+      </p:sp>
+      <p:sp>
+        <p:nvSpPr>
+          <p:cNvPr id="53" name="Text 50"/>
+          <p:cNvSpPr txBox="1"/>
+          <p:nvPr/>
+        </p:nvSpPr>
+        <p:spPr>
+          <a:xfrm>
+            <a:off x="6553505" y="6200546"/>
+            <a:ext cx="3291840" cy="384048"/>
+          </a:xfrm>
+          <a:prstGeom prst="rect">
+            <a:avLst/>
+          </a:prstGeom>
+          <a:noFill/>
+          <a:ln/>
+        </p:spPr>
+        <p:txBody>
+          <a:bodyPr wrap="square" lIns="0" tIns="0" rIns="0" bIns="0" rtlCol="0" anchor="ctr"/>
+          <a:lstStyle/>
+          <a:p>
+            <a:pPr indent="0" marL="0">
+              <a:buNone/>
+            </a:pPr>
+            <a:r>
+              <a:rPr lang="en-US" sz="1800" dirty="0">
+                <a:solidFill>
+                  <a:srgbClr val="1D1D1F"/>
+                </a:solidFill>
+                <a:latin typeface="Pretendard SemiBold" pitchFamily="34" charset="0"/>
+                <a:ea typeface="Pretendard SemiBold" pitchFamily="34" charset="-122"/>
+                <a:cs typeface="Pretendard SemiBold" pitchFamily="34" charset="-120"/>
+              </a:rPr>
+              <a:t>플레이 시간 표기 · 포식 가시성 · 노가다 완화</a:t>
+            </a:r>
+            <a:endParaRPr lang="en-US" sz="1800" dirty="0"/>
+          </a:p>
+        </p:txBody>
+      </p:sp>
+      <p:sp>
+        <p:nvSpPr>
+          <p:cNvPr id="54" name="Text 51"/>
+          <p:cNvSpPr txBox="1"/>
+          <p:nvPr/>
+        </p:nvSpPr>
+        <p:spPr>
+          <a:xfrm>
+            <a:off x="9936785" y="5770321"/>
+            <a:ext cx="1371600" cy="411480"/>
+          </a:xfrm>
+          <a:prstGeom prst="rect">
+            <a:avLst/>
+          </a:prstGeom>
+          <a:noFill/>
+          <a:ln/>
+        </p:spPr>
+        <p:txBody>
+          <a:bodyPr wrap="square" lIns="0" tIns="0" rIns="0" bIns="0" rtlCol="0" anchor="ctr"/>
+          <a:lstStyle/>
+          <a:p>
+            <a:pPr algn="r" indent="0" marL="0">
+              <a:buNone/>
+            </a:pPr>
+            <a:r>
+              <a:rPr lang="en-US" sz="2400" dirty="0">
+                <a:solidFill>
+                  <a:srgbClr val="1D1D1F"/>
+                </a:solidFill>
+                <a:latin typeface="Pretendard SemiBold" pitchFamily="34" charset="0"/>
+                <a:ea typeface="Pretendard SemiBold" pitchFamily="34" charset="-122"/>
+                <a:cs typeface="Pretendard SemiBold" pitchFamily="34" charset="-120"/>
+              </a:rPr>
+              <a:t>4/4</a:t>
+            </a:r>
+            <a:endParaRPr lang="en-US" sz="2400" dirty="0"/>
+          </a:p>
+        </p:txBody>
+      </p:sp>
+      <p:sp>
+        <p:nvSpPr>
+          <p:cNvPr id="55" name="Text 52"/>
+          <p:cNvSpPr txBox="1"/>
+          <p:nvPr/>
+        </p:nvSpPr>
+        <p:spPr>
+          <a:xfrm>
+            <a:off x="9936785" y="6172657"/>
+            <a:ext cx="1371600" cy="201168"/>
+          </a:xfrm>
+          <a:prstGeom prst="rect">
+            <a:avLst/>
+          </a:prstGeom>
+          <a:noFill/>
+          <a:ln/>
+        </p:spPr>
+        <p:txBody>
+          <a:bodyPr wrap="square" lIns="0" tIns="0" rIns="0" bIns="0" rtlCol="0" anchor="ctr"/>
+          <a:lstStyle/>
+          <a:p>
+            <a:pPr algn="r" indent="0" marL="0">
+              <a:buNone/>
+            </a:pPr>
+            <a:r>
+              <a:rPr lang="en-US" sz="1100" dirty="0">
+                <a:solidFill>
+                  <a:srgbClr val="7A7A7A"/>
+                </a:solidFill>
+                <a:latin typeface="Pretendard" pitchFamily="34" charset="0"/>
+                <a:ea typeface="Pretendard" pitchFamily="34" charset="-122"/>
+                <a:cs typeface="Pretendard" pitchFamily="34" charset="-120"/>
+              </a:rPr>
+              <a:t>수정</a:t>
+            </a:r>
+            <a:endParaRPr lang="en-US" sz="1100" dirty="0"/>
+          </a:p>
+        </p:txBody>
+      </p:sp>
+      <p:sp>
+        <p:nvSpPr>
+          <p:cNvPr id="56" name="Text 53"/>
+          <p:cNvSpPr txBox="1"/>
+          <p:nvPr/>
+        </p:nvSpPr>
+        <p:spPr>
+          <a:xfrm>
+            <a:off x="609905" y="6446520"/>
+            <a:ext cx="5486400" cy="274320"/>
+          </a:xfrm>
+          <a:prstGeom prst="rect">
+            <a:avLst/>
+          </a:prstGeom>
+          <a:noFill/>
+          <a:ln/>
+        </p:spPr>
+        <p:txBody>
+          <a:bodyPr wrap="square" lIns="0" tIns="0" rIns="0" bIns="0" rtlCol="0" anchor="ctr"/>
+          <a:lstStyle/>
+          <a:p>
+            <a:pPr indent="0" marL="0">
+              <a:buNone/>
+            </a:pPr>
+            <a:r>
+              <a:rPr lang="en-US" sz="1000" spc="200" kern="0" dirty="0">
+                <a:solidFill>
+                  <a:srgbClr val="7A7A7A"/>
+                </a:solidFill>
+                <a:latin typeface="Pretendard" pitchFamily="34" charset="0"/>
+                <a:ea typeface="Pretendard" pitchFamily="34" charset="-122"/>
+                <a:cs typeface="Pretendard" pitchFamily="34" charset="-120"/>
+              </a:rPr>
+              <a:t>QA REPORT  ·  FISH GAME</a:t>
+            </a:r>
+            <a:endParaRPr lang="en-US" sz="1000" dirty="0"/>
+          </a:p>
+        </p:txBody>
+      </p:sp>
+      <p:sp>
+        <p:nvSpPr>
+          <p:cNvPr id="57" name="Text 54"/>
+          <p:cNvSpPr txBox="1"/>
+          <p:nvPr/>
+        </p:nvSpPr>
+        <p:spPr>
+          <a:xfrm>
+            <a:off x="10515600" y="6446520"/>
+            <a:ext cx="1066190" cy="274320"/>
+          </a:xfrm>
+          <a:prstGeom prst="rect">
+            <a:avLst/>
+          </a:prstGeom>
+          <a:noFill/>
+          <a:ln/>
+        </p:spPr>
+        <p:txBody>
+          <a:bodyPr wrap="square" lIns="0" tIns="0" rIns="0" bIns="0" rtlCol="0" anchor="ctr"/>
+          <a:lstStyle/>
+          <a:p>
+            <a:pPr algn="r" indent="0" marL="0">
+              <a:buNone/>
+            </a:pPr>
+            <a:r>
+              <a:rPr lang="en-US" sz="1000" dirty="0">
+                <a:solidFill>
+                  <a:srgbClr val="7A7A7A"/>
+                </a:solidFill>
+                <a:latin typeface="Pretendard" pitchFamily="34" charset="0"/>
+                <a:ea typeface="Pretendard" pitchFamily="34" charset="-122"/>
+                <a:cs typeface="Pretendard" pitchFamily="34" charset="-120"/>
+              </a:rPr>
+              <a:t>03 / 30</a:t>
+            </a:r>
+            <a:endParaRPr lang="en-US" sz="1000" dirty="0"/>
+          </a:p>
+        </p:txBody>
+      </p:sp>
+    </p:spTree>
+  </p:cSld>
+  <p:clrMapOvr>
+    <a:masterClrMapping/>
+  </p:clrMapOvr>
+</p:sld>
+</file>
+
+<file path=ppt/slides/slide30.xml><?xml version="1.0" encoding="utf-8"?>
+<p:sld xmlns:a="http://schemas.openxmlformats.org/drawingml/2006/main" xmlns:r="http://schemas.openxmlformats.org/officeDocument/2006/relationships" xmlns:p="http://schemas.openxmlformats.org/presentationml/2006/main">
+  <p:cSld name="Slide 30">
     <p:bg>
       <p:bgPr>
         <a:solidFill>
@@ -32888,7 +37028,7 @@
       </p:sp>
       <p:graphicFrame>
         <p:nvGraphicFramePr>
-          <p:cNvPr id="29" name="Table 0"/>
+          <p:cNvPr id="31" name="Table 0"/>
           <p:cNvGraphicFramePr>
             <a:graphicFrameLocks noGrp="1"/>
           </p:cNvGraphicFramePr>
@@ -33185,7 +37325,7 @@
                           <a:ea typeface="Pretendard SemiBold" pitchFamily="34" charset="-122"/>
                           <a:cs typeface="Pretendard SemiBold" pitchFamily="34" charset="-120"/>
                         </a:rPr>
-                        <a:t>밸런스</a:t>
+                        <a:t>미사일</a:t>
                       </a:r>
                       <a:endParaRPr lang="en-US" sz="1300" dirty="0">
                         <a:latin typeface="Pretendard SemiBold" charset="0"/>
@@ -33235,7 +37375,7 @@
                           <a:ea typeface="Pretendard" pitchFamily="34" charset="-122"/>
                           <a:cs typeface="Pretendard" pitchFamily="34" charset="-120"/>
                         </a:rPr>
-                        <a:t>칸별 고정 가격으로 풀트리 달성이 클리어 후 +5.5h → +1.0h로 짧아짐</a:t>
+                        <a:t>미사일이 장애물 · 닫힌 통로를 무시하고 날아가 건너편 물고기를 먹을 수 있음 (의도인지 미정)</a:t>
                       </a:r>
                       <a:endParaRPr lang="en-US" sz="1300" dirty="0">
                         <a:latin typeface="Pretendard" charset="0"/>
@@ -33285,7 +37425,7 @@
                           <a:ea typeface="Pretendard" pitchFamily="34" charset="-122"/>
                           <a:cs typeface="Pretendard" pitchFamily="34" charset="-120"/>
                         </a:rPr>
-                        <a:t>더 길게 원하면 깊은 칸 가격만 올리기</a:t>
+                        <a:t>R8 — 막히게 결정 · 수정 (사용자 요청)</a:t>
                       </a:r>
                       <a:endParaRPr lang="en-US" sz="1300" dirty="0">
                         <a:latin typeface="Pretendard" charset="0"/>
@@ -33335,7 +37475,7 @@
                           <a:ea typeface="Pretendard" pitchFamily="34" charset="-122"/>
                           <a:cs typeface="Pretendard" pitchFamily="34" charset="-120"/>
                         </a:rPr>
-                        <a:t>미정</a:t>
+                        <a:t>해결</a:t>
                       </a:r>
                       <a:endParaRPr lang="en-US" sz="1300" dirty="0">
                         <a:latin typeface="Pretendard" charset="0"/>
@@ -33385,7 +37525,763 @@
                           <a:ea typeface="Pretendard" pitchFamily="34" charset="-122"/>
                           <a:cs typeface="Pretendard" pitchFamily="34" charset="-120"/>
                         </a:rPr>
+                        <a:t>R8</a:t>
+                      </a:r>
+                      <a:endParaRPr lang="en-US" sz="1300" dirty="0">
+                        <a:latin typeface="Pretendard" charset="0"/>
+                        <a:ea typeface="Pretendard" charset="0"/>
+                        <a:cs typeface="Pretendard" charset="0"/>
+                      </a:endParaRPr>
+                    </a:p>
+                  </a:txBody>
+                  <a:tcPr marL="76200" marR="76200" marT="50800" marB="50800" anchor="ctr">
+                    <a:lnL w="0" cap="flat" cmpd="sng" algn="ctr">
+                      <a:noFill/>
+                    </a:lnL>
+                    <a:lnR w="0" cap="flat" cmpd="sng" algn="ctr">
+                      <a:noFill/>
+                    </a:lnR>
+                    <a:lnT w="0" cap="flat" cmpd="sng" algn="ctr">
+                      <a:noFill/>
+                    </a:lnT>
+                    <a:lnB w="9525" cap="flat" cmpd="sng" algn="ctr">
+                      <a:solidFill>
+                        <a:srgbClr val="E0E0E0"/>
+                      </a:solidFill>
+                      <a:prstDash val="solid"/>
+                      <a:round/>
+                      <a:headEnd type="none" w="med" len="med"/>
+                      <a:tailEnd type="none" w="med" len="med"/>
+                    </a:lnB>
+                    <a:solidFill>
+                      <a:srgbClr val="FFFFFF"/>
+                    </a:solidFill>
+                  </a:tcPr>
+                </a:tc>
+              </a:tr>
+              <a:tr h="638556">
+                <a:tc>
+                  <a:txBody>
+                    <a:bodyPr/>
+                    <a:lstStyle/>
+                    <a:p>
+                      <a:pPr indent="0" marL="0">
+                        <a:buNone/>
+                      </a:pPr>
+                      <a:r>
+                        <a:rPr lang="en-US" sz="1300" dirty="0">
+                          <a:solidFill>
+                            <a:srgbClr val="1D1D1F"/>
+                          </a:solidFill>
+                          <a:latin typeface="Pretendard SemiBold" pitchFamily="34" charset="0"/>
+                          <a:ea typeface="Pretendard SemiBold" pitchFamily="34" charset="-122"/>
+                          <a:cs typeface="Pretendard SemiBold" pitchFamily="34" charset="-120"/>
+                        </a:rPr>
+                        <a:t>스킬트리 화면</a:t>
+                      </a:r>
+                      <a:endParaRPr lang="en-US" sz="1300" dirty="0">
+                        <a:latin typeface="Pretendard SemiBold" charset="0"/>
+                        <a:ea typeface="Pretendard SemiBold" charset="0"/>
+                        <a:cs typeface="Pretendard SemiBold" charset="0"/>
+                      </a:endParaRPr>
+                    </a:p>
+                  </a:txBody>
+                  <a:tcPr marL="76200" marR="76200" marT="50800" marB="50800" anchor="ctr">
+                    <a:lnL w="0" cap="flat" cmpd="sng" algn="ctr">
+                      <a:noFill/>
+                    </a:lnL>
+                    <a:lnR w="0" cap="flat" cmpd="sng" algn="ctr">
+                      <a:noFill/>
+                    </a:lnR>
+                    <a:lnT w="0" cap="flat" cmpd="sng" algn="ctr">
+                      <a:noFill/>
+                    </a:lnT>
+                    <a:lnB w="9525" cap="flat" cmpd="sng" algn="ctr">
+                      <a:solidFill>
+                        <a:srgbClr val="E0E0E0"/>
+                      </a:solidFill>
+                      <a:prstDash val="solid"/>
+                      <a:round/>
+                      <a:headEnd type="none" w="med" len="med"/>
+                      <a:tailEnd type="none" w="med" len="med"/>
+                    </a:lnB>
+                    <a:solidFill>
+                      <a:srgbClr val="FFFFFF"/>
+                    </a:solidFill>
+                  </a:tcPr>
+                </a:tc>
+                <a:tc>
+                  <a:txBody>
+                    <a:bodyPr/>
+                    <a:lstStyle/>
+                    <a:p>
+                      <a:pPr indent="0" marL="0">
+                        <a:buNone/>
+                      </a:pPr>
+                      <a:r>
+                        <a:rPr lang="en-US" sz="1300" dirty="0">
+                          <a:solidFill>
+                            <a:srgbClr val="333333"/>
+                          </a:solidFill>
+                          <a:latin typeface="Pretendard" pitchFamily="34" charset="0"/>
+                          <a:ea typeface="Pretendard" pitchFamily="34" charset="-122"/>
+                          <a:cs typeface="Pretendard" pitchFamily="34" charset="-120"/>
+                        </a:rPr>
+                        <a:t>개편한 메인 화면은 Unity가 닫혀 있어 실행 확인 전</a:t>
+                      </a:r>
+                      <a:endParaRPr lang="en-US" sz="1300" dirty="0">
+                        <a:latin typeface="Pretendard" charset="0"/>
+                        <a:ea typeface="Pretendard" charset="0"/>
+                        <a:cs typeface="Pretendard" charset="0"/>
+                      </a:endParaRPr>
+                    </a:p>
+                  </a:txBody>
+                  <a:tcPr marL="76200" marR="76200" marT="50800" marB="50800" anchor="ctr">
+                    <a:lnL w="0" cap="flat" cmpd="sng" algn="ctr">
+                      <a:noFill/>
+                    </a:lnL>
+                    <a:lnR w="0" cap="flat" cmpd="sng" algn="ctr">
+                      <a:noFill/>
+                    </a:lnR>
+                    <a:lnT w="0" cap="flat" cmpd="sng" algn="ctr">
+                      <a:noFill/>
+                    </a:lnT>
+                    <a:lnB w="9525" cap="flat" cmpd="sng" algn="ctr">
+                      <a:solidFill>
+                        <a:srgbClr val="E0E0E0"/>
+                      </a:solidFill>
+                      <a:prstDash val="solid"/>
+                      <a:round/>
+                      <a:headEnd type="none" w="med" len="med"/>
+                      <a:tailEnd type="none" w="med" len="med"/>
+                    </a:lnB>
+                    <a:solidFill>
+                      <a:srgbClr val="FFFFFF"/>
+                    </a:solidFill>
+                  </a:tcPr>
+                </a:tc>
+                <a:tc>
+                  <a:txBody>
+                    <a:bodyPr/>
+                    <a:lstStyle/>
+                    <a:p>
+                      <a:pPr indent="0" marL="0">
+                        <a:buNone/>
+                      </a:pPr>
+                      <a:r>
+                        <a:rPr lang="en-US" sz="1300" dirty="0">
+                          <a:solidFill>
+                            <a:srgbClr val="333333"/>
+                          </a:solidFill>
+                          <a:latin typeface="Pretendard" pitchFamily="34" charset="0"/>
+                          <a:ea typeface="Pretendard" pitchFamily="34" charset="-122"/>
+                          <a:cs typeface="Pretendard" pitchFamily="34" charset="-120"/>
+                        </a:rPr>
+                        <a:t>씬 생성 후 툴팁 위치 · 숨김 · 설정 메뉴 확인</a:t>
+                      </a:r>
+                      <a:endParaRPr lang="en-US" sz="1300" dirty="0">
+                        <a:latin typeface="Pretendard" charset="0"/>
+                        <a:ea typeface="Pretendard" charset="0"/>
+                        <a:cs typeface="Pretendard" charset="0"/>
+                      </a:endParaRPr>
+                    </a:p>
+                  </a:txBody>
+                  <a:tcPr marL="76200" marR="76200" marT="50800" marB="50800" anchor="ctr">
+                    <a:lnL w="0" cap="flat" cmpd="sng" algn="ctr">
+                      <a:noFill/>
+                    </a:lnL>
+                    <a:lnR w="0" cap="flat" cmpd="sng" algn="ctr">
+                      <a:noFill/>
+                    </a:lnR>
+                    <a:lnT w="0" cap="flat" cmpd="sng" algn="ctr">
+                      <a:noFill/>
+                    </a:lnT>
+                    <a:lnB w="9525" cap="flat" cmpd="sng" algn="ctr">
+                      <a:solidFill>
+                        <a:srgbClr val="E0E0E0"/>
+                      </a:solidFill>
+                      <a:prstDash val="solid"/>
+                      <a:round/>
+                      <a:headEnd type="none" w="med" len="med"/>
+                      <a:tailEnd type="none" w="med" len="med"/>
+                    </a:lnB>
+                    <a:solidFill>
+                      <a:srgbClr val="FFFFFF"/>
+                    </a:solidFill>
+                  </a:tcPr>
+                </a:tc>
+                <a:tc>
+                  <a:txBody>
+                    <a:bodyPr/>
+                    <a:lstStyle/>
+                    <a:p>
+                      <a:pPr algn="ctr" indent="0" marL="0">
+                        <a:buNone/>
+                      </a:pPr>
+                      <a:r>
+                        <a:rPr lang="en-US" sz="1300" b="1" dirty="0">
+                          <a:solidFill>
+                            <a:srgbClr val="0066CC"/>
+                          </a:solidFill>
+                          <a:latin typeface="Pretendard SemiBold" pitchFamily="34" charset="0"/>
+                          <a:ea typeface="Pretendard SemiBold" pitchFamily="34" charset="-122"/>
+                          <a:cs typeface="Pretendard SemiBold" pitchFamily="34" charset="-120"/>
+                        </a:rPr>
+                        <a:t>확인 필요</a:t>
+                      </a:r>
+                      <a:endParaRPr lang="en-US" sz="1300" dirty="0">
+                        <a:latin typeface="Pretendard SemiBold" charset="0"/>
+                        <a:ea typeface="Pretendard SemiBold" charset="0"/>
+                        <a:cs typeface="Pretendard SemiBold" charset="0"/>
+                      </a:endParaRPr>
+                    </a:p>
+                  </a:txBody>
+                  <a:tcPr marL="76200" marR="76200" marT="50800" marB="50800" anchor="ctr">
+                    <a:lnL w="0" cap="flat" cmpd="sng" algn="ctr">
+                      <a:noFill/>
+                    </a:lnL>
+                    <a:lnR w="0" cap="flat" cmpd="sng" algn="ctr">
+                      <a:noFill/>
+                    </a:lnR>
+                    <a:lnT w="0" cap="flat" cmpd="sng" algn="ctr">
+                      <a:noFill/>
+                    </a:lnT>
+                    <a:lnB w="9525" cap="flat" cmpd="sng" algn="ctr">
+                      <a:solidFill>
+                        <a:srgbClr val="E0E0E0"/>
+                      </a:solidFill>
+                      <a:prstDash val="solid"/>
+                      <a:round/>
+                      <a:headEnd type="none" w="med" len="med"/>
+                      <a:tailEnd type="none" w="med" len="med"/>
+                    </a:lnB>
+                    <a:solidFill>
+                      <a:srgbClr val="FFFFFF"/>
+                    </a:solidFill>
+                  </a:tcPr>
+                </a:tc>
+                <a:tc>
+                  <a:txBody>
+                    <a:bodyPr/>
+                    <a:lstStyle/>
+                    <a:p>
+                      <a:pPr algn="ctr" indent="0" marL="0">
+                        <a:buNone/>
+                      </a:pPr>
+                      <a:r>
+                        <a:rPr lang="en-US" sz="1300" dirty="0">
+                          <a:solidFill>
+                            <a:srgbClr val="7A7A7A"/>
+                          </a:solidFill>
+                          <a:latin typeface="Pretendard" pitchFamily="34" charset="0"/>
+                          <a:ea typeface="Pretendard" pitchFamily="34" charset="-122"/>
+                          <a:cs typeface="Pretendard" pitchFamily="34" charset="-120"/>
+                        </a:rPr>
                         <a:t>R9</a:t>
+                      </a:r>
+                      <a:endParaRPr lang="en-US" sz="1300" dirty="0">
+                        <a:latin typeface="Pretendard" charset="0"/>
+                        <a:ea typeface="Pretendard" charset="0"/>
+                        <a:cs typeface="Pretendard" charset="0"/>
+                      </a:endParaRPr>
+                    </a:p>
+                  </a:txBody>
+                  <a:tcPr marL="76200" marR="76200" marT="50800" marB="50800" anchor="ctr">
+                    <a:lnL w="0" cap="flat" cmpd="sng" algn="ctr">
+                      <a:noFill/>
+                    </a:lnL>
+                    <a:lnR w="0" cap="flat" cmpd="sng" algn="ctr">
+                      <a:noFill/>
+                    </a:lnR>
+                    <a:lnT w="0" cap="flat" cmpd="sng" algn="ctr">
+                      <a:noFill/>
+                    </a:lnT>
+                    <a:lnB w="9525" cap="flat" cmpd="sng" algn="ctr">
+                      <a:solidFill>
+                        <a:srgbClr val="E0E0E0"/>
+                      </a:solidFill>
+                      <a:prstDash val="solid"/>
+                      <a:round/>
+                      <a:headEnd type="none" w="med" len="med"/>
+                      <a:tailEnd type="none" w="med" len="med"/>
+                    </a:lnB>
+                    <a:solidFill>
+                      <a:srgbClr val="FFFFFF"/>
+                    </a:solidFill>
+                  </a:tcPr>
+                </a:tc>
+              </a:tr>
+              <a:tr h="638556">
+                <a:tc>
+                  <a:txBody>
+                    <a:bodyPr/>
+                    <a:lstStyle/>
+                    <a:p>
+                      <a:pPr indent="0" marL="0">
+                        <a:buNone/>
+                      </a:pPr>
+                      <a:r>
+                        <a:rPr lang="en-US" sz="1300" dirty="0">
+                          <a:solidFill>
+                            <a:srgbClr val="1D1D1F"/>
+                          </a:solidFill>
+                          <a:latin typeface="Pretendard SemiBold" pitchFamily="34" charset="0"/>
+                          <a:ea typeface="Pretendard SemiBold" pitchFamily="34" charset="-122"/>
+                          <a:cs typeface="Pretendard SemiBold" pitchFamily="34" charset="-120"/>
+                        </a:rPr>
+                        <a:t>밸런스</a:t>
+                      </a:r>
+                      <a:endParaRPr lang="en-US" sz="1300" dirty="0">
+                        <a:latin typeface="Pretendard SemiBold" charset="0"/>
+                        <a:ea typeface="Pretendard SemiBold" charset="0"/>
+                        <a:cs typeface="Pretendard SemiBold" charset="0"/>
+                      </a:endParaRPr>
+                    </a:p>
+                  </a:txBody>
+                  <a:tcPr marL="76200" marR="76200" marT="50800" marB="50800" anchor="ctr">
+                    <a:lnL w="0" cap="flat" cmpd="sng" algn="ctr">
+                      <a:noFill/>
+                    </a:lnL>
+                    <a:lnR w="0" cap="flat" cmpd="sng" algn="ctr">
+                      <a:noFill/>
+                    </a:lnR>
+                    <a:lnT w="0" cap="flat" cmpd="sng" algn="ctr">
+                      <a:noFill/>
+                    </a:lnT>
+                    <a:lnB w="9525" cap="flat" cmpd="sng" algn="ctr">
+                      <a:solidFill>
+                        <a:srgbClr val="E0E0E0"/>
+                      </a:solidFill>
+                      <a:prstDash val="solid"/>
+                      <a:round/>
+                      <a:headEnd type="none" w="med" len="med"/>
+                      <a:tailEnd type="none" w="med" len="med"/>
+                    </a:lnB>
+                    <a:solidFill>
+                      <a:srgbClr val="FFFFFF"/>
+                    </a:solidFill>
+                  </a:tcPr>
+                </a:tc>
+                <a:tc>
+                  <a:txBody>
+                    <a:bodyPr/>
+                    <a:lstStyle/>
+                    <a:p>
+                      <a:pPr indent="0" marL="0">
+                        <a:buNone/>
+                      </a:pPr>
+                      <a:r>
+                        <a:rPr lang="en-US" sz="1300" dirty="0">
+                          <a:solidFill>
+                            <a:srgbClr val="333333"/>
+                          </a:solidFill>
+                          <a:latin typeface="Pretendard" pitchFamily="34" charset="0"/>
+                          <a:ea typeface="Pretendard" pitchFamily="34" charset="-122"/>
+                          <a:cs typeface="Pretendard" pitchFamily="34" charset="-120"/>
+                        </a:rPr>
+                        <a:t>칸별 고정 가격으로 풀트리 달성이 클리어 후 +5.5h → +1.0h로 짧아짐</a:t>
+                      </a:r>
+                      <a:endParaRPr lang="en-US" sz="1300" dirty="0">
+                        <a:latin typeface="Pretendard" charset="0"/>
+                        <a:ea typeface="Pretendard" charset="0"/>
+                        <a:cs typeface="Pretendard" charset="0"/>
+                      </a:endParaRPr>
+                    </a:p>
+                  </a:txBody>
+                  <a:tcPr marL="76200" marR="76200" marT="50800" marB="50800" anchor="ctr">
+                    <a:lnL w="0" cap="flat" cmpd="sng" algn="ctr">
+                      <a:noFill/>
+                    </a:lnL>
+                    <a:lnR w="0" cap="flat" cmpd="sng" algn="ctr">
+                      <a:noFill/>
+                    </a:lnR>
+                    <a:lnT w="0" cap="flat" cmpd="sng" algn="ctr">
+                      <a:noFill/>
+                    </a:lnT>
+                    <a:lnB w="9525" cap="flat" cmpd="sng" algn="ctr">
+                      <a:solidFill>
+                        <a:srgbClr val="E0E0E0"/>
+                      </a:solidFill>
+                      <a:prstDash val="solid"/>
+                      <a:round/>
+                      <a:headEnd type="none" w="med" len="med"/>
+                      <a:tailEnd type="none" w="med" len="med"/>
+                    </a:lnB>
+                    <a:solidFill>
+                      <a:srgbClr val="FFFFFF"/>
+                    </a:solidFill>
+                  </a:tcPr>
+                </a:tc>
+                <a:tc>
+                  <a:txBody>
+                    <a:bodyPr/>
+                    <a:lstStyle/>
+                    <a:p>
+                      <a:pPr indent="0" marL="0">
+                        <a:buNone/>
+                      </a:pPr>
+                      <a:r>
+                        <a:rPr lang="en-US" sz="1300" dirty="0">
+                          <a:solidFill>
+                            <a:srgbClr val="333333"/>
+                          </a:solidFill>
+                          <a:latin typeface="Pretendard" pitchFamily="34" charset="0"/>
+                          <a:ea typeface="Pretendard" pitchFamily="34" charset="-122"/>
+                          <a:cs typeface="Pretendard" pitchFamily="34" charset="-120"/>
+                        </a:rPr>
+                        <a:t>더 길게 원하면 깊은 칸 가격만 올리기</a:t>
+                      </a:r>
+                      <a:endParaRPr lang="en-US" sz="1300" dirty="0">
+                        <a:latin typeface="Pretendard" charset="0"/>
+                        <a:ea typeface="Pretendard" charset="0"/>
+                        <a:cs typeface="Pretendard" charset="0"/>
+                      </a:endParaRPr>
+                    </a:p>
+                  </a:txBody>
+                  <a:tcPr marL="76200" marR="76200" marT="50800" marB="50800" anchor="ctr">
+                    <a:lnL w="0" cap="flat" cmpd="sng" algn="ctr">
+                      <a:noFill/>
+                    </a:lnL>
+                    <a:lnR w="0" cap="flat" cmpd="sng" algn="ctr">
+                      <a:noFill/>
+                    </a:lnR>
+                    <a:lnT w="0" cap="flat" cmpd="sng" algn="ctr">
+                      <a:noFill/>
+                    </a:lnT>
+                    <a:lnB w="9525" cap="flat" cmpd="sng" algn="ctr">
+                      <a:solidFill>
+                        <a:srgbClr val="E0E0E0"/>
+                      </a:solidFill>
+                      <a:prstDash val="solid"/>
+                      <a:round/>
+                      <a:headEnd type="none" w="med" len="med"/>
+                      <a:tailEnd type="none" w="med" len="med"/>
+                    </a:lnB>
+                    <a:solidFill>
+                      <a:srgbClr val="FFFFFF"/>
+                    </a:solidFill>
+                  </a:tcPr>
+                </a:tc>
+                <a:tc>
+                  <a:txBody>
+                    <a:bodyPr/>
+                    <a:lstStyle/>
+                    <a:p>
+                      <a:pPr algn="ctr" indent="0" marL="0">
+                        <a:buNone/>
+                      </a:pPr>
+                      <a:r>
+                        <a:rPr lang="en-US" sz="1300" dirty="0">
+                          <a:solidFill>
+                            <a:srgbClr val="7A7A7A"/>
+                          </a:solidFill>
+                          <a:latin typeface="Pretendard" pitchFamily="34" charset="0"/>
+                          <a:ea typeface="Pretendard" pitchFamily="34" charset="-122"/>
+                          <a:cs typeface="Pretendard" pitchFamily="34" charset="-120"/>
+                        </a:rPr>
+                        <a:t>미정</a:t>
+                      </a:r>
+                      <a:endParaRPr lang="en-US" sz="1300" dirty="0">
+                        <a:latin typeface="Pretendard" charset="0"/>
+                        <a:ea typeface="Pretendard" charset="0"/>
+                        <a:cs typeface="Pretendard" charset="0"/>
+                      </a:endParaRPr>
+                    </a:p>
+                  </a:txBody>
+                  <a:tcPr marL="76200" marR="76200" marT="50800" marB="50800" anchor="ctr">
+                    <a:lnL w="0" cap="flat" cmpd="sng" algn="ctr">
+                      <a:noFill/>
+                    </a:lnL>
+                    <a:lnR w="0" cap="flat" cmpd="sng" algn="ctr">
+                      <a:noFill/>
+                    </a:lnR>
+                    <a:lnT w="0" cap="flat" cmpd="sng" algn="ctr">
+                      <a:noFill/>
+                    </a:lnT>
+                    <a:lnB w="9525" cap="flat" cmpd="sng" algn="ctr">
+                      <a:solidFill>
+                        <a:srgbClr val="E0E0E0"/>
+                      </a:solidFill>
+                      <a:prstDash val="solid"/>
+                      <a:round/>
+                      <a:headEnd type="none" w="med" len="med"/>
+                      <a:tailEnd type="none" w="med" len="med"/>
+                    </a:lnB>
+                    <a:solidFill>
+                      <a:srgbClr val="FFFFFF"/>
+                    </a:solidFill>
+                  </a:tcPr>
+                </a:tc>
+                <a:tc>
+                  <a:txBody>
+                    <a:bodyPr/>
+                    <a:lstStyle/>
+                    <a:p>
+                      <a:pPr algn="ctr" indent="0" marL="0">
+                        <a:buNone/>
+                      </a:pPr>
+                      <a:r>
+                        <a:rPr lang="en-US" sz="1300" dirty="0">
+                          <a:solidFill>
+                            <a:srgbClr val="7A7A7A"/>
+                          </a:solidFill>
+                          <a:latin typeface="Pretendard" pitchFamily="34" charset="0"/>
+                          <a:ea typeface="Pretendard" pitchFamily="34" charset="-122"/>
+                          <a:cs typeface="Pretendard" pitchFamily="34" charset="-120"/>
+                        </a:rPr>
+                        <a:t>R9</a:t>
+                      </a:r>
+                      <a:endParaRPr lang="en-US" sz="1300" dirty="0">
+                        <a:latin typeface="Pretendard" charset="0"/>
+                        <a:ea typeface="Pretendard" charset="0"/>
+                        <a:cs typeface="Pretendard" charset="0"/>
+                      </a:endParaRPr>
+                    </a:p>
+                  </a:txBody>
+                  <a:tcPr marL="76200" marR="76200" marT="50800" marB="50800" anchor="ctr">
+                    <a:lnL w="0" cap="flat" cmpd="sng" algn="ctr">
+                      <a:noFill/>
+                    </a:lnL>
+                    <a:lnR w="0" cap="flat" cmpd="sng" algn="ctr">
+                      <a:noFill/>
+                    </a:lnR>
+                    <a:lnT w="0" cap="flat" cmpd="sng" algn="ctr">
+                      <a:noFill/>
+                    </a:lnT>
+                    <a:lnB w="9525" cap="flat" cmpd="sng" algn="ctr">
+                      <a:solidFill>
+                        <a:srgbClr val="E0E0E0"/>
+                      </a:solidFill>
+                      <a:prstDash val="solid"/>
+                      <a:round/>
+                      <a:headEnd type="none" w="med" len="med"/>
+                      <a:tailEnd type="none" w="med" len="med"/>
+                    </a:lnB>
+                    <a:solidFill>
+                      <a:srgbClr val="FFFFFF"/>
+                    </a:solidFill>
+                  </a:tcPr>
+                </a:tc>
+              </a:tr>
+              <a:tr h="866394">
+                <a:tc>
+                  <a:txBody>
+                    <a:bodyPr/>
+                    <a:lstStyle/>
+                    <a:p>
+                      <a:pPr indent="0" marL="0">
+                        <a:buNone/>
+                      </a:pPr>
+                      <a:r>
+                        <a:rPr lang="en-US" sz="1300" dirty="0">
+                          <a:solidFill>
+                            <a:srgbClr val="1D1D1F"/>
+                          </a:solidFill>
+                          <a:latin typeface="Pretendard SemiBold" pitchFamily="34" charset="0"/>
+                          <a:ea typeface="Pretendard SemiBold" pitchFamily="34" charset="-122"/>
+                          <a:cs typeface="Pretendard SemiBold" pitchFamily="34" charset="-120"/>
+                        </a:rPr>
+                        <a:t>밸런스</a:t>
+                      </a:r>
+                      <a:endParaRPr lang="en-US" sz="1300" dirty="0">
+                        <a:latin typeface="Pretendard SemiBold" charset="0"/>
+                        <a:ea typeface="Pretendard SemiBold" charset="0"/>
+                        <a:cs typeface="Pretendard SemiBold" charset="0"/>
+                      </a:endParaRPr>
+                    </a:p>
+                  </a:txBody>
+                  <a:tcPr marL="76200" marR="76200" marT="50800" marB="50800" anchor="ctr">
+                    <a:lnL w="0" cap="flat" cmpd="sng" algn="ctr">
+                      <a:noFill/>
+                    </a:lnL>
+                    <a:lnR w="0" cap="flat" cmpd="sng" algn="ctr">
+                      <a:noFill/>
+                    </a:lnR>
+                    <a:lnT w="0" cap="flat" cmpd="sng" algn="ctr">
+                      <a:noFill/>
+                    </a:lnT>
+                    <a:lnB w="9525" cap="flat" cmpd="sng" algn="ctr">
+                      <a:solidFill>
+                        <a:srgbClr val="E0E0E0"/>
+                      </a:solidFill>
+                      <a:prstDash val="solid"/>
+                      <a:round/>
+                      <a:headEnd type="none" w="med" len="med"/>
+                      <a:tailEnd type="none" w="med" len="med"/>
+                    </a:lnB>
+                    <a:solidFill>
+                      <a:srgbClr val="FFFFFF"/>
+                    </a:solidFill>
+                  </a:tcPr>
+                </a:tc>
+                <a:tc>
+                  <a:txBody>
+                    <a:bodyPr/>
+                    <a:lstStyle/>
+                    <a:p>
+                      <a:pPr indent="0" marL="0">
+                        <a:buNone/>
+                      </a:pPr>
+                      <a:r>
+                        <a:rPr lang="en-US" sz="1300" dirty="0">
+                          <a:solidFill>
+                            <a:srgbClr val="333333"/>
+                          </a:solidFill>
+                          <a:latin typeface="Pretendard" pitchFamily="34" charset="0"/>
+                          <a:ea typeface="Pretendard" pitchFamily="34" charset="-122"/>
+                          <a:cs typeface="Pretendard" pitchFamily="34" charset="-120"/>
+                        </a:rPr>
+                        <a:t>판 안 성장 0.5 · 재화 2배로 초반이 빨라져, 후반(강·바다) 체감이 상대적으로 길어질 수 있음. 빛 표시가 물고기가 많을 때 화면을 어지럽힐 수 있음</a:t>
+                      </a:r>
+                      <a:endParaRPr lang="en-US" sz="1300" dirty="0">
+                        <a:latin typeface="Pretendard" charset="0"/>
+                        <a:ea typeface="Pretendard" charset="0"/>
+                        <a:cs typeface="Pretendard" charset="0"/>
+                      </a:endParaRPr>
+                    </a:p>
+                  </a:txBody>
+                  <a:tcPr marL="76200" marR="76200" marT="50800" marB="50800" anchor="ctr">
+                    <a:lnL w="0" cap="flat" cmpd="sng" algn="ctr">
+                      <a:noFill/>
+                    </a:lnL>
+                    <a:lnR w="0" cap="flat" cmpd="sng" algn="ctr">
+                      <a:noFill/>
+                    </a:lnR>
+                    <a:lnT w="0" cap="flat" cmpd="sng" algn="ctr">
+                      <a:noFill/>
+                    </a:lnT>
+                    <a:lnB w="9525" cap="flat" cmpd="sng" algn="ctr">
+                      <a:solidFill>
+                        <a:srgbClr val="E0E0E0"/>
+                      </a:solidFill>
+                      <a:prstDash val="solid"/>
+                      <a:round/>
+                      <a:headEnd type="none" w="med" len="med"/>
+                      <a:tailEnd type="none" w="med" len="med"/>
+                    </a:lnB>
+                    <a:solidFill>
+                      <a:srgbClr val="FFFFFF"/>
+                    </a:solidFill>
+                  </a:tcPr>
+                </a:tc>
+                <a:tc>
+                  <a:txBody>
+                    <a:bodyPr/>
+                    <a:lstStyle/>
+                    <a:p>
+                      <a:pPr indent="0" marL="0">
+                        <a:buNone/>
+                      </a:pPr>
+                      <a:r>
+                        <a:rPr lang="en-US" sz="1300" dirty="0">
+                          <a:solidFill>
+                            <a:srgbClr val="333333"/>
+                          </a:solidFill>
+                          <a:latin typeface="Pretendard" pitchFamily="34" charset="0"/>
+                          <a:ea typeface="Pretendard" pitchFamily="34" charset="-122"/>
+                          <a:cs typeface="Pretendard" pitchFamily="34" charset="-120"/>
+                        </a:rPr>
+                        <a:t>플레이테스트 — 클리어 2~3시간, 판마다 구매가 일어나는지 확인</a:t>
+                      </a:r>
+                      <a:endParaRPr lang="en-US" sz="1300" dirty="0">
+                        <a:latin typeface="Pretendard" charset="0"/>
+                        <a:ea typeface="Pretendard" charset="0"/>
+                        <a:cs typeface="Pretendard" charset="0"/>
+                      </a:endParaRPr>
+                    </a:p>
+                  </a:txBody>
+                  <a:tcPr marL="76200" marR="76200" marT="50800" marB="50800" anchor="ctr">
+                    <a:lnL w="0" cap="flat" cmpd="sng" algn="ctr">
+                      <a:noFill/>
+                    </a:lnL>
+                    <a:lnR w="0" cap="flat" cmpd="sng" algn="ctr">
+                      <a:noFill/>
+                    </a:lnR>
+                    <a:lnT w="0" cap="flat" cmpd="sng" algn="ctr">
+                      <a:noFill/>
+                    </a:lnT>
+                    <a:lnB w="9525" cap="flat" cmpd="sng" algn="ctr">
+                      <a:solidFill>
+                        <a:srgbClr val="E0E0E0"/>
+                      </a:solidFill>
+                      <a:prstDash val="solid"/>
+                      <a:round/>
+                      <a:headEnd type="none" w="med" len="med"/>
+                      <a:tailEnd type="none" w="med" len="med"/>
+                    </a:lnB>
+                    <a:solidFill>
+                      <a:srgbClr val="FFFFFF"/>
+                    </a:solidFill>
+                  </a:tcPr>
+                </a:tc>
+                <a:tc>
+                  <a:txBody>
+                    <a:bodyPr/>
+                    <a:lstStyle/>
+                    <a:p>
+                      <a:pPr algn="ctr" indent="0" marL="0">
+                        <a:buNone/>
+                      </a:pPr>
+                      <a:r>
+                        <a:rPr lang="en-US" sz="1300" b="1" dirty="0">
+                          <a:solidFill>
+                            <a:srgbClr val="0066CC"/>
+                          </a:solidFill>
+                          <a:latin typeface="Pretendard SemiBold" pitchFamily="34" charset="0"/>
+                          <a:ea typeface="Pretendard SemiBold" pitchFamily="34" charset="-122"/>
+                          <a:cs typeface="Pretendard SemiBold" pitchFamily="34" charset="-120"/>
+                        </a:rPr>
+                        <a:t>확인 필요</a:t>
+                      </a:r>
+                      <a:endParaRPr lang="en-US" sz="1300" dirty="0">
+                        <a:latin typeface="Pretendard SemiBold" charset="0"/>
+                        <a:ea typeface="Pretendard SemiBold" charset="0"/>
+                        <a:cs typeface="Pretendard SemiBold" charset="0"/>
+                      </a:endParaRPr>
+                    </a:p>
+                  </a:txBody>
+                  <a:tcPr marL="76200" marR="76200" marT="50800" marB="50800" anchor="ctr">
+                    <a:lnL w="0" cap="flat" cmpd="sng" algn="ctr">
+                      <a:noFill/>
+                    </a:lnL>
+                    <a:lnR w="0" cap="flat" cmpd="sng" algn="ctr">
+                      <a:noFill/>
+                    </a:lnR>
+                    <a:lnT w="0" cap="flat" cmpd="sng" algn="ctr">
+                      <a:noFill/>
+                    </a:lnT>
+                    <a:lnB w="9525" cap="flat" cmpd="sng" algn="ctr">
+                      <a:solidFill>
+                        <a:srgbClr val="E0E0E0"/>
+                      </a:solidFill>
+                      <a:prstDash val="solid"/>
+                      <a:round/>
+                      <a:headEnd type="none" w="med" len="med"/>
+                      <a:tailEnd type="none" w="med" len="med"/>
+                    </a:lnB>
+                    <a:solidFill>
+                      <a:srgbClr val="FFFFFF"/>
+                    </a:solidFill>
+                  </a:tcPr>
+                </a:tc>
+                <a:tc>
+                  <a:txBody>
+                    <a:bodyPr/>
+                    <a:lstStyle/>
+                    <a:p>
+                      <a:pPr algn="ctr" indent="0" marL="0">
+                        <a:buNone/>
+                      </a:pPr>
+                      <a:r>
+                        <a:rPr lang="en-US" sz="1300" dirty="0">
+                          <a:solidFill>
+                            <a:srgbClr val="7A7A7A"/>
+                          </a:solidFill>
+                          <a:latin typeface="Pretendard" pitchFamily="34" charset="0"/>
+                          <a:ea typeface="Pretendard" pitchFamily="34" charset="-122"/>
+                          <a:cs typeface="Pretendard" pitchFamily="34" charset="-120"/>
+                        </a:rPr>
+                        <a:t>R10</a:t>
                       </a:r>
                       <a:endParaRPr lang="en-US" sz="1300" dirty="0">
                         <a:latin typeface="Pretendard" charset="0"/>
@@ -33456,7 +38352,7 @@
                 <a:ea typeface="Pretendard SemiBold" pitchFamily="34" charset="-122"/>
                 <a:cs typeface="Pretendard SemiBold" pitchFamily="34" charset="-120"/>
               </a:rPr>
-              <a:t>10건</a:t>
+              <a:t>11건</a:t>
             </a:r>
             <a:endParaRPr lang="en-US" sz="2800" dirty="0"/>
           </a:p>
@@ -33557,7 +38453,7 @@
                 <a:ea typeface="Pretendard SemiBold" pitchFamily="34" charset="-122"/>
                 <a:cs typeface="Pretendard SemiBold" pitchFamily="34" charset="-120"/>
               </a:rPr>
-              <a:t>5건</a:t>
+              <a:t>6건</a:t>
             </a:r>
             <a:endParaRPr lang="en-US" sz="2800" dirty="0"/>
           </a:p>
@@ -33759,7 +38655,7 @@
                 <a:ea typeface="Pretendard SemiBold" pitchFamily="34" charset="-122"/>
                 <a:cs typeface="Pretendard SemiBold" pitchFamily="34" charset="-120"/>
               </a:rPr>
-              <a:t>2026-09-29</a:t>
+              <a:t>2026-10-05</a:t>
             </a:r>
             <a:endParaRPr lang="en-US" sz="2800" dirty="0"/>
           </a:p>
@@ -33876,1863 +38772,7 @@
                 <a:ea typeface="Pretendard" pitchFamily="34" charset="-122"/>
                 <a:cs typeface="Pretendard" pitchFamily="34" charset="-120"/>
               </a:rPr>
-              <a:t>28 / 28</a:t>
-            </a:r>
-            <a:endParaRPr lang="en-US" sz="1000" dirty="0"/>
-          </a:p>
-        </p:txBody>
-      </p:sp>
-    </p:spTree>
-  </p:cSld>
-  <p:clrMapOvr>
-    <a:masterClrMapping/>
-  </p:clrMapOvr>
-</p:sld>
-</file>
-
-<file path=ppt/slides/slide3.xml><?xml version="1.0" encoding="utf-8"?>
-<p:sld xmlns:a="http://schemas.openxmlformats.org/drawingml/2006/main" xmlns:r="http://schemas.openxmlformats.org/officeDocument/2006/relationships" xmlns:p="http://schemas.openxmlformats.org/presentationml/2006/main">
-  <p:cSld name="Slide 3">
-    <p:bg>
-      <p:bgPr>
-        <a:solidFill>
-          <a:srgbClr val="F5F5F7"/>
-        </a:solidFill>
-      </p:bgPr>
-    </p:bg>
-    <p:spTree>
-      <p:nvGrpSpPr>
-        <p:cNvPr id="1" name=""/>
-        <p:cNvGrpSpPr/>
-        <p:nvPr/>
-      </p:nvGrpSpPr>
-      <p:grpSpPr>
-        <a:xfrm>
-          <a:off x="0" y="0"/>
-          <a:ext cx="0" cy="0"/>
-          <a:chOff x="0" y="0"/>
-          <a:chExt cx="0" cy="0"/>
-        </a:xfrm>
-      </p:grpSpPr>
-      <p:sp>
-        <p:nvSpPr>
-          <p:cNvPr id="2" name="Text 0"/>
-          <p:cNvSpPr txBox="1"/>
-          <p:nvPr/>
-        </p:nvSpPr>
-        <p:spPr>
-          <a:xfrm>
-            <a:off x="609905" y="320040"/>
-            <a:ext cx="10972800" cy="228600"/>
-          </a:xfrm>
-          <a:prstGeom prst="rect">
-            <a:avLst/>
-          </a:prstGeom>
-          <a:noFill/>
-          <a:ln/>
-        </p:spPr>
-        <p:txBody>
-          <a:bodyPr wrap="square" lIns="0" tIns="0" rIns="0" bIns="0" rtlCol="0" anchor="t"/>
-          <a:lstStyle/>
-          <a:p>
-            <a:pPr indent="0" marL="0">
-              <a:buNone/>
-            </a:pPr>
-            <a:r>
-              <a:rPr lang="en-US" sz="1100" b="1" spc="200" kern="0" dirty="0">
-                <a:solidFill>
-                  <a:srgbClr val="0066CC"/>
-                </a:solidFill>
-                <a:latin typeface="Pretendard SemiBold" pitchFamily="34" charset="0"/>
-                <a:ea typeface="Pretendard SemiBold" pitchFamily="34" charset="-122"/>
-                <a:cs typeface="Pretendard SemiBold" pitchFamily="34" charset="-120"/>
-              </a:rPr>
-              <a:t>01  OVERVIEW</a:t>
-            </a:r>
-            <a:endParaRPr lang="en-US" sz="1100" dirty="0"/>
-          </a:p>
-        </p:txBody>
-      </p:sp>
-      <p:sp>
-        <p:nvSpPr>
-          <p:cNvPr id="3" name="Text 1"/>
-          <p:cNvSpPr txBox="1"/>
-          <p:nvPr/>
-        </p:nvSpPr>
-        <p:spPr>
-          <a:xfrm>
-            <a:off x="609905" y="594360"/>
-            <a:ext cx="10972800" cy="777240"/>
-          </a:xfrm>
-          <a:prstGeom prst="rect">
-            <a:avLst/>
-          </a:prstGeom>
-          <a:noFill/>
-          <a:ln/>
-        </p:spPr>
-        <p:txBody>
-          <a:bodyPr wrap="square" lIns="0" tIns="0" rIns="0" bIns="0" rtlCol="0" anchor="t"/>
-          <a:lstStyle/>
-          <a:p>
-            <a:pPr indent="0" marL="0">
-              <a:buNone/>
-            </a:pPr>
-            <a:r>
-              <a:rPr lang="en-US" sz="4000" dirty="0">
-                <a:solidFill>
-                  <a:srgbClr val="1D1D1F"/>
-                </a:solidFill>
-                <a:latin typeface="Pretendard SemiBold" pitchFamily="34" charset="0"/>
-                <a:ea typeface="Pretendard SemiBold" pitchFamily="34" charset="-122"/>
-                <a:cs typeface="Pretendard SemiBold" pitchFamily="34" charset="-120"/>
-              </a:rPr>
-              <a:t>회차별 이슈 현황</a:t>
-            </a:r>
-            <a:endParaRPr lang="en-US" sz="4000" dirty="0"/>
-          </a:p>
-        </p:txBody>
-      </p:sp>
-      <p:sp>
-        <p:nvSpPr>
-          <p:cNvPr id="4" name="Shape 2"/>
-          <p:cNvSpPr/>
-          <p:nvPr/>
-        </p:nvSpPr>
-        <p:spPr>
-          <a:xfrm>
-            <a:off x="609905" y="1417320"/>
-            <a:ext cx="10972800" cy="0"/>
-          </a:xfrm>
-          <a:prstGeom prst="line">
-            <a:avLst/>
-          </a:prstGeom>
-          <a:noFill/>
-          <a:ln w="9525">
-            <a:solidFill>
-              <a:srgbClr val="E0E0E0"/>
-            </a:solidFill>
-            <a:prstDash val="solid"/>
-          </a:ln>
-        </p:spPr>
-      </p:sp>
-      <p:graphicFrame>
-        <p:nvGraphicFramePr>
-          <p:cNvPr id="5" name="Chart 0" descr=""/>
-          <p:cNvGraphicFramePr/>
-          <p:nvPr/>
-        </p:nvGraphicFramePr>
-        <p:xfrm>
-          <a:off x="518465" y="1600200"/>
-          <a:ext cx="5669280" cy="4480560"/>
-        </p:xfrm>
-        <a:graphic xmlns:a="http://schemas.openxmlformats.org/drawingml/2006/main">
-          <a:graphicData uri="http://schemas.openxmlformats.org/drawingml/2006/chart">
-            <c:chart xmlns:c="http://schemas.openxmlformats.org/drawingml/2006/chart" r:id="rId1"/>
-          </a:graphicData>
-        </a:graphic>
-      </p:graphicFrame>
-      <p:sp>
-        <p:nvSpPr>
-          <p:cNvPr id="6" name="Shape 3"/>
-          <p:cNvSpPr/>
-          <p:nvPr/>
-        </p:nvSpPr>
-        <p:spPr>
-          <a:xfrm>
-            <a:off x="6279185" y="1600200"/>
-            <a:ext cx="5303520" cy="399288"/>
-          </a:xfrm>
-          <a:prstGeom prst="rect">
-            <a:avLst/>
-          </a:prstGeom>
-          <a:solidFill>
-            <a:srgbClr val="FFFFFF"/>
-          </a:solidFill>
-          <a:ln w="9525">
-            <a:solidFill>
-              <a:srgbClr val="E0E0E0"/>
-            </a:solidFill>
-            <a:prstDash val="solid"/>
-          </a:ln>
-        </p:spPr>
-      </p:sp>
-      <p:sp>
-        <p:nvSpPr>
-          <p:cNvPr id="7" name="Text 4"/>
-          <p:cNvSpPr txBox="1"/>
-          <p:nvPr/>
-        </p:nvSpPr>
-        <p:spPr>
-          <a:xfrm>
-            <a:off x="6553505" y="1691640"/>
-            <a:ext cx="3291840" cy="237744"/>
-          </a:xfrm>
-          <a:prstGeom prst="rect">
-            <a:avLst/>
-          </a:prstGeom>
-          <a:noFill/>
-          <a:ln/>
-        </p:spPr>
-        <p:txBody>
-          <a:bodyPr wrap="square" lIns="0" tIns="0" rIns="0" bIns="0" rtlCol="0" anchor="ctr"/>
-          <a:lstStyle/>
-          <a:p>
-            <a:pPr indent="0" marL="0">
-              <a:buNone/>
-            </a:pPr>
-            <a:r>
-              <a:rPr lang="en-US" sz="1200" b="1" dirty="0">
-                <a:solidFill>
-                  <a:srgbClr val="0066CC"/>
-                </a:solidFill>
-                <a:latin typeface="Pretendard SemiBold" pitchFamily="34" charset="0"/>
-                <a:ea typeface="Pretendard SemiBold" pitchFamily="34" charset="-122"/>
-                <a:cs typeface="Pretendard SemiBold" pitchFamily="34" charset="-120"/>
-              </a:rPr>
-              <a:t>R1  2026-09-22   ·   높음 2 · 중간 4 · 낮음 0</a:t>
-            </a:r>
-            <a:endParaRPr lang="en-US" sz="1200" dirty="0"/>
-          </a:p>
-        </p:txBody>
-      </p:sp>
-      <p:sp>
-        <p:nvSpPr>
-          <p:cNvPr id="8" name="Text 5"/>
-          <p:cNvSpPr txBox="1"/>
-          <p:nvPr/>
-        </p:nvSpPr>
-        <p:spPr>
-          <a:xfrm>
-            <a:off x="6553505" y="1929384"/>
-            <a:ext cx="3291840" cy="384048"/>
-          </a:xfrm>
-          <a:prstGeom prst="rect">
-            <a:avLst/>
-          </a:prstGeom>
-          <a:noFill/>
-          <a:ln/>
-        </p:spPr>
-        <p:txBody>
-          <a:bodyPr wrap="square" lIns="0" tIns="0" rIns="0" bIns="0" rtlCol="0" anchor="ctr"/>
-          <a:lstStyle/>
-          <a:p>
-            <a:pPr indent="0" marL="0">
-              <a:buNone/>
-            </a:pPr>
-            <a:r>
-              <a:rPr lang="en-US" sz="1800" dirty="0">
-                <a:solidFill>
-                  <a:srgbClr val="1D1D1F"/>
-                </a:solidFill>
-                <a:latin typeface="Pretendard SemiBold" pitchFamily="34" charset="0"/>
-                <a:ea typeface="Pretendard SemiBold" pitchFamily="34" charset="-122"/>
-                <a:cs typeface="Pretendard SemiBold" pitchFamily="34" charset="-120"/>
-              </a:rPr>
-              <a:t>크기 상한 · 풀트리 밸런스</a:t>
-            </a:r>
-            <a:endParaRPr lang="en-US" sz="1800" dirty="0"/>
-          </a:p>
-        </p:txBody>
-      </p:sp>
-      <p:sp>
-        <p:nvSpPr>
-          <p:cNvPr id="9" name="Text 6"/>
-          <p:cNvSpPr txBox="1"/>
-          <p:nvPr/>
-        </p:nvSpPr>
-        <p:spPr>
-          <a:xfrm>
-            <a:off x="9936785" y="1525524"/>
-            <a:ext cx="1371600" cy="411480"/>
-          </a:xfrm>
-          <a:prstGeom prst="rect">
-            <a:avLst/>
-          </a:prstGeom>
-          <a:noFill/>
-          <a:ln/>
-        </p:spPr>
-        <p:txBody>
-          <a:bodyPr wrap="square" lIns="0" tIns="0" rIns="0" bIns="0" rtlCol="0" anchor="ctr"/>
-          <a:lstStyle/>
-          <a:p>
-            <a:pPr algn="r" indent="0" marL="0">
-              <a:buNone/>
-            </a:pPr>
-            <a:r>
-              <a:rPr lang="en-US" sz="2400" dirty="0">
-                <a:solidFill>
-                  <a:srgbClr val="1D1D1F"/>
-                </a:solidFill>
-                <a:latin typeface="Pretendard SemiBold" pitchFamily="34" charset="0"/>
-                <a:ea typeface="Pretendard SemiBold" pitchFamily="34" charset="-122"/>
-                <a:cs typeface="Pretendard SemiBold" pitchFamily="34" charset="-120"/>
-              </a:rPr>
-              <a:t>6/6</a:t>
-            </a:r>
-            <a:endParaRPr lang="en-US" sz="2400" dirty="0"/>
-          </a:p>
-        </p:txBody>
-      </p:sp>
-      <p:sp>
-        <p:nvSpPr>
-          <p:cNvPr id="10" name="Text 7"/>
-          <p:cNvSpPr txBox="1"/>
-          <p:nvPr/>
-        </p:nvSpPr>
-        <p:spPr>
-          <a:xfrm>
-            <a:off x="9936785" y="1927860"/>
-            <a:ext cx="1371600" cy="201168"/>
-          </a:xfrm>
-          <a:prstGeom prst="rect">
-            <a:avLst/>
-          </a:prstGeom>
-          <a:noFill/>
-          <a:ln/>
-        </p:spPr>
-        <p:txBody>
-          <a:bodyPr wrap="square" lIns="0" tIns="0" rIns="0" bIns="0" rtlCol="0" anchor="ctr"/>
-          <a:lstStyle/>
-          <a:p>
-            <a:pPr algn="r" indent="0" marL="0">
-              <a:buNone/>
-            </a:pPr>
-            <a:r>
-              <a:rPr lang="en-US" sz="1100" dirty="0">
-                <a:solidFill>
-                  <a:srgbClr val="7A7A7A"/>
-                </a:solidFill>
-                <a:latin typeface="Pretendard" pitchFamily="34" charset="0"/>
-                <a:ea typeface="Pretendard" pitchFamily="34" charset="-122"/>
-                <a:cs typeface="Pretendard" pitchFamily="34" charset="-120"/>
-              </a:rPr>
-              <a:t>수정</a:t>
-            </a:r>
-            <a:endParaRPr lang="en-US" sz="1100" dirty="0"/>
-          </a:p>
-        </p:txBody>
-      </p:sp>
-      <p:sp>
-        <p:nvSpPr>
-          <p:cNvPr id="11" name="Shape 8"/>
-          <p:cNvSpPr/>
-          <p:nvPr/>
-        </p:nvSpPr>
-        <p:spPr>
-          <a:xfrm>
-            <a:off x="6279185" y="2127504"/>
-            <a:ext cx="5303520" cy="399288"/>
-          </a:xfrm>
-          <a:prstGeom prst="rect">
-            <a:avLst/>
-          </a:prstGeom>
-          <a:solidFill>
-            <a:srgbClr val="FFFFFF"/>
-          </a:solidFill>
-          <a:ln w="9525">
-            <a:solidFill>
-              <a:srgbClr val="E0E0E0"/>
-            </a:solidFill>
-            <a:prstDash val="solid"/>
-          </a:ln>
-        </p:spPr>
-      </p:sp>
-      <p:sp>
-        <p:nvSpPr>
-          <p:cNvPr id="12" name="Text 9"/>
-          <p:cNvSpPr txBox="1"/>
-          <p:nvPr/>
-        </p:nvSpPr>
-        <p:spPr>
-          <a:xfrm>
-            <a:off x="6553505" y="2218944"/>
-            <a:ext cx="3291840" cy="237744"/>
-          </a:xfrm>
-          <a:prstGeom prst="rect">
-            <a:avLst/>
-          </a:prstGeom>
-          <a:noFill/>
-          <a:ln/>
-        </p:spPr>
-        <p:txBody>
-          <a:bodyPr wrap="square" lIns="0" tIns="0" rIns="0" bIns="0" rtlCol="0" anchor="ctr"/>
-          <a:lstStyle/>
-          <a:p>
-            <a:pPr indent="0" marL="0">
-              <a:buNone/>
-            </a:pPr>
-            <a:r>
-              <a:rPr lang="en-US" sz="1200" b="1" dirty="0">
-                <a:solidFill>
-                  <a:srgbClr val="0066CC"/>
-                </a:solidFill>
-                <a:latin typeface="Pretendard SemiBold" pitchFamily="34" charset="0"/>
-                <a:ea typeface="Pretendard SemiBold" pitchFamily="34" charset="-122"/>
-                <a:cs typeface="Pretendard SemiBold" pitchFamily="34" charset="-120"/>
-              </a:rPr>
-              <a:t>R2  2026-09-22   ·   높음 4 · 중간 8 · 낮음 2</a:t>
-            </a:r>
-            <a:endParaRPr lang="en-US" sz="1200" dirty="0"/>
-          </a:p>
-        </p:txBody>
-      </p:sp>
-      <p:sp>
-        <p:nvSpPr>
-          <p:cNvPr id="13" name="Text 10"/>
-          <p:cNvSpPr txBox="1"/>
-          <p:nvPr/>
-        </p:nvSpPr>
-        <p:spPr>
-          <a:xfrm>
-            <a:off x="6553505" y="2456688"/>
-            <a:ext cx="3291840" cy="384048"/>
-          </a:xfrm>
-          <a:prstGeom prst="rect">
-            <a:avLst/>
-          </a:prstGeom>
-          <a:noFill/>
-          <a:ln/>
-        </p:spPr>
-        <p:txBody>
-          <a:bodyPr wrap="square" lIns="0" tIns="0" rIns="0" bIns="0" rtlCol="0" anchor="ctr"/>
-          <a:lstStyle/>
-          <a:p>
-            <a:pPr indent="0" marL="0">
-              <a:buNone/>
-            </a:pPr>
-            <a:r>
-              <a:rPr lang="en-US" sz="1800" dirty="0">
-                <a:solidFill>
-                  <a:srgbClr val="1D1D1F"/>
-                </a:solidFill>
-                <a:latin typeface="Pretendard SemiBold" pitchFamily="34" charset="0"/>
-                <a:ea typeface="Pretendard SemiBold" pitchFamily="34" charset="-122"/>
-                <a:cs typeface="Pretendard SemiBold" pitchFamily="34" charset="-120"/>
-              </a:rPr>
-              <a:t>1차 전체 QA</a:t>
-            </a:r>
-            <a:endParaRPr lang="en-US" sz="1800" dirty="0"/>
-          </a:p>
-        </p:txBody>
-      </p:sp>
-      <p:sp>
-        <p:nvSpPr>
-          <p:cNvPr id="14" name="Text 11"/>
-          <p:cNvSpPr txBox="1"/>
-          <p:nvPr/>
-        </p:nvSpPr>
-        <p:spPr>
-          <a:xfrm>
-            <a:off x="9936785" y="2052828"/>
-            <a:ext cx="1371600" cy="411480"/>
-          </a:xfrm>
-          <a:prstGeom prst="rect">
-            <a:avLst/>
-          </a:prstGeom>
-          <a:noFill/>
-          <a:ln/>
-        </p:spPr>
-        <p:txBody>
-          <a:bodyPr wrap="square" lIns="0" tIns="0" rIns="0" bIns="0" rtlCol="0" anchor="ctr"/>
-          <a:lstStyle/>
-          <a:p>
-            <a:pPr algn="r" indent="0" marL="0">
-              <a:buNone/>
-            </a:pPr>
-            <a:r>
-              <a:rPr lang="en-US" sz="2400" dirty="0">
-                <a:solidFill>
-                  <a:srgbClr val="1D1D1F"/>
-                </a:solidFill>
-                <a:latin typeface="Pretendard SemiBold" pitchFamily="34" charset="0"/>
-                <a:ea typeface="Pretendard SemiBold" pitchFamily="34" charset="-122"/>
-                <a:cs typeface="Pretendard SemiBold" pitchFamily="34" charset="-120"/>
-              </a:rPr>
-              <a:t>14/14</a:t>
-            </a:r>
-            <a:endParaRPr lang="en-US" sz="2400" dirty="0"/>
-          </a:p>
-        </p:txBody>
-      </p:sp>
-      <p:sp>
-        <p:nvSpPr>
-          <p:cNvPr id="15" name="Text 12"/>
-          <p:cNvSpPr txBox="1"/>
-          <p:nvPr/>
-        </p:nvSpPr>
-        <p:spPr>
-          <a:xfrm>
-            <a:off x="9936785" y="2455164"/>
-            <a:ext cx="1371600" cy="201168"/>
-          </a:xfrm>
-          <a:prstGeom prst="rect">
-            <a:avLst/>
-          </a:prstGeom>
-          <a:noFill/>
-          <a:ln/>
-        </p:spPr>
-        <p:txBody>
-          <a:bodyPr wrap="square" lIns="0" tIns="0" rIns="0" bIns="0" rtlCol="0" anchor="ctr"/>
-          <a:lstStyle/>
-          <a:p>
-            <a:pPr algn="r" indent="0" marL="0">
-              <a:buNone/>
-            </a:pPr>
-            <a:r>
-              <a:rPr lang="en-US" sz="1100" dirty="0">
-                <a:solidFill>
-                  <a:srgbClr val="7A7A7A"/>
-                </a:solidFill>
-                <a:latin typeface="Pretendard" pitchFamily="34" charset="0"/>
-                <a:ea typeface="Pretendard" pitchFamily="34" charset="-122"/>
-                <a:cs typeface="Pretendard" pitchFamily="34" charset="-120"/>
-              </a:rPr>
-              <a:t>수정</a:t>
-            </a:r>
-            <a:endParaRPr lang="en-US" sz="1100" dirty="0"/>
-          </a:p>
-        </p:txBody>
-      </p:sp>
-      <p:sp>
-        <p:nvSpPr>
-          <p:cNvPr id="16" name="Shape 13"/>
-          <p:cNvSpPr/>
-          <p:nvPr/>
-        </p:nvSpPr>
-        <p:spPr>
-          <a:xfrm>
-            <a:off x="6279185" y="2654808"/>
-            <a:ext cx="5303520" cy="399288"/>
-          </a:xfrm>
-          <a:prstGeom prst="rect">
-            <a:avLst/>
-          </a:prstGeom>
-          <a:solidFill>
-            <a:srgbClr val="FFFFFF"/>
-          </a:solidFill>
-          <a:ln w="9525">
-            <a:solidFill>
-              <a:srgbClr val="E0E0E0"/>
-            </a:solidFill>
-            <a:prstDash val="solid"/>
-          </a:ln>
-        </p:spPr>
-      </p:sp>
-      <p:sp>
-        <p:nvSpPr>
-          <p:cNvPr id="17" name="Text 14"/>
-          <p:cNvSpPr txBox="1"/>
-          <p:nvPr/>
-        </p:nvSpPr>
-        <p:spPr>
-          <a:xfrm>
-            <a:off x="6553505" y="2746248"/>
-            <a:ext cx="3291840" cy="237744"/>
-          </a:xfrm>
-          <a:prstGeom prst="rect">
-            <a:avLst/>
-          </a:prstGeom>
-          <a:noFill/>
-          <a:ln/>
-        </p:spPr>
-        <p:txBody>
-          <a:bodyPr wrap="square" lIns="0" tIns="0" rIns="0" bIns="0" rtlCol="0" anchor="ctr"/>
-          <a:lstStyle/>
-          <a:p>
-            <a:pPr indent="0" marL="0">
-              <a:buNone/>
-            </a:pPr>
-            <a:r>
-              <a:rPr lang="en-US" sz="1200" b="1" dirty="0">
-                <a:solidFill>
-                  <a:srgbClr val="0066CC"/>
-                </a:solidFill>
-                <a:latin typeface="Pretendard SemiBold" pitchFamily="34" charset="0"/>
-                <a:ea typeface="Pretendard SemiBold" pitchFamily="34" charset="-122"/>
-                <a:cs typeface="Pretendard SemiBold" pitchFamily="34" charset="-120"/>
-              </a:rPr>
-              <a:t>R3  2026-09-24   ·   높음 1 · 중간 3 · 낮음 3</a:t>
-            </a:r>
-            <a:endParaRPr lang="en-US" sz="1200" dirty="0"/>
-          </a:p>
-        </p:txBody>
-      </p:sp>
-      <p:sp>
-        <p:nvSpPr>
-          <p:cNvPr id="18" name="Text 15"/>
-          <p:cNvSpPr txBox="1"/>
-          <p:nvPr/>
-        </p:nvSpPr>
-        <p:spPr>
-          <a:xfrm>
-            <a:off x="6553505" y="2983992"/>
-            <a:ext cx="3291840" cy="384048"/>
-          </a:xfrm>
-          <a:prstGeom prst="rect">
-            <a:avLst/>
-          </a:prstGeom>
-          <a:noFill/>
-          <a:ln/>
-        </p:spPr>
-        <p:txBody>
-          <a:bodyPr wrap="square" lIns="0" tIns="0" rIns="0" bIns="0" rtlCol="0" anchor="ctr"/>
-          <a:lstStyle/>
-          <a:p>
-            <a:pPr indent="0" marL="0">
-              <a:buNone/>
-            </a:pPr>
-            <a:r>
-              <a:rPr lang="en-US" sz="1800" dirty="0">
-                <a:solidFill>
-                  <a:srgbClr val="1D1D1F"/>
-                </a:solidFill>
-                <a:latin typeface="Pretendard SemiBold" pitchFamily="34" charset="0"/>
-                <a:ea typeface="Pretendard SemiBold" pitchFamily="34" charset="-122"/>
-                <a:cs typeface="Pretendard SemiBold" pitchFamily="34" charset="-120"/>
-              </a:rPr>
-              <a:t>스킬트리 도면형 개편 리뷰</a:t>
-            </a:r>
-            <a:endParaRPr lang="en-US" sz="1800" dirty="0"/>
-          </a:p>
-        </p:txBody>
-      </p:sp>
-      <p:sp>
-        <p:nvSpPr>
-          <p:cNvPr id="19" name="Text 16"/>
-          <p:cNvSpPr txBox="1"/>
-          <p:nvPr/>
-        </p:nvSpPr>
-        <p:spPr>
-          <a:xfrm>
-            <a:off x="9936785" y="2580132"/>
-            <a:ext cx="1371600" cy="411480"/>
-          </a:xfrm>
-          <a:prstGeom prst="rect">
-            <a:avLst/>
-          </a:prstGeom>
-          <a:noFill/>
-          <a:ln/>
-        </p:spPr>
-        <p:txBody>
-          <a:bodyPr wrap="square" lIns="0" tIns="0" rIns="0" bIns="0" rtlCol="0" anchor="ctr"/>
-          <a:lstStyle/>
-          <a:p>
-            <a:pPr algn="r" indent="0" marL="0">
-              <a:buNone/>
-            </a:pPr>
-            <a:r>
-              <a:rPr lang="en-US" sz="2400" dirty="0">
-                <a:solidFill>
-                  <a:srgbClr val="1D1D1F"/>
-                </a:solidFill>
-                <a:latin typeface="Pretendard SemiBold" pitchFamily="34" charset="0"/>
-                <a:ea typeface="Pretendard SemiBold" pitchFamily="34" charset="-122"/>
-                <a:cs typeface="Pretendard SemiBold" pitchFamily="34" charset="-120"/>
-              </a:rPr>
-              <a:t>7/7</a:t>
-            </a:r>
-            <a:endParaRPr lang="en-US" sz="2400" dirty="0"/>
-          </a:p>
-        </p:txBody>
-      </p:sp>
-      <p:sp>
-        <p:nvSpPr>
-          <p:cNvPr id="20" name="Text 17"/>
-          <p:cNvSpPr txBox="1"/>
-          <p:nvPr/>
-        </p:nvSpPr>
-        <p:spPr>
-          <a:xfrm>
-            <a:off x="9936785" y="2982468"/>
-            <a:ext cx="1371600" cy="201168"/>
-          </a:xfrm>
-          <a:prstGeom prst="rect">
-            <a:avLst/>
-          </a:prstGeom>
-          <a:noFill/>
-          <a:ln/>
-        </p:spPr>
-        <p:txBody>
-          <a:bodyPr wrap="square" lIns="0" tIns="0" rIns="0" bIns="0" rtlCol="0" anchor="ctr"/>
-          <a:lstStyle/>
-          <a:p>
-            <a:pPr algn="r" indent="0" marL="0">
-              <a:buNone/>
-            </a:pPr>
-            <a:r>
-              <a:rPr lang="en-US" sz="1100" dirty="0">
-                <a:solidFill>
-                  <a:srgbClr val="7A7A7A"/>
-                </a:solidFill>
-                <a:latin typeface="Pretendard" pitchFamily="34" charset="0"/>
-                <a:ea typeface="Pretendard" pitchFamily="34" charset="-122"/>
-                <a:cs typeface="Pretendard" pitchFamily="34" charset="-120"/>
-              </a:rPr>
-              <a:t>수정</a:t>
-            </a:r>
-            <a:endParaRPr lang="en-US" sz="1100" dirty="0"/>
-          </a:p>
-        </p:txBody>
-      </p:sp>
-      <p:sp>
-        <p:nvSpPr>
-          <p:cNvPr id="21" name="Shape 18"/>
-          <p:cNvSpPr/>
-          <p:nvPr/>
-        </p:nvSpPr>
-        <p:spPr>
-          <a:xfrm>
-            <a:off x="6279185" y="3182112"/>
-            <a:ext cx="5303520" cy="399288"/>
-          </a:xfrm>
-          <a:prstGeom prst="rect">
-            <a:avLst/>
-          </a:prstGeom>
-          <a:solidFill>
-            <a:srgbClr val="FFFFFF"/>
-          </a:solidFill>
-          <a:ln w="9525">
-            <a:solidFill>
-              <a:srgbClr val="E0E0E0"/>
-            </a:solidFill>
-            <a:prstDash val="solid"/>
-          </a:ln>
-        </p:spPr>
-      </p:sp>
-      <p:sp>
-        <p:nvSpPr>
-          <p:cNvPr id="22" name="Text 19"/>
-          <p:cNvSpPr txBox="1"/>
-          <p:nvPr/>
-        </p:nvSpPr>
-        <p:spPr>
-          <a:xfrm>
-            <a:off x="6553505" y="3273552"/>
-            <a:ext cx="3291840" cy="237744"/>
-          </a:xfrm>
-          <a:prstGeom prst="rect">
-            <a:avLst/>
-          </a:prstGeom>
-          <a:noFill/>
-          <a:ln/>
-        </p:spPr>
-        <p:txBody>
-          <a:bodyPr wrap="square" lIns="0" tIns="0" rIns="0" bIns="0" rtlCol="0" anchor="ctr"/>
-          <a:lstStyle/>
-          <a:p>
-            <a:pPr indent="0" marL="0">
-              <a:buNone/>
-            </a:pPr>
-            <a:r>
-              <a:rPr lang="en-US" sz="1200" b="1" dirty="0">
-                <a:solidFill>
-                  <a:srgbClr val="0066CC"/>
-                </a:solidFill>
-                <a:latin typeface="Pretendard SemiBold" pitchFamily="34" charset="0"/>
-                <a:ea typeface="Pretendard SemiBold" pitchFamily="34" charset="-122"/>
-                <a:cs typeface="Pretendard SemiBold" pitchFamily="34" charset="-120"/>
-              </a:rPr>
-              <a:t>R4  2026-09-24   ·   높음 3 · 중간 6 · 낮음 2</a:t>
-            </a:r>
-            <a:endParaRPr lang="en-US" sz="1200" dirty="0"/>
-          </a:p>
-        </p:txBody>
-      </p:sp>
-      <p:sp>
-        <p:nvSpPr>
-          <p:cNvPr id="23" name="Text 20"/>
-          <p:cNvSpPr txBox="1"/>
-          <p:nvPr/>
-        </p:nvSpPr>
-        <p:spPr>
-          <a:xfrm>
-            <a:off x="6553505" y="3511296"/>
-            <a:ext cx="3291840" cy="384048"/>
-          </a:xfrm>
-          <a:prstGeom prst="rect">
-            <a:avLst/>
-          </a:prstGeom>
-          <a:noFill/>
-          <a:ln/>
-        </p:spPr>
-        <p:txBody>
-          <a:bodyPr wrap="square" lIns="0" tIns="0" rIns="0" bIns="0" rtlCol="0" anchor="ctr"/>
-          <a:lstStyle/>
-          <a:p>
-            <a:pPr indent="0" marL="0">
-              <a:buNone/>
-            </a:pPr>
-            <a:r>
-              <a:rPr lang="en-US" sz="1800" dirty="0">
-                <a:solidFill>
-                  <a:srgbClr val="1D1D1F"/>
-                </a:solidFill>
-                <a:latin typeface="Pretendard SemiBold" pitchFamily="34" charset="0"/>
-                <a:ea typeface="Pretendard SemiBold" pitchFamily="34" charset="-122"/>
-                <a:cs typeface="Pretendard SemiBold" pitchFamily="34" charset="-120"/>
-              </a:rPr>
-              <a:t>2차 · 인게임 밸런스와 QA</a:t>
-            </a:r>
-            <a:endParaRPr lang="en-US" sz="1800" dirty="0"/>
-          </a:p>
-        </p:txBody>
-      </p:sp>
-      <p:sp>
-        <p:nvSpPr>
-          <p:cNvPr id="24" name="Text 21"/>
-          <p:cNvSpPr txBox="1"/>
-          <p:nvPr/>
-        </p:nvSpPr>
-        <p:spPr>
-          <a:xfrm>
-            <a:off x="9936785" y="3107436"/>
-            <a:ext cx="1371600" cy="411480"/>
-          </a:xfrm>
-          <a:prstGeom prst="rect">
-            <a:avLst/>
-          </a:prstGeom>
-          <a:noFill/>
-          <a:ln/>
-        </p:spPr>
-        <p:txBody>
-          <a:bodyPr wrap="square" lIns="0" tIns="0" rIns="0" bIns="0" rtlCol="0" anchor="ctr"/>
-          <a:lstStyle/>
-          <a:p>
-            <a:pPr algn="r" indent="0" marL="0">
-              <a:buNone/>
-            </a:pPr>
-            <a:r>
-              <a:rPr lang="en-US" sz="2400" dirty="0">
-                <a:solidFill>
-                  <a:srgbClr val="1D1D1F"/>
-                </a:solidFill>
-                <a:latin typeface="Pretendard SemiBold" pitchFamily="34" charset="0"/>
-                <a:ea typeface="Pretendard SemiBold" pitchFamily="34" charset="-122"/>
-                <a:cs typeface="Pretendard SemiBold" pitchFamily="34" charset="-120"/>
-              </a:rPr>
-              <a:t>11/11</a:t>
-            </a:r>
-            <a:endParaRPr lang="en-US" sz="2400" dirty="0"/>
-          </a:p>
-        </p:txBody>
-      </p:sp>
-      <p:sp>
-        <p:nvSpPr>
-          <p:cNvPr id="25" name="Text 22"/>
-          <p:cNvSpPr txBox="1"/>
-          <p:nvPr/>
-        </p:nvSpPr>
-        <p:spPr>
-          <a:xfrm>
-            <a:off x="9936785" y="3509772"/>
-            <a:ext cx="1371600" cy="201168"/>
-          </a:xfrm>
-          <a:prstGeom prst="rect">
-            <a:avLst/>
-          </a:prstGeom>
-          <a:noFill/>
-          <a:ln/>
-        </p:spPr>
-        <p:txBody>
-          <a:bodyPr wrap="square" lIns="0" tIns="0" rIns="0" bIns="0" rtlCol="0" anchor="ctr"/>
-          <a:lstStyle/>
-          <a:p>
-            <a:pPr algn="r" indent="0" marL="0">
-              <a:buNone/>
-            </a:pPr>
-            <a:r>
-              <a:rPr lang="en-US" sz="1100" dirty="0">
-                <a:solidFill>
-                  <a:srgbClr val="7A7A7A"/>
-                </a:solidFill>
-                <a:latin typeface="Pretendard" pitchFamily="34" charset="0"/>
-                <a:ea typeface="Pretendard" pitchFamily="34" charset="-122"/>
-                <a:cs typeface="Pretendard" pitchFamily="34" charset="-120"/>
-              </a:rPr>
-              <a:t>수정</a:t>
-            </a:r>
-            <a:endParaRPr lang="en-US" sz="1100" dirty="0"/>
-          </a:p>
-        </p:txBody>
-      </p:sp>
-      <p:sp>
-        <p:nvSpPr>
-          <p:cNvPr id="26" name="Shape 23"/>
-          <p:cNvSpPr/>
-          <p:nvPr/>
-        </p:nvSpPr>
-        <p:spPr>
-          <a:xfrm>
-            <a:off x="6279185" y="3709416"/>
-            <a:ext cx="5303520" cy="399288"/>
-          </a:xfrm>
-          <a:prstGeom prst="rect">
-            <a:avLst/>
-          </a:prstGeom>
-          <a:solidFill>
-            <a:srgbClr val="FFFFFF"/>
-          </a:solidFill>
-          <a:ln w="9525">
-            <a:solidFill>
-              <a:srgbClr val="E0E0E0"/>
-            </a:solidFill>
-            <a:prstDash val="solid"/>
-          </a:ln>
-        </p:spPr>
-      </p:sp>
-      <p:sp>
-        <p:nvSpPr>
-          <p:cNvPr id="27" name="Text 24"/>
-          <p:cNvSpPr txBox="1"/>
-          <p:nvPr/>
-        </p:nvSpPr>
-        <p:spPr>
-          <a:xfrm>
-            <a:off x="6553505" y="3800856"/>
-            <a:ext cx="3291840" cy="237744"/>
-          </a:xfrm>
-          <a:prstGeom prst="rect">
-            <a:avLst/>
-          </a:prstGeom>
-          <a:noFill/>
-          <a:ln/>
-        </p:spPr>
-        <p:txBody>
-          <a:bodyPr wrap="square" lIns="0" tIns="0" rIns="0" bIns="0" rtlCol="0" anchor="ctr"/>
-          <a:lstStyle/>
-          <a:p>
-            <a:pPr indent="0" marL="0">
-              <a:buNone/>
-            </a:pPr>
-            <a:r>
-              <a:rPr lang="en-US" sz="1200" b="1" dirty="0">
-                <a:solidFill>
-                  <a:srgbClr val="0066CC"/>
-                </a:solidFill>
-                <a:latin typeface="Pretendard SemiBold" pitchFamily="34" charset="0"/>
-                <a:ea typeface="Pretendard SemiBold" pitchFamily="34" charset="-122"/>
-                <a:cs typeface="Pretendard SemiBold" pitchFamily="34" charset="-120"/>
-              </a:rPr>
-              <a:t>R5  2026-09-24   ·   높음 0 · 중간 3 · 낮음 3</a:t>
-            </a:r>
-            <a:endParaRPr lang="en-US" sz="1200" dirty="0"/>
-          </a:p>
-        </p:txBody>
-      </p:sp>
-      <p:sp>
-        <p:nvSpPr>
-          <p:cNvPr id="28" name="Text 25"/>
-          <p:cNvSpPr txBox="1"/>
-          <p:nvPr/>
-        </p:nvSpPr>
-        <p:spPr>
-          <a:xfrm>
-            <a:off x="6553505" y="4038600"/>
-            <a:ext cx="3291840" cy="384048"/>
-          </a:xfrm>
-          <a:prstGeom prst="rect">
-            <a:avLst/>
-          </a:prstGeom>
-          <a:noFill/>
-          <a:ln/>
-        </p:spPr>
-        <p:txBody>
-          <a:bodyPr wrap="square" lIns="0" tIns="0" rIns="0" bIns="0" rtlCol="0" anchor="ctr"/>
-          <a:lstStyle/>
-          <a:p>
-            <a:pPr indent="0" marL="0">
-              <a:buNone/>
-            </a:pPr>
-            <a:r>
-              <a:rPr lang="en-US" sz="1800" dirty="0">
-                <a:solidFill>
-                  <a:srgbClr val="1D1D1F"/>
-                </a:solidFill>
-                <a:latin typeface="Pretendard SemiBold" pitchFamily="34" charset="0"/>
-                <a:ea typeface="Pretendard SemiBold" pitchFamily="34" charset="-122"/>
-                <a:cs typeface="Pretendard SemiBold" pitchFamily="34" charset="-120"/>
-              </a:rPr>
-              <a:t>타이틀 · 설정 화면 추가 리뷰</a:t>
-            </a:r>
-            <a:endParaRPr lang="en-US" sz="1800" dirty="0"/>
-          </a:p>
-        </p:txBody>
-      </p:sp>
-      <p:sp>
-        <p:nvSpPr>
-          <p:cNvPr id="29" name="Text 26"/>
-          <p:cNvSpPr txBox="1"/>
-          <p:nvPr/>
-        </p:nvSpPr>
-        <p:spPr>
-          <a:xfrm>
-            <a:off x="9936785" y="3634740"/>
-            <a:ext cx="1371600" cy="411480"/>
-          </a:xfrm>
-          <a:prstGeom prst="rect">
-            <a:avLst/>
-          </a:prstGeom>
-          <a:noFill/>
-          <a:ln/>
-        </p:spPr>
-        <p:txBody>
-          <a:bodyPr wrap="square" lIns="0" tIns="0" rIns="0" bIns="0" rtlCol="0" anchor="ctr"/>
-          <a:lstStyle/>
-          <a:p>
-            <a:pPr algn="r" indent="0" marL="0">
-              <a:buNone/>
-            </a:pPr>
-            <a:r>
-              <a:rPr lang="en-US" sz="2400" dirty="0">
-                <a:solidFill>
-                  <a:srgbClr val="1D1D1F"/>
-                </a:solidFill>
-                <a:latin typeface="Pretendard SemiBold" pitchFamily="34" charset="0"/>
-                <a:ea typeface="Pretendard SemiBold" pitchFamily="34" charset="-122"/>
-                <a:cs typeface="Pretendard SemiBold" pitchFamily="34" charset="-120"/>
-              </a:rPr>
-              <a:t>6/6</a:t>
-            </a:r>
-            <a:endParaRPr lang="en-US" sz="2400" dirty="0"/>
-          </a:p>
-        </p:txBody>
-      </p:sp>
-      <p:sp>
-        <p:nvSpPr>
-          <p:cNvPr id="30" name="Text 27"/>
-          <p:cNvSpPr txBox="1"/>
-          <p:nvPr/>
-        </p:nvSpPr>
-        <p:spPr>
-          <a:xfrm>
-            <a:off x="9936785" y="4037076"/>
-            <a:ext cx="1371600" cy="201168"/>
-          </a:xfrm>
-          <a:prstGeom prst="rect">
-            <a:avLst/>
-          </a:prstGeom>
-          <a:noFill/>
-          <a:ln/>
-        </p:spPr>
-        <p:txBody>
-          <a:bodyPr wrap="square" lIns="0" tIns="0" rIns="0" bIns="0" rtlCol="0" anchor="ctr"/>
-          <a:lstStyle/>
-          <a:p>
-            <a:pPr algn="r" indent="0" marL="0">
-              <a:buNone/>
-            </a:pPr>
-            <a:r>
-              <a:rPr lang="en-US" sz="1100" dirty="0">
-                <a:solidFill>
-                  <a:srgbClr val="7A7A7A"/>
-                </a:solidFill>
-                <a:latin typeface="Pretendard" pitchFamily="34" charset="0"/>
-                <a:ea typeface="Pretendard" pitchFamily="34" charset="-122"/>
-                <a:cs typeface="Pretendard" pitchFamily="34" charset="-120"/>
-              </a:rPr>
-              <a:t>수정</a:t>
-            </a:r>
-            <a:endParaRPr lang="en-US" sz="1100" dirty="0"/>
-          </a:p>
-        </p:txBody>
-      </p:sp>
-      <p:sp>
-        <p:nvSpPr>
-          <p:cNvPr id="31" name="Shape 28"/>
-          <p:cNvSpPr/>
-          <p:nvPr/>
-        </p:nvSpPr>
-        <p:spPr>
-          <a:xfrm>
-            <a:off x="6279185" y="4236720"/>
-            <a:ext cx="5303520" cy="399288"/>
-          </a:xfrm>
-          <a:prstGeom prst="rect">
-            <a:avLst/>
-          </a:prstGeom>
-          <a:solidFill>
-            <a:srgbClr val="FFFFFF"/>
-          </a:solidFill>
-          <a:ln w="9525">
-            <a:solidFill>
-              <a:srgbClr val="E0E0E0"/>
-            </a:solidFill>
-            <a:prstDash val="solid"/>
-          </a:ln>
-        </p:spPr>
-      </p:sp>
-      <p:sp>
-        <p:nvSpPr>
-          <p:cNvPr id="32" name="Text 29"/>
-          <p:cNvSpPr txBox="1"/>
-          <p:nvPr/>
-        </p:nvSpPr>
-        <p:spPr>
-          <a:xfrm>
-            <a:off x="6553505" y="4328160"/>
-            <a:ext cx="3291840" cy="237744"/>
-          </a:xfrm>
-          <a:prstGeom prst="rect">
-            <a:avLst/>
-          </a:prstGeom>
-          <a:noFill/>
-          <a:ln/>
-        </p:spPr>
-        <p:txBody>
-          <a:bodyPr wrap="square" lIns="0" tIns="0" rIns="0" bIns="0" rtlCol="0" anchor="ctr"/>
-          <a:lstStyle/>
-          <a:p>
-            <a:pPr indent="0" marL="0">
-              <a:buNone/>
-            </a:pPr>
-            <a:r>
-              <a:rPr lang="en-US" sz="1200" b="1" dirty="0">
-                <a:solidFill>
-                  <a:srgbClr val="0066CC"/>
-                </a:solidFill>
-                <a:latin typeface="Pretendard SemiBold" pitchFamily="34" charset="0"/>
-                <a:ea typeface="Pretendard SemiBold" pitchFamily="34" charset="-122"/>
-                <a:cs typeface="Pretendard SemiBold" pitchFamily="34" charset="-120"/>
-              </a:rPr>
-              <a:t>R6  2026-09-24   ·   높음 1 · 중간 3 · 낮음 3</a:t>
-            </a:r>
-            <a:endParaRPr lang="en-US" sz="1200" dirty="0"/>
-          </a:p>
-        </p:txBody>
-      </p:sp>
-      <p:sp>
-        <p:nvSpPr>
-          <p:cNvPr id="33" name="Text 30"/>
-          <p:cNvSpPr txBox="1"/>
-          <p:nvPr/>
-        </p:nvSpPr>
-        <p:spPr>
-          <a:xfrm>
-            <a:off x="6553505" y="4565904"/>
-            <a:ext cx="3291840" cy="384048"/>
-          </a:xfrm>
-          <a:prstGeom prst="rect">
-            <a:avLst/>
-          </a:prstGeom>
-          <a:noFill/>
-          <a:ln/>
-        </p:spPr>
-        <p:txBody>
-          <a:bodyPr wrap="square" lIns="0" tIns="0" rIns="0" bIns="0" rtlCol="0" anchor="ctr"/>
-          <a:lstStyle/>
-          <a:p>
-            <a:pPr indent="0" marL="0">
-              <a:buNone/>
-            </a:pPr>
-            <a:r>
-              <a:rPr lang="en-US" sz="1800" dirty="0">
-                <a:solidFill>
-                  <a:srgbClr val="1D1D1F"/>
-                </a:solidFill>
-                <a:latin typeface="Pretendard SemiBold" pitchFamily="34" charset="0"/>
-                <a:ea typeface="Pretendard SemiBold" pitchFamily="34" charset="-122"/>
-                <a:cs typeface="Pretendard SemiBold" pitchFamily="34" charset="-120"/>
-              </a:rPr>
-              <a:t>에디터 실행 테스트</a:t>
-            </a:r>
-            <a:endParaRPr lang="en-US" sz="1800" dirty="0"/>
-          </a:p>
-        </p:txBody>
-      </p:sp>
-      <p:sp>
-        <p:nvSpPr>
-          <p:cNvPr id="34" name="Text 31"/>
-          <p:cNvSpPr txBox="1"/>
-          <p:nvPr/>
-        </p:nvSpPr>
-        <p:spPr>
-          <a:xfrm>
-            <a:off x="9936785" y="4162044"/>
-            <a:ext cx="1371600" cy="411480"/>
-          </a:xfrm>
-          <a:prstGeom prst="rect">
-            <a:avLst/>
-          </a:prstGeom>
-          <a:noFill/>
-          <a:ln/>
-        </p:spPr>
-        <p:txBody>
-          <a:bodyPr wrap="square" lIns="0" tIns="0" rIns="0" bIns="0" rtlCol="0" anchor="ctr"/>
-          <a:lstStyle/>
-          <a:p>
-            <a:pPr algn="r" indent="0" marL="0">
-              <a:buNone/>
-            </a:pPr>
-            <a:r>
-              <a:rPr lang="en-US" sz="2400" dirty="0">
-                <a:solidFill>
-                  <a:srgbClr val="1D1D1F"/>
-                </a:solidFill>
-                <a:latin typeface="Pretendard SemiBold" pitchFamily="34" charset="0"/>
-                <a:ea typeface="Pretendard SemiBold" pitchFamily="34" charset="-122"/>
-                <a:cs typeface="Pretendard SemiBold" pitchFamily="34" charset="-120"/>
-              </a:rPr>
-              <a:t>7/7</a:t>
-            </a:r>
-            <a:endParaRPr lang="en-US" sz="2400" dirty="0"/>
-          </a:p>
-        </p:txBody>
-      </p:sp>
-      <p:sp>
-        <p:nvSpPr>
-          <p:cNvPr id="35" name="Text 32"/>
-          <p:cNvSpPr txBox="1"/>
-          <p:nvPr/>
-        </p:nvSpPr>
-        <p:spPr>
-          <a:xfrm>
-            <a:off x="9936785" y="4564380"/>
-            <a:ext cx="1371600" cy="201168"/>
-          </a:xfrm>
-          <a:prstGeom prst="rect">
-            <a:avLst/>
-          </a:prstGeom>
-          <a:noFill/>
-          <a:ln/>
-        </p:spPr>
-        <p:txBody>
-          <a:bodyPr wrap="square" lIns="0" tIns="0" rIns="0" bIns="0" rtlCol="0" anchor="ctr"/>
-          <a:lstStyle/>
-          <a:p>
-            <a:pPr algn="r" indent="0" marL="0">
-              <a:buNone/>
-            </a:pPr>
-            <a:r>
-              <a:rPr lang="en-US" sz="1100" dirty="0">
-                <a:solidFill>
-                  <a:srgbClr val="7A7A7A"/>
-                </a:solidFill>
-                <a:latin typeface="Pretendard" pitchFamily="34" charset="0"/>
-                <a:ea typeface="Pretendard" pitchFamily="34" charset="-122"/>
-                <a:cs typeface="Pretendard" pitchFamily="34" charset="-120"/>
-              </a:rPr>
-              <a:t>수정</a:t>
-            </a:r>
-            <a:endParaRPr lang="en-US" sz="1100" dirty="0"/>
-          </a:p>
-        </p:txBody>
-      </p:sp>
-      <p:sp>
-        <p:nvSpPr>
-          <p:cNvPr id="36" name="Shape 33"/>
-          <p:cNvSpPr/>
-          <p:nvPr/>
-        </p:nvSpPr>
-        <p:spPr>
-          <a:xfrm>
-            <a:off x="6279185" y="4764024"/>
-            <a:ext cx="5303520" cy="399288"/>
-          </a:xfrm>
-          <a:prstGeom prst="rect">
-            <a:avLst/>
-          </a:prstGeom>
-          <a:solidFill>
-            <a:srgbClr val="FFFFFF"/>
-          </a:solidFill>
-          <a:ln w="9525">
-            <a:solidFill>
-              <a:srgbClr val="E0E0E0"/>
-            </a:solidFill>
-            <a:prstDash val="solid"/>
-          </a:ln>
-        </p:spPr>
-      </p:sp>
-      <p:sp>
-        <p:nvSpPr>
-          <p:cNvPr id="37" name="Text 34"/>
-          <p:cNvSpPr txBox="1"/>
-          <p:nvPr/>
-        </p:nvSpPr>
-        <p:spPr>
-          <a:xfrm>
-            <a:off x="6553505" y="4855464"/>
-            <a:ext cx="3291840" cy="237744"/>
-          </a:xfrm>
-          <a:prstGeom prst="rect">
-            <a:avLst/>
-          </a:prstGeom>
-          <a:noFill/>
-          <a:ln/>
-        </p:spPr>
-        <p:txBody>
-          <a:bodyPr wrap="square" lIns="0" tIns="0" rIns="0" bIns="0" rtlCol="0" anchor="ctr"/>
-          <a:lstStyle/>
-          <a:p>
-            <a:pPr indent="0" marL="0">
-              <a:buNone/>
-            </a:pPr>
-            <a:r>
-              <a:rPr lang="en-US" sz="1200" b="1" dirty="0">
-                <a:solidFill>
-                  <a:srgbClr val="0066CC"/>
-                </a:solidFill>
-                <a:latin typeface="Pretendard SemiBold" pitchFamily="34" charset="0"/>
-                <a:ea typeface="Pretendard SemiBold" pitchFamily="34" charset="-122"/>
-                <a:cs typeface="Pretendard SemiBold" pitchFamily="34" charset="-120"/>
-              </a:rPr>
-              <a:t>R7  2026-09-25   ·   높음 1 · 중간 1 · 낮음 1</a:t>
-            </a:r>
-            <a:endParaRPr lang="en-US" sz="1200" dirty="0"/>
-          </a:p>
-        </p:txBody>
-      </p:sp>
-      <p:sp>
-        <p:nvSpPr>
-          <p:cNvPr id="38" name="Text 35"/>
-          <p:cNvSpPr txBox="1"/>
-          <p:nvPr/>
-        </p:nvSpPr>
-        <p:spPr>
-          <a:xfrm>
-            <a:off x="6553505" y="5093208"/>
-            <a:ext cx="3291840" cy="384048"/>
-          </a:xfrm>
-          <a:prstGeom prst="rect">
-            <a:avLst/>
-          </a:prstGeom>
-          <a:noFill/>
-          <a:ln/>
-        </p:spPr>
-        <p:txBody>
-          <a:bodyPr wrap="square" lIns="0" tIns="0" rIns="0" bIns="0" rtlCol="0" anchor="ctr"/>
-          <a:lstStyle/>
-          <a:p>
-            <a:pPr indent="0" marL="0">
-              <a:buNone/>
-            </a:pPr>
-            <a:r>
-              <a:rPr lang="en-US" sz="1800" dirty="0">
-                <a:solidFill>
-                  <a:srgbClr val="1D1D1F"/>
-                </a:solidFill>
-                <a:latin typeface="Pretendard SemiBold" pitchFamily="34" charset="0"/>
-                <a:ea typeface="Pretendard SemiBold" pitchFamily="34" charset="-122"/>
-                <a:cs typeface="Pretendard SemiBold" pitchFamily="34" charset="-120"/>
-              </a:rPr>
-              <a:t>장애물 통과 · 인게임 배경</a:t>
-            </a:r>
-            <a:endParaRPr lang="en-US" sz="1800" dirty="0"/>
-          </a:p>
-        </p:txBody>
-      </p:sp>
-      <p:sp>
-        <p:nvSpPr>
-          <p:cNvPr id="39" name="Text 36"/>
-          <p:cNvSpPr txBox="1"/>
-          <p:nvPr/>
-        </p:nvSpPr>
-        <p:spPr>
-          <a:xfrm>
-            <a:off x="9936785" y="4689348"/>
-            <a:ext cx="1371600" cy="411480"/>
-          </a:xfrm>
-          <a:prstGeom prst="rect">
-            <a:avLst/>
-          </a:prstGeom>
-          <a:noFill/>
-          <a:ln/>
-        </p:spPr>
-        <p:txBody>
-          <a:bodyPr wrap="square" lIns="0" tIns="0" rIns="0" bIns="0" rtlCol="0" anchor="ctr"/>
-          <a:lstStyle/>
-          <a:p>
-            <a:pPr algn="r" indent="0" marL="0">
-              <a:buNone/>
-            </a:pPr>
-            <a:r>
-              <a:rPr lang="en-US" sz="2400" dirty="0">
-                <a:solidFill>
-                  <a:srgbClr val="1D1D1F"/>
-                </a:solidFill>
-                <a:latin typeface="Pretendard SemiBold" pitchFamily="34" charset="0"/>
-                <a:ea typeface="Pretendard SemiBold" pitchFamily="34" charset="-122"/>
-                <a:cs typeface="Pretendard SemiBold" pitchFamily="34" charset="-120"/>
-              </a:rPr>
-              <a:t>3/3</a:t>
-            </a:r>
-            <a:endParaRPr lang="en-US" sz="2400" dirty="0"/>
-          </a:p>
-        </p:txBody>
-      </p:sp>
-      <p:sp>
-        <p:nvSpPr>
-          <p:cNvPr id="40" name="Text 37"/>
-          <p:cNvSpPr txBox="1"/>
-          <p:nvPr/>
-        </p:nvSpPr>
-        <p:spPr>
-          <a:xfrm>
-            <a:off x="9936785" y="5091684"/>
-            <a:ext cx="1371600" cy="201168"/>
-          </a:xfrm>
-          <a:prstGeom prst="rect">
-            <a:avLst/>
-          </a:prstGeom>
-          <a:noFill/>
-          <a:ln/>
-        </p:spPr>
-        <p:txBody>
-          <a:bodyPr wrap="square" lIns="0" tIns="0" rIns="0" bIns="0" rtlCol="0" anchor="ctr"/>
-          <a:lstStyle/>
-          <a:p>
-            <a:pPr algn="r" indent="0" marL="0">
-              <a:buNone/>
-            </a:pPr>
-            <a:r>
-              <a:rPr lang="en-US" sz="1100" dirty="0">
-                <a:solidFill>
-                  <a:srgbClr val="7A7A7A"/>
-                </a:solidFill>
-                <a:latin typeface="Pretendard" pitchFamily="34" charset="0"/>
-                <a:ea typeface="Pretendard" pitchFamily="34" charset="-122"/>
-                <a:cs typeface="Pretendard" pitchFamily="34" charset="-120"/>
-              </a:rPr>
-              <a:t>수정</a:t>
-            </a:r>
-            <a:endParaRPr lang="en-US" sz="1100" dirty="0"/>
-          </a:p>
-        </p:txBody>
-      </p:sp>
-      <p:sp>
-        <p:nvSpPr>
-          <p:cNvPr id="41" name="Shape 38"/>
-          <p:cNvSpPr/>
-          <p:nvPr/>
-        </p:nvSpPr>
-        <p:spPr>
-          <a:xfrm>
-            <a:off x="6279185" y="5291328"/>
-            <a:ext cx="5303520" cy="399288"/>
-          </a:xfrm>
-          <a:prstGeom prst="rect">
-            <a:avLst/>
-          </a:prstGeom>
-          <a:solidFill>
-            <a:srgbClr val="FFFFFF"/>
-          </a:solidFill>
-          <a:ln w="9525">
-            <a:solidFill>
-              <a:srgbClr val="E0E0E0"/>
-            </a:solidFill>
-            <a:prstDash val="solid"/>
-          </a:ln>
-        </p:spPr>
-      </p:sp>
-      <p:sp>
-        <p:nvSpPr>
-          <p:cNvPr id="42" name="Text 39"/>
-          <p:cNvSpPr txBox="1"/>
-          <p:nvPr/>
-        </p:nvSpPr>
-        <p:spPr>
-          <a:xfrm>
-            <a:off x="6553505" y="5382768"/>
-            <a:ext cx="3291840" cy="237744"/>
-          </a:xfrm>
-          <a:prstGeom prst="rect">
-            <a:avLst/>
-          </a:prstGeom>
-          <a:noFill/>
-          <a:ln/>
-        </p:spPr>
-        <p:txBody>
-          <a:bodyPr wrap="square" lIns="0" tIns="0" rIns="0" bIns="0" rtlCol="0" anchor="ctr"/>
-          <a:lstStyle/>
-          <a:p>
-            <a:pPr indent="0" marL="0">
-              <a:buNone/>
-            </a:pPr>
-            <a:r>
-              <a:rPr lang="en-US" sz="1200" b="1" dirty="0">
-                <a:solidFill>
-                  <a:srgbClr val="0066CC"/>
-                </a:solidFill>
-                <a:latin typeface="Pretendard SemiBold" pitchFamily="34" charset="0"/>
-                <a:ea typeface="Pretendard SemiBold" pitchFamily="34" charset="-122"/>
-                <a:cs typeface="Pretendard SemiBold" pitchFamily="34" charset="-120"/>
-              </a:rPr>
-              <a:t>R8  2026-09-25   ·   높음 0 · 중간 3 · 낮음 4</a:t>
-            </a:r>
-            <a:endParaRPr lang="en-US" sz="1200" dirty="0"/>
-          </a:p>
-        </p:txBody>
-      </p:sp>
-      <p:sp>
-        <p:nvSpPr>
-          <p:cNvPr id="43" name="Text 40"/>
-          <p:cNvSpPr txBox="1"/>
-          <p:nvPr/>
-        </p:nvSpPr>
-        <p:spPr>
-          <a:xfrm>
-            <a:off x="6553505" y="5620512"/>
-            <a:ext cx="3291840" cy="384048"/>
-          </a:xfrm>
-          <a:prstGeom prst="rect">
-            <a:avLst/>
-          </a:prstGeom>
-          <a:noFill/>
-          <a:ln/>
-        </p:spPr>
-        <p:txBody>
-          <a:bodyPr wrap="square" lIns="0" tIns="0" rIns="0" bIns="0" rtlCol="0" anchor="ctr"/>
-          <a:lstStyle/>
-          <a:p>
-            <a:pPr indent="0" marL="0">
-              <a:buNone/>
-            </a:pPr>
-            <a:r>
-              <a:rPr lang="en-US" sz="1800" dirty="0">
-                <a:solidFill>
-                  <a:srgbClr val="1D1D1F"/>
-                </a:solidFill>
-                <a:latin typeface="Pretendard SemiBold" pitchFamily="34" charset="0"/>
-                <a:ea typeface="Pretendard SemiBold" pitchFamily="34" charset="-122"/>
-                <a:cs typeface="Pretendard SemiBold" pitchFamily="34" charset="-120"/>
-              </a:rPr>
-              <a:t>3차 버그 점검</a:t>
-            </a:r>
-            <a:endParaRPr lang="en-US" sz="1800" dirty="0"/>
-          </a:p>
-        </p:txBody>
-      </p:sp>
-      <p:sp>
-        <p:nvSpPr>
-          <p:cNvPr id="44" name="Text 41"/>
-          <p:cNvSpPr txBox="1"/>
-          <p:nvPr/>
-        </p:nvSpPr>
-        <p:spPr>
-          <a:xfrm>
-            <a:off x="9936785" y="5216652"/>
-            <a:ext cx="1371600" cy="411480"/>
-          </a:xfrm>
-          <a:prstGeom prst="rect">
-            <a:avLst/>
-          </a:prstGeom>
-          <a:noFill/>
-          <a:ln/>
-        </p:spPr>
-        <p:txBody>
-          <a:bodyPr wrap="square" lIns="0" tIns="0" rIns="0" bIns="0" rtlCol="0" anchor="ctr"/>
-          <a:lstStyle/>
-          <a:p>
-            <a:pPr algn="r" indent="0" marL="0">
-              <a:buNone/>
-            </a:pPr>
-            <a:r>
-              <a:rPr lang="en-US" sz="2400" dirty="0">
-                <a:solidFill>
-                  <a:srgbClr val="1D1D1F"/>
-                </a:solidFill>
-                <a:latin typeface="Pretendard SemiBold" pitchFamily="34" charset="0"/>
-                <a:ea typeface="Pretendard SemiBold" pitchFamily="34" charset="-122"/>
-                <a:cs typeface="Pretendard SemiBold" pitchFamily="34" charset="-120"/>
-              </a:rPr>
-              <a:t>7/7</a:t>
-            </a:r>
-            <a:endParaRPr lang="en-US" sz="2400" dirty="0"/>
-          </a:p>
-        </p:txBody>
-      </p:sp>
-      <p:sp>
-        <p:nvSpPr>
-          <p:cNvPr id="45" name="Text 42"/>
-          <p:cNvSpPr txBox="1"/>
-          <p:nvPr/>
-        </p:nvSpPr>
-        <p:spPr>
-          <a:xfrm>
-            <a:off x="9936785" y="5618988"/>
-            <a:ext cx="1371600" cy="201168"/>
-          </a:xfrm>
-          <a:prstGeom prst="rect">
-            <a:avLst/>
-          </a:prstGeom>
-          <a:noFill/>
-          <a:ln/>
-        </p:spPr>
-        <p:txBody>
-          <a:bodyPr wrap="square" lIns="0" tIns="0" rIns="0" bIns="0" rtlCol="0" anchor="ctr"/>
-          <a:lstStyle/>
-          <a:p>
-            <a:pPr algn="r" indent="0" marL="0">
-              <a:buNone/>
-            </a:pPr>
-            <a:r>
-              <a:rPr lang="en-US" sz="1100" dirty="0">
-                <a:solidFill>
-                  <a:srgbClr val="7A7A7A"/>
-                </a:solidFill>
-                <a:latin typeface="Pretendard" pitchFamily="34" charset="0"/>
-                <a:ea typeface="Pretendard" pitchFamily="34" charset="-122"/>
-                <a:cs typeface="Pretendard" pitchFamily="34" charset="-120"/>
-              </a:rPr>
-              <a:t>수정</a:t>
-            </a:r>
-            <a:endParaRPr lang="en-US" sz="1100" dirty="0"/>
-          </a:p>
-        </p:txBody>
-      </p:sp>
-      <p:sp>
-        <p:nvSpPr>
-          <p:cNvPr id="46" name="Shape 43"/>
-          <p:cNvSpPr/>
-          <p:nvPr/>
-        </p:nvSpPr>
-        <p:spPr>
-          <a:xfrm>
-            <a:off x="6279185" y="5818632"/>
-            <a:ext cx="5303520" cy="399288"/>
-          </a:xfrm>
-          <a:prstGeom prst="rect">
-            <a:avLst/>
-          </a:prstGeom>
-          <a:solidFill>
-            <a:srgbClr val="FFFFFF"/>
-          </a:solidFill>
-          <a:ln w="9525">
-            <a:solidFill>
-              <a:srgbClr val="E0E0E0"/>
-            </a:solidFill>
-            <a:prstDash val="solid"/>
-          </a:ln>
-        </p:spPr>
-      </p:sp>
-      <p:sp>
-        <p:nvSpPr>
-          <p:cNvPr id="47" name="Text 44"/>
-          <p:cNvSpPr txBox="1"/>
-          <p:nvPr/>
-        </p:nvSpPr>
-        <p:spPr>
-          <a:xfrm>
-            <a:off x="6553505" y="5910072"/>
-            <a:ext cx="3291840" cy="237744"/>
-          </a:xfrm>
-          <a:prstGeom prst="rect">
-            <a:avLst/>
-          </a:prstGeom>
-          <a:noFill/>
-          <a:ln/>
-        </p:spPr>
-        <p:txBody>
-          <a:bodyPr wrap="square" lIns="0" tIns="0" rIns="0" bIns="0" rtlCol="0" anchor="ctr"/>
-          <a:lstStyle/>
-          <a:p>
-            <a:pPr indent="0" marL="0">
-              <a:buNone/>
-            </a:pPr>
-            <a:r>
-              <a:rPr lang="en-US" sz="1200" b="1" dirty="0">
-                <a:solidFill>
-                  <a:srgbClr val="0066CC"/>
-                </a:solidFill>
-                <a:latin typeface="Pretendard SemiBold" pitchFamily="34" charset="0"/>
-                <a:ea typeface="Pretendard SemiBold" pitchFamily="34" charset="-122"/>
-                <a:cs typeface="Pretendard SemiBold" pitchFamily="34" charset="-120"/>
-              </a:rPr>
-              <a:t>R9  2026-09-29   ·   높음 1 · 중간 2 · 낮음 2</a:t>
-            </a:r>
-            <a:endParaRPr lang="en-US" sz="1200" dirty="0"/>
-          </a:p>
-        </p:txBody>
-      </p:sp>
-      <p:sp>
-        <p:nvSpPr>
-          <p:cNvPr id="48" name="Text 45"/>
-          <p:cNvSpPr txBox="1"/>
-          <p:nvPr/>
-        </p:nvSpPr>
-        <p:spPr>
-          <a:xfrm>
-            <a:off x="6553505" y="6147816"/>
-            <a:ext cx="3291840" cy="384048"/>
-          </a:xfrm>
-          <a:prstGeom prst="rect">
-            <a:avLst/>
-          </a:prstGeom>
-          <a:noFill/>
-          <a:ln/>
-        </p:spPr>
-        <p:txBody>
-          <a:bodyPr wrap="square" lIns="0" tIns="0" rIns="0" bIns="0" rtlCol="0" anchor="ctr"/>
-          <a:lstStyle/>
-          <a:p>
-            <a:pPr indent="0" marL="0">
-              <a:buNone/>
-            </a:pPr>
-            <a:r>
-              <a:rPr lang="en-US" sz="1800" dirty="0">
-                <a:solidFill>
-                  <a:srgbClr val="1D1D1F"/>
-                </a:solidFill>
-                <a:latin typeface="Pretendard SemiBold" pitchFamily="34" charset="0"/>
-                <a:ea typeface="Pretendard SemiBold" pitchFamily="34" charset="-122"/>
-                <a:cs typeface="Pretendard SemiBold" pitchFamily="34" charset="-120"/>
-              </a:rPr>
-              <a:t>스킬트리 메인 화면 개편 · 칸별 고정 가격</a:t>
-            </a:r>
-            <a:endParaRPr lang="en-US" sz="1800" dirty="0"/>
-          </a:p>
-        </p:txBody>
-      </p:sp>
-      <p:sp>
-        <p:nvSpPr>
-          <p:cNvPr id="49" name="Text 46"/>
-          <p:cNvSpPr txBox="1"/>
-          <p:nvPr/>
-        </p:nvSpPr>
-        <p:spPr>
-          <a:xfrm>
-            <a:off x="9936785" y="5743956"/>
-            <a:ext cx="1371600" cy="411480"/>
-          </a:xfrm>
-          <a:prstGeom prst="rect">
-            <a:avLst/>
-          </a:prstGeom>
-          <a:noFill/>
-          <a:ln/>
-        </p:spPr>
-        <p:txBody>
-          <a:bodyPr wrap="square" lIns="0" tIns="0" rIns="0" bIns="0" rtlCol="0" anchor="ctr"/>
-          <a:lstStyle/>
-          <a:p>
-            <a:pPr algn="r" indent="0" marL="0">
-              <a:buNone/>
-            </a:pPr>
-            <a:r>
-              <a:rPr lang="en-US" sz="2400" dirty="0">
-                <a:solidFill>
-                  <a:srgbClr val="1D1D1F"/>
-                </a:solidFill>
-                <a:latin typeface="Pretendard SemiBold" pitchFamily="34" charset="0"/>
-                <a:ea typeface="Pretendard SemiBold" pitchFamily="34" charset="-122"/>
-                <a:cs typeface="Pretendard SemiBold" pitchFamily="34" charset="-120"/>
-              </a:rPr>
-              <a:t>5/5</a:t>
-            </a:r>
-            <a:endParaRPr lang="en-US" sz="2400" dirty="0"/>
-          </a:p>
-        </p:txBody>
-      </p:sp>
-      <p:sp>
-        <p:nvSpPr>
-          <p:cNvPr id="50" name="Text 47"/>
-          <p:cNvSpPr txBox="1"/>
-          <p:nvPr/>
-        </p:nvSpPr>
-        <p:spPr>
-          <a:xfrm>
-            <a:off x="9936785" y="6146292"/>
-            <a:ext cx="1371600" cy="201168"/>
-          </a:xfrm>
-          <a:prstGeom prst="rect">
-            <a:avLst/>
-          </a:prstGeom>
-          <a:noFill/>
-          <a:ln/>
-        </p:spPr>
-        <p:txBody>
-          <a:bodyPr wrap="square" lIns="0" tIns="0" rIns="0" bIns="0" rtlCol="0" anchor="ctr"/>
-          <a:lstStyle/>
-          <a:p>
-            <a:pPr algn="r" indent="0" marL="0">
-              <a:buNone/>
-            </a:pPr>
-            <a:r>
-              <a:rPr lang="en-US" sz="1100" dirty="0">
-                <a:solidFill>
-                  <a:srgbClr val="7A7A7A"/>
-                </a:solidFill>
-                <a:latin typeface="Pretendard" pitchFamily="34" charset="0"/>
-                <a:ea typeface="Pretendard" pitchFamily="34" charset="-122"/>
-                <a:cs typeface="Pretendard" pitchFamily="34" charset="-120"/>
-              </a:rPr>
-              <a:t>수정</a:t>
-            </a:r>
-            <a:endParaRPr lang="en-US" sz="1100" dirty="0"/>
-          </a:p>
-        </p:txBody>
-      </p:sp>
-      <p:sp>
-        <p:nvSpPr>
-          <p:cNvPr id="51" name="Text 48"/>
-          <p:cNvSpPr txBox="1"/>
-          <p:nvPr/>
-        </p:nvSpPr>
-        <p:spPr>
-          <a:xfrm>
-            <a:off x="609905" y="6446520"/>
-            <a:ext cx="5486400" cy="274320"/>
-          </a:xfrm>
-          <a:prstGeom prst="rect">
-            <a:avLst/>
-          </a:prstGeom>
-          <a:noFill/>
-          <a:ln/>
-        </p:spPr>
-        <p:txBody>
-          <a:bodyPr wrap="square" lIns="0" tIns="0" rIns="0" bIns="0" rtlCol="0" anchor="ctr"/>
-          <a:lstStyle/>
-          <a:p>
-            <a:pPr indent="0" marL="0">
-              <a:buNone/>
-            </a:pPr>
-            <a:r>
-              <a:rPr lang="en-US" sz="1000" spc="200" kern="0" dirty="0">
-                <a:solidFill>
-                  <a:srgbClr val="7A7A7A"/>
-                </a:solidFill>
-                <a:latin typeface="Pretendard" pitchFamily="34" charset="0"/>
-                <a:ea typeface="Pretendard" pitchFamily="34" charset="-122"/>
-                <a:cs typeface="Pretendard" pitchFamily="34" charset="-120"/>
-              </a:rPr>
-              <a:t>QA REPORT  ·  FISH GAME</a:t>
-            </a:r>
-            <a:endParaRPr lang="en-US" sz="1000" dirty="0"/>
-          </a:p>
-        </p:txBody>
-      </p:sp>
-      <p:sp>
-        <p:nvSpPr>
-          <p:cNvPr id="52" name="Text 49"/>
-          <p:cNvSpPr txBox="1"/>
-          <p:nvPr/>
-        </p:nvSpPr>
-        <p:spPr>
-          <a:xfrm>
-            <a:off x="10515600" y="6446520"/>
-            <a:ext cx="1066190" cy="274320"/>
-          </a:xfrm>
-          <a:prstGeom prst="rect">
-            <a:avLst/>
-          </a:prstGeom>
-          <a:noFill/>
-          <a:ln/>
-        </p:spPr>
-        <p:txBody>
-          <a:bodyPr wrap="square" lIns="0" tIns="0" rIns="0" bIns="0" rtlCol="0" anchor="ctr"/>
-          <a:lstStyle/>
-          <a:p>
-            <a:pPr algn="r" indent="0" marL="0">
-              <a:buNone/>
-            </a:pPr>
-            <a:r>
-              <a:rPr lang="en-US" sz="1000" dirty="0">
-                <a:solidFill>
-                  <a:srgbClr val="7A7A7A"/>
-                </a:solidFill>
-                <a:latin typeface="Pretendard" pitchFamily="34" charset="0"/>
-                <a:ea typeface="Pretendard" pitchFamily="34" charset="-122"/>
-                <a:cs typeface="Pretendard" pitchFamily="34" charset="-120"/>
-              </a:rPr>
-              <a:t>03 / 28</a:t>
+              <a:t>30 / 30</a:t>
             </a:r>
             <a:endParaRPr lang="en-US" sz="1000" dirty="0"/>
           </a:p>
@@ -36639,7 +39679,7 @@
                 <a:ea typeface="Pretendard" pitchFamily="34" charset="-122"/>
                 <a:cs typeface="Pretendard" pitchFamily="34" charset="-120"/>
               </a:rPr>
-              <a:t>04 / 28</a:t>
+              <a:t>04 / 30</a:t>
             </a:r>
             <a:endParaRPr lang="en-US" sz="1000" dirty="0"/>
           </a:p>
@@ -39028,7 +42068,7 @@
                 <a:ea typeface="Pretendard" pitchFamily="34" charset="-122"/>
                 <a:cs typeface="Pretendard" pitchFamily="34" charset="-120"/>
               </a:rPr>
-              <a:t>05 / 28</a:t>
+              <a:t>05 / 30</a:t>
             </a:r>
             <a:endParaRPr lang="en-US" sz="1000" dirty="0"/>
           </a:p>
@@ -39779,7 +42819,7 @@
                 <a:ea typeface="Pretendard" pitchFamily="34" charset="-122"/>
                 <a:cs typeface="Pretendard" pitchFamily="34" charset="-120"/>
               </a:rPr>
-              <a:t>06 / 28</a:t>
+              <a:t>06 / 30</a:t>
             </a:r>
             <a:endParaRPr lang="en-US" sz="1000" dirty="0"/>
           </a:p>
@@ -42039,7 +45079,7 @@
                 <a:ea typeface="Pretendard" pitchFamily="34" charset="-122"/>
                 <a:cs typeface="Pretendard" pitchFamily="34" charset="-120"/>
               </a:rPr>
-              <a:t>07 / 28</a:t>
+              <a:t>07 / 30</a:t>
             </a:r>
             <a:endParaRPr lang="en-US" sz="1000" dirty="0"/>
           </a:p>
@@ -44299,7 +47339,7 @@
                 <a:ea typeface="Pretendard" pitchFamily="34" charset="-122"/>
                 <a:cs typeface="Pretendard" pitchFamily="34" charset="-120"/>
               </a:rPr>
-              <a:t>08 / 28</a:t>
+              <a:t>08 / 30</a:t>
             </a:r>
             <a:endParaRPr lang="en-US" sz="1000" dirty="0"/>
           </a:p>
@@ -45206,7 +48246,7 @@
                 <a:ea typeface="Pretendard" pitchFamily="34" charset="-122"/>
                 <a:cs typeface="Pretendard" pitchFamily="34" charset="-120"/>
               </a:rPr>
-              <a:t>09 / 28</a:t>
+              <a:t>09 / 30</a:t>
             </a:r>
             <a:endParaRPr lang="en-US" sz="1000" dirty="0"/>
           </a:p>
